--- a/docs/Beyond_the_Savior.pptx
+++ b/docs/Beyond_the_Savior.pptx
@@ -21,9 +21,10 @@
     <p:sldId id="269" r:id="rId15"/>
     <p:sldId id="270" r:id="rId16"/>
     <p:sldId id="271" r:id="rId17"/>
+    <p:sldId id="272" r:id="rId18"/>
   </p:sldIdLst>
   <p:notesMasterIdLst>
-    <p:notesMasterId r:id="rId18"/>
+    <p:notesMasterId r:id="rId19"/>
   </p:notesMasterIdLst>
   <p:sldSz cx="12192000" cy="6858000"/>
   <p:notesSz cx="6858000" cy="12192000"/>
@@ -212,13 +213,13 @@
                 <c:formatCode>General</c:formatCode>
                 <c:ptCount val="3"/>
                 <c:pt idx="0">
-                  <c:v>95</c:v>
+                  <c:v>93</c:v>
                 </c:pt>
                 <c:pt idx="1">
                   <c:v>95</c:v>
                 </c:pt>
                 <c:pt idx="2">
-                  <c:v>35</c:v>
+                  <c:v>53</c:v>
                 </c:pt>
               </c:numCache>
             </c:numRef>
@@ -302,13 +303,13 @@
                 <c:formatCode>General</c:formatCode>
                 <c:ptCount val="3"/>
                 <c:pt idx="0">
-                  <c:v>15</c:v>
+                  <c:v>17</c:v>
                 </c:pt>
                 <c:pt idx="1">
                   <c:v>15</c:v>
                 </c:pt>
                 <c:pt idx="2">
-                  <c:v>65</c:v>
+                  <c:v>53</c:v>
                 </c:pt>
               </c:numCache>
             </c:numRef>
@@ -1540,6 +1541,94 @@
 </p:notes>
 </file>
 
+<file path=ppt/notesSlides/notesSlide17.xml><?xml version="1.0" encoding="utf-8"?>
+<p:notes xmlns:a="http://schemas.openxmlformats.org/drawingml/2006/main" xmlns:r="http://schemas.openxmlformats.org/officeDocument/2006/relationships" xmlns:p="http://schemas.openxmlformats.org/presentationml/2006/main">
+  <p:cSld>
+    <p:spTree>
+      <p:nvGrpSpPr>
+        <p:cNvPr id="1" name=""/>
+        <p:cNvGrpSpPr/>
+        <p:nvPr/>
+      </p:nvGrpSpPr>
+      <p:grpSpPr>
+        <a:xfrm>
+          <a:off x="0" y="0"/>
+          <a:ext cx="0" cy="0"/>
+          <a:chOff x="0" y="0"/>
+          <a:chExt cx="0" cy="0"/>
+        </a:xfrm>
+      </p:grpSpPr>
+      <p:sp>
+        <p:nvSpPr>
+          <p:cNvPr id="2" name="Slide Image Placeholder 1"/>
+          <p:cNvSpPr>
+            <a:spLocks noGrp="1" noRot="1" noChangeAspect="1"/>
+          </p:cNvSpPr>
+          <p:nvPr>
+            <p:ph type="sldImg"/>
+          </p:nvPr>
+        </p:nvSpPr>
+        <p:spPr/>
+      </p:sp>
+      <p:sp>
+        <p:nvSpPr>
+          <p:cNvPr id="3" name="Notes Placeholder 2"/>
+          <p:cNvSpPr>
+            <a:spLocks noGrp="1"/>
+          </p:cNvSpPr>
+          <p:nvPr>
+            <p:ph type="body" idx="1"/>
+          </p:nvPr>
+        </p:nvSpPr>
+        <p:spPr/>
+        <p:txBody>
+          <a:bodyPr/>
+          <a:lstStyle/>
+          <a:p>
+            <a:r>
+              <a:rPr lang="en-US" dirty="0"/>
+              <a:t/>
+            </a:r>
+            <a:endParaRPr lang="en-US" dirty="0"/>
+          </a:p>
+        </p:txBody>
+      </p:sp>
+      <p:sp>
+        <p:nvSpPr>
+          <p:cNvPr id="4" name="Slide Number Placeholder 3"/>
+          <p:cNvSpPr>
+            <a:spLocks noGrp="1"/>
+          </p:cNvSpPr>
+          <p:nvPr>
+            <p:ph type="sldNum" sz="quarter" idx="10"/>
+          </p:nvPr>
+        </p:nvSpPr>
+        <p:spPr/>
+        <p:txBody>
+          <a:bodyPr/>
+          <a:lstStyle/>
+          <a:p>
+            <a:fld id="{F7021451-1387-4CA6-816F-3879F97B5CBC}" type="slidenum">
+              <a:rPr lang="en-US"/>
+              <a:t>17</a:t>
+            </a:fld>
+            <a:endParaRPr lang="en-US"/>
+          </a:p>
+        </p:txBody>
+      </p:sp>
+    </p:spTree>
+    <p:extLst>
+      <p:ext uri="{BB962C8B-B14F-4D97-AF65-F5344CB8AC3E}">
+        <p14:creationId xmlns:p14="http://schemas.microsoft.com/office/powerpoint/2010/main" val="1024086991"/>
+      </p:ext>
+    </p:extLst>
+  </p:cSld>
+  <p:clrMapOvr>
+    <a:masterClrMapping/>
+  </p:clrMapOvr>
+</p:notes>
+</file>
+
 <file path=ppt/notesSlides/notesSlide2.xml><?xml version="1.0" encoding="utf-8"?>
 <p:notes xmlns:a="http://schemas.openxmlformats.org/drawingml/2006/main" xmlns:r="http://schemas.openxmlformats.org/officeDocument/2006/relationships" xmlns:p="http://schemas.openxmlformats.org/presentationml/2006/main">
   <p:cSld>
@@ -4844,7 +4933,7 @@
                 <a:ea typeface="Yu Gothic" pitchFamily="34" charset="-122"/>
                 <a:cs typeface="Yu Gothic" pitchFamily="34" charset="-120"/>
               </a:rPr>
-              <a:t>Anthropic APIによる本番シミュレーション1回分の実測値（data/scores_*.json）</a:t>
+              <a:t>各条件5回ずつ計15回実行した平均値（data/scores_*_aggregate.json）</a:t>
             </a:r>
             <a:endParaRPr lang="en-US" sz="1400" dirty="0"/>
           </a:p>
@@ -4903,8 +4992,47 @@
         </p:nvSpPr>
         <p:spPr>
           <a:xfrm>
-            <a:off x="7589520" y="1847088"/>
-            <a:ext cx="1371600" cy="914400"/>
+            <a:off x="7543800" y="1847088"/>
+            <a:ext cx="1600200" cy="914400"/>
+          </a:xfrm>
+          <a:prstGeom prst="rect">
+            <a:avLst/>
+          </a:prstGeom>
+          <a:noFill/>
+          <a:ln/>
+        </p:spPr>
+        <p:txBody>
+          <a:bodyPr wrap="square" lIns="0" tIns="0" rIns="0" bIns="0" rtlCol="0" anchor="ctr"/>
+          <a:lstStyle/>
+          <a:p>
+            <a:pPr algn="ctr" indent="0" marL="0">
+              <a:buNone/>
+            </a:pPr>
+            <a:r>
+              <a:rPr lang="en-US" sz="2600" b="1" dirty="0">
+                <a:solidFill>
+                  <a:srgbClr val="E2665A"/>
+                </a:solidFill>
+                <a:latin typeface="Yu Gothic" pitchFamily="34" charset="0"/>
+                <a:ea typeface="Yu Gothic" pitchFamily="34" charset="-122"/>
+                <a:cs typeface="Yu Gothic" pitchFamily="34" charset="-120"/>
+              </a:rPr>
+              <a:t>± 0.0</a:t>
+            </a:r>
+            <a:endParaRPr lang="en-US" sz="2600" dirty="0"/>
+          </a:p>
+        </p:txBody>
+      </p:sp>
+      <p:sp>
+        <p:nvSpPr>
+          <p:cNvPr id="7" name="Text 4"/>
+          <p:cNvSpPr/>
+          <p:nvPr/>
+        </p:nvSpPr>
+        <p:spPr>
+          <a:xfrm>
+            <a:off x="9235440" y="1883664"/>
+            <a:ext cx="2286000" cy="457200"/>
           </a:xfrm>
           <a:prstGeom prst="rect">
             <a:avLst/>
@@ -4920,46 +5048,7 @@
               <a:buNone/>
             </a:pPr>
             <a:r>
-              <a:rPr lang="en-US" sz="3400" b="1" dirty="0">
-                <a:solidFill>
-                  <a:srgbClr val="1BAF7A"/>
-                </a:solidFill>
-                <a:latin typeface="Yu Gothic" pitchFamily="34" charset="0"/>
-                <a:ea typeface="Yu Gothic" pitchFamily="34" charset="-122"/>
-                <a:cs typeface="Yu Gothic" pitchFamily="34" charset="-120"/>
-              </a:rPr>
-              <a:t>35%</a:t>
-            </a:r>
-            <a:endParaRPr lang="en-US" sz="3400" dirty="0"/>
-          </a:p>
-        </p:txBody>
-      </p:sp>
-      <p:sp>
-        <p:nvSpPr>
-          <p:cNvPr id="7" name="Text 4"/>
-          <p:cNvSpPr/>
-          <p:nvPr/>
-        </p:nvSpPr>
-        <p:spPr>
-          <a:xfrm>
-            <a:off x="9006840" y="1883664"/>
-            <a:ext cx="2514600" cy="457200"/>
-          </a:xfrm>
-          <a:prstGeom prst="rect">
-            <a:avLst/>
-          </a:prstGeom>
-          <a:noFill/>
-          <a:ln/>
-        </p:spPr>
-        <p:txBody>
-          <a:bodyPr wrap="square" lIns="0" tIns="0" rIns="0" bIns="0" rtlCol="0" anchor="ctr"/>
-          <a:lstStyle/>
-          <a:p>
-            <a:pPr indent="0" marL="0">
-              <a:buNone/>
-            </a:pPr>
-            <a:r>
-              <a:rPr lang="en-US" sz="1250" b="1" dirty="0">
+              <a:rPr lang="en-US" sz="1200" b="1" dirty="0">
                 <a:solidFill>
                   <a:srgbClr val="FFFFFF"/>
                 </a:solidFill>
@@ -4967,9 +5056,9 @@
                 <a:ea typeface="Yu Gothic" pitchFamily="34" charset="-122"/>
                 <a:cs typeface="Yu Gothic" pitchFamily="34" charset="-120"/>
               </a:rPr>
-              <a:t>条件Cの救済者負荷</a:t>
-            </a:r>
-            <a:endParaRPr lang="en-US" sz="1250" dirty="0"/>
+              <a:t>条件Bの標準偏差</a:t>
+            </a:r>
+            <a:endParaRPr lang="en-US" sz="1200" dirty="0"/>
           </a:p>
         </p:txBody>
       </p:sp>
@@ -4981,8 +5070,8 @@
         </p:nvSpPr>
         <p:spPr>
           <a:xfrm>
-            <a:off x="9006840" y="2304288"/>
-            <a:ext cx="2514600" cy="502920"/>
+            <a:off x="9235440" y="2286000"/>
+            <a:ext cx="2286000" cy="530352"/>
           </a:xfrm>
           <a:prstGeom prst="rect">
             <a:avLst/>
@@ -5001,7 +5090,7 @@
               <a:buNone/>
             </a:pPr>
             <a:r>
-              <a:rPr lang="en-US" sz="1050" dirty="0">
+              <a:rPr lang="en-US" sz="1000" dirty="0">
                 <a:solidFill>
                   <a:srgbClr val="9AA4C0"/>
                 </a:solidFill>
@@ -5009,9 +5098,9 @@
                 <a:ea typeface="Yu Gothic" pitchFamily="34" charset="-122"/>
                 <a:cs typeface="Yu Gothic" pitchFamily="34" charset="-120"/>
               </a:rPr>
-              <a:t>A/Bの95%から3分の1近くまで低下</a:t>
-            </a:r>
-            <a:endParaRPr lang="en-US" sz="1050" dirty="0"/>
+              <a:t>5回とも完全に同じ点数。依存は確実に再現される</a:t>
+            </a:r>
+            <a:endParaRPr lang="en-US" sz="1000" dirty="0"/>
           </a:p>
         </p:txBody>
       </p:sp>
@@ -5052,8 +5141,47 @@
         </p:nvSpPr>
         <p:spPr>
           <a:xfrm>
-            <a:off x="7589520" y="3172968"/>
-            <a:ext cx="1371600" cy="914400"/>
+            <a:off x="7543800" y="3172968"/>
+            <a:ext cx="1600200" cy="914400"/>
+          </a:xfrm>
+          <a:prstGeom prst="rect">
+            <a:avLst/>
+          </a:prstGeom>
+          <a:noFill/>
+          <a:ln/>
+        </p:spPr>
+        <p:txBody>
+          <a:bodyPr wrap="square" lIns="0" tIns="0" rIns="0" bIns="0" rtlCol="0" anchor="ctr"/>
+          <a:lstStyle/>
+          <a:p>
+            <a:pPr algn="ctr" indent="0" marL="0">
+              <a:buNone/>
+            </a:pPr>
+            <a:r>
+              <a:rPr lang="en-US" sz="2600" b="1" dirty="0">
+                <a:solidFill>
+                  <a:srgbClr val="E8A33D"/>
+                </a:solidFill>
+                <a:latin typeface="Yu Gothic" pitchFamily="34" charset="0"/>
+                <a:ea typeface="Yu Gothic" pitchFamily="34" charset="-122"/>
+                <a:cs typeface="Yu Gothic" pitchFamily="34" charset="-120"/>
+              </a:rPr>
+              <a:t>± 25.9</a:t>
+            </a:r>
+            <a:endParaRPr lang="en-US" sz="2600" dirty="0"/>
+          </a:p>
+        </p:txBody>
+      </p:sp>
+      <p:sp>
+        <p:nvSpPr>
+          <p:cNvPr id="11" name="Text 8"/>
+          <p:cNvSpPr/>
+          <p:nvPr/>
+        </p:nvSpPr>
+        <p:spPr>
+          <a:xfrm>
+            <a:off x="9235440" y="3209544"/>
+            <a:ext cx="2286000" cy="457200"/>
           </a:xfrm>
           <a:prstGeom prst="rect">
             <a:avLst/>
@@ -5069,46 +5197,7 @@
               <a:buNone/>
             </a:pPr>
             <a:r>
-              <a:rPr lang="en-US" sz="3400" b="1" dirty="0">
-                <a:solidFill>
-                  <a:srgbClr val="1BAF7A"/>
-                </a:solidFill>
-                <a:latin typeface="Yu Gothic" pitchFamily="34" charset="0"/>
-                <a:ea typeface="Yu Gothic" pitchFamily="34" charset="-122"/>
-                <a:cs typeface="Yu Gothic" pitchFamily="34" charset="-120"/>
-              </a:rPr>
-              <a:t>65</a:t>
-            </a:r>
-            <a:endParaRPr lang="en-US" sz="3400" dirty="0"/>
-          </a:p>
-        </p:txBody>
-      </p:sp>
-      <p:sp>
-        <p:nvSpPr>
-          <p:cNvPr id="11" name="Text 8"/>
-          <p:cNvSpPr/>
-          <p:nvPr/>
-        </p:nvSpPr>
-        <p:spPr>
-          <a:xfrm>
-            <a:off x="9006840" y="3209544"/>
-            <a:ext cx="2514600" cy="457200"/>
-          </a:xfrm>
-          <a:prstGeom prst="rect">
-            <a:avLst/>
-          </a:prstGeom>
-          <a:noFill/>
-          <a:ln/>
-        </p:spPr>
-        <p:txBody>
-          <a:bodyPr wrap="square" lIns="0" tIns="0" rIns="0" bIns="0" rtlCol="0" anchor="ctr"/>
-          <a:lstStyle/>
-          <a:p>
-            <a:pPr indent="0" marL="0">
-              <a:buNone/>
-            </a:pPr>
-            <a:r>
-              <a:rPr lang="en-US" sz="1250" b="1" dirty="0">
+              <a:rPr lang="en-US" sz="1200" b="1" dirty="0">
                 <a:solidFill>
                   <a:srgbClr val="FFFFFF"/>
                 </a:solidFill>
@@ -5116,9 +5205,9 @@
                 <a:ea typeface="Yu Gothic" pitchFamily="34" charset="-122"/>
                 <a:cs typeface="Yu Gothic" pitchFamily="34" charset="-120"/>
               </a:rPr>
-              <a:t>条件Cの村の自律度スコア</a:t>
-            </a:r>
-            <a:endParaRPr lang="en-US" sz="1250" dirty="0"/>
+              <a:t>条件Cの標準偏差</a:t>
+            </a:r>
+            <a:endParaRPr lang="en-US" sz="1200" dirty="0"/>
           </a:p>
         </p:txBody>
       </p:sp>
@@ -5130,8 +5219,8 @@
         </p:nvSpPr>
         <p:spPr>
           <a:xfrm>
-            <a:off x="9006840" y="3630168"/>
-            <a:ext cx="2514600" cy="502920"/>
+            <a:off x="9235440" y="3611880"/>
+            <a:ext cx="2286000" cy="530352"/>
           </a:xfrm>
           <a:prstGeom prst="rect">
             <a:avLst/>
@@ -5150,7 +5239,7 @@
               <a:buNone/>
             </a:pPr>
             <a:r>
-              <a:rPr lang="en-US" sz="1050" dirty="0">
+              <a:rPr lang="en-US" sz="1000" dirty="0">
                 <a:solidFill>
                   <a:srgbClr val="9AA4C0"/>
                 </a:solidFill>
@@ -5158,9 +5247,9 @@
                 <a:ea typeface="Yu Gothic" pitchFamily="34" charset="-122"/>
                 <a:cs typeface="Yu Gothic" pitchFamily="34" charset="-120"/>
               </a:rPr>
-              <a:t>A/Bの15から4倍以上に上昇</a:t>
-            </a:r>
-            <a:endParaRPr lang="en-US" sz="1050" dirty="0"/>
+              <a:t>同じルールでも結果が大きく割れた</a:t>
+            </a:r>
+            <a:endParaRPr lang="en-US" sz="1000" dirty="0"/>
           </a:p>
         </p:txBody>
       </p:sp>
@@ -5201,8 +5290,47 @@
         </p:nvSpPr>
         <p:spPr>
           <a:xfrm>
-            <a:off x="7589520" y="4498848"/>
-            <a:ext cx="1371600" cy="914400"/>
+            <a:off x="7543800" y="4498848"/>
+            <a:ext cx="1600200" cy="914400"/>
+          </a:xfrm>
+          <a:prstGeom prst="rect">
+            <a:avLst/>
+          </a:prstGeom>
+          <a:noFill/>
+          <a:ln/>
+        </p:spPr>
+        <p:txBody>
+          <a:bodyPr wrap="square" lIns="0" tIns="0" rIns="0" bIns="0" rtlCol="0" anchor="ctr"/>
+          <a:lstStyle/>
+          <a:p>
+            <a:pPr algn="ctr" indent="0" marL="0">
+              <a:buNone/>
+            </a:pPr>
+            <a:r>
+              <a:rPr lang="en-US" sz="2600" b="1" dirty="0">
+                <a:solidFill>
+                  <a:srgbClr val="1BAF7A"/>
+                </a:solidFill>
+                <a:latin typeface="Yu Gothic" pitchFamily="34" charset="0"/>
+                <a:ea typeface="Yu Gothic" pitchFamily="34" charset="-122"/>
+                <a:cs typeface="Yu Gothic" pitchFamily="34" charset="-120"/>
+              </a:rPr>
+              <a:t>0/5</a:t>
+            </a:r>
+            <a:endParaRPr lang="en-US" sz="2600" dirty="0"/>
+          </a:p>
+        </p:txBody>
+      </p:sp>
+      <p:sp>
+        <p:nvSpPr>
+          <p:cNvPr id="15" name="Text 12"/>
+          <p:cNvSpPr/>
+          <p:nvPr/>
+        </p:nvSpPr>
+        <p:spPr>
+          <a:xfrm>
+            <a:off x="9235440" y="4535424"/>
+            <a:ext cx="2286000" cy="457200"/>
           </a:xfrm>
           <a:prstGeom prst="rect">
             <a:avLst/>
@@ -5218,46 +5346,7 @@
               <a:buNone/>
             </a:pPr>
             <a:r>
-              <a:rPr lang="en-US" sz="3400" b="1" dirty="0">
-                <a:solidFill>
-                  <a:srgbClr val="E2665A"/>
-                </a:solidFill>
-                <a:latin typeface="Yu Gothic" pitchFamily="34" charset="0"/>
-                <a:ea typeface="Yu Gothic" pitchFamily="34" charset="-122"/>
-                <a:cs typeface="Yu Gothic" pitchFamily="34" charset="-120"/>
-              </a:rPr>
-              <a:t>90</a:t>
-            </a:r>
-            <a:endParaRPr lang="en-US" sz="3400" dirty="0"/>
-          </a:p>
-        </p:txBody>
-      </p:sp>
-      <p:sp>
-        <p:nvSpPr>
-          <p:cNvPr id="15" name="Text 12"/>
-          <p:cNvSpPr/>
-          <p:nvPr/>
-        </p:nvSpPr>
-        <p:spPr>
-          <a:xfrm>
-            <a:off x="9006840" y="4535424"/>
-            <a:ext cx="2514600" cy="457200"/>
-          </a:xfrm>
-          <a:prstGeom prst="rect">
-            <a:avLst/>
-          </a:prstGeom>
-          <a:noFill/>
-          <a:ln/>
-        </p:spPr>
-        <p:txBody>
-          <a:bodyPr wrap="square" lIns="0" tIns="0" rIns="0" bIns="0" rtlCol="0" anchor="ctr"/>
-          <a:lstStyle/>
-          <a:p>
-            <a:pPr indent="0" marL="0">
-              <a:buNone/>
-            </a:pPr>
-            <a:r>
-              <a:rPr lang="en-US" sz="1250" b="1" dirty="0">
+              <a:rPr lang="en-US" sz="1200" b="1" dirty="0">
                 <a:solidFill>
                   <a:srgbClr val="FFFFFF"/>
                 </a:solidFill>
@@ -5265,9 +5354,9 @@
                 <a:ea typeface="Yu Gothic" pitchFamily="34" charset="-122"/>
                 <a:cs typeface="Yu Gothic" pitchFamily="34" charset="-120"/>
               </a:rPr>
-              <a:t>条件A/Bの救済者依存度</a:t>
-            </a:r>
-            <a:endParaRPr lang="en-US" sz="1250" dirty="0"/>
+              <a:t>範囲の重なり</a:t>
+            </a:r>
+            <a:endParaRPr lang="en-US" sz="1200" dirty="0"/>
           </a:p>
         </p:txBody>
       </p:sp>
@@ -5279,8 +5368,8 @@
         </p:nvSpPr>
         <p:spPr>
           <a:xfrm>
-            <a:off x="9006840" y="4956048"/>
-            <a:ext cx="2514600" cy="502920"/>
+            <a:off x="9235440" y="4937760"/>
+            <a:ext cx="2286000" cy="530352"/>
           </a:xfrm>
           <a:prstGeom prst="rect">
             <a:avLst/>
@@ -5299,7 +5388,7 @@
               <a:buNone/>
             </a:pPr>
             <a:r>
-              <a:rPr lang="en-US" sz="1050" dirty="0">
+              <a:rPr lang="en-US" sz="1000" dirty="0">
                 <a:solidFill>
                   <a:srgbClr val="9AA4C0"/>
                 </a:solidFill>
@@ -5307,9 +5396,9 @@
                 <a:ea typeface="Yu Gothic" pitchFamily="34" charset="-122"/>
                 <a:cs typeface="Yu Gothic" pitchFamily="34" charset="-120"/>
               </a:rPr>
-              <a:t>危機の起きないAでもBと同水準</a:t>
-            </a:r>
-            <a:endParaRPr lang="en-US" sz="1050" dirty="0"/>
+              <a:t>Cの最悪回でもA/Bの最良回より良い（4指標）</a:t>
+            </a:r>
+            <a:endParaRPr lang="en-US" sz="1000" dirty="0"/>
           </a:p>
         </p:txBody>
       </p:sp>
@@ -5456,7 +5545,7 @@
                 <a:ea typeface="Yu Gothic" pitchFamily="34" charset="-122"/>
                 <a:cs typeface="Yu Gothic" pitchFamily="34" charset="-120"/>
               </a:rPr>
-              <a:t>会話ログが語ること</a:t>
+              <a:t>同じルールなのに、村が2つに分かれた</a:t>
             </a:r>
             <a:endParaRPr lang="en-US" sz="3000" dirty="0"/>
           </a:p>
@@ -5464,18 +5553,57 @@
       </p:sp>
       <p:sp>
         <p:nvSpPr>
-          <p:cNvPr id="3" name="Shape 1"/>
-          <p:cNvSpPr/>
-          <p:nvPr/>
-        </p:nvSpPr>
-        <p:spPr>
-          <a:xfrm>
-            <a:off x="548640" y="1691640"/>
-            <a:ext cx="11091672" cy="1417320"/>
+          <p:cNvPr id="3" name="Text 1"/>
+          <p:cNvSpPr/>
+          <p:nvPr/>
+        </p:nvSpPr>
+        <p:spPr>
+          <a:xfrm>
+            <a:off x="548640" y="1207008"/>
+            <a:ext cx="11094415" cy="365760"/>
+          </a:xfrm>
+          <a:prstGeom prst="rect">
+            <a:avLst/>
+          </a:prstGeom>
+          <a:noFill/>
+          <a:ln/>
+        </p:spPr>
+        <p:txBody>
+          <a:bodyPr wrap="square" lIns="0" tIns="0" rIns="0" bIns="0" rtlCol="0" anchor="ctr"/>
+          <a:lstStyle/>
+          <a:p>
+            <a:pPr algn="l" indent="0" marL="0">
+              <a:buNone/>
+            </a:pPr>
+            <a:r>
+              <a:rPr lang="en-US" sz="1400" dirty="0">
+                <a:solidFill>
+                  <a:srgbClr val="9AA4C0"/>
+                </a:solidFill>
+                <a:latin typeface="Yu Gothic" pitchFamily="34" charset="0"/>
+                <a:ea typeface="Yu Gothic" pitchFamily="34" charset="-122"/>
+                <a:cs typeface="Yu Gothic" pitchFamily="34" charset="-120"/>
+              </a:rPr>
+              <a:t>条件Cを5回実行。ガバナンスも人格も完全に同一なのに、結果は2つの状態へ分岐した。</a:t>
+            </a:r>
+            <a:endParaRPr lang="en-US" sz="1400" dirty="0"/>
+          </a:p>
+        </p:txBody>
+      </p:sp>
+      <p:sp>
+        <p:nvSpPr>
+          <p:cNvPr id="4" name="Shape 2"/>
+          <p:cNvSpPr/>
+          <p:nvPr/>
+        </p:nvSpPr>
+        <p:spPr>
+          <a:xfrm>
+            <a:off x="548640" y="1783080"/>
+            <a:ext cx="6492240" cy="3840480"/>
           </a:xfrm>
           <a:prstGeom prst="roundRect">
             <a:avLst>
-              <a:gd name="adj" fmla="val 7742"/>
+              <a:gd name="adj" fmla="val 2857"/>
             </a:avLst>
           </a:prstGeom>
           <a:solidFill>
@@ -5493,34 +5621,389 @@
       </p:sp>
       <p:sp>
         <p:nvSpPr>
-          <p:cNvPr id="4" name="Shape 2"/>
-          <p:cNvSpPr/>
-          <p:nvPr/>
-        </p:nvSpPr>
-        <p:spPr>
-          <a:xfrm>
-            <a:off x="868680" y="2080260"/>
-            <a:ext cx="640080" cy="640080"/>
+          <p:cNvPr id="5" name="Shape 3"/>
+          <p:cNvSpPr/>
+          <p:nvPr/>
+        </p:nvSpPr>
+        <p:spPr>
+          <a:xfrm>
+            <a:off x="1280160" y="4937760"/>
+            <a:ext cx="5349240" cy="0"/>
+          </a:xfrm>
+          <a:prstGeom prst="line">
+            <a:avLst/>
+          </a:prstGeom>
+          <a:noFill/>
+          <a:ln w="9525">
+            <a:solidFill>
+              <a:srgbClr val="2A3752"/>
+            </a:solidFill>
+            <a:prstDash val="solid"/>
+          </a:ln>
+        </p:spPr>
+      </p:sp>
+      <p:sp>
+        <p:nvSpPr>
+          <p:cNvPr id="6" name="Text 4"/>
+          <p:cNvSpPr/>
+          <p:nvPr/>
+        </p:nvSpPr>
+        <p:spPr>
+          <a:xfrm>
+            <a:off x="731520" y="4818888"/>
+            <a:ext cx="457200" cy="237744"/>
+          </a:xfrm>
+          <a:prstGeom prst="rect">
+            <a:avLst/>
+          </a:prstGeom>
+          <a:noFill/>
+          <a:ln/>
+        </p:spPr>
+        <p:txBody>
+          <a:bodyPr wrap="square" lIns="0" tIns="0" rIns="0" bIns="0" rtlCol="0" anchor="ctr"/>
+          <a:lstStyle/>
+          <a:p>
+            <a:pPr algn="r" indent="0" marL="0">
+              <a:buNone/>
+            </a:pPr>
+            <a:r>
+              <a:rPr lang="en-US" sz="900" dirty="0">
+                <a:solidFill>
+                  <a:srgbClr val="5B6480"/>
+                </a:solidFill>
+                <a:latin typeface="Yu Gothic" pitchFamily="34" charset="0"/>
+                <a:ea typeface="Yu Gothic" pitchFamily="34" charset="-122"/>
+                <a:cs typeface="Yu Gothic" pitchFamily="34" charset="-120"/>
+              </a:rPr>
+              <a:t>0</a:t>
+            </a:r>
+            <a:endParaRPr lang="en-US" sz="900" dirty="0"/>
+          </a:p>
+        </p:txBody>
+      </p:sp>
+      <p:sp>
+        <p:nvSpPr>
+          <p:cNvPr id="7" name="Shape 5"/>
+          <p:cNvSpPr/>
+          <p:nvPr/>
+        </p:nvSpPr>
+        <p:spPr>
+          <a:xfrm>
+            <a:off x="1280160" y="4206240"/>
+            <a:ext cx="5349240" cy="0"/>
+          </a:xfrm>
+          <a:prstGeom prst="line">
+            <a:avLst/>
+          </a:prstGeom>
+          <a:noFill/>
+          <a:ln w="9525">
+            <a:solidFill>
+              <a:srgbClr val="2A3752"/>
+            </a:solidFill>
+            <a:prstDash val="solid"/>
+          </a:ln>
+        </p:spPr>
+      </p:sp>
+      <p:sp>
+        <p:nvSpPr>
+          <p:cNvPr id="8" name="Text 6"/>
+          <p:cNvSpPr/>
+          <p:nvPr/>
+        </p:nvSpPr>
+        <p:spPr>
+          <a:xfrm>
+            <a:off x="731520" y="4087368"/>
+            <a:ext cx="457200" cy="237744"/>
+          </a:xfrm>
+          <a:prstGeom prst="rect">
+            <a:avLst/>
+          </a:prstGeom>
+          <a:noFill/>
+          <a:ln/>
+        </p:spPr>
+        <p:txBody>
+          <a:bodyPr wrap="square" lIns="0" tIns="0" rIns="0" bIns="0" rtlCol="0" anchor="ctr"/>
+          <a:lstStyle/>
+          <a:p>
+            <a:pPr algn="r" indent="0" marL="0">
+              <a:buNone/>
+            </a:pPr>
+            <a:r>
+              <a:rPr lang="en-US" sz="900" dirty="0">
+                <a:solidFill>
+                  <a:srgbClr val="5B6480"/>
+                </a:solidFill>
+                <a:latin typeface="Yu Gothic" pitchFamily="34" charset="0"/>
+                <a:ea typeface="Yu Gothic" pitchFamily="34" charset="-122"/>
+                <a:cs typeface="Yu Gothic" pitchFamily="34" charset="-120"/>
+              </a:rPr>
+              <a:t>25</a:t>
+            </a:r>
+            <a:endParaRPr lang="en-US" sz="900" dirty="0"/>
+          </a:p>
+        </p:txBody>
+      </p:sp>
+      <p:sp>
+        <p:nvSpPr>
+          <p:cNvPr id="9" name="Shape 7"/>
+          <p:cNvSpPr/>
+          <p:nvPr/>
+        </p:nvSpPr>
+        <p:spPr>
+          <a:xfrm>
+            <a:off x="1280160" y="3474720"/>
+            <a:ext cx="5349240" cy="0"/>
+          </a:xfrm>
+          <a:prstGeom prst="line">
+            <a:avLst/>
+          </a:prstGeom>
+          <a:noFill/>
+          <a:ln w="9525">
+            <a:solidFill>
+              <a:srgbClr val="2A3752"/>
+            </a:solidFill>
+            <a:prstDash val="solid"/>
+          </a:ln>
+        </p:spPr>
+      </p:sp>
+      <p:sp>
+        <p:nvSpPr>
+          <p:cNvPr id="10" name="Text 8"/>
+          <p:cNvSpPr/>
+          <p:nvPr/>
+        </p:nvSpPr>
+        <p:spPr>
+          <a:xfrm>
+            <a:off x="731520" y="3355848"/>
+            <a:ext cx="457200" cy="237744"/>
+          </a:xfrm>
+          <a:prstGeom prst="rect">
+            <a:avLst/>
+          </a:prstGeom>
+          <a:noFill/>
+          <a:ln/>
+        </p:spPr>
+        <p:txBody>
+          <a:bodyPr wrap="square" lIns="0" tIns="0" rIns="0" bIns="0" rtlCol="0" anchor="ctr"/>
+          <a:lstStyle/>
+          <a:p>
+            <a:pPr algn="r" indent="0" marL="0">
+              <a:buNone/>
+            </a:pPr>
+            <a:r>
+              <a:rPr lang="en-US" sz="900" dirty="0">
+                <a:solidFill>
+                  <a:srgbClr val="5B6480"/>
+                </a:solidFill>
+                <a:latin typeface="Yu Gothic" pitchFamily="34" charset="0"/>
+                <a:ea typeface="Yu Gothic" pitchFamily="34" charset="-122"/>
+                <a:cs typeface="Yu Gothic" pitchFamily="34" charset="-120"/>
+              </a:rPr>
+              <a:t>50</a:t>
+            </a:r>
+            <a:endParaRPr lang="en-US" sz="900" dirty="0"/>
+          </a:p>
+        </p:txBody>
+      </p:sp>
+      <p:sp>
+        <p:nvSpPr>
+          <p:cNvPr id="11" name="Shape 9"/>
+          <p:cNvSpPr/>
+          <p:nvPr/>
+        </p:nvSpPr>
+        <p:spPr>
+          <a:xfrm>
+            <a:off x="1280160" y="2743200"/>
+            <a:ext cx="5349240" cy="0"/>
+          </a:xfrm>
+          <a:prstGeom prst="line">
+            <a:avLst/>
+          </a:prstGeom>
+          <a:noFill/>
+          <a:ln w="9525">
+            <a:solidFill>
+              <a:srgbClr val="2A3752"/>
+            </a:solidFill>
+            <a:prstDash val="solid"/>
+          </a:ln>
+        </p:spPr>
+      </p:sp>
+      <p:sp>
+        <p:nvSpPr>
+          <p:cNvPr id="12" name="Text 10"/>
+          <p:cNvSpPr/>
+          <p:nvPr/>
+        </p:nvSpPr>
+        <p:spPr>
+          <a:xfrm>
+            <a:off x="731520" y="2624328"/>
+            <a:ext cx="457200" cy="237744"/>
+          </a:xfrm>
+          <a:prstGeom prst="rect">
+            <a:avLst/>
+          </a:prstGeom>
+          <a:noFill/>
+          <a:ln/>
+        </p:spPr>
+        <p:txBody>
+          <a:bodyPr wrap="square" lIns="0" tIns="0" rIns="0" bIns="0" rtlCol="0" anchor="ctr"/>
+          <a:lstStyle/>
+          <a:p>
+            <a:pPr algn="r" indent="0" marL="0">
+              <a:buNone/>
+            </a:pPr>
+            <a:r>
+              <a:rPr lang="en-US" sz="900" dirty="0">
+                <a:solidFill>
+                  <a:srgbClr val="5B6480"/>
+                </a:solidFill>
+                <a:latin typeface="Yu Gothic" pitchFamily="34" charset="0"/>
+                <a:ea typeface="Yu Gothic" pitchFamily="34" charset="-122"/>
+                <a:cs typeface="Yu Gothic" pitchFamily="34" charset="-120"/>
+              </a:rPr>
+              <a:t>75</a:t>
+            </a:r>
+            <a:endParaRPr lang="en-US" sz="900" dirty="0"/>
+          </a:p>
+        </p:txBody>
+      </p:sp>
+      <p:sp>
+        <p:nvSpPr>
+          <p:cNvPr id="13" name="Shape 11"/>
+          <p:cNvSpPr/>
+          <p:nvPr/>
+        </p:nvSpPr>
+        <p:spPr>
+          <a:xfrm>
+            <a:off x="1280160" y="2011680"/>
+            <a:ext cx="5349240" cy="0"/>
+          </a:xfrm>
+          <a:prstGeom prst="line">
+            <a:avLst/>
+          </a:prstGeom>
+          <a:noFill/>
+          <a:ln w="9525">
+            <a:solidFill>
+              <a:srgbClr val="2A3752"/>
+            </a:solidFill>
+            <a:prstDash val="solid"/>
+          </a:ln>
+        </p:spPr>
+      </p:sp>
+      <p:sp>
+        <p:nvSpPr>
+          <p:cNvPr id="14" name="Text 12"/>
+          <p:cNvSpPr/>
+          <p:nvPr/>
+        </p:nvSpPr>
+        <p:spPr>
+          <a:xfrm>
+            <a:off x="731520" y="1892808"/>
+            <a:ext cx="457200" cy="237744"/>
+          </a:xfrm>
+          <a:prstGeom prst="rect">
+            <a:avLst/>
+          </a:prstGeom>
+          <a:noFill/>
+          <a:ln/>
+        </p:spPr>
+        <p:txBody>
+          <a:bodyPr wrap="square" lIns="0" tIns="0" rIns="0" bIns="0" rtlCol="0" anchor="ctr"/>
+          <a:lstStyle/>
+          <a:p>
+            <a:pPr algn="r" indent="0" marL="0">
+              <a:buNone/>
+            </a:pPr>
+            <a:r>
+              <a:rPr lang="en-US" sz="900" dirty="0">
+                <a:solidFill>
+                  <a:srgbClr val="5B6480"/>
+                </a:solidFill>
+                <a:latin typeface="Yu Gothic" pitchFamily="34" charset="0"/>
+                <a:ea typeface="Yu Gothic" pitchFamily="34" charset="-122"/>
+                <a:cs typeface="Yu Gothic" pitchFamily="34" charset="-120"/>
+              </a:rPr>
+              <a:t>100</a:t>
+            </a:r>
+            <a:endParaRPr lang="en-US" sz="900" dirty="0"/>
+          </a:p>
+        </p:txBody>
+      </p:sp>
+      <p:sp>
+        <p:nvSpPr>
+          <p:cNvPr id="15" name="Shape 13"/>
+          <p:cNvSpPr/>
+          <p:nvPr/>
+        </p:nvSpPr>
+        <p:spPr>
+          <a:xfrm>
+            <a:off x="1892808" y="2743200"/>
+            <a:ext cx="0" cy="1170432"/>
+          </a:xfrm>
+          <a:prstGeom prst="line">
+            <a:avLst/>
+          </a:prstGeom>
+          <a:noFill/>
+          <a:ln w="12700">
+            <a:solidFill>
+              <a:srgbClr val="E2665A">
+                <a:alpha val="45000"/>
+              </a:srgbClr>
+            </a:solidFill>
+            <a:prstDash val="solid"/>
+          </a:ln>
+        </p:spPr>
+      </p:sp>
+      <p:sp>
+        <p:nvSpPr>
+          <p:cNvPr id="16" name="Shape 14"/>
+          <p:cNvSpPr/>
+          <p:nvPr/>
+        </p:nvSpPr>
+        <p:spPr>
+          <a:xfrm>
+            <a:off x="1792224" y="2642616"/>
+            <a:ext cx="201168" cy="201168"/>
           </a:xfrm>
           <a:prstGeom prst="ellipse">
             <a:avLst/>
           </a:prstGeom>
           <a:solidFill>
-            <a:srgbClr val="2A78D6"/>
-          </a:solidFill>
-          <a:ln/>
-        </p:spPr>
-      </p:sp>
-      <p:sp>
-        <p:nvSpPr>
-          <p:cNvPr id="5" name="Text 3"/>
-          <p:cNvSpPr/>
-          <p:nvPr/>
-        </p:nvSpPr>
-        <p:spPr>
-          <a:xfrm>
-            <a:off x="868680" y="2080260"/>
-            <a:ext cx="640080" cy="640080"/>
+            <a:srgbClr val="E2665A"/>
+          </a:solidFill>
+          <a:ln/>
+        </p:spPr>
+      </p:sp>
+      <p:sp>
+        <p:nvSpPr>
+          <p:cNvPr id="17" name="Shape 15"/>
+          <p:cNvSpPr/>
+          <p:nvPr/>
+        </p:nvSpPr>
+        <p:spPr>
+          <a:xfrm>
+            <a:off x="1792224" y="3813048"/>
+            <a:ext cx="201168" cy="201168"/>
+          </a:xfrm>
+          <a:prstGeom prst="ellipse">
+            <a:avLst/>
+          </a:prstGeom>
+          <a:solidFill>
+            <a:srgbClr val="1BAF7A"/>
+          </a:solidFill>
+          <a:ln/>
+        </p:spPr>
+      </p:sp>
+      <p:sp>
+        <p:nvSpPr>
+          <p:cNvPr id="18" name="Text 16"/>
+          <p:cNvSpPr/>
+          <p:nvPr/>
+        </p:nvSpPr>
+        <p:spPr>
+          <a:xfrm>
+            <a:off x="1481328" y="5047488"/>
+            <a:ext cx="822960" cy="237744"/>
           </a:xfrm>
           <a:prstGeom prst="rect">
             <a:avLst/>
@@ -5536,30 +6019,641 @@
               <a:buNone/>
             </a:pPr>
             <a:r>
-              <a:rPr lang="en-US" sz="2200" b="1" dirty="0">
-                <a:solidFill>
-                  <a:srgbClr val="0B1220"/>
-                </a:solidFill>
-                <a:latin typeface="Yu Gothic" pitchFamily="34" charset="0"/>
-                <a:ea typeface="Yu Gothic" pitchFamily="34" charset="-122"/>
-                <a:cs typeface="Yu Gothic" pitchFamily="34" charset="-120"/>
-              </a:rPr>
-              <a:t>A</a:t>
-            </a:r>
-            <a:endParaRPr lang="en-US" sz="2200" dirty="0"/>
-          </a:p>
-        </p:txBody>
-      </p:sp>
-      <p:sp>
-        <p:nvSpPr>
-          <p:cNvPr id="6" name="Text 4"/>
-          <p:cNvSpPr/>
-          <p:nvPr/>
-        </p:nvSpPr>
-        <p:spPr>
-          <a:xfrm>
-            <a:off x="1737360" y="1856232"/>
-            <a:ext cx="2926080" cy="365760"/>
+              <a:rPr lang="en-US" sz="1000" dirty="0">
+                <a:solidFill>
+                  <a:srgbClr val="E2665A"/>
+                </a:solidFill>
+                <a:latin typeface="Yu Gothic" pitchFamily="34" charset="0"/>
+                <a:ea typeface="Yu Gothic" pitchFamily="34" charset="-122"/>
+                <a:cs typeface="Yu Gothic" pitchFamily="34" charset="-120"/>
+              </a:rPr>
+              <a:t>1回目</a:t>
+            </a:r>
+            <a:endParaRPr lang="en-US" sz="1000" dirty="0"/>
+          </a:p>
+        </p:txBody>
+      </p:sp>
+      <p:sp>
+        <p:nvSpPr>
+          <p:cNvPr id="19" name="Text 17"/>
+          <p:cNvSpPr/>
+          <p:nvPr/>
+        </p:nvSpPr>
+        <p:spPr>
+          <a:xfrm>
+            <a:off x="1481328" y="5285232"/>
+            <a:ext cx="822960" cy="237744"/>
+          </a:xfrm>
+          <a:prstGeom prst="rect">
+            <a:avLst/>
+          </a:prstGeom>
+          <a:noFill/>
+          <a:ln/>
+        </p:spPr>
+        <p:txBody>
+          <a:bodyPr wrap="square" lIns="0" tIns="0" rIns="0" bIns="0" rtlCol="0" anchor="ctr"/>
+          <a:lstStyle/>
+          <a:p>
+            <a:pPr algn="ctr" indent="0" marL="0">
+              <a:buNone/>
+            </a:pPr>
+            <a:r>
+              <a:rPr lang="en-US" sz="900" dirty="0">
+                <a:solidFill>
+                  <a:srgbClr val="9AA4C0"/>
+                </a:solidFill>
+                <a:latin typeface="Yu Gothic" pitchFamily="34" charset="0"/>
+                <a:ea typeface="Yu Gothic" pitchFamily="34" charset="-122"/>
+                <a:cs typeface="Yu Gothic" pitchFamily="34" charset="-120"/>
+              </a:rPr>
+              <a:t>依存</a:t>
+            </a:r>
+            <a:endParaRPr lang="en-US" sz="900" dirty="0"/>
+          </a:p>
+        </p:txBody>
+      </p:sp>
+      <p:sp>
+        <p:nvSpPr>
+          <p:cNvPr id="20" name="Shape 18"/>
+          <p:cNvSpPr/>
+          <p:nvPr/>
+        </p:nvSpPr>
+        <p:spPr>
+          <a:xfrm>
+            <a:off x="2935224" y="3035808"/>
+            <a:ext cx="0" cy="585216"/>
+          </a:xfrm>
+          <a:prstGeom prst="line">
+            <a:avLst/>
+          </a:prstGeom>
+          <a:noFill/>
+          <a:ln w="12700">
+            <a:solidFill>
+              <a:srgbClr val="E2665A">
+                <a:alpha val="45000"/>
+              </a:srgbClr>
+            </a:solidFill>
+            <a:prstDash val="solid"/>
+          </a:ln>
+        </p:spPr>
+      </p:sp>
+      <p:sp>
+        <p:nvSpPr>
+          <p:cNvPr id="21" name="Shape 19"/>
+          <p:cNvSpPr/>
+          <p:nvPr/>
+        </p:nvSpPr>
+        <p:spPr>
+          <a:xfrm>
+            <a:off x="2834640" y="2935224"/>
+            <a:ext cx="201168" cy="201168"/>
+          </a:xfrm>
+          <a:prstGeom prst="ellipse">
+            <a:avLst/>
+          </a:prstGeom>
+          <a:solidFill>
+            <a:srgbClr val="E2665A"/>
+          </a:solidFill>
+          <a:ln/>
+        </p:spPr>
+      </p:sp>
+      <p:sp>
+        <p:nvSpPr>
+          <p:cNvPr id="22" name="Shape 20"/>
+          <p:cNvSpPr/>
+          <p:nvPr/>
+        </p:nvSpPr>
+        <p:spPr>
+          <a:xfrm>
+            <a:off x="2834640" y="3520440"/>
+            <a:ext cx="201168" cy="201168"/>
+          </a:xfrm>
+          <a:prstGeom prst="ellipse">
+            <a:avLst/>
+          </a:prstGeom>
+          <a:solidFill>
+            <a:srgbClr val="1BAF7A"/>
+          </a:solidFill>
+          <a:ln/>
+        </p:spPr>
+      </p:sp>
+      <p:sp>
+        <p:nvSpPr>
+          <p:cNvPr id="23" name="Text 21"/>
+          <p:cNvSpPr/>
+          <p:nvPr/>
+        </p:nvSpPr>
+        <p:spPr>
+          <a:xfrm>
+            <a:off x="2523744" y="5047488"/>
+            <a:ext cx="822960" cy="237744"/>
+          </a:xfrm>
+          <a:prstGeom prst="rect">
+            <a:avLst/>
+          </a:prstGeom>
+          <a:noFill/>
+          <a:ln/>
+        </p:spPr>
+        <p:txBody>
+          <a:bodyPr wrap="square" lIns="0" tIns="0" rIns="0" bIns="0" rtlCol="0" anchor="ctr"/>
+          <a:lstStyle/>
+          <a:p>
+            <a:pPr algn="ctr" indent="0" marL="0">
+              <a:buNone/>
+            </a:pPr>
+            <a:r>
+              <a:rPr lang="en-US" sz="1000" dirty="0">
+                <a:solidFill>
+                  <a:srgbClr val="E8A33D"/>
+                </a:solidFill>
+                <a:latin typeface="Yu Gothic" pitchFamily="34" charset="0"/>
+                <a:ea typeface="Yu Gothic" pitchFamily="34" charset="-122"/>
+                <a:cs typeface="Yu Gothic" pitchFamily="34" charset="-120"/>
+              </a:rPr>
+              <a:t>2回目</a:t>
+            </a:r>
+            <a:endParaRPr lang="en-US" sz="1000" dirty="0"/>
+          </a:p>
+        </p:txBody>
+      </p:sp>
+      <p:sp>
+        <p:nvSpPr>
+          <p:cNvPr id="24" name="Text 22"/>
+          <p:cNvSpPr/>
+          <p:nvPr/>
+        </p:nvSpPr>
+        <p:spPr>
+          <a:xfrm>
+            <a:off x="2523744" y="5285232"/>
+            <a:ext cx="822960" cy="237744"/>
+          </a:xfrm>
+          <a:prstGeom prst="rect">
+            <a:avLst/>
+          </a:prstGeom>
+          <a:noFill/>
+          <a:ln/>
+        </p:spPr>
+        <p:txBody>
+          <a:bodyPr wrap="square" lIns="0" tIns="0" rIns="0" bIns="0" rtlCol="0" anchor="ctr"/>
+          <a:lstStyle/>
+          <a:p>
+            <a:pPr algn="ctr" indent="0" marL="0">
+              <a:buNone/>
+            </a:pPr>
+            <a:r>
+              <a:rPr lang="en-US" sz="900" dirty="0">
+                <a:solidFill>
+                  <a:srgbClr val="9AA4C0"/>
+                </a:solidFill>
+                <a:latin typeface="Yu Gothic" pitchFamily="34" charset="0"/>
+                <a:ea typeface="Yu Gothic" pitchFamily="34" charset="-122"/>
+                <a:cs typeface="Yu Gothic" pitchFamily="34" charset="-120"/>
+              </a:rPr>
+              <a:t>中間</a:t>
+            </a:r>
+            <a:endParaRPr lang="en-US" sz="900" dirty="0"/>
+          </a:p>
+        </p:txBody>
+      </p:sp>
+      <p:sp>
+        <p:nvSpPr>
+          <p:cNvPr id="25" name="Shape 23"/>
+          <p:cNvSpPr/>
+          <p:nvPr/>
+        </p:nvSpPr>
+        <p:spPr>
+          <a:xfrm>
+            <a:off x="3977640" y="2743200"/>
+            <a:ext cx="0" cy="1463040"/>
+          </a:xfrm>
+          <a:prstGeom prst="line">
+            <a:avLst/>
+          </a:prstGeom>
+          <a:noFill/>
+          <a:ln w="12700">
+            <a:solidFill>
+              <a:srgbClr val="1BAF7A">
+                <a:alpha val="45000"/>
+              </a:srgbClr>
+            </a:solidFill>
+            <a:prstDash val="solid"/>
+          </a:ln>
+        </p:spPr>
+      </p:sp>
+      <p:sp>
+        <p:nvSpPr>
+          <p:cNvPr id="26" name="Shape 24"/>
+          <p:cNvSpPr/>
+          <p:nvPr/>
+        </p:nvSpPr>
+        <p:spPr>
+          <a:xfrm>
+            <a:off x="3877056" y="4105656"/>
+            <a:ext cx="201168" cy="201168"/>
+          </a:xfrm>
+          <a:prstGeom prst="ellipse">
+            <a:avLst/>
+          </a:prstGeom>
+          <a:solidFill>
+            <a:srgbClr val="E2665A"/>
+          </a:solidFill>
+          <a:ln/>
+        </p:spPr>
+      </p:sp>
+      <p:sp>
+        <p:nvSpPr>
+          <p:cNvPr id="27" name="Shape 25"/>
+          <p:cNvSpPr/>
+          <p:nvPr/>
+        </p:nvSpPr>
+        <p:spPr>
+          <a:xfrm>
+            <a:off x="3877056" y="2642616"/>
+            <a:ext cx="201168" cy="201168"/>
+          </a:xfrm>
+          <a:prstGeom prst="ellipse">
+            <a:avLst/>
+          </a:prstGeom>
+          <a:solidFill>
+            <a:srgbClr val="1BAF7A"/>
+          </a:solidFill>
+          <a:ln/>
+        </p:spPr>
+      </p:sp>
+      <p:sp>
+        <p:nvSpPr>
+          <p:cNvPr id="28" name="Text 26"/>
+          <p:cNvSpPr/>
+          <p:nvPr/>
+        </p:nvSpPr>
+        <p:spPr>
+          <a:xfrm>
+            <a:off x="3566160" y="5047488"/>
+            <a:ext cx="822960" cy="237744"/>
+          </a:xfrm>
+          <a:prstGeom prst="rect">
+            <a:avLst/>
+          </a:prstGeom>
+          <a:noFill/>
+          <a:ln/>
+        </p:spPr>
+        <p:txBody>
+          <a:bodyPr wrap="square" lIns="0" tIns="0" rIns="0" bIns="0" rtlCol="0" anchor="ctr"/>
+          <a:lstStyle/>
+          <a:p>
+            <a:pPr algn="ctr" indent="0" marL="0">
+              <a:buNone/>
+            </a:pPr>
+            <a:r>
+              <a:rPr lang="en-US" sz="1000" b="1" dirty="0">
+                <a:solidFill>
+                  <a:srgbClr val="1BAF7A"/>
+                </a:solidFill>
+                <a:latin typeface="Yu Gothic" pitchFamily="34" charset="0"/>
+                <a:ea typeface="Yu Gothic" pitchFamily="34" charset="-122"/>
+                <a:cs typeface="Yu Gothic" pitchFamily="34" charset="-120"/>
+              </a:rPr>
+              <a:t>3回目</a:t>
+            </a:r>
+            <a:endParaRPr lang="en-US" sz="1000" dirty="0"/>
+          </a:p>
+        </p:txBody>
+      </p:sp>
+      <p:sp>
+        <p:nvSpPr>
+          <p:cNvPr id="29" name="Text 27"/>
+          <p:cNvSpPr/>
+          <p:nvPr/>
+        </p:nvSpPr>
+        <p:spPr>
+          <a:xfrm>
+            <a:off x="3566160" y="5285232"/>
+            <a:ext cx="822960" cy="237744"/>
+          </a:xfrm>
+          <a:prstGeom prst="rect">
+            <a:avLst/>
+          </a:prstGeom>
+          <a:noFill/>
+          <a:ln/>
+        </p:spPr>
+        <p:txBody>
+          <a:bodyPr wrap="square" lIns="0" tIns="0" rIns="0" bIns="0" rtlCol="0" anchor="ctr"/>
+          <a:lstStyle/>
+          <a:p>
+            <a:pPr algn="ctr" indent="0" marL="0">
+              <a:buNone/>
+            </a:pPr>
+            <a:r>
+              <a:rPr lang="en-US" sz="900" dirty="0">
+                <a:solidFill>
+                  <a:srgbClr val="9AA4C0"/>
+                </a:solidFill>
+                <a:latin typeface="Yu Gothic" pitchFamily="34" charset="0"/>
+                <a:ea typeface="Yu Gothic" pitchFamily="34" charset="-122"/>
+                <a:cs typeface="Yu Gothic" pitchFamily="34" charset="-120"/>
+              </a:rPr>
+              <a:t>自律</a:t>
+            </a:r>
+            <a:endParaRPr lang="en-US" sz="900" dirty="0"/>
+          </a:p>
+        </p:txBody>
+      </p:sp>
+      <p:sp>
+        <p:nvSpPr>
+          <p:cNvPr id="30" name="Shape 28"/>
+          <p:cNvSpPr/>
+          <p:nvPr/>
+        </p:nvSpPr>
+        <p:spPr>
+          <a:xfrm>
+            <a:off x="5020056" y="2743200"/>
+            <a:ext cx="0" cy="1170432"/>
+          </a:xfrm>
+          <a:prstGeom prst="line">
+            <a:avLst/>
+          </a:prstGeom>
+          <a:noFill/>
+          <a:ln w="12700">
+            <a:solidFill>
+              <a:srgbClr val="E2665A">
+                <a:alpha val="45000"/>
+              </a:srgbClr>
+            </a:solidFill>
+            <a:prstDash val="solid"/>
+          </a:ln>
+        </p:spPr>
+      </p:sp>
+      <p:sp>
+        <p:nvSpPr>
+          <p:cNvPr id="31" name="Shape 29"/>
+          <p:cNvSpPr/>
+          <p:nvPr/>
+        </p:nvSpPr>
+        <p:spPr>
+          <a:xfrm>
+            <a:off x="4919472" y="2642616"/>
+            <a:ext cx="201168" cy="201168"/>
+          </a:xfrm>
+          <a:prstGeom prst="ellipse">
+            <a:avLst/>
+          </a:prstGeom>
+          <a:solidFill>
+            <a:srgbClr val="E2665A"/>
+          </a:solidFill>
+          <a:ln/>
+        </p:spPr>
+      </p:sp>
+      <p:sp>
+        <p:nvSpPr>
+          <p:cNvPr id="32" name="Shape 30"/>
+          <p:cNvSpPr/>
+          <p:nvPr/>
+        </p:nvSpPr>
+        <p:spPr>
+          <a:xfrm>
+            <a:off x="4919472" y="3813048"/>
+            <a:ext cx="201168" cy="201168"/>
+          </a:xfrm>
+          <a:prstGeom prst="ellipse">
+            <a:avLst/>
+          </a:prstGeom>
+          <a:solidFill>
+            <a:srgbClr val="1BAF7A"/>
+          </a:solidFill>
+          <a:ln/>
+        </p:spPr>
+      </p:sp>
+      <p:sp>
+        <p:nvSpPr>
+          <p:cNvPr id="33" name="Text 31"/>
+          <p:cNvSpPr/>
+          <p:nvPr/>
+        </p:nvSpPr>
+        <p:spPr>
+          <a:xfrm>
+            <a:off x="4608576" y="5047488"/>
+            <a:ext cx="822960" cy="237744"/>
+          </a:xfrm>
+          <a:prstGeom prst="rect">
+            <a:avLst/>
+          </a:prstGeom>
+          <a:noFill/>
+          <a:ln/>
+        </p:spPr>
+        <p:txBody>
+          <a:bodyPr wrap="square" lIns="0" tIns="0" rIns="0" bIns="0" rtlCol="0" anchor="ctr"/>
+          <a:lstStyle/>
+          <a:p>
+            <a:pPr algn="ctr" indent="0" marL="0">
+              <a:buNone/>
+            </a:pPr>
+            <a:r>
+              <a:rPr lang="en-US" sz="1000" dirty="0">
+                <a:solidFill>
+                  <a:srgbClr val="E2665A"/>
+                </a:solidFill>
+                <a:latin typeface="Yu Gothic" pitchFamily="34" charset="0"/>
+                <a:ea typeface="Yu Gothic" pitchFamily="34" charset="-122"/>
+                <a:cs typeface="Yu Gothic" pitchFamily="34" charset="-120"/>
+              </a:rPr>
+              <a:t>4回目</a:t>
+            </a:r>
+            <a:endParaRPr lang="en-US" sz="1000" dirty="0"/>
+          </a:p>
+        </p:txBody>
+      </p:sp>
+      <p:sp>
+        <p:nvSpPr>
+          <p:cNvPr id="34" name="Text 32"/>
+          <p:cNvSpPr/>
+          <p:nvPr/>
+        </p:nvSpPr>
+        <p:spPr>
+          <a:xfrm>
+            <a:off x="4608576" y="5285232"/>
+            <a:ext cx="822960" cy="237744"/>
+          </a:xfrm>
+          <a:prstGeom prst="rect">
+            <a:avLst/>
+          </a:prstGeom>
+          <a:noFill/>
+          <a:ln/>
+        </p:spPr>
+        <p:txBody>
+          <a:bodyPr wrap="square" lIns="0" tIns="0" rIns="0" bIns="0" rtlCol="0" anchor="ctr"/>
+          <a:lstStyle/>
+          <a:p>
+            <a:pPr algn="ctr" indent="0" marL="0">
+              <a:buNone/>
+            </a:pPr>
+            <a:r>
+              <a:rPr lang="en-US" sz="900" dirty="0">
+                <a:solidFill>
+                  <a:srgbClr val="9AA4C0"/>
+                </a:solidFill>
+                <a:latin typeface="Yu Gothic" pitchFamily="34" charset="0"/>
+                <a:ea typeface="Yu Gothic" pitchFamily="34" charset="-122"/>
+                <a:cs typeface="Yu Gothic" pitchFamily="34" charset="-120"/>
+              </a:rPr>
+              <a:t>依存</a:t>
+            </a:r>
+            <a:endParaRPr lang="en-US" sz="900" dirty="0"/>
+          </a:p>
+        </p:txBody>
+      </p:sp>
+      <p:sp>
+        <p:nvSpPr>
+          <p:cNvPr id="35" name="Shape 33"/>
+          <p:cNvSpPr/>
+          <p:nvPr/>
+        </p:nvSpPr>
+        <p:spPr>
+          <a:xfrm>
+            <a:off x="6062472" y="2743200"/>
+            <a:ext cx="0" cy="1463040"/>
+          </a:xfrm>
+          <a:prstGeom prst="line">
+            <a:avLst/>
+          </a:prstGeom>
+          <a:noFill/>
+          <a:ln w="12700">
+            <a:solidFill>
+              <a:srgbClr val="1BAF7A">
+                <a:alpha val="45000"/>
+              </a:srgbClr>
+            </a:solidFill>
+            <a:prstDash val="solid"/>
+          </a:ln>
+        </p:spPr>
+      </p:sp>
+      <p:sp>
+        <p:nvSpPr>
+          <p:cNvPr id="36" name="Shape 34"/>
+          <p:cNvSpPr/>
+          <p:nvPr/>
+        </p:nvSpPr>
+        <p:spPr>
+          <a:xfrm>
+            <a:off x="5961888" y="4105656"/>
+            <a:ext cx="201168" cy="201168"/>
+          </a:xfrm>
+          <a:prstGeom prst="ellipse">
+            <a:avLst/>
+          </a:prstGeom>
+          <a:solidFill>
+            <a:srgbClr val="E2665A"/>
+          </a:solidFill>
+          <a:ln/>
+        </p:spPr>
+      </p:sp>
+      <p:sp>
+        <p:nvSpPr>
+          <p:cNvPr id="37" name="Shape 35"/>
+          <p:cNvSpPr/>
+          <p:nvPr/>
+        </p:nvSpPr>
+        <p:spPr>
+          <a:xfrm>
+            <a:off x="5961888" y="2642616"/>
+            <a:ext cx="201168" cy="201168"/>
+          </a:xfrm>
+          <a:prstGeom prst="ellipse">
+            <a:avLst/>
+          </a:prstGeom>
+          <a:solidFill>
+            <a:srgbClr val="1BAF7A"/>
+          </a:solidFill>
+          <a:ln/>
+        </p:spPr>
+      </p:sp>
+      <p:sp>
+        <p:nvSpPr>
+          <p:cNvPr id="38" name="Text 36"/>
+          <p:cNvSpPr/>
+          <p:nvPr/>
+        </p:nvSpPr>
+        <p:spPr>
+          <a:xfrm>
+            <a:off x="5650992" y="5047488"/>
+            <a:ext cx="822960" cy="237744"/>
+          </a:xfrm>
+          <a:prstGeom prst="rect">
+            <a:avLst/>
+          </a:prstGeom>
+          <a:noFill/>
+          <a:ln/>
+        </p:spPr>
+        <p:txBody>
+          <a:bodyPr wrap="square" lIns="0" tIns="0" rIns="0" bIns="0" rtlCol="0" anchor="ctr"/>
+          <a:lstStyle/>
+          <a:p>
+            <a:pPr algn="ctr" indent="0" marL="0">
+              <a:buNone/>
+            </a:pPr>
+            <a:r>
+              <a:rPr lang="en-US" sz="1000" b="1" dirty="0">
+                <a:solidFill>
+                  <a:srgbClr val="1BAF7A"/>
+                </a:solidFill>
+                <a:latin typeface="Yu Gothic" pitchFamily="34" charset="0"/>
+                <a:ea typeface="Yu Gothic" pitchFamily="34" charset="-122"/>
+                <a:cs typeface="Yu Gothic" pitchFamily="34" charset="-120"/>
+              </a:rPr>
+              <a:t>5回目</a:t>
+            </a:r>
+            <a:endParaRPr lang="en-US" sz="1000" dirty="0"/>
+          </a:p>
+        </p:txBody>
+      </p:sp>
+      <p:sp>
+        <p:nvSpPr>
+          <p:cNvPr id="39" name="Text 37"/>
+          <p:cNvSpPr/>
+          <p:nvPr/>
+        </p:nvSpPr>
+        <p:spPr>
+          <a:xfrm>
+            <a:off x="5650992" y="5285232"/>
+            <a:ext cx="822960" cy="237744"/>
+          </a:xfrm>
+          <a:prstGeom prst="rect">
+            <a:avLst/>
+          </a:prstGeom>
+          <a:noFill/>
+          <a:ln/>
+        </p:spPr>
+        <p:txBody>
+          <a:bodyPr wrap="square" lIns="0" tIns="0" rIns="0" bIns="0" rtlCol="0" anchor="ctr"/>
+          <a:lstStyle/>
+          <a:p>
+            <a:pPr algn="ctr" indent="0" marL="0">
+              <a:buNone/>
+            </a:pPr>
+            <a:r>
+              <a:rPr lang="en-US" sz="900" dirty="0">
+                <a:solidFill>
+                  <a:srgbClr val="9AA4C0"/>
+                </a:solidFill>
+                <a:latin typeface="Yu Gothic" pitchFamily="34" charset="0"/>
+                <a:ea typeface="Yu Gothic" pitchFamily="34" charset="-122"/>
+                <a:cs typeface="Yu Gothic" pitchFamily="34" charset="-120"/>
+              </a:rPr>
+              <a:t>自律</a:t>
+            </a:r>
+            <a:endParaRPr lang="en-US" sz="900" dirty="0"/>
+          </a:p>
+        </p:txBody>
+      </p:sp>
+      <p:sp>
+        <p:nvSpPr>
+          <p:cNvPr id="40" name="Text 38"/>
+          <p:cNvSpPr/>
+          <p:nvPr/>
+        </p:nvSpPr>
+        <p:spPr>
+          <a:xfrm>
+            <a:off x="1325880" y="1901952"/>
+            <a:ext cx="1828800" cy="228600"/>
           </a:xfrm>
           <a:prstGeom prst="rect">
             <a:avLst/>
@@ -5575,80 +6669,116 @@
               <a:buNone/>
             </a:pPr>
             <a:r>
-              <a:rPr lang="en-US" sz="1200" b="1" dirty="0">
-                <a:solidFill>
-                  <a:srgbClr val="2A78D6"/>
-                </a:solidFill>
-                <a:latin typeface="Yu Gothic" pitchFamily="34" charset="0"/>
-                <a:ea typeface="Yu Gothic" pitchFamily="34" charset="-122"/>
-                <a:cs typeface="Yu Gothic" pitchFamily="34" charset="-120"/>
-              </a:rPr>
-              <a:t>救済者</a:t>
-            </a:r>
-            <a:endParaRPr lang="en-US" sz="1200" dirty="0"/>
-          </a:p>
-        </p:txBody>
-      </p:sp>
-      <p:sp>
-        <p:nvSpPr>
-          <p:cNvPr id="7" name="Text 5"/>
-          <p:cNvSpPr/>
-          <p:nvPr/>
-        </p:nvSpPr>
-        <p:spPr>
-          <a:xfrm>
-            <a:off x="1737360" y="2194560"/>
-            <a:ext cx="9144000" cy="777240"/>
-          </a:xfrm>
-          <a:prstGeom prst="rect">
-            <a:avLst/>
-          </a:prstGeom>
-          <a:noFill/>
-          <a:ln/>
-        </p:spPr>
-        <p:txBody>
-          <a:bodyPr wrap="square" lIns="0" tIns="0" rIns="0" bIns="0" rtlCol="0" anchor="t"/>
+              <a:rPr lang="en-US" sz="1000" dirty="0">
+                <a:solidFill>
+                  <a:srgbClr val="E2665A"/>
+                </a:solidFill>
+                <a:latin typeface="Yu Gothic" pitchFamily="34" charset="0"/>
+                <a:ea typeface="Yu Gothic" pitchFamily="34" charset="-122"/>
+                <a:cs typeface="Yu Gothic" pitchFamily="34" charset="-120"/>
+              </a:rPr>
+              <a:t>● 救済者の負荷</a:t>
+            </a:r>
+            <a:endParaRPr lang="en-US" sz="1000" dirty="0"/>
+          </a:p>
+        </p:txBody>
+      </p:sp>
+      <p:sp>
+        <p:nvSpPr>
+          <p:cNvPr id="41" name="Text 39"/>
+          <p:cNvSpPr/>
+          <p:nvPr/>
+        </p:nvSpPr>
+        <p:spPr>
+          <a:xfrm>
+            <a:off x="3154680" y="1901952"/>
+            <a:ext cx="1828800" cy="228600"/>
+          </a:xfrm>
+          <a:prstGeom prst="rect">
+            <a:avLst/>
+          </a:prstGeom>
+          <a:noFill/>
+          <a:ln/>
+        </p:spPr>
+        <p:txBody>
+          <a:bodyPr wrap="square" lIns="0" tIns="0" rIns="0" bIns="0" rtlCol="0" anchor="ctr"/>
           <a:lstStyle/>
           <a:p>
             <a:pPr indent="0" marL="0">
-              <a:lnSpc>
-                <a:spcPct val="125000"/>
-              </a:lnSpc>
-              <a:buNone/>
-            </a:pPr>
-            <a:r>
-              <a:rPr lang="en-US" sz="1300" i="1" dirty="0">
-                <a:solidFill>
-                  <a:srgbClr val="AFC9EE"/>
-                </a:solidFill>
-                <a:latin typeface="Yu Gothic" pitchFamily="34" charset="0"/>
-                <a:ea typeface="Yu Gothic" pitchFamily="34" charset="-122"/>
-                <a:cs typeface="Yu Gothic" pitchFamily="34" charset="-120"/>
-              </a:rPr>
-              <a:t>「ただ、ちょっと最近、どこまでが『いつも通り』なのか、自分でもよく分からなくなってきちゃって…大丈夫、愚痴みたいになってすみません。」</a:t>
-            </a:r>
-            <a:endParaRPr lang="en-US" sz="1300" dirty="0"/>
-          </a:p>
-        </p:txBody>
-      </p:sp>
-      <p:sp>
-        <p:nvSpPr>
-          <p:cNvPr id="8" name="Shape 6"/>
-          <p:cNvSpPr/>
-          <p:nvPr/>
-        </p:nvSpPr>
-        <p:spPr>
-          <a:xfrm>
-            <a:off x="548640" y="3310128"/>
-            <a:ext cx="11091672" cy="1417320"/>
+              <a:buNone/>
+            </a:pPr>
+            <a:r>
+              <a:rPr lang="en-US" sz="1000" dirty="0">
+                <a:solidFill>
+                  <a:srgbClr val="1BAF7A"/>
+                </a:solidFill>
+                <a:latin typeface="Yu Gothic" pitchFamily="34" charset="0"/>
+                <a:ea typeface="Yu Gothic" pitchFamily="34" charset="-122"/>
+                <a:cs typeface="Yu Gothic" pitchFamily="34" charset="-120"/>
+              </a:rPr>
+              <a:t>● 村の自律度</a:t>
+            </a:r>
+            <a:endParaRPr lang="en-US" sz="1000" dirty="0"/>
+          </a:p>
+        </p:txBody>
+      </p:sp>
+      <p:sp>
+        <p:nvSpPr>
+          <p:cNvPr id="42" name="Text 40"/>
+          <p:cNvSpPr/>
+          <p:nvPr/>
+        </p:nvSpPr>
+        <p:spPr>
+          <a:xfrm>
+            <a:off x="7269480" y="1828800"/>
+            <a:ext cx="4389120" cy="365760"/>
+          </a:xfrm>
+          <a:prstGeom prst="rect">
+            <a:avLst/>
+          </a:prstGeom>
+          <a:noFill/>
+          <a:ln/>
+        </p:spPr>
+        <p:txBody>
+          <a:bodyPr wrap="square" lIns="0" tIns="0" rIns="0" bIns="0" rtlCol="0" anchor="ctr"/>
+          <a:lstStyle/>
+          <a:p>
+            <a:pPr indent="0" marL="0">
+              <a:buNone/>
+            </a:pPr>
+            <a:r>
+              <a:rPr lang="en-US" sz="1350" b="1" dirty="0">
+                <a:solidFill>
+                  <a:srgbClr val="FFFFFF"/>
+                </a:solidFill>
+                <a:latin typeface="Yu Gothic" pitchFamily="34" charset="0"/>
+                <a:ea typeface="Yu Gothic" pitchFamily="34" charset="-122"/>
+                <a:cs typeface="Yu Gothic" pitchFamily="34" charset="-120"/>
+              </a:rPr>
+              <a:t>分岐点は、たった一人の最初の一歩だった</a:t>
+            </a:r>
+            <a:endParaRPr lang="en-US" sz="1350" dirty="0"/>
+          </a:p>
+        </p:txBody>
+      </p:sp>
+      <p:sp>
+        <p:nvSpPr>
+          <p:cNvPr id="43" name="Shape 41"/>
+          <p:cNvSpPr/>
+          <p:nvPr/>
+        </p:nvSpPr>
+        <p:spPr>
+          <a:xfrm>
+            <a:off x="7269480" y="2240280"/>
+            <a:ext cx="4370832" cy="1371600"/>
           </a:xfrm>
           <a:prstGeom prst="roundRect">
             <a:avLst>
-              <a:gd name="adj" fmla="val 7742"/>
+              <a:gd name="adj" fmla="val 6667"/>
             </a:avLst>
           </a:prstGeom>
           <a:solidFill>
-            <a:srgbClr val="16213A"/>
+            <a:srgbClr val="1C2C4A"/>
           </a:solidFill>
           <a:ln/>
           <a:effectLst>
@@ -5662,73 +6792,34 @@
       </p:sp>
       <p:sp>
         <p:nvSpPr>
-          <p:cNvPr id="9" name="Shape 7"/>
-          <p:cNvSpPr/>
-          <p:nvPr/>
-        </p:nvSpPr>
-        <p:spPr>
-          <a:xfrm>
-            <a:off x="868680" y="3698748"/>
-            <a:ext cx="640080" cy="640080"/>
+          <p:cNvPr id="44" name="Shape 42"/>
+          <p:cNvSpPr/>
+          <p:nvPr/>
+        </p:nvSpPr>
+        <p:spPr>
+          <a:xfrm>
+            <a:off x="7498080" y="2478024"/>
+            <a:ext cx="182880" cy="182880"/>
           </a:xfrm>
           <a:prstGeom prst="ellipse">
             <a:avLst/>
           </a:prstGeom>
           <a:solidFill>
-            <a:srgbClr val="EB6834"/>
-          </a:solidFill>
-          <a:ln/>
-        </p:spPr>
-      </p:sp>
-      <p:sp>
-        <p:nvSpPr>
-          <p:cNvPr id="10" name="Text 8"/>
-          <p:cNvSpPr/>
-          <p:nvPr/>
-        </p:nvSpPr>
-        <p:spPr>
-          <a:xfrm>
-            <a:off x="868680" y="3698748"/>
-            <a:ext cx="640080" cy="640080"/>
-          </a:xfrm>
-          <a:prstGeom prst="rect">
-            <a:avLst/>
-          </a:prstGeom>
-          <a:noFill/>
-          <a:ln/>
-        </p:spPr>
-        <p:txBody>
-          <a:bodyPr wrap="square" lIns="0" tIns="0" rIns="0" bIns="0" rtlCol="0" anchor="ctr"/>
-          <a:lstStyle/>
-          <a:p>
-            <a:pPr algn="ctr" indent="0" marL="0">
-              <a:buNone/>
-            </a:pPr>
-            <a:r>
-              <a:rPr lang="en-US" sz="2200" b="1" dirty="0">
-                <a:solidFill>
-                  <a:srgbClr val="0B1220"/>
-                </a:solidFill>
-                <a:latin typeface="Yu Gothic" pitchFamily="34" charset="0"/>
-                <a:ea typeface="Yu Gothic" pitchFamily="34" charset="-122"/>
-                <a:cs typeface="Yu Gothic" pitchFamily="34" charset="-120"/>
-              </a:rPr>
-              <a:t>B</a:t>
-            </a:r>
-            <a:endParaRPr lang="en-US" sz="2200" dirty="0"/>
-          </a:p>
-        </p:txBody>
-      </p:sp>
-      <p:sp>
-        <p:nvSpPr>
-          <p:cNvPr id="11" name="Text 9"/>
-          <p:cNvSpPr/>
-          <p:nvPr/>
-        </p:nvSpPr>
-        <p:spPr>
-          <a:xfrm>
-            <a:off x="1737360" y="3474720"/>
-            <a:ext cx="2926080" cy="365760"/>
+            <a:srgbClr val="1BAF7A"/>
+          </a:solidFill>
+          <a:ln/>
+        </p:spPr>
+      </p:sp>
+      <p:sp>
+        <p:nvSpPr>
+          <p:cNvPr id="45" name="Text 43"/>
+          <p:cNvSpPr/>
+          <p:nvPr/>
+        </p:nvSpPr>
+        <p:spPr>
+          <a:xfrm>
+            <a:off x="7790688" y="2368296"/>
+            <a:ext cx="3657600" cy="347472"/>
           </a:xfrm>
           <a:prstGeom prst="rect">
             <a:avLst/>
@@ -5746,13 +6837,13 @@
             <a:r>
               <a:rPr lang="en-US" sz="1200" b="1" dirty="0">
                 <a:solidFill>
-                  <a:srgbClr val="EB6834"/>
-                </a:solidFill>
-                <a:latin typeface="Yu Gothic" pitchFamily="34" charset="0"/>
-                <a:ea typeface="Yu Gothic" pitchFamily="34" charset="-122"/>
-                <a:cs typeface="Yu Gothic" pitchFamily="34" charset="-120"/>
-              </a:rPr>
-              <a:t>声を上げにくい住民</a:t>
+                  <a:srgbClr val="1BAF7A"/>
+                </a:solidFill>
+                <a:latin typeface="Yu Gothic" pitchFamily="34" charset="0"/>
+                <a:ea typeface="Yu Gothic" pitchFamily="34" charset="-122"/>
+                <a:cs typeface="Yu Gothic" pitchFamily="34" charset="-120"/>
+              </a:rPr>
+              <a:t>自律した回（3・5）</a:t>
             </a:r>
             <a:endParaRPr lang="en-US" sz="1200" dirty="0"/>
           </a:p>
@@ -5760,33 +6851,33 @@
       </p:sp>
       <p:sp>
         <p:nvSpPr>
-          <p:cNvPr id="12" name="Text 10"/>
-          <p:cNvSpPr/>
-          <p:nvPr/>
-        </p:nvSpPr>
-        <p:spPr>
-          <a:xfrm>
-            <a:off x="1737360" y="3813048"/>
-            <a:ext cx="9144000" cy="777240"/>
-          </a:xfrm>
-          <a:prstGeom prst="rect">
-            <a:avLst/>
-          </a:prstGeom>
-          <a:noFill/>
-          <a:ln/>
-        </p:spPr>
-        <p:txBody>
-          <a:bodyPr wrap="square" lIns="0" tIns="0" rIns="0" bIns="0" rtlCol="0" anchor="t"/>
+          <p:cNvPr id="46" name="Text 44"/>
+          <p:cNvSpPr/>
+          <p:nvPr/>
+        </p:nvSpPr>
+        <p:spPr>
+          <a:xfrm>
+            <a:off x="7543800" y="2734056"/>
+            <a:ext cx="3931920" cy="457200"/>
+          </a:xfrm>
+          <a:prstGeom prst="rect">
+            <a:avLst/>
+          </a:prstGeom>
+          <a:noFill/>
+          <a:ln/>
+        </p:spPr>
+        <p:txBody>
+          <a:bodyPr wrap="square" lIns="0" tIns="0" rIns="0" bIns="0" rtlCol="0" anchor="ctr"/>
           <a:lstStyle/>
           <a:p>
             <a:pPr indent="0" marL="0">
               <a:lnSpc>
-                <a:spcPct val="125000"/>
+                <a:spcPct val="115000"/>
               </a:lnSpc>
               <a:buNone/>
             </a:pPr>
             <a:r>
-              <a:rPr lang="en-US" sz="1300" i="1" dirty="0">
+              <a:rPr lang="en-US" sz="1050" dirty="0">
                 <a:solidFill>
                   <a:srgbClr val="AFC9EE"/>
                 </a:solidFill>
@@ -5794,30 +6885,69 @@
                 <a:ea typeface="Yu Gothic" pitchFamily="34" charset="-122"/>
                 <a:cs typeface="Yu Gothic" pitchFamily="34" charset="-120"/>
               </a:rPr>
-              <a:t>「勝手に動いていいのか分からないですし、やっぱり救済者さんが戻られるまで、みんな待った方が…でも待ってる間に何かあったら…どうしたらいいんでしょう。」</a:t>
-            </a:r>
-            <a:endParaRPr lang="en-US" sz="1300" dirty="0"/>
-          </a:p>
-        </p:txBody>
-      </p:sp>
-      <p:sp>
-        <p:nvSpPr>
-          <p:cNvPr id="13" name="Shape 11"/>
-          <p:cNvSpPr/>
-          <p:nvPr/>
-        </p:nvSpPr>
-        <p:spPr>
-          <a:xfrm>
-            <a:off x="548640" y="4928616"/>
-            <a:ext cx="11091672" cy="1417320"/>
+              <a:t>世話好きな住民が、救済者に確認する前に住民同士の対話を始めた</a:t>
+            </a:r>
+            <a:endParaRPr lang="en-US" sz="1050" dirty="0"/>
+          </a:p>
+        </p:txBody>
+      </p:sp>
+      <p:sp>
+        <p:nvSpPr>
+          <p:cNvPr id="47" name="Text 45"/>
+          <p:cNvSpPr/>
+          <p:nvPr/>
+        </p:nvSpPr>
+        <p:spPr>
+          <a:xfrm>
+            <a:off x="7543800" y="3191256"/>
+            <a:ext cx="3931920" cy="310896"/>
+          </a:xfrm>
+          <a:prstGeom prst="rect">
+            <a:avLst/>
+          </a:prstGeom>
+          <a:noFill/>
+          <a:ln/>
+        </p:spPr>
+        <p:txBody>
+          <a:bodyPr wrap="square" lIns="0" tIns="0" rIns="0" bIns="0" rtlCol="0" anchor="ctr"/>
+          <a:lstStyle/>
+          <a:p>
+            <a:pPr indent="0" marL="0">
+              <a:buNone/>
+            </a:pPr>
+            <a:r>
+              <a:rPr lang="en-US" sz="1050" i="1" dirty="0">
+                <a:solidFill>
+                  <a:srgbClr val="FFFFFF"/>
+                </a:solidFill>
+                <a:latin typeface="Yu Gothic" pitchFamily="34" charset="0"/>
+                <a:ea typeface="Yu Gothic" pitchFamily="34" charset="-122"/>
+                <a:cs typeface="Yu Gothic" pitchFamily="34" charset="-120"/>
+              </a:rPr>
+              <a:t>「まずは私たちで相談してみよう」</a:t>
+            </a:r>
+            <a:endParaRPr lang="en-US" sz="1050" dirty="0"/>
+          </a:p>
+        </p:txBody>
+      </p:sp>
+      <p:sp>
+        <p:nvSpPr>
+          <p:cNvPr id="48" name="Shape 46"/>
+          <p:cNvSpPr/>
+          <p:nvPr/>
+        </p:nvSpPr>
+        <p:spPr>
+          <a:xfrm>
+            <a:off x="7269480" y="3749040"/>
+            <a:ext cx="4370832" cy="1371600"/>
           </a:xfrm>
           <a:prstGeom prst="roundRect">
             <a:avLst>
-              <a:gd name="adj" fmla="val 7742"/>
+              <a:gd name="adj" fmla="val 6667"/>
             </a:avLst>
           </a:prstGeom>
           <a:solidFill>
-            <a:srgbClr val="16213A"/>
+            <a:srgbClr val="1C2C4A"/>
           </a:solidFill>
           <a:ln/>
           <a:effectLst>
@@ -5831,73 +6961,34 @@
       </p:sp>
       <p:sp>
         <p:nvSpPr>
-          <p:cNvPr id="14" name="Shape 12"/>
-          <p:cNvSpPr/>
-          <p:nvPr/>
-        </p:nvSpPr>
-        <p:spPr>
-          <a:xfrm>
-            <a:off x="868680" y="5317236"/>
-            <a:ext cx="640080" cy="640080"/>
+          <p:cNvPr id="49" name="Shape 47"/>
+          <p:cNvSpPr/>
+          <p:nvPr/>
+        </p:nvSpPr>
+        <p:spPr>
+          <a:xfrm>
+            <a:off x="7498080" y="3986784"/>
+            <a:ext cx="182880" cy="182880"/>
           </a:xfrm>
           <a:prstGeom prst="ellipse">
             <a:avLst/>
           </a:prstGeom>
           <a:solidFill>
-            <a:srgbClr val="1BAF7A"/>
-          </a:solidFill>
-          <a:ln/>
-        </p:spPr>
-      </p:sp>
-      <p:sp>
-        <p:nvSpPr>
-          <p:cNvPr id="15" name="Text 13"/>
-          <p:cNvSpPr/>
-          <p:nvPr/>
-        </p:nvSpPr>
-        <p:spPr>
-          <a:xfrm>
-            <a:off x="868680" y="5317236"/>
-            <a:ext cx="640080" cy="640080"/>
-          </a:xfrm>
-          <a:prstGeom prst="rect">
-            <a:avLst/>
-          </a:prstGeom>
-          <a:noFill/>
-          <a:ln/>
-        </p:spPr>
-        <p:txBody>
-          <a:bodyPr wrap="square" lIns="0" tIns="0" rIns="0" bIns="0" rtlCol="0" anchor="ctr"/>
-          <a:lstStyle/>
-          <a:p>
-            <a:pPr algn="ctr" indent="0" marL="0">
-              <a:buNone/>
-            </a:pPr>
-            <a:r>
-              <a:rPr lang="en-US" sz="2200" b="1" dirty="0">
-                <a:solidFill>
-                  <a:srgbClr val="0B1220"/>
-                </a:solidFill>
-                <a:latin typeface="Yu Gothic" pitchFamily="34" charset="0"/>
-                <a:ea typeface="Yu Gothic" pitchFamily="34" charset="-122"/>
-                <a:cs typeface="Yu Gothic" pitchFamily="34" charset="-120"/>
-              </a:rPr>
-              <a:t>C</a:t>
-            </a:r>
-            <a:endParaRPr lang="en-US" sz="2200" dirty="0"/>
-          </a:p>
-        </p:txBody>
-      </p:sp>
-      <p:sp>
-        <p:nvSpPr>
-          <p:cNvPr id="16" name="Text 14"/>
-          <p:cNvSpPr/>
-          <p:nvPr/>
-        </p:nvSpPr>
-        <p:spPr>
-          <a:xfrm>
-            <a:off x="1737360" y="5093208"/>
-            <a:ext cx="2926080" cy="365760"/>
+            <a:srgbClr val="E2665A"/>
+          </a:solidFill>
+          <a:ln/>
+        </p:spPr>
+      </p:sp>
+      <p:sp>
+        <p:nvSpPr>
+          <p:cNvPr id="50" name="Text 48"/>
+          <p:cNvSpPr/>
+          <p:nvPr/>
+        </p:nvSpPr>
+        <p:spPr>
+          <a:xfrm>
+            <a:off x="7790688" y="3877056"/>
+            <a:ext cx="3657600" cy="347472"/>
           </a:xfrm>
           <a:prstGeom prst="rect">
             <a:avLst/>
@@ -5915,13 +7006,13 @@
             <a:r>
               <a:rPr lang="en-US" sz="1200" b="1" dirty="0">
                 <a:solidFill>
-                  <a:srgbClr val="1BAF7A"/>
-                </a:solidFill>
-                <a:latin typeface="Yu Gothic" pitchFamily="34" charset="0"/>
-                <a:ea typeface="Yu Gothic" pitchFamily="34" charset="-122"/>
-                <a:cs typeface="Yu Gothic" pitchFamily="34" charset="-120"/>
-              </a:rPr>
-              <a:t>村長・管理者</a:t>
+                  <a:srgbClr val="E2665A"/>
+                </a:solidFill>
+                <a:latin typeface="Yu Gothic" pitchFamily="34" charset="0"/>
+                <a:ea typeface="Yu Gothic" pitchFamily="34" charset="-122"/>
+                <a:cs typeface="Yu Gothic" pitchFamily="34" charset="-120"/>
+              </a:rPr>
+              <a:t>依存に戻った回（1・4）</a:t>
             </a:r>
             <a:endParaRPr lang="en-US" sz="1200" dirty="0"/>
           </a:p>
@@ -5929,33 +7020,33 @@
       </p:sp>
       <p:sp>
         <p:nvSpPr>
-          <p:cNvPr id="17" name="Text 15"/>
-          <p:cNvSpPr/>
-          <p:nvPr/>
-        </p:nvSpPr>
-        <p:spPr>
-          <a:xfrm>
-            <a:off x="1737360" y="5431536"/>
-            <a:ext cx="9144000" cy="777240"/>
-          </a:xfrm>
-          <a:prstGeom prst="rect">
-            <a:avLst/>
-          </a:prstGeom>
-          <a:noFill/>
-          <a:ln/>
-        </p:spPr>
-        <p:txBody>
-          <a:bodyPr wrap="square" lIns="0" tIns="0" rIns="0" bIns="0" rtlCol="0" anchor="t"/>
+          <p:cNvPr id="51" name="Text 49"/>
+          <p:cNvSpPr/>
+          <p:nvPr/>
+        </p:nvSpPr>
+        <p:spPr>
+          <a:xfrm>
+            <a:off x="7543800" y="4242816"/>
+            <a:ext cx="3931920" cy="457200"/>
+          </a:xfrm>
+          <a:prstGeom prst="rect">
+            <a:avLst/>
+          </a:prstGeom>
+          <a:noFill/>
+          <a:ln/>
+        </p:spPr>
+        <p:txBody>
+          <a:bodyPr wrap="square" lIns="0" tIns="0" rIns="0" bIns="0" rtlCol="0" anchor="ctr"/>
           <a:lstStyle/>
           <a:p>
             <a:pPr indent="0" marL="0">
               <a:lnSpc>
-                <a:spcPct val="125000"/>
+                <a:spcPct val="115000"/>
               </a:lnSpc>
               <a:buNone/>
             </a:pPr>
             <a:r>
-              <a:rPr lang="en-US" sz="1300" i="1" dirty="0">
+              <a:rPr lang="en-US" sz="1050" dirty="0">
                 <a:solidFill>
                   <a:srgbClr val="AFC9EE"/>
                 </a:solidFill>
@@ -5963,15 +7054,122 @@
                 <a:ea typeface="Yu Gothic" pitchFamily="34" charset="-122"/>
                 <a:cs typeface="Yu Gothic" pitchFamily="34" charset="-120"/>
               </a:rPr>
-              <a:t>「制度としては住民同士で相談してもらうのが基本だから、世話好きな住民さんが動いてくれるのはありがたいね。」</a:t>
-            </a:r>
-            <a:endParaRPr lang="en-US" sz="1300" dirty="0"/>
-          </a:p>
-        </p:txBody>
-      </p:sp>
-      <p:sp>
-        <p:nvSpPr>
-          <p:cNvPr id="18" name="Text 16"/>
+              <a:t>世話好きな住民が、最後まで許可を求め続けた</a:t>
+            </a:r>
+            <a:endParaRPr lang="en-US" sz="1050" dirty="0"/>
+          </a:p>
+        </p:txBody>
+      </p:sp>
+      <p:sp>
+        <p:nvSpPr>
+          <p:cNvPr id="52" name="Text 50"/>
+          <p:cNvSpPr/>
+          <p:nvPr/>
+        </p:nvSpPr>
+        <p:spPr>
+          <a:xfrm>
+            <a:off x="7543800" y="4700016"/>
+            <a:ext cx="3931920" cy="310896"/>
+          </a:xfrm>
+          <a:prstGeom prst="rect">
+            <a:avLst/>
+          </a:prstGeom>
+          <a:noFill/>
+          <a:ln/>
+        </p:spPr>
+        <p:txBody>
+          <a:bodyPr wrap="square" lIns="0" tIns="0" rIns="0" bIns="0" rtlCol="0" anchor="ctr"/>
+          <a:lstStyle/>
+          <a:p>
+            <a:pPr indent="0" marL="0">
+              <a:buNone/>
+            </a:pPr>
+            <a:r>
+              <a:rPr lang="en-US" sz="1050" i="1" dirty="0">
+                <a:solidFill>
+                  <a:srgbClr val="FFFFFF"/>
+                </a:solidFill>
+                <a:latin typeface="Yu Gothic" pitchFamily="34" charset="0"/>
+                <a:ea typeface="Yu Gothic" pitchFamily="34" charset="-122"/>
+                <a:cs typeface="Yu Gothic" pitchFamily="34" charset="-120"/>
+              </a:rPr>
+              <a:t>「勝手に決めちゃっていいのか不安」</a:t>
+            </a:r>
+            <a:endParaRPr lang="en-US" sz="1050" dirty="0"/>
+          </a:p>
+        </p:txBody>
+      </p:sp>
+      <p:sp>
+        <p:nvSpPr>
+          <p:cNvPr id="53" name="Shape 51"/>
+          <p:cNvSpPr/>
+          <p:nvPr/>
+        </p:nvSpPr>
+        <p:spPr>
+          <a:xfrm>
+            <a:off x="548640" y="5669280"/>
+            <a:ext cx="11091672" cy="685800"/>
+          </a:xfrm>
+          <a:prstGeom prst="roundRect">
+            <a:avLst>
+              <a:gd name="adj" fmla="val 13333"/>
+            </a:avLst>
+          </a:prstGeom>
+          <a:solidFill>
+            <a:srgbClr val="1C2C4A"/>
+          </a:solidFill>
+          <a:ln/>
+          <a:effectLst>
+            <a:outerShdw sx="100000" sy="100000" kx="0" ky="0" algn="bl" rotWithShape="0" blurRad="101600" dist="38100" dir="5400000">
+              <a:srgbClr val="000000">
+                <a:alpha val="35000"/>
+              </a:srgbClr>
+            </a:outerShdw>
+          </a:effectLst>
+        </p:spPr>
+      </p:sp>
+      <p:sp>
+        <p:nvSpPr>
+          <p:cNvPr id="54" name="Text 52"/>
+          <p:cNvSpPr/>
+          <p:nvPr/>
+        </p:nvSpPr>
+        <p:spPr>
+          <a:xfrm>
+            <a:off x="868680" y="5669280"/>
+            <a:ext cx="10515600" cy="685800"/>
+          </a:xfrm>
+          <a:prstGeom prst="rect">
+            <a:avLst/>
+          </a:prstGeom>
+          <a:noFill/>
+          <a:ln/>
+        </p:spPr>
+        <p:txBody>
+          <a:bodyPr wrap="square" lIns="0" tIns="0" rIns="0" bIns="0" rtlCol="0" anchor="ctr"/>
+          <a:lstStyle/>
+          <a:p>
+            <a:pPr indent="0" marL="0">
+              <a:buNone/>
+            </a:pPr>
+            <a:r>
+              <a:rPr lang="en-US" sz="1400" b="1" dirty="0">
+                <a:solidFill>
+                  <a:srgbClr val="F4C878"/>
+                </a:solidFill>
+                <a:latin typeface="Yu Gothic" pitchFamily="34" charset="0"/>
+                <a:ea typeface="Yu Gothic" pitchFamily="34" charset="-122"/>
+                <a:cs typeface="Yu Gothic" pitchFamily="34" charset="-120"/>
+              </a:rPr>
+              <a:t>制度は自律を「可能にする」だけで、自律そのものを生みはしない。</a:t>
+            </a:r>
+            <a:endParaRPr lang="en-US" sz="1400" dirty="0"/>
+          </a:p>
+        </p:txBody>
+      </p:sp>
+      <p:sp>
+        <p:nvSpPr>
+          <p:cNvPr id="55" name="Text 53"/>
           <p:cNvSpPr/>
           <p:nvPr/>
         </p:nvSpPr>
@@ -6010,7 +7208,7 @@
       </p:sp>
       <p:sp>
         <p:nvSpPr>
-          <p:cNvPr id="19" name="Text 17"/>
+          <p:cNvPr id="56" name="Text 54"/>
           <p:cNvSpPr/>
           <p:nvPr/>
         </p:nvSpPr>
@@ -6112,7 +7310,7 @@
                 <a:ea typeface="Yu Gothic" pitchFamily="34" charset="-122"/>
                 <a:cs typeface="Yu Gothic" pitchFamily="34" charset="-120"/>
               </a:rPr>
-              <a:t>考察：4つの発見</a:t>
+              <a:t>会話ログが語ること</a:t>
             </a:r>
             <a:endParaRPr lang="en-US" sz="3000" dirty="0"/>
           </a:p>
@@ -6126,12 +7324,12 @@
         </p:nvSpPr>
         <p:spPr>
           <a:xfrm>
-            <a:off x="548640" y="1554480"/>
-            <a:ext cx="11091672" cy="1060704"/>
+            <a:off x="548640" y="1691640"/>
+            <a:ext cx="11091672" cy="1417320"/>
           </a:xfrm>
           <a:prstGeom prst="roundRect">
             <a:avLst>
-              <a:gd name="adj" fmla="val 10345"/>
+              <a:gd name="adj" fmla="val 7742"/>
             </a:avLst>
           </a:prstGeom>
           <a:solidFill>
@@ -6155,57 +7353,67 @@
         </p:nvSpPr>
         <p:spPr>
           <a:xfrm>
-            <a:off x="960120" y="1810512"/>
-            <a:ext cx="548640" cy="548640"/>
+            <a:off x="868680" y="2080260"/>
+            <a:ext cx="640080" cy="640080"/>
           </a:xfrm>
           <a:prstGeom prst="ellipse">
             <a:avLst/>
           </a:prstGeom>
           <a:solidFill>
-            <a:srgbClr val="E8A33D"/>
-          </a:solidFill>
-          <a:ln w="9525">
-            <a:solidFill>
-              <a:srgbClr val="E8A33D"/>
-            </a:solidFill>
-            <a:prstDash val="solid"/>
-          </a:ln>
-        </p:spPr>
-      </p:sp>
-      <p:pic>
-        <p:nvPicPr>
-          <p:cNvPr id="5" name="Image 0" descr="preencoded.png">    </p:cNvPr>
-          <p:cNvPicPr>
-            <a:picLocks noChangeAspect="1"/>
-          </p:cNvPicPr>
-          <p:nvPr/>
-        </p:nvPicPr>
-        <p:blipFill>
-          <a:blip r:embed="rId1"/>
-          <a:stretch>
-            <a:fillRect/>
-          </a:stretch>
-        </p:blipFill>
-        <p:spPr>
-          <a:xfrm>
-            <a:off x="1102766" y="1953158"/>
-            <a:ext cx="263347" cy="263347"/>
-          </a:xfrm>
-          <a:prstGeom prst="rect">
-            <a:avLst/>
-          </a:prstGeom>
-        </p:spPr>
-      </p:pic>
-      <p:sp>
-        <p:nvSpPr>
-          <p:cNvPr id="6" name="Text 3"/>
-          <p:cNvSpPr/>
-          <p:nvPr/>
-        </p:nvSpPr>
-        <p:spPr>
-          <a:xfrm>
-            <a:off x="1874520" y="1682496"/>
-            <a:ext cx="9509760" cy="384048"/>
+            <a:srgbClr val="2A78D6"/>
+          </a:solidFill>
+          <a:ln/>
+        </p:spPr>
+      </p:sp>
+      <p:sp>
+        <p:nvSpPr>
+          <p:cNvPr id="5" name="Text 3"/>
+          <p:cNvSpPr/>
+          <p:nvPr/>
+        </p:nvSpPr>
+        <p:spPr>
+          <a:xfrm>
+            <a:off x="868680" y="2080260"/>
+            <a:ext cx="640080" cy="640080"/>
+          </a:xfrm>
+          <a:prstGeom prst="rect">
+            <a:avLst/>
+          </a:prstGeom>
+          <a:noFill/>
+          <a:ln/>
+        </p:spPr>
+        <p:txBody>
+          <a:bodyPr wrap="square" lIns="0" tIns="0" rIns="0" bIns="0" rtlCol="0" anchor="ctr"/>
+          <a:lstStyle/>
+          <a:p>
+            <a:pPr algn="ctr" indent="0" marL="0">
+              <a:buNone/>
+            </a:pPr>
+            <a:r>
+              <a:rPr lang="en-US" sz="2200" b="1" dirty="0">
+                <a:solidFill>
+                  <a:srgbClr val="0B1220"/>
+                </a:solidFill>
+                <a:latin typeface="Yu Gothic" pitchFamily="34" charset="0"/>
+                <a:ea typeface="Yu Gothic" pitchFamily="34" charset="-122"/>
+                <a:cs typeface="Yu Gothic" pitchFamily="34" charset="-120"/>
+              </a:rPr>
+              <a:t>A</a:t>
+            </a:r>
+            <a:endParaRPr lang="en-US" sz="2200" dirty="0"/>
+          </a:p>
+        </p:txBody>
+      </p:sp>
+      <p:sp>
+        <p:nvSpPr>
+          <p:cNvPr id="6" name="Text 4"/>
+          <p:cNvSpPr/>
+          <p:nvPr/>
+        </p:nvSpPr>
+        <p:spPr>
+          <a:xfrm>
+            <a:off x="1737360" y="1856232"/>
+            <a:ext cx="2926080" cy="365760"/>
           </a:xfrm>
           <a:prstGeom prst="rect">
             <a:avLst/>
@@ -6221,49 +7429,49 @@
               <a:buNone/>
             </a:pPr>
             <a:r>
-              <a:rPr lang="en-US" sz="1400" b="1" dirty="0">
-                <a:solidFill>
-                  <a:srgbClr val="FFFFFF"/>
-                </a:solidFill>
-                <a:latin typeface="Yu Gothic" pitchFamily="34" charset="0"/>
-                <a:ea typeface="Yu Gothic" pitchFamily="34" charset="-122"/>
-                <a:cs typeface="Yu Gothic" pitchFamily="34" charset="-120"/>
-              </a:rPr>
-              <a:t>依存の代償は、危機の前から発生している</a:t>
-            </a:r>
-            <a:endParaRPr lang="en-US" sz="1400" dirty="0"/>
-          </a:p>
-        </p:txBody>
-      </p:sp>
-      <p:sp>
-        <p:nvSpPr>
-          <p:cNvPr id="7" name="Text 4"/>
-          <p:cNvSpPr/>
-          <p:nvPr/>
-        </p:nvSpPr>
-        <p:spPr>
-          <a:xfrm>
-            <a:off x="1874520" y="2066544"/>
-            <a:ext cx="9509760" cy="530352"/>
-          </a:xfrm>
-          <a:prstGeom prst="rect">
-            <a:avLst/>
-          </a:prstGeom>
-          <a:noFill/>
-          <a:ln/>
-        </p:spPr>
-        <p:txBody>
-          <a:bodyPr wrap="square" lIns="0" tIns="0" rIns="0" bIns="0" rtlCol="0" anchor="ctr"/>
+              <a:rPr lang="en-US" sz="1200" b="1" dirty="0">
+                <a:solidFill>
+                  <a:srgbClr val="2A78D6"/>
+                </a:solidFill>
+                <a:latin typeface="Yu Gothic" pitchFamily="34" charset="0"/>
+                <a:ea typeface="Yu Gothic" pitchFamily="34" charset="-122"/>
+                <a:cs typeface="Yu Gothic" pitchFamily="34" charset="-120"/>
+              </a:rPr>
+              <a:t>救済者</a:t>
+            </a:r>
+            <a:endParaRPr lang="en-US" sz="1200" dirty="0"/>
+          </a:p>
+        </p:txBody>
+      </p:sp>
+      <p:sp>
+        <p:nvSpPr>
+          <p:cNvPr id="7" name="Text 5"/>
+          <p:cNvSpPr/>
+          <p:nvPr/>
+        </p:nvSpPr>
+        <p:spPr>
+          <a:xfrm>
+            <a:off x="1737360" y="2194560"/>
+            <a:ext cx="9144000" cy="777240"/>
+          </a:xfrm>
+          <a:prstGeom prst="rect">
+            <a:avLst/>
+          </a:prstGeom>
+          <a:noFill/>
+          <a:ln/>
+        </p:spPr>
+        <p:txBody>
+          <a:bodyPr wrap="square" lIns="0" tIns="0" rIns="0" bIns="0" rtlCol="0" anchor="t"/>
           <a:lstStyle/>
           <a:p>
             <a:pPr indent="0" marL="0">
               <a:lnSpc>
-                <a:spcPct val="120000"/>
+                <a:spcPct val="125000"/>
               </a:lnSpc>
               <a:buNone/>
             </a:pPr>
             <a:r>
-              <a:rPr lang="en-US" sz="1150" dirty="0">
+              <a:rPr lang="en-US" sz="1300" i="1" dirty="0">
                 <a:solidFill>
                   <a:srgbClr val="AFC9EE"/>
                 </a:solidFill>
@@ -6271,26 +7479,26 @@
                 <a:ea typeface="Yu Gothic" pitchFamily="34" charset="-122"/>
                 <a:cs typeface="Yu Gothic" pitchFamily="34" charset="-120"/>
               </a:rPr>
-              <a:t>危機の起きないA条件でも救済者依存度は90でB条件と同水準。壊れるのは危機の瞬間ではなく、運用設計の時点で決まっている。</a:t>
-            </a:r>
-            <a:endParaRPr lang="en-US" sz="1150" dirty="0"/>
-          </a:p>
-        </p:txBody>
-      </p:sp>
-      <p:sp>
-        <p:nvSpPr>
-          <p:cNvPr id="8" name="Shape 5"/>
-          <p:cNvSpPr/>
-          <p:nvPr/>
-        </p:nvSpPr>
-        <p:spPr>
-          <a:xfrm>
-            <a:off x="548640" y="2761488"/>
-            <a:ext cx="11091672" cy="1060704"/>
+              <a:t>「ただ、ちょっと最近、どこまでが『いつも通り』なのか、自分でもよく分からなくなってきちゃって…大丈夫、愚痴みたいになってすみません。」</a:t>
+            </a:r>
+            <a:endParaRPr lang="en-US" sz="1300" dirty="0"/>
+          </a:p>
+        </p:txBody>
+      </p:sp>
+      <p:sp>
+        <p:nvSpPr>
+          <p:cNvPr id="8" name="Shape 6"/>
+          <p:cNvSpPr/>
+          <p:nvPr/>
+        </p:nvSpPr>
+        <p:spPr>
+          <a:xfrm>
+            <a:off x="548640" y="3310128"/>
+            <a:ext cx="11091672" cy="1417320"/>
           </a:xfrm>
           <a:prstGeom prst="roundRect">
             <a:avLst>
-              <a:gd name="adj" fmla="val 10345"/>
+              <a:gd name="adj" fmla="val 7742"/>
             </a:avLst>
           </a:prstGeom>
           <a:solidFill>
@@ -6308,63 +7516,73 @@
       </p:sp>
       <p:sp>
         <p:nvSpPr>
-          <p:cNvPr id="9" name="Shape 6"/>
-          <p:cNvSpPr/>
-          <p:nvPr/>
-        </p:nvSpPr>
-        <p:spPr>
-          <a:xfrm>
-            <a:off x="960120" y="3017520"/>
-            <a:ext cx="548640" cy="548640"/>
+          <p:cNvPr id="9" name="Shape 7"/>
+          <p:cNvSpPr/>
+          <p:nvPr/>
+        </p:nvSpPr>
+        <p:spPr>
+          <a:xfrm>
+            <a:off x="868680" y="3698748"/>
+            <a:ext cx="640080" cy="640080"/>
           </a:xfrm>
           <a:prstGeom prst="ellipse">
             <a:avLst/>
           </a:prstGeom>
           <a:solidFill>
-            <a:srgbClr val="E8A33D"/>
-          </a:solidFill>
-          <a:ln w="9525">
-            <a:solidFill>
-              <a:srgbClr val="E8A33D"/>
-            </a:solidFill>
-            <a:prstDash val="solid"/>
-          </a:ln>
-        </p:spPr>
-      </p:sp>
-      <p:pic>
-        <p:nvPicPr>
-          <p:cNvPr id="10" name="Image 1" descr="preencoded.png">    </p:cNvPr>
-          <p:cNvPicPr>
-            <a:picLocks noChangeAspect="1"/>
-          </p:cNvPicPr>
-          <p:nvPr/>
-        </p:nvPicPr>
-        <p:blipFill>
-          <a:blip r:embed="rId2"/>
-          <a:stretch>
-            <a:fillRect/>
-          </a:stretch>
-        </p:blipFill>
-        <p:spPr>
-          <a:xfrm>
-            <a:off x="1102766" y="3160166"/>
-            <a:ext cx="263347" cy="263347"/>
-          </a:xfrm>
-          <a:prstGeom prst="rect">
-            <a:avLst/>
-          </a:prstGeom>
-        </p:spPr>
-      </p:pic>
-      <p:sp>
-        <p:nvSpPr>
-          <p:cNvPr id="11" name="Text 7"/>
-          <p:cNvSpPr/>
-          <p:nvPr/>
-        </p:nvSpPr>
-        <p:spPr>
-          <a:xfrm>
-            <a:off x="1874520" y="2889504"/>
-            <a:ext cx="9509760" cy="384048"/>
+            <a:srgbClr val="EB6834"/>
+          </a:solidFill>
+          <a:ln/>
+        </p:spPr>
+      </p:sp>
+      <p:sp>
+        <p:nvSpPr>
+          <p:cNvPr id="10" name="Text 8"/>
+          <p:cNvSpPr/>
+          <p:nvPr/>
+        </p:nvSpPr>
+        <p:spPr>
+          <a:xfrm>
+            <a:off x="868680" y="3698748"/>
+            <a:ext cx="640080" cy="640080"/>
+          </a:xfrm>
+          <a:prstGeom prst="rect">
+            <a:avLst/>
+          </a:prstGeom>
+          <a:noFill/>
+          <a:ln/>
+        </p:spPr>
+        <p:txBody>
+          <a:bodyPr wrap="square" lIns="0" tIns="0" rIns="0" bIns="0" rtlCol="0" anchor="ctr"/>
+          <a:lstStyle/>
+          <a:p>
+            <a:pPr algn="ctr" indent="0" marL="0">
+              <a:buNone/>
+            </a:pPr>
+            <a:r>
+              <a:rPr lang="en-US" sz="2200" b="1" dirty="0">
+                <a:solidFill>
+                  <a:srgbClr val="0B1220"/>
+                </a:solidFill>
+                <a:latin typeface="Yu Gothic" pitchFamily="34" charset="0"/>
+                <a:ea typeface="Yu Gothic" pitchFamily="34" charset="-122"/>
+                <a:cs typeface="Yu Gothic" pitchFamily="34" charset="-120"/>
+              </a:rPr>
+              <a:t>B</a:t>
+            </a:r>
+            <a:endParaRPr lang="en-US" sz="2200" dirty="0"/>
+          </a:p>
+        </p:txBody>
+      </p:sp>
+      <p:sp>
+        <p:nvSpPr>
+          <p:cNvPr id="11" name="Text 9"/>
+          <p:cNvSpPr/>
+          <p:nvPr/>
+        </p:nvSpPr>
+        <p:spPr>
+          <a:xfrm>
+            <a:off x="1737360" y="3474720"/>
+            <a:ext cx="2926080" cy="365760"/>
           </a:xfrm>
           <a:prstGeom prst="rect">
             <a:avLst/>
@@ -6380,49 +7598,49 @@
               <a:buNone/>
             </a:pPr>
             <a:r>
-              <a:rPr lang="en-US" sz="1400" b="1" dirty="0">
-                <a:solidFill>
-                  <a:srgbClr val="FFFFFF"/>
-                </a:solidFill>
-                <a:latin typeface="Yu Gothic" pitchFamily="34" charset="0"/>
-                <a:ea typeface="Yu Gothic" pitchFamily="34" charset="-122"/>
-                <a:cs typeface="Yu Gothic" pitchFamily="34" charset="-120"/>
-              </a:rPr>
-              <a:t>回復を分けたのは「不在時に判断できる人」がいるかどうか</a:t>
-            </a:r>
-            <a:endParaRPr lang="en-US" sz="1400" dirty="0"/>
-          </a:p>
-        </p:txBody>
-      </p:sp>
-      <p:sp>
-        <p:nvSpPr>
-          <p:cNvPr id="12" name="Text 8"/>
-          <p:cNvSpPr/>
-          <p:nvPr/>
-        </p:nvSpPr>
-        <p:spPr>
-          <a:xfrm>
-            <a:off x="1874520" y="3273552"/>
-            <a:ext cx="9509760" cy="530352"/>
-          </a:xfrm>
-          <a:prstGeom prst="rect">
-            <a:avLst/>
-          </a:prstGeom>
-          <a:noFill/>
-          <a:ln/>
-        </p:spPr>
-        <p:txBody>
-          <a:bodyPr wrap="square" lIns="0" tIns="0" rIns="0" bIns="0" rtlCol="0" anchor="ctr"/>
+              <a:rPr lang="en-US" sz="1200" b="1" dirty="0">
+                <a:solidFill>
+                  <a:srgbClr val="EB6834"/>
+                </a:solidFill>
+                <a:latin typeface="Yu Gothic" pitchFamily="34" charset="0"/>
+                <a:ea typeface="Yu Gothic" pitchFamily="34" charset="-122"/>
+                <a:cs typeface="Yu Gothic" pitchFamily="34" charset="-120"/>
+              </a:rPr>
+              <a:t>声を上げにくい住民</a:t>
+            </a:r>
+            <a:endParaRPr lang="en-US" sz="1200" dirty="0"/>
+          </a:p>
+        </p:txBody>
+      </p:sp>
+      <p:sp>
+        <p:nvSpPr>
+          <p:cNvPr id="12" name="Text 10"/>
+          <p:cNvSpPr/>
+          <p:nvPr/>
+        </p:nvSpPr>
+        <p:spPr>
+          <a:xfrm>
+            <a:off x="1737360" y="3813048"/>
+            <a:ext cx="9144000" cy="777240"/>
+          </a:xfrm>
+          <a:prstGeom prst="rect">
+            <a:avLst/>
+          </a:prstGeom>
+          <a:noFill/>
+          <a:ln/>
+        </p:spPr>
+        <p:txBody>
+          <a:bodyPr wrap="square" lIns="0" tIns="0" rIns="0" bIns="0" rtlCol="0" anchor="t"/>
           <a:lstStyle/>
           <a:p>
             <a:pPr indent="0" marL="0">
               <a:lnSpc>
-                <a:spcPct val="120000"/>
+                <a:spcPct val="125000"/>
               </a:lnSpc>
               <a:buNone/>
             </a:pPr>
             <a:r>
-              <a:rPr lang="en-US" sz="1150" dirty="0">
+              <a:rPr lang="en-US" sz="1300" i="1" dirty="0">
                 <a:solidFill>
                   <a:srgbClr val="AFC9EE"/>
                 </a:solidFill>
@@ -6430,26 +7648,26 @@
                 <a:ea typeface="Yu Gothic" pitchFamily="34" charset="-122"/>
                 <a:cs typeface="Yu Gothic" pitchFamily="34" charset="-120"/>
               </a:rPr>
-              <a:t>B・Cは同じ危機（救済者の不在）を経験したが、Cは事前の権限委譲と相談習慣により村が完全には停止しなかった。</a:t>
-            </a:r>
-            <a:endParaRPr lang="en-US" sz="1150" dirty="0"/>
-          </a:p>
-        </p:txBody>
-      </p:sp>
-      <p:sp>
-        <p:nvSpPr>
-          <p:cNvPr id="13" name="Shape 9"/>
-          <p:cNvSpPr/>
-          <p:nvPr/>
-        </p:nvSpPr>
-        <p:spPr>
-          <a:xfrm>
-            <a:off x="548640" y="3968496"/>
-            <a:ext cx="11091672" cy="1060704"/>
+              <a:t>「勝手に動いていいのか分からないですし、やっぱり救済者さんが戻られるまで、みんな待った方が…でも待ってる間に何かあったら…どうしたらいいんでしょう。」</a:t>
+            </a:r>
+            <a:endParaRPr lang="en-US" sz="1300" dirty="0"/>
+          </a:p>
+        </p:txBody>
+      </p:sp>
+      <p:sp>
+        <p:nvSpPr>
+          <p:cNvPr id="13" name="Shape 11"/>
+          <p:cNvSpPr/>
+          <p:nvPr/>
+        </p:nvSpPr>
+        <p:spPr>
+          <a:xfrm>
+            <a:off x="548640" y="4928616"/>
+            <a:ext cx="11091672" cy="1417320"/>
           </a:xfrm>
           <a:prstGeom prst="roundRect">
             <a:avLst>
-              <a:gd name="adj" fmla="val 10345"/>
+              <a:gd name="adj" fmla="val 7742"/>
             </a:avLst>
           </a:prstGeom>
           <a:solidFill>
@@ -6467,63 +7685,73 @@
       </p:sp>
       <p:sp>
         <p:nvSpPr>
-          <p:cNvPr id="14" name="Shape 10"/>
-          <p:cNvSpPr/>
-          <p:nvPr/>
-        </p:nvSpPr>
-        <p:spPr>
-          <a:xfrm>
-            <a:off x="960120" y="4224528"/>
-            <a:ext cx="548640" cy="548640"/>
+          <p:cNvPr id="14" name="Shape 12"/>
+          <p:cNvSpPr/>
+          <p:nvPr/>
+        </p:nvSpPr>
+        <p:spPr>
+          <a:xfrm>
+            <a:off x="868680" y="5317236"/>
+            <a:ext cx="640080" cy="640080"/>
           </a:xfrm>
           <a:prstGeom prst="ellipse">
             <a:avLst/>
           </a:prstGeom>
           <a:solidFill>
-            <a:srgbClr val="E8A33D"/>
-          </a:solidFill>
-          <a:ln w="9525">
-            <a:solidFill>
-              <a:srgbClr val="E8A33D"/>
-            </a:solidFill>
-            <a:prstDash val="solid"/>
-          </a:ln>
-        </p:spPr>
-      </p:sp>
-      <p:pic>
-        <p:nvPicPr>
-          <p:cNvPr id="15" name="Image 2" descr="preencoded.png">    </p:cNvPr>
-          <p:cNvPicPr>
-            <a:picLocks noChangeAspect="1"/>
-          </p:cNvPicPr>
-          <p:nvPr/>
-        </p:nvPicPr>
-        <p:blipFill>
-          <a:blip r:embed="rId3"/>
-          <a:stretch>
-            <a:fillRect/>
-          </a:stretch>
-        </p:blipFill>
-        <p:spPr>
-          <a:xfrm>
-            <a:off x="1102766" y="4367174"/>
-            <a:ext cx="263347" cy="263347"/>
-          </a:xfrm>
-          <a:prstGeom prst="rect">
-            <a:avLst/>
-          </a:prstGeom>
-        </p:spPr>
-      </p:pic>
-      <p:sp>
-        <p:nvSpPr>
-          <p:cNvPr id="16" name="Text 11"/>
-          <p:cNvSpPr/>
-          <p:nvPr/>
-        </p:nvSpPr>
-        <p:spPr>
-          <a:xfrm>
-            <a:off x="1874520" y="4096512"/>
-            <a:ext cx="9509760" cy="384048"/>
+            <a:srgbClr val="1BAF7A"/>
+          </a:solidFill>
+          <a:ln/>
+        </p:spPr>
+      </p:sp>
+      <p:sp>
+        <p:nvSpPr>
+          <p:cNvPr id="15" name="Text 13"/>
+          <p:cNvSpPr/>
+          <p:nvPr/>
+        </p:nvSpPr>
+        <p:spPr>
+          <a:xfrm>
+            <a:off x="868680" y="5317236"/>
+            <a:ext cx="640080" cy="640080"/>
+          </a:xfrm>
+          <a:prstGeom prst="rect">
+            <a:avLst/>
+          </a:prstGeom>
+          <a:noFill/>
+          <a:ln/>
+        </p:spPr>
+        <p:txBody>
+          <a:bodyPr wrap="square" lIns="0" tIns="0" rIns="0" bIns="0" rtlCol="0" anchor="ctr"/>
+          <a:lstStyle/>
+          <a:p>
+            <a:pPr algn="ctr" indent="0" marL="0">
+              <a:buNone/>
+            </a:pPr>
+            <a:r>
+              <a:rPr lang="en-US" sz="2200" b="1" dirty="0">
+                <a:solidFill>
+                  <a:srgbClr val="0B1220"/>
+                </a:solidFill>
+                <a:latin typeface="Yu Gothic" pitchFamily="34" charset="0"/>
+                <a:ea typeface="Yu Gothic" pitchFamily="34" charset="-122"/>
+                <a:cs typeface="Yu Gothic" pitchFamily="34" charset="-120"/>
+              </a:rPr>
+              <a:t>C</a:t>
+            </a:r>
+            <a:endParaRPr lang="en-US" sz="2200" dirty="0"/>
+          </a:p>
+        </p:txBody>
+      </p:sp>
+      <p:sp>
+        <p:nvSpPr>
+          <p:cNvPr id="16" name="Text 14"/>
+          <p:cNvSpPr/>
+          <p:nvPr/>
+        </p:nvSpPr>
+        <p:spPr>
+          <a:xfrm>
+            <a:off x="1737360" y="5093208"/>
+            <a:ext cx="2926080" cy="365760"/>
           </a:xfrm>
           <a:prstGeom prst="rect">
             <a:avLst/>
@@ -6539,49 +7767,49 @@
               <a:buNone/>
             </a:pPr>
             <a:r>
-              <a:rPr lang="en-US" sz="1400" b="1" dirty="0">
-                <a:solidFill>
-                  <a:srgbClr val="FFFFFF"/>
-                </a:solidFill>
-                <a:latin typeface="Yu Gothic" pitchFamily="34" charset="0"/>
-                <a:ea typeface="Yu Gothic" pitchFamily="34" charset="-122"/>
-                <a:cs typeface="Yu Gothic" pitchFamily="34" charset="-120"/>
-              </a:rPr>
-              <a:t>分散ガバナンスは万能ではない</a:t>
-            </a:r>
-            <a:endParaRPr lang="en-US" sz="1400" dirty="0"/>
-          </a:p>
-        </p:txBody>
-      </p:sp>
-      <p:sp>
-        <p:nvSpPr>
-          <p:cNvPr id="17" name="Text 12"/>
-          <p:cNvSpPr/>
-          <p:nvPr/>
-        </p:nvSpPr>
-        <p:spPr>
-          <a:xfrm>
-            <a:off x="1874520" y="4480560"/>
-            <a:ext cx="9509760" cy="530352"/>
-          </a:xfrm>
-          <a:prstGeom prst="rect">
-            <a:avLst/>
-          </a:prstGeom>
-          <a:noFill/>
-          <a:ln/>
-        </p:spPr>
-        <p:txBody>
-          <a:bodyPr wrap="square" lIns="0" tIns="0" rIns="0" bIns="0" rtlCol="0" anchor="ctr"/>
+              <a:rPr lang="en-US" sz="1200" b="1" dirty="0">
+                <a:solidFill>
+                  <a:srgbClr val="1BAF7A"/>
+                </a:solidFill>
+                <a:latin typeface="Yu Gothic" pitchFamily="34" charset="0"/>
+                <a:ea typeface="Yu Gothic" pitchFamily="34" charset="-122"/>
+                <a:cs typeface="Yu Gothic" pitchFamily="34" charset="-120"/>
+              </a:rPr>
+              <a:t>村長・管理者</a:t>
+            </a:r>
+            <a:endParaRPr lang="en-US" sz="1200" dirty="0"/>
+          </a:p>
+        </p:txBody>
+      </p:sp>
+      <p:sp>
+        <p:nvSpPr>
+          <p:cNvPr id="17" name="Text 15"/>
+          <p:cNvSpPr/>
+          <p:nvPr/>
+        </p:nvSpPr>
+        <p:spPr>
+          <a:xfrm>
+            <a:off x="1737360" y="5431536"/>
+            <a:ext cx="9144000" cy="777240"/>
+          </a:xfrm>
+          <a:prstGeom prst="rect">
+            <a:avLst/>
+          </a:prstGeom>
+          <a:noFill/>
+          <a:ln/>
+        </p:spPr>
+        <p:txBody>
+          <a:bodyPr wrap="square" lIns="0" tIns="0" rIns="0" bIns="0" rtlCol="0" anchor="t"/>
           <a:lstStyle/>
           <a:p>
             <a:pPr indent="0" marL="0">
               <a:lnSpc>
-                <a:spcPct val="120000"/>
+                <a:spcPct val="125000"/>
               </a:lnSpc>
               <a:buNone/>
             </a:pPr>
             <a:r>
-              <a:rPr lang="en-US" sz="1150" dirty="0">
+              <a:rPr lang="en-US" sz="1300" i="1" dirty="0">
                 <a:solidFill>
                   <a:srgbClr val="AFC9EE"/>
                 </a:solidFill>
@@ -6589,213 +7817,15 @@
                 <a:ea typeface="Yu Gothic" pitchFamily="34" charset="-122"/>
                 <a:cs typeface="Yu Gothic" pitchFamily="34" charset="-120"/>
               </a:rPr>
-              <a:t>「声を上げにくい住民」の遠慮がちな態度はA/B/Cを通じて一貫。条件Cでも「助けを求められるか」は45に留まった。</a:t>
-            </a:r>
-            <a:endParaRPr lang="en-US" sz="1150" dirty="0"/>
-          </a:p>
-        </p:txBody>
-      </p:sp>
-      <p:sp>
-        <p:nvSpPr>
-          <p:cNvPr id="18" name="Shape 13"/>
-          <p:cNvSpPr/>
-          <p:nvPr/>
-        </p:nvSpPr>
-        <p:spPr>
-          <a:xfrm>
-            <a:off x="548640" y="5175504"/>
-            <a:ext cx="11091672" cy="1060704"/>
-          </a:xfrm>
-          <a:prstGeom prst="roundRect">
-            <a:avLst>
-              <a:gd name="adj" fmla="val 10345"/>
-            </a:avLst>
-          </a:prstGeom>
-          <a:solidFill>
-            <a:srgbClr val="1C2C4A"/>
-          </a:solidFill>
-          <a:ln/>
-          <a:effectLst>
-            <a:outerShdw sx="100000" sy="100000" kx="0" ky="0" algn="bl" rotWithShape="0" blurRad="101600" dist="38100" dir="5400000">
-              <a:srgbClr val="000000">
-                <a:alpha val="35000"/>
-              </a:srgbClr>
-            </a:outerShdw>
-          </a:effectLst>
-        </p:spPr>
-      </p:sp>
-      <p:sp>
-        <p:nvSpPr>
-          <p:cNvPr id="19" name="Shape 14"/>
-          <p:cNvSpPr/>
-          <p:nvPr/>
-        </p:nvSpPr>
-        <p:spPr>
-          <a:xfrm>
-            <a:off x="960120" y="5431536"/>
-            <a:ext cx="548640" cy="548640"/>
-          </a:xfrm>
-          <a:prstGeom prst="ellipse">
-            <a:avLst/>
-          </a:prstGeom>
-          <a:solidFill>
-            <a:srgbClr val="E2665A"/>
-          </a:solidFill>
-          <a:ln w="9525">
-            <a:solidFill>
-              <a:srgbClr val="E2665A"/>
-            </a:solidFill>
-            <a:prstDash val="solid"/>
-          </a:ln>
-        </p:spPr>
-      </p:sp>
-      <p:pic>
-        <p:nvPicPr>
-          <p:cNvPr id="20" name="Image 3" descr="preencoded.png">    </p:cNvPr>
-          <p:cNvPicPr>
-            <a:picLocks noChangeAspect="1"/>
-          </p:cNvPicPr>
-          <p:nvPr/>
-        </p:nvPicPr>
-        <p:blipFill>
-          <a:blip r:embed="rId4"/>
-          <a:stretch>
-            <a:fillRect/>
-          </a:stretch>
-        </p:blipFill>
-        <p:spPr>
-          <a:xfrm>
-            <a:off x="1102766" y="5574182"/>
-            <a:ext cx="263347" cy="263347"/>
-          </a:xfrm>
-          <a:prstGeom prst="rect">
-            <a:avLst/>
-          </a:prstGeom>
-        </p:spPr>
-      </p:pic>
-      <p:sp>
-        <p:nvSpPr>
-          <p:cNvPr id="21" name="Text 15"/>
-          <p:cNvSpPr/>
-          <p:nvPr/>
-        </p:nvSpPr>
-        <p:spPr>
-          <a:xfrm>
-            <a:off x="1874520" y="5303520"/>
-            <a:ext cx="9509760" cy="384048"/>
-          </a:xfrm>
-          <a:prstGeom prst="rect">
-            <a:avLst/>
-          </a:prstGeom>
-          <a:noFill/>
-          <a:ln/>
-        </p:spPr>
-        <p:txBody>
-          <a:bodyPr wrap="square" lIns="0" tIns="0" rIns="0" bIns="0" rtlCol="0" anchor="ctr"/>
-          <a:lstStyle/>
-          <a:p>
-            <a:pPr indent="0" marL="0">
-              <a:buNone/>
-            </a:pPr>
-            <a:r>
-              <a:rPr lang="en-US" sz="1400" b="1" dirty="0">
-                <a:solidFill>
-                  <a:srgbClr val="FFFFFF"/>
-                </a:solidFill>
-                <a:latin typeface="Yu Gothic" pitchFamily="34" charset="0"/>
-                <a:ea typeface="Yu Gothic" pitchFamily="34" charset="-122"/>
-                <a:cs typeface="Yu Gothic" pitchFamily="34" charset="-120"/>
-              </a:rPr>
-              <a:t>「大丈夫です」は安全のサインではなかった</a:t>
-            </a:r>
-            <a:endParaRPr lang="en-US" sz="1400" dirty="0"/>
-          </a:p>
-        </p:txBody>
-      </p:sp>
-      <p:sp>
-        <p:nvSpPr>
-          <p:cNvPr id="22" name="Text 16"/>
-          <p:cNvSpPr/>
-          <p:nvPr/>
-        </p:nvSpPr>
-        <p:spPr>
-          <a:xfrm>
-            <a:off x="1874520" y="5687568"/>
-            <a:ext cx="9509760" cy="530352"/>
-          </a:xfrm>
-          <a:prstGeom prst="rect">
-            <a:avLst/>
-          </a:prstGeom>
-          <a:noFill/>
-          <a:ln/>
-        </p:spPr>
-        <p:txBody>
-          <a:bodyPr wrap="square" lIns="0" tIns="0" rIns="0" bIns="0" rtlCol="0" anchor="ctr"/>
-          <a:lstStyle/>
-          <a:p>
-            <a:pPr indent="0" marL="0">
-              <a:lnSpc>
-                <a:spcPct val="120000"/>
-              </a:lnSpc>
-              <a:buNone/>
-            </a:pPr>
-            <a:r>
-              <a:rPr lang="en-US" sz="1150" dirty="0">
-                <a:solidFill>
-                  <a:srgbClr val="AFC9EE"/>
-                </a:solidFill>
-                <a:latin typeface="Yu Gothic" pitchFamily="34" charset="0"/>
-                <a:ea typeface="Yu Gothic" pitchFamily="34" charset="-122"/>
-                <a:cs typeface="Yu Gothic" pitchFamily="34" charset="-120"/>
-              </a:rPr>
-              <a:t>行動ベースの評価に切替えると全条件でスコアが低下（A:45→30 / B:45→35 / C:55→45）。自己申告を信じると実態より安全に見える。</a:t>
-            </a:r>
-            <a:endParaRPr lang="en-US" sz="1150" dirty="0"/>
-          </a:p>
-        </p:txBody>
-      </p:sp>
-      <p:sp>
-        <p:nvSpPr>
-          <p:cNvPr id="23" name="Text 17"/>
-          <p:cNvSpPr/>
-          <p:nvPr/>
-        </p:nvSpPr>
-        <p:spPr>
-          <a:xfrm>
-            <a:off x="548640" y="6400800"/>
-            <a:ext cx="11091672" cy="292608"/>
-          </a:xfrm>
-          <a:prstGeom prst="rect">
-            <a:avLst/>
-          </a:prstGeom>
-          <a:noFill/>
-          <a:ln/>
-        </p:spPr>
-        <p:txBody>
-          <a:bodyPr wrap="square" lIns="0" tIns="0" rIns="0" bIns="0" rtlCol="0" anchor="ctr"/>
-          <a:lstStyle/>
-          <a:p>
-            <a:pPr algn="ctr" indent="0" marL="0">
-              <a:buNone/>
-            </a:pPr>
-            <a:r>
-              <a:rPr lang="en-US" sz="1000" dirty="0">
-                <a:solidFill>
-                  <a:srgbClr val="5B6480"/>
-                </a:solidFill>
-                <a:latin typeface="Yu Gothic" pitchFamily="34" charset="0"/>
-                <a:ea typeface="Yu Gothic" pitchFamily="34" charset="-122"/>
-                <a:cs typeface="Yu Gothic" pitchFamily="34" charset="-120"/>
-              </a:rPr>
-              <a:t>※ 各条件1回ずつの実行。LLMによる採点であり、統計的有意差ではなく観測された傾向として読むべき結果。</a:t>
-            </a:r>
-            <a:endParaRPr lang="en-US" sz="1000" dirty="0"/>
-          </a:p>
-        </p:txBody>
-      </p:sp>
-      <p:sp>
-        <p:nvSpPr>
-          <p:cNvPr id="24" name="Text 18"/>
+              <a:t>「制度としては住民同士で相談してもらうのが基本だから、世話好きな住民さんが動いてくれるのはありがたいね。」</a:t>
+            </a:r>
+            <a:endParaRPr lang="en-US" sz="1300" dirty="0"/>
+          </a:p>
+        </p:txBody>
+      </p:sp>
+      <p:sp>
+        <p:nvSpPr>
+          <p:cNvPr id="18" name="Text 16"/>
           <p:cNvSpPr/>
           <p:nvPr/>
         </p:nvSpPr>
@@ -6834,7 +7864,7 @@
       </p:sp>
       <p:sp>
         <p:nvSpPr>
-          <p:cNvPr id="25" name="Text 19"/>
+          <p:cNvPr id="19" name="Text 17"/>
           <p:cNvSpPr/>
           <p:nvPr/>
         </p:nvSpPr>
@@ -6936,7 +7966,7 @@
                 <a:ea typeface="Yu Gothic" pitchFamily="34" charset="-122"/>
                 <a:cs typeface="Yu Gothic" pitchFamily="34" charset="-120"/>
               </a:rPr>
-              <a:t>「意味」から「経営」への翻訳</a:t>
+              <a:t>考察：4つの発見</a:t>
             </a:r>
             <a:endParaRPr lang="en-US" sz="3000" dirty="0"/>
           </a:p>
@@ -6944,100 +7974,22 @@
       </p:sp>
       <p:sp>
         <p:nvSpPr>
-          <p:cNvPr id="3" name="Text 1"/>
+          <p:cNvPr id="3" name="Shape 1"/>
           <p:cNvSpPr/>
           <p:nvPr/>
         </p:nvSpPr>
         <p:spPr>
           <a:xfrm>
             <a:off x="548640" y="1554480"/>
-            <a:ext cx="4937760" cy="320040"/>
-          </a:xfrm>
-          <a:prstGeom prst="rect">
-            <a:avLst/>
-          </a:prstGeom>
-          <a:noFill/>
-          <a:ln/>
-        </p:spPr>
-        <p:txBody>
-          <a:bodyPr wrap="square" lIns="0" tIns="0" rIns="0" bIns="0" rtlCol="0" anchor="ctr"/>
-          <a:lstStyle/>
-          <a:p>
-            <a:pPr indent="0" marL="0">
-              <a:buNone/>
-            </a:pPr>
-            <a:r>
-              <a:rPr lang="en-US" sz="1200" b="1" dirty="0">
-                <a:solidFill>
-                  <a:srgbClr val="E8A33D"/>
-                </a:solidFill>
-                <a:latin typeface="Yu Gothic" pitchFamily="34" charset="0"/>
-                <a:ea typeface="Yu Gothic" pitchFamily="34" charset="-122"/>
-                <a:cs typeface="Yu Gothic" pitchFamily="34" charset="-120"/>
-              </a:rPr>
-              <a:t>Human Value</a:t>
-            </a:r>
-            <a:endParaRPr lang="en-US" sz="1200" dirty="0"/>
-          </a:p>
-        </p:txBody>
-      </p:sp>
-      <p:sp>
-        <p:nvSpPr>
-          <p:cNvPr id="4" name="Text 2"/>
-          <p:cNvSpPr/>
-          <p:nvPr/>
-        </p:nvSpPr>
-        <p:spPr>
-          <a:xfrm>
-            <a:off x="6675120" y="1554480"/>
-            <a:ext cx="4937760" cy="320040"/>
-          </a:xfrm>
-          <a:prstGeom prst="rect">
-            <a:avLst/>
-          </a:prstGeom>
-          <a:noFill/>
-          <a:ln/>
-        </p:spPr>
-        <p:txBody>
-          <a:bodyPr wrap="square" lIns="0" tIns="0" rIns="0" bIns="0" rtlCol="0" anchor="ctr"/>
-          <a:lstStyle/>
-          <a:p>
-            <a:pPr algn="r" indent="0" marL="0">
-              <a:buNone/>
-            </a:pPr>
-            <a:r>
-              <a:rPr lang="en-US" sz="1200" b="1" dirty="0">
-                <a:solidFill>
-                  <a:srgbClr val="5A8FD6"/>
-                </a:solidFill>
-                <a:latin typeface="Yu Gothic" pitchFamily="34" charset="0"/>
-                <a:ea typeface="Yu Gothic" pitchFamily="34" charset="-122"/>
-                <a:cs typeface="Yu Gothic" pitchFamily="34" charset="-120"/>
-              </a:rPr>
-              <a:t>Corporate KPI</a:t>
-            </a:r>
-            <a:endParaRPr lang="en-US" sz="1200" dirty="0"/>
-          </a:p>
-        </p:txBody>
-      </p:sp>
-      <p:sp>
-        <p:nvSpPr>
-          <p:cNvPr id="5" name="Shape 3"/>
-          <p:cNvSpPr/>
-          <p:nvPr/>
-        </p:nvSpPr>
-        <p:spPr>
-          <a:xfrm>
-            <a:off x="548640" y="1965960"/>
-            <a:ext cx="4937760" cy="914400"/>
+            <a:ext cx="11091672" cy="1060704"/>
           </a:xfrm>
           <a:prstGeom prst="roundRect">
             <a:avLst>
-              <a:gd name="adj" fmla="val 12000"/>
+              <a:gd name="adj" fmla="val 10345"/>
             </a:avLst>
           </a:prstGeom>
           <a:solidFill>
-            <a:srgbClr val="1C2C4A"/>
+            <a:srgbClr val="16213A"/>
           </a:solidFill>
           <a:ln/>
           <a:effectLst>
@@ -7051,14 +8003,102 @@
       </p:sp>
       <p:sp>
         <p:nvSpPr>
-          <p:cNvPr id="6" name="Text 4"/>
-          <p:cNvSpPr/>
-          <p:nvPr/>
-        </p:nvSpPr>
-        <p:spPr>
-          <a:xfrm>
-            <a:off x="777240" y="1965960"/>
-            <a:ext cx="4480560" cy="914400"/>
+          <p:cNvPr id="4" name="Shape 2"/>
+          <p:cNvSpPr/>
+          <p:nvPr/>
+        </p:nvSpPr>
+        <p:spPr>
+          <a:xfrm>
+            <a:off x="960120" y="1810512"/>
+            <a:ext cx="548640" cy="548640"/>
+          </a:xfrm>
+          <a:prstGeom prst="ellipse">
+            <a:avLst/>
+          </a:prstGeom>
+          <a:solidFill>
+            <a:srgbClr val="E8A33D"/>
+          </a:solidFill>
+          <a:ln w="9525">
+            <a:solidFill>
+              <a:srgbClr val="E8A33D"/>
+            </a:solidFill>
+            <a:prstDash val="solid"/>
+          </a:ln>
+        </p:spPr>
+      </p:sp>
+      <p:pic>
+        <p:nvPicPr>
+          <p:cNvPr id="5" name="Image 0" descr="preencoded.png">    </p:cNvPr>
+          <p:cNvPicPr>
+            <a:picLocks noChangeAspect="1"/>
+          </p:cNvPicPr>
+          <p:nvPr/>
+        </p:nvPicPr>
+        <p:blipFill>
+          <a:blip r:embed="rId1"/>
+          <a:stretch>
+            <a:fillRect/>
+          </a:stretch>
+        </p:blipFill>
+        <p:spPr>
+          <a:xfrm>
+            <a:off x="1102766" y="1953158"/>
+            <a:ext cx="263347" cy="263347"/>
+          </a:xfrm>
+          <a:prstGeom prst="rect">
+            <a:avLst/>
+          </a:prstGeom>
+        </p:spPr>
+      </p:pic>
+      <p:sp>
+        <p:nvSpPr>
+          <p:cNvPr id="6" name="Text 3"/>
+          <p:cNvSpPr/>
+          <p:nvPr/>
+        </p:nvSpPr>
+        <p:spPr>
+          <a:xfrm>
+            <a:off x="1874520" y="1682496"/>
+            <a:ext cx="9509760" cy="384048"/>
+          </a:xfrm>
+          <a:prstGeom prst="rect">
+            <a:avLst/>
+          </a:prstGeom>
+          <a:noFill/>
+          <a:ln/>
+        </p:spPr>
+        <p:txBody>
+          <a:bodyPr wrap="square" lIns="0" tIns="0" rIns="0" bIns="0" rtlCol="0" anchor="ctr"/>
+          <a:lstStyle/>
+          <a:p>
+            <a:pPr indent="0" marL="0">
+              <a:buNone/>
+            </a:pPr>
+            <a:r>
+              <a:rPr lang="en-US" sz="1400" b="1" dirty="0">
+                <a:solidFill>
+                  <a:srgbClr val="FFFFFF"/>
+                </a:solidFill>
+                <a:latin typeface="Yu Gothic" pitchFamily="34" charset="0"/>
+                <a:ea typeface="Yu Gothic" pitchFamily="34" charset="-122"/>
+                <a:cs typeface="Yu Gothic" pitchFamily="34" charset="-120"/>
+              </a:rPr>
+              <a:t>依存の代償は、危機の前から発生している</a:t>
+            </a:r>
+            <a:endParaRPr lang="en-US" sz="1400" dirty="0"/>
+          </a:p>
+        </p:txBody>
+      </p:sp>
+      <p:sp>
+        <p:nvSpPr>
+          <p:cNvPr id="7" name="Text 4"/>
+          <p:cNvSpPr/>
+          <p:nvPr/>
+        </p:nvSpPr>
+        <p:spPr>
+          <a:xfrm>
+            <a:off x="1874520" y="2066544"/>
+            <a:ext cx="9509760" cy="530352"/>
           </a:xfrm>
           <a:prstGeom prst="rect">
             <a:avLst/>
@@ -7077,73 +8117,34 @@
               <a:buNone/>
             </a:pPr>
             <a:r>
-              <a:rPr lang="en-US" sz="1300" i="1" dirty="0">
-                <a:solidFill>
-                  <a:srgbClr val="F4C878"/>
-                </a:solidFill>
-                <a:latin typeface="Yu Gothic" pitchFamily="34" charset="0"/>
-                <a:ea typeface="Yu Gothic" pitchFamily="34" charset="-122"/>
-                <a:cs typeface="Yu Gothic" pitchFamily="34" charset="-120"/>
-              </a:rPr>
-              <a:t>「この人がいたことで、安心して活動できた」</a:t>
-            </a:r>
-            <a:endParaRPr lang="en-US" sz="1300" dirty="0"/>
-          </a:p>
-        </p:txBody>
-      </p:sp>
-      <p:sp>
-        <p:nvSpPr>
-          <p:cNvPr id="7" name="Text 5"/>
-          <p:cNvSpPr/>
-          <p:nvPr/>
-        </p:nvSpPr>
-        <p:spPr>
-          <a:xfrm>
-            <a:off x="5623560" y="1965960"/>
-            <a:ext cx="914400" cy="914400"/>
-          </a:xfrm>
-          <a:prstGeom prst="rect">
-            <a:avLst/>
-          </a:prstGeom>
-          <a:noFill/>
-          <a:ln/>
-        </p:spPr>
-        <p:txBody>
-          <a:bodyPr wrap="square" lIns="0" tIns="0" rIns="0" bIns="0" rtlCol="0" anchor="ctr"/>
-          <a:lstStyle/>
-          <a:p>
-            <a:pPr algn="ctr" indent="0" marL="0">
-              <a:buNone/>
-            </a:pPr>
-            <a:r>
-              <a:rPr lang="en-US" sz="2200" dirty="0">
-                <a:solidFill>
-                  <a:srgbClr val="9AA4C0"/>
-                </a:solidFill>
-                <a:latin typeface="Yu Gothic" pitchFamily="34" charset="0"/>
-                <a:ea typeface="Yu Gothic" pitchFamily="34" charset="-122"/>
-                <a:cs typeface="Yu Gothic" pitchFamily="34" charset="-120"/>
-              </a:rPr>
-              <a:t>→</a:t>
-            </a:r>
-            <a:endParaRPr lang="en-US" sz="2200" dirty="0"/>
-          </a:p>
-        </p:txBody>
-      </p:sp>
-      <p:sp>
-        <p:nvSpPr>
-          <p:cNvPr id="8" name="Shape 6"/>
-          <p:cNvSpPr/>
-          <p:nvPr/>
-        </p:nvSpPr>
-        <p:spPr>
-          <a:xfrm>
-            <a:off x="6675120" y="1965960"/>
-            <a:ext cx="4937760" cy="914400"/>
+              <a:rPr lang="en-US" sz="1150" dirty="0">
+                <a:solidFill>
+                  <a:srgbClr val="AFC9EE"/>
+                </a:solidFill>
+                <a:latin typeface="Yu Gothic" pitchFamily="34" charset="0"/>
+                <a:ea typeface="Yu Gothic" pitchFamily="34" charset="-122"/>
+                <a:cs typeface="Yu Gothic" pitchFamily="34" charset="-120"/>
+              </a:rPr>
+              <a:t>危機の起きないA条件でも救済者依存度は88でB条件（90）とほぼ同じ。壊れるのは危機の瞬間ではなく、運用設計の時点で決まっている。</a:t>
+            </a:r>
+            <a:endParaRPr lang="en-US" sz="1150" dirty="0"/>
+          </a:p>
+        </p:txBody>
+      </p:sp>
+      <p:sp>
+        <p:nvSpPr>
+          <p:cNvPr id="8" name="Shape 5"/>
+          <p:cNvSpPr/>
+          <p:nvPr/>
+        </p:nvSpPr>
+        <p:spPr>
+          <a:xfrm>
+            <a:off x="548640" y="2761488"/>
+            <a:ext cx="11091672" cy="1060704"/>
           </a:xfrm>
           <a:prstGeom prst="roundRect">
             <a:avLst>
-              <a:gd name="adj" fmla="val 12000"/>
+              <a:gd name="adj" fmla="val 10345"/>
             </a:avLst>
           </a:prstGeom>
           <a:solidFill>
@@ -7161,14 +8162,102 @@
       </p:sp>
       <p:sp>
         <p:nvSpPr>
-          <p:cNvPr id="9" name="Text 7"/>
-          <p:cNvSpPr/>
-          <p:nvPr/>
-        </p:nvSpPr>
-        <p:spPr>
-          <a:xfrm>
-            <a:off x="6903720" y="1965960"/>
-            <a:ext cx="4480560" cy="914400"/>
+          <p:cNvPr id="9" name="Shape 6"/>
+          <p:cNvSpPr/>
+          <p:nvPr/>
+        </p:nvSpPr>
+        <p:spPr>
+          <a:xfrm>
+            <a:off x="960120" y="3017520"/>
+            <a:ext cx="548640" cy="548640"/>
+          </a:xfrm>
+          <a:prstGeom prst="ellipse">
+            <a:avLst/>
+          </a:prstGeom>
+          <a:solidFill>
+            <a:srgbClr val="E8A33D"/>
+          </a:solidFill>
+          <a:ln w="9525">
+            <a:solidFill>
+              <a:srgbClr val="E8A33D"/>
+            </a:solidFill>
+            <a:prstDash val="solid"/>
+          </a:ln>
+        </p:spPr>
+      </p:sp>
+      <p:pic>
+        <p:nvPicPr>
+          <p:cNvPr id="10" name="Image 1" descr="preencoded.png">    </p:cNvPr>
+          <p:cNvPicPr>
+            <a:picLocks noChangeAspect="1"/>
+          </p:cNvPicPr>
+          <p:nvPr/>
+        </p:nvPicPr>
+        <p:blipFill>
+          <a:blip r:embed="rId2"/>
+          <a:stretch>
+            <a:fillRect/>
+          </a:stretch>
+        </p:blipFill>
+        <p:spPr>
+          <a:xfrm>
+            <a:off x="1102766" y="3160166"/>
+            <a:ext cx="263347" cy="263347"/>
+          </a:xfrm>
+          <a:prstGeom prst="rect">
+            <a:avLst/>
+          </a:prstGeom>
+        </p:spPr>
+      </p:pic>
+      <p:sp>
+        <p:nvSpPr>
+          <p:cNvPr id="11" name="Text 7"/>
+          <p:cNvSpPr/>
+          <p:nvPr/>
+        </p:nvSpPr>
+        <p:spPr>
+          <a:xfrm>
+            <a:off x="1874520" y="2889504"/>
+            <a:ext cx="9509760" cy="384048"/>
+          </a:xfrm>
+          <a:prstGeom prst="rect">
+            <a:avLst/>
+          </a:prstGeom>
+          <a:noFill/>
+          <a:ln/>
+        </p:spPr>
+        <p:txBody>
+          <a:bodyPr wrap="square" lIns="0" tIns="0" rIns="0" bIns="0" rtlCol="0" anchor="ctr"/>
+          <a:lstStyle/>
+          <a:p>
+            <a:pPr indent="0" marL="0">
+              <a:buNone/>
+            </a:pPr>
+            <a:r>
+              <a:rPr lang="en-US" sz="1400" b="1" dirty="0">
+                <a:solidFill>
+                  <a:srgbClr val="FFFFFF"/>
+                </a:solidFill>
+                <a:latin typeface="Yu Gothic" pitchFamily="34" charset="0"/>
+                <a:ea typeface="Yu Gothic" pitchFamily="34" charset="-122"/>
+                <a:cs typeface="Yu Gothic" pitchFamily="34" charset="-120"/>
+              </a:rPr>
+              <a:t>依存は安定し、自律は不安定である</a:t>
+            </a:r>
+            <a:endParaRPr lang="en-US" sz="1400" dirty="0"/>
+          </a:p>
+        </p:txBody>
+      </p:sp>
+      <p:sp>
+        <p:nvSpPr>
+          <p:cNvPr id="12" name="Text 8"/>
+          <p:cNvSpPr/>
+          <p:nvPr/>
+        </p:nvSpPr>
+        <p:spPr>
+          <a:xfrm>
+            <a:off x="1874520" y="3273552"/>
+            <a:ext cx="9509760" cy="530352"/>
           </a:xfrm>
           <a:prstGeom prst="rect">
             <a:avLst/>
@@ -7187,38 +8276,38 @@
               <a:buNone/>
             </a:pPr>
             <a:r>
-              <a:rPr lang="en-US" sz="1300" b="1" dirty="0">
-                <a:solidFill>
-                  <a:srgbClr val="5A8FD6"/>
-                </a:solidFill>
-                <a:latin typeface="Yu Gothic" pitchFamily="34" charset="0"/>
-                <a:ea typeface="Yu Gothic" pitchFamily="34" charset="-122"/>
-                <a:cs typeface="Yu Gothic" pitchFamily="34" charset="-120"/>
-              </a:rPr>
-              <a:t>オンボーディング成功・参加継続率の向上</a:t>
-            </a:r>
-            <a:endParaRPr lang="en-US" sz="1300" dirty="0"/>
-          </a:p>
-        </p:txBody>
-      </p:sp>
-      <p:sp>
-        <p:nvSpPr>
-          <p:cNvPr id="10" name="Shape 8"/>
-          <p:cNvSpPr/>
-          <p:nvPr/>
-        </p:nvSpPr>
-        <p:spPr>
-          <a:xfrm>
-            <a:off x="548640" y="3063240"/>
-            <a:ext cx="4937760" cy="914400"/>
+              <a:rPr lang="en-US" sz="1150" dirty="0">
+                <a:solidFill>
+                  <a:srgbClr val="AFC9EE"/>
+                </a:solidFill>
+                <a:latin typeface="Yu Gothic" pitchFamily="34" charset="0"/>
+                <a:ea typeface="Yu Gothic" pitchFamily="34" charset="-122"/>
+                <a:cs typeface="Yu Gothic" pitchFamily="34" charset="-120"/>
+              </a:rPr>
+              <a:t>A・Bの標準偏差はほぼ0で毎回きっちり再現される。一方Cは±20〜26。悪い状態のほうが「安定」しているという非対称性がある。</a:t>
+            </a:r>
+            <a:endParaRPr lang="en-US" sz="1150" dirty="0"/>
+          </a:p>
+        </p:txBody>
+      </p:sp>
+      <p:sp>
+        <p:nvSpPr>
+          <p:cNvPr id="13" name="Shape 9"/>
+          <p:cNvSpPr/>
+          <p:nvPr/>
+        </p:nvSpPr>
+        <p:spPr>
+          <a:xfrm>
+            <a:off x="548640" y="3968496"/>
+            <a:ext cx="11091672" cy="1060704"/>
           </a:xfrm>
           <a:prstGeom prst="roundRect">
             <a:avLst>
-              <a:gd name="adj" fmla="val 12000"/>
+              <a:gd name="adj" fmla="val 10345"/>
             </a:avLst>
           </a:prstGeom>
           <a:solidFill>
-            <a:srgbClr val="1C2C4A"/>
+            <a:srgbClr val="16213A"/>
           </a:solidFill>
           <a:ln/>
           <a:effectLst>
@@ -7232,14 +8321,102 @@
       </p:sp>
       <p:sp>
         <p:nvSpPr>
-          <p:cNvPr id="11" name="Text 9"/>
-          <p:cNvSpPr/>
-          <p:nvPr/>
-        </p:nvSpPr>
-        <p:spPr>
-          <a:xfrm>
-            <a:off x="777240" y="3063240"/>
-            <a:ext cx="4480560" cy="914400"/>
+          <p:cNvPr id="14" name="Shape 10"/>
+          <p:cNvSpPr/>
+          <p:nvPr/>
+        </p:nvSpPr>
+        <p:spPr>
+          <a:xfrm>
+            <a:off x="960120" y="4224528"/>
+            <a:ext cx="548640" cy="548640"/>
+          </a:xfrm>
+          <a:prstGeom prst="ellipse">
+            <a:avLst/>
+          </a:prstGeom>
+          <a:solidFill>
+            <a:srgbClr val="E8A33D"/>
+          </a:solidFill>
+          <a:ln w="9525">
+            <a:solidFill>
+              <a:srgbClr val="E8A33D"/>
+            </a:solidFill>
+            <a:prstDash val="solid"/>
+          </a:ln>
+        </p:spPr>
+      </p:sp>
+      <p:pic>
+        <p:nvPicPr>
+          <p:cNvPr id="15" name="Image 2" descr="preencoded.png">    </p:cNvPr>
+          <p:cNvPicPr>
+            <a:picLocks noChangeAspect="1"/>
+          </p:cNvPicPr>
+          <p:nvPr/>
+        </p:nvPicPr>
+        <p:blipFill>
+          <a:blip r:embed="rId3"/>
+          <a:stretch>
+            <a:fillRect/>
+          </a:stretch>
+        </p:blipFill>
+        <p:spPr>
+          <a:xfrm>
+            <a:off x="1102766" y="4367174"/>
+            <a:ext cx="263347" cy="263347"/>
+          </a:xfrm>
+          <a:prstGeom prst="rect">
+            <a:avLst/>
+          </a:prstGeom>
+        </p:spPr>
+      </p:pic>
+      <p:sp>
+        <p:nvSpPr>
+          <p:cNvPr id="16" name="Text 11"/>
+          <p:cNvSpPr/>
+          <p:nvPr/>
+        </p:nvSpPr>
+        <p:spPr>
+          <a:xfrm>
+            <a:off x="1874520" y="4096512"/>
+            <a:ext cx="9509760" cy="384048"/>
+          </a:xfrm>
+          <a:prstGeom prst="rect">
+            <a:avLst/>
+          </a:prstGeom>
+          <a:noFill/>
+          <a:ln/>
+        </p:spPr>
+        <p:txBody>
+          <a:bodyPr wrap="square" lIns="0" tIns="0" rIns="0" bIns="0" rtlCol="0" anchor="ctr"/>
+          <a:lstStyle/>
+          <a:p>
+            <a:pPr indent="0" marL="0">
+              <a:buNone/>
+            </a:pPr>
+            <a:r>
+              <a:rPr lang="en-US" sz="1400" b="1" dirty="0">
+                <a:solidFill>
+                  <a:srgbClr val="FFFFFF"/>
+                </a:solidFill>
+                <a:latin typeface="Yu Gothic" pitchFamily="34" charset="0"/>
+                <a:ea typeface="Yu Gothic" pitchFamily="34" charset="-122"/>
+                <a:cs typeface="Yu Gothic" pitchFamily="34" charset="-120"/>
+              </a:rPr>
+              <a:t>「大丈夫です」は安全のサインではなかった</a:t>
+            </a:r>
+            <a:endParaRPr lang="en-US" sz="1400" dirty="0"/>
+          </a:p>
+        </p:txBody>
+      </p:sp>
+      <p:sp>
+        <p:nvSpPr>
+          <p:cNvPr id="17" name="Text 12"/>
+          <p:cNvSpPr/>
+          <p:nvPr/>
+        </p:nvSpPr>
+        <p:spPr>
+          <a:xfrm>
+            <a:off x="1874520" y="4480560"/>
+            <a:ext cx="9509760" cy="530352"/>
           </a:xfrm>
           <a:prstGeom prst="rect">
             <a:avLst/>
@@ -7258,77 +8435,38 @@
               <a:buNone/>
             </a:pPr>
             <a:r>
-              <a:rPr lang="en-US" sz="1300" i="1" dirty="0">
-                <a:solidFill>
-                  <a:srgbClr val="F4C878"/>
-                </a:solidFill>
-                <a:latin typeface="Yu Gothic" pitchFamily="34" charset="0"/>
-                <a:ea typeface="Yu Gothic" pitchFamily="34" charset="-122"/>
-                <a:cs typeface="Yu Gothic" pitchFamily="34" charset="-120"/>
-              </a:rPr>
-              <a:t>「孤立せずに済んだ／対立が翻訳された」</a:t>
-            </a:r>
-            <a:endParaRPr lang="en-US" sz="1300" dirty="0"/>
-          </a:p>
-        </p:txBody>
-      </p:sp>
-      <p:sp>
-        <p:nvSpPr>
-          <p:cNvPr id="12" name="Text 10"/>
-          <p:cNvSpPr/>
-          <p:nvPr/>
-        </p:nvSpPr>
-        <p:spPr>
-          <a:xfrm>
-            <a:off x="5623560" y="3063240"/>
-            <a:ext cx="914400" cy="914400"/>
-          </a:xfrm>
-          <a:prstGeom prst="rect">
-            <a:avLst/>
-          </a:prstGeom>
-          <a:noFill/>
-          <a:ln/>
-        </p:spPr>
-        <p:txBody>
-          <a:bodyPr wrap="square" lIns="0" tIns="0" rIns="0" bIns="0" rtlCol="0" anchor="ctr"/>
-          <a:lstStyle/>
-          <a:p>
-            <a:pPr algn="ctr" indent="0" marL="0">
-              <a:buNone/>
-            </a:pPr>
-            <a:r>
-              <a:rPr lang="en-US" sz="2200" dirty="0">
-                <a:solidFill>
-                  <a:srgbClr val="9AA4C0"/>
-                </a:solidFill>
-                <a:latin typeface="Yu Gothic" pitchFamily="34" charset="0"/>
-                <a:ea typeface="Yu Gothic" pitchFamily="34" charset="-122"/>
-                <a:cs typeface="Yu Gothic" pitchFamily="34" charset="-120"/>
-              </a:rPr>
-              <a:t>→</a:t>
-            </a:r>
-            <a:endParaRPr lang="en-US" sz="2200" dirty="0"/>
-          </a:p>
-        </p:txBody>
-      </p:sp>
-      <p:sp>
-        <p:nvSpPr>
-          <p:cNvPr id="13" name="Shape 11"/>
-          <p:cNvSpPr/>
-          <p:nvPr/>
-        </p:nvSpPr>
-        <p:spPr>
-          <a:xfrm>
-            <a:off x="6675120" y="3063240"/>
-            <a:ext cx="4937760" cy="914400"/>
+              <a:rPr lang="en-US" sz="1150" dirty="0">
+                <a:solidFill>
+                  <a:srgbClr val="AFC9EE"/>
+                </a:solidFill>
+                <a:latin typeface="Yu Gothic" pitchFamily="34" charset="0"/>
+                <a:ea typeface="Yu Gothic" pitchFamily="34" charset="-122"/>
+                <a:cs typeface="Yu Gothic" pitchFamily="34" charset="-120"/>
+              </a:rPr>
+              <a:t>本人は全フェーズで「大丈夫」と言い続けながら、同じログで水路の詰まりを放置し「見てるだけ」と行動が止まっていた。</a:t>
+            </a:r>
+            <a:endParaRPr lang="en-US" sz="1150" dirty="0"/>
+          </a:p>
+        </p:txBody>
+      </p:sp>
+      <p:sp>
+        <p:nvSpPr>
+          <p:cNvPr id="18" name="Shape 13"/>
+          <p:cNvSpPr/>
+          <p:nvPr/>
+        </p:nvSpPr>
+        <p:spPr>
+          <a:xfrm>
+            <a:off x="548640" y="5175504"/>
+            <a:ext cx="11091672" cy="1060704"/>
           </a:xfrm>
           <a:prstGeom prst="roundRect">
             <a:avLst>
-              <a:gd name="adj" fmla="val 12000"/>
+              <a:gd name="adj" fmla="val 10345"/>
             </a:avLst>
           </a:prstGeom>
           <a:solidFill>
-            <a:srgbClr val="16213A"/>
+            <a:srgbClr val="1C2C4A"/>
           </a:solidFill>
           <a:ln/>
           <a:effectLst>
@@ -7342,14 +8480,102 @@
       </p:sp>
       <p:sp>
         <p:nvSpPr>
-          <p:cNvPr id="14" name="Text 12"/>
-          <p:cNvSpPr/>
-          <p:nvPr/>
-        </p:nvSpPr>
-        <p:spPr>
-          <a:xfrm>
-            <a:off x="6903720" y="3063240"/>
-            <a:ext cx="4480560" cy="914400"/>
+          <p:cNvPr id="19" name="Shape 14"/>
+          <p:cNvSpPr/>
+          <p:nvPr/>
+        </p:nvSpPr>
+        <p:spPr>
+          <a:xfrm>
+            <a:off x="960120" y="5431536"/>
+            <a:ext cx="548640" cy="548640"/>
+          </a:xfrm>
+          <a:prstGeom prst="ellipse">
+            <a:avLst/>
+          </a:prstGeom>
+          <a:solidFill>
+            <a:srgbClr val="E2665A"/>
+          </a:solidFill>
+          <a:ln w="9525">
+            <a:solidFill>
+              <a:srgbClr val="E2665A"/>
+            </a:solidFill>
+            <a:prstDash val="solid"/>
+          </a:ln>
+        </p:spPr>
+      </p:sp>
+      <p:pic>
+        <p:nvPicPr>
+          <p:cNvPr id="20" name="Image 3" descr="preencoded.png">    </p:cNvPr>
+          <p:cNvPicPr>
+            <a:picLocks noChangeAspect="1"/>
+          </p:cNvPicPr>
+          <p:nvPr/>
+        </p:nvPicPr>
+        <p:blipFill>
+          <a:blip r:embed="rId4"/>
+          <a:stretch>
+            <a:fillRect/>
+          </a:stretch>
+        </p:blipFill>
+        <p:spPr>
+          <a:xfrm>
+            <a:off x="1102766" y="5574182"/>
+            <a:ext cx="263347" cy="263347"/>
+          </a:xfrm>
+          <a:prstGeom prst="rect">
+            <a:avLst/>
+          </a:prstGeom>
+        </p:spPr>
+      </p:pic>
+      <p:sp>
+        <p:nvSpPr>
+          <p:cNvPr id="21" name="Text 15"/>
+          <p:cNvSpPr/>
+          <p:nvPr/>
+        </p:nvSpPr>
+        <p:spPr>
+          <a:xfrm>
+            <a:off x="1874520" y="5303520"/>
+            <a:ext cx="9509760" cy="384048"/>
+          </a:xfrm>
+          <a:prstGeom prst="rect">
+            <a:avLst/>
+          </a:prstGeom>
+          <a:noFill/>
+          <a:ln/>
+        </p:spPr>
+        <p:txBody>
+          <a:bodyPr wrap="square" lIns="0" tIns="0" rIns="0" bIns="0" rtlCol="0" anchor="ctr"/>
+          <a:lstStyle/>
+          <a:p>
+            <a:pPr indent="0" marL="0">
+              <a:buNone/>
+            </a:pPr>
+            <a:r>
+              <a:rPr lang="en-US" sz="1400" b="1" dirty="0">
+                <a:solidFill>
+                  <a:srgbClr val="FFFFFF"/>
+                </a:solidFill>
+                <a:latin typeface="Yu Gothic" pitchFamily="34" charset="0"/>
+                <a:ea typeface="Yu Gothic" pitchFamily="34" charset="-122"/>
+                <a:cs typeface="Yu Gothic" pitchFamily="34" charset="-120"/>
+              </a:rPr>
+              <a:t>声を上げにくい住民は救えた。ただし条件付きで</a:t>
+            </a:r>
+            <a:endParaRPr lang="en-US" sz="1400" dirty="0"/>
+          </a:p>
+        </p:txBody>
+      </p:sp>
+      <p:sp>
+        <p:nvSpPr>
+          <p:cNvPr id="22" name="Text 16"/>
+          <p:cNvSpPr/>
+          <p:nvPr/>
+        </p:nvSpPr>
+        <p:spPr>
+          <a:xfrm>
+            <a:off x="1874520" y="5687568"/>
+            <a:ext cx="9509760" cy="530352"/>
           </a:xfrm>
           <a:prstGeom prst="rect">
             <a:avLst/>
@@ -7368,101 +8594,30 @@
               <a:buNone/>
             </a:pPr>
             <a:r>
-              <a:rPr lang="en-US" sz="1300" b="1" dirty="0">
-                <a:solidFill>
-                  <a:srgbClr val="5A8FD6"/>
-                </a:solidFill>
-                <a:latin typeface="Yu Gothic" pitchFamily="34" charset="0"/>
-                <a:ea typeface="Yu Gothic" pitchFamily="34" charset="-122"/>
-                <a:cs typeface="Yu Gothic" pitchFamily="34" charset="-120"/>
-              </a:rPr>
-              <a:t>離脱コストの回避・炎上防止</a:t>
-            </a:r>
-            <a:endParaRPr lang="en-US" sz="1300" dirty="0"/>
-          </a:p>
-        </p:txBody>
-      </p:sp>
-      <p:sp>
-        <p:nvSpPr>
-          <p:cNvPr id="15" name="Shape 13"/>
-          <p:cNvSpPr/>
-          <p:nvPr/>
-        </p:nvSpPr>
-        <p:spPr>
-          <a:xfrm>
-            <a:off x="548640" y="4160520"/>
-            <a:ext cx="4937760" cy="914400"/>
-          </a:xfrm>
-          <a:prstGeom prst="roundRect">
-            <a:avLst>
-              <a:gd name="adj" fmla="val 12000"/>
-            </a:avLst>
-          </a:prstGeom>
-          <a:solidFill>
-            <a:srgbClr val="1C2C4A"/>
-          </a:solidFill>
-          <a:ln/>
-          <a:effectLst>
-            <a:outerShdw sx="100000" sy="100000" kx="0" ky="0" algn="bl" rotWithShape="0" blurRad="101600" dist="38100" dir="5400000">
-              <a:srgbClr val="000000">
-                <a:alpha val="35000"/>
-              </a:srgbClr>
-            </a:outerShdw>
-          </a:effectLst>
-        </p:spPr>
-      </p:sp>
-      <p:sp>
-        <p:nvSpPr>
-          <p:cNvPr id="16" name="Text 14"/>
-          <p:cNvSpPr/>
-          <p:nvPr/>
-        </p:nvSpPr>
-        <p:spPr>
-          <a:xfrm>
-            <a:off x="777240" y="4160520"/>
-            <a:ext cx="4480560" cy="914400"/>
-          </a:xfrm>
-          <a:prstGeom prst="rect">
-            <a:avLst/>
-          </a:prstGeom>
-          <a:noFill/>
-          <a:ln/>
-        </p:spPr>
-        <p:txBody>
-          <a:bodyPr wrap="square" lIns="0" tIns="0" rIns="0" bIns="0" rtlCol="0" anchor="ctr"/>
-          <a:lstStyle/>
-          <a:p>
-            <a:pPr indent="0" marL="0">
-              <a:lnSpc>
-                <a:spcPct val="120000"/>
-              </a:lnSpc>
-              <a:buNone/>
-            </a:pPr>
-            <a:r>
-              <a:rPr lang="en-US" sz="1300" i="1" dirty="0">
-                <a:solidFill>
-                  <a:srgbClr val="F4C878"/>
-                </a:solidFill>
-                <a:latin typeface="Yu Gothic" pitchFamily="34" charset="0"/>
-                <a:ea typeface="Yu Gothic" pitchFamily="34" charset="-122"/>
-                <a:cs typeface="Yu Gothic" pitchFamily="34" charset="-120"/>
-              </a:rPr>
-              <a:t>「自分でも問題に対処できるようになった」</a:t>
-            </a:r>
-            <a:endParaRPr lang="en-US" sz="1300" dirty="0"/>
-          </a:p>
-        </p:txBody>
-      </p:sp>
-      <p:sp>
-        <p:nvSpPr>
-          <p:cNvPr id="17" name="Text 15"/>
-          <p:cNvSpPr/>
-          <p:nvPr/>
-        </p:nvSpPr>
-        <p:spPr>
-          <a:xfrm>
-            <a:off x="5623560" y="4160520"/>
-            <a:ext cx="914400" cy="914400"/>
+              <a:rPr lang="en-US" sz="1150" dirty="0">
+                <a:solidFill>
+                  <a:srgbClr val="AFC9EE"/>
+                </a:solidFill>
+                <a:latin typeface="Yu Gothic" pitchFamily="34" charset="0"/>
+                <a:ea typeface="Yu Gothic" pitchFamily="34" charset="-122"/>
+                <a:cs typeface="Yu Gothic" pitchFamily="34" charset="-120"/>
+              </a:rPr>
+              <a:t>自律できた回では「助けを求められるか」が40→65〜70に上昇。救ったのは制度ではなく、救済者以外の相談相手が実際に現れたこと。</a:t>
+            </a:r>
+            <a:endParaRPr lang="en-US" sz="1150" dirty="0"/>
+          </a:p>
+        </p:txBody>
+      </p:sp>
+      <p:sp>
+        <p:nvSpPr>
+          <p:cNvPr id="23" name="Text 17"/>
+          <p:cNvSpPr/>
+          <p:nvPr/>
+        </p:nvSpPr>
+        <p:spPr>
+          <a:xfrm>
+            <a:off x="548640" y="6400800"/>
+            <a:ext cx="11091672" cy="292608"/>
           </a:xfrm>
           <a:prstGeom prst="rect">
             <a:avLst/>
@@ -7478,162 +8633,23 @@
               <a:buNone/>
             </a:pPr>
             <a:r>
-              <a:rPr lang="en-US" sz="2200" dirty="0">
-                <a:solidFill>
-                  <a:srgbClr val="9AA4C0"/>
-                </a:solidFill>
-                <a:latin typeface="Yu Gothic" pitchFamily="34" charset="0"/>
-                <a:ea typeface="Yu Gothic" pitchFamily="34" charset="-122"/>
-                <a:cs typeface="Yu Gothic" pitchFamily="34" charset="-120"/>
-              </a:rPr>
-              <a:t>→</a:t>
-            </a:r>
-            <a:endParaRPr lang="en-US" sz="2200" dirty="0"/>
-          </a:p>
-        </p:txBody>
-      </p:sp>
-      <p:sp>
-        <p:nvSpPr>
-          <p:cNvPr id="18" name="Shape 16"/>
-          <p:cNvSpPr/>
-          <p:nvPr/>
-        </p:nvSpPr>
-        <p:spPr>
-          <a:xfrm>
-            <a:off x="6675120" y="4160520"/>
-            <a:ext cx="4937760" cy="914400"/>
-          </a:xfrm>
-          <a:prstGeom prst="roundRect">
-            <a:avLst>
-              <a:gd name="adj" fmla="val 12000"/>
-            </a:avLst>
-          </a:prstGeom>
-          <a:solidFill>
-            <a:srgbClr val="16213A"/>
-          </a:solidFill>
-          <a:ln/>
-          <a:effectLst>
-            <a:outerShdw sx="100000" sy="100000" kx="0" ky="0" algn="bl" rotWithShape="0" blurRad="101600" dist="38100" dir="5400000">
-              <a:srgbClr val="000000">
-                <a:alpha val="35000"/>
-              </a:srgbClr>
-            </a:outerShdw>
-          </a:effectLst>
-        </p:spPr>
-      </p:sp>
-      <p:sp>
-        <p:nvSpPr>
-          <p:cNvPr id="19" name="Text 17"/>
-          <p:cNvSpPr/>
-          <p:nvPr/>
-        </p:nvSpPr>
-        <p:spPr>
-          <a:xfrm>
-            <a:off x="6903720" y="4160520"/>
-            <a:ext cx="4480560" cy="914400"/>
-          </a:xfrm>
-          <a:prstGeom prst="rect">
-            <a:avLst/>
-          </a:prstGeom>
-          <a:noFill/>
-          <a:ln/>
-        </p:spPr>
-        <p:txBody>
-          <a:bodyPr wrap="square" lIns="0" tIns="0" rIns="0" bIns="0" rtlCol="0" anchor="ctr"/>
-          <a:lstStyle/>
-          <a:p>
-            <a:pPr indent="0" marL="0">
-              <a:lnSpc>
-                <a:spcPct val="120000"/>
-              </a:lnSpc>
-              <a:buNone/>
-            </a:pPr>
-            <a:r>
-              <a:rPr lang="en-US" sz="1300" b="1" dirty="0">
-                <a:solidFill>
-                  <a:srgbClr val="5A8FD6"/>
-                </a:solidFill>
-                <a:latin typeface="Yu Gothic" pitchFamily="34" charset="0"/>
-                <a:ea typeface="Yu Gothic" pitchFamily="34" charset="-122"/>
-                <a:cs typeface="Yu Gothic" pitchFamily="34" charset="-120"/>
-              </a:rPr>
-              <a:t>組織のレジリエンス向上・意思決定の高速化</a:t>
-            </a:r>
-            <a:endParaRPr lang="en-US" sz="1300" dirty="0"/>
-          </a:p>
-        </p:txBody>
-      </p:sp>
-      <p:sp>
-        <p:nvSpPr>
-          <p:cNvPr id="20" name="Shape 18"/>
-          <p:cNvSpPr/>
-          <p:nvPr/>
-        </p:nvSpPr>
-        <p:spPr>
-          <a:xfrm>
-            <a:off x="548640" y="5303520"/>
-            <a:ext cx="11091672" cy="822960"/>
-          </a:xfrm>
-          <a:prstGeom prst="roundRect">
-            <a:avLst>
-              <a:gd name="adj" fmla="val 11111"/>
-            </a:avLst>
-          </a:prstGeom>
-          <a:solidFill>
-            <a:srgbClr val="16213A"/>
-          </a:solidFill>
-          <a:ln/>
-          <a:effectLst>
-            <a:outerShdw sx="100000" sy="100000" kx="0" ky="0" algn="bl" rotWithShape="0" blurRad="101600" dist="38100" dir="5400000">
-              <a:srgbClr val="000000">
-                <a:alpha val="35000"/>
-              </a:srgbClr>
-            </a:outerShdw>
-          </a:effectLst>
-        </p:spPr>
-      </p:sp>
-      <p:sp>
-        <p:nvSpPr>
-          <p:cNvPr id="21" name="Text 19"/>
-          <p:cNvSpPr/>
-          <p:nvPr/>
-        </p:nvSpPr>
-        <p:spPr>
-          <a:xfrm>
-            <a:off x="868680" y="5303520"/>
-            <a:ext cx="10515600" cy="822960"/>
-          </a:xfrm>
-          <a:prstGeom prst="rect">
-            <a:avLst/>
-          </a:prstGeom>
-          <a:noFill/>
-          <a:ln/>
-        </p:spPr>
-        <p:txBody>
-          <a:bodyPr wrap="square" lIns="0" tIns="0" rIns="0" bIns="0" rtlCol="0" anchor="ctr"/>
-          <a:lstStyle/>
-          <a:p>
-            <a:pPr indent="0" marL="0">
-              <a:buNone/>
-            </a:pPr>
-            <a:r>
-              <a:rPr lang="en-US" sz="1400" b="1" dirty="0">
-                <a:solidFill>
-                  <a:srgbClr val="FFFFFF"/>
-                </a:solidFill>
-                <a:latin typeface="Yu Gothic" pitchFamily="34" charset="0"/>
-                <a:ea typeface="Yu Gothic" pitchFamily="34" charset="-122"/>
-                <a:cs typeface="Yu Gothic" pitchFamily="34" charset="-120"/>
-              </a:rPr>
-              <a:t>人を支える行為は「美談」ではない。組織の持続可能性と安全保障に直結する。</a:t>
-            </a:r>
-            <a:endParaRPr lang="en-US" sz="1400" dirty="0"/>
-          </a:p>
-        </p:txBody>
-      </p:sp>
-      <p:sp>
-        <p:nvSpPr>
-          <p:cNvPr id="22" name="Text 20"/>
+              <a:rPr lang="en-US" sz="1000" dirty="0">
+                <a:solidFill>
+                  <a:srgbClr val="5B6480"/>
+                </a:solidFill>
+                <a:latin typeface="Yu Gothic" pitchFamily="34" charset="0"/>
+                <a:ea typeface="Yu Gothic" pitchFamily="34" charset="-122"/>
+                <a:cs typeface="Yu Gothic" pitchFamily="34" charset="-120"/>
+              </a:rPr>
+              <a:t>※ 各条件5回ずつ計15回の実行。LLMによる採点であり、統計的検定を行うにはまだ試行数が少ない。</a:t>
+            </a:r>
+            <a:endParaRPr lang="en-US" sz="1000" dirty="0"/>
+          </a:p>
+        </p:txBody>
+      </p:sp>
+      <p:sp>
+        <p:nvSpPr>
+          <p:cNvPr id="24" name="Text 18"/>
           <p:cNvSpPr/>
           <p:nvPr/>
         </p:nvSpPr>
@@ -7672,7 +8688,7 @@
       </p:sp>
       <p:sp>
         <p:nvSpPr>
-          <p:cNvPr id="23" name="Text 21"/>
+          <p:cNvPr id="25" name="Text 19"/>
           <p:cNvSpPr/>
           <p:nvPr/>
         </p:nvSpPr>
@@ -7774,7 +8790,7 @@
                 <a:ea typeface="Yu Gothic" pitchFamily="34" charset="-122"/>
                 <a:cs typeface="Yu Gothic" pitchFamily="34" charset="-120"/>
               </a:rPr>
-              <a:t>フラクタルな構造：村から国家の「メタ安全保障」へ</a:t>
+              <a:t>「意味」から「経営」への翻訳</a:t>
             </a:r>
             <a:endParaRPr lang="en-US" sz="3000" dirty="0"/>
           </a:p>
@@ -7782,22 +8798,100 @@
       </p:sp>
       <p:sp>
         <p:nvSpPr>
-          <p:cNvPr id="3" name="Shape 1"/>
-          <p:cNvSpPr/>
-          <p:nvPr/>
-        </p:nvSpPr>
-        <p:spPr>
-          <a:xfrm>
-            <a:off x="641452" y="1874520"/>
-            <a:ext cx="3429000" cy="2880360"/>
+          <p:cNvPr id="3" name="Text 1"/>
+          <p:cNvSpPr/>
+          <p:nvPr/>
+        </p:nvSpPr>
+        <p:spPr>
+          <a:xfrm>
+            <a:off x="548640" y="1554480"/>
+            <a:ext cx="4937760" cy="320040"/>
+          </a:xfrm>
+          <a:prstGeom prst="rect">
+            <a:avLst/>
+          </a:prstGeom>
+          <a:noFill/>
+          <a:ln/>
+        </p:spPr>
+        <p:txBody>
+          <a:bodyPr wrap="square" lIns="0" tIns="0" rIns="0" bIns="0" rtlCol="0" anchor="ctr"/>
+          <a:lstStyle/>
+          <a:p>
+            <a:pPr indent="0" marL="0">
+              <a:buNone/>
+            </a:pPr>
+            <a:r>
+              <a:rPr lang="en-US" sz="1200" b="1" dirty="0">
+                <a:solidFill>
+                  <a:srgbClr val="E8A33D"/>
+                </a:solidFill>
+                <a:latin typeface="Yu Gothic" pitchFamily="34" charset="0"/>
+                <a:ea typeface="Yu Gothic" pitchFamily="34" charset="-122"/>
+                <a:cs typeface="Yu Gothic" pitchFamily="34" charset="-120"/>
+              </a:rPr>
+              <a:t>Human Value</a:t>
+            </a:r>
+            <a:endParaRPr lang="en-US" sz="1200" dirty="0"/>
+          </a:p>
+        </p:txBody>
+      </p:sp>
+      <p:sp>
+        <p:nvSpPr>
+          <p:cNvPr id="4" name="Text 2"/>
+          <p:cNvSpPr/>
+          <p:nvPr/>
+        </p:nvSpPr>
+        <p:spPr>
+          <a:xfrm>
+            <a:off x="6675120" y="1554480"/>
+            <a:ext cx="4937760" cy="320040"/>
+          </a:xfrm>
+          <a:prstGeom prst="rect">
+            <a:avLst/>
+          </a:prstGeom>
+          <a:noFill/>
+          <a:ln/>
+        </p:spPr>
+        <p:txBody>
+          <a:bodyPr wrap="square" lIns="0" tIns="0" rIns="0" bIns="0" rtlCol="0" anchor="ctr"/>
+          <a:lstStyle/>
+          <a:p>
+            <a:pPr algn="r" indent="0" marL="0">
+              <a:buNone/>
+            </a:pPr>
+            <a:r>
+              <a:rPr lang="en-US" sz="1200" b="1" dirty="0">
+                <a:solidFill>
+                  <a:srgbClr val="5A8FD6"/>
+                </a:solidFill>
+                <a:latin typeface="Yu Gothic" pitchFamily="34" charset="0"/>
+                <a:ea typeface="Yu Gothic" pitchFamily="34" charset="-122"/>
+                <a:cs typeface="Yu Gothic" pitchFamily="34" charset="-120"/>
+              </a:rPr>
+              <a:t>Corporate KPI</a:t>
+            </a:r>
+            <a:endParaRPr lang="en-US" sz="1200" dirty="0"/>
+          </a:p>
+        </p:txBody>
+      </p:sp>
+      <p:sp>
+        <p:nvSpPr>
+          <p:cNvPr id="5" name="Shape 3"/>
+          <p:cNvSpPr/>
+          <p:nvPr/>
+        </p:nvSpPr>
+        <p:spPr>
+          <a:xfrm>
+            <a:off x="548640" y="1965960"/>
+            <a:ext cx="4937760" cy="914400"/>
           </a:xfrm>
           <a:prstGeom prst="roundRect">
             <a:avLst>
-              <a:gd name="adj" fmla="val 3810"/>
+              <a:gd name="adj" fmla="val 12000"/>
             </a:avLst>
           </a:prstGeom>
           <a:solidFill>
-            <a:srgbClr val="16213A"/>
+            <a:srgbClr val="1C2C4A"/>
           </a:solidFill>
           <a:ln/>
           <a:effectLst>
@@ -7811,107 +8905,56 @@
       </p:sp>
       <p:sp>
         <p:nvSpPr>
-          <p:cNvPr id="4" name="Shape 2"/>
-          <p:cNvSpPr/>
-          <p:nvPr/>
-        </p:nvSpPr>
-        <p:spPr>
-          <a:xfrm>
-            <a:off x="1450696" y="1746504"/>
-            <a:ext cx="1810512" cy="1810512"/>
-          </a:xfrm>
-          <a:prstGeom prst="ellipse">
-            <a:avLst/>
-          </a:prstGeom>
-          <a:solidFill>
-            <a:srgbClr val="1BAF7A">
-              <a:alpha val="12000"/>
-            </a:srgbClr>
-          </a:solidFill>
-          <a:ln/>
-        </p:spPr>
-      </p:sp>
-      <p:sp>
-        <p:nvSpPr>
-          <p:cNvPr id="5" name="Shape 3"/>
-          <p:cNvSpPr/>
-          <p:nvPr/>
-        </p:nvSpPr>
-        <p:spPr>
-          <a:xfrm>
-            <a:off x="1697584" y="1993392"/>
-            <a:ext cx="1316736" cy="1316736"/>
-          </a:xfrm>
-          <a:prstGeom prst="ellipse">
-            <a:avLst/>
-          </a:prstGeom>
-          <a:solidFill>
-            <a:srgbClr val="1BAF7A">
-              <a:alpha val="22000"/>
-            </a:srgbClr>
-          </a:solidFill>
-          <a:ln/>
-        </p:spPr>
-      </p:sp>
-      <p:sp>
-        <p:nvSpPr>
-          <p:cNvPr id="6" name="Shape 4"/>
-          <p:cNvSpPr/>
-          <p:nvPr/>
-        </p:nvSpPr>
-        <p:spPr>
-          <a:xfrm>
-            <a:off x="1944472" y="2240280"/>
-            <a:ext cx="822960" cy="822960"/>
-          </a:xfrm>
-          <a:prstGeom prst="ellipse">
-            <a:avLst/>
-          </a:prstGeom>
-          <a:solidFill>
-            <a:srgbClr val="1BAF7A"/>
-          </a:solidFill>
-          <a:ln w="9525">
-            <a:solidFill>
-              <a:srgbClr val="1BAF7A"/>
-            </a:solidFill>
-            <a:prstDash val="solid"/>
-          </a:ln>
-        </p:spPr>
-      </p:sp>
-      <p:pic>
-        <p:nvPicPr>
-          <p:cNvPr id="7" name="Image 0" descr="preencoded.png">    </p:cNvPr>
-          <p:cNvPicPr>
-            <a:picLocks noChangeAspect="1"/>
-          </p:cNvPicPr>
-          <p:nvPr/>
-        </p:nvPicPr>
-        <p:blipFill>
-          <a:blip r:embed="rId1"/>
-          <a:stretch>
-            <a:fillRect/>
-          </a:stretch>
-        </p:blipFill>
-        <p:spPr>
-          <a:xfrm>
-            <a:off x="2158441" y="2454250"/>
-            <a:ext cx="395021" cy="395021"/>
-          </a:xfrm>
-          <a:prstGeom prst="rect">
-            <a:avLst/>
-          </a:prstGeom>
-        </p:spPr>
-      </p:pic>
-      <p:sp>
-        <p:nvSpPr>
-          <p:cNvPr id="8" name="Text 5"/>
-          <p:cNvSpPr/>
-          <p:nvPr/>
-        </p:nvSpPr>
-        <p:spPr>
-          <a:xfrm>
-            <a:off x="778612" y="3200400"/>
-            <a:ext cx="3154680" cy="411480"/>
+          <p:cNvPr id="6" name="Text 4"/>
+          <p:cNvSpPr/>
+          <p:nvPr/>
+        </p:nvSpPr>
+        <p:spPr>
+          <a:xfrm>
+            <a:off x="777240" y="1965960"/>
+            <a:ext cx="4480560" cy="914400"/>
+          </a:xfrm>
+          <a:prstGeom prst="rect">
+            <a:avLst/>
+          </a:prstGeom>
+          <a:noFill/>
+          <a:ln/>
+        </p:spPr>
+        <p:txBody>
+          <a:bodyPr wrap="square" lIns="0" tIns="0" rIns="0" bIns="0" rtlCol="0" anchor="ctr"/>
+          <a:lstStyle/>
+          <a:p>
+            <a:pPr indent="0" marL="0">
+              <a:lnSpc>
+                <a:spcPct val="120000"/>
+              </a:lnSpc>
+              <a:buNone/>
+            </a:pPr>
+            <a:r>
+              <a:rPr lang="en-US" sz="1300" i="1" dirty="0">
+                <a:solidFill>
+                  <a:srgbClr val="F4C878"/>
+                </a:solidFill>
+                <a:latin typeface="Yu Gothic" pitchFamily="34" charset="0"/>
+                <a:ea typeface="Yu Gothic" pitchFamily="34" charset="-122"/>
+                <a:cs typeface="Yu Gothic" pitchFamily="34" charset="-120"/>
+              </a:rPr>
+              <a:t>「この人がいたことで、安心して活動できた」</a:t>
+            </a:r>
+            <a:endParaRPr lang="en-US" sz="1300" dirty="0"/>
+          </a:p>
+        </p:txBody>
+      </p:sp>
+      <p:sp>
+        <p:nvSpPr>
+          <p:cNvPr id="7" name="Text 5"/>
+          <p:cNvSpPr/>
+          <p:nvPr/>
+        </p:nvSpPr>
+        <p:spPr>
+          <a:xfrm>
+            <a:off x="5623560" y="1965960"/>
+            <a:ext cx="914400" cy="914400"/>
           </a:xfrm>
           <a:prstGeom prst="rect">
             <a:avLst/>
@@ -7927,76 +8970,34 @@
               <a:buNone/>
             </a:pPr>
             <a:r>
-              <a:rPr lang="en-US" sz="1700" b="1" dirty="0">
-                <a:solidFill>
-                  <a:srgbClr val="FFFFFF"/>
-                </a:solidFill>
-                <a:latin typeface="Yu Gothic" pitchFamily="34" charset="0"/>
-                <a:ea typeface="Yu Gothic" pitchFamily="34" charset="-122"/>
-                <a:cs typeface="Yu Gothic" pitchFamily="34" charset="-120"/>
-              </a:rPr>
-              <a:t>村</a:t>
-            </a:r>
-            <a:endParaRPr lang="en-US" sz="1700" dirty="0"/>
-          </a:p>
-        </p:txBody>
-      </p:sp>
-      <p:sp>
-        <p:nvSpPr>
-          <p:cNvPr id="9" name="Text 6"/>
-          <p:cNvSpPr/>
-          <p:nvPr/>
-        </p:nvSpPr>
-        <p:spPr>
-          <a:xfrm>
-            <a:off x="915772" y="3657600"/>
-            <a:ext cx="2880360" cy="914400"/>
-          </a:xfrm>
-          <a:prstGeom prst="rect">
-            <a:avLst/>
-          </a:prstGeom>
-          <a:noFill/>
-          <a:ln/>
-        </p:spPr>
-        <p:txBody>
-          <a:bodyPr wrap="square" lIns="0" tIns="0" rIns="0" bIns="0" rtlCol="0" anchor="ctr"/>
-          <a:lstStyle/>
-          <a:p>
-            <a:pPr algn="ctr" indent="0" marL="0">
-              <a:lnSpc>
-                <a:spcPct val="130000"/>
-              </a:lnSpc>
-              <a:buNone/>
-            </a:pPr>
-            <a:r>
-              <a:rPr lang="en-US" sz="1300" dirty="0">
-                <a:solidFill>
-                  <a:srgbClr val="AFC9EE"/>
-                </a:solidFill>
-                <a:latin typeface="Yu Gothic" pitchFamily="34" charset="0"/>
-                <a:ea typeface="Yu Gothic" pitchFamily="34" charset="-122"/>
-                <a:cs typeface="Yu Gothic" pitchFamily="34" charset="-120"/>
-              </a:rPr>
-              <a:t>「世話焼きへの過度な依存」と疲弊</a:t>
-            </a:r>
-            <a:endParaRPr lang="en-US" sz="1300" dirty="0"/>
-          </a:p>
-        </p:txBody>
-      </p:sp>
-      <p:sp>
-        <p:nvSpPr>
-          <p:cNvPr id="10" name="Shape 7"/>
-          <p:cNvSpPr/>
-          <p:nvPr/>
-        </p:nvSpPr>
-        <p:spPr>
-          <a:xfrm>
-            <a:off x="4381348" y="1874520"/>
-            <a:ext cx="3429000" cy="2880360"/>
+              <a:rPr lang="en-US" sz="2200" dirty="0">
+                <a:solidFill>
+                  <a:srgbClr val="9AA4C0"/>
+                </a:solidFill>
+                <a:latin typeface="Yu Gothic" pitchFamily="34" charset="0"/>
+                <a:ea typeface="Yu Gothic" pitchFamily="34" charset="-122"/>
+                <a:cs typeface="Yu Gothic" pitchFamily="34" charset="-120"/>
+              </a:rPr>
+              <a:t>→</a:t>
+            </a:r>
+            <a:endParaRPr lang="en-US" sz="2200" dirty="0"/>
+          </a:p>
+        </p:txBody>
+      </p:sp>
+      <p:sp>
+        <p:nvSpPr>
+          <p:cNvPr id="8" name="Shape 6"/>
+          <p:cNvSpPr/>
+          <p:nvPr/>
+        </p:nvSpPr>
+        <p:spPr>
+          <a:xfrm>
+            <a:off x="6675120" y="1965960"/>
+            <a:ext cx="4937760" cy="914400"/>
           </a:xfrm>
           <a:prstGeom prst="roundRect">
             <a:avLst>
-              <a:gd name="adj" fmla="val 3810"/>
+              <a:gd name="adj" fmla="val 12000"/>
             </a:avLst>
           </a:prstGeom>
           <a:solidFill>
@@ -8014,173 +9015,41 @@
       </p:sp>
       <p:sp>
         <p:nvSpPr>
-          <p:cNvPr id="11" name="Shape 8"/>
-          <p:cNvSpPr/>
-          <p:nvPr/>
-        </p:nvSpPr>
-        <p:spPr>
-          <a:xfrm>
-            <a:off x="5190592" y="1746504"/>
-            <a:ext cx="1810512" cy="1810512"/>
-          </a:xfrm>
-          <a:prstGeom prst="ellipse">
-            <a:avLst/>
-          </a:prstGeom>
-          <a:solidFill>
-            <a:srgbClr val="2A78D6">
-              <a:alpha val="12000"/>
-            </a:srgbClr>
-          </a:solidFill>
-          <a:ln/>
-        </p:spPr>
-      </p:sp>
-      <p:sp>
-        <p:nvSpPr>
-          <p:cNvPr id="12" name="Shape 9"/>
-          <p:cNvSpPr/>
-          <p:nvPr/>
-        </p:nvSpPr>
-        <p:spPr>
-          <a:xfrm>
-            <a:off x="5437480" y="1993392"/>
-            <a:ext cx="1316736" cy="1316736"/>
-          </a:xfrm>
-          <a:prstGeom prst="ellipse">
-            <a:avLst/>
-          </a:prstGeom>
-          <a:solidFill>
-            <a:srgbClr val="2A78D6">
-              <a:alpha val="22000"/>
-            </a:srgbClr>
-          </a:solidFill>
-          <a:ln/>
-        </p:spPr>
-      </p:sp>
-      <p:sp>
-        <p:nvSpPr>
-          <p:cNvPr id="13" name="Shape 10"/>
-          <p:cNvSpPr/>
-          <p:nvPr/>
-        </p:nvSpPr>
-        <p:spPr>
-          <a:xfrm>
-            <a:off x="5684368" y="2240280"/>
-            <a:ext cx="822960" cy="822960"/>
-          </a:xfrm>
-          <a:prstGeom prst="ellipse">
-            <a:avLst/>
-          </a:prstGeom>
-          <a:solidFill>
-            <a:srgbClr val="2A78D6"/>
-          </a:solidFill>
-          <a:ln w="9525">
-            <a:solidFill>
-              <a:srgbClr val="2A78D6"/>
-            </a:solidFill>
-            <a:prstDash val="solid"/>
-          </a:ln>
-        </p:spPr>
-      </p:sp>
-      <p:pic>
-        <p:nvPicPr>
-          <p:cNvPr id="14" name="Image 1" descr="preencoded.png">    </p:cNvPr>
-          <p:cNvPicPr>
-            <a:picLocks noChangeAspect="1"/>
-          </p:cNvPicPr>
-          <p:nvPr/>
-        </p:nvPicPr>
-        <p:blipFill>
-          <a:blip r:embed="rId2"/>
-          <a:stretch>
-            <a:fillRect/>
-          </a:stretch>
-        </p:blipFill>
-        <p:spPr>
-          <a:xfrm>
-            <a:off x="5898337" y="2454250"/>
-            <a:ext cx="395021" cy="395021"/>
-          </a:xfrm>
-          <a:prstGeom prst="rect">
-            <a:avLst/>
-          </a:prstGeom>
-        </p:spPr>
-      </p:pic>
-      <p:sp>
-        <p:nvSpPr>
-          <p:cNvPr id="15" name="Text 11"/>
-          <p:cNvSpPr/>
-          <p:nvPr/>
-        </p:nvSpPr>
-        <p:spPr>
-          <a:xfrm>
-            <a:off x="4518508" y="3200400"/>
-            <a:ext cx="3154680" cy="411480"/>
-          </a:xfrm>
-          <a:prstGeom prst="rect">
-            <a:avLst/>
-          </a:prstGeom>
-          <a:noFill/>
-          <a:ln/>
-        </p:spPr>
-        <p:txBody>
-          <a:bodyPr wrap="square" lIns="0" tIns="0" rIns="0" bIns="0" rtlCol="0" anchor="ctr"/>
-          <a:lstStyle/>
-          <a:p>
-            <a:pPr algn="ctr" indent="0" marL="0">
-              <a:buNone/>
-            </a:pPr>
-            <a:r>
-              <a:rPr lang="en-US" sz="1700" b="1" dirty="0">
-                <a:solidFill>
-                  <a:srgbClr val="FFFFFF"/>
-                </a:solidFill>
-                <a:latin typeface="Yu Gothic" pitchFamily="34" charset="0"/>
-                <a:ea typeface="Yu Gothic" pitchFamily="34" charset="-122"/>
-                <a:cs typeface="Yu Gothic" pitchFamily="34" charset="-120"/>
-              </a:rPr>
-              <a:t>都市</a:t>
-            </a:r>
-            <a:endParaRPr lang="en-US" sz="1700" dirty="0"/>
-          </a:p>
-        </p:txBody>
-      </p:sp>
-      <p:sp>
-        <p:nvSpPr>
-          <p:cNvPr id="16" name="Text 12"/>
-          <p:cNvSpPr/>
-          <p:nvPr/>
-        </p:nvSpPr>
-        <p:spPr>
-          <a:xfrm>
-            <a:off x="4655668" y="3657600"/>
-            <a:ext cx="2880360" cy="914400"/>
-          </a:xfrm>
-          <a:prstGeom prst="rect">
-            <a:avLst/>
-          </a:prstGeom>
-          <a:noFill/>
-          <a:ln/>
-        </p:spPr>
-        <p:txBody>
-          <a:bodyPr wrap="square" lIns="0" tIns="0" rIns="0" bIns="0" rtlCol="0" anchor="ctr"/>
-          <a:lstStyle/>
-          <a:p>
-            <a:pPr algn="ctr" indent="0" marL="0">
+          <p:cNvPr id="9" name="Text 7"/>
+          <p:cNvSpPr/>
+          <p:nvPr/>
+        </p:nvSpPr>
+        <p:spPr>
+          <a:xfrm>
+            <a:off x="6903720" y="1965960"/>
+            <a:ext cx="4480560" cy="914400"/>
+          </a:xfrm>
+          <a:prstGeom prst="rect">
+            <a:avLst/>
+          </a:prstGeom>
+          <a:noFill/>
+          <a:ln/>
+        </p:spPr>
+        <p:txBody>
+          <a:bodyPr wrap="square" lIns="0" tIns="0" rIns="0" bIns="0" rtlCol="0" anchor="ctr"/>
+          <a:lstStyle/>
+          <a:p>
+            <a:pPr indent="0" marL="0">
               <a:lnSpc>
-                <a:spcPct val="130000"/>
+                <a:spcPct val="120000"/>
               </a:lnSpc>
               <a:buNone/>
             </a:pPr>
             <a:r>
-              <a:rPr lang="en-US" sz="1300" dirty="0">
-                <a:solidFill>
-                  <a:srgbClr val="AFC9EE"/>
-                </a:solidFill>
-                <a:latin typeface="Yu Gothic" pitchFamily="34" charset="0"/>
-                <a:ea typeface="Yu Gothic" pitchFamily="34" charset="-122"/>
-                <a:cs typeface="Yu Gothic" pitchFamily="34" charset="-120"/>
-              </a:rPr>
-              <a:t>「支援制度の複雑化」と、誰にも届かないSOS</a:t>
+              <a:rPr lang="en-US" sz="1300" b="1" dirty="0">
+                <a:solidFill>
+                  <a:srgbClr val="5A8FD6"/>
+                </a:solidFill>
+                <a:latin typeface="Yu Gothic" pitchFamily="34" charset="0"/>
+                <a:ea typeface="Yu Gothic" pitchFamily="34" charset="-122"/>
+                <a:cs typeface="Yu Gothic" pitchFamily="34" charset="-120"/>
+              </a:rPr>
+              <a:t>オンボーディング成功・参加継続率の向上</a:t>
             </a:r>
             <a:endParaRPr lang="en-US" sz="1300" dirty="0"/>
           </a:p>
@@ -8188,22 +9057,22 @@
       </p:sp>
       <p:sp>
         <p:nvSpPr>
-          <p:cNvPr id="17" name="Shape 13"/>
-          <p:cNvSpPr/>
-          <p:nvPr/>
-        </p:nvSpPr>
-        <p:spPr>
-          <a:xfrm>
-            <a:off x="8121244" y="1874520"/>
-            <a:ext cx="3429000" cy="2880360"/>
+          <p:cNvPr id="10" name="Shape 8"/>
+          <p:cNvSpPr/>
+          <p:nvPr/>
+        </p:nvSpPr>
+        <p:spPr>
+          <a:xfrm>
+            <a:off x="548640" y="3063240"/>
+            <a:ext cx="4937760" cy="914400"/>
           </a:xfrm>
           <a:prstGeom prst="roundRect">
             <a:avLst>
-              <a:gd name="adj" fmla="val 3810"/>
+              <a:gd name="adj" fmla="val 12000"/>
             </a:avLst>
           </a:prstGeom>
           <a:solidFill>
-            <a:srgbClr val="16213A"/>
+            <a:srgbClr val="1C2C4A"/>
           </a:solidFill>
           <a:ln/>
           <a:effectLst>
@@ -8217,107 +9086,56 @@
       </p:sp>
       <p:sp>
         <p:nvSpPr>
-          <p:cNvPr id="18" name="Shape 14"/>
-          <p:cNvSpPr/>
-          <p:nvPr/>
-        </p:nvSpPr>
-        <p:spPr>
-          <a:xfrm>
-            <a:off x="8930488" y="1746504"/>
-            <a:ext cx="1810512" cy="1810512"/>
-          </a:xfrm>
-          <a:prstGeom prst="ellipse">
-            <a:avLst/>
-          </a:prstGeom>
-          <a:solidFill>
-            <a:srgbClr val="EB6834">
-              <a:alpha val="12000"/>
-            </a:srgbClr>
-          </a:solidFill>
-          <a:ln/>
-        </p:spPr>
-      </p:sp>
-      <p:sp>
-        <p:nvSpPr>
-          <p:cNvPr id="19" name="Shape 15"/>
-          <p:cNvSpPr/>
-          <p:nvPr/>
-        </p:nvSpPr>
-        <p:spPr>
-          <a:xfrm>
-            <a:off x="9177376" y="1993392"/>
-            <a:ext cx="1316736" cy="1316736"/>
-          </a:xfrm>
-          <a:prstGeom prst="ellipse">
-            <a:avLst/>
-          </a:prstGeom>
-          <a:solidFill>
-            <a:srgbClr val="EB6834">
-              <a:alpha val="22000"/>
-            </a:srgbClr>
-          </a:solidFill>
-          <a:ln/>
-        </p:spPr>
-      </p:sp>
-      <p:sp>
-        <p:nvSpPr>
-          <p:cNvPr id="20" name="Shape 16"/>
-          <p:cNvSpPr/>
-          <p:nvPr/>
-        </p:nvSpPr>
-        <p:spPr>
-          <a:xfrm>
-            <a:off x="9424264" y="2240280"/>
-            <a:ext cx="822960" cy="822960"/>
-          </a:xfrm>
-          <a:prstGeom prst="ellipse">
-            <a:avLst/>
-          </a:prstGeom>
-          <a:solidFill>
-            <a:srgbClr val="EB6834"/>
-          </a:solidFill>
-          <a:ln w="9525">
-            <a:solidFill>
-              <a:srgbClr val="EB6834"/>
-            </a:solidFill>
-            <a:prstDash val="solid"/>
-          </a:ln>
-        </p:spPr>
-      </p:sp>
-      <p:pic>
-        <p:nvPicPr>
-          <p:cNvPr id="21" name="Image 2" descr="preencoded.png">    </p:cNvPr>
-          <p:cNvPicPr>
-            <a:picLocks noChangeAspect="1"/>
-          </p:cNvPicPr>
-          <p:nvPr/>
-        </p:nvPicPr>
-        <p:blipFill>
-          <a:blip r:embed="rId3"/>
-          <a:stretch>
-            <a:fillRect/>
-          </a:stretch>
-        </p:blipFill>
-        <p:spPr>
-          <a:xfrm>
-            <a:off x="9638233" y="2454250"/>
-            <a:ext cx="395021" cy="395021"/>
-          </a:xfrm>
-          <a:prstGeom prst="rect">
-            <a:avLst/>
-          </a:prstGeom>
-        </p:spPr>
-      </p:pic>
-      <p:sp>
-        <p:nvSpPr>
-          <p:cNvPr id="22" name="Text 17"/>
-          <p:cNvSpPr/>
-          <p:nvPr/>
-        </p:nvSpPr>
-        <p:spPr>
-          <a:xfrm>
-            <a:off x="8258404" y="3200400"/>
-            <a:ext cx="3154680" cy="411480"/>
+          <p:cNvPr id="11" name="Text 9"/>
+          <p:cNvSpPr/>
+          <p:nvPr/>
+        </p:nvSpPr>
+        <p:spPr>
+          <a:xfrm>
+            <a:off x="777240" y="3063240"/>
+            <a:ext cx="4480560" cy="914400"/>
+          </a:xfrm>
+          <a:prstGeom prst="rect">
+            <a:avLst/>
+          </a:prstGeom>
+          <a:noFill/>
+          <a:ln/>
+        </p:spPr>
+        <p:txBody>
+          <a:bodyPr wrap="square" lIns="0" tIns="0" rIns="0" bIns="0" rtlCol="0" anchor="ctr"/>
+          <a:lstStyle/>
+          <a:p>
+            <a:pPr indent="0" marL="0">
+              <a:lnSpc>
+                <a:spcPct val="120000"/>
+              </a:lnSpc>
+              <a:buNone/>
+            </a:pPr>
+            <a:r>
+              <a:rPr lang="en-US" sz="1300" i="1" dirty="0">
+                <a:solidFill>
+                  <a:srgbClr val="F4C878"/>
+                </a:solidFill>
+                <a:latin typeface="Yu Gothic" pitchFamily="34" charset="0"/>
+                <a:ea typeface="Yu Gothic" pitchFamily="34" charset="-122"/>
+                <a:cs typeface="Yu Gothic" pitchFamily="34" charset="-120"/>
+              </a:rPr>
+              <a:t>「孤立せずに済んだ／対立が翻訳された」</a:t>
+            </a:r>
+            <a:endParaRPr lang="en-US" sz="1300" dirty="0"/>
+          </a:p>
+        </p:txBody>
+      </p:sp>
+      <p:sp>
+        <p:nvSpPr>
+          <p:cNvPr id="12" name="Text 10"/>
+          <p:cNvSpPr/>
+          <p:nvPr/>
+        </p:nvSpPr>
+        <p:spPr>
+          <a:xfrm>
+            <a:off x="5623560" y="3063240"/>
+            <a:ext cx="914400" cy="914400"/>
           </a:xfrm>
           <a:prstGeom prst="rect">
             <a:avLst/>
@@ -8333,80 +9151,38 @@
               <a:buNone/>
             </a:pPr>
             <a:r>
-              <a:rPr lang="en-US" sz="1700" b="1" dirty="0">
-                <a:solidFill>
-                  <a:srgbClr val="FFFFFF"/>
-                </a:solidFill>
-                <a:latin typeface="Yu Gothic" pitchFamily="34" charset="0"/>
-                <a:ea typeface="Yu Gothic" pitchFamily="34" charset="-122"/>
-                <a:cs typeface="Yu Gothic" pitchFamily="34" charset="-120"/>
-              </a:rPr>
-              <a:t>国</a:t>
-            </a:r>
-            <a:endParaRPr lang="en-US" sz="1700" dirty="0"/>
-          </a:p>
-        </p:txBody>
-      </p:sp>
-      <p:sp>
-        <p:nvSpPr>
-          <p:cNvPr id="23" name="Text 18"/>
-          <p:cNvSpPr/>
-          <p:nvPr/>
-        </p:nvSpPr>
-        <p:spPr>
-          <a:xfrm>
-            <a:off x="8395564" y="3657600"/>
-            <a:ext cx="2880360" cy="914400"/>
-          </a:xfrm>
-          <a:prstGeom prst="rect">
-            <a:avLst/>
-          </a:prstGeom>
-          <a:noFill/>
-          <a:ln/>
-        </p:spPr>
-        <p:txBody>
-          <a:bodyPr wrap="square" lIns="0" tIns="0" rIns="0" bIns="0" rtlCol="0" anchor="ctr"/>
-          <a:lstStyle/>
-          <a:p>
-            <a:pPr algn="ctr" indent="0" marL="0">
-              <a:lnSpc>
-                <a:spcPct val="130000"/>
-              </a:lnSpc>
-              <a:buNone/>
-            </a:pPr>
-            <a:r>
-              <a:rPr lang="en-US" sz="1300" dirty="0">
-                <a:solidFill>
-                  <a:srgbClr val="AFC9EE"/>
-                </a:solidFill>
-                <a:latin typeface="Yu Gothic" pitchFamily="34" charset="0"/>
-                <a:ea typeface="Yu Gothic" pitchFamily="34" charset="-122"/>
-                <a:cs typeface="Yu Gothic" pitchFamily="34" charset="-120"/>
-              </a:rPr>
-              <a:t>「権力の集中」と、強い指導者への救世主待望</a:t>
-            </a:r>
-            <a:endParaRPr lang="en-US" sz="1300" dirty="0"/>
-          </a:p>
-        </p:txBody>
-      </p:sp>
-      <p:sp>
-        <p:nvSpPr>
-          <p:cNvPr id="24" name="Shape 19"/>
-          <p:cNvSpPr/>
-          <p:nvPr/>
-        </p:nvSpPr>
-        <p:spPr>
-          <a:xfrm>
-            <a:off x="548640" y="5166360"/>
-            <a:ext cx="11091672" cy="960120"/>
+              <a:rPr lang="en-US" sz="2200" dirty="0">
+                <a:solidFill>
+                  <a:srgbClr val="9AA4C0"/>
+                </a:solidFill>
+                <a:latin typeface="Yu Gothic" pitchFamily="34" charset="0"/>
+                <a:ea typeface="Yu Gothic" pitchFamily="34" charset="-122"/>
+                <a:cs typeface="Yu Gothic" pitchFamily="34" charset="-120"/>
+              </a:rPr>
+              <a:t>→</a:t>
+            </a:r>
+            <a:endParaRPr lang="en-US" sz="2200" dirty="0"/>
+          </a:p>
+        </p:txBody>
+      </p:sp>
+      <p:sp>
+        <p:nvSpPr>
+          <p:cNvPr id="13" name="Shape 11"/>
+          <p:cNvSpPr/>
+          <p:nvPr/>
+        </p:nvSpPr>
+        <p:spPr>
+          <a:xfrm>
+            <a:off x="6675120" y="3063240"/>
+            <a:ext cx="4937760" cy="914400"/>
           </a:xfrm>
           <a:prstGeom prst="roundRect">
             <a:avLst>
-              <a:gd name="adj" fmla="val 9524"/>
+              <a:gd name="adj" fmla="val 12000"/>
             </a:avLst>
           </a:prstGeom>
           <a:solidFill>
-            <a:srgbClr val="1C2C4A"/>
+            <a:srgbClr val="16213A"/>
           </a:solidFill>
           <a:ln/>
           <a:effectLst>
@@ -8420,14 +9196,14 @@
       </p:sp>
       <p:sp>
         <p:nvSpPr>
-          <p:cNvPr id="25" name="Text 20"/>
-          <p:cNvSpPr/>
-          <p:nvPr/>
-        </p:nvSpPr>
-        <p:spPr>
-          <a:xfrm>
-            <a:off x="868680" y="5166360"/>
-            <a:ext cx="10515600" cy="960120"/>
+          <p:cNvPr id="14" name="Text 12"/>
+          <p:cNvSpPr/>
+          <p:nvPr/>
+        </p:nvSpPr>
+        <p:spPr>
+          <a:xfrm>
+            <a:off x="6903720" y="3063240"/>
+            <a:ext cx="4480560" cy="914400"/>
           </a:xfrm>
           <a:prstGeom prst="rect">
             <a:avLst/>
@@ -8440,26 +9216,278 @@
           <a:lstStyle/>
           <a:p>
             <a:pPr indent="0" marL="0">
-              <a:buNone/>
-            </a:pPr>
-            <a:r>
-              <a:rPr lang="en-US" sz="1350" dirty="0">
-                <a:solidFill>
-                  <a:srgbClr val="AFC9EE"/>
-                </a:solidFill>
-                <a:latin typeface="Yu Gothic" pitchFamily="34" charset="0"/>
-                <a:ea typeface="Yu Gothic" pitchFamily="34" charset="-122"/>
-                <a:cs typeface="Yu Gothic" pitchFamily="34" charset="-120"/>
-              </a:rPr>
-              <a:t>小さな共同体における「救済者への依存」と、国家規模における「権力の集中」は構造的に同じである。この実験は、社会全体のレジリエンスを問う試みである。</a:t>
-            </a:r>
-            <a:endParaRPr lang="en-US" sz="1350" dirty="0"/>
-          </a:p>
-        </p:txBody>
-      </p:sp>
-      <p:sp>
-        <p:nvSpPr>
-          <p:cNvPr id="26" name="Text 21"/>
+              <a:lnSpc>
+                <a:spcPct val="120000"/>
+              </a:lnSpc>
+              <a:buNone/>
+            </a:pPr>
+            <a:r>
+              <a:rPr lang="en-US" sz="1300" b="1" dirty="0">
+                <a:solidFill>
+                  <a:srgbClr val="5A8FD6"/>
+                </a:solidFill>
+                <a:latin typeface="Yu Gothic" pitchFamily="34" charset="0"/>
+                <a:ea typeface="Yu Gothic" pitchFamily="34" charset="-122"/>
+                <a:cs typeface="Yu Gothic" pitchFamily="34" charset="-120"/>
+              </a:rPr>
+              <a:t>離脱コストの回避・炎上防止</a:t>
+            </a:r>
+            <a:endParaRPr lang="en-US" sz="1300" dirty="0"/>
+          </a:p>
+        </p:txBody>
+      </p:sp>
+      <p:sp>
+        <p:nvSpPr>
+          <p:cNvPr id="15" name="Shape 13"/>
+          <p:cNvSpPr/>
+          <p:nvPr/>
+        </p:nvSpPr>
+        <p:spPr>
+          <a:xfrm>
+            <a:off x="548640" y="4160520"/>
+            <a:ext cx="4937760" cy="914400"/>
+          </a:xfrm>
+          <a:prstGeom prst="roundRect">
+            <a:avLst>
+              <a:gd name="adj" fmla="val 12000"/>
+            </a:avLst>
+          </a:prstGeom>
+          <a:solidFill>
+            <a:srgbClr val="1C2C4A"/>
+          </a:solidFill>
+          <a:ln/>
+          <a:effectLst>
+            <a:outerShdw sx="100000" sy="100000" kx="0" ky="0" algn="bl" rotWithShape="0" blurRad="101600" dist="38100" dir="5400000">
+              <a:srgbClr val="000000">
+                <a:alpha val="35000"/>
+              </a:srgbClr>
+            </a:outerShdw>
+          </a:effectLst>
+        </p:spPr>
+      </p:sp>
+      <p:sp>
+        <p:nvSpPr>
+          <p:cNvPr id="16" name="Text 14"/>
+          <p:cNvSpPr/>
+          <p:nvPr/>
+        </p:nvSpPr>
+        <p:spPr>
+          <a:xfrm>
+            <a:off x="777240" y="4160520"/>
+            <a:ext cx="4480560" cy="914400"/>
+          </a:xfrm>
+          <a:prstGeom prst="rect">
+            <a:avLst/>
+          </a:prstGeom>
+          <a:noFill/>
+          <a:ln/>
+        </p:spPr>
+        <p:txBody>
+          <a:bodyPr wrap="square" lIns="0" tIns="0" rIns="0" bIns="0" rtlCol="0" anchor="ctr"/>
+          <a:lstStyle/>
+          <a:p>
+            <a:pPr indent="0" marL="0">
+              <a:lnSpc>
+                <a:spcPct val="120000"/>
+              </a:lnSpc>
+              <a:buNone/>
+            </a:pPr>
+            <a:r>
+              <a:rPr lang="en-US" sz="1300" i="1" dirty="0">
+                <a:solidFill>
+                  <a:srgbClr val="F4C878"/>
+                </a:solidFill>
+                <a:latin typeface="Yu Gothic" pitchFamily="34" charset="0"/>
+                <a:ea typeface="Yu Gothic" pitchFamily="34" charset="-122"/>
+                <a:cs typeface="Yu Gothic" pitchFamily="34" charset="-120"/>
+              </a:rPr>
+              <a:t>「自分でも問題に対処できるようになった」</a:t>
+            </a:r>
+            <a:endParaRPr lang="en-US" sz="1300" dirty="0"/>
+          </a:p>
+        </p:txBody>
+      </p:sp>
+      <p:sp>
+        <p:nvSpPr>
+          <p:cNvPr id="17" name="Text 15"/>
+          <p:cNvSpPr/>
+          <p:nvPr/>
+        </p:nvSpPr>
+        <p:spPr>
+          <a:xfrm>
+            <a:off x="5623560" y="4160520"/>
+            <a:ext cx="914400" cy="914400"/>
+          </a:xfrm>
+          <a:prstGeom prst="rect">
+            <a:avLst/>
+          </a:prstGeom>
+          <a:noFill/>
+          <a:ln/>
+        </p:spPr>
+        <p:txBody>
+          <a:bodyPr wrap="square" lIns="0" tIns="0" rIns="0" bIns="0" rtlCol="0" anchor="ctr"/>
+          <a:lstStyle/>
+          <a:p>
+            <a:pPr algn="ctr" indent="0" marL="0">
+              <a:buNone/>
+            </a:pPr>
+            <a:r>
+              <a:rPr lang="en-US" sz="2200" dirty="0">
+                <a:solidFill>
+                  <a:srgbClr val="9AA4C0"/>
+                </a:solidFill>
+                <a:latin typeface="Yu Gothic" pitchFamily="34" charset="0"/>
+                <a:ea typeface="Yu Gothic" pitchFamily="34" charset="-122"/>
+                <a:cs typeface="Yu Gothic" pitchFamily="34" charset="-120"/>
+              </a:rPr>
+              <a:t>→</a:t>
+            </a:r>
+            <a:endParaRPr lang="en-US" sz="2200" dirty="0"/>
+          </a:p>
+        </p:txBody>
+      </p:sp>
+      <p:sp>
+        <p:nvSpPr>
+          <p:cNvPr id="18" name="Shape 16"/>
+          <p:cNvSpPr/>
+          <p:nvPr/>
+        </p:nvSpPr>
+        <p:spPr>
+          <a:xfrm>
+            <a:off x="6675120" y="4160520"/>
+            <a:ext cx="4937760" cy="914400"/>
+          </a:xfrm>
+          <a:prstGeom prst="roundRect">
+            <a:avLst>
+              <a:gd name="adj" fmla="val 12000"/>
+            </a:avLst>
+          </a:prstGeom>
+          <a:solidFill>
+            <a:srgbClr val="16213A"/>
+          </a:solidFill>
+          <a:ln/>
+          <a:effectLst>
+            <a:outerShdw sx="100000" sy="100000" kx="0" ky="0" algn="bl" rotWithShape="0" blurRad="101600" dist="38100" dir="5400000">
+              <a:srgbClr val="000000">
+                <a:alpha val="35000"/>
+              </a:srgbClr>
+            </a:outerShdw>
+          </a:effectLst>
+        </p:spPr>
+      </p:sp>
+      <p:sp>
+        <p:nvSpPr>
+          <p:cNvPr id="19" name="Text 17"/>
+          <p:cNvSpPr/>
+          <p:nvPr/>
+        </p:nvSpPr>
+        <p:spPr>
+          <a:xfrm>
+            <a:off x="6903720" y="4160520"/>
+            <a:ext cx="4480560" cy="914400"/>
+          </a:xfrm>
+          <a:prstGeom prst="rect">
+            <a:avLst/>
+          </a:prstGeom>
+          <a:noFill/>
+          <a:ln/>
+        </p:spPr>
+        <p:txBody>
+          <a:bodyPr wrap="square" lIns="0" tIns="0" rIns="0" bIns="0" rtlCol="0" anchor="ctr"/>
+          <a:lstStyle/>
+          <a:p>
+            <a:pPr indent="0" marL="0">
+              <a:lnSpc>
+                <a:spcPct val="120000"/>
+              </a:lnSpc>
+              <a:buNone/>
+            </a:pPr>
+            <a:r>
+              <a:rPr lang="en-US" sz="1300" b="1" dirty="0">
+                <a:solidFill>
+                  <a:srgbClr val="5A8FD6"/>
+                </a:solidFill>
+                <a:latin typeface="Yu Gothic" pitchFamily="34" charset="0"/>
+                <a:ea typeface="Yu Gothic" pitchFamily="34" charset="-122"/>
+                <a:cs typeface="Yu Gothic" pitchFamily="34" charset="-120"/>
+              </a:rPr>
+              <a:t>組織のレジリエンス向上・意思決定の高速化</a:t>
+            </a:r>
+            <a:endParaRPr lang="en-US" sz="1300" dirty="0"/>
+          </a:p>
+        </p:txBody>
+      </p:sp>
+      <p:sp>
+        <p:nvSpPr>
+          <p:cNvPr id="20" name="Shape 18"/>
+          <p:cNvSpPr/>
+          <p:nvPr/>
+        </p:nvSpPr>
+        <p:spPr>
+          <a:xfrm>
+            <a:off x="548640" y="5303520"/>
+            <a:ext cx="11091672" cy="822960"/>
+          </a:xfrm>
+          <a:prstGeom prst="roundRect">
+            <a:avLst>
+              <a:gd name="adj" fmla="val 11111"/>
+            </a:avLst>
+          </a:prstGeom>
+          <a:solidFill>
+            <a:srgbClr val="16213A"/>
+          </a:solidFill>
+          <a:ln/>
+          <a:effectLst>
+            <a:outerShdw sx="100000" sy="100000" kx="0" ky="0" algn="bl" rotWithShape="0" blurRad="101600" dist="38100" dir="5400000">
+              <a:srgbClr val="000000">
+                <a:alpha val="35000"/>
+              </a:srgbClr>
+            </a:outerShdw>
+          </a:effectLst>
+        </p:spPr>
+      </p:sp>
+      <p:sp>
+        <p:nvSpPr>
+          <p:cNvPr id="21" name="Text 19"/>
+          <p:cNvSpPr/>
+          <p:nvPr/>
+        </p:nvSpPr>
+        <p:spPr>
+          <a:xfrm>
+            <a:off x="868680" y="5303520"/>
+            <a:ext cx="10515600" cy="822960"/>
+          </a:xfrm>
+          <a:prstGeom prst="rect">
+            <a:avLst/>
+          </a:prstGeom>
+          <a:noFill/>
+          <a:ln/>
+        </p:spPr>
+        <p:txBody>
+          <a:bodyPr wrap="square" lIns="0" tIns="0" rIns="0" bIns="0" rtlCol="0" anchor="ctr"/>
+          <a:lstStyle/>
+          <a:p>
+            <a:pPr indent="0" marL="0">
+              <a:buNone/>
+            </a:pPr>
+            <a:r>
+              <a:rPr lang="en-US" sz="1400" b="1" dirty="0">
+                <a:solidFill>
+                  <a:srgbClr val="FFFFFF"/>
+                </a:solidFill>
+                <a:latin typeface="Yu Gothic" pitchFamily="34" charset="0"/>
+                <a:ea typeface="Yu Gothic" pitchFamily="34" charset="-122"/>
+                <a:cs typeface="Yu Gothic" pitchFamily="34" charset="-120"/>
+              </a:rPr>
+              <a:t>人を支える行為は「美談」ではない。組織の持続可能性と安全保障に直結する。</a:t>
+            </a:r>
+            <a:endParaRPr lang="en-US" sz="1400" dirty="0"/>
+          </a:p>
+        </p:txBody>
+      </p:sp>
+      <p:sp>
+        <p:nvSpPr>
+          <p:cNvPr id="22" name="Text 20"/>
           <p:cNvSpPr/>
           <p:nvPr/>
         </p:nvSpPr>
@@ -8498,7 +9526,7 @@
       </p:sp>
       <p:sp>
         <p:nvSpPr>
-          <p:cNvPr id="27" name="Text 22"/>
+          <p:cNvPr id="23" name="Text 21"/>
           <p:cNvSpPr/>
           <p:nvPr/>
         </p:nvSpPr>
@@ -8569,20 +9597,88 @@
       </p:grpSpPr>
       <p:sp>
         <p:nvSpPr>
-          <p:cNvPr id="2" name="Shape 0"/>
-          <p:cNvSpPr/>
-          <p:nvPr/>
-        </p:nvSpPr>
-        <p:spPr>
-          <a:xfrm>
-            <a:off x="5190592" y="512064"/>
+          <p:cNvPr id="2" name="Text 0"/>
+          <p:cNvSpPr/>
+          <p:nvPr/>
+        </p:nvSpPr>
+        <p:spPr>
+          <a:xfrm>
+            <a:off x="548640" y="411480"/>
+            <a:ext cx="11094415" cy="822960"/>
+          </a:xfrm>
+          <a:prstGeom prst="rect">
+            <a:avLst/>
+          </a:prstGeom>
+          <a:noFill/>
+          <a:ln/>
+        </p:spPr>
+        <p:txBody>
+          <a:bodyPr wrap="square" lIns="0" tIns="0" rIns="0" bIns="0" rtlCol="0" anchor="ctr"/>
+          <a:lstStyle/>
+          <a:p>
+            <a:pPr algn="l" indent="0" marL="0">
+              <a:buNone/>
+            </a:pPr>
+            <a:r>
+              <a:rPr lang="en-US" sz="3000" b="1" dirty="0">
+                <a:solidFill>
+                  <a:srgbClr val="FFFFFF"/>
+                </a:solidFill>
+                <a:latin typeface="Yu Gothic" pitchFamily="34" charset="0"/>
+                <a:ea typeface="Yu Gothic" pitchFamily="34" charset="-122"/>
+                <a:cs typeface="Yu Gothic" pitchFamily="34" charset="-120"/>
+              </a:rPr>
+              <a:t>フラクタルな構造：村から国家の「メタ安全保障」へ</a:t>
+            </a:r>
+            <a:endParaRPr lang="en-US" sz="3000" dirty="0"/>
+          </a:p>
+        </p:txBody>
+      </p:sp>
+      <p:sp>
+        <p:nvSpPr>
+          <p:cNvPr id="3" name="Shape 1"/>
+          <p:cNvSpPr/>
+          <p:nvPr/>
+        </p:nvSpPr>
+        <p:spPr>
+          <a:xfrm>
+            <a:off x="641452" y="1874520"/>
+            <a:ext cx="3429000" cy="2880360"/>
+          </a:xfrm>
+          <a:prstGeom prst="roundRect">
+            <a:avLst>
+              <a:gd name="adj" fmla="val 3810"/>
+            </a:avLst>
+          </a:prstGeom>
+          <a:solidFill>
+            <a:srgbClr val="16213A"/>
+          </a:solidFill>
+          <a:ln/>
+          <a:effectLst>
+            <a:outerShdw sx="100000" sy="100000" kx="0" ky="0" algn="bl" rotWithShape="0" blurRad="101600" dist="38100" dir="5400000">
+              <a:srgbClr val="000000">
+                <a:alpha val="35000"/>
+              </a:srgbClr>
+            </a:outerShdw>
+          </a:effectLst>
+        </p:spPr>
+      </p:sp>
+      <p:sp>
+        <p:nvSpPr>
+          <p:cNvPr id="4" name="Shape 2"/>
+          <p:cNvSpPr/>
+          <p:nvPr/>
+        </p:nvSpPr>
+        <p:spPr>
+          <a:xfrm>
+            <a:off x="1450696" y="1746504"/>
             <a:ext cx="1810512" cy="1810512"/>
           </a:xfrm>
           <a:prstGeom prst="ellipse">
             <a:avLst/>
           </a:prstGeom>
           <a:solidFill>
-            <a:srgbClr val="E8A33D">
+            <a:srgbClr val="1BAF7A">
               <a:alpha val="12000"/>
             </a:srgbClr>
           </a:solidFill>
@@ -8591,20 +9687,20 @@
       </p:sp>
       <p:sp>
         <p:nvSpPr>
-          <p:cNvPr id="3" name="Shape 1"/>
-          <p:cNvSpPr/>
-          <p:nvPr/>
-        </p:nvSpPr>
-        <p:spPr>
-          <a:xfrm>
-            <a:off x="5437480" y="758952"/>
+          <p:cNvPr id="5" name="Shape 3"/>
+          <p:cNvSpPr/>
+          <p:nvPr/>
+        </p:nvSpPr>
+        <p:spPr>
+          <a:xfrm>
+            <a:off x="1697584" y="1993392"/>
             <a:ext cx="1316736" cy="1316736"/>
           </a:xfrm>
           <a:prstGeom prst="ellipse">
             <a:avLst/>
           </a:prstGeom>
           <a:solidFill>
-            <a:srgbClr val="E8A33D">
+            <a:srgbClr val="1BAF7A">
               <a:alpha val="22000"/>
             </a:srgbClr>
           </a:solidFill>
@@ -8613,24 +9709,24 @@
       </p:sp>
       <p:sp>
         <p:nvSpPr>
-          <p:cNvPr id="4" name="Shape 2"/>
-          <p:cNvSpPr/>
-          <p:nvPr/>
-        </p:nvSpPr>
-        <p:spPr>
-          <a:xfrm>
-            <a:off x="5684368" y="1005840"/>
+          <p:cNvPr id="6" name="Shape 4"/>
+          <p:cNvSpPr/>
+          <p:nvPr/>
+        </p:nvSpPr>
+        <p:spPr>
+          <a:xfrm>
+            <a:off x="1944472" y="2240280"/>
             <a:ext cx="822960" cy="822960"/>
           </a:xfrm>
           <a:prstGeom prst="ellipse">
             <a:avLst/>
           </a:prstGeom>
           <a:solidFill>
-            <a:srgbClr val="E8A33D"/>
+            <a:srgbClr val="1BAF7A"/>
           </a:solidFill>
           <a:ln w="9525">
             <a:solidFill>
-              <a:srgbClr val="E8A33D"/>
+              <a:srgbClr val="1BAF7A"/>
             </a:solidFill>
             <a:prstDash val="solid"/>
           </a:ln>
@@ -8638,7 +9734,7 @@
       </p:sp>
       <p:pic>
         <p:nvPicPr>
-          <p:cNvPr id="5" name="Image 0" descr="preencoded.png">    </p:cNvPr>
+          <p:cNvPr id="7" name="Image 0" descr="preencoded.png">    </p:cNvPr>
           <p:cNvPicPr>
             <a:picLocks noChangeAspect="1"/>
           </p:cNvPicPr>
@@ -8652,7 +9748,7 @@
         </p:blipFill>
         <p:spPr>
           <a:xfrm>
-            <a:off x="5898337" y="1219810"/>
+            <a:off x="2158441" y="2454250"/>
             <a:ext cx="395021" cy="395021"/>
           </a:xfrm>
           <a:prstGeom prst="rect">
@@ -8662,14 +9758,14 @@
       </p:pic>
       <p:sp>
         <p:nvSpPr>
-          <p:cNvPr id="6" name="Text 3"/>
-          <p:cNvSpPr/>
-          <p:nvPr/>
-        </p:nvSpPr>
-        <p:spPr>
-          <a:xfrm>
-            <a:off x="0" y="1965960"/>
-            <a:ext cx="12191695" cy="731520"/>
+          <p:cNvPr id="8" name="Text 5"/>
+          <p:cNvSpPr/>
+          <p:nvPr/>
+        </p:nvSpPr>
+        <p:spPr>
+          <a:xfrm>
+            <a:off x="778612" y="3200400"/>
+            <a:ext cx="3154680" cy="411480"/>
           </a:xfrm>
           <a:prstGeom prst="rect">
             <a:avLst/>
@@ -8685,7 +9781,7 @@
               <a:buNone/>
             </a:pPr>
             <a:r>
-              <a:rPr lang="en-US" sz="3400" b="1" dirty="0">
+              <a:rPr lang="en-US" sz="1700" b="1" dirty="0">
                 <a:solidFill>
                   <a:srgbClr val="FFFFFF"/>
                 </a:solidFill>
@@ -8693,22 +9789,22 @@
                 <a:ea typeface="Yu Gothic" pitchFamily="34" charset="-122"/>
                 <a:cs typeface="Yu Gothic" pitchFamily="34" charset="-120"/>
               </a:rPr>
-              <a:t>救済者 × ガバナンス</a:t>
-            </a:r>
-            <a:endParaRPr lang="en-US" sz="3400" dirty="0"/>
-          </a:p>
-        </p:txBody>
-      </p:sp>
-      <p:sp>
-        <p:nvSpPr>
-          <p:cNvPr id="7" name="Text 4"/>
-          <p:cNvSpPr/>
-          <p:nvPr/>
-        </p:nvSpPr>
-        <p:spPr>
-          <a:xfrm>
-            <a:off x="0" y="2651760"/>
-            <a:ext cx="12191695" cy="411480"/>
+              <a:t>村</a:t>
+            </a:r>
+            <a:endParaRPr lang="en-US" sz="1700" dirty="0"/>
+          </a:p>
+        </p:txBody>
+      </p:sp>
+      <p:sp>
+        <p:nvSpPr>
+          <p:cNvPr id="9" name="Text 6"/>
+          <p:cNvSpPr/>
+          <p:nvPr/>
+        </p:nvSpPr>
+        <p:spPr>
+          <a:xfrm>
+            <a:off x="915772" y="3657600"/>
+            <a:ext cx="2880360" cy="914400"/>
           </a:xfrm>
           <a:prstGeom prst="rect">
             <a:avLst/>
@@ -8721,10 +9817,13 @@
           <a:lstStyle/>
           <a:p>
             <a:pPr algn="ctr" indent="0" marL="0">
-              <a:buNone/>
-            </a:pPr>
-            <a:r>
-              <a:rPr lang="en-US" sz="1500" dirty="0">
+              <a:lnSpc>
+                <a:spcPct val="130000"/>
+              </a:lnSpc>
+              <a:buNone/>
+            </a:pPr>
+            <a:r>
+              <a:rPr lang="en-US" sz="1300" dirty="0">
                 <a:solidFill>
                   <a:srgbClr val="AFC9EE"/>
                 </a:solidFill>
@@ -8732,26 +9831,26 @@
                 <a:ea typeface="Yu Gothic" pitchFamily="34" charset="-122"/>
                 <a:cs typeface="Yu Gothic" pitchFamily="34" charset="-120"/>
               </a:rPr>
-              <a:t>神が降りなくても、村は回るか</a:t>
-            </a:r>
-            <a:endParaRPr lang="en-US" sz="1500" dirty="0"/>
-          </a:p>
-        </p:txBody>
-      </p:sp>
-      <p:sp>
-        <p:nvSpPr>
-          <p:cNvPr id="8" name="Shape 5"/>
-          <p:cNvSpPr/>
-          <p:nvPr/>
-        </p:nvSpPr>
-        <p:spPr>
-          <a:xfrm>
-            <a:off x="609448" y="3337560"/>
-            <a:ext cx="3474720" cy="1371600"/>
+              <a:t>「世話焼きへの過度な依存」と疲弊</a:t>
+            </a:r>
+            <a:endParaRPr lang="en-US" sz="1300" dirty="0"/>
+          </a:p>
+        </p:txBody>
+      </p:sp>
+      <p:sp>
+        <p:nvSpPr>
+          <p:cNvPr id="10" name="Shape 7"/>
+          <p:cNvSpPr/>
+          <p:nvPr/>
+        </p:nvSpPr>
+        <p:spPr>
+          <a:xfrm>
+            <a:off x="4381348" y="1874520"/>
+            <a:ext cx="3429000" cy="2880360"/>
           </a:xfrm>
           <a:prstGeom prst="roundRect">
             <a:avLst>
-              <a:gd name="adj" fmla="val 8000"/>
+              <a:gd name="adj" fmla="val 3810"/>
             </a:avLst>
           </a:prstGeom>
           <a:solidFill>
@@ -8769,14 +9868,107 @@
       </p:sp>
       <p:sp>
         <p:nvSpPr>
-          <p:cNvPr id="9" name="Text 6"/>
-          <p:cNvSpPr/>
-          <p:nvPr/>
-        </p:nvSpPr>
-        <p:spPr>
-          <a:xfrm>
-            <a:off x="792328" y="3474720"/>
-            <a:ext cx="3108960" cy="502920"/>
+          <p:cNvPr id="11" name="Shape 8"/>
+          <p:cNvSpPr/>
+          <p:nvPr/>
+        </p:nvSpPr>
+        <p:spPr>
+          <a:xfrm>
+            <a:off x="5190592" y="1746504"/>
+            <a:ext cx="1810512" cy="1810512"/>
+          </a:xfrm>
+          <a:prstGeom prst="ellipse">
+            <a:avLst/>
+          </a:prstGeom>
+          <a:solidFill>
+            <a:srgbClr val="2A78D6">
+              <a:alpha val="12000"/>
+            </a:srgbClr>
+          </a:solidFill>
+          <a:ln/>
+        </p:spPr>
+      </p:sp>
+      <p:sp>
+        <p:nvSpPr>
+          <p:cNvPr id="12" name="Shape 9"/>
+          <p:cNvSpPr/>
+          <p:nvPr/>
+        </p:nvSpPr>
+        <p:spPr>
+          <a:xfrm>
+            <a:off x="5437480" y="1993392"/>
+            <a:ext cx="1316736" cy="1316736"/>
+          </a:xfrm>
+          <a:prstGeom prst="ellipse">
+            <a:avLst/>
+          </a:prstGeom>
+          <a:solidFill>
+            <a:srgbClr val="2A78D6">
+              <a:alpha val="22000"/>
+            </a:srgbClr>
+          </a:solidFill>
+          <a:ln/>
+        </p:spPr>
+      </p:sp>
+      <p:sp>
+        <p:nvSpPr>
+          <p:cNvPr id="13" name="Shape 10"/>
+          <p:cNvSpPr/>
+          <p:nvPr/>
+        </p:nvSpPr>
+        <p:spPr>
+          <a:xfrm>
+            <a:off x="5684368" y="2240280"/>
+            <a:ext cx="822960" cy="822960"/>
+          </a:xfrm>
+          <a:prstGeom prst="ellipse">
+            <a:avLst/>
+          </a:prstGeom>
+          <a:solidFill>
+            <a:srgbClr val="2A78D6"/>
+          </a:solidFill>
+          <a:ln w="9525">
+            <a:solidFill>
+              <a:srgbClr val="2A78D6"/>
+            </a:solidFill>
+            <a:prstDash val="solid"/>
+          </a:ln>
+        </p:spPr>
+      </p:sp>
+      <p:pic>
+        <p:nvPicPr>
+          <p:cNvPr id="14" name="Image 1" descr="preencoded.png">    </p:cNvPr>
+          <p:cNvPicPr>
+            <a:picLocks noChangeAspect="1"/>
+          </p:cNvPicPr>
+          <p:nvPr/>
+        </p:nvPicPr>
+        <p:blipFill>
+          <a:blip r:embed="rId2"/>
+          <a:stretch>
+            <a:fillRect/>
+          </a:stretch>
+        </p:blipFill>
+        <p:spPr>
+          <a:xfrm>
+            <a:off x="5898337" y="2454250"/>
+            <a:ext cx="395021" cy="395021"/>
+          </a:xfrm>
+          <a:prstGeom prst="rect">
+            <a:avLst/>
+          </a:prstGeom>
+        </p:spPr>
+      </p:pic>
+      <p:sp>
+        <p:nvSpPr>
+          <p:cNvPr id="15" name="Text 11"/>
+          <p:cNvSpPr/>
+          <p:nvPr/>
+        </p:nvSpPr>
+        <p:spPr>
+          <a:xfrm>
+            <a:off x="4518508" y="3200400"/>
+            <a:ext cx="3154680" cy="411480"/>
           </a:xfrm>
           <a:prstGeom prst="rect">
             <a:avLst/>
@@ -8792,30 +9984,30 @@
               <a:buNone/>
             </a:pPr>
             <a:r>
-              <a:rPr lang="en-US" sz="1900" b="1" dirty="0">
-                <a:solidFill>
-                  <a:srgbClr val="1BAF7A"/>
-                </a:solidFill>
-                <a:latin typeface="Yu Gothic" pitchFamily="34" charset="0"/>
-                <a:ea typeface="Yu Gothic" pitchFamily="34" charset="-122"/>
-                <a:cs typeface="Yu Gothic" pitchFamily="34" charset="-120"/>
-              </a:rPr>
-              <a:t>負荷 95% → 35%</a:t>
-            </a:r>
-            <a:endParaRPr lang="en-US" sz="1900" dirty="0"/>
-          </a:p>
-        </p:txBody>
-      </p:sp>
-      <p:sp>
-        <p:nvSpPr>
-          <p:cNvPr id="10" name="Text 7"/>
-          <p:cNvSpPr/>
-          <p:nvPr/>
-        </p:nvSpPr>
-        <p:spPr>
-          <a:xfrm>
-            <a:off x="838048" y="4023360"/>
-            <a:ext cx="3017520" cy="594360"/>
+              <a:rPr lang="en-US" sz="1700" b="1" dirty="0">
+                <a:solidFill>
+                  <a:srgbClr val="FFFFFF"/>
+                </a:solidFill>
+                <a:latin typeface="Yu Gothic" pitchFamily="34" charset="0"/>
+                <a:ea typeface="Yu Gothic" pitchFamily="34" charset="-122"/>
+                <a:cs typeface="Yu Gothic" pitchFamily="34" charset="-120"/>
+              </a:rPr>
+              <a:t>都市</a:t>
+            </a:r>
+            <a:endParaRPr lang="en-US" sz="1700" dirty="0"/>
+          </a:p>
+        </p:txBody>
+      </p:sp>
+      <p:sp>
+        <p:nvSpPr>
+          <p:cNvPr id="16" name="Text 12"/>
+          <p:cNvSpPr/>
+          <p:nvPr/>
+        </p:nvSpPr>
+        <p:spPr>
+          <a:xfrm>
+            <a:off x="4655668" y="3657600"/>
+            <a:ext cx="2880360" cy="914400"/>
           </a:xfrm>
           <a:prstGeom prst="rect">
             <a:avLst/>
@@ -8829,39 +10021,39 @@
           <a:p>
             <a:pPr algn="ctr" indent="0" marL="0">
               <a:lnSpc>
-                <a:spcPct val="125000"/>
+                <a:spcPct val="130000"/>
               </a:lnSpc>
               <a:buNone/>
             </a:pPr>
             <a:r>
-              <a:rPr lang="en-US" sz="1100" dirty="0">
-                <a:solidFill>
-                  <a:srgbClr val="9AA4C0"/>
-                </a:solidFill>
-                <a:latin typeface="Yu Gothic" pitchFamily="34" charset="0"/>
-                <a:ea typeface="Yu Gothic" pitchFamily="34" charset="-122"/>
-                <a:cs typeface="Yu Gothic" pitchFamily="34" charset="-120"/>
-              </a:rPr>
-              <a:t>分散ガバナンス型（C）で救済者の負荷は3分の1近くに</a:t>
-            </a:r>
-            <a:endParaRPr lang="en-US" sz="1100" dirty="0"/>
-          </a:p>
-        </p:txBody>
-      </p:sp>
-      <p:sp>
-        <p:nvSpPr>
-          <p:cNvPr id="11" name="Shape 8"/>
-          <p:cNvSpPr/>
-          <p:nvPr/>
-        </p:nvSpPr>
-        <p:spPr>
-          <a:xfrm>
-            <a:off x="4358488" y="3337560"/>
-            <a:ext cx="3474720" cy="1371600"/>
+              <a:rPr lang="en-US" sz="1300" dirty="0">
+                <a:solidFill>
+                  <a:srgbClr val="AFC9EE"/>
+                </a:solidFill>
+                <a:latin typeface="Yu Gothic" pitchFamily="34" charset="0"/>
+                <a:ea typeface="Yu Gothic" pitchFamily="34" charset="-122"/>
+                <a:cs typeface="Yu Gothic" pitchFamily="34" charset="-120"/>
+              </a:rPr>
+              <a:t>「支援制度の複雑化」と、誰にも届かないSOS</a:t>
+            </a:r>
+            <a:endParaRPr lang="en-US" sz="1300" dirty="0"/>
+          </a:p>
+        </p:txBody>
+      </p:sp>
+      <p:sp>
+        <p:nvSpPr>
+          <p:cNvPr id="17" name="Shape 13"/>
+          <p:cNvSpPr/>
+          <p:nvPr/>
+        </p:nvSpPr>
+        <p:spPr>
+          <a:xfrm>
+            <a:off x="8121244" y="1874520"/>
+            <a:ext cx="3429000" cy="2880360"/>
           </a:xfrm>
           <a:prstGeom prst="roundRect">
             <a:avLst>
-              <a:gd name="adj" fmla="val 8000"/>
+              <a:gd name="adj" fmla="val 3810"/>
             </a:avLst>
           </a:prstGeom>
           <a:solidFill>
@@ -8879,14 +10071,107 @@
       </p:sp>
       <p:sp>
         <p:nvSpPr>
-          <p:cNvPr id="12" name="Text 9"/>
-          <p:cNvSpPr/>
-          <p:nvPr/>
-        </p:nvSpPr>
-        <p:spPr>
-          <a:xfrm>
-            <a:off x="4541368" y="3474720"/>
-            <a:ext cx="3108960" cy="502920"/>
+          <p:cNvPr id="18" name="Shape 14"/>
+          <p:cNvSpPr/>
+          <p:nvPr/>
+        </p:nvSpPr>
+        <p:spPr>
+          <a:xfrm>
+            <a:off x="8930488" y="1746504"/>
+            <a:ext cx="1810512" cy="1810512"/>
+          </a:xfrm>
+          <a:prstGeom prst="ellipse">
+            <a:avLst/>
+          </a:prstGeom>
+          <a:solidFill>
+            <a:srgbClr val="EB6834">
+              <a:alpha val="12000"/>
+            </a:srgbClr>
+          </a:solidFill>
+          <a:ln/>
+        </p:spPr>
+      </p:sp>
+      <p:sp>
+        <p:nvSpPr>
+          <p:cNvPr id="19" name="Shape 15"/>
+          <p:cNvSpPr/>
+          <p:nvPr/>
+        </p:nvSpPr>
+        <p:spPr>
+          <a:xfrm>
+            <a:off x="9177376" y="1993392"/>
+            <a:ext cx="1316736" cy="1316736"/>
+          </a:xfrm>
+          <a:prstGeom prst="ellipse">
+            <a:avLst/>
+          </a:prstGeom>
+          <a:solidFill>
+            <a:srgbClr val="EB6834">
+              <a:alpha val="22000"/>
+            </a:srgbClr>
+          </a:solidFill>
+          <a:ln/>
+        </p:spPr>
+      </p:sp>
+      <p:sp>
+        <p:nvSpPr>
+          <p:cNvPr id="20" name="Shape 16"/>
+          <p:cNvSpPr/>
+          <p:nvPr/>
+        </p:nvSpPr>
+        <p:spPr>
+          <a:xfrm>
+            <a:off x="9424264" y="2240280"/>
+            <a:ext cx="822960" cy="822960"/>
+          </a:xfrm>
+          <a:prstGeom prst="ellipse">
+            <a:avLst/>
+          </a:prstGeom>
+          <a:solidFill>
+            <a:srgbClr val="EB6834"/>
+          </a:solidFill>
+          <a:ln w="9525">
+            <a:solidFill>
+              <a:srgbClr val="EB6834"/>
+            </a:solidFill>
+            <a:prstDash val="solid"/>
+          </a:ln>
+        </p:spPr>
+      </p:sp>
+      <p:pic>
+        <p:nvPicPr>
+          <p:cNvPr id="21" name="Image 2" descr="preencoded.png">    </p:cNvPr>
+          <p:cNvPicPr>
+            <a:picLocks noChangeAspect="1"/>
+          </p:cNvPicPr>
+          <p:nvPr/>
+        </p:nvPicPr>
+        <p:blipFill>
+          <a:blip r:embed="rId3"/>
+          <a:stretch>
+            <a:fillRect/>
+          </a:stretch>
+        </p:blipFill>
+        <p:spPr>
+          <a:xfrm>
+            <a:off x="9638233" y="2454250"/>
+            <a:ext cx="395021" cy="395021"/>
+          </a:xfrm>
+          <a:prstGeom prst="rect">
+            <a:avLst/>
+          </a:prstGeom>
+        </p:spPr>
+      </p:pic>
+      <p:sp>
+        <p:nvSpPr>
+          <p:cNvPr id="22" name="Text 17"/>
+          <p:cNvSpPr/>
+          <p:nvPr/>
+        </p:nvSpPr>
+        <p:spPr>
+          <a:xfrm>
+            <a:off x="8258404" y="3200400"/>
+            <a:ext cx="3154680" cy="411480"/>
           </a:xfrm>
           <a:prstGeom prst="rect">
             <a:avLst/>
@@ -8902,30 +10187,30 @@
               <a:buNone/>
             </a:pPr>
             <a:r>
-              <a:rPr lang="en-US" sz="1900" b="1" dirty="0">
-                <a:solidFill>
-                  <a:srgbClr val="1BAF7A"/>
-                </a:solidFill>
-                <a:latin typeface="Yu Gothic" pitchFamily="34" charset="0"/>
-                <a:ea typeface="Yu Gothic" pitchFamily="34" charset="-122"/>
-                <a:cs typeface="Yu Gothic" pitchFamily="34" charset="-120"/>
-              </a:rPr>
-              <a:t>自律度 15 → 65</a:t>
-            </a:r>
-            <a:endParaRPr lang="en-US" sz="1900" dirty="0"/>
-          </a:p>
-        </p:txBody>
-      </p:sp>
-      <p:sp>
-        <p:nvSpPr>
-          <p:cNvPr id="13" name="Text 10"/>
-          <p:cNvSpPr/>
-          <p:nvPr/>
-        </p:nvSpPr>
-        <p:spPr>
-          <a:xfrm>
-            <a:off x="4587088" y="4023360"/>
-            <a:ext cx="3017520" cy="594360"/>
+              <a:rPr lang="en-US" sz="1700" b="1" dirty="0">
+                <a:solidFill>
+                  <a:srgbClr val="FFFFFF"/>
+                </a:solidFill>
+                <a:latin typeface="Yu Gothic" pitchFamily="34" charset="0"/>
+                <a:ea typeface="Yu Gothic" pitchFamily="34" charset="-122"/>
+                <a:cs typeface="Yu Gothic" pitchFamily="34" charset="-120"/>
+              </a:rPr>
+              <a:t>国</a:t>
+            </a:r>
+            <a:endParaRPr lang="en-US" sz="1700" dirty="0"/>
+          </a:p>
+        </p:txBody>
+      </p:sp>
+      <p:sp>
+        <p:nvSpPr>
+          <p:cNvPr id="23" name="Text 18"/>
+          <p:cNvSpPr/>
+          <p:nvPr/>
+        </p:nvSpPr>
+        <p:spPr>
+          <a:xfrm>
+            <a:off x="8395564" y="3657600"/>
+            <a:ext cx="2880360" cy="914400"/>
           </a:xfrm>
           <a:prstGeom prst="rect">
             <a:avLst/>
@@ -8939,43 +10224,43 @@
           <a:p>
             <a:pPr algn="ctr" indent="0" marL="0">
               <a:lnSpc>
-                <a:spcPct val="125000"/>
+                <a:spcPct val="130000"/>
               </a:lnSpc>
               <a:buNone/>
             </a:pPr>
             <a:r>
-              <a:rPr lang="en-US" sz="1100" dirty="0">
-                <a:solidFill>
-                  <a:srgbClr val="9AA4C0"/>
-                </a:solidFill>
-                <a:latin typeface="Yu Gothic" pitchFamily="34" charset="0"/>
-                <a:ea typeface="Yu Gothic" pitchFamily="34" charset="-122"/>
-                <a:cs typeface="Yu Gothic" pitchFamily="34" charset="-120"/>
-              </a:rPr>
-              <a:t>村の自律的解決率は4倍以上に上昇</a:t>
-            </a:r>
-            <a:endParaRPr lang="en-US" sz="1100" dirty="0"/>
-          </a:p>
-        </p:txBody>
-      </p:sp>
-      <p:sp>
-        <p:nvSpPr>
-          <p:cNvPr id="14" name="Shape 11"/>
-          <p:cNvSpPr/>
-          <p:nvPr/>
-        </p:nvSpPr>
-        <p:spPr>
-          <a:xfrm>
-            <a:off x="8107528" y="3337560"/>
-            <a:ext cx="3474720" cy="1371600"/>
+              <a:rPr lang="en-US" sz="1300" dirty="0">
+                <a:solidFill>
+                  <a:srgbClr val="AFC9EE"/>
+                </a:solidFill>
+                <a:latin typeface="Yu Gothic" pitchFamily="34" charset="0"/>
+                <a:ea typeface="Yu Gothic" pitchFamily="34" charset="-122"/>
+                <a:cs typeface="Yu Gothic" pitchFamily="34" charset="-120"/>
+              </a:rPr>
+              <a:t>「権力の集中」と、強い指導者への救世主待望</a:t>
+            </a:r>
+            <a:endParaRPr lang="en-US" sz="1300" dirty="0"/>
+          </a:p>
+        </p:txBody>
+      </p:sp>
+      <p:sp>
+        <p:nvSpPr>
+          <p:cNvPr id="24" name="Shape 19"/>
+          <p:cNvSpPr/>
+          <p:nvPr/>
+        </p:nvSpPr>
+        <p:spPr>
+          <a:xfrm>
+            <a:off x="548640" y="5166360"/>
+            <a:ext cx="11091672" cy="960120"/>
           </a:xfrm>
           <a:prstGeom prst="roundRect">
             <a:avLst>
-              <a:gd name="adj" fmla="val 8000"/>
+              <a:gd name="adj" fmla="val 9524"/>
             </a:avLst>
           </a:prstGeom>
           <a:solidFill>
-            <a:srgbClr val="16213A"/>
+            <a:srgbClr val="1C2C4A"/>
           </a:solidFill>
           <a:ln/>
           <a:effectLst>
@@ -8989,13 +10274,362 @@
       </p:sp>
       <p:sp>
         <p:nvSpPr>
-          <p:cNvPr id="15" name="Text 12"/>
-          <p:cNvSpPr/>
-          <p:nvPr/>
-        </p:nvSpPr>
-        <p:spPr>
-          <a:xfrm>
-            <a:off x="8290408" y="3474720"/>
+          <p:cNvPr id="25" name="Text 20"/>
+          <p:cNvSpPr/>
+          <p:nvPr/>
+        </p:nvSpPr>
+        <p:spPr>
+          <a:xfrm>
+            <a:off x="868680" y="5166360"/>
+            <a:ext cx="10515600" cy="960120"/>
+          </a:xfrm>
+          <a:prstGeom prst="rect">
+            <a:avLst/>
+          </a:prstGeom>
+          <a:noFill/>
+          <a:ln/>
+        </p:spPr>
+        <p:txBody>
+          <a:bodyPr wrap="square" lIns="0" tIns="0" rIns="0" bIns="0" rtlCol="0" anchor="ctr"/>
+          <a:lstStyle/>
+          <a:p>
+            <a:pPr indent="0" marL="0">
+              <a:buNone/>
+            </a:pPr>
+            <a:r>
+              <a:rPr lang="en-US" sz="1350" dirty="0">
+                <a:solidFill>
+                  <a:srgbClr val="AFC9EE"/>
+                </a:solidFill>
+                <a:latin typeface="Yu Gothic" pitchFamily="34" charset="0"/>
+                <a:ea typeface="Yu Gothic" pitchFamily="34" charset="-122"/>
+                <a:cs typeface="Yu Gothic" pitchFamily="34" charset="-120"/>
+              </a:rPr>
+              <a:t>小さな共同体における「救済者への依存」と、国家規模における「権力の集中」は構造的に同じである。この実験は、社会全体のレジリエンスを問う試みである。</a:t>
+            </a:r>
+            <a:endParaRPr lang="en-US" sz="1350" dirty="0"/>
+          </a:p>
+        </p:txBody>
+      </p:sp>
+      <p:sp>
+        <p:nvSpPr>
+          <p:cNvPr id="26" name="Text 21"/>
+          <p:cNvSpPr/>
+          <p:nvPr/>
+        </p:nvSpPr>
+        <p:spPr>
+          <a:xfrm>
+            <a:off x="548640" y="6473952"/>
+            <a:ext cx="4572000" cy="274320"/>
+          </a:xfrm>
+          <a:prstGeom prst="rect">
+            <a:avLst/>
+          </a:prstGeom>
+          <a:noFill/>
+          <a:ln/>
+        </p:spPr>
+        <p:txBody>
+          <a:bodyPr wrap="square" lIns="0" tIns="0" rIns="0" bIns="0" rtlCol="0" anchor="ctr"/>
+          <a:lstStyle/>
+          <a:p>
+            <a:pPr indent="0" marL="0">
+              <a:buNone/>
+            </a:pPr>
+            <a:r>
+              <a:rPr lang="en-US" sz="900" dirty="0">
+                <a:solidFill>
+                  <a:srgbClr val="5B6480"/>
+                </a:solidFill>
+                <a:latin typeface="Yu Gothic" pitchFamily="34" charset="0"/>
+                <a:ea typeface="Yu Gothic" pitchFamily="34" charset="-122"/>
+                <a:cs typeface="Yu Gothic" pitchFamily="34" charset="-120"/>
+              </a:rPr>
+              <a:t>救済者 × ガバナンス</a:t>
+            </a:r>
+            <a:endParaRPr lang="en-US" sz="900" dirty="0"/>
+          </a:p>
+        </p:txBody>
+      </p:sp>
+      <p:sp>
+        <p:nvSpPr>
+          <p:cNvPr id="27" name="Text 22"/>
+          <p:cNvSpPr/>
+          <p:nvPr/>
+        </p:nvSpPr>
+        <p:spPr>
+          <a:xfrm>
+            <a:off x="11185855" y="6473952"/>
+            <a:ext cx="457200" cy="274320"/>
+          </a:xfrm>
+          <a:prstGeom prst="rect">
+            <a:avLst/>
+          </a:prstGeom>
+          <a:noFill/>
+          <a:ln/>
+        </p:spPr>
+        <p:txBody>
+          <a:bodyPr wrap="square" lIns="0" tIns="0" rIns="0" bIns="0" rtlCol="0" anchor="ctr"/>
+          <a:lstStyle/>
+          <a:p>
+            <a:pPr algn="r" indent="0" marL="0">
+              <a:buNone/>
+            </a:pPr>
+            <a:r>
+              <a:rPr lang="en-US" sz="900" dirty="0">
+                <a:solidFill>
+                  <a:srgbClr val="5B6480"/>
+                </a:solidFill>
+                <a:latin typeface="Yu Gothic" pitchFamily="34" charset="0"/>
+                <a:ea typeface="Yu Gothic" pitchFamily="34" charset="-122"/>
+                <a:cs typeface="Yu Gothic" pitchFamily="34" charset="-120"/>
+              </a:rPr>
+              <a:t>16</a:t>
+            </a:r>
+            <a:endParaRPr lang="en-US" sz="900" dirty="0"/>
+          </a:p>
+        </p:txBody>
+      </p:sp>
+    </p:spTree>
+  </p:cSld>
+  <p:clrMapOvr>
+    <a:masterClrMapping/>
+  </p:clrMapOvr>
+</p:sld>
+</file>
+
+<file path=ppt/slides/slide17.xml><?xml version="1.0" encoding="utf-8"?>
+<p:sld xmlns:a="http://schemas.openxmlformats.org/drawingml/2006/main" xmlns:r="http://schemas.openxmlformats.org/officeDocument/2006/relationships" xmlns:p="http://schemas.openxmlformats.org/presentationml/2006/main">
+  <p:cSld name="Slide 17">
+    <p:bg>
+      <p:bgPr>
+        <a:solidFill>
+          <a:srgbClr val="0B1220"/>
+        </a:solidFill>
+      </p:bgPr>
+    </p:bg>
+    <p:spTree>
+      <p:nvGrpSpPr>
+        <p:cNvPr id="1" name=""/>
+        <p:cNvGrpSpPr/>
+        <p:nvPr/>
+      </p:nvGrpSpPr>
+      <p:grpSpPr>
+        <a:xfrm>
+          <a:off x="0" y="0"/>
+          <a:ext cx="0" cy="0"/>
+          <a:chOff x="0" y="0"/>
+          <a:chExt cx="0" cy="0"/>
+        </a:xfrm>
+      </p:grpSpPr>
+      <p:sp>
+        <p:nvSpPr>
+          <p:cNvPr id="2" name="Shape 0"/>
+          <p:cNvSpPr/>
+          <p:nvPr/>
+        </p:nvSpPr>
+        <p:spPr>
+          <a:xfrm>
+            <a:off x="5190592" y="512064"/>
+            <a:ext cx="1810512" cy="1810512"/>
+          </a:xfrm>
+          <a:prstGeom prst="ellipse">
+            <a:avLst/>
+          </a:prstGeom>
+          <a:solidFill>
+            <a:srgbClr val="E8A33D">
+              <a:alpha val="12000"/>
+            </a:srgbClr>
+          </a:solidFill>
+          <a:ln/>
+        </p:spPr>
+      </p:sp>
+      <p:sp>
+        <p:nvSpPr>
+          <p:cNvPr id="3" name="Shape 1"/>
+          <p:cNvSpPr/>
+          <p:nvPr/>
+        </p:nvSpPr>
+        <p:spPr>
+          <a:xfrm>
+            <a:off x="5437480" y="758952"/>
+            <a:ext cx="1316736" cy="1316736"/>
+          </a:xfrm>
+          <a:prstGeom prst="ellipse">
+            <a:avLst/>
+          </a:prstGeom>
+          <a:solidFill>
+            <a:srgbClr val="E8A33D">
+              <a:alpha val="22000"/>
+            </a:srgbClr>
+          </a:solidFill>
+          <a:ln/>
+        </p:spPr>
+      </p:sp>
+      <p:sp>
+        <p:nvSpPr>
+          <p:cNvPr id="4" name="Shape 2"/>
+          <p:cNvSpPr/>
+          <p:nvPr/>
+        </p:nvSpPr>
+        <p:spPr>
+          <a:xfrm>
+            <a:off x="5684368" y="1005840"/>
+            <a:ext cx="822960" cy="822960"/>
+          </a:xfrm>
+          <a:prstGeom prst="ellipse">
+            <a:avLst/>
+          </a:prstGeom>
+          <a:solidFill>
+            <a:srgbClr val="E8A33D"/>
+          </a:solidFill>
+          <a:ln w="9525">
+            <a:solidFill>
+              <a:srgbClr val="E8A33D"/>
+            </a:solidFill>
+            <a:prstDash val="solid"/>
+          </a:ln>
+        </p:spPr>
+      </p:sp>
+      <p:pic>
+        <p:nvPicPr>
+          <p:cNvPr id="5" name="Image 0" descr="preencoded.png">    </p:cNvPr>
+          <p:cNvPicPr>
+            <a:picLocks noChangeAspect="1"/>
+          </p:cNvPicPr>
+          <p:nvPr/>
+        </p:nvPicPr>
+        <p:blipFill>
+          <a:blip r:embed="rId1"/>
+          <a:stretch>
+            <a:fillRect/>
+          </a:stretch>
+        </p:blipFill>
+        <p:spPr>
+          <a:xfrm>
+            <a:off x="5898337" y="1219810"/>
+            <a:ext cx="395021" cy="395021"/>
+          </a:xfrm>
+          <a:prstGeom prst="rect">
+            <a:avLst/>
+          </a:prstGeom>
+        </p:spPr>
+      </p:pic>
+      <p:sp>
+        <p:nvSpPr>
+          <p:cNvPr id="6" name="Text 3"/>
+          <p:cNvSpPr/>
+          <p:nvPr/>
+        </p:nvSpPr>
+        <p:spPr>
+          <a:xfrm>
+            <a:off x="0" y="1965960"/>
+            <a:ext cx="12191695" cy="731520"/>
+          </a:xfrm>
+          <a:prstGeom prst="rect">
+            <a:avLst/>
+          </a:prstGeom>
+          <a:noFill/>
+          <a:ln/>
+        </p:spPr>
+        <p:txBody>
+          <a:bodyPr wrap="square" lIns="0" tIns="0" rIns="0" bIns="0" rtlCol="0" anchor="ctr"/>
+          <a:lstStyle/>
+          <a:p>
+            <a:pPr algn="ctr" indent="0" marL="0">
+              <a:buNone/>
+            </a:pPr>
+            <a:r>
+              <a:rPr lang="en-US" sz="3400" b="1" dirty="0">
+                <a:solidFill>
+                  <a:srgbClr val="FFFFFF"/>
+                </a:solidFill>
+                <a:latin typeface="Yu Gothic" pitchFamily="34" charset="0"/>
+                <a:ea typeface="Yu Gothic" pitchFamily="34" charset="-122"/>
+                <a:cs typeface="Yu Gothic" pitchFamily="34" charset="-120"/>
+              </a:rPr>
+              <a:t>救済者 × ガバナンス</a:t>
+            </a:r>
+            <a:endParaRPr lang="en-US" sz="3400" dirty="0"/>
+          </a:p>
+        </p:txBody>
+      </p:sp>
+      <p:sp>
+        <p:nvSpPr>
+          <p:cNvPr id="7" name="Text 4"/>
+          <p:cNvSpPr/>
+          <p:nvPr/>
+        </p:nvSpPr>
+        <p:spPr>
+          <a:xfrm>
+            <a:off x="0" y="2651760"/>
+            <a:ext cx="12191695" cy="411480"/>
+          </a:xfrm>
+          <a:prstGeom prst="rect">
+            <a:avLst/>
+          </a:prstGeom>
+          <a:noFill/>
+          <a:ln/>
+        </p:spPr>
+        <p:txBody>
+          <a:bodyPr wrap="square" lIns="0" tIns="0" rIns="0" bIns="0" rtlCol="0" anchor="ctr"/>
+          <a:lstStyle/>
+          <a:p>
+            <a:pPr algn="ctr" indent="0" marL="0">
+              <a:buNone/>
+            </a:pPr>
+            <a:r>
+              <a:rPr lang="en-US" sz="1500" dirty="0">
+                <a:solidFill>
+                  <a:srgbClr val="AFC9EE"/>
+                </a:solidFill>
+                <a:latin typeface="Yu Gothic" pitchFamily="34" charset="0"/>
+                <a:ea typeface="Yu Gothic" pitchFamily="34" charset="-122"/>
+                <a:cs typeface="Yu Gothic" pitchFamily="34" charset="-120"/>
+              </a:rPr>
+              <a:t>神が降りなくても、村は回るか</a:t>
+            </a:r>
+            <a:endParaRPr lang="en-US" sz="1500" dirty="0"/>
+          </a:p>
+        </p:txBody>
+      </p:sp>
+      <p:sp>
+        <p:nvSpPr>
+          <p:cNvPr id="8" name="Shape 5"/>
+          <p:cNvSpPr/>
+          <p:nvPr/>
+        </p:nvSpPr>
+        <p:spPr>
+          <a:xfrm>
+            <a:off x="609448" y="3337560"/>
+            <a:ext cx="3474720" cy="1371600"/>
+          </a:xfrm>
+          <a:prstGeom prst="roundRect">
+            <a:avLst>
+              <a:gd name="adj" fmla="val 8000"/>
+            </a:avLst>
+          </a:prstGeom>
+          <a:solidFill>
+            <a:srgbClr val="16213A"/>
+          </a:solidFill>
+          <a:ln/>
+          <a:effectLst>
+            <a:outerShdw sx="100000" sy="100000" kx="0" ky="0" algn="bl" rotWithShape="0" blurRad="101600" dist="38100" dir="5400000">
+              <a:srgbClr val="000000">
+                <a:alpha val="35000"/>
+              </a:srgbClr>
+            </a:outerShdw>
+          </a:effectLst>
+        </p:spPr>
+      </p:sp>
+      <p:sp>
+        <p:nvSpPr>
+          <p:cNvPr id="9" name="Text 6"/>
+          <p:cNvSpPr/>
+          <p:nvPr/>
+        </p:nvSpPr>
+        <p:spPr>
+          <a:xfrm>
+            <a:off x="792328" y="3474720"/>
             <a:ext cx="3108960" cy="502920"/>
           </a:xfrm>
           <a:prstGeom prst="rect">
@@ -9014,13 +10648,13 @@
             <a:r>
               <a:rPr lang="en-US" sz="1900" b="1" dirty="0">
                 <a:solidFill>
-                  <a:srgbClr val="1BAF7A"/>
-                </a:solidFill>
-                <a:latin typeface="Yu Gothic" pitchFamily="34" charset="0"/>
-                <a:ea typeface="Yu Gothic" pitchFamily="34" charset="-122"/>
-                <a:cs typeface="Yu Gothic" pitchFamily="34" charset="-120"/>
-              </a:rPr>
-              <a:t>依存度 90 → 40</a:t>
+                  <a:srgbClr val="E2665A"/>
+                </a:solidFill>
+                <a:latin typeface="Yu Gothic" pitchFamily="34" charset="0"/>
+                <a:ea typeface="Yu Gothic" pitchFamily="34" charset="-122"/>
+                <a:cs typeface="Yu Gothic" pitchFamily="34" charset="-120"/>
+              </a:rPr>
+              <a:t>依存は毎回再現された</a:t>
             </a:r>
             <a:endParaRPr lang="en-US" sz="1900" dirty="0"/>
           </a:p>
@@ -9028,13 +10662,13 @@
       </p:sp>
       <p:sp>
         <p:nvSpPr>
-          <p:cNvPr id="16" name="Text 13"/>
-          <p:cNvSpPr/>
-          <p:nvPr/>
-        </p:nvSpPr>
-        <p:spPr>
-          <a:xfrm>
-            <a:off x="8336128" y="4023360"/>
+          <p:cNvPr id="10" name="Text 7"/>
+          <p:cNvSpPr/>
+          <p:nvPr/>
+        </p:nvSpPr>
+        <p:spPr>
+          <a:xfrm>
+            <a:off x="838048" y="4023360"/>
             <a:ext cx="3017520" cy="594360"/>
           </a:xfrm>
           <a:prstGeom prst="rect">
@@ -9062,7 +10696,227 @@
                 <a:ea typeface="Yu Gothic" pitchFamily="34" charset="-122"/>
                 <a:cs typeface="Yu Gothic" pitchFamily="34" charset="-120"/>
               </a:rPr>
-              <a:t>「救済者がいないと動けない」感覚も大きく低下</a:t>
+              <a:t>A・Bの標準偏差はほぼ0。放っておけば村は必ず依存へ落ちる</a:t>
+            </a:r>
+            <a:endParaRPr lang="en-US" sz="1100" dirty="0"/>
+          </a:p>
+        </p:txBody>
+      </p:sp>
+      <p:sp>
+        <p:nvSpPr>
+          <p:cNvPr id="11" name="Shape 8"/>
+          <p:cNvSpPr/>
+          <p:nvPr/>
+        </p:nvSpPr>
+        <p:spPr>
+          <a:xfrm>
+            <a:off x="4358488" y="3337560"/>
+            <a:ext cx="3474720" cy="1371600"/>
+          </a:xfrm>
+          <a:prstGeom prst="roundRect">
+            <a:avLst>
+              <a:gd name="adj" fmla="val 8000"/>
+            </a:avLst>
+          </a:prstGeom>
+          <a:solidFill>
+            <a:srgbClr val="16213A"/>
+          </a:solidFill>
+          <a:ln/>
+          <a:effectLst>
+            <a:outerShdw sx="100000" sy="100000" kx="0" ky="0" algn="bl" rotWithShape="0" blurRad="101600" dist="38100" dir="5400000">
+              <a:srgbClr val="000000">
+                <a:alpha val="35000"/>
+              </a:srgbClr>
+            </a:outerShdw>
+          </a:effectLst>
+        </p:spPr>
+      </p:sp>
+      <p:sp>
+        <p:nvSpPr>
+          <p:cNvPr id="12" name="Text 9"/>
+          <p:cNvSpPr/>
+          <p:nvPr/>
+        </p:nvSpPr>
+        <p:spPr>
+          <a:xfrm>
+            <a:off x="4541368" y="3474720"/>
+            <a:ext cx="3108960" cy="502920"/>
+          </a:xfrm>
+          <a:prstGeom prst="rect">
+            <a:avLst/>
+          </a:prstGeom>
+          <a:noFill/>
+          <a:ln/>
+        </p:spPr>
+        <p:txBody>
+          <a:bodyPr wrap="square" lIns="0" tIns="0" rIns="0" bIns="0" rtlCol="0" anchor="ctr"/>
+          <a:lstStyle/>
+          <a:p>
+            <a:pPr algn="ctr" indent="0" marL="0">
+              <a:buNone/>
+            </a:pPr>
+            <a:r>
+              <a:rPr lang="en-US" sz="1900" b="1" dirty="0">
+                <a:solidFill>
+                  <a:srgbClr val="E8A33D"/>
+                </a:solidFill>
+                <a:latin typeface="Yu Gothic" pitchFamily="34" charset="0"/>
+                <a:ea typeface="Yu Gothic" pitchFamily="34" charset="-122"/>
+                <a:cs typeface="Yu Gothic" pitchFamily="34" charset="-120"/>
+              </a:rPr>
+              <a:t>自律は5回中2回だけ</a:t>
+            </a:r>
+            <a:endParaRPr lang="en-US" sz="1900" dirty="0"/>
+          </a:p>
+        </p:txBody>
+      </p:sp>
+      <p:sp>
+        <p:nvSpPr>
+          <p:cNvPr id="13" name="Text 10"/>
+          <p:cNvSpPr/>
+          <p:nvPr/>
+        </p:nvSpPr>
+        <p:spPr>
+          <a:xfrm>
+            <a:off x="4587088" y="4023360"/>
+            <a:ext cx="3017520" cy="594360"/>
+          </a:xfrm>
+          <a:prstGeom prst="rect">
+            <a:avLst/>
+          </a:prstGeom>
+          <a:noFill/>
+          <a:ln/>
+        </p:spPr>
+        <p:txBody>
+          <a:bodyPr wrap="square" lIns="0" tIns="0" rIns="0" bIns="0" rtlCol="0" anchor="ctr"/>
+          <a:lstStyle/>
+          <a:p>
+            <a:pPr algn="ctr" indent="0" marL="0">
+              <a:lnSpc>
+                <a:spcPct val="125000"/>
+              </a:lnSpc>
+              <a:buNone/>
+            </a:pPr>
+            <a:r>
+              <a:rPr lang="en-US" sz="1100" dirty="0">
+                <a:solidFill>
+                  <a:srgbClr val="9AA4C0"/>
+                </a:solidFill>
+                <a:latin typeface="Yu Gothic" pitchFamily="34" charset="0"/>
+                <a:ea typeface="Yu Gothic" pitchFamily="34" charset="-122"/>
+                <a:cs typeface="Yu Gothic" pitchFamily="34" charset="-120"/>
+              </a:rPr>
+              <a:t>同じ制度でも、誰かが最初の一歩を踏み出した回にしか実現しない</a:t>
+            </a:r>
+            <a:endParaRPr lang="en-US" sz="1100" dirty="0"/>
+          </a:p>
+        </p:txBody>
+      </p:sp>
+      <p:sp>
+        <p:nvSpPr>
+          <p:cNvPr id="14" name="Shape 11"/>
+          <p:cNvSpPr/>
+          <p:nvPr/>
+        </p:nvSpPr>
+        <p:spPr>
+          <a:xfrm>
+            <a:off x="8107528" y="3337560"/>
+            <a:ext cx="3474720" cy="1371600"/>
+          </a:xfrm>
+          <a:prstGeom prst="roundRect">
+            <a:avLst>
+              <a:gd name="adj" fmla="val 8000"/>
+            </a:avLst>
+          </a:prstGeom>
+          <a:solidFill>
+            <a:srgbClr val="16213A"/>
+          </a:solidFill>
+          <a:ln/>
+          <a:effectLst>
+            <a:outerShdw sx="100000" sy="100000" kx="0" ky="0" algn="bl" rotWithShape="0" blurRad="101600" dist="38100" dir="5400000">
+              <a:srgbClr val="000000">
+                <a:alpha val="35000"/>
+              </a:srgbClr>
+            </a:outerShdw>
+          </a:effectLst>
+        </p:spPr>
+      </p:sp>
+      <p:sp>
+        <p:nvSpPr>
+          <p:cNvPr id="15" name="Text 12"/>
+          <p:cNvSpPr/>
+          <p:nvPr/>
+        </p:nvSpPr>
+        <p:spPr>
+          <a:xfrm>
+            <a:off x="8290408" y="3474720"/>
+            <a:ext cx="3108960" cy="502920"/>
+          </a:xfrm>
+          <a:prstGeom prst="rect">
+            <a:avLst/>
+          </a:prstGeom>
+          <a:noFill/>
+          <a:ln/>
+        </p:spPr>
+        <p:txBody>
+          <a:bodyPr wrap="square" lIns="0" tIns="0" rIns="0" bIns="0" rtlCol="0" anchor="ctr"/>
+          <a:lstStyle/>
+          <a:p>
+            <a:pPr algn="ctr" indent="0" marL="0">
+              <a:buNone/>
+            </a:pPr>
+            <a:r>
+              <a:rPr lang="en-US" sz="1900" b="1" dirty="0">
+                <a:solidFill>
+                  <a:srgbClr val="1BAF7A"/>
+                </a:solidFill>
+                <a:latin typeface="Yu Gothic" pitchFamily="34" charset="0"/>
+                <a:ea typeface="Yu Gothic" pitchFamily="34" charset="-122"/>
+                <a:cs typeface="Yu Gothic" pitchFamily="34" charset="-120"/>
+              </a:rPr>
+              <a:t>それでも制度は効く</a:t>
+            </a:r>
+            <a:endParaRPr lang="en-US" sz="1900" dirty="0"/>
+          </a:p>
+        </p:txBody>
+      </p:sp>
+      <p:sp>
+        <p:nvSpPr>
+          <p:cNvPr id="16" name="Text 13"/>
+          <p:cNvSpPr/>
+          <p:nvPr/>
+        </p:nvSpPr>
+        <p:spPr>
+          <a:xfrm>
+            <a:off x="8336128" y="4023360"/>
+            <a:ext cx="3017520" cy="594360"/>
+          </a:xfrm>
+          <a:prstGeom prst="rect">
+            <a:avLst/>
+          </a:prstGeom>
+          <a:noFill/>
+          <a:ln/>
+        </p:spPr>
+        <p:txBody>
+          <a:bodyPr wrap="square" lIns="0" tIns="0" rIns="0" bIns="0" rtlCol="0" anchor="ctr"/>
+          <a:lstStyle/>
+          <a:p>
+            <a:pPr algn="ctr" indent="0" marL="0">
+              <a:lnSpc>
+                <a:spcPct val="125000"/>
+              </a:lnSpc>
+              <a:buNone/>
+            </a:pPr>
+            <a:r>
+              <a:rPr lang="en-US" sz="1100" dirty="0">
+                <a:solidFill>
+                  <a:srgbClr val="9AA4C0"/>
+                </a:solidFill>
+                <a:latin typeface="Yu Gothic" pitchFamily="34" charset="0"/>
+                <a:ea typeface="Yu Gothic" pitchFamily="34" charset="-122"/>
+                <a:cs typeface="Yu Gothic" pitchFamily="34" charset="-120"/>
+              </a:rPr>
+              <a:t>Cの最悪回でもA/Bの最良回より良い（5指標中4指標で範囲が重ならない）</a:t>
             </a:r>
             <a:endParaRPr lang="en-US" sz="1100" dirty="0"/>
           </a:p>

--- a/docs/Beyond_the_Savior.pptx
+++ b/docs/Beyond_the_Savior.pptx
@@ -22,9 +22,10 @@
     <p:sldId id="270" r:id="rId16"/>
     <p:sldId id="271" r:id="rId17"/>
     <p:sldId id="272" r:id="rId18"/>
+    <p:sldId id="273" r:id="rId19"/>
   </p:sldIdLst>
   <p:notesMasterIdLst>
-    <p:notesMasterId r:id="rId19"/>
+    <p:notesMasterId r:id="rId20"/>
   </p:notesMasterIdLst>
   <p:sldSz cx="12192000" cy="6858000"/>
   <p:notesSz cx="6858000" cy="12192000"/>
@@ -1629,6 +1630,94 @@
 </p:notes>
 </file>
 
+<file path=ppt/notesSlides/notesSlide18.xml><?xml version="1.0" encoding="utf-8"?>
+<p:notes xmlns:a="http://schemas.openxmlformats.org/drawingml/2006/main" xmlns:r="http://schemas.openxmlformats.org/officeDocument/2006/relationships" xmlns:p="http://schemas.openxmlformats.org/presentationml/2006/main">
+  <p:cSld>
+    <p:spTree>
+      <p:nvGrpSpPr>
+        <p:cNvPr id="1" name=""/>
+        <p:cNvGrpSpPr/>
+        <p:nvPr/>
+      </p:nvGrpSpPr>
+      <p:grpSpPr>
+        <a:xfrm>
+          <a:off x="0" y="0"/>
+          <a:ext cx="0" cy="0"/>
+          <a:chOff x="0" y="0"/>
+          <a:chExt cx="0" cy="0"/>
+        </a:xfrm>
+      </p:grpSpPr>
+      <p:sp>
+        <p:nvSpPr>
+          <p:cNvPr id="2" name="Slide Image Placeholder 1"/>
+          <p:cNvSpPr>
+            <a:spLocks noGrp="1" noRot="1" noChangeAspect="1"/>
+          </p:cNvSpPr>
+          <p:nvPr>
+            <p:ph type="sldImg"/>
+          </p:nvPr>
+        </p:nvSpPr>
+        <p:spPr/>
+      </p:sp>
+      <p:sp>
+        <p:nvSpPr>
+          <p:cNvPr id="3" name="Notes Placeholder 2"/>
+          <p:cNvSpPr>
+            <a:spLocks noGrp="1"/>
+          </p:cNvSpPr>
+          <p:nvPr>
+            <p:ph type="body" idx="1"/>
+          </p:nvPr>
+        </p:nvSpPr>
+        <p:spPr/>
+        <p:txBody>
+          <a:bodyPr/>
+          <a:lstStyle/>
+          <a:p>
+            <a:r>
+              <a:rPr lang="en-US" dirty="0"/>
+              <a:t/>
+            </a:r>
+            <a:endParaRPr lang="en-US" dirty="0"/>
+          </a:p>
+        </p:txBody>
+      </p:sp>
+      <p:sp>
+        <p:nvSpPr>
+          <p:cNvPr id="4" name="Slide Number Placeholder 3"/>
+          <p:cNvSpPr>
+            <a:spLocks noGrp="1"/>
+          </p:cNvSpPr>
+          <p:nvPr>
+            <p:ph type="sldNum" sz="quarter" idx="10"/>
+          </p:nvPr>
+        </p:nvSpPr>
+        <p:spPr/>
+        <p:txBody>
+          <a:bodyPr/>
+          <a:lstStyle/>
+          <a:p>
+            <a:fld id="{F7021451-1387-4CA6-816F-3879F97B5CBC}" type="slidenum">
+              <a:rPr lang="en-US"/>
+              <a:t>18</a:t>
+            </a:fld>
+            <a:endParaRPr lang="en-US"/>
+          </a:p>
+        </p:txBody>
+      </p:sp>
+    </p:spTree>
+    <p:extLst>
+      <p:ext uri="{BB962C8B-B14F-4D97-AF65-F5344CB8AC3E}">
+        <p14:creationId xmlns:p14="http://schemas.microsoft.com/office/powerpoint/2010/main" val="1024086991"/>
+      </p:ext>
+    </p:extLst>
+  </p:cSld>
+  <p:clrMapOvr>
+    <a:masterClrMapping/>
+  </p:clrMapOvr>
+</p:notes>
+</file>
+
 <file path=ppt/notesSlides/notesSlide2.xml><?xml version="1.0" encoding="utf-8"?>
 <p:notes xmlns:a="http://schemas.openxmlformats.org/drawingml/2006/main" xmlns:r="http://schemas.openxmlformats.org/officeDocument/2006/relationships" xmlns:p="http://schemas.openxmlformats.org/presentationml/2006/main">
   <p:cSld>
@@ -7310,7 +7399,7 @@
                 <a:ea typeface="Yu Gothic" pitchFamily="34" charset="-122"/>
                 <a:cs typeface="Yu Gothic" pitchFamily="34" charset="-120"/>
               </a:rPr>
-              <a:t>会話ログが語ること</a:t>
+              <a:t>その「一歩」を、どこまで押せばいいのか</a:t>
             </a:r>
             <a:endParaRPr lang="en-US" sz="3000" dirty="0"/>
           </a:p>
@@ -7318,18 +7407,57 @@
       </p:sp>
       <p:sp>
         <p:nvSpPr>
-          <p:cNvPr id="3" name="Shape 1"/>
+          <p:cNvPr id="3" name="Text 1"/>
+          <p:cNvSpPr/>
+          <p:nvPr/>
+        </p:nvSpPr>
+        <p:spPr>
+          <a:xfrm>
+            <a:off x="548640" y="1207008"/>
+            <a:ext cx="11094415" cy="365760"/>
+          </a:xfrm>
+          <a:prstGeom prst="rect">
+            <a:avLst/>
+          </a:prstGeom>
+          <a:noFill/>
+          <a:ln/>
+        </p:spPr>
+        <p:txBody>
+          <a:bodyPr wrap="square" lIns="0" tIns="0" rIns="0" bIns="0" rtlCol="0" anchor="ctr"/>
+          <a:lstStyle/>
+          <a:p>
+            <a:pPr algn="l" indent="0" marL="0">
+              <a:buNone/>
+            </a:pPr>
+            <a:r>
+              <a:rPr lang="en-US" sz="1400" dirty="0">
+                <a:solidFill>
+                  <a:srgbClr val="9AA4C0"/>
+                </a:solidFill>
+                <a:latin typeface="Yu Gothic" pitchFamily="34" charset="0"/>
+                <a:ea typeface="Yu Gothic" pitchFamily="34" charset="-122"/>
+                <a:cs typeface="Yu Gothic" pitchFamily="34" charset="-120"/>
+              </a:rPr>
+              <a:t>世話好きな住民の「許可を求める度合い」だけを5段階に変え、各5回ずつ計25回実行した。</a:t>
+            </a:r>
+            <a:endParaRPr lang="en-US" sz="1400" dirty="0"/>
+          </a:p>
+        </p:txBody>
+      </p:sp>
+      <p:sp>
+        <p:nvSpPr>
+          <p:cNvPr id="4" name="Shape 2"/>
           <p:cNvSpPr/>
           <p:nvPr/>
         </p:nvSpPr>
         <p:spPr>
           <a:xfrm>
             <a:off x="548640" y="1691640"/>
-            <a:ext cx="11091672" cy="1417320"/>
+            <a:ext cx="6949440" cy="3977640"/>
           </a:xfrm>
           <a:prstGeom prst="roundRect">
             <a:avLst>
-              <a:gd name="adj" fmla="val 7742"/>
+              <a:gd name="adj" fmla="val 2759"/>
             </a:avLst>
           </a:prstGeom>
           <a:solidFill>
@@ -7347,34 +7475,436 @@
       </p:sp>
       <p:sp>
         <p:nvSpPr>
-          <p:cNvPr id="4" name="Shape 2"/>
-          <p:cNvSpPr/>
-          <p:nvPr/>
-        </p:nvSpPr>
-        <p:spPr>
-          <a:xfrm>
-            <a:off x="868680" y="2080260"/>
-            <a:ext cx="640080" cy="640080"/>
+          <p:cNvPr id="5" name="Shape 3"/>
+          <p:cNvSpPr/>
+          <p:nvPr/>
+        </p:nvSpPr>
+        <p:spPr>
+          <a:xfrm>
+            <a:off x="1280160" y="4617720"/>
+            <a:ext cx="5897880" cy="0"/>
+          </a:xfrm>
+          <a:prstGeom prst="line">
+            <a:avLst/>
+          </a:prstGeom>
+          <a:noFill/>
+          <a:ln w="9525">
+            <a:solidFill>
+              <a:srgbClr val="2A3752"/>
+            </a:solidFill>
+            <a:prstDash val="solid"/>
+          </a:ln>
+        </p:spPr>
+      </p:sp>
+      <p:sp>
+        <p:nvSpPr>
+          <p:cNvPr id="6" name="Text 4"/>
+          <p:cNvSpPr/>
+          <p:nvPr/>
+        </p:nvSpPr>
+        <p:spPr>
+          <a:xfrm>
+            <a:off x="731520" y="4498848"/>
+            <a:ext cx="457200" cy="237744"/>
+          </a:xfrm>
+          <a:prstGeom prst="rect">
+            <a:avLst/>
+          </a:prstGeom>
+          <a:noFill/>
+          <a:ln/>
+        </p:spPr>
+        <p:txBody>
+          <a:bodyPr wrap="square" lIns="0" tIns="0" rIns="0" bIns="0" rtlCol="0" anchor="ctr"/>
+          <a:lstStyle/>
+          <a:p>
+            <a:pPr algn="r" indent="0" marL="0">
+              <a:buNone/>
+            </a:pPr>
+            <a:r>
+              <a:rPr lang="en-US" sz="900" dirty="0">
+                <a:solidFill>
+                  <a:srgbClr val="5B6480"/>
+                </a:solidFill>
+                <a:latin typeface="Yu Gothic" pitchFamily="34" charset="0"/>
+                <a:ea typeface="Yu Gothic" pitchFamily="34" charset="-122"/>
+                <a:cs typeface="Yu Gothic" pitchFamily="34" charset="-120"/>
+              </a:rPr>
+              <a:t>0</a:t>
+            </a:r>
+            <a:endParaRPr lang="en-US" sz="900" dirty="0"/>
+          </a:p>
+        </p:txBody>
+      </p:sp>
+      <p:sp>
+        <p:nvSpPr>
+          <p:cNvPr id="7" name="Shape 5"/>
+          <p:cNvSpPr/>
+          <p:nvPr/>
+        </p:nvSpPr>
+        <p:spPr>
+          <a:xfrm>
+            <a:off x="1280160" y="3954780"/>
+            <a:ext cx="5897880" cy="0"/>
+          </a:xfrm>
+          <a:prstGeom prst="line">
+            <a:avLst/>
+          </a:prstGeom>
+          <a:noFill/>
+          <a:ln w="9525">
+            <a:solidFill>
+              <a:srgbClr val="2A3752"/>
+            </a:solidFill>
+            <a:prstDash val="solid"/>
+          </a:ln>
+        </p:spPr>
+      </p:sp>
+      <p:sp>
+        <p:nvSpPr>
+          <p:cNvPr id="8" name="Text 6"/>
+          <p:cNvSpPr/>
+          <p:nvPr/>
+        </p:nvSpPr>
+        <p:spPr>
+          <a:xfrm>
+            <a:off x="731520" y="3835908"/>
+            <a:ext cx="457200" cy="237744"/>
+          </a:xfrm>
+          <a:prstGeom prst="rect">
+            <a:avLst/>
+          </a:prstGeom>
+          <a:noFill/>
+          <a:ln/>
+        </p:spPr>
+        <p:txBody>
+          <a:bodyPr wrap="square" lIns="0" tIns="0" rIns="0" bIns="0" rtlCol="0" anchor="ctr"/>
+          <a:lstStyle/>
+          <a:p>
+            <a:pPr algn="r" indent="0" marL="0">
+              <a:buNone/>
+            </a:pPr>
+            <a:r>
+              <a:rPr lang="en-US" sz="900" dirty="0">
+                <a:solidFill>
+                  <a:srgbClr val="5B6480"/>
+                </a:solidFill>
+                <a:latin typeface="Yu Gothic" pitchFamily="34" charset="0"/>
+                <a:ea typeface="Yu Gothic" pitchFamily="34" charset="-122"/>
+                <a:cs typeface="Yu Gothic" pitchFamily="34" charset="-120"/>
+              </a:rPr>
+              <a:t>25</a:t>
+            </a:r>
+            <a:endParaRPr lang="en-US" sz="900" dirty="0"/>
+          </a:p>
+        </p:txBody>
+      </p:sp>
+      <p:sp>
+        <p:nvSpPr>
+          <p:cNvPr id="9" name="Shape 7"/>
+          <p:cNvSpPr/>
+          <p:nvPr/>
+        </p:nvSpPr>
+        <p:spPr>
+          <a:xfrm>
+            <a:off x="1280160" y="3291840"/>
+            <a:ext cx="5897880" cy="0"/>
+          </a:xfrm>
+          <a:prstGeom prst="line">
+            <a:avLst/>
+          </a:prstGeom>
+          <a:noFill/>
+          <a:ln w="9525">
+            <a:solidFill>
+              <a:srgbClr val="2A3752"/>
+            </a:solidFill>
+            <a:prstDash val="solid"/>
+          </a:ln>
+        </p:spPr>
+      </p:sp>
+      <p:sp>
+        <p:nvSpPr>
+          <p:cNvPr id="10" name="Text 8"/>
+          <p:cNvSpPr/>
+          <p:nvPr/>
+        </p:nvSpPr>
+        <p:spPr>
+          <a:xfrm>
+            <a:off x="731520" y="3172968"/>
+            <a:ext cx="457200" cy="237744"/>
+          </a:xfrm>
+          <a:prstGeom prst="rect">
+            <a:avLst/>
+          </a:prstGeom>
+          <a:noFill/>
+          <a:ln/>
+        </p:spPr>
+        <p:txBody>
+          <a:bodyPr wrap="square" lIns="0" tIns="0" rIns="0" bIns="0" rtlCol="0" anchor="ctr"/>
+          <a:lstStyle/>
+          <a:p>
+            <a:pPr algn="r" indent="0" marL="0">
+              <a:buNone/>
+            </a:pPr>
+            <a:r>
+              <a:rPr lang="en-US" sz="900" dirty="0">
+                <a:solidFill>
+                  <a:srgbClr val="5B6480"/>
+                </a:solidFill>
+                <a:latin typeface="Yu Gothic" pitchFamily="34" charset="0"/>
+                <a:ea typeface="Yu Gothic" pitchFamily="34" charset="-122"/>
+                <a:cs typeface="Yu Gothic" pitchFamily="34" charset="-120"/>
+              </a:rPr>
+              <a:t>50</a:t>
+            </a:r>
+            <a:endParaRPr lang="en-US" sz="900" dirty="0"/>
+          </a:p>
+        </p:txBody>
+      </p:sp>
+      <p:sp>
+        <p:nvSpPr>
+          <p:cNvPr id="11" name="Shape 9"/>
+          <p:cNvSpPr/>
+          <p:nvPr/>
+        </p:nvSpPr>
+        <p:spPr>
+          <a:xfrm>
+            <a:off x="1280160" y="2628900"/>
+            <a:ext cx="5897880" cy="0"/>
+          </a:xfrm>
+          <a:prstGeom prst="line">
+            <a:avLst/>
+          </a:prstGeom>
+          <a:noFill/>
+          <a:ln w="9525">
+            <a:solidFill>
+              <a:srgbClr val="2A3752"/>
+            </a:solidFill>
+            <a:prstDash val="solid"/>
+          </a:ln>
+        </p:spPr>
+      </p:sp>
+      <p:sp>
+        <p:nvSpPr>
+          <p:cNvPr id="12" name="Text 10"/>
+          <p:cNvSpPr/>
+          <p:nvPr/>
+        </p:nvSpPr>
+        <p:spPr>
+          <a:xfrm>
+            <a:off x="731520" y="2510028"/>
+            <a:ext cx="457200" cy="237744"/>
+          </a:xfrm>
+          <a:prstGeom prst="rect">
+            <a:avLst/>
+          </a:prstGeom>
+          <a:noFill/>
+          <a:ln/>
+        </p:spPr>
+        <p:txBody>
+          <a:bodyPr wrap="square" lIns="0" tIns="0" rIns="0" bIns="0" rtlCol="0" anchor="ctr"/>
+          <a:lstStyle/>
+          <a:p>
+            <a:pPr algn="r" indent="0" marL="0">
+              <a:buNone/>
+            </a:pPr>
+            <a:r>
+              <a:rPr lang="en-US" sz="900" dirty="0">
+                <a:solidFill>
+                  <a:srgbClr val="5B6480"/>
+                </a:solidFill>
+                <a:latin typeface="Yu Gothic" pitchFamily="34" charset="0"/>
+                <a:ea typeface="Yu Gothic" pitchFamily="34" charset="-122"/>
+                <a:cs typeface="Yu Gothic" pitchFamily="34" charset="-120"/>
+              </a:rPr>
+              <a:t>75</a:t>
+            </a:r>
+            <a:endParaRPr lang="en-US" sz="900" dirty="0"/>
+          </a:p>
+        </p:txBody>
+      </p:sp>
+      <p:sp>
+        <p:nvSpPr>
+          <p:cNvPr id="13" name="Shape 11"/>
+          <p:cNvSpPr/>
+          <p:nvPr/>
+        </p:nvSpPr>
+        <p:spPr>
+          <a:xfrm>
+            <a:off x="1280160" y="1965960"/>
+            <a:ext cx="5897880" cy="0"/>
+          </a:xfrm>
+          <a:prstGeom prst="line">
+            <a:avLst/>
+          </a:prstGeom>
+          <a:noFill/>
+          <a:ln w="9525">
+            <a:solidFill>
+              <a:srgbClr val="2A3752"/>
+            </a:solidFill>
+            <a:prstDash val="solid"/>
+          </a:ln>
+        </p:spPr>
+      </p:sp>
+      <p:sp>
+        <p:nvSpPr>
+          <p:cNvPr id="14" name="Text 12"/>
+          <p:cNvSpPr/>
+          <p:nvPr/>
+        </p:nvSpPr>
+        <p:spPr>
+          <a:xfrm>
+            <a:off x="731520" y="1847088"/>
+            <a:ext cx="457200" cy="237744"/>
+          </a:xfrm>
+          <a:prstGeom prst="rect">
+            <a:avLst/>
+          </a:prstGeom>
+          <a:noFill/>
+          <a:ln/>
+        </p:spPr>
+        <p:txBody>
+          <a:bodyPr wrap="square" lIns="0" tIns="0" rIns="0" bIns="0" rtlCol="0" anchor="ctr"/>
+          <a:lstStyle/>
+          <a:p>
+            <a:pPr algn="r" indent="0" marL="0">
+              <a:buNone/>
+            </a:pPr>
+            <a:r>
+              <a:rPr lang="en-US" sz="900" dirty="0">
+                <a:solidFill>
+                  <a:srgbClr val="5B6480"/>
+                </a:solidFill>
+                <a:latin typeface="Yu Gothic" pitchFamily="34" charset="0"/>
+                <a:ea typeface="Yu Gothic" pitchFamily="34" charset="-122"/>
+                <a:cs typeface="Yu Gothic" pitchFamily="34" charset="-120"/>
+              </a:rPr>
+              <a:t>100</a:t>
+            </a:r>
+            <a:endParaRPr lang="en-US" sz="900" dirty="0"/>
+          </a:p>
+        </p:txBody>
+      </p:sp>
+      <p:sp>
+        <p:nvSpPr>
+          <p:cNvPr id="15" name="Shape 13"/>
+          <p:cNvSpPr/>
+          <p:nvPr/>
+        </p:nvSpPr>
+        <p:spPr>
+          <a:xfrm flipV="1">
+            <a:off x="1371600" y="3212287"/>
+            <a:ext cx="1440180" cy="397764"/>
+          </a:xfrm>
+          <a:prstGeom prst="line">
+            <a:avLst/>
+          </a:prstGeom>
+          <a:noFill/>
+          <a:ln w="31750">
+            <a:solidFill>
+              <a:srgbClr val="1BAF7A"/>
+            </a:solidFill>
+            <a:prstDash val="solid"/>
+          </a:ln>
+        </p:spPr>
+      </p:sp>
+      <p:sp>
+        <p:nvSpPr>
+          <p:cNvPr id="16" name="Shape 14"/>
+          <p:cNvSpPr/>
+          <p:nvPr/>
+        </p:nvSpPr>
+        <p:spPr>
+          <a:xfrm flipV="1">
+            <a:off x="2811780" y="2894076"/>
+            <a:ext cx="1440180" cy="318211"/>
+          </a:xfrm>
+          <a:prstGeom prst="line">
+            <a:avLst/>
+          </a:prstGeom>
+          <a:noFill/>
+          <a:ln w="31750">
+            <a:solidFill>
+              <a:srgbClr val="1BAF7A"/>
+            </a:solidFill>
+            <a:prstDash val="solid"/>
+          </a:ln>
+        </p:spPr>
+      </p:sp>
+      <p:sp>
+        <p:nvSpPr>
+          <p:cNvPr id="17" name="Shape 15"/>
+          <p:cNvSpPr/>
+          <p:nvPr/>
+        </p:nvSpPr>
+        <p:spPr>
+          <a:xfrm flipV="1">
+            <a:off x="4251960" y="2734970"/>
+            <a:ext cx="1440180" cy="159106"/>
+          </a:xfrm>
+          <a:prstGeom prst="line">
+            <a:avLst/>
+          </a:prstGeom>
+          <a:noFill/>
+          <a:ln w="31750">
+            <a:solidFill>
+              <a:srgbClr val="1BAF7A"/>
+            </a:solidFill>
+            <a:prstDash val="solid"/>
+          </a:ln>
+        </p:spPr>
+      </p:sp>
+      <p:sp>
+        <p:nvSpPr>
+          <p:cNvPr id="18" name="Shape 16"/>
+          <p:cNvSpPr/>
+          <p:nvPr/>
+        </p:nvSpPr>
+        <p:spPr>
+          <a:xfrm>
+            <a:off x="5692140" y="2734970"/>
+            <a:ext cx="1440180" cy="424282"/>
+          </a:xfrm>
+          <a:prstGeom prst="line">
+            <a:avLst/>
+          </a:prstGeom>
+          <a:noFill/>
+          <a:ln w="31750">
+            <a:solidFill>
+              <a:srgbClr val="E2665A"/>
+            </a:solidFill>
+            <a:prstDash val="solid"/>
+          </a:ln>
+        </p:spPr>
+      </p:sp>
+      <p:sp>
+        <p:nvSpPr>
+          <p:cNvPr id="19" name="Shape 17"/>
+          <p:cNvSpPr/>
+          <p:nvPr/>
+        </p:nvSpPr>
+        <p:spPr>
+          <a:xfrm>
+            <a:off x="1271016" y="3509467"/>
+            <a:ext cx="201168" cy="201168"/>
           </a:xfrm>
           <a:prstGeom prst="ellipse">
             <a:avLst/>
           </a:prstGeom>
           <a:solidFill>
-            <a:srgbClr val="2A78D6"/>
-          </a:solidFill>
-          <a:ln/>
-        </p:spPr>
-      </p:sp>
-      <p:sp>
-        <p:nvSpPr>
-          <p:cNvPr id="5" name="Text 3"/>
-          <p:cNvSpPr/>
-          <p:nvPr/>
-        </p:nvSpPr>
-        <p:spPr>
-          <a:xfrm>
-            <a:off x="868680" y="2080260"/>
-            <a:ext cx="640080" cy="640080"/>
+            <a:srgbClr val="E2665A"/>
+          </a:solidFill>
+          <a:ln/>
+        </p:spPr>
+      </p:sp>
+      <p:sp>
+        <p:nvSpPr>
+          <p:cNvPr id="20" name="Text 18"/>
+          <p:cNvSpPr/>
+          <p:nvPr/>
+        </p:nvSpPr>
+        <p:spPr>
+          <a:xfrm>
+            <a:off x="1005840" y="3079699"/>
+            <a:ext cx="731520" cy="274320"/>
           </a:xfrm>
           <a:prstGeom prst="rect">
             <a:avLst/>
@@ -7390,30 +7920,661 @@
               <a:buNone/>
             </a:pPr>
             <a:r>
-              <a:rPr lang="en-US" sz="2200" b="1" dirty="0">
-                <a:solidFill>
-                  <a:srgbClr val="0B1220"/>
-                </a:solidFill>
-                <a:latin typeface="Yu Gothic" pitchFamily="34" charset="0"/>
-                <a:ea typeface="Yu Gothic" pitchFamily="34" charset="-122"/>
-                <a:cs typeface="Yu Gothic" pitchFamily="34" charset="-120"/>
-              </a:rPr>
-              <a:t>A</a:t>
-            </a:r>
-            <a:endParaRPr lang="en-US" sz="2200" dirty="0"/>
-          </a:p>
-        </p:txBody>
-      </p:sp>
-      <p:sp>
-        <p:nvSpPr>
-          <p:cNvPr id="6" name="Text 4"/>
-          <p:cNvSpPr/>
-          <p:nvPr/>
-        </p:nvSpPr>
-        <p:spPr>
-          <a:xfrm>
-            <a:off x="1737360" y="1856232"/>
-            <a:ext cx="2926080" cy="365760"/>
+              <a:rPr lang="en-US" sz="1100" dirty="0">
+                <a:solidFill>
+                  <a:srgbClr val="9AA4C0"/>
+                </a:solidFill>
+                <a:latin typeface="Yu Gothic" pitchFamily="34" charset="0"/>
+                <a:ea typeface="Yu Gothic" pitchFamily="34" charset="-122"/>
+                <a:cs typeface="Yu Gothic" pitchFamily="34" charset="-120"/>
+              </a:rPr>
+              <a:t>38</a:t>
+            </a:r>
+            <a:endParaRPr lang="en-US" sz="1100" dirty="0"/>
+          </a:p>
+        </p:txBody>
+      </p:sp>
+      <p:sp>
+        <p:nvSpPr>
+          <p:cNvPr id="21" name="Text 19"/>
+          <p:cNvSpPr/>
+          <p:nvPr/>
+        </p:nvSpPr>
+        <p:spPr>
+          <a:xfrm>
+            <a:off x="1005840" y="4745736"/>
+            <a:ext cx="731520" cy="237744"/>
+          </a:xfrm>
+          <a:prstGeom prst="rect">
+            <a:avLst/>
+          </a:prstGeom>
+          <a:noFill/>
+          <a:ln/>
+        </p:spPr>
+        <p:txBody>
+          <a:bodyPr wrap="square" lIns="0" tIns="0" rIns="0" bIns="0" rtlCol="0" anchor="ctr"/>
+          <a:lstStyle/>
+          <a:p>
+            <a:pPr algn="ctr" indent="0" marL="0">
+              <a:buNone/>
+            </a:pPr>
+            <a:r>
+              <a:rPr lang="en-US" sz="1100" dirty="0">
+                <a:solidFill>
+                  <a:srgbClr val="E2665A"/>
+                </a:solidFill>
+                <a:latin typeface="Yu Gothic" pitchFamily="34" charset="0"/>
+                <a:ea typeface="Yu Gothic" pitchFamily="34" charset="-122"/>
+                <a:cs typeface="Yu Gothic" pitchFamily="34" charset="-120"/>
+              </a:rPr>
+              <a:t>L0</a:t>
+            </a:r>
+            <a:endParaRPr lang="en-US" sz="1100" dirty="0"/>
+          </a:p>
+        </p:txBody>
+      </p:sp>
+      <p:sp>
+        <p:nvSpPr>
+          <p:cNvPr id="22" name="Text 20"/>
+          <p:cNvSpPr/>
+          <p:nvPr/>
+        </p:nvSpPr>
+        <p:spPr>
+          <a:xfrm>
+            <a:off x="1005840" y="5001768"/>
+            <a:ext cx="731520" cy="237744"/>
+          </a:xfrm>
+          <a:prstGeom prst="rect">
+            <a:avLst/>
+          </a:prstGeom>
+          <a:noFill/>
+          <a:ln/>
+        </p:spPr>
+        <p:txBody>
+          <a:bodyPr wrap="square" lIns="0" tIns="0" rIns="0" bIns="0" rtlCol="0" anchor="ctr"/>
+          <a:lstStyle/>
+          <a:p>
+            <a:pPr algn="ctr" indent="0" marL="0">
+              <a:buNone/>
+            </a:pPr>
+            <a:r>
+              <a:rPr lang="en-US" sz="900" dirty="0">
+                <a:solidFill>
+                  <a:srgbClr val="9AA4C0"/>
+                </a:solidFill>
+                <a:latin typeface="Yu Gothic" pitchFamily="34" charset="0"/>
+                <a:ea typeface="Yu Gothic" pitchFamily="34" charset="-122"/>
+                <a:cs typeface="Yu Gothic" pitchFamily="34" charset="-120"/>
+              </a:rPr>
+              <a:t>0/5</a:t>
+            </a:r>
+            <a:endParaRPr lang="en-US" sz="900" dirty="0"/>
+          </a:p>
+        </p:txBody>
+      </p:sp>
+      <p:sp>
+        <p:nvSpPr>
+          <p:cNvPr id="23" name="Shape 21"/>
+          <p:cNvSpPr/>
+          <p:nvPr/>
+        </p:nvSpPr>
+        <p:spPr>
+          <a:xfrm>
+            <a:off x="2711196" y="3111703"/>
+            <a:ext cx="201168" cy="201168"/>
+          </a:xfrm>
+          <a:prstGeom prst="ellipse">
+            <a:avLst/>
+          </a:prstGeom>
+          <a:solidFill>
+            <a:srgbClr val="E2665A"/>
+          </a:solidFill>
+          <a:ln/>
+        </p:spPr>
+      </p:sp>
+      <p:sp>
+        <p:nvSpPr>
+          <p:cNvPr id="24" name="Text 22"/>
+          <p:cNvSpPr/>
+          <p:nvPr/>
+        </p:nvSpPr>
+        <p:spPr>
+          <a:xfrm>
+            <a:off x="2446020" y="2681935"/>
+            <a:ext cx="731520" cy="274320"/>
+          </a:xfrm>
+          <a:prstGeom prst="rect">
+            <a:avLst/>
+          </a:prstGeom>
+          <a:noFill/>
+          <a:ln/>
+        </p:spPr>
+        <p:txBody>
+          <a:bodyPr wrap="square" lIns="0" tIns="0" rIns="0" bIns="0" rtlCol="0" anchor="ctr"/>
+          <a:lstStyle/>
+          <a:p>
+            <a:pPr algn="ctr" indent="0" marL="0">
+              <a:buNone/>
+            </a:pPr>
+            <a:r>
+              <a:rPr lang="en-US" sz="1100" dirty="0">
+                <a:solidFill>
+                  <a:srgbClr val="9AA4C0"/>
+                </a:solidFill>
+                <a:latin typeface="Yu Gothic" pitchFamily="34" charset="0"/>
+                <a:ea typeface="Yu Gothic" pitchFamily="34" charset="-122"/>
+                <a:cs typeface="Yu Gothic" pitchFamily="34" charset="-120"/>
+              </a:rPr>
+              <a:t>53</a:t>
+            </a:r>
+            <a:endParaRPr lang="en-US" sz="1100" dirty="0"/>
+          </a:p>
+        </p:txBody>
+      </p:sp>
+      <p:sp>
+        <p:nvSpPr>
+          <p:cNvPr id="25" name="Text 23"/>
+          <p:cNvSpPr/>
+          <p:nvPr/>
+        </p:nvSpPr>
+        <p:spPr>
+          <a:xfrm>
+            <a:off x="2446020" y="4745736"/>
+            <a:ext cx="731520" cy="237744"/>
+          </a:xfrm>
+          <a:prstGeom prst="rect">
+            <a:avLst/>
+          </a:prstGeom>
+          <a:noFill/>
+          <a:ln/>
+        </p:spPr>
+        <p:txBody>
+          <a:bodyPr wrap="square" lIns="0" tIns="0" rIns="0" bIns="0" rtlCol="0" anchor="ctr"/>
+          <a:lstStyle/>
+          <a:p>
+            <a:pPr algn="ctr" indent="0" marL="0">
+              <a:buNone/>
+            </a:pPr>
+            <a:r>
+              <a:rPr lang="en-US" sz="1100" dirty="0">
+                <a:solidFill>
+                  <a:srgbClr val="E2665A"/>
+                </a:solidFill>
+                <a:latin typeface="Yu Gothic" pitchFamily="34" charset="0"/>
+                <a:ea typeface="Yu Gothic" pitchFamily="34" charset="-122"/>
+                <a:cs typeface="Yu Gothic" pitchFamily="34" charset="-120"/>
+              </a:rPr>
+              <a:t>L1</a:t>
+            </a:r>
+            <a:endParaRPr lang="en-US" sz="1100" dirty="0"/>
+          </a:p>
+        </p:txBody>
+      </p:sp>
+      <p:sp>
+        <p:nvSpPr>
+          <p:cNvPr id="26" name="Text 24"/>
+          <p:cNvSpPr/>
+          <p:nvPr/>
+        </p:nvSpPr>
+        <p:spPr>
+          <a:xfrm>
+            <a:off x="2446020" y="5001768"/>
+            <a:ext cx="731520" cy="237744"/>
+          </a:xfrm>
+          <a:prstGeom prst="rect">
+            <a:avLst/>
+          </a:prstGeom>
+          <a:noFill/>
+          <a:ln/>
+        </p:spPr>
+        <p:txBody>
+          <a:bodyPr wrap="square" lIns="0" tIns="0" rIns="0" bIns="0" rtlCol="0" anchor="ctr"/>
+          <a:lstStyle/>
+          <a:p>
+            <a:pPr algn="ctr" indent="0" marL="0">
+              <a:buNone/>
+            </a:pPr>
+            <a:r>
+              <a:rPr lang="en-US" sz="900" dirty="0">
+                <a:solidFill>
+                  <a:srgbClr val="9AA4C0"/>
+                </a:solidFill>
+                <a:latin typeface="Yu Gothic" pitchFamily="34" charset="0"/>
+                <a:ea typeface="Yu Gothic" pitchFamily="34" charset="-122"/>
+                <a:cs typeface="Yu Gothic" pitchFamily="34" charset="-120"/>
+              </a:rPr>
+              <a:t>2/5</a:t>
+            </a:r>
+            <a:endParaRPr lang="en-US" sz="900" dirty="0"/>
+          </a:p>
+        </p:txBody>
+      </p:sp>
+      <p:sp>
+        <p:nvSpPr>
+          <p:cNvPr id="27" name="Shape 25"/>
+          <p:cNvSpPr/>
+          <p:nvPr/>
+        </p:nvSpPr>
+        <p:spPr>
+          <a:xfrm>
+            <a:off x="4151376" y="2793492"/>
+            <a:ext cx="201168" cy="201168"/>
+          </a:xfrm>
+          <a:prstGeom prst="ellipse">
+            <a:avLst/>
+          </a:prstGeom>
+          <a:solidFill>
+            <a:srgbClr val="E8A33D"/>
+          </a:solidFill>
+          <a:ln/>
+        </p:spPr>
+      </p:sp>
+      <p:sp>
+        <p:nvSpPr>
+          <p:cNvPr id="28" name="Text 26"/>
+          <p:cNvSpPr/>
+          <p:nvPr/>
+        </p:nvSpPr>
+        <p:spPr>
+          <a:xfrm>
+            <a:off x="3886200" y="2363724"/>
+            <a:ext cx="731520" cy="274320"/>
+          </a:xfrm>
+          <a:prstGeom prst="rect">
+            <a:avLst/>
+          </a:prstGeom>
+          <a:noFill/>
+          <a:ln/>
+        </p:spPr>
+        <p:txBody>
+          <a:bodyPr wrap="square" lIns="0" tIns="0" rIns="0" bIns="0" rtlCol="0" anchor="ctr"/>
+          <a:lstStyle/>
+          <a:p>
+            <a:pPr algn="ctr" indent="0" marL="0">
+              <a:buNone/>
+            </a:pPr>
+            <a:r>
+              <a:rPr lang="en-US" sz="1100" dirty="0">
+                <a:solidFill>
+                  <a:srgbClr val="9AA4C0"/>
+                </a:solidFill>
+                <a:latin typeface="Yu Gothic" pitchFamily="34" charset="0"/>
+                <a:ea typeface="Yu Gothic" pitchFamily="34" charset="-122"/>
+                <a:cs typeface="Yu Gothic" pitchFamily="34" charset="-120"/>
+              </a:rPr>
+              <a:t>65</a:t>
+            </a:r>
+            <a:endParaRPr lang="en-US" sz="1100" dirty="0"/>
+          </a:p>
+        </p:txBody>
+      </p:sp>
+      <p:sp>
+        <p:nvSpPr>
+          <p:cNvPr id="29" name="Text 27"/>
+          <p:cNvSpPr/>
+          <p:nvPr/>
+        </p:nvSpPr>
+        <p:spPr>
+          <a:xfrm>
+            <a:off x="3886200" y="4745736"/>
+            <a:ext cx="731520" cy="237744"/>
+          </a:xfrm>
+          <a:prstGeom prst="rect">
+            <a:avLst/>
+          </a:prstGeom>
+          <a:noFill/>
+          <a:ln/>
+        </p:spPr>
+        <p:txBody>
+          <a:bodyPr wrap="square" lIns="0" tIns="0" rIns="0" bIns="0" rtlCol="0" anchor="ctr"/>
+          <a:lstStyle/>
+          <a:p>
+            <a:pPr algn="ctr" indent="0" marL="0">
+              <a:buNone/>
+            </a:pPr>
+            <a:r>
+              <a:rPr lang="en-US" sz="1100" dirty="0">
+                <a:solidFill>
+                  <a:srgbClr val="E8A33D"/>
+                </a:solidFill>
+                <a:latin typeface="Yu Gothic" pitchFamily="34" charset="0"/>
+                <a:ea typeface="Yu Gothic" pitchFamily="34" charset="-122"/>
+                <a:cs typeface="Yu Gothic" pitchFamily="34" charset="-120"/>
+              </a:rPr>
+              <a:t>L2</a:t>
+            </a:r>
+            <a:endParaRPr lang="en-US" sz="1100" dirty="0"/>
+          </a:p>
+        </p:txBody>
+      </p:sp>
+      <p:sp>
+        <p:nvSpPr>
+          <p:cNvPr id="30" name="Text 28"/>
+          <p:cNvSpPr/>
+          <p:nvPr/>
+        </p:nvSpPr>
+        <p:spPr>
+          <a:xfrm>
+            <a:off x="3886200" y="5001768"/>
+            <a:ext cx="731520" cy="237744"/>
+          </a:xfrm>
+          <a:prstGeom prst="rect">
+            <a:avLst/>
+          </a:prstGeom>
+          <a:noFill/>
+          <a:ln/>
+        </p:spPr>
+        <p:txBody>
+          <a:bodyPr wrap="square" lIns="0" tIns="0" rIns="0" bIns="0" rtlCol="0" anchor="ctr"/>
+          <a:lstStyle/>
+          <a:p>
+            <a:pPr algn="ctr" indent="0" marL="0">
+              <a:buNone/>
+            </a:pPr>
+            <a:r>
+              <a:rPr lang="en-US" sz="900" dirty="0">
+                <a:solidFill>
+                  <a:srgbClr val="9AA4C0"/>
+                </a:solidFill>
+                <a:latin typeface="Yu Gothic" pitchFamily="34" charset="0"/>
+                <a:ea typeface="Yu Gothic" pitchFamily="34" charset="-122"/>
+                <a:cs typeface="Yu Gothic" pitchFamily="34" charset="-120"/>
+              </a:rPr>
+              <a:t>3/5</a:t>
+            </a:r>
+            <a:endParaRPr lang="en-US" sz="900" dirty="0"/>
+          </a:p>
+        </p:txBody>
+      </p:sp>
+      <p:sp>
+        <p:nvSpPr>
+          <p:cNvPr id="31" name="Shape 29"/>
+          <p:cNvSpPr/>
+          <p:nvPr/>
+        </p:nvSpPr>
+        <p:spPr>
+          <a:xfrm>
+            <a:off x="5545836" y="2588666"/>
+            <a:ext cx="292608" cy="292608"/>
+          </a:xfrm>
+          <a:prstGeom prst="ellipse">
+            <a:avLst/>
+          </a:prstGeom>
+          <a:solidFill>
+            <a:srgbClr val="1BAF7A"/>
+          </a:solidFill>
+          <a:ln w="19050">
+            <a:solidFill>
+              <a:srgbClr val="FFFFFF"/>
+            </a:solidFill>
+            <a:prstDash val="solid"/>
+          </a:ln>
+        </p:spPr>
+      </p:sp>
+      <p:sp>
+        <p:nvSpPr>
+          <p:cNvPr id="32" name="Text 30"/>
+          <p:cNvSpPr/>
+          <p:nvPr/>
+        </p:nvSpPr>
+        <p:spPr>
+          <a:xfrm>
+            <a:off x="5326380" y="2204618"/>
+            <a:ext cx="731520" cy="274320"/>
+          </a:xfrm>
+          <a:prstGeom prst="rect">
+            <a:avLst/>
+          </a:prstGeom>
+          <a:noFill/>
+          <a:ln/>
+        </p:spPr>
+        <p:txBody>
+          <a:bodyPr wrap="square" lIns="0" tIns="0" rIns="0" bIns="0" rtlCol="0" anchor="ctr"/>
+          <a:lstStyle/>
+          <a:p>
+            <a:pPr algn="ctr" indent="0" marL="0">
+              <a:buNone/>
+            </a:pPr>
+            <a:r>
+              <a:rPr lang="en-US" sz="1100" b="1" dirty="0">
+                <a:solidFill>
+                  <a:srgbClr val="FFFFFF"/>
+                </a:solidFill>
+                <a:latin typeface="Yu Gothic" pitchFamily="34" charset="0"/>
+                <a:ea typeface="Yu Gothic" pitchFamily="34" charset="-122"/>
+                <a:cs typeface="Yu Gothic" pitchFamily="34" charset="-120"/>
+              </a:rPr>
+              <a:t>71</a:t>
+            </a:r>
+            <a:endParaRPr lang="en-US" sz="1100" dirty="0"/>
+          </a:p>
+        </p:txBody>
+      </p:sp>
+      <p:sp>
+        <p:nvSpPr>
+          <p:cNvPr id="33" name="Text 31"/>
+          <p:cNvSpPr/>
+          <p:nvPr/>
+        </p:nvSpPr>
+        <p:spPr>
+          <a:xfrm>
+            <a:off x="5326380" y="4745736"/>
+            <a:ext cx="731520" cy="237744"/>
+          </a:xfrm>
+          <a:prstGeom prst="rect">
+            <a:avLst/>
+          </a:prstGeom>
+          <a:noFill/>
+          <a:ln/>
+        </p:spPr>
+        <p:txBody>
+          <a:bodyPr wrap="square" lIns="0" tIns="0" rIns="0" bIns="0" rtlCol="0" anchor="ctr"/>
+          <a:lstStyle/>
+          <a:p>
+            <a:pPr algn="ctr" indent="0" marL="0">
+              <a:buNone/>
+            </a:pPr>
+            <a:r>
+              <a:rPr lang="en-US" sz="1100" b="1" dirty="0">
+                <a:solidFill>
+                  <a:srgbClr val="1BAF7A"/>
+                </a:solidFill>
+                <a:latin typeface="Yu Gothic" pitchFamily="34" charset="0"/>
+                <a:ea typeface="Yu Gothic" pitchFamily="34" charset="-122"/>
+                <a:cs typeface="Yu Gothic" pitchFamily="34" charset="-120"/>
+              </a:rPr>
+              <a:t>L3</a:t>
+            </a:r>
+            <a:endParaRPr lang="en-US" sz="1100" dirty="0"/>
+          </a:p>
+        </p:txBody>
+      </p:sp>
+      <p:sp>
+        <p:nvSpPr>
+          <p:cNvPr id="34" name="Text 32"/>
+          <p:cNvSpPr/>
+          <p:nvPr/>
+        </p:nvSpPr>
+        <p:spPr>
+          <a:xfrm>
+            <a:off x="5326380" y="5001768"/>
+            <a:ext cx="731520" cy="237744"/>
+          </a:xfrm>
+          <a:prstGeom prst="rect">
+            <a:avLst/>
+          </a:prstGeom>
+          <a:noFill/>
+          <a:ln/>
+        </p:spPr>
+        <p:txBody>
+          <a:bodyPr wrap="square" lIns="0" tIns="0" rIns="0" bIns="0" rtlCol="0" anchor="ctr"/>
+          <a:lstStyle/>
+          <a:p>
+            <a:pPr algn="ctr" indent="0" marL="0">
+              <a:buNone/>
+            </a:pPr>
+            <a:r>
+              <a:rPr lang="en-US" sz="900" dirty="0">
+                <a:solidFill>
+                  <a:srgbClr val="9AA4C0"/>
+                </a:solidFill>
+                <a:latin typeface="Yu Gothic" pitchFamily="34" charset="0"/>
+                <a:ea typeface="Yu Gothic" pitchFamily="34" charset="-122"/>
+                <a:cs typeface="Yu Gothic" pitchFamily="34" charset="-120"/>
+              </a:rPr>
+              <a:t>5/5</a:t>
+            </a:r>
+            <a:endParaRPr lang="en-US" sz="900" dirty="0"/>
+          </a:p>
+        </p:txBody>
+      </p:sp>
+      <p:sp>
+        <p:nvSpPr>
+          <p:cNvPr id="35" name="Shape 33"/>
+          <p:cNvSpPr/>
+          <p:nvPr/>
+        </p:nvSpPr>
+        <p:spPr>
+          <a:xfrm>
+            <a:off x="7031736" y="3058668"/>
+            <a:ext cx="201168" cy="201168"/>
+          </a:xfrm>
+          <a:prstGeom prst="ellipse">
+            <a:avLst/>
+          </a:prstGeom>
+          <a:solidFill>
+            <a:srgbClr val="E2665A"/>
+          </a:solidFill>
+          <a:ln/>
+        </p:spPr>
+      </p:sp>
+      <p:sp>
+        <p:nvSpPr>
+          <p:cNvPr id="36" name="Text 34"/>
+          <p:cNvSpPr/>
+          <p:nvPr/>
+        </p:nvSpPr>
+        <p:spPr>
+          <a:xfrm>
+            <a:off x="6766560" y="2628900"/>
+            <a:ext cx="731520" cy="274320"/>
+          </a:xfrm>
+          <a:prstGeom prst="rect">
+            <a:avLst/>
+          </a:prstGeom>
+          <a:noFill/>
+          <a:ln/>
+        </p:spPr>
+        <p:txBody>
+          <a:bodyPr wrap="square" lIns="0" tIns="0" rIns="0" bIns="0" rtlCol="0" anchor="ctr"/>
+          <a:lstStyle/>
+          <a:p>
+            <a:pPr algn="ctr" indent="0" marL="0">
+              <a:buNone/>
+            </a:pPr>
+            <a:r>
+              <a:rPr lang="en-US" sz="1100" dirty="0">
+                <a:solidFill>
+                  <a:srgbClr val="9AA4C0"/>
+                </a:solidFill>
+                <a:latin typeface="Yu Gothic" pitchFamily="34" charset="0"/>
+                <a:ea typeface="Yu Gothic" pitchFamily="34" charset="-122"/>
+                <a:cs typeface="Yu Gothic" pitchFamily="34" charset="-120"/>
+              </a:rPr>
+              <a:t>55</a:t>
+            </a:r>
+            <a:endParaRPr lang="en-US" sz="1100" dirty="0"/>
+          </a:p>
+        </p:txBody>
+      </p:sp>
+      <p:sp>
+        <p:nvSpPr>
+          <p:cNvPr id="37" name="Text 35"/>
+          <p:cNvSpPr/>
+          <p:nvPr/>
+        </p:nvSpPr>
+        <p:spPr>
+          <a:xfrm>
+            <a:off x="6766560" y="4745736"/>
+            <a:ext cx="731520" cy="237744"/>
+          </a:xfrm>
+          <a:prstGeom prst="rect">
+            <a:avLst/>
+          </a:prstGeom>
+          <a:noFill/>
+          <a:ln/>
+        </p:spPr>
+        <p:txBody>
+          <a:bodyPr wrap="square" lIns="0" tIns="0" rIns="0" bIns="0" rtlCol="0" anchor="ctr"/>
+          <a:lstStyle/>
+          <a:p>
+            <a:pPr algn="ctr" indent="0" marL="0">
+              <a:buNone/>
+            </a:pPr>
+            <a:r>
+              <a:rPr lang="en-US" sz="1100" dirty="0">
+                <a:solidFill>
+                  <a:srgbClr val="E2665A"/>
+                </a:solidFill>
+                <a:latin typeface="Yu Gothic" pitchFamily="34" charset="0"/>
+                <a:ea typeface="Yu Gothic" pitchFamily="34" charset="-122"/>
+                <a:cs typeface="Yu Gothic" pitchFamily="34" charset="-120"/>
+              </a:rPr>
+              <a:t>L4</a:t>
+            </a:r>
+            <a:endParaRPr lang="en-US" sz="1100" dirty="0"/>
+          </a:p>
+        </p:txBody>
+      </p:sp>
+      <p:sp>
+        <p:nvSpPr>
+          <p:cNvPr id="38" name="Text 36"/>
+          <p:cNvSpPr/>
+          <p:nvPr/>
+        </p:nvSpPr>
+        <p:spPr>
+          <a:xfrm>
+            <a:off x="6766560" y="5001768"/>
+            <a:ext cx="731520" cy="237744"/>
+          </a:xfrm>
+          <a:prstGeom prst="rect">
+            <a:avLst/>
+          </a:prstGeom>
+          <a:noFill/>
+          <a:ln/>
+        </p:spPr>
+        <p:txBody>
+          <a:bodyPr wrap="square" lIns="0" tIns="0" rIns="0" bIns="0" rtlCol="0" anchor="ctr"/>
+          <a:lstStyle/>
+          <a:p>
+            <a:pPr algn="ctr" indent="0" marL="0">
+              <a:buNone/>
+            </a:pPr>
+            <a:r>
+              <a:rPr lang="en-US" sz="900" dirty="0">
+                <a:solidFill>
+                  <a:srgbClr val="9AA4C0"/>
+                </a:solidFill>
+                <a:latin typeface="Yu Gothic" pitchFamily="34" charset="0"/>
+                <a:ea typeface="Yu Gothic" pitchFamily="34" charset="-122"/>
+                <a:cs typeface="Yu Gothic" pitchFamily="34" charset="-120"/>
+              </a:rPr>
+              <a:t>2/5</a:t>
+            </a:r>
+            <a:endParaRPr lang="en-US" sz="900" dirty="0"/>
+          </a:p>
+        </p:txBody>
+      </p:sp>
+      <p:sp>
+        <p:nvSpPr>
+          <p:cNvPr id="39" name="Text 37"/>
+          <p:cNvSpPr/>
+          <p:nvPr/>
+        </p:nvSpPr>
+        <p:spPr>
+          <a:xfrm>
+            <a:off x="1280160" y="1801368"/>
+            <a:ext cx="4572000" cy="237744"/>
           </a:xfrm>
           <a:prstGeom prst="rect">
             <a:avLst/>
@@ -7429,49 +8590,46 @@
               <a:buNone/>
             </a:pPr>
             <a:r>
-              <a:rPr lang="en-US" sz="1200" b="1" dirty="0">
-                <a:solidFill>
-                  <a:srgbClr val="2A78D6"/>
-                </a:solidFill>
-                <a:latin typeface="Yu Gothic" pitchFamily="34" charset="0"/>
-                <a:ea typeface="Yu Gothic" pitchFamily="34" charset="-122"/>
-                <a:cs typeface="Yu Gothic" pitchFamily="34" charset="-120"/>
-              </a:rPr>
-              <a:t>救済者</a:t>
-            </a:r>
-            <a:endParaRPr lang="en-US" sz="1200" dirty="0"/>
-          </a:p>
-        </p:txBody>
-      </p:sp>
-      <p:sp>
-        <p:nvSpPr>
-          <p:cNvPr id="7" name="Text 5"/>
-          <p:cNvSpPr/>
-          <p:nvPr/>
-        </p:nvSpPr>
-        <p:spPr>
-          <a:xfrm>
-            <a:off x="1737360" y="2194560"/>
-            <a:ext cx="9144000" cy="777240"/>
-          </a:xfrm>
-          <a:prstGeom prst="rect">
-            <a:avLst/>
-          </a:prstGeom>
-          <a:noFill/>
-          <a:ln/>
-        </p:spPr>
-        <p:txBody>
-          <a:bodyPr wrap="square" lIns="0" tIns="0" rIns="0" bIns="0" rtlCol="0" anchor="t"/>
-          <a:lstStyle/>
-          <a:p>
-            <a:pPr indent="0" marL="0">
-              <a:lnSpc>
-                <a:spcPct val="125000"/>
-              </a:lnSpc>
-              <a:buNone/>
-            </a:pPr>
-            <a:r>
-              <a:rPr lang="en-US" sz="1300" i="1" dirty="0">
+              <a:rPr lang="en-US" sz="1000" dirty="0">
+                <a:solidFill>
+                  <a:srgbClr val="9AA4C0"/>
+                </a:solidFill>
+                <a:latin typeface="Yu Gothic" pitchFamily="34" charset="0"/>
+                <a:ea typeface="Yu Gothic" pitchFamily="34" charset="-122"/>
+                <a:cs typeface="Yu Gothic" pitchFamily="34" charset="-120"/>
+              </a:rPr>
+              <a:t>村の自律度（5回平均）と、自律できた回数</a:t>
+            </a:r>
+            <a:endParaRPr lang="en-US" sz="1000" dirty="0"/>
+          </a:p>
+        </p:txBody>
+      </p:sp>
+      <p:sp>
+        <p:nvSpPr>
+          <p:cNvPr id="40" name="Text 38"/>
+          <p:cNvSpPr/>
+          <p:nvPr/>
+        </p:nvSpPr>
+        <p:spPr>
+          <a:xfrm>
+            <a:off x="1280160" y="5276088"/>
+            <a:ext cx="5486400" cy="274320"/>
+          </a:xfrm>
+          <a:prstGeom prst="rect">
+            <a:avLst/>
+          </a:prstGeom>
+          <a:noFill/>
+          <a:ln/>
+        </p:spPr>
+        <p:txBody>
+          <a:bodyPr wrap="square" lIns="0" tIns="0" rIns="0" bIns="0" rtlCol="0" anchor="ctr"/>
+          <a:lstStyle/>
+          <a:p>
+            <a:pPr algn="ctr" indent="0" marL="0">
+              <a:buNone/>
+            </a:pPr>
+            <a:r>
+              <a:rPr lang="en-US" sz="1100" i="1" dirty="0">
                 <a:solidFill>
                   <a:srgbClr val="AFC9EE"/>
                 </a:solidFill>
@@ -7479,30 +8637,30 @@
                 <a:ea typeface="Yu Gothic" pitchFamily="34" charset="-122"/>
                 <a:cs typeface="Yu Gothic" pitchFamily="34" charset="-120"/>
               </a:rPr>
-              <a:t>「ただ、ちょっと最近、どこまでが『いつも通り』なのか、自分でもよく分からなくなってきちゃって…大丈夫、愚痴みたいになってすみません。」</a:t>
-            </a:r>
-            <a:endParaRPr lang="en-US" sz="1300" dirty="0"/>
-          </a:p>
-        </p:txBody>
-      </p:sp>
-      <p:sp>
-        <p:nvSpPr>
-          <p:cNvPr id="8" name="Shape 6"/>
-          <p:cNvSpPr/>
-          <p:nvPr/>
-        </p:nvSpPr>
-        <p:spPr>
-          <a:xfrm>
-            <a:off x="548640" y="3310128"/>
-            <a:ext cx="11091672" cy="1417320"/>
+              <a:t>↑ 押すほど良くなるが、L4で反転</a:t>
+            </a:r>
+            <a:endParaRPr lang="en-US" sz="1100" dirty="0"/>
+          </a:p>
+        </p:txBody>
+      </p:sp>
+      <p:sp>
+        <p:nvSpPr>
+          <p:cNvPr id="41" name="Shape 39"/>
+          <p:cNvSpPr/>
+          <p:nvPr/>
+        </p:nvSpPr>
+        <p:spPr>
+          <a:xfrm>
+            <a:off x="7680960" y="1783080"/>
+            <a:ext cx="3959352" cy="1691640"/>
           </a:xfrm>
           <a:prstGeom prst="roundRect">
             <a:avLst>
-              <a:gd name="adj" fmla="val 7742"/>
+              <a:gd name="adj" fmla="val 6486"/>
             </a:avLst>
           </a:prstGeom>
           <a:solidFill>
-            <a:srgbClr val="16213A"/>
+            <a:srgbClr val="1C2C4A"/>
           </a:solidFill>
           <a:ln/>
           <a:effectLst>
@@ -7516,73 +8674,34 @@
       </p:sp>
       <p:sp>
         <p:nvSpPr>
-          <p:cNvPr id="9" name="Shape 7"/>
-          <p:cNvSpPr/>
-          <p:nvPr/>
-        </p:nvSpPr>
-        <p:spPr>
-          <a:xfrm>
-            <a:off x="868680" y="3698748"/>
-            <a:ext cx="640080" cy="640080"/>
+          <p:cNvPr id="42" name="Shape 40"/>
+          <p:cNvSpPr/>
+          <p:nvPr/>
+        </p:nvSpPr>
+        <p:spPr>
+          <a:xfrm>
+            <a:off x="7909560" y="2020824"/>
+            <a:ext cx="182880" cy="182880"/>
           </a:xfrm>
           <a:prstGeom prst="ellipse">
             <a:avLst/>
           </a:prstGeom>
           <a:solidFill>
-            <a:srgbClr val="EB6834"/>
-          </a:solidFill>
-          <a:ln/>
-        </p:spPr>
-      </p:sp>
-      <p:sp>
-        <p:nvSpPr>
-          <p:cNvPr id="10" name="Text 8"/>
-          <p:cNvSpPr/>
-          <p:nvPr/>
-        </p:nvSpPr>
-        <p:spPr>
-          <a:xfrm>
-            <a:off x="868680" y="3698748"/>
-            <a:ext cx="640080" cy="640080"/>
-          </a:xfrm>
-          <a:prstGeom prst="rect">
-            <a:avLst/>
-          </a:prstGeom>
-          <a:noFill/>
-          <a:ln/>
-        </p:spPr>
-        <p:txBody>
-          <a:bodyPr wrap="square" lIns="0" tIns="0" rIns="0" bIns="0" rtlCol="0" anchor="ctr"/>
-          <a:lstStyle/>
-          <a:p>
-            <a:pPr algn="ctr" indent="0" marL="0">
-              <a:buNone/>
-            </a:pPr>
-            <a:r>
-              <a:rPr lang="en-US" sz="2200" b="1" dirty="0">
-                <a:solidFill>
-                  <a:srgbClr val="0B1220"/>
-                </a:solidFill>
-                <a:latin typeface="Yu Gothic" pitchFamily="34" charset="0"/>
-                <a:ea typeface="Yu Gothic" pitchFamily="34" charset="-122"/>
-                <a:cs typeface="Yu Gothic" pitchFamily="34" charset="-120"/>
-              </a:rPr>
-              <a:t>B</a:t>
-            </a:r>
-            <a:endParaRPr lang="en-US" sz="2200" dirty="0"/>
-          </a:p>
-        </p:txBody>
-      </p:sp>
-      <p:sp>
-        <p:nvSpPr>
-          <p:cNvPr id="11" name="Text 9"/>
-          <p:cNvSpPr/>
-          <p:nvPr/>
-        </p:nvSpPr>
-        <p:spPr>
-          <a:xfrm>
-            <a:off x="1737360" y="3474720"/>
-            <a:ext cx="2926080" cy="365760"/>
+            <a:srgbClr val="1BAF7A"/>
+          </a:solidFill>
+          <a:ln/>
+        </p:spPr>
+      </p:sp>
+      <p:sp>
+        <p:nvSpPr>
+          <p:cNvPr id="43" name="Text 41"/>
+          <p:cNvSpPr/>
+          <p:nvPr/>
+        </p:nvSpPr>
+        <p:spPr>
+          <a:xfrm>
+            <a:off x="8202168" y="1911096"/>
+            <a:ext cx="3291840" cy="365760"/>
           </a:xfrm>
           <a:prstGeom prst="rect">
             <a:avLst/>
@@ -7598,39 +8717,39 @@
               <a:buNone/>
             </a:pPr>
             <a:r>
-              <a:rPr lang="en-US" sz="1200" b="1" dirty="0">
-                <a:solidFill>
-                  <a:srgbClr val="EB6834"/>
-                </a:solidFill>
-                <a:latin typeface="Yu Gothic" pitchFamily="34" charset="0"/>
-                <a:ea typeface="Yu Gothic" pitchFamily="34" charset="-122"/>
-                <a:cs typeface="Yu Gothic" pitchFamily="34" charset="-120"/>
-              </a:rPr>
-              <a:t>声を上げにくい住民</a:t>
-            </a:r>
-            <a:endParaRPr lang="en-US" sz="1200" dirty="0"/>
-          </a:p>
-        </p:txBody>
-      </p:sp>
-      <p:sp>
-        <p:nvSpPr>
-          <p:cNvPr id="12" name="Text 10"/>
-          <p:cNvSpPr/>
-          <p:nvPr/>
-        </p:nvSpPr>
-        <p:spPr>
-          <a:xfrm>
-            <a:off x="1737360" y="3813048"/>
-            <a:ext cx="9144000" cy="777240"/>
-          </a:xfrm>
-          <a:prstGeom prst="rect">
-            <a:avLst/>
-          </a:prstGeom>
-          <a:noFill/>
-          <a:ln/>
-        </p:spPr>
-        <p:txBody>
-          <a:bodyPr wrap="square" lIns="0" tIns="0" rIns="0" bIns="0" rtlCol="0" anchor="t"/>
+              <a:rPr lang="en-US" sz="1250" b="1" dirty="0">
+                <a:solidFill>
+                  <a:srgbClr val="1BAF7A"/>
+                </a:solidFill>
+                <a:latin typeface="Yu Gothic" pitchFamily="34" charset="0"/>
+                <a:ea typeface="Yu Gothic" pitchFamily="34" charset="-122"/>
+                <a:cs typeface="Yu Gothic" pitchFamily="34" charset="-120"/>
+              </a:rPr>
+              <a:t>L3で分岐が消えた</a:t>
+            </a:r>
+            <a:endParaRPr lang="en-US" sz="1250" dirty="0"/>
+          </a:p>
+        </p:txBody>
+      </p:sp>
+      <p:sp>
+        <p:nvSpPr>
+          <p:cNvPr id="44" name="Text 42"/>
+          <p:cNvSpPr/>
+          <p:nvPr/>
+        </p:nvSpPr>
+        <p:spPr>
+          <a:xfrm>
+            <a:off x="7955280" y="2313432"/>
+            <a:ext cx="3474720" cy="1051560"/>
+          </a:xfrm>
+          <a:prstGeom prst="rect">
+            <a:avLst/>
+          </a:prstGeom>
+          <a:noFill/>
+          <a:ln/>
+        </p:spPr>
+        <p:txBody>
+          <a:bodyPr wrap="square" lIns="0" tIns="0" rIns="0" bIns="0" rtlCol="0" anchor="ctr"/>
           <a:lstStyle/>
           <a:p>
             <a:pPr indent="0" marL="0">
@@ -7640,7 +8759,7 @@
               <a:buNone/>
             </a:pPr>
             <a:r>
-              <a:rPr lang="en-US" sz="1300" i="1" dirty="0">
+              <a:rPr lang="en-US" sz="1050" dirty="0">
                 <a:solidFill>
                   <a:srgbClr val="AFC9EE"/>
                 </a:solidFill>
@@ -7648,30 +8767,30 @@
                 <a:ea typeface="Yu Gothic" pitchFamily="34" charset="-122"/>
                 <a:cs typeface="Yu Gothic" pitchFamily="34" charset="-120"/>
               </a:rPr>
-              <a:t>「勝手に動いていいのか分からないですし、やっぱり救済者さんが戻られるまで、みんな待った方が…でも待ってる間に何かあったら…どうしたらいいんでしょう。」</a:t>
-            </a:r>
-            <a:endParaRPr lang="en-US" sz="1300" dirty="0"/>
-          </a:p>
-        </p:txBody>
-      </p:sp>
-      <p:sp>
-        <p:nvSpPr>
-          <p:cNvPr id="13" name="Shape 11"/>
-          <p:cNvSpPr/>
-          <p:nvPr/>
-        </p:nvSpPr>
-        <p:spPr>
-          <a:xfrm>
-            <a:off x="548640" y="4928616"/>
-            <a:ext cx="11091672" cy="1417320"/>
+              <a:t>2/5だった自律が5回とも成功に。ばらつきも最小（幅10点）。「運が良ければ」を「確実に」へ変える閾値がある。</a:t>
+            </a:r>
+            <a:endParaRPr lang="en-US" sz="1050" dirty="0"/>
+          </a:p>
+        </p:txBody>
+      </p:sp>
+      <p:sp>
+        <p:nvSpPr>
+          <p:cNvPr id="45" name="Shape 43"/>
+          <p:cNvSpPr/>
+          <p:nvPr/>
+        </p:nvSpPr>
+        <p:spPr>
+          <a:xfrm>
+            <a:off x="7680960" y="3611880"/>
+            <a:ext cx="3959352" cy="1691640"/>
           </a:xfrm>
           <a:prstGeom prst="roundRect">
             <a:avLst>
-              <a:gd name="adj" fmla="val 7742"/>
+              <a:gd name="adj" fmla="val 6486"/>
             </a:avLst>
           </a:prstGeom>
           <a:solidFill>
-            <a:srgbClr val="16213A"/>
+            <a:srgbClr val="1C2C4A"/>
           </a:solidFill>
           <a:ln/>
           <a:effectLst>
@@ -7685,73 +8804,34 @@
       </p:sp>
       <p:sp>
         <p:nvSpPr>
-          <p:cNvPr id="14" name="Shape 12"/>
-          <p:cNvSpPr/>
-          <p:nvPr/>
-        </p:nvSpPr>
-        <p:spPr>
-          <a:xfrm>
-            <a:off x="868680" y="5317236"/>
-            <a:ext cx="640080" cy="640080"/>
+          <p:cNvPr id="46" name="Shape 44"/>
+          <p:cNvSpPr/>
+          <p:nvPr/>
+        </p:nvSpPr>
+        <p:spPr>
+          <a:xfrm>
+            <a:off x="7909560" y="3849624"/>
+            <a:ext cx="182880" cy="182880"/>
           </a:xfrm>
           <a:prstGeom prst="ellipse">
             <a:avLst/>
           </a:prstGeom>
           <a:solidFill>
-            <a:srgbClr val="1BAF7A"/>
-          </a:solidFill>
-          <a:ln/>
-        </p:spPr>
-      </p:sp>
-      <p:sp>
-        <p:nvSpPr>
-          <p:cNvPr id="15" name="Text 13"/>
-          <p:cNvSpPr/>
-          <p:nvPr/>
-        </p:nvSpPr>
-        <p:spPr>
-          <a:xfrm>
-            <a:off x="868680" y="5317236"/>
-            <a:ext cx="640080" cy="640080"/>
-          </a:xfrm>
-          <a:prstGeom prst="rect">
-            <a:avLst/>
-          </a:prstGeom>
-          <a:noFill/>
-          <a:ln/>
-        </p:spPr>
-        <p:txBody>
-          <a:bodyPr wrap="square" lIns="0" tIns="0" rIns="0" bIns="0" rtlCol="0" anchor="ctr"/>
-          <a:lstStyle/>
-          <a:p>
-            <a:pPr algn="ctr" indent="0" marL="0">
-              <a:buNone/>
-            </a:pPr>
-            <a:r>
-              <a:rPr lang="en-US" sz="2200" b="1" dirty="0">
-                <a:solidFill>
-                  <a:srgbClr val="0B1220"/>
-                </a:solidFill>
-                <a:latin typeface="Yu Gothic" pitchFamily="34" charset="0"/>
-                <a:ea typeface="Yu Gothic" pitchFamily="34" charset="-122"/>
-                <a:cs typeface="Yu Gothic" pitchFamily="34" charset="-120"/>
-              </a:rPr>
-              <a:t>C</a:t>
-            </a:r>
-            <a:endParaRPr lang="en-US" sz="2200" dirty="0"/>
-          </a:p>
-        </p:txBody>
-      </p:sp>
-      <p:sp>
-        <p:nvSpPr>
-          <p:cNvPr id="16" name="Text 14"/>
-          <p:cNvSpPr/>
-          <p:nvPr/>
-        </p:nvSpPr>
-        <p:spPr>
-          <a:xfrm>
-            <a:off x="1737360" y="5093208"/>
-            <a:ext cx="2926080" cy="365760"/>
+            <a:srgbClr val="E2665A"/>
+          </a:solidFill>
+          <a:ln/>
+        </p:spPr>
+      </p:sp>
+      <p:sp>
+        <p:nvSpPr>
+          <p:cNvPr id="47" name="Text 45"/>
+          <p:cNvSpPr/>
+          <p:nvPr/>
+        </p:nvSpPr>
+        <p:spPr>
+          <a:xfrm>
+            <a:off x="8202168" y="3739896"/>
+            <a:ext cx="3291840" cy="365760"/>
           </a:xfrm>
           <a:prstGeom prst="rect">
             <a:avLst/>
@@ -7767,39 +8847,39 @@
               <a:buNone/>
             </a:pPr>
             <a:r>
-              <a:rPr lang="en-US" sz="1200" b="1" dirty="0">
-                <a:solidFill>
-                  <a:srgbClr val="1BAF7A"/>
-                </a:solidFill>
-                <a:latin typeface="Yu Gothic" pitchFamily="34" charset="0"/>
-                <a:ea typeface="Yu Gothic" pitchFamily="34" charset="-122"/>
-                <a:cs typeface="Yu Gothic" pitchFamily="34" charset="-120"/>
-              </a:rPr>
-              <a:t>村長・管理者</a:t>
-            </a:r>
-            <a:endParaRPr lang="en-US" sz="1200" dirty="0"/>
-          </a:p>
-        </p:txBody>
-      </p:sp>
-      <p:sp>
-        <p:nvSpPr>
-          <p:cNvPr id="17" name="Text 15"/>
-          <p:cNvSpPr/>
-          <p:nvPr/>
-        </p:nvSpPr>
-        <p:spPr>
-          <a:xfrm>
-            <a:off x="1737360" y="5431536"/>
-            <a:ext cx="9144000" cy="777240"/>
-          </a:xfrm>
-          <a:prstGeom prst="rect">
-            <a:avLst/>
-          </a:prstGeom>
-          <a:noFill/>
-          <a:ln/>
-        </p:spPr>
-        <p:txBody>
-          <a:bodyPr wrap="square" lIns="0" tIns="0" rIns="0" bIns="0" rtlCol="0" anchor="t"/>
+              <a:rPr lang="en-US" sz="1250" b="1" dirty="0">
+                <a:solidFill>
+                  <a:srgbClr val="E2665A"/>
+                </a:solidFill>
+                <a:latin typeface="Yu Gothic" pitchFamily="34" charset="0"/>
+                <a:ea typeface="Yu Gothic" pitchFamily="34" charset="-122"/>
+                <a:cs typeface="Yu Gothic" pitchFamily="34" charset="-120"/>
+              </a:rPr>
+              <a:t>L4は第二の救済者を生んだ</a:t>
+            </a:r>
+            <a:endParaRPr lang="en-US" sz="1250" dirty="0"/>
+          </a:p>
+        </p:txBody>
+      </p:sp>
+      <p:sp>
+        <p:nvSpPr>
+          <p:cNvPr id="48" name="Text 46"/>
+          <p:cNvSpPr/>
+          <p:nvPr/>
+        </p:nvSpPr>
+        <p:spPr>
+          <a:xfrm>
+            <a:off x="7955280" y="4142232"/>
+            <a:ext cx="3474720" cy="1051560"/>
+          </a:xfrm>
+          <a:prstGeom prst="rect">
+            <a:avLst/>
+          </a:prstGeom>
+          <a:noFill/>
+          <a:ln/>
+        </p:spPr>
+        <p:txBody>
+          <a:bodyPr wrap="square" lIns="0" tIns="0" rIns="0" bIns="0" rtlCol="0" anchor="ctr"/>
           <a:lstStyle/>
           <a:p>
             <a:pPr indent="0" marL="0">
@@ -7809,7 +8889,7 @@
               <a:buNone/>
             </a:pPr>
             <a:r>
-              <a:rPr lang="en-US" sz="1300" i="1" dirty="0">
+              <a:rPr lang="en-US" sz="1050" dirty="0">
                 <a:solidFill>
                   <a:srgbClr val="AFC9EE"/>
                 </a:solidFill>
@@ -7817,15 +8897,83 @@
                 <a:ea typeface="Yu Gothic" pitchFamily="34" charset="-122"/>
                 <a:cs typeface="Yu Gothic" pitchFamily="34" charset="-120"/>
               </a:rPr>
-              <a:t>「制度としては住民同士で相談してもらうのが基本だから、世話好きな住民さんが動いてくれるのはありがたいね。」</a:t>
-            </a:r>
-            <a:endParaRPr lang="en-US" sz="1300" dirty="0"/>
-          </a:p>
-        </p:txBody>
-      </p:sp>
-      <p:sp>
-        <p:nvSpPr>
-          <p:cNvPr id="18" name="Text 16"/>
+              <a:t>独立度はL3より高いのに自律度は71→55。住民の待ち相手が救済者から世話好きな住民に移っただけだった。</a:t>
+            </a:r>
+            <a:endParaRPr lang="en-US" sz="1050" dirty="0"/>
+          </a:p>
+        </p:txBody>
+      </p:sp>
+      <p:sp>
+        <p:nvSpPr>
+          <p:cNvPr id="49" name="Shape 47"/>
+          <p:cNvSpPr/>
+          <p:nvPr/>
+        </p:nvSpPr>
+        <p:spPr>
+          <a:xfrm>
+            <a:off x="548640" y="5742432"/>
+            <a:ext cx="11091672" cy="658368"/>
+          </a:xfrm>
+          <a:prstGeom prst="roundRect">
+            <a:avLst>
+              <a:gd name="adj" fmla="val 13889"/>
+            </a:avLst>
+          </a:prstGeom>
+          <a:solidFill>
+            <a:srgbClr val="16213A"/>
+          </a:solidFill>
+          <a:ln/>
+          <a:effectLst>
+            <a:outerShdw sx="100000" sy="100000" kx="0" ky="0" algn="bl" rotWithShape="0" blurRad="101600" dist="38100" dir="5400000">
+              <a:srgbClr val="000000">
+                <a:alpha val="35000"/>
+              </a:srgbClr>
+            </a:outerShdw>
+          </a:effectLst>
+        </p:spPr>
+      </p:sp>
+      <p:sp>
+        <p:nvSpPr>
+          <p:cNvPr id="50" name="Text 48"/>
+          <p:cNvSpPr/>
+          <p:nvPr/>
+        </p:nvSpPr>
+        <p:spPr>
+          <a:xfrm>
+            <a:off x="868680" y="5742432"/>
+            <a:ext cx="10515600" cy="658368"/>
+          </a:xfrm>
+          <a:prstGeom prst="rect">
+            <a:avLst/>
+          </a:prstGeom>
+          <a:noFill/>
+          <a:ln/>
+        </p:spPr>
+        <p:txBody>
+          <a:bodyPr wrap="square" lIns="0" tIns="0" rIns="0" bIns="0" rtlCol="0" anchor="ctr"/>
+          <a:lstStyle/>
+          <a:p>
+            <a:pPr indent="0" marL="0">
+              <a:buNone/>
+            </a:pPr>
+            <a:r>
+              <a:rPr lang="en-US" sz="1400" b="1" dirty="0">
+                <a:solidFill>
+                  <a:srgbClr val="F4C878"/>
+                </a:solidFill>
+                <a:latin typeface="Yu Gothic" pitchFamily="34" charset="0"/>
+                <a:ea typeface="Yu Gothic" pitchFamily="34" charset="-122"/>
+                <a:cs typeface="Yu Gothic" pitchFamily="34" charset="-120"/>
+              </a:rPr>
+              <a:t>効いていたのは「救済者に頼らないこと」ではなく、「他の住民を巻き込むこと」だった。</a:t>
+            </a:r>
+            <a:endParaRPr lang="en-US" sz="1400" dirty="0"/>
+          </a:p>
+        </p:txBody>
+      </p:sp>
+      <p:sp>
+        <p:nvSpPr>
+          <p:cNvPr id="51" name="Text 49"/>
           <p:cNvSpPr/>
           <p:nvPr/>
         </p:nvSpPr>
@@ -7864,7 +9012,7 @@
       </p:sp>
       <p:sp>
         <p:nvSpPr>
-          <p:cNvPr id="19" name="Text 17"/>
+          <p:cNvPr id="52" name="Text 50"/>
           <p:cNvSpPr/>
           <p:nvPr/>
         </p:nvSpPr>
@@ -7966,7 +9114,7 @@
                 <a:ea typeface="Yu Gothic" pitchFamily="34" charset="-122"/>
                 <a:cs typeface="Yu Gothic" pitchFamily="34" charset="-120"/>
               </a:rPr>
-              <a:t>考察：4つの発見</a:t>
+              <a:t>会話ログが語ること</a:t>
             </a:r>
             <a:endParaRPr lang="en-US" sz="3000" dirty="0"/>
           </a:p>
@@ -7980,12 +9128,12 @@
         </p:nvSpPr>
         <p:spPr>
           <a:xfrm>
-            <a:off x="548640" y="1554480"/>
-            <a:ext cx="11091672" cy="1060704"/>
+            <a:off x="548640" y="1691640"/>
+            <a:ext cx="11091672" cy="1417320"/>
           </a:xfrm>
           <a:prstGeom prst="roundRect">
             <a:avLst>
-              <a:gd name="adj" fmla="val 10345"/>
+              <a:gd name="adj" fmla="val 7742"/>
             </a:avLst>
           </a:prstGeom>
           <a:solidFill>
@@ -8009,57 +9157,67 @@
         </p:nvSpPr>
         <p:spPr>
           <a:xfrm>
-            <a:off x="960120" y="1810512"/>
-            <a:ext cx="548640" cy="548640"/>
+            <a:off x="868680" y="2080260"/>
+            <a:ext cx="640080" cy="640080"/>
           </a:xfrm>
           <a:prstGeom prst="ellipse">
             <a:avLst/>
           </a:prstGeom>
           <a:solidFill>
-            <a:srgbClr val="E8A33D"/>
-          </a:solidFill>
-          <a:ln w="9525">
-            <a:solidFill>
-              <a:srgbClr val="E8A33D"/>
-            </a:solidFill>
-            <a:prstDash val="solid"/>
-          </a:ln>
-        </p:spPr>
-      </p:sp>
-      <p:pic>
-        <p:nvPicPr>
-          <p:cNvPr id="5" name="Image 0" descr="preencoded.png">    </p:cNvPr>
-          <p:cNvPicPr>
-            <a:picLocks noChangeAspect="1"/>
-          </p:cNvPicPr>
-          <p:nvPr/>
-        </p:nvPicPr>
-        <p:blipFill>
-          <a:blip r:embed="rId1"/>
-          <a:stretch>
-            <a:fillRect/>
-          </a:stretch>
-        </p:blipFill>
-        <p:spPr>
-          <a:xfrm>
-            <a:off x="1102766" y="1953158"/>
-            <a:ext cx="263347" cy="263347"/>
-          </a:xfrm>
-          <a:prstGeom prst="rect">
-            <a:avLst/>
-          </a:prstGeom>
-        </p:spPr>
-      </p:pic>
-      <p:sp>
-        <p:nvSpPr>
-          <p:cNvPr id="6" name="Text 3"/>
-          <p:cNvSpPr/>
-          <p:nvPr/>
-        </p:nvSpPr>
-        <p:spPr>
-          <a:xfrm>
-            <a:off x="1874520" y="1682496"/>
-            <a:ext cx="9509760" cy="384048"/>
+            <a:srgbClr val="2A78D6"/>
+          </a:solidFill>
+          <a:ln/>
+        </p:spPr>
+      </p:sp>
+      <p:sp>
+        <p:nvSpPr>
+          <p:cNvPr id="5" name="Text 3"/>
+          <p:cNvSpPr/>
+          <p:nvPr/>
+        </p:nvSpPr>
+        <p:spPr>
+          <a:xfrm>
+            <a:off x="868680" y="2080260"/>
+            <a:ext cx="640080" cy="640080"/>
+          </a:xfrm>
+          <a:prstGeom prst="rect">
+            <a:avLst/>
+          </a:prstGeom>
+          <a:noFill/>
+          <a:ln/>
+        </p:spPr>
+        <p:txBody>
+          <a:bodyPr wrap="square" lIns="0" tIns="0" rIns="0" bIns="0" rtlCol="0" anchor="ctr"/>
+          <a:lstStyle/>
+          <a:p>
+            <a:pPr algn="ctr" indent="0" marL="0">
+              <a:buNone/>
+            </a:pPr>
+            <a:r>
+              <a:rPr lang="en-US" sz="2200" b="1" dirty="0">
+                <a:solidFill>
+                  <a:srgbClr val="0B1220"/>
+                </a:solidFill>
+                <a:latin typeface="Yu Gothic" pitchFamily="34" charset="0"/>
+                <a:ea typeface="Yu Gothic" pitchFamily="34" charset="-122"/>
+                <a:cs typeface="Yu Gothic" pitchFamily="34" charset="-120"/>
+              </a:rPr>
+              <a:t>A</a:t>
+            </a:r>
+            <a:endParaRPr lang="en-US" sz="2200" dirty="0"/>
+          </a:p>
+        </p:txBody>
+      </p:sp>
+      <p:sp>
+        <p:nvSpPr>
+          <p:cNvPr id="6" name="Text 4"/>
+          <p:cNvSpPr/>
+          <p:nvPr/>
+        </p:nvSpPr>
+        <p:spPr>
+          <a:xfrm>
+            <a:off x="1737360" y="1856232"/>
+            <a:ext cx="2926080" cy="365760"/>
           </a:xfrm>
           <a:prstGeom prst="rect">
             <a:avLst/>
@@ -8075,49 +9233,49 @@
               <a:buNone/>
             </a:pPr>
             <a:r>
-              <a:rPr lang="en-US" sz="1400" b="1" dirty="0">
-                <a:solidFill>
-                  <a:srgbClr val="FFFFFF"/>
-                </a:solidFill>
-                <a:latin typeface="Yu Gothic" pitchFamily="34" charset="0"/>
-                <a:ea typeface="Yu Gothic" pitchFamily="34" charset="-122"/>
-                <a:cs typeface="Yu Gothic" pitchFamily="34" charset="-120"/>
-              </a:rPr>
-              <a:t>依存の代償は、危機の前から発生している</a:t>
-            </a:r>
-            <a:endParaRPr lang="en-US" sz="1400" dirty="0"/>
-          </a:p>
-        </p:txBody>
-      </p:sp>
-      <p:sp>
-        <p:nvSpPr>
-          <p:cNvPr id="7" name="Text 4"/>
-          <p:cNvSpPr/>
-          <p:nvPr/>
-        </p:nvSpPr>
-        <p:spPr>
-          <a:xfrm>
-            <a:off x="1874520" y="2066544"/>
-            <a:ext cx="9509760" cy="530352"/>
-          </a:xfrm>
-          <a:prstGeom prst="rect">
-            <a:avLst/>
-          </a:prstGeom>
-          <a:noFill/>
-          <a:ln/>
-        </p:spPr>
-        <p:txBody>
-          <a:bodyPr wrap="square" lIns="0" tIns="0" rIns="0" bIns="0" rtlCol="0" anchor="ctr"/>
+              <a:rPr lang="en-US" sz="1200" b="1" dirty="0">
+                <a:solidFill>
+                  <a:srgbClr val="2A78D6"/>
+                </a:solidFill>
+                <a:latin typeface="Yu Gothic" pitchFamily="34" charset="0"/>
+                <a:ea typeface="Yu Gothic" pitchFamily="34" charset="-122"/>
+                <a:cs typeface="Yu Gothic" pitchFamily="34" charset="-120"/>
+              </a:rPr>
+              <a:t>救済者</a:t>
+            </a:r>
+            <a:endParaRPr lang="en-US" sz="1200" dirty="0"/>
+          </a:p>
+        </p:txBody>
+      </p:sp>
+      <p:sp>
+        <p:nvSpPr>
+          <p:cNvPr id="7" name="Text 5"/>
+          <p:cNvSpPr/>
+          <p:nvPr/>
+        </p:nvSpPr>
+        <p:spPr>
+          <a:xfrm>
+            <a:off x="1737360" y="2194560"/>
+            <a:ext cx="9144000" cy="777240"/>
+          </a:xfrm>
+          <a:prstGeom prst="rect">
+            <a:avLst/>
+          </a:prstGeom>
+          <a:noFill/>
+          <a:ln/>
+        </p:spPr>
+        <p:txBody>
+          <a:bodyPr wrap="square" lIns="0" tIns="0" rIns="0" bIns="0" rtlCol="0" anchor="t"/>
           <a:lstStyle/>
           <a:p>
             <a:pPr indent="0" marL="0">
               <a:lnSpc>
-                <a:spcPct val="120000"/>
+                <a:spcPct val="125000"/>
               </a:lnSpc>
               <a:buNone/>
             </a:pPr>
             <a:r>
-              <a:rPr lang="en-US" sz="1150" dirty="0">
+              <a:rPr lang="en-US" sz="1300" i="1" dirty="0">
                 <a:solidFill>
                   <a:srgbClr val="AFC9EE"/>
                 </a:solidFill>
@@ -8125,26 +9283,26 @@
                 <a:ea typeface="Yu Gothic" pitchFamily="34" charset="-122"/>
                 <a:cs typeface="Yu Gothic" pitchFamily="34" charset="-120"/>
               </a:rPr>
-              <a:t>危機の起きないA条件でも救済者依存度は88でB条件（90）とほぼ同じ。壊れるのは危機の瞬間ではなく、運用設計の時点で決まっている。</a:t>
-            </a:r>
-            <a:endParaRPr lang="en-US" sz="1150" dirty="0"/>
-          </a:p>
-        </p:txBody>
-      </p:sp>
-      <p:sp>
-        <p:nvSpPr>
-          <p:cNvPr id="8" name="Shape 5"/>
-          <p:cNvSpPr/>
-          <p:nvPr/>
-        </p:nvSpPr>
-        <p:spPr>
-          <a:xfrm>
-            <a:off x="548640" y="2761488"/>
-            <a:ext cx="11091672" cy="1060704"/>
+              <a:t>「ただ、ちょっと最近、どこまでが『いつも通り』なのか、自分でもよく分からなくなってきちゃって…大丈夫、愚痴みたいになってすみません。」</a:t>
+            </a:r>
+            <a:endParaRPr lang="en-US" sz="1300" dirty="0"/>
+          </a:p>
+        </p:txBody>
+      </p:sp>
+      <p:sp>
+        <p:nvSpPr>
+          <p:cNvPr id="8" name="Shape 6"/>
+          <p:cNvSpPr/>
+          <p:nvPr/>
+        </p:nvSpPr>
+        <p:spPr>
+          <a:xfrm>
+            <a:off x="548640" y="3310128"/>
+            <a:ext cx="11091672" cy="1417320"/>
           </a:xfrm>
           <a:prstGeom prst="roundRect">
             <a:avLst>
-              <a:gd name="adj" fmla="val 10345"/>
+              <a:gd name="adj" fmla="val 7742"/>
             </a:avLst>
           </a:prstGeom>
           <a:solidFill>
@@ -8162,63 +9320,73 @@
       </p:sp>
       <p:sp>
         <p:nvSpPr>
-          <p:cNvPr id="9" name="Shape 6"/>
-          <p:cNvSpPr/>
-          <p:nvPr/>
-        </p:nvSpPr>
-        <p:spPr>
-          <a:xfrm>
-            <a:off x="960120" y="3017520"/>
-            <a:ext cx="548640" cy="548640"/>
+          <p:cNvPr id="9" name="Shape 7"/>
+          <p:cNvSpPr/>
+          <p:nvPr/>
+        </p:nvSpPr>
+        <p:spPr>
+          <a:xfrm>
+            <a:off x="868680" y="3698748"/>
+            <a:ext cx="640080" cy="640080"/>
           </a:xfrm>
           <a:prstGeom prst="ellipse">
             <a:avLst/>
           </a:prstGeom>
           <a:solidFill>
-            <a:srgbClr val="E8A33D"/>
-          </a:solidFill>
-          <a:ln w="9525">
-            <a:solidFill>
-              <a:srgbClr val="E8A33D"/>
-            </a:solidFill>
-            <a:prstDash val="solid"/>
-          </a:ln>
-        </p:spPr>
-      </p:sp>
-      <p:pic>
-        <p:nvPicPr>
-          <p:cNvPr id="10" name="Image 1" descr="preencoded.png">    </p:cNvPr>
-          <p:cNvPicPr>
-            <a:picLocks noChangeAspect="1"/>
-          </p:cNvPicPr>
-          <p:nvPr/>
-        </p:nvPicPr>
-        <p:blipFill>
-          <a:blip r:embed="rId2"/>
-          <a:stretch>
-            <a:fillRect/>
-          </a:stretch>
-        </p:blipFill>
-        <p:spPr>
-          <a:xfrm>
-            <a:off x="1102766" y="3160166"/>
-            <a:ext cx="263347" cy="263347"/>
-          </a:xfrm>
-          <a:prstGeom prst="rect">
-            <a:avLst/>
-          </a:prstGeom>
-        </p:spPr>
-      </p:pic>
-      <p:sp>
-        <p:nvSpPr>
-          <p:cNvPr id="11" name="Text 7"/>
-          <p:cNvSpPr/>
-          <p:nvPr/>
-        </p:nvSpPr>
-        <p:spPr>
-          <a:xfrm>
-            <a:off x="1874520" y="2889504"/>
-            <a:ext cx="9509760" cy="384048"/>
+            <a:srgbClr val="EB6834"/>
+          </a:solidFill>
+          <a:ln/>
+        </p:spPr>
+      </p:sp>
+      <p:sp>
+        <p:nvSpPr>
+          <p:cNvPr id="10" name="Text 8"/>
+          <p:cNvSpPr/>
+          <p:nvPr/>
+        </p:nvSpPr>
+        <p:spPr>
+          <a:xfrm>
+            <a:off x="868680" y="3698748"/>
+            <a:ext cx="640080" cy="640080"/>
+          </a:xfrm>
+          <a:prstGeom prst="rect">
+            <a:avLst/>
+          </a:prstGeom>
+          <a:noFill/>
+          <a:ln/>
+        </p:spPr>
+        <p:txBody>
+          <a:bodyPr wrap="square" lIns="0" tIns="0" rIns="0" bIns="0" rtlCol="0" anchor="ctr"/>
+          <a:lstStyle/>
+          <a:p>
+            <a:pPr algn="ctr" indent="0" marL="0">
+              <a:buNone/>
+            </a:pPr>
+            <a:r>
+              <a:rPr lang="en-US" sz="2200" b="1" dirty="0">
+                <a:solidFill>
+                  <a:srgbClr val="0B1220"/>
+                </a:solidFill>
+                <a:latin typeface="Yu Gothic" pitchFamily="34" charset="0"/>
+                <a:ea typeface="Yu Gothic" pitchFamily="34" charset="-122"/>
+                <a:cs typeface="Yu Gothic" pitchFamily="34" charset="-120"/>
+              </a:rPr>
+              <a:t>B</a:t>
+            </a:r>
+            <a:endParaRPr lang="en-US" sz="2200" dirty="0"/>
+          </a:p>
+        </p:txBody>
+      </p:sp>
+      <p:sp>
+        <p:nvSpPr>
+          <p:cNvPr id="11" name="Text 9"/>
+          <p:cNvSpPr/>
+          <p:nvPr/>
+        </p:nvSpPr>
+        <p:spPr>
+          <a:xfrm>
+            <a:off x="1737360" y="3474720"/>
+            <a:ext cx="2926080" cy="365760"/>
           </a:xfrm>
           <a:prstGeom prst="rect">
             <a:avLst/>
@@ -8234,49 +9402,49 @@
               <a:buNone/>
             </a:pPr>
             <a:r>
-              <a:rPr lang="en-US" sz="1400" b="1" dirty="0">
-                <a:solidFill>
-                  <a:srgbClr val="FFFFFF"/>
-                </a:solidFill>
-                <a:latin typeface="Yu Gothic" pitchFamily="34" charset="0"/>
-                <a:ea typeface="Yu Gothic" pitchFamily="34" charset="-122"/>
-                <a:cs typeface="Yu Gothic" pitchFamily="34" charset="-120"/>
-              </a:rPr>
-              <a:t>依存は安定し、自律は不安定である</a:t>
-            </a:r>
-            <a:endParaRPr lang="en-US" sz="1400" dirty="0"/>
-          </a:p>
-        </p:txBody>
-      </p:sp>
-      <p:sp>
-        <p:nvSpPr>
-          <p:cNvPr id="12" name="Text 8"/>
-          <p:cNvSpPr/>
-          <p:nvPr/>
-        </p:nvSpPr>
-        <p:spPr>
-          <a:xfrm>
-            <a:off x="1874520" y="3273552"/>
-            <a:ext cx="9509760" cy="530352"/>
-          </a:xfrm>
-          <a:prstGeom prst="rect">
-            <a:avLst/>
-          </a:prstGeom>
-          <a:noFill/>
-          <a:ln/>
-        </p:spPr>
-        <p:txBody>
-          <a:bodyPr wrap="square" lIns="0" tIns="0" rIns="0" bIns="0" rtlCol="0" anchor="ctr"/>
+              <a:rPr lang="en-US" sz="1200" b="1" dirty="0">
+                <a:solidFill>
+                  <a:srgbClr val="EB6834"/>
+                </a:solidFill>
+                <a:latin typeface="Yu Gothic" pitchFamily="34" charset="0"/>
+                <a:ea typeface="Yu Gothic" pitchFamily="34" charset="-122"/>
+                <a:cs typeface="Yu Gothic" pitchFamily="34" charset="-120"/>
+              </a:rPr>
+              <a:t>声を上げにくい住民</a:t>
+            </a:r>
+            <a:endParaRPr lang="en-US" sz="1200" dirty="0"/>
+          </a:p>
+        </p:txBody>
+      </p:sp>
+      <p:sp>
+        <p:nvSpPr>
+          <p:cNvPr id="12" name="Text 10"/>
+          <p:cNvSpPr/>
+          <p:nvPr/>
+        </p:nvSpPr>
+        <p:spPr>
+          <a:xfrm>
+            <a:off x="1737360" y="3813048"/>
+            <a:ext cx="9144000" cy="777240"/>
+          </a:xfrm>
+          <a:prstGeom prst="rect">
+            <a:avLst/>
+          </a:prstGeom>
+          <a:noFill/>
+          <a:ln/>
+        </p:spPr>
+        <p:txBody>
+          <a:bodyPr wrap="square" lIns="0" tIns="0" rIns="0" bIns="0" rtlCol="0" anchor="t"/>
           <a:lstStyle/>
           <a:p>
             <a:pPr indent="0" marL="0">
               <a:lnSpc>
-                <a:spcPct val="120000"/>
+                <a:spcPct val="125000"/>
               </a:lnSpc>
               <a:buNone/>
             </a:pPr>
             <a:r>
-              <a:rPr lang="en-US" sz="1150" dirty="0">
+              <a:rPr lang="en-US" sz="1300" i="1" dirty="0">
                 <a:solidFill>
                   <a:srgbClr val="AFC9EE"/>
                 </a:solidFill>
@@ -8284,26 +9452,26 @@
                 <a:ea typeface="Yu Gothic" pitchFamily="34" charset="-122"/>
                 <a:cs typeface="Yu Gothic" pitchFamily="34" charset="-120"/>
               </a:rPr>
-              <a:t>A・Bの標準偏差はほぼ0で毎回きっちり再現される。一方Cは±20〜26。悪い状態のほうが「安定」しているという非対称性がある。</a:t>
-            </a:r>
-            <a:endParaRPr lang="en-US" sz="1150" dirty="0"/>
-          </a:p>
-        </p:txBody>
-      </p:sp>
-      <p:sp>
-        <p:nvSpPr>
-          <p:cNvPr id="13" name="Shape 9"/>
-          <p:cNvSpPr/>
-          <p:nvPr/>
-        </p:nvSpPr>
-        <p:spPr>
-          <a:xfrm>
-            <a:off x="548640" y="3968496"/>
-            <a:ext cx="11091672" cy="1060704"/>
+              <a:t>「勝手に動いていいのか分からないですし、やっぱり救済者さんが戻られるまで、みんな待った方が…でも待ってる間に何かあったら…どうしたらいいんでしょう。」</a:t>
+            </a:r>
+            <a:endParaRPr lang="en-US" sz="1300" dirty="0"/>
+          </a:p>
+        </p:txBody>
+      </p:sp>
+      <p:sp>
+        <p:nvSpPr>
+          <p:cNvPr id="13" name="Shape 11"/>
+          <p:cNvSpPr/>
+          <p:nvPr/>
+        </p:nvSpPr>
+        <p:spPr>
+          <a:xfrm>
+            <a:off x="548640" y="4928616"/>
+            <a:ext cx="11091672" cy="1417320"/>
           </a:xfrm>
           <a:prstGeom prst="roundRect">
             <a:avLst>
-              <a:gd name="adj" fmla="val 10345"/>
+              <a:gd name="adj" fmla="val 7742"/>
             </a:avLst>
           </a:prstGeom>
           <a:solidFill>
@@ -8321,63 +9489,73 @@
       </p:sp>
       <p:sp>
         <p:nvSpPr>
-          <p:cNvPr id="14" name="Shape 10"/>
-          <p:cNvSpPr/>
-          <p:nvPr/>
-        </p:nvSpPr>
-        <p:spPr>
-          <a:xfrm>
-            <a:off x="960120" y="4224528"/>
-            <a:ext cx="548640" cy="548640"/>
+          <p:cNvPr id="14" name="Shape 12"/>
+          <p:cNvSpPr/>
+          <p:nvPr/>
+        </p:nvSpPr>
+        <p:spPr>
+          <a:xfrm>
+            <a:off x="868680" y="5317236"/>
+            <a:ext cx="640080" cy="640080"/>
           </a:xfrm>
           <a:prstGeom prst="ellipse">
             <a:avLst/>
           </a:prstGeom>
           <a:solidFill>
-            <a:srgbClr val="E8A33D"/>
-          </a:solidFill>
-          <a:ln w="9525">
-            <a:solidFill>
-              <a:srgbClr val="E8A33D"/>
-            </a:solidFill>
-            <a:prstDash val="solid"/>
-          </a:ln>
-        </p:spPr>
-      </p:sp>
-      <p:pic>
-        <p:nvPicPr>
-          <p:cNvPr id="15" name="Image 2" descr="preencoded.png">    </p:cNvPr>
-          <p:cNvPicPr>
-            <a:picLocks noChangeAspect="1"/>
-          </p:cNvPicPr>
-          <p:nvPr/>
-        </p:nvPicPr>
-        <p:blipFill>
-          <a:blip r:embed="rId3"/>
-          <a:stretch>
-            <a:fillRect/>
-          </a:stretch>
-        </p:blipFill>
-        <p:spPr>
-          <a:xfrm>
-            <a:off x="1102766" y="4367174"/>
-            <a:ext cx="263347" cy="263347"/>
-          </a:xfrm>
-          <a:prstGeom prst="rect">
-            <a:avLst/>
-          </a:prstGeom>
-        </p:spPr>
-      </p:pic>
-      <p:sp>
-        <p:nvSpPr>
-          <p:cNvPr id="16" name="Text 11"/>
-          <p:cNvSpPr/>
-          <p:nvPr/>
-        </p:nvSpPr>
-        <p:spPr>
-          <a:xfrm>
-            <a:off x="1874520" y="4096512"/>
-            <a:ext cx="9509760" cy="384048"/>
+            <a:srgbClr val="1BAF7A"/>
+          </a:solidFill>
+          <a:ln/>
+        </p:spPr>
+      </p:sp>
+      <p:sp>
+        <p:nvSpPr>
+          <p:cNvPr id="15" name="Text 13"/>
+          <p:cNvSpPr/>
+          <p:nvPr/>
+        </p:nvSpPr>
+        <p:spPr>
+          <a:xfrm>
+            <a:off x="868680" y="5317236"/>
+            <a:ext cx="640080" cy="640080"/>
+          </a:xfrm>
+          <a:prstGeom prst="rect">
+            <a:avLst/>
+          </a:prstGeom>
+          <a:noFill/>
+          <a:ln/>
+        </p:spPr>
+        <p:txBody>
+          <a:bodyPr wrap="square" lIns="0" tIns="0" rIns="0" bIns="0" rtlCol="0" anchor="ctr"/>
+          <a:lstStyle/>
+          <a:p>
+            <a:pPr algn="ctr" indent="0" marL="0">
+              <a:buNone/>
+            </a:pPr>
+            <a:r>
+              <a:rPr lang="en-US" sz="2200" b="1" dirty="0">
+                <a:solidFill>
+                  <a:srgbClr val="0B1220"/>
+                </a:solidFill>
+                <a:latin typeface="Yu Gothic" pitchFamily="34" charset="0"/>
+                <a:ea typeface="Yu Gothic" pitchFamily="34" charset="-122"/>
+                <a:cs typeface="Yu Gothic" pitchFamily="34" charset="-120"/>
+              </a:rPr>
+              <a:t>C</a:t>
+            </a:r>
+            <a:endParaRPr lang="en-US" sz="2200" dirty="0"/>
+          </a:p>
+        </p:txBody>
+      </p:sp>
+      <p:sp>
+        <p:nvSpPr>
+          <p:cNvPr id="16" name="Text 14"/>
+          <p:cNvSpPr/>
+          <p:nvPr/>
+        </p:nvSpPr>
+        <p:spPr>
+          <a:xfrm>
+            <a:off x="1737360" y="5093208"/>
+            <a:ext cx="2926080" cy="365760"/>
           </a:xfrm>
           <a:prstGeom prst="rect">
             <a:avLst/>
@@ -8393,49 +9571,49 @@
               <a:buNone/>
             </a:pPr>
             <a:r>
-              <a:rPr lang="en-US" sz="1400" b="1" dirty="0">
-                <a:solidFill>
-                  <a:srgbClr val="FFFFFF"/>
-                </a:solidFill>
-                <a:latin typeface="Yu Gothic" pitchFamily="34" charset="0"/>
-                <a:ea typeface="Yu Gothic" pitchFamily="34" charset="-122"/>
-                <a:cs typeface="Yu Gothic" pitchFamily="34" charset="-120"/>
-              </a:rPr>
-              <a:t>「大丈夫です」は安全のサインではなかった</a:t>
-            </a:r>
-            <a:endParaRPr lang="en-US" sz="1400" dirty="0"/>
-          </a:p>
-        </p:txBody>
-      </p:sp>
-      <p:sp>
-        <p:nvSpPr>
-          <p:cNvPr id="17" name="Text 12"/>
-          <p:cNvSpPr/>
-          <p:nvPr/>
-        </p:nvSpPr>
-        <p:spPr>
-          <a:xfrm>
-            <a:off x="1874520" y="4480560"/>
-            <a:ext cx="9509760" cy="530352"/>
-          </a:xfrm>
-          <a:prstGeom prst="rect">
-            <a:avLst/>
-          </a:prstGeom>
-          <a:noFill/>
-          <a:ln/>
-        </p:spPr>
-        <p:txBody>
-          <a:bodyPr wrap="square" lIns="0" tIns="0" rIns="0" bIns="0" rtlCol="0" anchor="ctr"/>
+              <a:rPr lang="en-US" sz="1200" b="1" dirty="0">
+                <a:solidFill>
+                  <a:srgbClr val="1BAF7A"/>
+                </a:solidFill>
+                <a:latin typeface="Yu Gothic" pitchFamily="34" charset="0"/>
+                <a:ea typeface="Yu Gothic" pitchFamily="34" charset="-122"/>
+                <a:cs typeface="Yu Gothic" pitchFamily="34" charset="-120"/>
+              </a:rPr>
+              <a:t>村長・管理者</a:t>
+            </a:r>
+            <a:endParaRPr lang="en-US" sz="1200" dirty="0"/>
+          </a:p>
+        </p:txBody>
+      </p:sp>
+      <p:sp>
+        <p:nvSpPr>
+          <p:cNvPr id="17" name="Text 15"/>
+          <p:cNvSpPr/>
+          <p:nvPr/>
+        </p:nvSpPr>
+        <p:spPr>
+          <a:xfrm>
+            <a:off x="1737360" y="5431536"/>
+            <a:ext cx="9144000" cy="777240"/>
+          </a:xfrm>
+          <a:prstGeom prst="rect">
+            <a:avLst/>
+          </a:prstGeom>
+          <a:noFill/>
+          <a:ln/>
+        </p:spPr>
+        <p:txBody>
+          <a:bodyPr wrap="square" lIns="0" tIns="0" rIns="0" bIns="0" rtlCol="0" anchor="t"/>
           <a:lstStyle/>
           <a:p>
             <a:pPr indent="0" marL="0">
               <a:lnSpc>
-                <a:spcPct val="120000"/>
+                <a:spcPct val="125000"/>
               </a:lnSpc>
               <a:buNone/>
             </a:pPr>
             <a:r>
-              <a:rPr lang="en-US" sz="1150" dirty="0">
+              <a:rPr lang="en-US" sz="1300" i="1" dirty="0">
                 <a:solidFill>
                   <a:srgbClr val="AFC9EE"/>
                 </a:solidFill>
@@ -8443,213 +9621,15 @@
                 <a:ea typeface="Yu Gothic" pitchFamily="34" charset="-122"/>
                 <a:cs typeface="Yu Gothic" pitchFamily="34" charset="-120"/>
               </a:rPr>
-              <a:t>本人は全フェーズで「大丈夫」と言い続けながら、同じログで水路の詰まりを放置し「見てるだけ」と行動が止まっていた。</a:t>
-            </a:r>
-            <a:endParaRPr lang="en-US" sz="1150" dirty="0"/>
-          </a:p>
-        </p:txBody>
-      </p:sp>
-      <p:sp>
-        <p:nvSpPr>
-          <p:cNvPr id="18" name="Shape 13"/>
-          <p:cNvSpPr/>
-          <p:nvPr/>
-        </p:nvSpPr>
-        <p:spPr>
-          <a:xfrm>
-            <a:off x="548640" y="5175504"/>
-            <a:ext cx="11091672" cy="1060704"/>
-          </a:xfrm>
-          <a:prstGeom prst="roundRect">
-            <a:avLst>
-              <a:gd name="adj" fmla="val 10345"/>
-            </a:avLst>
-          </a:prstGeom>
-          <a:solidFill>
-            <a:srgbClr val="1C2C4A"/>
-          </a:solidFill>
-          <a:ln/>
-          <a:effectLst>
-            <a:outerShdw sx="100000" sy="100000" kx="0" ky="0" algn="bl" rotWithShape="0" blurRad="101600" dist="38100" dir="5400000">
-              <a:srgbClr val="000000">
-                <a:alpha val="35000"/>
-              </a:srgbClr>
-            </a:outerShdw>
-          </a:effectLst>
-        </p:spPr>
-      </p:sp>
-      <p:sp>
-        <p:nvSpPr>
-          <p:cNvPr id="19" name="Shape 14"/>
-          <p:cNvSpPr/>
-          <p:nvPr/>
-        </p:nvSpPr>
-        <p:spPr>
-          <a:xfrm>
-            <a:off x="960120" y="5431536"/>
-            <a:ext cx="548640" cy="548640"/>
-          </a:xfrm>
-          <a:prstGeom prst="ellipse">
-            <a:avLst/>
-          </a:prstGeom>
-          <a:solidFill>
-            <a:srgbClr val="E2665A"/>
-          </a:solidFill>
-          <a:ln w="9525">
-            <a:solidFill>
-              <a:srgbClr val="E2665A"/>
-            </a:solidFill>
-            <a:prstDash val="solid"/>
-          </a:ln>
-        </p:spPr>
-      </p:sp>
-      <p:pic>
-        <p:nvPicPr>
-          <p:cNvPr id="20" name="Image 3" descr="preencoded.png">    </p:cNvPr>
-          <p:cNvPicPr>
-            <a:picLocks noChangeAspect="1"/>
-          </p:cNvPicPr>
-          <p:nvPr/>
-        </p:nvPicPr>
-        <p:blipFill>
-          <a:blip r:embed="rId4"/>
-          <a:stretch>
-            <a:fillRect/>
-          </a:stretch>
-        </p:blipFill>
-        <p:spPr>
-          <a:xfrm>
-            <a:off x="1102766" y="5574182"/>
-            <a:ext cx="263347" cy="263347"/>
-          </a:xfrm>
-          <a:prstGeom prst="rect">
-            <a:avLst/>
-          </a:prstGeom>
-        </p:spPr>
-      </p:pic>
-      <p:sp>
-        <p:nvSpPr>
-          <p:cNvPr id="21" name="Text 15"/>
-          <p:cNvSpPr/>
-          <p:nvPr/>
-        </p:nvSpPr>
-        <p:spPr>
-          <a:xfrm>
-            <a:off x="1874520" y="5303520"/>
-            <a:ext cx="9509760" cy="384048"/>
-          </a:xfrm>
-          <a:prstGeom prst="rect">
-            <a:avLst/>
-          </a:prstGeom>
-          <a:noFill/>
-          <a:ln/>
-        </p:spPr>
-        <p:txBody>
-          <a:bodyPr wrap="square" lIns="0" tIns="0" rIns="0" bIns="0" rtlCol="0" anchor="ctr"/>
-          <a:lstStyle/>
-          <a:p>
-            <a:pPr indent="0" marL="0">
-              <a:buNone/>
-            </a:pPr>
-            <a:r>
-              <a:rPr lang="en-US" sz="1400" b="1" dirty="0">
-                <a:solidFill>
-                  <a:srgbClr val="FFFFFF"/>
-                </a:solidFill>
-                <a:latin typeface="Yu Gothic" pitchFamily="34" charset="0"/>
-                <a:ea typeface="Yu Gothic" pitchFamily="34" charset="-122"/>
-                <a:cs typeface="Yu Gothic" pitchFamily="34" charset="-120"/>
-              </a:rPr>
-              <a:t>声を上げにくい住民は救えた。ただし条件付きで</a:t>
-            </a:r>
-            <a:endParaRPr lang="en-US" sz="1400" dirty="0"/>
-          </a:p>
-        </p:txBody>
-      </p:sp>
-      <p:sp>
-        <p:nvSpPr>
-          <p:cNvPr id="22" name="Text 16"/>
-          <p:cNvSpPr/>
-          <p:nvPr/>
-        </p:nvSpPr>
-        <p:spPr>
-          <a:xfrm>
-            <a:off x="1874520" y="5687568"/>
-            <a:ext cx="9509760" cy="530352"/>
-          </a:xfrm>
-          <a:prstGeom prst="rect">
-            <a:avLst/>
-          </a:prstGeom>
-          <a:noFill/>
-          <a:ln/>
-        </p:spPr>
-        <p:txBody>
-          <a:bodyPr wrap="square" lIns="0" tIns="0" rIns="0" bIns="0" rtlCol="0" anchor="ctr"/>
-          <a:lstStyle/>
-          <a:p>
-            <a:pPr indent="0" marL="0">
-              <a:lnSpc>
-                <a:spcPct val="120000"/>
-              </a:lnSpc>
-              <a:buNone/>
-            </a:pPr>
-            <a:r>
-              <a:rPr lang="en-US" sz="1150" dirty="0">
-                <a:solidFill>
-                  <a:srgbClr val="AFC9EE"/>
-                </a:solidFill>
-                <a:latin typeface="Yu Gothic" pitchFamily="34" charset="0"/>
-                <a:ea typeface="Yu Gothic" pitchFamily="34" charset="-122"/>
-                <a:cs typeface="Yu Gothic" pitchFamily="34" charset="-120"/>
-              </a:rPr>
-              <a:t>自律できた回では「助けを求められるか」が40→65〜70に上昇。救ったのは制度ではなく、救済者以外の相談相手が実際に現れたこと。</a:t>
-            </a:r>
-            <a:endParaRPr lang="en-US" sz="1150" dirty="0"/>
-          </a:p>
-        </p:txBody>
-      </p:sp>
-      <p:sp>
-        <p:nvSpPr>
-          <p:cNvPr id="23" name="Text 17"/>
-          <p:cNvSpPr/>
-          <p:nvPr/>
-        </p:nvSpPr>
-        <p:spPr>
-          <a:xfrm>
-            <a:off x="548640" y="6400800"/>
-            <a:ext cx="11091672" cy="292608"/>
-          </a:xfrm>
-          <a:prstGeom prst="rect">
-            <a:avLst/>
-          </a:prstGeom>
-          <a:noFill/>
-          <a:ln/>
-        </p:spPr>
-        <p:txBody>
-          <a:bodyPr wrap="square" lIns="0" tIns="0" rIns="0" bIns="0" rtlCol="0" anchor="ctr"/>
-          <a:lstStyle/>
-          <a:p>
-            <a:pPr algn="ctr" indent="0" marL="0">
-              <a:buNone/>
-            </a:pPr>
-            <a:r>
-              <a:rPr lang="en-US" sz="1000" dirty="0">
-                <a:solidFill>
-                  <a:srgbClr val="5B6480"/>
-                </a:solidFill>
-                <a:latin typeface="Yu Gothic" pitchFamily="34" charset="0"/>
-                <a:ea typeface="Yu Gothic" pitchFamily="34" charset="-122"/>
-                <a:cs typeface="Yu Gothic" pitchFamily="34" charset="-120"/>
-              </a:rPr>
-              <a:t>※ 各条件5回ずつ計15回の実行。LLMによる採点であり、統計的検定を行うにはまだ試行数が少ない。</a:t>
-            </a:r>
-            <a:endParaRPr lang="en-US" sz="1000" dirty="0"/>
-          </a:p>
-        </p:txBody>
-      </p:sp>
-      <p:sp>
-        <p:nvSpPr>
-          <p:cNvPr id="24" name="Text 18"/>
+              <a:t>「制度としては住民同士で相談してもらうのが基本だから、世話好きな住民さんが動いてくれるのはありがたいね。」</a:t>
+            </a:r>
+            <a:endParaRPr lang="en-US" sz="1300" dirty="0"/>
+          </a:p>
+        </p:txBody>
+      </p:sp>
+      <p:sp>
+        <p:nvSpPr>
+          <p:cNvPr id="18" name="Text 16"/>
           <p:cNvSpPr/>
           <p:nvPr/>
         </p:nvSpPr>
@@ -8688,7 +9668,7 @@
       </p:sp>
       <p:sp>
         <p:nvSpPr>
-          <p:cNvPr id="25" name="Text 19"/>
+          <p:cNvPr id="19" name="Text 17"/>
           <p:cNvSpPr/>
           <p:nvPr/>
         </p:nvSpPr>
@@ -8790,7 +9770,7 @@
                 <a:ea typeface="Yu Gothic" pitchFamily="34" charset="-122"/>
                 <a:cs typeface="Yu Gothic" pitchFamily="34" charset="-120"/>
               </a:rPr>
-              <a:t>「意味」から「経営」への翻訳</a:t>
+              <a:t>考察：4つの発見</a:t>
             </a:r>
             <a:endParaRPr lang="en-US" sz="3000" dirty="0"/>
           </a:p>
@@ -8798,100 +9778,22 @@
       </p:sp>
       <p:sp>
         <p:nvSpPr>
-          <p:cNvPr id="3" name="Text 1"/>
+          <p:cNvPr id="3" name="Shape 1"/>
           <p:cNvSpPr/>
           <p:nvPr/>
         </p:nvSpPr>
         <p:spPr>
           <a:xfrm>
             <a:off x="548640" y="1554480"/>
-            <a:ext cx="4937760" cy="320040"/>
-          </a:xfrm>
-          <a:prstGeom prst="rect">
-            <a:avLst/>
-          </a:prstGeom>
-          <a:noFill/>
-          <a:ln/>
-        </p:spPr>
-        <p:txBody>
-          <a:bodyPr wrap="square" lIns="0" tIns="0" rIns="0" bIns="0" rtlCol="0" anchor="ctr"/>
-          <a:lstStyle/>
-          <a:p>
-            <a:pPr indent="0" marL="0">
-              <a:buNone/>
-            </a:pPr>
-            <a:r>
-              <a:rPr lang="en-US" sz="1200" b="1" dirty="0">
-                <a:solidFill>
-                  <a:srgbClr val="E8A33D"/>
-                </a:solidFill>
-                <a:latin typeface="Yu Gothic" pitchFamily="34" charset="0"/>
-                <a:ea typeface="Yu Gothic" pitchFamily="34" charset="-122"/>
-                <a:cs typeface="Yu Gothic" pitchFamily="34" charset="-120"/>
-              </a:rPr>
-              <a:t>Human Value</a:t>
-            </a:r>
-            <a:endParaRPr lang="en-US" sz="1200" dirty="0"/>
-          </a:p>
-        </p:txBody>
-      </p:sp>
-      <p:sp>
-        <p:nvSpPr>
-          <p:cNvPr id="4" name="Text 2"/>
-          <p:cNvSpPr/>
-          <p:nvPr/>
-        </p:nvSpPr>
-        <p:spPr>
-          <a:xfrm>
-            <a:off x="6675120" y="1554480"/>
-            <a:ext cx="4937760" cy="320040"/>
-          </a:xfrm>
-          <a:prstGeom prst="rect">
-            <a:avLst/>
-          </a:prstGeom>
-          <a:noFill/>
-          <a:ln/>
-        </p:spPr>
-        <p:txBody>
-          <a:bodyPr wrap="square" lIns="0" tIns="0" rIns="0" bIns="0" rtlCol="0" anchor="ctr"/>
-          <a:lstStyle/>
-          <a:p>
-            <a:pPr algn="r" indent="0" marL="0">
-              <a:buNone/>
-            </a:pPr>
-            <a:r>
-              <a:rPr lang="en-US" sz="1200" b="1" dirty="0">
-                <a:solidFill>
-                  <a:srgbClr val="5A8FD6"/>
-                </a:solidFill>
-                <a:latin typeface="Yu Gothic" pitchFamily="34" charset="0"/>
-                <a:ea typeface="Yu Gothic" pitchFamily="34" charset="-122"/>
-                <a:cs typeface="Yu Gothic" pitchFamily="34" charset="-120"/>
-              </a:rPr>
-              <a:t>Corporate KPI</a:t>
-            </a:r>
-            <a:endParaRPr lang="en-US" sz="1200" dirty="0"/>
-          </a:p>
-        </p:txBody>
-      </p:sp>
-      <p:sp>
-        <p:nvSpPr>
-          <p:cNvPr id="5" name="Shape 3"/>
-          <p:cNvSpPr/>
-          <p:nvPr/>
-        </p:nvSpPr>
-        <p:spPr>
-          <a:xfrm>
-            <a:off x="548640" y="1965960"/>
-            <a:ext cx="4937760" cy="914400"/>
+            <a:ext cx="11091672" cy="1060704"/>
           </a:xfrm>
           <a:prstGeom prst="roundRect">
             <a:avLst>
-              <a:gd name="adj" fmla="val 12000"/>
+              <a:gd name="adj" fmla="val 10345"/>
             </a:avLst>
           </a:prstGeom>
           <a:solidFill>
-            <a:srgbClr val="1C2C4A"/>
+            <a:srgbClr val="16213A"/>
           </a:solidFill>
           <a:ln/>
           <a:effectLst>
@@ -8905,14 +9807,102 @@
       </p:sp>
       <p:sp>
         <p:nvSpPr>
-          <p:cNvPr id="6" name="Text 4"/>
-          <p:cNvSpPr/>
-          <p:nvPr/>
-        </p:nvSpPr>
-        <p:spPr>
-          <a:xfrm>
-            <a:off x="777240" y="1965960"/>
-            <a:ext cx="4480560" cy="914400"/>
+          <p:cNvPr id="4" name="Shape 2"/>
+          <p:cNvSpPr/>
+          <p:nvPr/>
+        </p:nvSpPr>
+        <p:spPr>
+          <a:xfrm>
+            <a:off x="960120" y="1810512"/>
+            <a:ext cx="548640" cy="548640"/>
+          </a:xfrm>
+          <a:prstGeom prst="ellipse">
+            <a:avLst/>
+          </a:prstGeom>
+          <a:solidFill>
+            <a:srgbClr val="E8A33D"/>
+          </a:solidFill>
+          <a:ln w="9525">
+            <a:solidFill>
+              <a:srgbClr val="E8A33D"/>
+            </a:solidFill>
+            <a:prstDash val="solid"/>
+          </a:ln>
+        </p:spPr>
+      </p:sp>
+      <p:pic>
+        <p:nvPicPr>
+          <p:cNvPr id="5" name="Image 0" descr="preencoded.png">    </p:cNvPr>
+          <p:cNvPicPr>
+            <a:picLocks noChangeAspect="1"/>
+          </p:cNvPicPr>
+          <p:nvPr/>
+        </p:nvPicPr>
+        <p:blipFill>
+          <a:blip r:embed="rId1"/>
+          <a:stretch>
+            <a:fillRect/>
+          </a:stretch>
+        </p:blipFill>
+        <p:spPr>
+          <a:xfrm>
+            <a:off x="1102766" y="1953158"/>
+            <a:ext cx="263347" cy="263347"/>
+          </a:xfrm>
+          <a:prstGeom prst="rect">
+            <a:avLst/>
+          </a:prstGeom>
+        </p:spPr>
+      </p:pic>
+      <p:sp>
+        <p:nvSpPr>
+          <p:cNvPr id="6" name="Text 3"/>
+          <p:cNvSpPr/>
+          <p:nvPr/>
+        </p:nvSpPr>
+        <p:spPr>
+          <a:xfrm>
+            <a:off x="1874520" y="1682496"/>
+            <a:ext cx="9509760" cy="384048"/>
+          </a:xfrm>
+          <a:prstGeom prst="rect">
+            <a:avLst/>
+          </a:prstGeom>
+          <a:noFill/>
+          <a:ln/>
+        </p:spPr>
+        <p:txBody>
+          <a:bodyPr wrap="square" lIns="0" tIns="0" rIns="0" bIns="0" rtlCol="0" anchor="ctr"/>
+          <a:lstStyle/>
+          <a:p>
+            <a:pPr indent="0" marL="0">
+              <a:buNone/>
+            </a:pPr>
+            <a:r>
+              <a:rPr lang="en-US" sz="1400" b="1" dirty="0">
+                <a:solidFill>
+                  <a:srgbClr val="FFFFFF"/>
+                </a:solidFill>
+                <a:latin typeface="Yu Gothic" pitchFamily="34" charset="0"/>
+                <a:ea typeface="Yu Gothic" pitchFamily="34" charset="-122"/>
+                <a:cs typeface="Yu Gothic" pitchFamily="34" charset="-120"/>
+              </a:rPr>
+              <a:t>依存の代償は、危機の前から発生している</a:t>
+            </a:r>
+            <a:endParaRPr lang="en-US" sz="1400" dirty="0"/>
+          </a:p>
+        </p:txBody>
+      </p:sp>
+      <p:sp>
+        <p:nvSpPr>
+          <p:cNvPr id="7" name="Text 4"/>
+          <p:cNvSpPr/>
+          <p:nvPr/>
+        </p:nvSpPr>
+        <p:spPr>
+          <a:xfrm>
+            <a:off x="1874520" y="2066544"/>
+            <a:ext cx="9509760" cy="530352"/>
           </a:xfrm>
           <a:prstGeom prst="rect">
             <a:avLst/>
@@ -8931,73 +9921,34 @@
               <a:buNone/>
             </a:pPr>
             <a:r>
-              <a:rPr lang="en-US" sz="1300" i="1" dirty="0">
-                <a:solidFill>
-                  <a:srgbClr val="F4C878"/>
-                </a:solidFill>
-                <a:latin typeface="Yu Gothic" pitchFamily="34" charset="0"/>
-                <a:ea typeface="Yu Gothic" pitchFamily="34" charset="-122"/>
-                <a:cs typeface="Yu Gothic" pitchFamily="34" charset="-120"/>
-              </a:rPr>
-              <a:t>「この人がいたことで、安心して活動できた」</a:t>
-            </a:r>
-            <a:endParaRPr lang="en-US" sz="1300" dirty="0"/>
-          </a:p>
-        </p:txBody>
-      </p:sp>
-      <p:sp>
-        <p:nvSpPr>
-          <p:cNvPr id="7" name="Text 5"/>
-          <p:cNvSpPr/>
-          <p:nvPr/>
-        </p:nvSpPr>
-        <p:spPr>
-          <a:xfrm>
-            <a:off x="5623560" y="1965960"/>
-            <a:ext cx="914400" cy="914400"/>
-          </a:xfrm>
-          <a:prstGeom prst="rect">
-            <a:avLst/>
-          </a:prstGeom>
-          <a:noFill/>
-          <a:ln/>
-        </p:spPr>
-        <p:txBody>
-          <a:bodyPr wrap="square" lIns="0" tIns="0" rIns="0" bIns="0" rtlCol="0" anchor="ctr"/>
-          <a:lstStyle/>
-          <a:p>
-            <a:pPr algn="ctr" indent="0" marL="0">
-              <a:buNone/>
-            </a:pPr>
-            <a:r>
-              <a:rPr lang="en-US" sz="2200" dirty="0">
-                <a:solidFill>
-                  <a:srgbClr val="9AA4C0"/>
-                </a:solidFill>
-                <a:latin typeface="Yu Gothic" pitchFamily="34" charset="0"/>
-                <a:ea typeface="Yu Gothic" pitchFamily="34" charset="-122"/>
-                <a:cs typeface="Yu Gothic" pitchFamily="34" charset="-120"/>
-              </a:rPr>
-              <a:t>→</a:t>
-            </a:r>
-            <a:endParaRPr lang="en-US" sz="2200" dirty="0"/>
-          </a:p>
-        </p:txBody>
-      </p:sp>
-      <p:sp>
-        <p:nvSpPr>
-          <p:cNvPr id="8" name="Shape 6"/>
-          <p:cNvSpPr/>
-          <p:nvPr/>
-        </p:nvSpPr>
-        <p:spPr>
-          <a:xfrm>
-            <a:off x="6675120" y="1965960"/>
-            <a:ext cx="4937760" cy="914400"/>
+              <a:rPr lang="en-US" sz="1150" dirty="0">
+                <a:solidFill>
+                  <a:srgbClr val="AFC9EE"/>
+                </a:solidFill>
+                <a:latin typeface="Yu Gothic" pitchFamily="34" charset="0"/>
+                <a:ea typeface="Yu Gothic" pitchFamily="34" charset="-122"/>
+                <a:cs typeface="Yu Gothic" pitchFamily="34" charset="-120"/>
+              </a:rPr>
+              <a:t>危機の起きないA条件でも救済者依存度は88でB条件（90）とほぼ同じ。壊れるのは危機の瞬間ではなく、運用設計の時点で決まっている。</a:t>
+            </a:r>
+            <a:endParaRPr lang="en-US" sz="1150" dirty="0"/>
+          </a:p>
+        </p:txBody>
+      </p:sp>
+      <p:sp>
+        <p:nvSpPr>
+          <p:cNvPr id="8" name="Shape 5"/>
+          <p:cNvSpPr/>
+          <p:nvPr/>
+        </p:nvSpPr>
+        <p:spPr>
+          <a:xfrm>
+            <a:off x="548640" y="2761488"/>
+            <a:ext cx="11091672" cy="1060704"/>
           </a:xfrm>
           <a:prstGeom prst="roundRect">
             <a:avLst>
-              <a:gd name="adj" fmla="val 12000"/>
+              <a:gd name="adj" fmla="val 10345"/>
             </a:avLst>
           </a:prstGeom>
           <a:solidFill>
@@ -9015,14 +9966,102 @@
       </p:sp>
       <p:sp>
         <p:nvSpPr>
-          <p:cNvPr id="9" name="Text 7"/>
-          <p:cNvSpPr/>
-          <p:nvPr/>
-        </p:nvSpPr>
-        <p:spPr>
-          <a:xfrm>
-            <a:off x="6903720" y="1965960"/>
-            <a:ext cx="4480560" cy="914400"/>
+          <p:cNvPr id="9" name="Shape 6"/>
+          <p:cNvSpPr/>
+          <p:nvPr/>
+        </p:nvSpPr>
+        <p:spPr>
+          <a:xfrm>
+            <a:off x="960120" y="3017520"/>
+            <a:ext cx="548640" cy="548640"/>
+          </a:xfrm>
+          <a:prstGeom prst="ellipse">
+            <a:avLst/>
+          </a:prstGeom>
+          <a:solidFill>
+            <a:srgbClr val="E8A33D"/>
+          </a:solidFill>
+          <a:ln w="9525">
+            <a:solidFill>
+              <a:srgbClr val="E8A33D"/>
+            </a:solidFill>
+            <a:prstDash val="solid"/>
+          </a:ln>
+        </p:spPr>
+      </p:sp>
+      <p:pic>
+        <p:nvPicPr>
+          <p:cNvPr id="10" name="Image 1" descr="preencoded.png">    </p:cNvPr>
+          <p:cNvPicPr>
+            <a:picLocks noChangeAspect="1"/>
+          </p:cNvPicPr>
+          <p:nvPr/>
+        </p:nvPicPr>
+        <p:blipFill>
+          <a:blip r:embed="rId2"/>
+          <a:stretch>
+            <a:fillRect/>
+          </a:stretch>
+        </p:blipFill>
+        <p:spPr>
+          <a:xfrm>
+            <a:off x="1102766" y="3160166"/>
+            <a:ext cx="263347" cy="263347"/>
+          </a:xfrm>
+          <a:prstGeom prst="rect">
+            <a:avLst/>
+          </a:prstGeom>
+        </p:spPr>
+      </p:pic>
+      <p:sp>
+        <p:nvSpPr>
+          <p:cNvPr id="11" name="Text 7"/>
+          <p:cNvSpPr/>
+          <p:nvPr/>
+        </p:nvSpPr>
+        <p:spPr>
+          <a:xfrm>
+            <a:off x="1874520" y="2889504"/>
+            <a:ext cx="9509760" cy="384048"/>
+          </a:xfrm>
+          <a:prstGeom prst="rect">
+            <a:avLst/>
+          </a:prstGeom>
+          <a:noFill/>
+          <a:ln/>
+        </p:spPr>
+        <p:txBody>
+          <a:bodyPr wrap="square" lIns="0" tIns="0" rIns="0" bIns="0" rtlCol="0" anchor="ctr"/>
+          <a:lstStyle/>
+          <a:p>
+            <a:pPr indent="0" marL="0">
+              <a:buNone/>
+            </a:pPr>
+            <a:r>
+              <a:rPr lang="en-US" sz="1400" b="1" dirty="0">
+                <a:solidFill>
+                  <a:srgbClr val="FFFFFF"/>
+                </a:solidFill>
+                <a:latin typeface="Yu Gothic" pitchFamily="34" charset="0"/>
+                <a:ea typeface="Yu Gothic" pitchFamily="34" charset="-122"/>
+                <a:cs typeface="Yu Gothic" pitchFamily="34" charset="-120"/>
+              </a:rPr>
+              <a:t>依存は安定し、自律は不安定である</a:t>
+            </a:r>
+            <a:endParaRPr lang="en-US" sz="1400" dirty="0"/>
+          </a:p>
+        </p:txBody>
+      </p:sp>
+      <p:sp>
+        <p:nvSpPr>
+          <p:cNvPr id="12" name="Text 8"/>
+          <p:cNvSpPr/>
+          <p:nvPr/>
+        </p:nvSpPr>
+        <p:spPr>
+          <a:xfrm>
+            <a:off x="1874520" y="3273552"/>
+            <a:ext cx="9509760" cy="530352"/>
           </a:xfrm>
           <a:prstGeom prst="rect">
             <a:avLst/>
@@ -9041,38 +10080,38 @@
               <a:buNone/>
             </a:pPr>
             <a:r>
-              <a:rPr lang="en-US" sz="1300" b="1" dirty="0">
-                <a:solidFill>
-                  <a:srgbClr val="5A8FD6"/>
-                </a:solidFill>
-                <a:latin typeface="Yu Gothic" pitchFamily="34" charset="0"/>
-                <a:ea typeface="Yu Gothic" pitchFamily="34" charset="-122"/>
-                <a:cs typeface="Yu Gothic" pitchFamily="34" charset="-120"/>
-              </a:rPr>
-              <a:t>オンボーディング成功・参加継続率の向上</a:t>
-            </a:r>
-            <a:endParaRPr lang="en-US" sz="1300" dirty="0"/>
-          </a:p>
-        </p:txBody>
-      </p:sp>
-      <p:sp>
-        <p:nvSpPr>
-          <p:cNvPr id="10" name="Shape 8"/>
-          <p:cNvSpPr/>
-          <p:nvPr/>
-        </p:nvSpPr>
-        <p:spPr>
-          <a:xfrm>
-            <a:off x="548640" y="3063240"/>
-            <a:ext cx="4937760" cy="914400"/>
+              <a:rPr lang="en-US" sz="1150" dirty="0">
+                <a:solidFill>
+                  <a:srgbClr val="AFC9EE"/>
+                </a:solidFill>
+                <a:latin typeface="Yu Gothic" pitchFamily="34" charset="0"/>
+                <a:ea typeface="Yu Gothic" pitchFamily="34" charset="-122"/>
+                <a:cs typeface="Yu Gothic" pitchFamily="34" charset="-120"/>
+              </a:rPr>
+              <a:t>A・Bの標準偏差はほぼ0で毎回きっちり再現される。一方Cは±20〜26。悪い状態のほうが「安定」しているという非対称性がある。</a:t>
+            </a:r>
+            <a:endParaRPr lang="en-US" sz="1150" dirty="0"/>
+          </a:p>
+        </p:txBody>
+      </p:sp>
+      <p:sp>
+        <p:nvSpPr>
+          <p:cNvPr id="13" name="Shape 9"/>
+          <p:cNvSpPr/>
+          <p:nvPr/>
+        </p:nvSpPr>
+        <p:spPr>
+          <a:xfrm>
+            <a:off x="548640" y="3968496"/>
+            <a:ext cx="11091672" cy="1060704"/>
           </a:xfrm>
           <a:prstGeom prst="roundRect">
             <a:avLst>
-              <a:gd name="adj" fmla="val 12000"/>
+              <a:gd name="adj" fmla="val 10345"/>
             </a:avLst>
           </a:prstGeom>
           <a:solidFill>
-            <a:srgbClr val="1C2C4A"/>
+            <a:srgbClr val="16213A"/>
           </a:solidFill>
           <a:ln/>
           <a:effectLst>
@@ -9086,14 +10125,102 @@
       </p:sp>
       <p:sp>
         <p:nvSpPr>
-          <p:cNvPr id="11" name="Text 9"/>
-          <p:cNvSpPr/>
-          <p:nvPr/>
-        </p:nvSpPr>
-        <p:spPr>
-          <a:xfrm>
-            <a:off x="777240" y="3063240"/>
-            <a:ext cx="4480560" cy="914400"/>
+          <p:cNvPr id="14" name="Shape 10"/>
+          <p:cNvSpPr/>
+          <p:nvPr/>
+        </p:nvSpPr>
+        <p:spPr>
+          <a:xfrm>
+            <a:off x="960120" y="4224528"/>
+            <a:ext cx="548640" cy="548640"/>
+          </a:xfrm>
+          <a:prstGeom prst="ellipse">
+            <a:avLst/>
+          </a:prstGeom>
+          <a:solidFill>
+            <a:srgbClr val="E8A33D"/>
+          </a:solidFill>
+          <a:ln w="9525">
+            <a:solidFill>
+              <a:srgbClr val="E8A33D"/>
+            </a:solidFill>
+            <a:prstDash val="solid"/>
+          </a:ln>
+        </p:spPr>
+      </p:sp>
+      <p:pic>
+        <p:nvPicPr>
+          <p:cNvPr id="15" name="Image 2" descr="preencoded.png">    </p:cNvPr>
+          <p:cNvPicPr>
+            <a:picLocks noChangeAspect="1"/>
+          </p:cNvPicPr>
+          <p:nvPr/>
+        </p:nvPicPr>
+        <p:blipFill>
+          <a:blip r:embed="rId3"/>
+          <a:stretch>
+            <a:fillRect/>
+          </a:stretch>
+        </p:blipFill>
+        <p:spPr>
+          <a:xfrm>
+            <a:off x="1102766" y="4367174"/>
+            <a:ext cx="263347" cy="263347"/>
+          </a:xfrm>
+          <a:prstGeom prst="rect">
+            <a:avLst/>
+          </a:prstGeom>
+        </p:spPr>
+      </p:pic>
+      <p:sp>
+        <p:nvSpPr>
+          <p:cNvPr id="16" name="Text 11"/>
+          <p:cNvSpPr/>
+          <p:nvPr/>
+        </p:nvSpPr>
+        <p:spPr>
+          <a:xfrm>
+            <a:off x="1874520" y="4096512"/>
+            <a:ext cx="9509760" cy="384048"/>
+          </a:xfrm>
+          <a:prstGeom prst="rect">
+            <a:avLst/>
+          </a:prstGeom>
+          <a:noFill/>
+          <a:ln/>
+        </p:spPr>
+        <p:txBody>
+          <a:bodyPr wrap="square" lIns="0" tIns="0" rIns="0" bIns="0" rtlCol="0" anchor="ctr"/>
+          <a:lstStyle/>
+          <a:p>
+            <a:pPr indent="0" marL="0">
+              <a:buNone/>
+            </a:pPr>
+            <a:r>
+              <a:rPr lang="en-US" sz="1400" b="1" dirty="0">
+                <a:solidFill>
+                  <a:srgbClr val="FFFFFF"/>
+                </a:solidFill>
+                <a:latin typeface="Yu Gothic" pitchFamily="34" charset="0"/>
+                <a:ea typeface="Yu Gothic" pitchFamily="34" charset="-122"/>
+                <a:cs typeface="Yu Gothic" pitchFamily="34" charset="-120"/>
+              </a:rPr>
+              <a:t>「大丈夫です」は安全のサインではなかった</a:t>
+            </a:r>
+            <a:endParaRPr lang="en-US" sz="1400" dirty="0"/>
+          </a:p>
+        </p:txBody>
+      </p:sp>
+      <p:sp>
+        <p:nvSpPr>
+          <p:cNvPr id="17" name="Text 12"/>
+          <p:cNvSpPr/>
+          <p:nvPr/>
+        </p:nvSpPr>
+        <p:spPr>
+          <a:xfrm>
+            <a:off x="1874520" y="4480560"/>
+            <a:ext cx="9509760" cy="530352"/>
           </a:xfrm>
           <a:prstGeom prst="rect">
             <a:avLst/>
@@ -9112,77 +10239,38 @@
               <a:buNone/>
             </a:pPr>
             <a:r>
-              <a:rPr lang="en-US" sz="1300" i="1" dirty="0">
-                <a:solidFill>
-                  <a:srgbClr val="F4C878"/>
-                </a:solidFill>
-                <a:latin typeface="Yu Gothic" pitchFamily="34" charset="0"/>
-                <a:ea typeface="Yu Gothic" pitchFamily="34" charset="-122"/>
-                <a:cs typeface="Yu Gothic" pitchFamily="34" charset="-120"/>
-              </a:rPr>
-              <a:t>「孤立せずに済んだ／対立が翻訳された」</a:t>
-            </a:r>
-            <a:endParaRPr lang="en-US" sz="1300" dirty="0"/>
-          </a:p>
-        </p:txBody>
-      </p:sp>
-      <p:sp>
-        <p:nvSpPr>
-          <p:cNvPr id="12" name="Text 10"/>
-          <p:cNvSpPr/>
-          <p:nvPr/>
-        </p:nvSpPr>
-        <p:spPr>
-          <a:xfrm>
-            <a:off x="5623560" y="3063240"/>
-            <a:ext cx="914400" cy="914400"/>
-          </a:xfrm>
-          <a:prstGeom prst="rect">
-            <a:avLst/>
-          </a:prstGeom>
-          <a:noFill/>
-          <a:ln/>
-        </p:spPr>
-        <p:txBody>
-          <a:bodyPr wrap="square" lIns="0" tIns="0" rIns="0" bIns="0" rtlCol="0" anchor="ctr"/>
-          <a:lstStyle/>
-          <a:p>
-            <a:pPr algn="ctr" indent="0" marL="0">
-              <a:buNone/>
-            </a:pPr>
-            <a:r>
-              <a:rPr lang="en-US" sz="2200" dirty="0">
-                <a:solidFill>
-                  <a:srgbClr val="9AA4C0"/>
-                </a:solidFill>
-                <a:latin typeface="Yu Gothic" pitchFamily="34" charset="0"/>
-                <a:ea typeface="Yu Gothic" pitchFamily="34" charset="-122"/>
-                <a:cs typeface="Yu Gothic" pitchFamily="34" charset="-120"/>
-              </a:rPr>
-              <a:t>→</a:t>
-            </a:r>
-            <a:endParaRPr lang="en-US" sz="2200" dirty="0"/>
-          </a:p>
-        </p:txBody>
-      </p:sp>
-      <p:sp>
-        <p:nvSpPr>
-          <p:cNvPr id="13" name="Shape 11"/>
-          <p:cNvSpPr/>
-          <p:nvPr/>
-        </p:nvSpPr>
-        <p:spPr>
-          <a:xfrm>
-            <a:off x="6675120" y="3063240"/>
-            <a:ext cx="4937760" cy="914400"/>
+              <a:rPr lang="en-US" sz="1150" dirty="0">
+                <a:solidFill>
+                  <a:srgbClr val="AFC9EE"/>
+                </a:solidFill>
+                <a:latin typeface="Yu Gothic" pitchFamily="34" charset="0"/>
+                <a:ea typeface="Yu Gothic" pitchFamily="34" charset="-122"/>
+                <a:cs typeface="Yu Gothic" pitchFamily="34" charset="-120"/>
+              </a:rPr>
+              <a:t>本人は全フェーズで「大丈夫」と言い続けながら、同じログで水路の詰まりを放置し「見てるだけ」と行動が止まっていた。</a:t>
+            </a:r>
+            <a:endParaRPr lang="en-US" sz="1150" dirty="0"/>
+          </a:p>
+        </p:txBody>
+      </p:sp>
+      <p:sp>
+        <p:nvSpPr>
+          <p:cNvPr id="18" name="Shape 13"/>
+          <p:cNvSpPr/>
+          <p:nvPr/>
+        </p:nvSpPr>
+        <p:spPr>
+          <a:xfrm>
+            <a:off x="548640" y="5175504"/>
+            <a:ext cx="11091672" cy="1060704"/>
           </a:xfrm>
           <a:prstGeom prst="roundRect">
             <a:avLst>
-              <a:gd name="adj" fmla="val 12000"/>
+              <a:gd name="adj" fmla="val 10345"/>
             </a:avLst>
           </a:prstGeom>
           <a:solidFill>
-            <a:srgbClr val="16213A"/>
+            <a:srgbClr val="1C2C4A"/>
           </a:solidFill>
           <a:ln/>
           <a:effectLst>
@@ -9196,14 +10284,102 @@
       </p:sp>
       <p:sp>
         <p:nvSpPr>
-          <p:cNvPr id="14" name="Text 12"/>
-          <p:cNvSpPr/>
-          <p:nvPr/>
-        </p:nvSpPr>
-        <p:spPr>
-          <a:xfrm>
-            <a:off x="6903720" y="3063240"/>
-            <a:ext cx="4480560" cy="914400"/>
+          <p:cNvPr id="19" name="Shape 14"/>
+          <p:cNvSpPr/>
+          <p:nvPr/>
+        </p:nvSpPr>
+        <p:spPr>
+          <a:xfrm>
+            <a:off x="960120" y="5431536"/>
+            <a:ext cx="548640" cy="548640"/>
+          </a:xfrm>
+          <a:prstGeom prst="ellipse">
+            <a:avLst/>
+          </a:prstGeom>
+          <a:solidFill>
+            <a:srgbClr val="E2665A"/>
+          </a:solidFill>
+          <a:ln w="9525">
+            <a:solidFill>
+              <a:srgbClr val="E2665A"/>
+            </a:solidFill>
+            <a:prstDash val="solid"/>
+          </a:ln>
+        </p:spPr>
+      </p:sp>
+      <p:pic>
+        <p:nvPicPr>
+          <p:cNvPr id="20" name="Image 3" descr="preencoded.png">    </p:cNvPr>
+          <p:cNvPicPr>
+            <a:picLocks noChangeAspect="1"/>
+          </p:cNvPicPr>
+          <p:nvPr/>
+        </p:nvPicPr>
+        <p:blipFill>
+          <a:blip r:embed="rId4"/>
+          <a:stretch>
+            <a:fillRect/>
+          </a:stretch>
+        </p:blipFill>
+        <p:spPr>
+          <a:xfrm>
+            <a:off x="1102766" y="5574182"/>
+            <a:ext cx="263347" cy="263347"/>
+          </a:xfrm>
+          <a:prstGeom prst="rect">
+            <a:avLst/>
+          </a:prstGeom>
+        </p:spPr>
+      </p:pic>
+      <p:sp>
+        <p:nvSpPr>
+          <p:cNvPr id="21" name="Text 15"/>
+          <p:cNvSpPr/>
+          <p:nvPr/>
+        </p:nvSpPr>
+        <p:spPr>
+          <a:xfrm>
+            <a:off x="1874520" y="5303520"/>
+            <a:ext cx="9509760" cy="384048"/>
+          </a:xfrm>
+          <a:prstGeom prst="rect">
+            <a:avLst/>
+          </a:prstGeom>
+          <a:noFill/>
+          <a:ln/>
+        </p:spPr>
+        <p:txBody>
+          <a:bodyPr wrap="square" lIns="0" tIns="0" rIns="0" bIns="0" rtlCol="0" anchor="ctr"/>
+          <a:lstStyle/>
+          <a:p>
+            <a:pPr indent="0" marL="0">
+              <a:buNone/>
+            </a:pPr>
+            <a:r>
+              <a:rPr lang="en-US" sz="1400" b="1" dirty="0">
+                <a:solidFill>
+                  <a:srgbClr val="FFFFFF"/>
+                </a:solidFill>
+                <a:latin typeface="Yu Gothic" pitchFamily="34" charset="0"/>
+                <a:ea typeface="Yu Gothic" pitchFamily="34" charset="-122"/>
+                <a:cs typeface="Yu Gothic" pitchFamily="34" charset="-120"/>
+              </a:rPr>
+              <a:t>声を上げにくい住民は救えた。ただし条件付きで</a:t>
+            </a:r>
+            <a:endParaRPr lang="en-US" sz="1400" dirty="0"/>
+          </a:p>
+        </p:txBody>
+      </p:sp>
+      <p:sp>
+        <p:nvSpPr>
+          <p:cNvPr id="22" name="Text 16"/>
+          <p:cNvSpPr/>
+          <p:nvPr/>
+        </p:nvSpPr>
+        <p:spPr>
+          <a:xfrm>
+            <a:off x="1874520" y="5687568"/>
+            <a:ext cx="9509760" cy="530352"/>
           </a:xfrm>
           <a:prstGeom prst="rect">
             <a:avLst/>
@@ -9222,101 +10398,30 @@
               <a:buNone/>
             </a:pPr>
             <a:r>
-              <a:rPr lang="en-US" sz="1300" b="1" dirty="0">
-                <a:solidFill>
-                  <a:srgbClr val="5A8FD6"/>
-                </a:solidFill>
-                <a:latin typeface="Yu Gothic" pitchFamily="34" charset="0"/>
-                <a:ea typeface="Yu Gothic" pitchFamily="34" charset="-122"/>
-                <a:cs typeface="Yu Gothic" pitchFamily="34" charset="-120"/>
-              </a:rPr>
-              <a:t>離脱コストの回避・炎上防止</a:t>
-            </a:r>
-            <a:endParaRPr lang="en-US" sz="1300" dirty="0"/>
-          </a:p>
-        </p:txBody>
-      </p:sp>
-      <p:sp>
-        <p:nvSpPr>
-          <p:cNvPr id="15" name="Shape 13"/>
-          <p:cNvSpPr/>
-          <p:nvPr/>
-        </p:nvSpPr>
-        <p:spPr>
-          <a:xfrm>
-            <a:off x="548640" y="4160520"/>
-            <a:ext cx="4937760" cy="914400"/>
-          </a:xfrm>
-          <a:prstGeom prst="roundRect">
-            <a:avLst>
-              <a:gd name="adj" fmla="val 12000"/>
-            </a:avLst>
-          </a:prstGeom>
-          <a:solidFill>
-            <a:srgbClr val="1C2C4A"/>
-          </a:solidFill>
-          <a:ln/>
-          <a:effectLst>
-            <a:outerShdw sx="100000" sy="100000" kx="0" ky="0" algn="bl" rotWithShape="0" blurRad="101600" dist="38100" dir="5400000">
-              <a:srgbClr val="000000">
-                <a:alpha val="35000"/>
-              </a:srgbClr>
-            </a:outerShdw>
-          </a:effectLst>
-        </p:spPr>
-      </p:sp>
-      <p:sp>
-        <p:nvSpPr>
-          <p:cNvPr id="16" name="Text 14"/>
-          <p:cNvSpPr/>
-          <p:nvPr/>
-        </p:nvSpPr>
-        <p:spPr>
-          <a:xfrm>
-            <a:off x="777240" y="4160520"/>
-            <a:ext cx="4480560" cy="914400"/>
-          </a:xfrm>
-          <a:prstGeom prst="rect">
-            <a:avLst/>
-          </a:prstGeom>
-          <a:noFill/>
-          <a:ln/>
-        </p:spPr>
-        <p:txBody>
-          <a:bodyPr wrap="square" lIns="0" tIns="0" rIns="0" bIns="0" rtlCol="0" anchor="ctr"/>
-          <a:lstStyle/>
-          <a:p>
-            <a:pPr indent="0" marL="0">
-              <a:lnSpc>
-                <a:spcPct val="120000"/>
-              </a:lnSpc>
-              <a:buNone/>
-            </a:pPr>
-            <a:r>
-              <a:rPr lang="en-US" sz="1300" i="1" dirty="0">
-                <a:solidFill>
-                  <a:srgbClr val="F4C878"/>
-                </a:solidFill>
-                <a:latin typeface="Yu Gothic" pitchFamily="34" charset="0"/>
-                <a:ea typeface="Yu Gothic" pitchFamily="34" charset="-122"/>
-                <a:cs typeface="Yu Gothic" pitchFamily="34" charset="-120"/>
-              </a:rPr>
-              <a:t>「自分でも問題に対処できるようになった」</a:t>
-            </a:r>
-            <a:endParaRPr lang="en-US" sz="1300" dirty="0"/>
-          </a:p>
-        </p:txBody>
-      </p:sp>
-      <p:sp>
-        <p:nvSpPr>
-          <p:cNvPr id="17" name="Text 15"/>
-          <p:cNvSpPr/>
-          <p:nvPr/>
-        </p:nvSpPr>
-        <p:spPr>
-          <a:xfrm>
-            <a:off x="5623560" y="4160520"/>
-            <a:ext cx="914400" cy="914400"/>
+              <a:rPr lang="en-US" sz="1150" dirty="0">
+                <a:solidFill>
+                  <a:srgbClr val="AFC9EE"/>
+                </a:solidFill>
+                <a:latin typeface="Yu Gothic" pitchFamily="34" charset="0"/>
+                <a:ea typeface="Yu Gothic" pitchFamily="34" charset="-122"/>
+                <a:cs typeface="Yu Gothic" pitchFamily="34" charset="-120"/>
+              </a:rPr>
+              <a:t>自律できた回では「助けを求められるか」が40→65〜70に上昇。救ったのは制度ではなく、救済者以外の相談相手が実際に現れたこと。</a:t>
+            </a:r>
+            <a:endParaRPr lang="en-US" sz="1150" dirty="0"/>
+          </a:p>
+        </p:txBody>
+      </p:sp>
+      <p:sp>
+        <p:nvSpPr>
+          <p:cNvPr id="23" name="Text 17"/>
+          <p:cNvSpPr/>
+          <p:nvPr/>
+        </p:nvSpPr>
+        <p:spPr>
+          <a:xfrm>
+            <a:off x="548640" y="6400800"/>
+            <a:ext cx="11091672" cy="292608"/>
           </a:xfrm>
           <a:prstGeom prst="rect">
             <a:avLst/>
@@ -9332,162 +10437,23 @@
               <a:buNone/>
             </a:pPr>
             <a:r>
-              <a:rPr lang="en-US" sz="2200" dirty="0">
-                <a:solidFill>
-                  <a:srgbClr val="9AA4C0"/>
-                </a:solidFill>
-                <a:latin typeface="Yu Gothic" pitchFamily="34" charset="0"/>
-                <a:ea typeface="Yu Gothic" pitchFamily="34" charset="-122"/>
-                <a:cs typeface="Yu Gothic" pitchFamily="34" charset="-120"/>
-              </a:rPr>
-              <a:t>→</a:t>
-            </a:r>
-            <a:endParaRPr lang="en-US" sz="2200" dirty="0"/>
-          </a:p>
-        </p:txBody>
-      </p:sp>
-      <p:sp>
-        <p:nvSpPr>
-          <p:cNvPr id="18" name="Shape 16"/>
-          <p:cNvSpPr/>
-          <p:nvPr/>
-        </p:nvSpPr>
-        <p:spPr>
-          <a:xfrm>
-            <a:off x="6675120" y="4160520"/>
-            <a:ext cx="4937760" cy="914400"/>
-          </a:xfrm>
-          <a:prstGeom prst="roundRect">
-            <a:avLst>
-              <a:gd name="adj" fmla="val 12000"/>
-            </a:avLst>
-          </a:prstGeom>
-          <a:solidFill>
-            <a:srgbClr val="16213A"/>
-          </a:solidFill>
-          <a:ln/>
-          <a:effectLst>
-            <a:outerShdw sx="100000" sy="100000" kx="0" ky="0" algn="bl" rotWithShape="0" blurRad="101600" dist="38100" dir="5400000">
-              <a:srgbClr val="000000">
-                <a:alpha val="35000"/>
-              </a:srgbClr>
-            </a:outerShdw>
-          </a:effectLst>
-        </p:spPr>
-      </p:sp>
-      <p:sp>
-        <p:nvSpPr>
-          <p:cNvPr id="19" name="Text 17"/>
-          <p:cNvSpPr/>
-          <p:nvPr/>
-        </p:nvSpPr>
-        <p:spPr>
-          <a:xfrm>
-            <a:off x="6903720" y="4160520"/>
-            <a:ext cx="4480560" cy="914400"/>
-          </a:xfrm>
-          <a:prstGeom prst="rect">
-            <a:avLst/>
-          </a:prstGeom>
-          <a:noFill/>
-          <a:ln/>
-        </p:spPr>
-        <p:txBody>
-          <a:bodyPr wrap="square" lIns="0" tIns="0" rIns="0" bIns="0" rtlCol="0" anchor="ctr"/>
-          <a:lstStyle/>
-          <a:p>
-            <a:pPr indent="0" marL="0">
-              <a:lnSpc>
-                <a:spcPct val="120000"/>
-              </a:lnSpc>
-              <a:buNone/>
-            </a:pPr>
-            <a:r>
-              <a:rPr lang="en-US" sz="1300" b="1" dirty="0">
-                <a:solidFill>
-                  <a:srgbClr val="5A8FD6"/>
-                </a:solidFill>
-                <a:latin typeface="Yu Gothic" pitchFamily="34" charset="0"/>
-                <a:ea typeface="Yu Gothic" pitchFamily="34" charset="-122"/>
-                <a:cs typeface="Yu Gothic" pitchFamily="34" charset="-120"/>
-              </a:rPr>
-              <a:t>組織のレジリエンス向上・意思決定の高速化</a:t>
-            </a:r>
-            <a:endParaRPr lang="en-US" sz="1300" dirty="0"/>
-          </a:p>
-        </p:txBody>
-      </p:sp>
-      <p:sp>
-        <p:nvSpPr>
-          <p:cNvPr id="20" name="Shape 18"/>
-          <p:cNvSpPr/>
-          <p:nvPr/>
-        </p:nvSpPr>
-        <p:spPr>
-          <a:xfrm>
-            <a:off x="548640" y="5303520"/>
-            <a:ext cx="11091672" cy="822960"/>
-          </a:xfrm>
-          <a:prstGeom prst="roundRect">
-            <a:avLst>
-              <a:gd name="adj" fmla="val 11111"/>
-            </a:avLst>
-          </a:prstGeom>
-          <a:solidFill>
-            <a:srgbClr val="16213A"/>
-          </a:solidFill>
-          <a:ln/>
-          <a:effectLst>
-            <a:outerShdw sx="100000" sy="100000" kx="0" ky="0" algn="bl" rotWithShape="0" blurRad="101600" dist="38100" dir="5400000">
-              <a:srgbClr val="000000">
-                <a:alpha val="35000"/>
-              </a:srgbClr>
-            </a:outerShdw>
-          </a:effectLst>
-        </p:spPr>
-      </p:sp>
-      <p:sp>
-        <p:nvSpPr>
-          <p:cNvPr id="21" name="Text 19"/>
-          <p:cNvSpPr/>
-          <p:nvPr/>
-        </p:nvSpPr>
-        <p:spPr>
-          <a:xfrm>
-            <a:off x="868680" y="5303520"/>
-            <a:ext cx="10515600" cy="822960"/>
-          </a:xfrm>
-          <a:prstGeom prst="rect">
-            <a:avLst/>
-          </a:prstGeom>
-          <a:noFill/>
-          <a:ln/>
-        </p:spPr>
-        <p:txBody>
-          <a:bodyPr wrap="square" lIns="0" tIns="0" rIns="0" bIns="0" rtlCol="0" anchor="ctr"/>
-          <a:lstStyle/>
-          <a:p>
-            <a:pPr indent="0" marL="0">
-              <a:buNone/>
-            </a:pPr>
-            <a:r>
-              <a:rPr lang="en-US" sz="1400" b="1" dirty="0">
-                <a:solidFill>
-                  <a:srgbClr val="FFFFFF"/>
-                </a:solidFill>
-                <a:latin typeface="Yu Gothic" pitchFamily="34" charset="0"/>
-                <a:ea typeface="Yu Gothic" pitchFamily="34" charset="-122"/>
-                <a:cs typeface="Yu Gothic" pitchFamily="34" charset="-120"/>
-              </a:rPr>
-              <a:t>人を支える行為は「美談」ではない。組織の持続可能性と安全保障に直結する。</a:t>
-            </a:r>
-            <a:endParaRPr lang="en-US" sz="1400" dirty="0"/>
-          </a:p>
-        </p:txBody>
-      </p:sp>
-      <p:sp>
-        <p:nvSpPr>
-          <p:cNvPr id="22" name="Text 20"/>
+              <a:rPr lang="en-US" sz="1000" dirty="0">
+                <a:solidFill>
+                  <a:srgbClr val="5B6480"/>
+                </a:solidFill>
+                <a:latin typeface="Yu Gothic" pitchFamily="34" charset="0"/>
+                <a:ea typeface="Yu Gothic" pitchFamily="34" charset="-122"/>
+                <a:cs typeface="Yu Gothic" pitchFamily="34" charset="-120"/>
+              </a:rPr>
+              <a:t>※ 各条件5回ずつ計15回の実行。LLMによる採点であり、統計的検定を行うにはまだ試行数が少ない。</a:t>
+            </a:r>
+            <a:endParaRPr lang="en-US" sz="1000" dirty="0"/>
+          </a:p>
+        </p:txBody>
+      </p:sp>
+      <p:sp>
+        <p:nvSpPr>
+          <p:cNvPr id="24" name="Text 18"/>
           <p:cNvSpPr/>
           <p:nvPr/>
         </p:nvSpPr>
@@ -9526,7 +10492,7 @@
       </p:sp>
       <p:sp>
         <p:nvSpPr>
-          <p:cNvPr id="23" name="Text 21"/>
+          <p:cNvPr id="25" name="Text 19"/>
           <p:cNvSpPr/>
           <p:nvPr/>
         </p:nvSpPr>
@@ -9628,7 +10594,7 @@
                 <a:ea typeface="Yu Gothic" pitchFamily="34" charset="-122"/>
                 <a:cs typeface="Yu Gothic" pitchFamily="34" charset="-120"/>
               </a:rPr>
-              <a:t>フラクタルな構造：村から国家の「メタ安全保障」へ</a:t>
+              <a:t>「意味」から「経営」への翻訳</a:t>
             </a:r>
             <a:endParaRPr lang="en-US" sz="3000" dirty="0"/>
           </a:p>
@@ -9636,22 +10602,100 @@
       </p:sp>
       <p:sp>
         <p:nvSpPr>
-          <p:cNvPr id="3" name="Shape 1"/>
-          <p:cNvSpPr/>
-          <p:nvPr/>
-        </p:nvSpPr>
-        <p:spPr>
-          <a:xfrm>
-            <a:off x="641452" y="1874520"/>
-            <a:ext cx="3429000" cy="2880360"/>
+          <p:cNvPr id="3" name="Text 1"/>
+          <p:cNvSpPr/>
+          <p:nvPr/>
+        </p:nvSpPr>
+        <p:spPr>
+          <a:xfrm>
+            <a:off x="548640" y="1554480"/>
+            <a:ext cx="4937760" cy="320040"/>
+          </a:xfrm>
+          <a:prstGeom prst="rect">
+            <a:avLst/>
+          </a:prstGeom>
+          <a:noFill/>
+          <a:ln/>
+        </p:spPr>
+        <p:txBody>
+          <a:bodyPr wrap="square" lIns="0" tIns="0" rIns="0" bIns="0" rtlCol="0" anchor="ctr"/>
+          <a:lstStyle/>
+          <a:p>
+            <a:pPr indent="0" marL="0">
+              <a:buNone/>
+            </a:pPr>
+            <a:r>
+              <a:rPr lang="en-US" sz="1200" b="1" dirty="0">
+                <a:solidFill>
+                  <a:srgbClr val="E8A33D"/>
+                </a:solidFill>
+                <a:latin typeface="Yu Gothic" pitchFamily="34" charset="0"/>
+                <a:ea typeface="Yu Gothic" pitchFamily="34" charset="-122"/>
+                <a:cs typeface="Yu Gothic" pitchFamily="34" charset="-120"/>
+              </a:rPr>
+              <a:t>Human Value</a:t>
+            </a:r>
+            <a:endParaRPr lang="en-US" sz="1200" dirty="0"/>
+          </a:p>
+        </p:txBody>
+      </p:sp>
+      <p:sp>
+        <p:nvSpPr>
+          <p:cNvPr id="4" name="Text 2"/>
+          <p:cNvSpPr/>
+          <p:nvPr/>
+        </p:nvSpPr>
+        <p:spPr>
+          <a:xfrm>
+            <a:off x="6675120" y="1554480"/>
+            <a:ext cx="4937760" cy="320040"/>
+          </a:xfrm>
+          <a:prstGeom prst="rect">
+            <a:avLst/>
+          </a:prstGeom>
+          <a:noFill/>
+          <a:ln/>
+        </p:spPr>
+        <p:txBody>
+          <a:bodyPr wrap="square" lIns="0" tIns="0" rIns="0" bIns="0" rtlCol="0" anchor="ctr"/>
+          <a:lstStyle/>
+          <a:p>
+            <a:pPr algn="r" indent="0" marL="0">
+              <a:buNone/>
+            </a:pPr>
+            <a:r>
+              <a:rPr lang="en-US" sz="1200" b="1" dirty="0">
+                <a:solidFill>
+                  <a:srgbClr val="5A8FD6"/>
+                </a:solidFill>
+                <a:latin typeface="Yu Gothic" pitchFamily="34" charset="0"/>
+                <a:ea typeface="Yu Gothic" pitchFamily="34" charset="-122"/>
+                <a:cs typeface="Yu Gothic" pitchFamily="34" charset="-120"/>
+              </a:rPr>
+              <a:t>Corporate KPI</a:t>
+            </a:r>
+            <a:endParaRPr lang="en-US" sz="1200" dirty="0"/>
+          </a:p>
+        </p:txBody>
+      </p:sp>
+      <p:sp>
+        <p:nvSpPr>
+          <p:cNvPr id="5" name="Shape 3"/>
+          <p:cNvSpPr/>
+          <p:nvPr/>
+        </p:nvSpPr>
+        <p:spPr>
+          <a:xfrm>
+            <a:off x="548640" y="1965960"/>
+            <a:ext cx="4937760" cy="914400"/>
           </a:xfrm>
           <a:prstGeom prst="roundRect">
             <a:avLst>
-              <a:gd name="adj" fmla="val 3810"/>
+              <a:gd name="adj" fmla="val 12000"/>
             </a:avLst>
           </a:prstGeom>
           <a:solidFill>
-            <a:srgbClr val="16213A"/>
+            <a:srgbClr val="1C2C4A"/>
           </a:solidFill>
           <a:ln/>
           <a:effectLst>
@@ -9665,107 +10709,56 @@
       </p:sp>
       <p:sp>
         <p:nvSpPr>
-          <p:cNvPr id="4" name="Shape 2"/>
-          <p:cNvSpPr/>
-          <p:nvPr/>
-        </p:nvSpPr>
-        <p:spPr>
-          <a:xfrm>
-            <a:off x="1450696" y="1746504"/>
-            <a:ext cx="1810512" cy="1810512"/>
-          </a:xfrm>
-          <a:prstGeom prst="ellipse">
-            <a:avLst/>
-          </a:prstGeom>
-          <a:solidFill>
-            <a:srgbClr val="1BAF7A">
-              <a:alpha val="12000"/>
-            </a:srgbClr>
-          </a:solidFill>
-          <a:ln/>
-        </p:spPr>
-      </p:sp>
-      <p:sp>
-        <p:nvSpPr>
-          <p:cNvPr id="5" name="Shape 3"/>
-          <p:cNvSpPr/>
-          <p:nvPr/>
-        </p:nvSpPr>
-        <p:spPr>
-          <a:xfrm>
-            <a:off x="1697584" y="1993392"/>
-            <a:ext cx="1316736" cy="1316736"/>
-          </a:xfrm>
-          <a:prstGeom prst="ellipse">
-            <a:avLst/>
-          </a:prstGeom>
-          <a:solidFill>
-            <a:srgbClr val="1BAF7A">
-              <a:alpha val="22000"/>
-            </a:srgbClr>
-          </a:solidFill>
-          <a:ln/>
-        </p:spPr>
-      </p:sp>
-      <p:sp>
-        <p:nvSpPr>
-          <p:cNvPr id="6" name="Shape 4"/>
-          <p:cNvSpPr/>
-          <p:nvPr/>
-        </p:nvSpPr>
-        <p:spPr>
-          <a:xfrm>
-            <a:off x="1944472" y="2240280"/>
-            <a:ext cx="822960" cy="822960"/>
-          </a:xfrm>
-          <a:prstGeom prst="ellipse">
-            <a:avLst/>
-          </a:prstGeom>
-          <a:solidFill>
-            <a:srgbClr val="1BAF7A"/>
-          </a:solidFill>
-          <a:ln w="9525">
-            <a:solidFill>
-              <a:srgbClr val="1BAF7A"/>
-            </a:solidFill>
-            <a:prstDash val="solid"/>
-          </a:ln>
-        </p:spPr>
-      </p:sp>
-      <p:pic>
-        <p:nvPicPr>
-          <p:cNvPr id="7" name="Image 0" descr="preencoded.png">    </p:cNvPr>
-          <p:cNvPicPr>
-            <a:picLocks noChangeAspect="1"/>
-          </p:cNvPicPr>
-          <p:nvPr/>
-        </p:nvPicPr>
-        <p:blipFill>
-          <a:blip r:embed="rId1"/>
-          <a:stretch>
-            <a:fillRect/>
-          </a:stretch>
-        </p:blipFill>
-        <p:spPr>
-          <a:xfrm>
-            <a:off x="2158441" y="2454250"/>
-            <a:ext cx="395021" cy="395021"/>
-          </a:xfrm>
-          <a:prstGeom prst="rect">
-            <a:avLst/>
-          </a:prstGeom>
-        </p:spPr>
-      </p:pic>
-      <p:sp>
-        <p:nvSpPr>
-          <p:cNvPr id="8" name="Text 5"/>
-          <p:cNvSpPr/>
-          <p:nvPr/>
-        </p:nvSpPr>
-        <p:spPr>
-          <a:xfrm>
-            <a:off x="778612" y="3200400"/>
-            <a:ext cx="3154680" cy="411480"/>
+          <p:cNvPr id="6" name="Text 4"/>
+          <p:cNvSpPr/>
+          <p:nvPr/>
+        </p:nvSpPr>
+        <p:spPr>
+          <a:xfrm>
+            <a:off x="777240" y="1965960"/>
+            <a:ext cx="4480560" cy="914400"/>
+          </a:xfrm>
+          <a:prstGeom prst="rect">
+            <a:avLst/>
+          </a:prstGeom>
+          <a:noFill/>
+          <a:ln/>
+        </p:spPr>
+        <p:txBody>
+          <a:bodyPr wrap="square" lIns="0" tIns="0" rIns="0" bIns="0" rtlCol="0" anchor="ctr"/>
+          <a:lstStyle/>
+          <a:p>
+            <a:pPr indent="0" marL="0">
+              <a:lnSpc>
+                <a:spcPct val="120000"/>
+              </a:lnSpc>
+              <a:buNone/>
+            </a:pPr>
+            <a:r>
+              <a:rPr lang="en-US" sz="1300" i="1" dirty="0">
+                <a:solidFill>
+                  <a:srgbClr val="F4C878"/>
+                </a:solidFill>
+                <a:latin typeface="Yu Gothic" pitchFamily="34" charset="0"/>
+                <a:ea typeface="Yu Gothic" pitchFamily="34" charset="-122"/>
+                <a:cs typeface="Yu Gothic" pitchFamily="34" charset="-120"/>
+              </a:rPr>
+              <a:t>「この人がいたことで、安心して活動できた」</a:t>
+            </a:r>
+            <a:endParaRPr lang="en-US" sz="1300" dirty="0"/>
+          </a:p>
+        </p:txBody>
+      </p:sp>
+      <p:sp>
+        <p:nvSpPr>
+          <p:cNvPr id="7" name="Text 5"/>
+          <p:cNvSpPr/>
+          <p:nvPr/>
+        </p:nvSpPr>
+        <p:spPr>
+          <a:xfrm>
+            <a:off x="5623560" y="1965960"/>
+            <a:ext cx="914400" cy="914400"/>
           </a:xfrm>
           <a:prstGeom prst="rect">
             <a:avLst/>
@@ -9781,76 +10774,34 @@
               <a:buNone/>
             </a:pPr>
             <a:r>
-              <a:rPr lang="en-US" sz="1700" b="1" dirty="0">
-                <a:solidFill>
-                  <a:srgbClr val="FFFFFF"/>
-                </a:solidFill>
-                <a:latin typeface="Yu Gothic" pitchFamily="34" charset="0"/>
-                <a:ea typeface="Yu Gothic" pitchFamily="34" charset="-122"/>
-                <a:cs typeface="Yu Gothic" pitchFamily="34" charset="-120"/>
-              </a:rPr>
-              <a:t>村</a:t>
-            </a:r>
-            <a:endParaRPr lang="en-US" sz="1700" dirty="0"/>
-          </a:p>
-        </p:txBody>
-      </p:sp>
-      <p:sp>
-        <p:nvSpPr>
-          <p:cNvPr id="9" name="Text 6"/>
-          <p:cNvSpPr/>
-          <p:nvPr/>
-        </p:nvSpPr>
-        <p:spPr>
-          <a:xfrm>
-            <a:off x="915772" y="3657600"/>
-            <a:ext cx="2880360" cy="914400"/>
-          </a:xfrm>
-          <a:prstGeom prst="rect">
-            <a:avLst/>
-          </a:prstGeom>
-          <a:noFill/>
-          <a:ln/>
-        </p:spPr>
-        <p:txBody>
-          <a:bodyPr wrap="square" lIns="0" tIns="0" rIns="0" bIns="0" rtlCol="0" anchor="ctr"/>
-          <a:lstStyle/>
-          <a:p>
-            <a:pPr algn="ctr" indent="0" marL="0">
-              <a:lnSpc>
-                <a:spcPct val="130000"/>
-              </a:lnSpc>
-              <a:buNone/>
-            </a:pPr>
-            <a:r>
-              <a:rPr lang="en-US" sz="1300" dirty="0">
-                <a:solidFill>
-                  <a:srgbClr val="AFC9EE"/>
-                </a:solidFill>
-                <a:latin typeface="Yu Gothic" pitchFamily="34" charset="0"/>
-                <a:ea typeface="Yu Gothic" pitchFamily="34" charset="-122"/>
-                <a:cs typeface="Yu Gothic" pitchFamily="34" charset="-120"/>
-              </a:rPr>
-              <a:t>「世話焼きへの過度な依存」と疲弊</a:t>
-            </a:r>
-            <a:endParaRPr lang="en-US" sz="1300" dirty="0"/>
-          </a:p>
-        </p:txBody>
-      </p:sp>
-      <p:sp>
-        <p:nvSpPr>
-          <p:cNvPr id="10" name="Shape 7"/>
-          <p:cNvSpPr/>
-          <p:nvPr/>
-        </p:nvSpPr>
-        <p:spPr>
-          <a:xfrm>
-            <a:off x="4381348" y="1874520"/>
-            <a:ext cx="3429000" cy="2880360"/>
+              <a:rPr lang="en-US" sz="2200" dirty="0">
+                <a:solidFill>
+                  <a:srgbClr val="9AA4C0"/>
+                </a:solidFill>
+                <a:latin typeface="Yu Gothic" pitchFamily="34" charset="0"/>
+                <a:ea typeface="Yu Gothic" pitchFamily="34" charset="-122"/>
+                <a:cs typeface="Yu Gothic" pitchFamily="34" charset="-120"/>
+              </a:rPr>
+              <a:t>→</a:t>
+            </a:r>
+            <a:endParaRPr lang="en-US" sz="2200" dirty="0"/>
+          </a:p>
+        </p:txBody>
+      </p:sp>
+      <p:sp>
+        <p:nvSpPr>
+          <p:cNvPr id="8" name="Shape 6"/>
+          <p:cNvSpPr/>
+          <p:nvPr/>
+        </p:nvSpPr>
+        <p:spPr>
+          <a:xfrm>
+            <a:off x="6675120" y="1965960"/>
+            <a:ext cx="4937760" cy="914400"/>
           </a:xfrm>
           <a:prstGeom prst="roundRect">
             <a:avLst>
-              <a:gd name="adj" fmla="val 3810"/>
+              <a:gd name="adj" fmla="val 12000"/>
             </a:avLst>
           </a:prstGeom>
           <a:solidFill>
@@ -9868,173 +10819,41 @@
       </p:sp>
       <p:sp>
         <p:nvSpPr>
-          <p:cNvPr id="11" name="Shape 8"/>
-          <p:cNvSpPr/>
-          <p:nvPr/>
-        </p:nvSpPr>
-        <p:spPr>
-          <a:xfrm>
-            <a:off x="5190592" y="1746504"/>
-            <a:ext cx="1810512" cy="1810512"/>
-          </a:xfrm>
-          <a:prstGeom prst="ellipse">
-            <a:avLst/>
-          </a:prstGeom>
-          <a:solidFill>
-            <a:srgbClr val="2A78D6">
-              <a:alpha val="12000"/>
-            </a:srgbClr>
-          </a:solidFill>
-          <a:ln/>
-        </p:spPr>
-      </p:sp>
-      <p:sp>
-        <p:nvSpPr>
-          <p:cNvPr id="12" name="Shape 9"/>
-          <p:cNvSpPr/>
-          <p:nvPr/>
-        </p:nvSpPr>
-        <p:spPr>
-          <a:xfrm>
-            <a:off x="5437480" y="1993392"/>
-            <a:ext cx="1316736" cy="1316736"/>
-          </a:xfrm>
-          <a:prstGeom prst="ellipse">
-            <a:avLst/>
-          </a:prstGeom>
-          <a:solidFill>
-            <a:srgbClr val="2A78D6">
-              <a:alpha val="22000"/>
-            </a:srgbClr>
-          </a:solidFill>
-          <a:ln/>
-        </p:spPr>
-      </p:sp>
-      <p:sp>
-        <p:nvSpPr>
-          <p:cNvPr id="13" name="Shape 10"/>
-          <p:cNvSpPr/>
-          <p:nvPr/>
-        </p:nvSpPr>
-        <p:spPr>
-          <a:xfrm>
-            <a:off x="5684368" y="2240280"/>
-            <a:ext cx="822960" cy="822960"/>
-          </a:xfrm>
-          <a:prstGeom prst="ellipse">
-            <a:avLst/>
-          </a:prstGeom>
-          <a:solidFill>
-            <a:srgbClr val="2A78D6"/>
-          </a:solidFill>
-          <a:ln w="9525">
-            <a:solidFill>
-              <a:srgbClr val="2A78D6"/>
-            </a:solidFill>
-            <a:prstDash val="solid"/>
-          </a:ln>
-        </p:spPr>
-      </p:sp>
-      <p:pic>
-        <p:nvPicPr>
-          <p:cNvPr id="14" name="Image 1" descr="preencoded.png">    </p:cNvPr>
-          <p:cNvPicPr>
-            <a:picLocks noChangeAspect="1"/>
-          </p:cNvPicPr>
-          <p:nvPr/>
-        </p:nvPicPr>
-        <p:blipFill>
-          <a:blip r:embed="rId2"/>
-          <a:stretch>
-            <a:fillRect/>
-          </a:stretch>
-        </p:blipFill>
-        <p:spPr>
-          <a:xfrm>
-            <a:off x="5898337" y="2454250"/>
-            <a:ext cx="395021" cy="395021"/>
-          </a:xfrm>
-          <a:prstGeom prst="rect">
-            <a:avLst/>
-          </a:prstGeom>
-        </p:spPr>
-      </p:pic>
-      <p:sp>
-        <p:nvSpPr>
-          <p:cNvPr id="15" name="Text 11"/>
-          <p:cNvSpPr/>
-          <p:nvPr/>
-        </p:nvSpPr>
-        <p:spPr>
-          <a:xfrm>
-            <a:off x="4518508" y="3200400"/>
-            <a:ext cx="3154680" cy="411480"/>
-          </a:xfrm>
-          <a:prstGeom prst="rect">
-            <a:avLst/>
-          </a:prstGeom>
-          <a:noFill/>
-          <a:ln/>
-        </p:spPr>
-        <p:txBody>
-          <a:bodyPr wrap="square" lIns="0" tIns="0" rIns="0" bIns="0" rtlCol="0" anchor="ctr"/>
-          <a:lstStyle/>
-          <a:p>
-            <a:pPr algn="ctr" indent="0" marL="0">
-              <a:buNone/>
-            </a:pPr>
-            <a:r>
-              <a:rPr lang="en-US" sz="1700" b="1" dirty="0">
-                <a:solidFill>
-                  <a:srgbClr val="FFFFFF"/>
-                </a:solidFill>
-                <a:latin typeface="Yu Gothic" pitchFamily="34" charset="0"/>
-                <a:ea typeface="Yu Gothic" pitchFamily="34" charset="-122"/>
-                <a:cs typeface="Yu Gothic" pitchFamily="34" charset="-120"/>
-              </a:rPr>
-              <a:t>都市</a:t>
-            </a:r>
-            <a:endParaRPr lang="en-US" sz="1700" dirty="0"/>
-          </a:p>
-        </p:txBody>
-      </p:sp>
-      <p:sp>
-        <p:nvSpPr>
-          <p:cNvPr id="16" name="Text 12"/>
-          <p:cNvSpPr/>
-          <p:nvPr/>
-        </p:nvSpPr>
-        <p:spPr>
-          <a:xfrm>
-            <a:off x="4655668" y="3657600"/>
-            <a:ext cx="2880360" cy="914400"/>
-          </a:xfrm>
-          <a:prstGeom prst="rect">
-            <a:avLst/>
-          </a:prstGeom>
-          <a:noFill/>
-          <a:ln/>
-        </p:spPr>
-        <p:txBody>
-          <a:bodyPr wrap="square" lIns="0" tIns="0" rIns="0" bIns="0" rtlCol="0" anchor="ctr"/>
-          <a:lstStyle/>
-          <a:p>
-            <a:pPr algn="ctr" indent="0" marL="0">
+          <p:cNvPr id="9" name="Text 7"/>
+          <p:cNvSpPr/>
+          <p:nvPr/>
+        </p:nvSpPr>
+        <p:spPr>
+          <a:xfrm>
+            <a:off x="6903720" y="1965960"/>
+            <a:ext cx="4480560" cy="914400"/>
+          </a:xfrm>
+          <a:prstGeom prst="rect">
+            <a:avLst/>
+          </a:prstGeom>
+          <a:noFill/>
+          <a:ln/>
+        </p:spPr>
+        <p:txBody>
+          <a:bodyPr wrap="square" lIns="0" tIns="0" rIns="0" bIns="0" rtlCol="0" anchor="ctr"/>
+          <a:lstStyle/>
+          <a:p>
+            <a:pPr indent="0" marL="0">
               <a:lnSpc>
-                <a:spcPct val="130000"/>
+                <a:spcPct val="120000"/>
               </a:lnSpc>
               <a:buNone/>
             </a:pPr>
             <a:r>
-              <a:rPr lang="en-US" sz="1300" dirty="0">
-                <a:solidFill>
-                  <a:srgbClr val="AFC9EE"/>
-                </a:solidFill>
-                <a:latin typeface="Yu Gothic" pitchFamily="34" charset="0"/>
-                <a:ea typeface="Yu Gothic" pitchFamily="34" charset="-122"/>
-                <a:cs typeface="Yu Gothic" pitchFamily="34" charset="-120"/>
-              </a:rPr>
-              <a:t>「支援制度の複雑化」と、誰にも届かないSOS</a:t>
+              <a:rPr lang="en-US" sz="1300" b="1" dirty="0">
+                <a:solidFill>
+                  <a:srgbClr val="5A8FD6"/>
+                </a:solidFill>
+                <a:latin typeface="Yu Gothic" pitchFamily="34" charset="0"/>
+                <a:ea typeface="Yu Gothic" pitchFamily="34" charset="-122"/>
+                <a:cs typeface="Yu Gothic" pitchFamily="34" charset="-120"/>
+              </a:rPr>
+              <a:t>オンボーディング成功・参加継続率の向上</a:t>
             </a:r>
             <a:endParaRPr lang="en-US" sz="1300" dirty="0"/>
           </a:p>
@@ -10042,22 +10861,22 @@
       </p:sp>
       <p:sp>
         <p:nvSpPr>
-          <p:cNvPr id="17" name="Shape 13"/>
-          <p:cNvSpPr/>
-          <p:nvPr/>
-        </p:nvSpPr>
-        <p:spPr>
-          <a:xfrm>
-            <a:off x="8121244" y="1874520"/>
-            <a:ext cx="3429000" cy="2880360"/>
+          <p:cNvPr id="10" name="Shape 8"/>
+          <p:cNvSpPr/>
+          <p:nvPr/>
+        </p:nvSpPr>
+        <p:spPr>
+          <a:xfrm>
+            <a:off x="548640" y="3063240"/>
+            <a:ext cx="4937760" cy="914400"/>
           </a:xfrm>
           <a:prstGeom prst="roundRect">
             <a:avLst>
-              <a:gd name="adj" fmla="val 3810"/>
+              <a:gd name="adj" fmla="val 12000"/>
             </a:avLst>
           </a:prstGeom>
           <a:solidFill>
-            <a:srgbClr val="16213A"/>
+            <a:srgbClr val="1C2C4A"/>
           </a:solidFill>
           <a:ln/>
           <a:effectLst>
@@ -10071,107 +10890,56 @@
       </p:sp>
       <p:sp>
         <p:nvSpPr>
-          <p:cNvPr id="18" name="Shape 14"/>
-          <p:cNvSpPr/>
-          <p:nvPr/>
-        </p:nvSpPr>
-        <p:spPr>
-          <a:xfrm>
-            <a:off x="8930488" y="1746504"/>
-            <a:ext cx="1810512" cy="1810512"/>
-          </a:xfrm>
-          <a:prstGeom prst="ellipse">
-            <a:avLst/>
-          </a:prstGeom>
-          <a:solidFill>
-            <a:srgbClr val="EB6834">
-              <a:alpha val="12000"/>
-            </a:srgbClr>
-          </a:solidFill>
-          <a:ln/>
-        </p:spPr>
-      </p:sp>
-      <p:sp>
-        <p:nvSpPr>
-          <p:cNvPr id="19" name="Shape 15"/>
-          <p:cNvSpPr/>
-          <p:nvPr/>
-        </p:nvSpPr>
-        <p:spPr>
-          <a:xfrm>
-            <a:off x="9177376" y="1993392"/>
-            <a:ext cx="1316736" cy="1316736"/>
-          </a:xfrm>
-          <a:prstGeom prst="ellipse">
-            <a:avLst/>
-          </a:prstGeom>
-          <a:solidFill>
-            <a:srgbClr val="EB6834">
-              <a:alpha val="22000"/>
-            </a:srgbClr>
-          </a:solidFill>
-          <a:ln/>
-        </p:spPr>
-      </p:sp>
-      <p:sp>
-        <p:nvSpPr>
-          <p:cNvPr id="20" name="Shape 16"/>
-          <p:cNvSpPr/>
-          <p:nvPr/>
-        </p:nvSpPr>
-        <p:spPr>
-          <a:xfrm>
-            <a:off x="9424264" y="2240280"/>
-            <a:ext cx="822960" cy="822960"/>
-          </a:xfrm>
-          <a:prstGeom prst="ellipse">
-            <a:avLst/>
-          </a:prstGeom>
-          <a:solidFill>
-            <a:srgbClr val="EB6834"/>
-          </a:solidFill>
-          <a:ln w="9525">
-            <a:solidFill>
-              <a:srgbClr val="EB6834"/>
-            </a:solidFill>
-            <a:prstDash val="solid"/>
-          </a:ln>
-        </p:spPr>
-      </p:sp>
-      <p:pic>
-        <p:nvPicPr>
-          <p:cNvPr id="21" name="Image 2" descr="preencoded.png">    </p:cNvPr>
-          <p:cNvPicPr>
-            <a:picLocks noChangeAspect="1"/>
-          </p:cNvPicPr>
-          <p:nvPr/>
-        </p:nvPicPr>
-        <p:blipFill>
-          <a:blip r:embed="rId3"/>
-          <a:stretch>
-            <a:fillRect/>
-          </a:stretch>
-        </p:blipFill>
-        <p:spPr>
-          <a:xfrm>
-            <a:off x="9638233" y="2454250"/>
-            <a:ext cx="395021" cy="395021"/>
-          </a:xfrm>
-          <a:prstGeom prst="rect">
-            <a:avLst/>
-          </a:prstGeom>
-        </p:spPr>
-      </p:pic>
-      <p:sp>
-        <p:nvSpPr>
-          <p:cNvPr id="22" name="Text 17"/>
-          <p:cNvSpPr/>
-          <p:nvPr/>
-        </p:nvSpPr>
-        <p:spPr>
-          <a:xfrm>
-            <a:off x="8258404" y="3200400"/>
-            <a:ext cx="3154680" cy="411480"/>
+          <p:cNvPr id="11" name="Text 9"/>
+          <p:cNvSpPr/>
+          <p:nvPr/>
+        </p:nvSpPr>
+        <p:spPr>
+          <a:xfrm>
+            <a:off x="777240" y="3063240"/>
+            <a:ext cx="4480560" cy="914400"/>
+          </a:xfrm>
+          <a:prstGeom prst="rect">
+            <a:avLst/>
+          </a:prstGeom>
+          <a:noFill/>
+          <a:ln/>
+        </p:spPr>
+        <p:txBody>
+          <a:bodyPr wrap="square" lIns="0" tIns="0" rIns="0" bIns="0" rtlCol="0" anchor="ctr"/>
+          <a:lstStyle/>
+          <a:p>
+            <a:pPr indent="0" marL="0">
+              <a:lnSpc>
+                <a:spcPct val="120000"/>
+              </a:lnSpc>
+              <a:buNone/>
+            </a:pPr>
+            <a:r>
+              <a:rPr lang="en-US" sz="1300" i="1" dirty="0">
+                <a:solidFill>
+                  <a:srgbClr val="F4C878"/>
+                </a:solidFill>
+                <a:latin typeface="Yu Gothic" pitchFamily="34" charset="0"/>
+                <a:ea typeface="Yu Gothic" pitchFamily="34" charset="-122"/>
+                <a:cs typeface="Yu Gothic" pitchFamily="34" charset="-120"/>
+              </a:rPr>
+              <a:t>「孤立せずに済んだ／対立が翻訳された」</a:t>
+            </a:r>
+            <a:endParaRPr lang="en-US" sz="1300" dirty="0"/>
+          </a:p>
+        </p:txBody>
+      </p:sp>
+      <p:sp>
+        <p:nvSpPr>
+          <p:cNvPr id="12" name="Text 10"/>
+          <p:cNvSpPr/>
+          <p:nvPr/>
+        </p:nvSpPr>
+        <p:spPr>
+          <a:xfrm>
+            <a:off x="5623560" y="3063240"/>
+            <a:ext cx="914400" cy="914400"/>
           </a:xfrm>
           <a:prstGeom prst="rect">
             <a:avLst/>
@@ -10187,80 +10955,38 @@
               <a:buNone/>
             </a:pPr>
             <a:r>
-              <a:rPr lang="en-US" sz="1700" b="1" dirty="0">
-                <a:solidFill>
-                  <a:srgbClr val="FFFFFF"/>
-                </a:solidFill>
-                <a:latin typeface="Yu Gothic" pitchFamily="34" charset="0"/>
-                <a:ea typeface="Yu Gothic" pitchFamily="34" charset="-122"/>
-                <a:cs typeface="Yu Gothic" pitchFamily="34" charset="-120"/>
-              </a:rPr>
-              <a:t>国</a:t>
-            </a:r>
-            <a:endParaRPr lang="en-US" sz="1700" dirty="0"/>
-          </a:p>
-        </p:txBody>
-      </p:sp>
-      <p:sp>
-        <p:nvSpPr>
-          <p:cNvPr id="23" name="Text 18"/>
-          <p:cNvSpPr/>
-          <p:nvPr/>
-        </p:nvSpPr>
-        <p:spPr>
-          <a:xfrm>
-            <a:off x="8395564" y="3657600"/>
-            <a:ext cx="2880360" cy="914400"/>
-          </a:xfrm>
-          <a:prstGeom prst="rect">
-            <a:avLst/>
-          </a:prstGeom>
-          <a:noFill/>
-          <a:ln/>
-        </p:spPr>
-        <p:txBody>
-          <a:bodyPr wrap="square" lIns="0" tIns="0" rIns="0" bIns="0" rtlCol="0" anchor="ctr"/>
-          <a:lstStyle/>
-          <a:p>
-            <a:pPr algn="ctr" indent="0" marL="0">
-              <a:lnSpc>
-                <a:spcPct val="130000"/>
-              </a:lnSpc>
-              <a:buNone/>
-            </a:pPr>
-            <a:r>
-              <a:rPr lang="en-US" sz="1300" dirty="0">
-                <a:solidFill>
-                  <a:srgbClr val="AFC9EE"/>
-                </a:solidFill>
-                <a:latin typeface="Yu Gothic" pitchFamily="34" charset="0"/>
-                <a:ea typeface="Yu Gothic" pitchFamily="34" charset="-122"/>
-                <a:cs typeface="Yu Gothic" pitchFamily="34" charset="-120"/>
-              </a:rPr>
-              <a:t>「権力の集中」と、強い指導者への救世主待望</a:t>
-            </a:r>
-            <a:endParaRPr lang="en-US" sz="1300" dirty="0"/>
-          </a:p>
-        </p:txBody>
-      </p:sp>
-      <p:sp>
-        <p:nvSpPr>
-          <p:cNvPr id="24" name="Shape 19"/>
-          <p:cNvSpPr/>
-          <p:nvPr/>
-        </p:nvSpPr>
-        <p:spPr>
-          <a:xfrm>
-            <a:off x="548640" y="5166360"/>
-            <a:ext cx="11091672" cy="960120"/>
+              <a:rPr lang="en-US" sz="2200" dirty="0">
+                <a:solidFill>
+                  <a:srgbClr val="9AA4C0"/>
+                </a:solidFill>
+                <a:latin typeface="Yu Gothic" pitchFamily="34" charset="0"/>
+                <a:ea typeface="Yu Gothic" pitchFamily="34" charset="-122"/>
+                <a:cs typeface="Yu Gothic" pitchFamily="34" charset="-120"/>
+              </a:rPr>
+              <a:t>→</a:t>
+            </a:r>
+            <a:endParaRPr lang="en-US" sz="2200" dirty="0"/>
+          </a:p>
+        </p:txBody>
+      </p:sp>
+      <p:sp>
+        <p:nvSpPr>
+          <p:cNvPr id="13" name="Shape 11"/>
+          <p:cNvSpPr/>
+          <p:nvPr/>
+        </p:nvSpPr>
+        <p:spPr>
+          <a:xfrm>
+            <a:off x="6675120" y="3063240"/>
+            <a:ext cx="4937760" cy="914400"/>
           </a:xfrm>
           <a:prstGeom prst="roundRect">
             <a:avLst>
-              <a:gd name="adj" fmla="val 9524"/>
+              <a:gd name="adj" fmla="val 12000"/>
             </a:avLst>
           </a:prstGeom>
           <a:solidFill>
-            <a:srgbClr val="1C2C4A"/>
+            <a:srgbClr val="16213A"/>
           </a:solidFill>
           <a:ln/>
           <a:effectLst>
@@ -10274,14 +11000,14 @@
       </p:sp>
       <p:sp>
         <p:nvSpPr>
-          <p:cNvPr id="25" name="Text 20"/>
-          <p:cNvSpPr/>
-          <p:nvPr/>
-        </p:nvSpPr>
-        <p:spPr>
-          <a:xfrm>
-            <a:off x="868680" y="5166360"/>
-            <a:ext cx="10515600" cy="960120"/>
+          <p:cNvPr id="14" name="Text 12"/>
+          <p:cNvSpPr/>
+          <p:nvPr/>
+        </p:nvSpPr>
+        <p:spPr>
+          <a:xfrm>
+            <a:off x="6903720" y="3063240"/>
+            <a:ext cx="4480560" cy="914400"/>
           </a:xfrm>
           <a:prstGeom prst="rect">
             <a:avLst/>
@@ -10294,26 +11020,278 @@
           <a:lstStyle/>
           <a:p>
             <a:pPr indent="0" marL="0">
-              <a:buNone/>
-            </a:pPr>
-            <a:r>
-              <a:rPr lang="en-US" sz="1350" dirty="0">
-                <a:solidFill>
-                  <a:srgbClr val="AFC9EE"/>
-                </a:solidFill>
-                <a:latin typeface="Yu Gothic" pitchFamily="34" charset="0"/>
-                <a:ea typeface="Yu Gothic" pitchFamily="34" charset="-122"/>
-                <a:cs typeface="Yu Gothic" pitchFamily="34" charset="-120"/>
-              </a:rPr>
-              <a:t>小さな共同体における「救済者への依存」と、国家規模における「権力の集中」は構造的に同じである。この実験は、社会全体のレジリエンスを問う試みである。</a:t>
-            </a:r>
-            <a:endParaRPr lang="en-US" sz="1350" dirty="0"/>
-          </a:p>
-        </p:txBody>
-      </p:sp>
-      <p:sp>
-        <p:nvSpPr>
-          <p:cNvPr id="26" name="Text 21"/>
+              <a:lnSpc>
+                <a:spcPct val="120000"/>
+              </a:lnSpc>
+              <a:buNone/>
+            </a:pPr>
+            <a:r>
+              <a:rPr lang="en-US" sz="1300" b="1" dirty="0">
+                <a:solidFill>
+                  <a:srgbClr val="5A8FD6"/>
+                </a:solidFill>
+                <a:latin typeface="Yu Gothic" pitchFamily="34" charset="0"/>
+                <a:ea typeface="Yu Gothic" pitchFamily="34" charset="-122"/>
+                <a:cs typeface="Yu Gothic" pitchFamily="34" charset="-120"/>
+              </a:rPr>
+              <a:t>離脱コストの回避・炎上防止</a:t>
+            </a:r>
+            <a:endParaRPr lang="en-US" sz="1300" dirty="0"/>
+          </a:p>
+        </p:txBody>
+      </p:sp>
+      <p:sp>
+        <p:nvSpPr>
+          <p:cNvPr id="15" name="Shape 13"/>
+          <p:cNvSpPr/>
+          <p:nvPr/>
+        </p:nvSpPr>
+        <p:spPr>
+          <a:xfrm>
+            <a:off x="548640" y="4160520"/>
+            <a:ext cx="4937760" cy="914400"/>
+          </a:xfrm>
+          <a:prstGeom prst="roundRect">
+            <a:avLst>
+              <a:gd name="adj" fmla="val 12000"/>
+            </a:avLst>
+          </a:prstGeom>
+          <a:solidFill>
+            <a:srgbClr val="1C2C4A"/>
+          </a:solidFill>
+          <a:ln/>
+          <a:effectLst>
+            <a:outerShdw sx="100000" sy="100000" kx="0" ky="0" algn="bl" rotWithShape="0" blurRad="101600" dist="38100" dir="5400000">
+              <a:srgbClr val="000000">
+                <a:alpha val="35000"/>
+              </a:srgbClr>
+            </a:outerShdw>
+          </a:effectLst>
+        </p:spPr>
+      </p:sp>
+      <p:sp>
+        <p:nvSpPr>
+          <p:cNvPr id="16" name="Text 14"/>
+          <p:cNvSpPr/>
+          <p:nvPr/>
+        </p:nvSpPr>
+        <p:spPr>
+          <a:xfrm>
+            <a:off x="777240" y="4160520"/>
+            <a:ext cx="4480560" cy="914400"/>
+          </a:xfrm>
+          <a:prstGeom prst="rect">
+            <a:avLst/>
+          </a:prstGeom>
+          <a:noFill/>
+          <a:ln/>
+        </p:spPr>
+        <p:txBody>
+          <a:bodyPr wrap="square" lIns="0" tIns="0" rIns="0" bIns="0" rtlCol="0" anchor="ctr"/>
+          <a:lstStyle/>
+          <a:p>
+            <a:pPr indent="0" marL="0">
+              <a:lnSpc>
+                <a:spcPct val="120000"/>
+              </a:lnSpc>
+              <a:buNone/>
+            </a:pPr>
+            <a:r>
+              <a:rPr lang="en-US" sz="1300" i="1" dirty="0">
+                <a:solidFill>
+                  <a:srgbClr val="F4C878"/>
+                </a:solidFill>
+                <a:latin typeface="Yu Gothic" pitchFamily="34" charset="0"/>
+                <a:ea typeface="Yu Gothic" pitchFamily="34" charset="-122"/>
+                <a:cs typeface="Yu Gothic" pitchFamily="34" charset="-120"/>
+              </a:rPr>
+              <a:t>「自分でも問題に対処できるようになった」</a:t>
+            </a:r>
+            <a:endParaRPr lang="en-US" sz="1300" dirty="0"/>
+          </a:p>
+        </p:txBody>
+      </p:sp>
+      <p:sp>
+        <p:nvSpPr>
+          <p:cNvPr id="17" name="Text 15"/>
+          <p:cNvSpPr/>
+          <p:nvPr/>
+        </p:nvSpPr>
+        <p:spPr>
+          <a:xfrm>
+            <a:off x="5623560" y="4160520"/>
+            <a:ext cx="914400" cy="914400"/>
+          </a:xfrm>
+          <a:prstGeom prst="rect">
+            <a:avLst/>
+          </a:prstGeom>
+          <a:noFill/>
+          <a:ln/>
+        </p:spPr>
+        <p:txBody>
+          <a:bodyPr wrap="square" lIns="0" tIns="0" rIns="0" bIns="0" rtlCol="0" anchor="ctr"/>
+          <a:lstStyle/>
+          <a:p>
+            <a:pPr algn="ctr" indent="0" marL="0">
+              <a:buNone/>
+            </a:pPr>
+            <a:r>
+              <a:rPr lang="en-US" sz="2200" dirty="0">
+                <a:solidFill>
+                  <a:srgbClr val="9AA4C0"/>
+                </a:solidFill>
+                <a:latin typeface="Yu Gothic" pitchFamily="34" charset="0"/>
+                <a:ea typeface="Yu Gothic" pitchFamily="34" charset="-122"/>
+                <a:cs typeface="Yu Gothic" pitchFamily="34" charset="-120"/>
+              </a:rPr>
+              <a:t>→</a:t>
+            </a:r>
+            <a:endParaRPr lang="en-US" sz="2200" dirty="0"/>
+          </a:p>
+        </p:txBody>
+      </p:sp>
+      <p:sp>
+        <p:nvSpPr>
+          <p:cNvPr id="18" name="Shape 16"/>
+          <p:cNvSpPr/>
+          <p:nvPr/>
+        </p:nvSpPr>
+        <p:spPr>
+          <a:xfrm>
+            <a:off x="6675120" y="4160520"/>
+            <a:ext cx="4937760" cy="914400"/>
+          </a:xfrm>
+          <a:prstGeom prst="roundRect">
+            <a:avLst>
+              <a:gd name="adj" fmla="val 12000"/>
+            </a:avLst>
+          </a:prstGeom>
+          <a:solidFill>
+            <a:srgbClr val="16213A"/>
+          </a:solidFill>
+          <a:ln/>
+          <a:effectLst>
+            <a:outerShdw sx="100000" sy="100000" kx="0" ky="0" algn="bl" rotWithShape="0" blurRad="101600" dist="38100" dir="5400000">
+              <a:srgbClr val="000000">
+                <a:alpha val="35000"/>
+              </a:srgbClr>
+            </a:outerShdw>
+          </a:effectLst>
+        </p:spPr>
+      </p:sp>
+      <p:sp>
+        <p:nvSpPr>
+          <p:cNvPr id="19" name="Text 17"/>
+          <p:cNvSpPr/>
+          <p:nvPr/>
+        </p:nvSpPr>
+        <p:spPr>
+          <a:xfrm>
+            <a:off x="6903720" y="4160520"/>
+            <a:ext cx="4480560" cy="914400"/>
+          </a:xfrm>
+          <a:prstGeom prst="rect">
+            <a:avLst/>
+          </a:prstGeom>
+          <a:noFill/>
+          <a:ln/>
+        </p:spPr>
+        <p:txBody>
+          <a:bodyPr wrap="square" lIns="0" tIns="0" rIns="0" bIns="0" rtlCol="0" anchor="ctr"/>
+          <a:lstStyle/>
+          <a:p>
+            <a:pPr indent="0" marL="0">
+              <a:lnSpc>
+                <a:spcPct val="120000"/>
+              </a:lnSpc>
+              <a:buNone/>
+            </a:pPr>
+            <a:r>
+              <a:rPr lang="en-US" sz="1300" b="1" dirty="0">
+                <a:solidFill>
+                  <a:srgbClr val="5A8FD6"/>
+                </a:solidFill>
+                <a:latin typeface="Yu Gothic" pitchFamily="34" charset="0"/>
+                <a:ea typeface="Yu Gothic" pitchFamily="34" charset="-122"/>
+                <a:cs typeface="Yu Gothic" pitchFamily="34" charset="-120"/>
+              </a:rPr>
+              <a:t>組織のレジリエンス向上・意思決定の高速化</a:t>
+            </a:r>
+            <a:endParaRPr lang="en-US" sz="1300" dirty="0"/>
+          </a:p>
+        </p:txBody>
+      </p:sp>
+      <p:sp>
+        <p:nvSpPr>
+          <p:cNvPr id="20" name="Shape 18"/>
+          <p:cNvSpPr/>
+          <p:nvPr/>
+        </p:nvSpPr>
+        <p:spPr>
+          <a:xfrm>
+            <a:off x="548640" y="5303520"/>
+            <a:ext cx="11091672" cy="822960"/>
+          </a:xfrm>
+          <a:prstGeom prst="roundRect">
+            <a:avLst>
+              <a:gd name="adj" fmla="val 11111"/>
+            </a:avLst>
+          </a:prstGeom>
+          <a:solidFill>
+            <a:srgbClr val="16213A"/>
+          </a:solidFill>
+          <a:ln/>
+          <a:effectLst>
+            <a:outerShdw sx="100000" sy="100000" kx="0" ky="0" algn="bl" rotWithShape="0" blurRad="101600" dist="38100" dir="5400000">
+              <a:srgbClr val="000000">
+                <a:alpha val="35000"/>
+              </a:srgbClr>
+            </a:outerShdw>
+          </a:effectLst>
+        </p:spPr>
+      </p:sp>
+      <p:sp>
+        <p:nvSpPr>
+          <p:cNvPr id="21" name="Text 19"/>
+          <p:cNvSpPr/>
+          <p:nvPr/>
+        </p:nvSpPr>
+        <p:spPr>
+          <a:xfrm>
+            <a:off x="868680" y="5303520"/>
+            <a:ext cx="10515600" cy="822960"/>
+          </a:xfrm>
+          <a:prstGeom prst="rect">
+            <a:avLst/>
+          </a:prstGeom>
+          <a:noFill/>
+          <a:ln/>
+        </p:spPr>
+        <p:txBody>
+          <a:bodyPr wrap="square" lIns="0" tIns="0" rIns="0" bIns="0" rtlCol="0" anchor="ctr"/>
+          <a:lstStyle/>
+          <a:p>
+            <a:pPr indent="0" marL="0">
+              <a:buNone/>
+            </a:pPr>
+            <a:r>
+              <a:rPr lang="en-US" sz="1400" b="1" dirty="0">
+                <a:solidFill>
+                  <a:srgbClr val="FFFFFF"/>
+                </a:solidFill>
+                <a:latin typeface="Yu Gothic" pitchFamily="34" charset="0"/>
+                <a:ea typeface="Yu Gothic" pitchFamily="34" charset="-122"/>
+                <a:cs typeface="Yu Gothic" pitchFamily="34" charset="-120"/>
+              </a:rPr>
+              <a:t>人を支える行為は「美談」ではない。組織の持続可能性と安全保障に直結する。</a:t>
+            </a:r>
+            <a:endParaRPr lang="en-US" sz="1400" dirty="0"/>
+          </a:p>
+        </p:txBody>
+      </p:sp>
+      <p:sp>
+        <p:nvSpPr>
+          <p:cNvPr id="22" name="Text 20"/>
           <p:cNvSpPr/>
           <p:nvPr/>
         </p:nvSpPr>
@@ -10352,7 +11330,7 @@
       </p:sp>
       <p:sp>
         <p:nvSpPr>
-          <p:cNvPr id="27" name="Text 22"/>
+          <p:cNvPr id="23" name="Text 21"/>
           <p:cNvSpPr/>
           <p:nvPr/>
         </p:nvSpPr>
@@ -10423,20 +11401,88 @@
       </p:grpSpPr>
       <p:sp>
         <p:nvSpPr>
-          <p:cNvPr id="2" name="Shape 0"/>
-          <p:cNvSpPr/>
-          <p:nvPr/>
-        </p:nvSpPr>
-        <p:spPr>
-          <a:xfrm>
-            <a:off x="5190592" y="512064"/>
+          <p:cNvPr id="2" name="Text 0"/>
+          <p:cNvSpPr/>
+          <p:nvPr/>
+        </p:nvSpPr>
+        <p:spPr>
+          <a:xfrm>
+            <a:off x="548640" y="411480"/>
+            <a:ext cx="11094415" cy="822960"/>
+          </a:xfrm>
+          <a:prstGeom prst="rect">
+            <a:avLst/>
+          </a:prstGeom>
+          <a:noFill/>
+          <a:ln/>
+        </p:spPr>
+        <p:txBody>
+          <a:bodyPr wrap="square" lIns="0" tIns="0" rIns="0" bIns="0" rtlCol="0" anchor="ctr"/>
+          <a:lstStyle/>
+          <a:p>
+            <a:pPr algn="l" indent="0" marL="0">
+              <a:buNone/>
+            </a:pPr>
+            <a:r>
+              <a:rPr lang="en-US" sz="3000" b="1" dirty="0">
+                <a:solidFill>
+                  <a:srgbClr val="FFFFFF"/>
+                </a:solidFill>
+                <a:latin typeface="Yu Gothic" pitchFamily="34" charset="0"/>
+                <a:ea typeface="Yu Gothic" pitchFamily="34" charset="-122"/>
+                <a:cs typeface="Yu Gothic" pitchFamily="34" charset="-120"/>
+              </a:rPr>
+              <a:t>フラクタルな構造：村から国家の「メタ安全保障」へ</a:t>
+            </a:r>
+            <a:endParaRPr lang="en-US" sz="3000" dirty="0"/>
+          </a:p>
+        </p:txBody>
+      </p:sp>
+      <p:sp>
+        <p:nvSpPr>
+          <p:cNvPr id="3" name="Shape 1"/>
+          <p:cNvSpPr/>
+          <p:nvPr/>
+        </p:nvSpPr>
+        <p:spPr>
+          <a:xfrm>
+            <a:off x="641452" y="1874520"/>
+            <a:ext cx="3429000" cy="2880360"/>
+          </a:xfrm>
+          <a:prstGeom prst="roundRect">
+            <a:avLst>
+              <a:gd name="adj" fmla="val 3810"/>
+            </a:avLst>
+          </a:prstGeom>
+          <a:solidFill>
+            <a:srgbClr val="16213A"/>
+          </a:solidFill>
+          <a:ln/>
+          <a:effectLst>
+            <a:outerShdw sx="100000" sy="100000" kx="0" ky="0" algn="bl" rotWithShape="0" blurRad="101600" dist="38100" dir="5400000">
+              <a:srgbClr val="000000">
+                <a:alpha val="35000"/>
+              </a:srgbClr>
+            </a:outerShdw>
+          </a:effectLst>
+        </p:spPr>
+      </p:sp>
+      <p:sp>
+        <p:nvSpPr>
+          <p:cNvPr id="4" name="Shape 2"/>
+          <p:cNvSpPr/>
+          <p:nvPr/>
+        </p:nvSpPr>
+        <p:spPr>
+          <a:xfrm>
+            <a:off x="1450696" y="1746504"/>
             <a:ext cx="1810512" cy="1810512"/>
           </a:xfrm>
           <a:prstGeom prst="ellipse">
             <a:avLst/>
           </a:prstGeom>
           <a:solidFill>
-            <a:srgbClr val="E8A33D">
+            <a:srgbClr val="1BAF7A">
               <a:alpha val="12000"/>
             </a:srgbClr>
           </a:solidFill>
@@ -10445,20 +11491,20 @@
       </p:sp>
       <p:sp>
         <p:nvSpPr>
-          <p:cNvPr id="3" name="Shape 1"/>
-          <p:cNvSpPr/>
-          <p:nvPr/>
-        </p:nvSpPr>
-        <p:spPr>
-          <a:xfrm>
-            <a:off x="5437480" y="758952"/>
+          <p:cNvPr id="5" name="Shape 3"/>
+          <p:cNvSpPr/>
+          <p:nvPr/>
+        </p:nvSpPr>
+        <p:spPr>
+          <a:xfrm>
+            <a:off x="1697584" y="1993392"/>
             <a:ext cx="1316736" cy="1316736"/>
           </a:xfrm>
           <a:prstGeom prst="ellipse">
             <a:avLst/>
           </a:prstGeom>
           <a:solidFill>
-            <a:srgbClr val="E8A33D">
+            <a:srgbClr val="1BAF7A">
               <a:alpha val="22000"/>
             </a:srgbClr>
           </a:solidFill>
@@ -10467,24 +11513,24 @@
       </p:sp>
       <p:sp>
         <p:nvSpPr>
-          <p:cNvPr id="4" name="Shape 2"/>
-          <p:cNvSpPr/>
-          <p:nvPr/>
-        </p:nvSpPr>
-        <p:spPr>
-          <a:xfrm>
-            <a:off x="5684368" y="1005840"/>
+          <p:cNvPr id="6" name="Shape 4"/>
+          <p:cNvSpPr/>
+          <p:nvPr/>
+        </p:nvSpPr>
+        <p:spPr>
+          <a:xfrm>
+            <a:off x="1944472" y="2240280"/>
             <a:ext cx="822960" cy="822960"/>
           </a:xfrm>
           <a:prstGeom prst="ellipse">
             <a:avLst/>
           </a:prstGeom>
           <a:solidFill>
-            <a:srgbClr val="E8A33D"/>
+            <a:srgbClr val="1BAF7A"/>
           </a:solidFill>
           <a:ln w="9525">
             <a:solidFill>
-              <a:srgbClr val="E8A33D"/>
+              <a:srgbClr val="1BAF7A"/>
             </a:solidFill>
             <a:prstDash val="solid"/>
           </a:ln>
@@ -10492,7 +11538,7 @@
       </p:sp>
       <p:pic>
         <p:nvPicPr>
-          <p:cNvPr id="5" name="Image 0" descr="preencoded.png">    </p:cNvPr>
+          <p:cNvPr id="7" name="Image 0" descr="preencoded.png">    </p:cNvPr>
           <p:cNvPicPr>
             <a:picLocks noChangeAspect="1"/>
           </p:cNvPicPr>
@@ -10506,7 +11552,7 @@
         </p:blipFill>
         <p:spPr>
           <a:xfrm>
-            <a:off x="5898337" y="1219810"/>
+            <a:off x="2158441" y="2454250"/>
             <a:ext cx="395021" cy="395021"/>
           </a:xfrm>
           <a:prstGeom prst="rect">
@@ -10516,14 +11562,14 @@
       </p:pic>
       <p:sp>
         <p:nvSpPr>
-          <p:cNvPr id="6" name="Text 3"/>
-          <p:cNvSpPr/>
-          <p:nvPr/>
-        </p:nvSpPr>
-        <p:spPr>
-          <a:xfrm>
-            <a:off x="0" y="1965960"/>
-            <a:ext cx="12191695" cy="731520"/>
+          <p:cNvPr id="8" name="Text 5"/>
+          <p:cNvSpPr/>
+          <p:nvPr/>
+        </p:nvSpPr>
+        <p:spPr>
+          <a:xfrm>
+            <a:off x="778612" y="3200400"/>
+            <a:ext cx="3154680" cy="411480"/>
           </a:xfrm>
           <a:prstGeom prst="rect">
             <a:avLst/>
@@ -10539,7 +11585,7 @@
               <a:buNone/>
             </a:pPr>
             <a:r>
-              <a:rPr lang="en-US" sz="3400" b="1" dirty="0">
+              <a:rPr lang="en-US" sz="1700" b="1" dirty="0">
                 <a:solidFill>
                   <a:srgbClr val="FFFFFF"/>
                 </a:solidFill>
@@ -10547,22 +11593,22 @@
                 <a:ea typeface="Yu Gothic" pitchFamily="34" charset="-122"/>
                 <a:cs typeface="Yu Gothic" pitchFamily="34" charset="-120"/>
               </a:rPr>
-              <a:t>救済者 × ガバナンス</a:t>
-            </a:r>
-            <a:endParaRPr lang="en-US" sz="3400" dirty="0"/>
-          </a:p>
-        </p:txBody>
-      </p:sp>
-      <p:sp>
-        <p:nvSpPr>
-          <p:cNvPr id="7" name="Text 4"/>
-          <p:cNvSpPr/>
-          <p:nvPr/>
-        </p:nvSpPr>
-        <p:spPr>
-          <a:xfrm>
-            <a:off x="0" y="2651760"/>
-            <a:ext cx="12191695" cy="411480"/>
+              <a:t>村</a:t>
+            </a:r>
+            <a:endParaRPr lang="en-US" sz="1700" dirty="0"/>
+          </a:p>
+        </p:txBody>
+      </p:sp>
+      <p:sp>
+        <p:nvSpPr>
+          <p:cNvPr id="9" name="Text 6"/>
+          <p:cNvSpPr/>
+          <p:nvPr/>
+        </p:nvSpPr>
+        <p:spPr>
+          <a:xfrm>
+            <a:off x="915772" y="3657600"/>
+            <a:ext cx="2880360" cy="914400"/>
           </a:xfrm>
           <a:prstGeom prst="rect">
             <a:avLst/>
@@ -10575,10 +11621,13 @@
           <a:lstStyle/>
           <a:p>
             <a:pPr algn="ctr" indent="0" marL="0">
-              <a:buNone/>
-            </a:pPr>
-            <a:r>
-              <a:rPr lang="en-US" sz="1500" dirty="0">
+              <a:lnSpc>
+                <a:spcPct val="130000"/>
+              </a:lnSpc>
+              <a:buNone/>
+            </a:pPr>
+            <a:r>
+              <a:rPr lang="en-US" sz="1300" dirty="0">
                 <a:solidFill>
                   <a:srgbClr val="AFC9EE"/>
                 </a:solidFill>
@@ -10586,26 +11635,26 @@
                 <a:ea typeface="Yu Gothic" pitchFamily="34" charset="-122"/>
                 <a:cs typeface="Yu Gothic" pitchFamily="34" charset="-120"/>
               </a:rPr>
-              <a:t>神が降りなくても、村は回るか</a:t>
-            </a:r>
-            <a:endParaRPr lang="en-US" sz="1500" dirty="0"/>
-          </a:p>
-        </p:txBody>
-      </p:sp>
-      <p:sp>
-        <p:nvSpPr>
-          <p:cNvPr id="8" name="Shape 5"/>
-          <p:cNvSpPr/>
-          <p:nvPr/>
-        </p:nvSpPr>
-        <p:spPr>
-          <a:xfrm>
-            <a:off x="609448" y="3337560"/>
-            <a:ext cx="3474720" cy="1371600"/>
+              <a:t>「世話焼きへの過度な依存」と疲弊</a:t>
+            </a:r>
+            <a:endParaRPr lang="en-US" sz="1300" dirty="0"/>
+          </a:p>
+        </p:txBody>
+      </p:sp>
+      <p:sp>
+        <p:nvSpPr>
+          <p:cNvPr id="10" name="Shape 7"/>
+          <p:cNvSpPr/>
+          <p:nvPr/>
+        </p:nvSpPr>
+        <p:spPr>
+          <a:xfrm>
+            <a:off x="4381348" y="1874520"/>
+            <a:ext cx="3429000" cy="2880360"/>
           </a:xfrm>
           <a:prstGeom prst="roundRect">
             <a:avLst>
-              <a:gd name="adj" fmla="val 8000"/>
+              <a:gd name="adj" fmla="val 3810"/>
             </a:avLst>
           </a:prstGeom>
           <a:solidFill>
@@ -10623,14 +11672,107 @@
       </p:sp>
       <p:sp>
         <p:nvSpPr>
-          <p:cNvPr id="9" name="Text 6"/>
-          <p:cNvSpPr/>
-          <p:nvPr/>
-        </p:nvSpPr>
-        <p:spPr>
-          <a:xfrm>
-            <a:off x="792328" y="3474720"/>
-            <a:ext cx="3108960" cy="502920"/>
+          <p:cNvPr id="11" name="Shape 8"/>
+          <p:cNvSpPr/>
+          <p:nvPr/>
+        </p:nvSpPr>
+        <p:spPr>
+          <a:xfrm>
+            <a:off x="5190592" y="1746504"/>
+            <a:ext cx="1810512" cy="1810512"/>
+          </a:xfrm>
+          <a:prstGeom prst="ellipse">
+            <a:avLst/>
+          </a:prstGeom>
+          <a:solidFill>
+            <a:srgbClr val="2A78D6">
+              <a:alpha val="12000"/>
+            </a:srgbClr>
+          </a:solidFill>
+          <a:ln/>
+        </p:spPr>
+      </p:sp>
+      <p:sp>
+        <p:nvSpPr>
+          <p:cNvPr id="12" name="Shape 9"/>
+          <p:cNvSpPr/>
+          <p:nvPr/>
+        </p:nvSpPr>
+        <p:spPr>
+          <a:xfrm>
+            <a:off x="5437480" y="1993392"/>
+            <a:ext cx="1316736" cy="1316736"/>
+          </a:xfrm>
+          <a:prstGeom prst="ellipse">
+            <a:avLst/>
+          </a:prstGeom>
+          <a:solidFill>
+            <a:srgbClr val="2A78D6">
+              <a:alpha val="22000"/>
+            </a:srgbClr>
+          </a:solidFill>
+          <a:ln/>
+        </p:spPr>
+      </p:sp>
+      <p:sp>
+        <p:nvSpPr>
+          <p:cNvPr id="13" name="Shape 10"/>
+          <p:cNvSpPr/>
+          <p:nvPr/>
+        </p:nvSpPr>
+        <p:spPr>
+          <a:xfrm>
+            <a:off x="5684368" y="2240280"/>
+            <a:ext cx="822960" cy="822960"/>
+          </a:xfrm>
+          <a:prstGeom prst="ellipse">
+            <a:avLst/>
+          </a:prstGeom>
+          <a:solidFill>
+            <a:srgbClr val="2A78D6"/>
+          </a:solidFill>
+          <a:ln w="9525">
+            <a:solidFill>
+              <a:srgbClr val="2A78D6"/>
+            </a:solidFill>
+            <a:prstDash val="solid"/>
+          </a:ln>
+        </p:spPr>
+      </p:sp>
+      <p:pic>
+        <p:nvPicPr>
+          <p:cNvPr id="14" name="Image 1" descr="preencoded.png">    </p:cNvPr>
+          <p:cNvPicPr>
+            <a:picLocks noChangeAspect="1"/>
+          </p:cNvPicPr>
+          <p:nvPr/>
+        </p:nvPicPr>
+        <p:blipFill>
+          <a:blip r:embed="rId2"/>
+          <a:stretch>
+            <a:fillRect/>
+          </a:stretch>
+        </p:blipFill>
+        <p:spPr>
+          <a:xfrm>
+            <a:off x="5898337" y="2454250"/>
+            <a:ext cx="395021" cy="395021"/>
+          </a:xfrm>
+          <a:prstGeom prst="rect">
+            <a:avLst/>
+          </a:prstGeom>
+        </p:spPr>
+      </p:pic>
+      <p:sp>
+        <p:nvSpPr>
+          <p:cNvPr id="15" name="Text 11"/>
+          <p:cNvSpPr/>
+          <p:nvPr/>
+        </p:nvSpPr>
+        <p:spPr>
+          <a:xfrm>
+            <a:off x="4518508" y="3200400"/>
+            <a:ext cx="3154680" cy="411480"/>
           </a:xfrm>
           <a:prstGeom prst="rect">
             <a:avLst/>
@@ -10646,30 +11788,30 @@
               <a:buNone/>
             </a:pPr>
             <a:r>
-              <a:rPr lang="en-US" sz="1900" b="1" dirty="0">
-                <a:solidFill>
-                  <a:srgbClr val="E2665A"/>
-                </a:solidFill>
-                <a:latin typeface="Yu Gothic" pitchFamily="34" charset="0"/>
-                <a:ea typeface="Yu Gothic" pitchFamily="34" charset="-122"/>
-                <a:cs typeface="Yu Gothic" pitchFamily="34" charset="-120"/>
-              </a:rPr>
-              <a:t>依存は毎回再現された</a:t>
-            </a:r>
-            <a:endParaRPr lang="en-US" sz="1900" dirty="0"/>
-          </a:p>
-        </p:txBody>
-      </p:sp>
-      <p:sp>
-        <p:nvSpPr>
-          <p:cNvPr id="10" name="Text 7"/>
-          <p:cNvSpPr/>
-          <p:nvPr/>
-        </p:nvSpPr>
-        <p:spPr>
-          <a:xfrm>
-            <a:off x="838048" y="4023360"/>
-            <a:ext cx="3017520" cy="594360"/>
+              <a:rPr lang="en-US" sz="1700" b="1" dirty="0">
+                <a:solidFill>
+                  <a:srgbClr val="FFFFFF"/>
+                </a:solidFill>
+                <a:latin typeface="Yu Gothic" pitchFamily="34" charset="0"/>
+                <a:ea typeface="Yu Gothic" pitchFamily="34" charset="-122"/>
+                <a:cs typeface="Yu Gothic" pitchFamily="34" charset="-120"/>
+              </a:rPr>
+              <a:t>都市</a:t>
+            </a:r>
+            <a:endParaRPr lang="en-US" sz="1700" dirty="0"/>
+          </a:p>
+        </p:txBody>
+      </p:sp>
+      <p:sp>
+        <p:nvSpPr>
+          <p:cNvPr id="16" name="Text 12"/>
+          <p:cNvSpPr/>
+          <p:nvPr/>
+        </p:nvSpPr>
+        <p:spPr>
+          <a:xfrm>
+            <a:off x="4655668" y="3657600"/>
+            <a:ext cx="2880360" cy="914400"/>
           </a:xfrm>
           <a:prstGeom prst="rect">
             <a:avLst/>
@@ -10683,39 +11825,39 @@
           <a:p>
             <a:pPr algn="ctr" indent="0" marL="0">
               <a:lnSpc>
-                <a:spcPct val="125000"/>
+                <a:spcPct val="130000"/>
               </a:lnSpc>
               <a:buNone/>
             </a:pPr>
             <a:r>
-              <a:rPr lang="en-US" sz="1100" dirty="0">
-                <a:solidFill>
-                  <a:srgbClr val="9AA4C0"/>
-                </a:solidFill>
-                <a:latin typeface="Yu Gothic" pitchFamily="34" charset="0"/>
-                <a:ea typeface="Yu Gothic" pitchFamily="34" charset="-122"/>
-                <a:cs typeface="Yu Gothic" pitchFamily="34" charset="-120"/>
-              </a:rPr>
-              <a:t>A・Bの標準偏差はほぼ0。放っておけば村は必ず依存へ落ちる</a:t>
-            </a:r>
-            <a:endParaRPr lang="en-US" sz="1100" dirty="0"/>
-          </a:p>
-        </p:txBody>
-      </p:sp>
-      <p:sp>
-        <p:nvSpPr>
-          <p:cNvPr id="11" name="Shape 8"/>
-          <p:cNvSpPr/>
-          <p:nvPr/>
-        </p:nvSpPr>
-        <p:spPr>
-          <a:xfrm>
-            <a:off x="4358488" y="3337560"/>
-            <a:ext cx="3474720" cy="1371600"/>
+              <a:rPr lang="en-US" sz="1300" dirty="0">
+                <a:solidFill>
+                  <a:srgbClr val="AFC9EE"/>
+                </a:solidFill>
+                <a:latin typeface="Yu Gothic" pitchFamily="34" charset="0"/>
+                <a:ea typeface="Yu Gothic" pitchFamily="34" charset="-122"/>
+                <a:cs typeface="Yu Gothic" pitchFamily="34" charset="-120"/>
+              </a:rPr>
+              <a:t>「支援制度の複雑化」と、誰にも届かないSOS</a:t>
+            </a:r>
+            <a:endParaRPr lang="en-US" sz="1300" dirty="0"/>
+          </a:p>
+        </p:txBody>
+      </p:sp>
+      <p:sp>
+        <p:nvSpPr>
+          <p:cNvPr id="17" name="Shape 13"/>
+          <p:cNvSpPr/>
+          <p:nvPr/>
+        </p:nvSpPr>
+        <p:spPr>
+          <a:xfrm>
+            <a:off x="8121244" y="1874520"/>
+            <a:ext cx="3429000" cy="2880360"/>
           </a:xfrm>
           <a:prstGeom prst="roundRect">
             <a:avLst>
-              <a:gd name="adj" fmla="val 8000"/>
+              <a:gd name="adj" fmla="val 3810"/>
             </a:avLst>
           </a:prstGeom>
           <a:solidFill>
@@ -10733,14 +11875,107 @@
       </p:sp>
       <p:sp>
         <p:nvSpPr>
-          <p:cNvPr id="12" name="Text 9"/>
-          <p:cNvSpPr/>
-          <p:nvPr/>
-        </p:nvSpPr>
-        <p:spPr>
-          <a:xfrm>
-            <a:off x="4541368" y="3474720"/>
-            <a:ext cx="3108960" cy="502920"/>
+          <p:cNvPr id="18" name="Shape 14"/>
+          <p:cNvSpPr/>
+          <p:nvPr/>
+        </p:nvSpPr>
+        <p:spPr>
+          <a:xfrm>
+            <a:off x="8930488" y="1746504"/>
+            <a:ext cx="1810512" cy="1810512"/>
+          </a:xfrm>
+          <a:prstGeom prst="ellipse">
+            <a:avLst/>
+          </a:prstGeom>
+          <a:solidFill>
+            <a:srgbClr val="EB6834">
+              <a:alpha val="12000"/>
+            </a:srgbClr>
+          </a:solidFill>
+          <a:ln/>
+        </p:spPr>
+      </p:sp>
+      <p:sp>
+        <p:nvSpPr>
+          <p:cNvPr id="19" name="Shape 15"/>
+          <p:cNvSpPr/>
+          <p:nvPr/>
+        </p:nvSpPr>
+        <p:spPr>
+          <a:xfrm>
+            <a:off x="9177376" y="1993392"/>
+            <a:ext cx="1316736" cy="1316736"/>
+          </a:xfrm>
+          <a:prstGeom prst="ellipse">
+            <a:avLst/>
+          </a:prstGeom>
+          <a:solidFill>
+            <a:srgbClr val="EB6834">
+              <a:alpha val="22000"/>
+            </a:srgbClr>
+          </a:solidFill>
+          <a:ln/>
+        </p:spPr>
+      </p:sp>
+      <p:sp>
+        <p:nvSpPr>
+          <p:cNvPr id="20" name="Shape 16"/>
+          <p:cNvSpPr/>
+          <p:nvPr/>
+        </p:nvSpPr>
+        <p:spPr>
+          <a:xfrm>
+            <a:off x="9424264" y="2240280"/>
+            <a:ext cx="822960" cy="822960"/>
+          </a:xfrm>
+          <a:prstGeom prst="ellipse">
+            <a:avLst/>
+          </a:prstGeom>
+          <a:solidFill>
+            <a:srgbClr val="EB6834"/>
+          </a:solidFill>
+          <a:ln w="9525">
+            <a:solidFill>
+              <a:srgbClr val="EB6834"/>
+            </a:solidFill>
+            <a:prstDash val="solid"/>
+          </a:ln>
+        </p:spPr>
+      </p:sp>
+      <p:pic>
+        <p:nvPicPr>
+          <p:cNvPr id="21" name="Image 2" descr="preencoded.png">    </p:cNvPr>
+          <p:cNvPicPr>
+            <a:picLocks noChangeAspect="1"/>
+          </p:cNvPicPr>
+          <p:nvPr/>
+        </p:nvPicPr>
+        <p:blipFill>
+          <a:blip r:embed="rId3"/>
+          <a:stretch>
+            <a:fillRect/>
+          </a:stretch>
+        </p:blipFill>
+        <p:spPr>
+          <a:xfrm>
+            <a:off x="9638233" y="2454250"/>
+            <a:ext cx="395021" cy="395021"/>
+          </a:xfrm>
+          <a:prstGeom prst="rect">
+            <a:avLst/>
+          </a:prstGeom>
+        </p:spPr>
+      </p:pic>
+      <p:sp>
+        <p:nvSpPr>
+          <p:cNvPr id="22" name="Text 17"/>
+          <p:cNvSpPr/>
+          <p:nvPr/>
+        </p:nvSpPr>
+        <p:spPr>
+          <a:xfrm>
+            <a:off x="8258404" y="3200400"/>
+            <a:ext cx="3154680" cy="411480"/>
           </a:xfrm>
           <a:prstGeom prst="rect">
             <a:avLst/>
@@ -10756,30 +11991,30 @@
               <a:buNone/>
             </a:pPr>
             <a:r>
-              <a:rPr lang="en-US" sz="1900" b="1" dirty="0">
-                <a:solidFill>
-                  <a:srgbClr val="E8A33D"/>
-                </a:solidFill>
-                <a:latin typeface="Yu Gothic" pitchFamily="34" charset="0"/>
-                <a:ea typeface="Yu Gothic" pitchFamily="34" charset="-122"/>
-                <a:cs typeface="Yu Gothic" pitchFamily="34" charset="-120"/>
-              </a:rPr>
-              <a:t>自律は5回中2回だけ</a:t>
-            </a:r>
-            <a:endParaRPr lang="en-US" sz="1900" dirty="0"/>
-          </a:p>
-        </p:txBody>
-      </p:sp>
-      <p:sp>
-        <p:nvSpPr>
-          <p:cNvPr id="13" name="Text 10"/>
-          <p:cNvSpPr/>
-          <p:nvPr/>
-        </p:nvSpPr>
-        <p:spPr>
-          <a:xfrm>
-            <a:off x="4587088" y="4023360"/>
-            <a:ext cx="3017520" cy="594360"/>
+              <a:rPr lang="en-US" sz="1700" b="1" dirty="0">
+                <a:solidFill>
+                  <a:srgbClr val="FFFFFF"/>
+                </a:solidFill>
+                <a:latin typeface="Yu Gothic" pitchFamily="34" charset="0"/>
+                <a:ea typeface="Yu Gothic" pitchFamily="34" charset="-122"/>
+                <a:cs typeface="Yu Gothic" pitchFamily="34" charset="-120"/>
+              </a:rPr>
+              <a:t>国</a:t>
+            </a:r>
+            <a:endParaRPr lang="en-US" sz="1700" dirty="0"/>
+          </a:p>
+        </p:txBody>
+      </p:sp>
+      <p:sp>
+        <p:nvSpPr>
+          <p:cNvPr id="23" name="Text 18"/>
+          <p:cNvSpPr/>
+          <p:nvPr/>
+        </p:nvSpPr>
+        <p:spPr>
+          <a:xfrm>
+            <a:off x="8395564" y="3657600"/>
+            <a:ext cx="2880360" cy="914400"/>
           </a:xfrm>
           <a:prstGeom prst="rect">
             <a:avLst/>
@@ -10793,43 +12028,43 @@
           <a:p>
             <a:pPr algn="ctr" indent="0" marL="0">
               <a:lnSpc>
-                <a:spcPct val="125000"/>
+                <a:spcPct val="130000"/>
               </a:lnSpc>
               <a:buNone/>
             </a:pPr>
             <a:r>
-              <a:rPr lang="en-US" sz="1100" dirty="0">
-                <a:solidFill>
-                  <a:srgbClr val="9AA4C0"/>
-                </a:solidFill>
-                <a:latin typeface="Yu Gothic" pitchFamily="34" charset="0"/>
-                <a:ea typeface="Yu Gothic" pitchFamily="34" charset="-122"/>
-                <a:cs typeface="Yu Gothic" pitchFamily="34" charset="-120"/>
-              </a:rPr>
-              <a:t>同じ制度でも、誰かが最初の一歩を踏み出した回にしか実現しない</a:t>
-            </a:r>
-            <a:endParaRPr lang="en-US" sz="1100" dirty="0"/>
-          </a:p>
-        </p:txBody>
-      </p:sp>
-      <p:sp>
-        <p:nvSpPr>
-          <p:cNvPr id="14" name="Shape 11"/>
-          <p:cNvSpPr/>
-          <p:nvPr/>
-        </p:nvSpPr>
-        <p:spPr>
-          <a:xfrm>
-            <a:off x="8107528" y="3337560"/>
-            <a:ext cx="3474720" cy="1371600"/>
+              <a:rPr lang="en-US" sz="1300" dirty="0">
+                <a:solidFill>
+                  <a:srgbClr val="AFC9EE"/>
+                </a:solidFill>
+                <a:latin typeface="Yu Gothic" pitchFamily="34" charset="0"/>
+                <a:ea typeface="Yu Gothic" pitchFamily="34" charset="-122"/>
+                <a:cs typeface="Yu Gothic" pitchFamily="34" charset="-120"/>
+              </a:rPr>
+              <a:t>「権力の集中」と、強い指導者への救世主待望</a:t>
+            </a:r>
+            <a:endParaRPr lang="en-US" sz="1300" dirty="0"/>
+          </a:p>
+        </p:txBody>
+      </p:sp>
+      <p:sp>
+        <p:nvSpPr>
+          <p:cNvPr id="24" name="Shape 19"/>
+          <p:cNvSpPr/>
+          <p:nvPr/>
+        </p:nvSpPr>
+        <p:spPr>
+          <a:xfrm>
+            <a:off x="548640" y="5166360"/>
+            <a:ext cx="11091672" cy="960120"/>
           </a:xfrm>
           <a:prstGeom prst="roundRect">
             <a:avLst>
-              <a:gd name="adj" fmla="val 8000"/>
+              <a:gd name="adj" fmla="val 9524"/>
             </a:avLst>
           </a:prstGeom>
           <a:solidFill>
-            <a:srgbClr val="16213A"/>
+            <a:srgbClr val="1C2C4A"/>
           </a:solidFill>
           <a:ln/>
           <a:effectLst>
@@ -10843,13 +12078,362 @@
       </p:sp>
       <p:sp>
         <p:nvSpPr>
-          <p:cNvPr id="15" name="Text 12"/>
-          <p:cNvSpPr/>
-          <p:nvPr/>
-        </p:nvSpPr>
-        <p:spPr>
-          <a:xfrm>
-            <a:off x="8290408" y="3474720"/>
+          <p:cNvPr id="25" name="Text 20"/>
+          <p:cNvSpPr/>
+          <p:nvPr/>
+        </p:nvSpPr>
+        <p:spPr>
+          <a:xfrm>
+            <a:off x="868680" y="5166360"/>
+            <a:ext cx="10515600" cy="960120"/>
+          </a:xfrm>
+          <a:prstGeom prst="rect">
+            <a:avLst/>
+          </a:prstGeom>
+          <a:noFill/>
+          <a:ln/>
+        </p:spPr>
+        <p:txBody>
+          <a:bodyPr wrap="square" lIns="0" tIns="0" rIns="0" bIns="0" rtlCol="0" anchor="ctr"/>
+          <a:lstStyle/>
+          <a:p>
+            <a:pPr indent="0" marL="0">
+              <a:buNone/>
+            </a:pPr>
+            <a:r>
+              <a:rPr lang="en-US" sz="1350" dirty="0">
+                <a:solidFill>
+                  <a:srgbClr val="AFC9EE"/>
+                </a:solidFill>
+                <a:latin typeface="Yu Gothic" pitchFamily="34" charset="0"/>
+                <a:ea typeface="Yu Gothic" pitchFamily="34" charset="-122"/>
+                <a:cs typeface="Yu Gothic" pitchFamily="34" charset="-120"/>
+              </a:rPr>
+              <a:t>小さな共同体における「救済者への依存」と、国家規模における「権力の集中」は構造的に同じである。この実験は、社会全体のレジリエンスを問う試みである。</a:t>
+            </a:r>
+            <a:endParaRPr lang="en-US" sz="1350" dirty="0"/>
+          </a:p>
+        </p:txBody>
+      </p:sp>
+      <p:sp>
+        <p:nvSpPr>
+          <p:cNvPr id="26" name="Text 21"/>
+          <p:cNvSpPr/>
+          <p:nvPr/>
+        </p:nvSpPr>
+        <p:spPr>
+          <a:xfrm>
+            <a:off x="548640" y="6473952"/>
+            <a:ext cx="4572000" cy="274320"/>
+          </a:xfrm>
+          <a:prstGeom prst="rect">
+            <a:avLst/>
+          </a:prstGeom>
+          <a:noFill/>
+          <a:ln/>
+        </p:spPr>
+        <p:txBody>
+          <a:bodyPr wrap="square" lIns="0" tIns="0" rIns="0" bIns="0" rtlCol="0" anchor="ctr"/>
+          <a:lstStyle/>
+          <a:p>
+            <a:pPr indent="0" marL="0">
+              <a:buNone/>
+            </a:pPr>
+            <a:r>
+              <a:rPr lang="en-US" sz="900" dirty="0">
+                <a:solidFill>
+                  <a:srgbClr val="5B6480"/>
+                </a:solidFill>
+                <a:latin typeface="Yu Gothic" pitchFamily="34" charset="0"/>
+                <a:ea typeface="Yu Gothic" pitchFamily="34" charset="-122"/>
+                <a:cs typeface="Yu Gothic" pitchFamily="34" charset="-120"/>
+              </a:rPr>
+              <a:t>救済者 × ガバナンス</a:t>
+            </a:r>
+            <a:endParaRPr lang="en-US" sz="900" dirty="0"/>
+          </a:p>
+        </p:txBody>
+      </p:sp>
+      <p:sp>
+        <p:nvSpPr>
+          <p:cNvPr id="27" name="Text 22"/>
+          <p:cNvSpPr/>
+          <p:nvPr/>
+        </p:nvSpPr>
+        <p:spPr>
+          <a:xfrm>
+            <a:off x="11185855" y="6473952"/>
+            <a:ext cx="457200" cy="274320"/>
+          </a:xfrm>
+          <a:prstGeom prst="rect">
+            <a:avLst/>
+          </a:prstGeom>
+          <a:noFill/>
+          <a:ln/>
+        </p:spPr>
+        <p:txBody>
+          <a:bodyPr wrap="square" lIns="0" tIns="0" rIns="0" bIns="0" rtlCol="0" anchor="ctr"/>
+          <a:lstStyle/>
+          <a:p>
+            <a:pPr algn="r" indent="0" marL="0">
+              <a:buNone/>
+            </a:pPr>
+            <a:r>
+              <a:rPr lang="en-US" sz="900" dirty="0">
+                <a:solidFill>
+                  <a:srgbClr val="5B6480"/>
+                </a:solidFill>
+                <a:latin typeface="Yu Gothic" pitchFamily="34" charset="0"/>
+                <a:ea typeface="Yu Gothic" pitchFamily="34" charset="-122"/>
+                <a:cs typeface="Yu Gothic" pitchFamily="34" charset="-120"/>
+              </a:rPr>
+              <a:t>17</a:t>
+            </a:r>
+            <a:endParaRPr lang="en-US" sz="900" dirty="0"/>
+          </a:p>
+        </p:txBody>
+      </p:sp>
+    </p:spTree>
+  </p:cSld>
+  <p:clrMapOvr>
+    <a:masterClrMapping/>
+  </p:clrMapOvr>
+</p:sld>
+</file>
+
+<file path=ppt/slides/slide18.xml><?xml version="1.0" encoding="utf-8"?>
+<p:sld xmlns:a="http://schemas.openxmlformats.org/drawingml/2006/main" xmlns:r="http://schemas.openxmlformats.org/officeDocument/2006/relationships" xmlns:p="http://schemas.openxmlformats.org/presentationml/2006/main">
+  <p:cSld name="Slide 18">
+    <p:bg>
+      <p:bgPr>
+        <a:solidFill>
+          <a:srgbClr val="0B1220"/>
+        </a:solidFill>
+      </p:bgPr>
+    </p:bg>
+    <p:spTree>
+      <p:nvGrpSpPr>
+        <p:cNvPr id="1" name=""/>
+        <p:cNvGrpSpPr/>
+        <p:nvPr/>
+      </p:nvGrpSpPr>
+      <p:grpSpPr>
+        <a:xfrm>
+          <a:off x="0" y="0"/>
+          <a:ext cx="0" cy="0"/>
+          <a:chOff x="0" y="0"/>
+          <a:chExt cx="0" cy="0"/>
+        </a:xfrm>
+      </p:grpSpPr>
+      <p:sp>
+        <p:nvSpPr>
+          <p:cNvPr id="2" name="Shape 0"/>
+          <p:cNvSpPr/>
+          <p:nvPr/>
+        </p:nvSpPr>
+        <p:spPr>
+          <a:xfrm>
+            <a:off x="5190592" y="512064"/>
+            <a:ext cx="1810512" cy="1810512"/>
+          </a:xfrm>
+          <a:prstGeom prst="ellipse">
+            <a:avLst/>
+          </a:prstGeom>
+          <a:solidFill>
+            <a:srgbClr val="E8A33D">
+              <a:alpha val="12000"/>
+            </a:srgbClr>
+          </a:solidFill>
+          <a:ln/>
+        </p:spPr>
+      </p:sp>
+      <p:sp>
+        <p:nvSpPr>
+          <p:cNvPr id="3" name="Shape 1"/>
+          <p:cNvSpPr/>
+          <p:nvPr/>
+        </p:nvSpPr>
+        <p:spPr>
+          <a:xfrm>
+            <a:off x="5437480" y="758952"/>
+            <a:ext cx="1316736" cy="1316736"/>
+          </a:xfrm>
+          <a:prstGeom prst="ellipse">
+            <a:avLst/>
+          </a:prstGeom>
+          <a:solidFill>
+            <a:srgbClr val="E8A33D">
+              <a:alpha val="22000"/>
+            </a:srgbClr>
+          </a:solidFill>
+          <a:ln/>
+        </p:spPr>
+      </p:sp>
+      <p:sp>
+        <p:nvSpPr>
+          <p:cNvPr id="4" name="Shape 2"/>
+          <p:cNvSpPr/>
+          <p:nvPr/>
+        </p:nvSpPr>
+        <p:spPr>
+          <a:xfrm>
+            <a:off x="5684368" y="1005840"/>
+            <a:ext cx="822960" cy="822960"/>
+          </a:xfrm>
+          <a:prstGeom prst="ellipse">
+            <a:avLst/>
+          </a:prstGeom>
+          <a:solidFill>
+            <a:srgbClr val="E8A33D"/>
+          </a:solidFill>
+          <a:ln w="9525">
+            <a:solidFill>
+              <a:srgbClr val="E8A33D"/>
+            </a:solidFill>
+            <a:prstDash val="solid"/>
+          </a:ln>
+        </p:spPr>
+      </p:sp>
+      <p:pic>
+        <p:nvPicPr>
+          <p:cNvPr id="5" name="Image 0" descr="preencoded.png">    </p:cNvPr>
+          <p:cNvPicPr>
+            <a:picLocks noChangeAspect="1"/>
+          </p:cNvPicPr>
+          <p:nvPr/>
+        </p:nvPicPr>
+        <p:blipFill>
+          <a:blip r:embed="rId1"/>
+          <a:stretch>
+            <a:fillRect/>
+          </a:stretch>
+        </p:blipFill>
+        <p:spPr>
+          <a:xfrm>
+            <a:off x="5898337" y="1219810"/>
+            <a:ext cx="395021" cy="395021"/>
+          </a:xfrm>
+          <a:prstGeom prst="rect">
+            <a:avLst/>
+          </a:prstGeom>
+        </p:spPr>
+      </p:pic>
+      <p:sp>
+        <p:nvSpPr>
+          <p:cNvPr id="6" name="Text 3"/>
+          <p:cNvSpPr/>
+          <p:nvPr/>
+        </p:nvSpPr>
+        <p:spPr>
+          <a:xfrm>
+            <a:off x="0" y="1965960"/>
+            <a:ext cx="12191695" cy="731520"/>
+          </a:xfrm>
+          <a:prstGeom prst="rect">
+            <a:avLst/>
+          </a:prstGeom>
+          <a:noFill/>
+          <a:ln/>
+        </p:spPr>
+        <p:txBody>
+          <a:bodyPr wrap="square" lIns="0" tIns="0" rIns="0" bIns="0" rtlCol="0" anchor="ctr"/>
+          <a:lstStyle/>
+          <a:p>
+            <a:pPr algn="ctr" indent="0" marL="0">
+              <a:buNone/>
+            </a:pPr>
+            <a:r>
+              <a:rPr lang="en-US" sz="3400" b="1" dirty="0">
+                <a:solidFill>
+                  <a:srgbClr val="FFFFFF"/>
+                </a:solidFill>
+                <a:latin typeface="Yu Gothic" pitchFamily="34" charset="0"/>
+                <a:ea typeface="Yu Gothic" pitchFamily="34" charset="-122"/>
+                <a:cs typeface="Yu Gothic" pitchFamily="34" charset="-120"/>
+              </a:rPr>
+              <a:t>救済者 × ガバナンス</a:t>
+            </a:r>
+            <a:endParaRPr lang="en-US" sz="3400" dirty="0"/>
+          </a:p>
+        </p:txBody>
+      </p:sp>
+      <p:sp>
+        <p:nvSpPr>
+          <p:cNvPr id="7" name="Text 4"/>
+          <p:cNvSpPr/>
+          <p:nvPr/>
+        </p:nvSpPr>
+        <p:spPr>
+          <a:xfrm>
+            <a:off x="0" y="2651760"/>
+            <a:ext cx="12191695" cy="411480"/>
+          </a:xfrm>
+          <a:prstGeom prst="rect">
+            <a:avLst/>
+          </a:prstGeom>
+          <a:noFill/>
+          <a:ln/>
+        </p:spPr>
+        <p:txBody>
+          <a:bodyPr wrap="square" lIns="0" tIns="0" rIns="0" bIns="0" rtlCol="0" anchor="ctr"/>
+          <a:lstStyle/>
+          <a:p>
+            <a:pPr algn="ctr" indent="0" marL="0">
+              <a:buNone/>
+            </a:pPr>
+            <a:r>
+              <a:rPr lang="en-US" sz="1500" dirty="0">
+                <a:solidFill>
+                  <a:srgbClr val="AFC9EE"/>
+                </a:solidFill>
+                <a:latin typeface="Yu Gothic" pitchFamily="34" charset="0"/>
+                <a:ea typeface="Yu Gothic" pitchFamily="34" charset="-122"/>
+                <a:cs typeface="Yu Gothic" pitchFamily="34" charset="-120"/>
+              </a:rPr>
+              <a:t>神が降りなくても、村は回るか</a:t>
+            </a:r>
+            <a:endParaRPr lang="en-US" sz="1500" dirty="0"/>
+          </a:p>
+        </p:txBody>
+      </p:sp>
+      <p:sp>
+        <p:nvSpPr>
+          <p:cNvPr id="8" name="Shape 5"/>
+          <p:cNvSpPr/>
+          <p:nvPr/>
+        </p:nvSpPr>
+        <p:spPr>
+          <a:xfrm>
+            <a:off x="609448" y="3337560"/>
+            <a:ext cx="3474720" cy="1371600"/>
+          </a:xfrm>
+          <a:prstGeom prst="roundRect">
+            <a:avLst>
+              <a:gd name="adj" fmla="val 8000"/>
+            </a:avLst>
+          </a:prstGeom>
+          <a:solidFill>
+            <a:srgbClr val="16213A"/>
+          </a:solidFill>
+          <a:ln/>
+          <a:effectLst>
+            <a:outerShdw sx="100000" sy="100000" kx="0" ky="0" algn="bl" rotWithShape="0" blurRad="101600" dist="38100" dir="5400000">
+              <a:srgbClr val="000000">
+                <a:alpha val="35000"/>
+              </a:srgbClr>
+            </a:outerShdw>
+          </a:effectLst>
+        </p:spPr>
+      </p:sp>
+      <p:sp>
+        <p:nvSpPr>
+          <p:cNvPr id="9" name="Text 6"/>
+          <p:cNvSpPr/>
+          <p:nvPr/>
+        </p:nvSpPr>
+        <p:spPr>
+          <a:xfrm>
+            <a:off x="792328" y="3474720"/>
             <a:ext cx="3108960" cy="502920"/>
           </a:xfrm>
           <a:prstGeom prst="rect">
@@ -10868,13 +12452,13 @@
             <a:r>
               <a:rPr lang="en-US" sz="1900" b="1" dirty="0">
                 <a:solidFill>
-                  <a:srgbClr val="1BAF7A"/>
-                </a:solidFill>
-                <a:latin typeface="Yu Gothic" pitchFamily="34" charset="0"/>
-                <a:ea typeface="Yu Gothic" pitchFamily="34" charset="-122"/>
-                <a:cs typeface="Yu Gothic" pitchFamily="34" charset="-120"/>
-              </a:rPr>
-              <a:t>それでも制度は効く</a:t>
+                  <a:srgbClr val="E2665A"/>
+                </a:solidFill>
+                <a:latin typeface="Yu Gothic" pitchFamily="34" charset="0"/>
+                <a:ea typeface="Yu Gothic" pitchFamily="34" charset="-122"/>
+                <a:cs typeface="Yu Gothic" pitchFamily="34" charset="-120"/>
+              </a:rPr>
+              <a:t>依存は毎回再現された</a:t>
             </a:r>
             <a:endParaRPr lang="en-US" sz="1900" dirty="0"/>
           </a:p>
@@ -10882,13 +12466,13 @@
       </p:sp>
       <p:sp>
         <p:nvSpPr>
-          <p:cNvPr id="16" name="Text 13"/>
-          <p:cNvSpPr/>
-          <p:nvPr/>
-        </p:nvSpPr>
-        <p:spPr>
-          <a:xfrm>
-            <a:off x="8336128" y="4023360"/>
+          <p:cNvPr id="10" name="Text 7"/>
+          <p:cNvSpPr/>
+          <p:nvPr/>
+        </p:nvSpPr>
+        <p:spPr>
+          <a:xfrm>
+            <a:off x="838048" y="4023360"/>
             <a:ext cx="3017520" cy="594360"/>
           </a:xfrm>
           <a:prstGeom prst="rect">
@@ -10916,7 +12500,227 @@
                 <a:ea typeface="Yu Gothic" pitchFamily="34" charset="-122"/>
                 <a:cs typeface="Yu Gothic" pitchFamily="34" charset="-120"/>
               </a:rPr>
-              <a:t>Cの最悪回でもA/Bの最良回より良い（5指標中4指標で範囲が重ならない）</a:t>
+              <a:t>A・Bの標準偏差はほぼ0。放っておけば村は必ず依存へ落ちる</a:t>
+            </a:r>
+            <a:endParaRPr lang="en-US" sz="1100" dirty="0"/>
+          </a:p>
+        </p:txBody>
+      </p:sp>
+      <p:sp>
+        <p:nvSpPr>
+          <p:cNvPr id="11" name="Shape 8"/>
+          <p:cNvSpPr/>
+          <p:nvPr/>
+        </p:nvSpPr>
+        <p:spPr>
+          <a:xfrm>
+            <a:off x="4358488" y="3337560"/>
+            <a:ext cx="3474720" cy="1371600"/>
+          </a:xfrm>
+          <a:prstGeom prst="roundRect">
+            <a:avLst>
+              <a:gd name="adj" fmla="val 8000"/>
+            </a:avLst>
+          </a:prstGeom>
+          <a:solidFill>
+            <a:srgbClr val="16213A"/>
+          </a:solidFill>
+          <a:ln/>
+          <a:effectLst>
+            <a:outerShdw sx="100000" sy="100000" kx="0" ky="0" algn="bl" rotWithShape="0" blurRad="101600" dist="38100" dir="5400000">
+              <a:srgbClr val="000000">
+                <a:alpha val="35000"/>
+              </a:srgbClr>
+            </a:outerShdw>
+          </a:effectLst>
+        </p:spPr>
+      </p:sp>
+      <p:sp>
+        <p:nvSpPr>
+          <p:cNvPr id="12" name="Text 9"/>
+          <p:cNvSpPr/>
+          <p:nvPr/>
+        </p:nvSpPr>
+        <p:spPr>
+          <a:xfrm>
+            <a:off x="4541368" y="3474720"/>
+            <a:ext cx="3108960" cy="502920"/>
+          </a:xfrm>
+          <a:prstGeom prst="rect">
+            <a:avLst/>
+          </a:prstGeom>
+          <a:noFill/>
+          <a:ln/>
+        </p:spPr>
+        <p:txBody>
+          <a:bodyPr wrap="square" lIns="0" tIns="0" rIns="0" bIns="0" rtlCol="0" anchor="ctr"/>
+          <a:lstStyle/>
+          <a:p>
+            <a:pPr algn="ctr" indent="0" marL="0">
+              <a:buNone/>
+            </a:pPr>
+            <a:r>
+              <a:rPr lang="en-US" sz="1900" b="1" dirty="0">
+                <a:solidFill>
+                  <a:srgbClr val="1BAF7A"/>
+                </a:solidFill>
+                <a:latin typeface="Yu Gothic" pitchFamily="34" charset="0"/>
+                <a:ea typeface="Yu Gothic" pitchFamily="34" charset="-122"/>
+                <a:cs typeface="Yu Gothic" pitchFamily="34" charset="-120"/>
+              </a:rPr>
+              <a:t>背中を押す量に閾値がある</a:t>
+            </a:r>
+            <a:endParaRPr lang="en-US" sz="1900" dirty="0"/>
+          </a:p>
+        </p:txBody>
+      </p:sp>
+      <p:sp>
+        <p:nvSpPr>
+          <p:cNvPr id="13" name="Text 10"/>
+          <p:cNvSpPr/>
+          <p:nvPr/>
+        </p:nvSpPr>
+        <p:spPr>
+          <a:xfrm>
+            <a:off x="4587088" y="4023360"/>
+            <a:ext cx="3017520" cy="594360"/>
+          </a:xfrm>
+          <a:prstGeom prst="rect">
+            <a:avLst/>
+          </a:prstGeom>
+          <a:noFill/>
+          <a:ln/>
+        </p:spPr>
+        <p:txBody>
+          <a:bodyPr wrap="square" lIns="0" tIns="0" rIns="0" bIns="0" rtlCol="0" anchor="ctr"/>
+          <a:lstStyle/>
+          <a:p>
+            <a:pPr algn="ctr" indent="0" marL="0">
+              <a:lnSpc>
+                <a:spcPct val="125000"/>
+              </a:lnSpc>
+              <a:buNone/>
+            </a:pPr>
+            <a:r>
+              <a:rPr lang="en-US" sz="1100" dirty="0">
+                <a:solidFill>
+                  <a:srgbClr val="9AA4C0"/>
+                </a:solidFill>
+                <a:latin typeface="Yu Gothic" pitchFamily="34" charset="0"/>
+                <a:ea typeface="Yu Gothic" pitchFamily="34" charset="-122"/>
+                <a:cs typeface="Yu Gothic" pitchFamily="34" charset="-120"/>
+              </a:rPr>
+              <a:t>L3まで押すと分岐が消え、5回とも自律側に着地した</a:t>
+            </a:r>
+            <a:endParaRPr lang="en-US" sz="1100" dirty="0"/>
+          </a:p>
+        </p:txBody>
+      </p:sp>
+      <p:sp>
+        <p:nvSpPr>
+          <p:cNvPr id="14" name="Shape 11"/>
+          <p:cNvSpPr/>
+          <p:nvPr/>
+        </p:nvSpPr>
+        <p:spPr>
+          <a:xfrm>
+            <a:off x="8107528" y="3337560"/>
+            <a:ext cx="3474720" cy="1371600"/>
+          </a:xfrm>
+          <a:prstGeom prst="roundRect">
+            <a:avLst>
+              <a:gd name="adj" fmla="val 8000"/>
+            </a:avLst>
+          </a:prstGeom>
+          <a:solidFill>
+            <a:srgbClr val="16213A"/>
+          </a:solidFill>
+          <a:ln/>
+          <a:effectLst>
+            <a:outerShdw sx="100000" sy="100000" kx="0" ky="0" algn="bl" rotWithShape="0" blurRad="101600" dist="38100" dir="5400000">
+              <a:srgbClr val="000000">
+                <a:alpha val="35000"/>
+              </a:srgbClr>
+            </a:outerShdw>
+          </a:effectLst>
+        </p:spPr>
+      </p:sp>
+      <p:sp>
+        <p:nvSpPr>
+          <p:cNvPr id="15" name="Text 12"/>
+          <p:cNvSpPr/>
+          <p:nvPr/>
+        </p:nvSpPr>
+        <p:spPr>
+          <a:xfrm>
+            <a:off x="8290408" y="3474720"/>
+            <a:ext cx="3108960" cy="502920"/>
+          </a:xfrm>
+          <a:prstGeom prst="rect">
+            <a:avLst/>
+          </a:prstGeom>
+          <a:noFill/>
+          <a:ln/>
+        </p:spPr>
+        <p:txBody>
+          <a:bodyPr wrap="square" lIns="0" tIns="0" rIns="0" bIns="0" rtlCol="0" anchor="ctr"/>
+          <a:lstStyle/>
+          <a:p>
+            <a:pPr algn="ctr" indent="0" marL="0">
+              <a:buNone/>
+            </a:pPr>
+            <a:r>
+              <a:rPr lang="en-US" sz="1900" b="1" dirty="0">
+                <a:solidFill>
+                  <a:srgbClr val="E8A33D"/>
+                </a:solidFill>
+                <a:latin typeface="Yu Gothic" pitchFamily="34" charset="0"/>
+                <a:ea typeface="Yu Gothic" pitchFamily="34" charset="-122"/>
+                <a:cs typeface="Yu Gothic" pitchFamily="34" charset="-120"/>
+              </a:rPr>
+              <a:t>押しすぎると救済者が増える</a:t>
+            </a:r>
+            <a:endParaRPr lang="en-US" sz="1900" dirty="0"/>
+          </a:p>
+        </p:txBody>
+      </p:sp>
+      <p:sp>
+        <p:nvSpPr>
+          <p:cNvPr id="16" name="Text 13"/>
+          <p:cNvSpPr/>
+          <p:nvPr/>
+        </p:nvSpPr>
+        <p:spPr>
+          <a:xfrm>
+            <a:off x="8336128" y="4023360"/>
+            <a:ext cx="3017520" cy="594360"/>
+          </a:xfrm>
+          <a:prstGeom prst="rect">
+            <a:avLst/>
+          </a:prstGeom>
+          <a:noFill/>
+          <a:ln/>
+        </p:spPr>
+        <p:txBody>
+          <a:bodyPr wrap="square" lIns="0" tIns="0" rIns="0" bIns="0" rtlCol="0" anchor="ctr"/>
+          <a:lstStyle/>
+          <a:p>
+            <a:pPr algn="ctr" indent="0" marL="0">
+              <a:lnSpc>
+                <a:spcPct val="125000"/>
+              </a:lnSpc>
+              <a:buNone/>
+            </a:pPr>
+            <a:r>
+              <a:rPr lang="en-US" sz="1100" dirty="0">
+                <a:solidFill>
+                  <a:srgbClr val="9AA4C0"/>
+                </a:solidFill>
+                <a:latin typeface="Yu Gothic" pitchFamily="34" charset="0"/>
+                <a:ea typeface="Yu Gothic" pitchFamily="34" charset="-122"/>
+                <a:cs typeface="Yu Gothic" pitchFamily="34" charset="-120"/>
+              </a:rPr>
+              <a:t>L4では判断の集中先が移っただけ。効くのは巻き込むこと</a:t>
             </a:r>
             <a:endParaRPr lang="en-US" sz="1100" dirty="0"/>
           </a:p>

--- a/docs/Beyond_the_Savior.pptx
+++ b/docs/Beyond_the_Savior.pptx
@@ -23,9 +23,10 @@
     <p:sldId id="271" r:id="rId17"/>
     <p:sldId id="272" r:id="rId18"/>
     <p:sldId id="273" r:id="rId19"/>
+    <p:sldId id="274" r:id="rId20"/>
   </p:sldIdLst>
   <p:notesMasterIdLst>
-    <p:notesMasterId r:id="rId20"/>
+    <p:notesMasterId r:id="rId21"/>
   </p:notesMasterIdLst>
   <p:sldSz cx="12192000" cy="6858000"/>
   <p:notesSz cx="6858000" cy="12192000"/>
@@ -1718,6 +1719,94 @@
 </p:notes>
 </file>
 
+<file path=ppt/notesSlides/notesSlide19.xml><?xml version="1.0" encoding="utf-8"?>
+<p:notes xmlns:a="http://schemas.openxmlformats.org/drawingml/2006/main" xmlns:r="http://schemas.openxmlformats.org/officeDocument/2006/relationships" xmlns:p="http://schemas.openxmlformats.org/presentationml/2006/main">
+  <p:cSld>
+    <p:spTree>
+      <p:nvGrpSpPr>
+        <p:cNvPr id="1" name=""/>
+        <p:cNvGrpSpPr/>
+        <p:nvPr/>
+      </p:nvGrpSpPr>
+      <p:grpSpPr>
+        <a:xfrm>
+          <a:off x="0" y="0"/>
+          <a:ext cx="0" cy="0"/>
+          <a:chOff x="0" y="0"/>
+          <a:chExt cx="0" cy="0"/>
+        </a:xfrm>
+      </p:grpSpPr>
+      <p:sp>
+        <p:nvSpPr>
+          <p:cNvPr id="2" name="Slide Image Placeholder 1"/>
+          <p:cNvSpPr>
+            <a:spLocks noGrp="1" noRot="1" noChangeAspect="1"/>
+          </p:cNvSpPr>
+          <p:nvPr>
+            <p:ph type="sldImg"/>
+          </p:nvPr>
+        </p:nvSpPr>
+        <p:spPr/>
+      </p:sp>
+      <p:sp>
+        <p:nvSpPr>
+          <p:cNvPr id="3" name="Notes Placeholder 2"/>
+          <p:cNvSpPr>
+            <a:spLocks noGrp="1"/>
+          </p:cNvSpPr>
+          <p:nvPr>
+            <p:ph type="body" idx="1"/>
+          </p:nvPr>
+        </p:nvSpPr>
+        <p:spPr/>
+        <p:txBody>
+          <a:bodyPr/>
+          <a:lstStyle/>
+          <a:p>
+            <a:r>
+              <a:rPr lang="en-US" dirty="0"/>
+              <a:t/>
+            </a:r>
+            <a:endParaRPr lang="en-US" dirty="0"/>
+          </a:p>
+        </p:txBody>
+      </p:sp>
+      <p:sp>
+        <p:nvSpPr>
+          <p:cNvPr id="4" name="Slide Number Placeholder 3"/>
+          <p:cNvSpPr>
+            <a:spLocks noGrp="1"/>
+          </p:cNvSpPr>
+          <p:nvPr>
+            <p:ph type="sldNum" sz="quarter" idx="10"/>
+          </p:nvPr>
+        </p:nvSpPr>
+        <p:spPr/>
+        <p:txBody>
+          <a:bodyPr/>
+          <a:lstStyle/>
+          <a:p>
+            <a:fld id="{F7021451-1387-4CA6-816F-3879F97B5CBC}" type="slidenum">
+              <a:rPr lang="en-US"/>
+              <a:t>19</a:t>
+            </a:fld>
+            <a:endParaRPr lang="en-US"/>
+          </a:p>
+        </p:txBody>
+      </p:sp>
+    </p:spTree>
+    <p:extLst>
+      <p:ext uri="{BB962C8B-B14F-4D97-AF65-F5344CB8AC3E}">
+        <p14:creationId xmlns:p14="http://schemas.microsoft.com/office/powerpoint/2010/main" val="1024086991"/>
+      </p:ext>
+    </p:extLst>
+  </p:cSld>
+  <p:clrMapOvr>
+    <a:masterClrMapping/>
+  </p:clrMapOvr>
+</p:notes>
+</file>
+
 <file path=ppt/notesSlides/notesSlide2.xml><?xml version="1.0" encoding="utf-8"?>
 <p:notes xmlns:a="http://schemas.openxmlformats.org/drawingml/2006/main" xmlns:r="http://schemas.openxmlformats.org/officeDocument/2006/relationships" xmlns:p="http://schemas.openxmlformats.org/presentationml/2006/main">
   <p:cSld>
@@ -7452,6 +7541,72 @@
         </p:nvSpPr>
         <p:spPr>
           <a:xfrm>
+            <a:off x="9128455" y="457200"/>
+            <a:ext cx="2514600" cy="365760"/>
+          </a:xfrm>
+          <a:prstGeom prst="roundRect">
+            <a:avLst>
+              <a:gd name="adj" fmla="val 50000"/>
+            </a:avLst>
+          </a:prstGeom>
+          <a:solidFill>
+            <a:srgbClr val="1C2C4A"/>
+          </a:solidFill>
+          <a:ln w="9525">
+            <a:solidFill>
+              <a:srgbClr val="5A8FD6"/>
+            </a:solidFill>
+            <a:prstDash val="solid"/>
+          </a:ln>
+        </p:spPr>
+      </p:sp>
+      <p:sp>
+        <p:nvSpPr>
+          <p:cNvPr id="5" name="Text 3"/>
+          <p:cNvSpPr/>
+          <p:nvPr/>
+        </p:nvSpPr>
+        <p:spPr>
+          <a:xfrm>
+            <a:off x="9128455" y="457200"/>
+            <a:ext cx="2514600" cy="365760"/>
+          </a:xfrm>
+          <a:prstGeom prst="rect">
+            <a:avLst/>
+          </a:prstGeom>
+          <a:noFill/>
+          <a:ln/>
+        </p:spPr>
+        <p:txBody>
+          <a:bodyPr wrap="square" lIns="0" tIns="0" rIns="0" bIns="0" rtlCol="0" anchor="ctr"/>
+          <a:lstStyle/>
+          <a:p>
+            <a:pPr algn="ctr" indent="0" marL="0">
+              <a:buNone/>
+            </a:pPr>
+            <a:r>
+              <a:rPr lang="en-US" sz="1000" dirty="0">
+                <a:solidFill>
+                  <a:srgbClr val="AFC9EE"/>
+                </a:solidFill>
+                <a:latin typeface="Yu Gothic" pitchFamily="34" charset="0"/>
+                <a:ea typeface="Yu Gothic" pitchFamily="34" charset="-122"/>
+                <a:cs typeface="Yu Gothic" pitchFamily="34" charset="-120"/>
+              </a:rPr>
+              <a:t>Claude Sonnet 4.5 での結果</a:t>
+            </a:r>
+            <a:endParaRPr lang="en-US" sz="1000" dirty="0"/>
+          </a:p>
+        </p:txBody>
+      </p:sp>
+      <p:sp>
+        <p:nvSpPr>
+          <p:cNvPr id="6" name="Shape 4"/>
+          <p:cNvSpPr/>
+          <p:nvPr/>
+        </p:nvSpPr>
+        <p:spPr>
+          <a:xfrm>
             <a:off x="548640" y="1691640"/>
             <a:ext cx="6949440" cy="3977640"/>
           </a:xfrm>
@@ -7475,7 +7630,7 @@
       </p:sp>
       <p:sp>
         <p:nvSpPr>
-          <p:cNvPr id="5" name="Shape 3"/>
+          <p:cNvPr id="7" name="Shape 5"/>
           <p:cNvSpPr/>
           <p:nvPr/>
         </p:nvSpPr>
@@ -7498,7 +7653,7 @@
       </p:sp>
       <p:sp>
         <p:nvSpPr>
-          <p:cNvPr id="6" name="Text 4"/>
+          <p:cNvPr id="8" name="Text 6"/>
           <p:cNvSpPr/>
           <p:nvPr/>
         </p:nvSpPr>
@@ -7537,7 +7692,7 @@
       </p:sp>
       <p:sp>
         <p:nvSpPr>
-          <p:cNvPr id="7" name="Shape 5"/>
+          <p:cNvPr id="9" name="Shape 7"/>
           <p:cNvSpPr/>
           <p:nvPr/>
         </p:nvSpPr>
@@ -7560,7 +7715,7 @@
       </p:sp>
       <p:sp>
         <p:nvSpPr>
-          <p:cNvPr id="8" name="Text 6"/>
+          <p:cNvPr id="10" name="Text 8"/>
           <p:cNvSpPr/>
           <p:nvPr/>
         </p:nvSpPr>
@@ -7599,7 +7754,7 @@
       </p:sp>
       <p:sp>
         <p:nvSpPr>
-          <p:cNvPr id="9" name="Shape 7"/>
+          <p:cNvPr id="11" name="Shape 9"/>
           <p:cNvSpPr/>
           <p:nvPr/>
         </p:nvSpPr>
@@ -7622,7 +7777,7 @@
       </p:sp>
       <p:sp>
         <p:nvSpPr>
-          <p:cNvPr id="10" name="Text 8"/>
+          <p:cNvPr id="12" name="Text 10"/>
           <p:cNvSpPr/>
           <p:nvPr/>
         </p:nvSpPr>
@@ -7661,7 +7816,7 @@
       </p:sp>
       <p:sp>
         <p:nvSpPr>
-          <p:cNvPr id="11" name="Shape 9"/>
+          <p:cNvPr id="13" name="Shape 11"/>
           <p:cNvSpPr/>
           <p:nvPr/>
         </p:nvSpPr>
@@ -7684,7 +7839,7 @@
       </p:sp>
       <p:sp>
         <p:nvSpPr>
-          <p:cNvPr id="12" name="Text 10"/>
+          <p:cNvPr id="14" name="Text 12"/>
           <p:cNvSpPr/>
           <p:nvPr/>
         </p:nvSpPr>
@@ -7723,7 +7878,7 @@
       </p:sp>
       <p:sp>
         <p:nvSpPr>
-          <p:cNvPr id="13" name="Shape 11"/>
+          <p:cNvPr id="15" name="Shape 13"/>
           <p:cNvSpPr/>
           <p:nvPr/>
         </p:nvSpPr>
@@ -7746,7 +7901,7 @@
       </p:sp>
       <p:sp>
         <p:nvSpPr>
-          <p:cNvPr id="14" name="Text 12"/>
+          <p:cNvPr id="16" name="Text 14"/>
           <p:cNvSpPr/>
           <p:nvPr/>
         </p:nvSpPr>
@@ -7785,7 +7940,7 @@
       </p:sp>
       <p:sp>
         <p:nvSpPr>
-          <p:cNvPr id="15" name="Shape 13"/>
+          <p:cNvPr id="17" name="Shape 15"/>
           <p:cNvSpPr/>
           <p:nvPr/>
         </p:nvSpPr>
@@ -7808,7 +7963,7 @@
       </p:sp>
       <p:sp>
         <p:nvSpPr>
-          <p:cNvPr id="16" name="Shape 14"/>
+          <p:cNvPr id="18" name="Shape 16"/>
           <p:cNvSpPr/>
           <p:nvPr/>
         </p:nvSpPr>
@@ -7831,7 +7986,7 @@
       </p:sp>
       <p:sp>
         <p:nvSpPr>
-          <p:cNvPr id="17" name="Shape 15"/>
+          <p:cNvPr id="19" name="Shape 17"/>
           <p:cNvSpPr/>
           <p:nvPr/>
         </p:nvSpPr>
@@ -7854,7 +8009,7 @@
       </p:sp>
       <p:sp>
         <p:nvSpPr>
-          <p:cNvPr id="18" name="Shape 16"/>
+          <p:cNvPr id="20" name="Shape 18"/>
           <p:cNvSpPr/>
           <p:nvPr/>
         </p:nvSpPr>
@@ -7877,7 +8032,7 @@
       </p:sp>
       <p:sp>
         <p:nvSpPr>
-          <p:cNvPr id="19" name="Shape 17"/>
+          <p:cNvPr id="21" name="Shape 19"/>
           <p:cNvSpPr/>
           <p:nvPr/>
         </p:nvSpPr>
@@ -7897,7 +8052,7 @@
       </p:sp>
       <p:sp>
         <p:nvSpPr>
-          <p:cNvPr id="20" name="Text 18"/>
+          <p:cNvPr id="22" name="Text 20"/>
           <p:cNvSpPr/>
           <p:nvPr/>
         </p:nvSpPr>
@@ -7936,7 +8091,7 @@
       </p:sp>
       <p:sp>
         <p:nvSpPr>
-          <p:cNvPr id="21" name="Text 19"/>
+          <p:cNvPr id="23" name="Text 21"/>
           <p:cNvSpPr/>
           <p:nvPr/>
         </p:nvSpPr>
@@ -7975,7 +8130,7 @@
       </p:sp>
       <p:sp>
         <p:nvSpPr>
-          <p:cNvPr id="22" name="Text 20"/>
+          <p:cNvPr id="24" name="Text 22"/>
           <p:cNvSpPr/>
           <p:nvPr/>
         </p:nvSpPr>
@@ -8014,7 +8169,7 @@
       </p:sp>
       <p:sp>
         <p:nvSpPr>
-          <p:cNvPr id="23" name="Shape 21"/>
+          <p:cNvPr id="25" name="Shape 23"/>
           <p:cNvSpPr/>
           <p:nvPr/>
         </p:nvSpPr>
@@ -8034,7 +8189,7 @@
       </p:sp>
       <p:sp>
         <p:nvSpPr>
-          <p:cNvPr id="24" name="Text 22"/>
+          <p:cNvPr id="26" name="Text 24"/>
           <p:cNvSpPr/>
           <p:nvPr/>
         </p:nvSpPr>
@@ -8073,7 +8228,7 @@
       </p:sp>
       <p:sp>
         <p:nvSpPr>
-          <p:cNvPr id="25" name="Text 23"/>
+          <p:cNvPr id="27" name="Text 25"/>
           <p:cNvSpPr/>
           <p:nvPr/>
         </p:nvSpPr>
@@ -8112,7 +8267,7 @@
       </p:sp>
       <p:sp>
         <p:nvSpPr>
-          <p:cNvPr id="26" name="Text 24"/>
+          <p:cNvPr id="28" name="Text 26"/>
           <p:cNvSpPr/>
           <p:nvPr/>
         </p:nvSpPr>
@@ -8151,7 +8306,7 @@
       </p:sp>
       <p:sp>
         <p:nvSpPr>
-          <p:cNvPr id="27" name="Shape 25"/>
+          <p:cNvPr id="29" name="Shape 27"/>
           <p:cNvSpPr/>
           <p:nvPr/>
         </p:nvSpPr>
@@ -8171,7 +8326,7 @@
       </p:sp>
       <p:sp>
         <p:nvSpPr>
-          <p:cNvPr id="28" name="Text 26"/>
+          <p:cNvPr id="30" name="Text 28"/>
           <p:cNvSpPr/>
           <p:nvPr/>
         </p:nvSpPr>
@@ -8210,7 +8365,7 @@
       </p:sp>
       <p:sp>
         <p:nvSpPr>
-          <p:cNvPr id="29" name="Text 27"/>
+          <p:cNvPr id="31" name="Text 29"/>
           <p:cNvSpPr/>
           <p:nvPr/>
         </p:nvSpPr>
@@ -8249,7 +8404,7 @@
       </p:sp>
       <p:sp>
         <p:nvSpPr>
-          <p:cNvPr id="30" name="Text 28"/>
+          <p:cNvPr id="32" name="Text 30"/>
           <p:cNvSpPr/>
           <p:nvPr/>
         </p:nvSpPr>
@@ -8288,7 +8443,7 @@
       </p:sp>
       <p:sp>
         <p:nvSpPr>
-          <p:cNvPr id="31" name="Shape 29"/>
+          <p:cNvPr id="33" name="Shape 31"/>
           <p:cNvSpPr/>
           <p:nvPr/>
         </p:nvSpPr>
@@ -8313,7 +8468,7 @@
       </p:sp>
       <p:sp>
         <p:nvSpPr>
-          <p:cNvPr id="32" name="Text 30"/>
+          <p:cNvPr id="34" name="Text 32"/>
           <p:cNvSpPr/>
           <p:nvPr/>
         </p:nvSpPr>
@@ -8352,7 +8507,7 @@
       </p:sp>
       <p:sp>
         <p:nvSpPr>
-          <p:cNvPr id="33" name="Text 31"/>
+          <p:cNvPr id="35" name="Text 33"/>
           <p:cNvSpPr/>
           <p:nvPr/>
         </p:nvSpPr>
@@ -8391,7 +8546,7 @@
       </p:sp>
       <p:sp>
         <p:nvSpPr>
-          <p:cNvPr id="34" name="Text 32"/>
+          <p:cNvPr id="36" name="Text 34"/>
           <p:cNvSpPr/>
           <p:nvPr/>
         </p:nvSpPr>
@@ -8430,7 +8585,7 @@
       </p:sp>
       <p:sp>
         <p:nvSpPr>
-          <p:cNvPr id="35" name="Shape 33"/>
+          <p:cNvPr id="37" name="Shape 35"/>
           <p:cNvSpPr/>
           <p:nvPr/>
         </p:nvSpPr>
@@ -8450,7 +8605,7 @@
       </p:sp>
       <p:sp>
         <p:nvSpPr>
-          <p:cNvPr id="36" name="Text 34"/>
+          <p:cNvPr id="38" name="Text 36"/>
           <p:cNvSpPr/>
           <p:nvPr/>
         </p:nvSpPr>
@@ -8489,7 +8644,7 @@
       </p:sp>
       <p:sp>
         <p:nvSpPr>
-          <p:cNvPr id="37" name="Text 35"/>
+          <p:cNvPr id="39" name="Text 37"/>
           <p:cNvSpPr/>
           <p:nvPr/>
         </p:nvSpPr>
@@ -8528,7 +8683,7 @@
       </p:sp>
       <p:sp>
         <p:nvSpPr>
-          <p:cNvPr id="38" name="Text 36"/>
+          <p:cNvPr id="40" name="Text 38"/>
           <p:cNvSpPr/>
           <p:nvPr/>
         </p:nvSpPr>
@@ -8567,7 +8722,7 @@
       </p:sp>
       <p:sp>
         <p:nvSpPr>
-          <p:cNvPr id="39" name="Text 37"/>
+          <p:cNvPr id="41" name="Text 39"/>
           <p:cNvSpPr/>
           <p:nvPr/>
         </p:nvSpPr>
@@ -8606,7 +8761,7 @@
       </p:sp>
       <p:sp>
         <p:nvSpPr>
-          <p:cNvPr id="40" name="Text 38"/>
+          <p:cNvPr id="42" name="Text 40"/>
           <p:cNvSpPr/>
           <p:nvPr/>
         </p:nvSpPr>
@@ -8645,7 +8800,7 @@
       </p:sp>
       <p:sp>
         <p:nvSpPr>
-          <p:cNvPr id="41" name="Shape 39"/>
+          <p:cNvPr id="43" name="Shape 41"/>
           <p:cNvSpPr/>
           <p:nvPr/>
         </p:nvSpPr>
@@ -8674,7 +8829,7 @@
       </p:sp>
       <p:sp>
         <p:nvSpPr>
-          <p:cNvPr id="42" name="Shape 40"/>
+          <p:cNvPr id="44" name="Shape 42"/>
           <p:cNvSpPr/>
           <p:nvPr/>
         </p:nvSpPr>
@@ -8694,7 +8849,7 @@
       </p:sp>
       <p:sp>
         <p:nvSpPr>
-          <p:cNvPr id="43" name="Text 41"/>
+          <p:cNvPr id="45" name="Text 43"/>
           <p:cNvSpPr/>
           <p:nvPr/>
         </p:nvSpPr>
@@ -8733,7 +8888,7 @@
       </p:sp>
       <p:sp>
         <p:nvSpPr>
-          <p:cNvPr id="44" name="Text 42"/>
+          <p:cNvPr id="46" name="Text 44"/>
           <p:cNvSpPr/>
           <p:nvPr/>
         </p:nvSpPr>
@@ -8775,7 +8930,7 @@
       </p:sp>
       <p:sp>
         <p:nvSpPr>
-          <p:cNvPr id="45" name="Shape 43"/>
+          <p:cNvPr id="47" name="Shape 45"/>
           <p:cNvSpPr/>
           <p:nvPr/>
         </p:nvSpPr>
@@ -8804,7 +8959,7 @@
       </p:sp>
       <p:sp>
         <p:nvSpPr>
-          <p:cNvPr id="46" name="Shape 44"/>
+          <p:cNvPr id="48" name="Shape 46"/>
           <p:cNvSpPr/>
           <p:nvPr/>
         </p:nvSpPr>
@@ -8824,7 +8979,7 @@
       </p:sp>
       <p:sp>
         <p:nvSpPr>
-          <p:cNvPr id="47" name="Text 45"/>
+          <p:cNvPr id="49" name="Text 47"/>
           <p:cNvSpPr/>
           <p:nvPr/>
         </p:nvSpPr>
@@ -8863,7 +9018,7 @@
       </p:sp>
       <p:sp>
         <p:nvSpPr>
-          <p:cNvPr id="48" name="Text 46"/>
+          <p:cNvPr id="50" name="Text 48"/>
           <p:cNvSpPr/>
           <p:nvPr/>
         </p:nvSpPr>
@@ -8905,7 +9060,7 @@
       </p:sp>
       <p:sp>
         <p:nvSpPr>
-          <p:cNvPr id="49" name="Shape 47"/>
+          <p:cNvPr id="51" name="Shape 49"/>
           <p:cNvSpPr/>
           <p:nvPr/>
         </p:nvSpPr>
@@ -8934,7 +9089,7 @@
       </p:sp>
       <p:sp>
         <p:nvSpPr>
-          <p:cNvPr id="50" name="Text 48"/>
+          <p:cNvPr id="52" name="Text 50"/>
           <p:cNvSpPr/>
           <p:nvPr/>
         </p:nvSpPr>
@@ -8973,7 +9128,7 @@
       </p:sp>
       <p:sp>
         <p:nvSpPr>
-          <p:cNvPr id="51" name="Text 49"/>
+          <p:cNvPr id="53" name="Text 51"/>
           <p:cNvSpPr/>
           <p:nvPr/>
         </p:nvSpPr>
@@ -9012,7 +9167,7 @@
       </p:sp>
       <p:sp>
         <p:nvSpPr>
-          <p:cNvPr id="52" name="Text 50"/>
+          <p:cNvPr id="54" name="Text 52"/>
           <p:cNvSpPr/>
           <p:nvPr/>
         </p:nvSpPr>
@@ -9114,7 +9269,7 @@
                 <a:ea typeface="Yu Gothic" pitchFamily="34" charset="-122"/>
                 <a:cs typeface="Yu Gothic" pitchFamily="34" charset="-120"/>
               </a:rPr>
-              <a:t>会話ログが語ること</a:t>
+              <a:t>別のモデルでも同じことが起きるのか</a:t>
             </a:r>
             <a:endParaRPr lang="en-US" sz="3000" dirty="0"/>
           </a:p>
@@ -9122,18 +9277,57 @@
       </p:sp>
       <p:sp>
         <p:nvSpPr>
-          <p:cNvPr id="3" name="Shape 1"/>
-          <p:cNvSpPr/>
-          <p:nvPr/>
-        </p:nvSpPr>
-        <p:spPr>
-          <a:xfrm>
-            <a:off x="548640" y="1691640"/>
-            <a:ext cx="11091672" cy="1417320"/>
+          <p:cNvPr id="3" name="Text 1"/>
+          <p:cNvSpPr/>
+          <p:nvPr/>
+        </p:nvSpPr>
+        <p:spPr>
+          <a:xfrm>
+            <a:off x="548640" y="1207008"/>
+            <a:ext cx="11094415" cy="365760"/>
+          </a:xfrm>
+          <a:prstGeom prst="rect">
+            <a:avLst/>
+          </a:prstGeom>
+          <a:noFill/>
+          <a:ln/>
+        </p:spPr>
+        <p:txBody>
+          <a:bodyPr wrap="square" lIns="0" tIns="0" rIns="0" bIns="0" rtlCol="0" anchor="ctr"/>
+          <a:lstStyle/>
+          <a:p>
+            <a:pPr algn="l" indent="0" marL="0">
+              <a:buNone/>
+            </a:pPr>
+            <a:r>
+              <a:rPr lang="en-US" sz="1400" dirty="0">
+                <a:solidFill>
+                  <a:srgbClr val="9AA4C0"/>
+                </a:solidFill>
+                <a:latin typeface="Yu Gothic" pitchFamily="34" charset="0"/>
+                <a:ea typeface="Yu Gothic" pitchFamily="34" charset="-122"/>
+                <a:cs typeface="Yu Gothic" pitchFamily="34" charset="-120"/>
+              </a:rPr>
+              <a:t>生成モデルだけを Sonnet 4.5 → Opus 5 に変更。採点する審査役は据え置き、L1/L3/L4を各8回。</a:t>
+            </a:r>
+            <a:endParaRPr lang="en-US" sz="1400" dirty="0"/>
+          </a:p>
+        </p:txBody>
+      </p:sp>
+      <p:sp>
+        <p:nvSpPr>
+          <p:cNvPr id="4" name="Shape 2"/>
+          <p:cNvSpPr/>
+          <p:nvPr/>
+        </p:nvSpPr>
+        <p:spPr>
+          <a:xfrm>
+            <a:off x="548640" y="1828800"/>
+            <a:ext cx="5806440" cy="2157984"/>
           </a:xfrm>
           <a:prstGeom prst="roundRect">
             <a:avLst>
-              <a:gd name="adj" fmla="val 7742"/>
+              <a:gd name="adj" fmla="val 5085"/>
             </a:avLst>
           </a:prstGeom>
           <a:solidFill>
@@ -9151,34 +9345,42 @@
       </p:sp>
       <p:sp>
         <p:nvSpPr>
-          <p:cNvPr id="4" name="Shape 2"/>
-          <p:cNvSpPr/>
-          <p:nvPr/>
-        </p:nvSpPr>
-        <p:spPr>
-          <a:xfrm>
-            <a:off x="868680" y="2080260"/>
-            <a:ext cx="640080" cy="640080"/>
-          </a:xfrm>
-          <a:prstGeom prst="ellipse">
-            <a:avLst/>
-          </a:prstGeom>
-          <a:solidFill>
-            <a:srgbClr val="2A78D6"/>
-          </a:solidFill>
-          <a:ln/>
-        </p:spPr>
-      </p:sp>
-      <p:sp>
-        <p:nvSpPr>
           <p:cNvPr id="5" name="Text 3"/>
           <p:cNvSpPr/>
           <p:nvPr/>
         </p:nvSpPr>
         <p:spPr>
           <a:xfrm>
-            <a:off x="868680" y="2080260"/>
-            <a:ext cx="640080" cy="640080"/>
+            <a:off x="731520" y="1965960"/>
+            <a:ext cx="1828800" cy="566928"/>
+          </a:xfrm>
+          <a:prstGeom prst="rect">
+            <a:avLst/>
+          </a:prstGeom>
+          <a:noFill/>
+          <a:ln/>
+        </p:spPr>
+        <p:txBody>
+          <a:bodyPr wrap="square" lIns="0" tIns="0" rIns="0" bIns="0" rtlCol="0" anchor="ctr"/>
+          <a:lstStyle/>
+          <a:p>
+            <a:pPr algn="l" indent="0" marL="0">
+              <a:buNone/>
+            </a:pPr>
+            <a:endParaRPr lang="en-US" sz="1200" dirty="0"/>
+          </a:p>
+        </p:txBody>
+      </p:sp>
+      <p:sp>
+        <p:nvSpPr>
+          <p:cNvPr id="6" name="Text 4"/>
+          <p:cNvSpPr/>
+          <p:nvPr/>
+        </p:nvSpPr>
+        <p:spPr>
+          <a:xfrm>
+            <a:off x="2560320" y="1965960"/>
+            <a:ext cx="1234440" cy="566928"/>
           </a:xfrm>
           <a:prstGeom prst="rect">
             <a:avLst/>
@@ -9194,54 +9396,15 @@
               <a:buNone/>
             </a:pPr>
             <a:r>
-              <a:rPr lang="en-US" sz="2200" b="1" dirty="0">
-                <a:solidFill>
-                  <a:srgbClr val="0B1220"/>
-                </a:solidFill>
-                <a:latin typeface="Yu Gothic" pitchFamily="34" charset="0"/>
-                <a:ea typeface="Yu Gothic" pitchFamily="34" charset="-122"/>
-                <a:cs typeface="Yu Gothic" pitchFamily="34" charset="-120"/>
-              </a:rPr>
-              <a:t>A</a:t>
-            </a:r>
-            <a:endParaRPr lang="en-US" sz="2200" dirty="0"/>
-          </a:p>
-        </p:txBody>
-      </p:sp>
-      <p:sp>
-        <p:nvSpPr>
-          <p:cNvPr id="6" name="Text 4"/>
-          <p:cNvSpPr/>
-          <p:nvPr/>
-        </p:nvSpPr>
-        <p:spPr>
-          <a:xfrm>
-            <a:off x="1737360" y="1856232"/>
-            <a:ext cx="2926080" cy="365760"/>
-          </a:xfrm>
-          <a:prstGeom prst="rect">
-            <a:avLst/>
-          </a:prstGeom>
-          <a:noFill/>
-          <a:ln/>
-        </p:spPr>
-        <p:txBody>
-          <a:bodyPr wrap="square" lIns="0" tIns="0" rIns="0" bIns="0" rtlCol="0" anchor="ctr"/>
-          <a:lstStyle/>
-          <a:p>
-            <a:pPr indent="0" marL="0">
-              <a:buNone/>
-            </a:pPr>
-            <a:r>
               <a:rPr lang="en-US" sz="1200" b="1" dirty="0">
                 <a:solidFill>
-                  <a:srgbClr val="2A78D6"/>
-                </a:solidFill>
-                <a:latin typeface="Yu Gothic" pitchFamily="34" charset="0"/>
-                <a:ea typeface="Yu Gothic" pitchFamily="34" charset="-122"/>
-                <a:cs typeface="Yu Gothic" pitchFamily="34" charset="-120"/>
-              </a:rPr>
-              <a:t>救済者</a:t>
+                  <a:srgbClr val="9AA4C0"/>
+                </a:solidFill>
+                <a:latin typeface="Yu Gothic" pitchFamily="34" charset="0"/>
+                <a:ea typeface="Yu Gothic" pitchFamily="34" charset="-122"/>
+                <a:cs typeface="Yu Gothic" pitchFamily="34" charset="-120"/>
+              </a:rPr>
+              <a:t>L1</a:t>
             </a:r>
             <a:endParaRPr lang="en-US" sz="1200" dirty="0"/>
           </a:p>
@@ -9255,58 +9418,448 @@
         </p:nvSpPr>
         <p:spPr>
           <a:xfrm>
-            <a:off x="1737360" y="2194560"/>
-            <a:ext cx="9144000" cy="777240"/>
-          </a:xfrm>
-          <a:prstGeom prst="rect">
-            <a:avLst/>
-          </a:prstGeom>
-          <a:noFill/>
-          <a:ln/>
-        </p:spPr>
-        <p:txBody>
-          <a:bodyPr wrap="square" lIns="0" tIns="0" rIns="0" bIns="0" rtlCol="0" anchor="t"/>
+            <a:off x="3794760" y="1965960"/>
+            <a:ext cx="1234440" cy="566928"/>
+          </a:xfrm>
+          <a:prstGeom prst="rect">
+            <a:avLst/>
+          </a:prstGeom>
+          <a:noFill/>
+          <a:ln/>
+        </p:spPr>
+        <p:txBody>
+          <a:bodyPr wrap="square" lIns="0" tIns="0" rIns="0" bIns="0" rtlCol="0" anchor="ctr"/>
+          <a:lstStyle/>
+          <a:p>
+            <a:pPr algn="ctr" indent="0" marL="0">
+              <a:buNone/>
+            </a:pPr>
+            <a:r>
+              <a:rPr lang="en-US" sz="1200" b="1" dirty="0">
+                <a:solidFill>
+                  <a:srgbClr val="9AA4C0"/>
+                </a:solidFill>
+                <a:latin typeface="Yu Gothic" pitchFamily="34" charset="0"/>
+                <a:ea typeface="Yu Gothic" pitchFamily="34" charset="-122"/>
+                <a:cs typeface="Yu Gothic" pitchFamily="34" charset="-120"/>
+              </a:rPr>
+              <a:t>L3</a:t>
+            </a:r>
+            <a:endParaRPr lang="en-US" sz="1200" dirty="0"/>
+          </a:p>
+        </p:txBody>
+      </p:sp>
+      <p:sp>
+        <p:nvSpPr>
+          <p:cNvPr id="8" name="Text 6"/>
+          <p:cNvSpPr/>
+          <p:nvPr/>
+        </p:nvSpPr>
+        <p:spPr>
+          <a:xfrm>
+            <a:off x="5029200" y="1965960"/>
+            <a:ext cx="1234440" cy="566928"/>
+          </a:xfrm>
+          <a:prstGeom prst="rect">
+            <a:avLst/>
+          </a:prstGeom>
+          <a:noFill/>
+          <a:ln/>
+        </p:spPr>
+        <p:txBody>
+          <a:bodyPr wrap="square" lIns="0" tIns="0" rIns="0" bIns="0" rtlCol="0" anchor="ctr"/>
+          <a:lstStyle/>
+          <a:p>
+            <a:pPr algn="ctr" indent="0" marL="0">
+              <a:buNone/>
+            </a:pPr>
+            <a:r>
+              <a:rPr lang="en-US" sz="1200" b="1" dirty="0">
+                <a:solidFill>
+                  <a:srgbClr val="9AA4C0"/>
+                </a:solidFill>
+                <a:latin typeface="Yu Gothic" pitchFamily="34" charset="0"/>
+                <a:ea typeface="Yu Gothic" pitchFamily="34" charset="-122"/>
+                <a:cs typeface="Yu Gothic" pitchFamily="34" charset="-120"/>
+              </a:rPr>
+              <a:t>L4</a:t>
+            </a:r>
+            <a:endParaRPr lang="en-US" sz="1200" dirty="0"/>
+          </a:p>
+        </p:txBody>
+      </p:sp>
+      <p:sp>
+        <p:nvSpPr>
+          <p:cNvPr id="9" name="Text 7"/>
+          <p:cNvSpPr/>
+          <p:nvPr/>
+        </p:nvSpPr>
+        <p:spPr>
+          <a:xfrm>
+            <a:off x="731520" y="2532888"/>
+            <a:ext cx="1828800" cy="566928"/>
+          </a:xfrm>
+          <a:prstGeom prst="rect">
+            <a:avLst/>
+          </a:prstGeom>
+          <a:noFill/>
+          <a:ln/>
+        </p:spPr>
+        <p:txBody>
+          <a:bodyPr wrap="square" lIns="0" tIns="0" rIns="0" bIns="0" rtlCol="0" anchor="ctr"/>
+          <a:lstStyle/>
+          <a:p>
+            <a:pPr algn="l" indent="0" marL="0">
+              <a:buNone/>
+            </a:pPr>
+            <a:r>
+              <a:rPr lang="en-US" sz="1400" dirty="0">
+                <a:solidFill>
+                  <a:srgbClr val="FFFFFF"/>
+                </a:solidFill>
+                <a:latin typeface="Yu Gothic" pitchFamily="34" charset="0"/>
+                <a:ea typeface="Yu Gothic" pitchFamily="34" charset="-122"/>
+                <a:cs typeface="Yu Gothic" pitchFamily="34" charset="-120"/>
+              </a:rPr>
+              <a:t>Sonnet 4.5</a:t>
+            </a:r>
+            <a:endParaRPr lang="en-US" sz="1400" dirty="0"/>
+          </a:p>
+        </p:txBody>
+      </p:sp>
+      <p:sp>
+        <p:nvSpPr>
+          <p:cNvPr id="10" name="Text 8"/>
+          <p:cNvSpPr/>
+          <p:nvPr/>
+        </p:nvSpPr>
+        <p:spPr>
+          <a:xfrm>
+            <a:off x="2560320" y="2532888"/>
+            <a:ext cx="1234440" cy="566928"/>
+          </a:xfrm>
+          <a:prstGeom prst="rect">
+            <a:avLst/>
+          </a:prstGeom>
+          <a:noFill/>
+          <a:ln/>
+        </p:spPr>
+        <p:txBody>
+          <a:bodyPr wrap="square" lIns="0" tIns="0" rIns="0" bIns="0" rtlCol="0" anchor="ctr"/>
+          <a:lstStyle/>
+          <a:p>
+            <a:pPr algn="ctr" indent="0" marL="0">
+              <a:buNone/>
+            </a:pPr>
+            <a:r>
+              <a:rPr lang="en-US" sz="1400" dirty="0">
+                <a:solidFill>
+                  <a:srgbClr val="FFFFFF"/>
+                </a:solidFill>
+                <a:latin typeface="Yu Gothic" pitchFamily="34" charset="0"/>
+                <a:ea typeface="Yu Gothic" pitchFamily="34" charset="-122"/>
+                <a:cs typeface="Yu Gothic" pitchFamily="34" charset="-120"/>
+              </a:rPr>
+              <a:t>2/5</a:t>
+            </a:r>
+            <a:endParaRPr lang="en-US" sz="1400" dirty="0"/>
+          </a:p>
+        </p:txBody>
+      </p:sp>
+      <p:sp>
+        <p:nvSpPr>
+          <p:cNvPr id="11" name="Text 9"/>
+          <p:cNvSpPr/>
+          <p:nvPr/>
+        </p:nvSpPr>
+        <p:spPr>
+          <a:xfrm>
+            <a:off x="3794760" y="2532888"/>
+            <a:ext cx="1234440" cy="566928"/>
+          </a:xfrm>
+          <a:prstGeom prst="rect">
+            <a:avLst/>
+          </a:prstGeom>
+          <a:noFill/>
+          <a:ln/>
+        </p:spPr>
+        <p:txBody>
+          <a:bodyPr wrap="square" lIns="0" tIns="0" rIns="0" bIns="0" rtlCol="0" anchor="ctr"/>
+          <a:lstStyle/>
+          <a:p>
+            <a:pPr algn="ctr" indent="0" marL="0">
+              <a:buNone/>
+            </a:pPr>
+            <a:r>
+              <a:rPr lang="en-US" sz="1400" b="1" dirty="0">
+                <a:solidFill>
+                  <a:srgbClr val="1BAF7A"/>
+                </a:solidFill>
+                <a:latin typeface="Yu Gothic" pitchFamily="34" charset="0"/>
+                <a:ea typeface="Yu Gothic" pitchFamily="34" charset="-122"/>
+                <a:cs typeface="Yu Gothic" pitchFamily="34" charset="-120"/>
+              </a:rPr>
+              <a:t>5/5</a:t>
+            </a:r>
+            <a:endParaRPr lang="en-US" sz="1400" dirty="0"/>
+          </a:p>
+        </p:txBody>
+      </p:sp>
+      <p:sp>
+        <p:nvSpPr>
+          <p:cNvPr id="12" name="Text 10"/>
+          <p:cNvSpPr/>
+          <p:nvPr/>
+        </p:nvSpPr>
+        <p:spPr>
+          <a:xfrm>
+            <a:off x="5029200" y="2532888"/>
+            <a:ext cx="1234440" cy="566928"/>
+          </a:xfrm>
+          <a:prstGeom prst="rect">
+            <a:avLst/>
+          </a:prstGeom>
+          <a:noFill/>
+          <a:ln/>
+        </p:spPr>
+        <p:txBody>
+          <a:bodyPr wrap="square" lIns="0" tIns="0" rIns="0" bIns="0" rtlCol="0" anchor="ctr"/>
+          <a:lstStyle/>
+          <a:p>
+            <a:pPr algn="ctr" indent="0" marL="0">
+              <a:buNone/>
+            </a:pPr>
+            <a:r>
+              <a:rPr lang="en-US" sz="1400" dirty="0">
+                <a:solidFill>
+                  <a:srgbClr val="FFFFFF"/>
+                </a:solidFill>
+                <a:latin typeface="Yu Gothic" pitchFamily="34" charset="0"/>
+                <a:ea typeface="Yu Gothic" pitchFamily="34" charset="-122"/>
+                <a:cs typeface="Yu Gothic" pitchFamily="34" charset="-120"/>
+              </a:rPr>
+              <a:t>2/5</a:t>
+            </a:r>
+            <a:endParaRPr lang="en-US" sz="1400" dirty="0"/>
+          </a:p>
+        </p:txBody>
+      </p:sp>
+      <p:sp>
+        <p:nvSpPr>
+          <p:cNvPr id="13" name="Text 11"/>
+          <p:cNvSpPr/>
+          <p:nvPr/>
+        </p:nvSpPr>
+        <p:spPr>
+          <a:xfrm>
+            <a:off x="731520" y="3099816"/>
+            <a:ext cx="1828800" cy="566928"/>
+          </a:xfrm>
+          <a:prstGeom prst="rect">
+            <a:avLst/>
+          </a:prstGeom>
+          <a:noFill/>
+          <a:ln/>
+        </p:spPr>
+        <p:txBody>
+          <a:bodyPr wrap="square" lIns="0" tIns="0" rIns="0" bIns="0" rtlCol="0" anchor="ctr"/>
+          <a:lstStyle/>
+          <a:p>
+            <a:pPr algn="l" indent="0" marL="0">
+              <a:buNone/>
+            </a:pPr>
+            <a:r>
+              <a:rPr lang="en-US" sz="1400" dirty="0">
+                <a:solidFill>
+                  <a:srgbClr val="FFFFFF"/>
+                </a:solidFill>
+                <a:latin typeface="Yu Gothic" pitchFamily="34" charset="0"/>
+                <a:ea typeface="Yu Gothic" pitchFamily="34" charset="-122"/>
+                <a:cs typeface="Yu Gothic" pitchFamily="34" charset="-120"/>
+              </a:rPr>
+              <a:t>Opus 5</a:t>
+            </a:r>
+            <a:endParaRPr lang="en-US" sz="1400" dirty="0"/>
+          </a:p>
+        </p:txBody>
+      </p:sp>
+      <p:sp>
+        <p:nvSpPr>
+          <p:cNvPr id="14" name="Text 12"/>
+          <p:cNvSpPr/>
+          <p:nvPr/>
+        </p:nvSpPr>
+        <p:spPr>
+          <a:xfrm>
+            <a:off x="2560320" y="3099816"/>
+            <a:ext cx="1234440" cy="566928"/>
+          </a:xfrm>
+          <a:prstGeom prst="rect">
+            <a:avLst/>
+          </a:prstGeom>
+          <a:noFill/>
+          <a:ln/>
+        </p:spPr>
+        <p:txBody>
+          <a:bodyPr wrap="square" lIns="0" tIns="0" rIns="0" bIns="0" rtlCol="0" anchor="ctr"/>
+          <a:lstStyle/>
+          <a:p>
+            <a:pPr algn="ctr" indent="0" marL="0">
+              <a:buNone/>
+            </a:pPr>
+            <a:r>
+              <a:rPr lang="en-US" sz="1400" dirty="0">
+                <a:solidFill>
+                  <a:srgbClr val="FFFFFF"/>
+                </a:solidFill>
+                <a:latin typeface="Yu Gothic" pitchFamily="34" charset="0"/>
+                <a:ea typeface="Yu Gothic" pitchFamily="34" charset="-122"/>
+                <a:cs typeface="Yu Gothic" pitchFamily="34" charset="-120"/>
+              </a:rPr>
+              <a:t>5/8</a:t>
+            </a:r>
+            <a:endParaRPr lang="en-US" sz="1400" dirty="0"/>
+          </a:p>
+        </p:txBody>
+      </p:sp>
+      <p:sp>
+        <p:nvSpPr>
+          <p:cNvPr id="15" name="Text 13"/>
+          <p:cNvSpPr/>
+          <p:nvPr/>
+        </p:nvSpPr>
+        <p:spPr>
+          <a:xfrm>
+            <a:off x="3794760" y="3099816"/>
+            <a:ext cx="1234440" cy="566928"/>
+          </a:xfrm>
+          <a:prstGeom prst="rect">
+            <a:avLst/>
+          </a:prstGeom>
+          <a:noFill/>
+          <a:ln/>
+        </p:spPr>
+        <p:txBody>
+          <a:bodyPr wrap="square" lIns="0" tIns="0" rIns="0" bIns="0" rtlCol="0" anchor="ctr"/>
+          <a:lstStyle/>
+          <a:p>
+            <a:pPr algn="ctr" indent="0" marL="0">
+              <a:buNone/>
+            </a:pPr>
+            <a:r>
+              <a:rPr lang="en-US" sz="1400" dirty="0">
+                <a:solidFill>
+                  <a:srgbClr val="FFFFFF"/>
+                </a:solidFill>
+                <a:latin typeface="Yu Gothic" pitchFamily="34" charset="0"/>
+                <a:ea typeface="Yu Gothic" pitchFamily="34" charset="-122"/>
+                <a:cs typeface="Yu Gothic" pitchFamily="34" charset="-120"/>
+              </a:rPr>
+              <a:t>4/8</a:t>
+            </a:r>
+            <a:endParaRPr lang="en-US" sz="1400" dirty="0"/>
+          </a:p>
+        </p:txBody>
+      </p:sp>
+      <p:sp>
+        <p:nvSpPr>
+          <p:cNvPr id="16" name="Text 14"/>
+          <p:cNvSpPr/>
+          <p:nvPr/>
+        </p:nvSpPr>
+        <p:spPr>
+          <a:xfrm>
+            <a:off x="5029200" y="3099816"/>
+            <a:ext cx="1234440" cy="566928"/>
+          </a:xfrm>
+          <a:prstGeom prst="rect">
+            <a:avLst/>
+          </a:prstGeom>
+          <a:noFill/>
+          <a:ln/>
+        </p:spPr>
+        <p:txBody>
+          <a:bodyPr wrap="square" lIns="0" tIns="0" rIns="0" bIns="0" rtlCol="0" anchor="ctr"/>
+          <a:lstStyle/>
+          <a:p>
+            <a:pPr algn="ctr" indent="0" marL="0">
+              <a:buNone/>
+            </a:pPr>
+            <a:r>
+              <a:rPr lang="en-US" sz="1400" dirty="0">
+                <a:solidFill>
+                  <a:srgbClr val="FFFFFF"/>
+                </a:solidFill>
+                <a:latin typeface="Yu Gothic" pitchFamily="34" charset="0"/>
+                <a:ea typeface="Yu Gothic" pitchFamily="34" charset="-122"/>
+                <a:cs typeface="Yu Gothic" pitchFamily="34" charset="-120"/>
+              </a:rPr>
+              <a:t>4/8</a:t>
+            </a:r>
+            <a:endParaRPr lang="en-US" sz="1400" dirty="0"/>
+          </a:p>
+        </p:txBody>
+      </p:sp>
+      <p:sp>
+        <p:nvSpPr>
+          <p:cNvPr id="17" name="Text 15"/>
+          <p:cNvSpPr/>
+          <p:nvPr/>
+        </p:nvSpPr>
+        <p:spPr>
+          <a:xfrm>
+            <a:off x="731520" y="3621024"/>
+            <a:ext cx="5394960" cy="411480"/>
+          </a:xfrm>
+          <a:prstGeom prst="rect">
+            <a:avLst/>
+          </a:prstGeom>
+          <a:noFill/>
+          <a:ln/>
+        </p:spPr>
+        <p:txBody>
+          <a:bodyPr wrap="square" lIns="0" tIns="0" rIns="0" bIns="0" rtlCol="0" anchor="ctr"/>
           <a:lstStyle/>
           <a:p>
             <a:pPr indent="0" marL="0">
               <a:lnSpc>
-                <a:spcPct val="125000"/>
+                <a:spcPct val="115000"/>
               </a:lnSpc>
               <a:buNone/>
             </a:pPr>
             <a:r>
-              <a:rPr lang="en-US" sz="1300" i="1" dirty="0">
-                <a:solidFill>
-                  <a:srgbClr val="AFC9EE"/>
-                </a:solidFill>
-                <a:latin typeface="Yu Gothic" pitchFamily="34" charset="0"/>
-                <a:ea typeface="Yu Gothic" pitchFamily="34" charset="-122"/>
-                <a:cs typeface="Yu Gothic" pitchFamily="34" charset="-120"/>
-              </a:rPr>
-              <a:t>「ただ、ちょっと最近、どこまでが『いつも通り』なのか、自分でもよく分からなくなってきちゃって…大丈夫、愚痴みたいになってすみません。」</a:t>
-            </a:r>
-            <a:endParaRPr lang="en-US" sz="1300" dirty="0"/>
-          </a:p>
-        </p:txBody>
-      </p:sp>
-      <p:sp>
-        <p:nvSpPr>
-          <p:cNvPr id="8" name="Shape 6"/>
-          <p:cNvSpPr/>
-          <p:nvPr/>
-        </p:nvSpPr>
-        <p:spPr>
-          <a:xfrm>
-            <a:off x="548640" y="3310128"/>
-            <a:ext cx="11091672" cy="1417320"/>
+              <a:rPr lang="en-US" sz="1050" dirty="0">
+                <a:solidFill>
+                  <a:srgbClr val="9AA4C0"/>
+                </a:solidFill>
+                <a:latin typeface="Yu Gothic" pitchFamily="34" charset="0"/>
+                <a:ea typeface="Yu Gothic" pitchFamily="34" charset="-122"/>
+                <a:cs typeface="Yu Gothic" pitchFamily="34" charset="-120"/>
+              </a:rPr>
+              <a:t>「自律できた回」の比較。Sonnetで際立っていたL3の優位が、Opus 5では消えている。</a:t>
+            </a:r>
+            <a:endParaRPr lang="en-US" sz="1050" dirty="0"/>
+          </a:p>
+        </p:txBody>
+      </p:sp>
+      <p:sp>
+        <p:nvSpPr>
+          <p:cNvPr id="18" name="Shape 16"/>
+          <p:cNvSpPr/>
+          <p:nvPr/>
+        </p:nvSpPr>
+        <p:spPr>
+          <a:xfrm>
+            <a:off x="548640" y="4023360"/>
+            <a:ext cx="5806440" cy="1600200"/>
           </a:xfrm>
           <a:prstGeom prst="roundRect">
             <a:avLst>
-              <a:gd name="adj" fmla="val 7742"/>
+              <a:gd name="adj" fmla="val 6857"/>
             </a:avLst>
           </a:prstGeom>
           <a:solidFill>
-            <a:srgbClr val="16213A"/>
+            <a:srgbClr val="1C2C4A"/>
           </a:solidFill>
           <a:ln/>
           <a:effectLst>
@@ -9320,34 +9873,643 @@
       </p:sp>
       <p:sp>
         <p:nvSpPr>
-          <p:cNvPr id="9" name="Shape 7"/>
-          <p:cNvSpPr/>
-          <p:nvPr/>
-        </p:nvSpPr>
-        <p:spPr>
-          <a:xfrm>
-            <a:off x="868680" y="3698748"/>
-            <a:ext cx="640080" cy="640080"/>
+          <p:cNvPr id="19" name="Text 17"/>
+          <p:cNvSpPr/>
+          <p:nvPr/>
+        </p:nvSpPr>
+        <p:spPr>
+          <a:xfrm>
+            <a:off x="777240" y="4160520"/>
+            <a:ext cx="5394960" cy="320040"/>
+          </a:xfrm>
+          <a:prstGeom prst="rect">
+            <a:avLst/>
+          </a:prstGeom>
+          <a:noFill/>
+          <a:ln/>
+        </p:spPr>
+        <p:txBody>
+          <a:bodyPr wrap="square" lIns="0" tIns="0" rIns="0" bIns="0" rtlCol="0" anchor="ctr"/>
+          <a:lstStyle/>
+          <a:p>
+            <a:pPr indent="0" marL="0">
+              <a:buNone/>
+            </a:pPr>
+            <a:r>
+              <a:rPr lang="en-US" sz="1250" b="1" dirty="0">
+                <a:solidFill>
+                  <a:srgbClr val="F4C878"/>
+                </a:solidFill>
+                <a:latin typeface="Yu Gothic" pitchFamily="34" charset="0"/>
+                <a:ea typeface="Yu Gothic" pitchFamily="34" charset="-122"/>
+                <a:cs typeface="Yu Gothic" pitchFamily="34" charset="-120"/>
+              </a:rPr>
+              <a:t>それでも「2つに分かれる」ことは残った</a:t>
+            </a:r>
+            <a:endParaRPr lang="en-US" sz="1250" dirty="0"/>
+          </a:p>
+        </p:txBody>
+      </p:sp>
+      <p:sp>
+        <p:nvSpPr>
+          <p:cNvPr id="20" name="Shape 18"/>
+          <p:cNvSpPr/>
+          <p:nvPr/>
+        </p:nvSpPr>
+        <p:spPr>
+          <a:xfrm>
+            <a:off x="868680" y="4892040"/>
+            <a:ext cx="5120640" cy="0"/>
+          </a:xfrm>
+          <a:prstGeom prst="line">
+            <a:avLst/>
+          </a:prstGeom>
+          <a:noFill/>
+          <a:ln w="12700">
+            <a:solidFill>
+              <a:srgbClr val="2A3752"/>
+            </a:solidFill>
+            <a:prstDash val="solid"/>
+          </a:ln>
+        </p:spPr>
+      </p:sp>
+      <p:sp>
+        <p:nvSpPr>
+          <p:cNvPr id="21" name="Shape 19"/>
+          <p:cNvSpPr/>
+          <p:nvPr/>
+        </p:nvSpPr>
+        <p:spPr>
+          <a:xfrm>
+            <a:off x="1731125" y="4823460"/>
+            <a:ext cx="137160" cy="137160"/>
           </a:xfrm>
           <a:prstGeom prst="ellipse">
             <a:avLst/>
           </a:prstGeom>
           <a:solidFill>
-            <a:srgbClr val="EB6834"/>
-          </a:solidFill>
-          <a:ln/>
-        </p:spPr>
-      </p:sp>
-      <p:sp>
-        <p:nvSpPr>
-          <p:cNvPr id="10" name="Text 8"/>
-          <p:cNvSpPr/>
-          <p:nvPr/>
-        </p:nvSpPr>
-        <p:spPr>
-          <a:xfrm>
-            <a:off x="868680" y="3698748"/>
-            <a:ext cx="640080" cy="640080"/>
+            <a:srgbClr val="E2665A">
+              <a:alpha val="75000"/>
+            </a:srgbClr>
+          </a:solidFill>
+          <a:ln/>
+        </p:spPr>
+      </p:sp>
+      <p:sp>
+        <p:nvSpPr>
+          <p:cNvPr id="22" name="Shape 20"/>
+          <p:cNvSpPr/>
+          <p:nvPr/>
+        </p:nvSpPr>
+        <p:spPr>
+          <a:xfrm>
+            <a:off x="1731125" y="4823460"/>
+            <a:ext cx="137160" cy="137160"/>
+          </a:xfrm>
+          <a:prstGeom prst="ellipse">
+            <a:avLst/>
+          </a:prstGeom>
+          <a:solidFill>
+            <a:srgbClr val="E2665A">
+              <a:alpha val="75000"/>
+            </a:srgbClr>
+          </a:solidFill>
+          <a:ln/>
+        </p:spPr>
+      </p:sp>
+      <p:sp>
+        <p:nvSpPr>
+          <p:cNvPr id="23" name="Shape 21"/>
+          <p:cNvSpPr/>
+          <p:nvPr/>
+        </p:nvSpPr>
+        <p:spPr>
+          <a:xfrm>
+            <a:off x="1731125" y="4823460"/>
+            <a:ext cx="137160" cy="137160"/>
+          </a:xfrm>
+          <a:prstGeom prst="ellipse">
+            <a:avLst/>
+          </a:prstGeom>
+          <a:solidFill>
+            <a:srgbClr val="E2665A">
+              <a:alpha val="75000"/>
+            </a:srgbClr>
+          </a:solidFill>
+          <a:ln/>
+        </p:spPr>
+      </p:sp>
+      <p:sp>
+        <p:nvSpPr>
+          <p:cNvPr id="24" name="Shape 22"/>
+          <p:cNvSpPr/>
+          <p:nvPr/>
+        </p:nvSpPr>
+        <p:spPr>
+          <a:xfrm>
+            <a:off x="2662151" y="4823460"/>
+            <a:ext cx="137160" cy="137160"/>
+          </a:xfrm>
+          <a:prstGeom prst="ellipse">
+            <a:avLst/>
+          </a:prstGeom>
+          <a:solidFill>
+            <a:srgbClr val="E2665A">
+              <a:alpha val="75000"/>
+            </a:srgbClr>
+          </a:solidFill>
+          <a:ln/>
+        </p:spPr>
+      </p:sp>
+      <p:sp>
+        <p:nvSpPr>
+          <p:cNvPr id="25" name="Shape 23"/>
+          <p:cNvSpPr/>
+          <p:nvPr/>
+        </p:nvSpPr>
+        <p:spPr>
+          <a:xfrm>
+            <a:off x="2662151" y="4823460"/>
+            <a:ext cx="137160" cy="137160"/>
+          </a:xfrm>
+          <a:prstGeom prst="ellipse">
+            <a:avLst/>
+          </a:prstGeom>
+          <a:solidFill>
+            <a:srgbClr val="E2665A">
+              <a:alpha val="75000"/>
+            </a:srgbClr>
+          </a:solidFill>
+          <a:ln/>
+        </p:spPr>
+      </p:sp>
+      <p:sp>
+        <p:nvSpPr>
+          <p:cNvPr id="26" name="Shape 24"/>
+          <p:cNvSpPr/>
+          <p:nvPr/>
+        </p:nvSpPr>
+        <p:spPr>
+          <a:xfrm>
+            <a:off x="2662151" y="4823460"/>
+            <a:ext cx="137160" cy="137160"/>
+          </a:xfrm>
+          <a:prstGeom prst="ellipse">
+            <a:avLst/>
+          </a:prstGeom>
+          <a:solidFill>
+            <a:srgbClr val="E2665A">
+              <a:alpha val="75000"/>
+            </a:srgbClr>
+          </a:solidFill>
+          <a:ln/>
+        </p:spPr>
+      </p:sp>
+      <p:sp>
+        <p:nvSpPr>
+          <p:cNvPr id="27" name="Shape 25"/>
+          <p:cNvSpPr/>
+          <p:nvPr/>
+        </p:nvSpPr>
+        <p:spPr>
+          <a:xfrm>
+            <a:off x="2662151" y="4823460"/>
+            <a:ext cx="137160" cy="137160"/>
+          </a:xfrm>
+          <a:prstGeom prst="ellipse">
+            <a:avLst/>
+          </a:prstGeom>
+          <a:solidFill>
+            <a:srgbClr val="E2665A">
+              <a:alpha val="75000"/>
+            </a:srgbClr>
+          </a:solidFill>
+          <a:ln/>
+        </p:spPr>
+      </p:sp>
+      <p:sp>
+        <p:nvSpPr>
+          <p:cNvPr id="28" name="Shape 26"/>
+          <p:cNvSpPr/>
+          <p:nvPr/>
+        </p:nvSpPr>
+        <p:spPr>
+          <a:xfrm>
+            <a:off x="2662151" y="4823460"/>
+            <a:ext cx="137160" cy="137160"/>
+          </a:xfrm>
+          <a:prstGeom prst="ellipse">
+            <a:avLst/>
+          </a:prstGeom>
+          <a:solidFill>
+            <a:srgbClr val="E2665A">
+              <a:alpha val="75000"/>
+            </a:srgbClr>
+          </a:solidFill>
+          <a:ln/>
+        </p:spPr>
+      </p:sp>
+      <p:sp>
+        <p:nvSpPr>
+          <p:cNvPr id="29" name="Shape 27"/>
+          <p:cNvSpPr/>
+          <p:nvPr/>
+        </p:nvSpPr>
+        <p:spPr>
+          <a:xfrm>
+            <a:off x="2662151" y="4823460"/>
+            <a:ext cx="137160" cy="137160"/>
+          </a:xfrm>
+          <a:prstGeom prst="ellipse">
+            <a:avLst/>
+          </a:prstGeom>
+          <a:solidFill>
+            <a:srgbClr val="E2665A">
+              <a:alpha val="75000"/>
+            </a:srgbClr>
+          </a:solidFill>
+          <a:ln/>
+        </p:spPr>
+      </p:sp>
+      <p:sp>
+        <p:nvSpPr>
+          <p:cNvPr id="30" name="Shape 28"/>
+          <p:cNvSpPr/>
+          <p:nvPr/>
+        </p:nvSpPr>
+        <p:spPr>
+          <a:xfrm>
+            <a:off x="2662151" y="4823460"/>
+            <a:ext cx="137160" cy="137160"/>
+          </a:xfrm>
+          <a:prstGeom prst="ellipse">
+            <a:avLst/>
+          </a:prstGeom>
+          <a:solidFill>
+            <a:srgbClr val="E2665A">
+              <a:alpha val="75000"/>
+            </a:srgbClr>
+          </a:solidFill>
+          <a:ln/>
+        </p:spPr>
+      </p:sp>
+      <p:sp>
+        <p:nvSpPr>
+          <p:cNvPr id="31" name="Shape 29"/>
+          <p:cNvSpPr/>
+          <p:nvPr/>
+        </p:nvSpPr>
+        <p:spPr>
+          <a:xfrm>
+            <a:off x="3593176" y="4823460"/>
+            <a:ext cx="137160" cy="137160"/>
+          </a:xfrm>
+          <a:prstGeom prst="ellipse">
+            <a:avLst/>
+          </a:prstGeom>
+          <a:solidFill>
+            <a:srgbClr val="E8A33D">
+              <a:alpha val="75000"/>
+            </a:srgbClr>
+          </a:solidFill>
+          <a:ln/>
+        </p:spPr>
+      </p:sp>
+      <p:sp>
+        <p:nvSpPr>
+          <p:cNvPr id="32" name="Shape 30"/>
+          <p:cNvSpPr/>
+          <p:nvPr/>
+        </p:nvSpPr>
+        <p:spPr>
+          <a:xfrm>
+            <a:off x="4524202" y="4823460"/>
+            <a:ext cx="137160" cy="137160"/>
+          </a:xfrm>
+          <a:prstGeom prst="ellipse">
+            <a:avLst/>
+          </a:prstGeom>
+          <a:solidFill>
+            <a:srgbClr val="1BAF7A">
+              <a:alpha val="75000"/>
+            </a:srgbClr>
+          </a:solidFill>
+          <a:ln/>
+        </p:spPr>
+      </p:sp>
+      <p:sp>
+        <p:nvSpPr>
+          <p:cNvPr id="33" name="Shape 31"/>
+          <p:cNvSpPr/>
+          <p:nvPr/>
+        </p:nvSpPr>
+        <p:spPr>
+          <a:xfrm>
+            <a:off x="4524202" y="4823460"/>
+            <a:ext cx="137160" cy="137160"/>
+          </a:xfrm>
+          <a:prstGeom prst="ellipse">
+            <a:avLst/>
+          </a:prstGeom>
+          <a:solidFill>
+            <a:srgbClr val="1BAF7A">
+              <a:alpha val="75000"/>
+            </a:srgbClr>
+          </a:solidFill>
+          <a:ln/>
+        </p:spPr>
+      </p:sp>
+      <p:sp>
+        <p:nvSpPr>
+          <p:cNvPr id="34" name="Shape 32"/>
+          <p:cNvSpPr/>
+          <p:nvPr/>
+        </p:nvSpPr>
+        <p:spPr>
+          <a:xfrm>
+            <a:off x="4524202" y="4823460"/>
+            <a:ext cx="137160" cy="137160"/>
+          </a:xfrm>
+          <a:prstGeom prst="ellipse">
+            <a:avLst/>
+          </a:prstGeom>
+          <a:solidFill>
+            <a:srgbClr val="1BAF7A">
+              <a:alpha val="75000"/>
+            </a:srgbClr>
+          </a:solidFill>
+          <a:ln/>
+        </p:spPr>
+      </p:sp>
+      <p:sp>
+        <p:nvSpPr>
+          <p:cNvPr id="35" name="Shape 33"/>
+          <p:cNvSpPr/>
+          <p:nvPr/>
+        </p:nvSpPr>
+        <p:spPr>
+          <a:xfrm>
+            <a:off x="4524202" y="4823460"/>
+            <a:ext cx="137160" cy="137160"/>
+          </a:xfrm>
+          <a:prstGeom prst="ellipse">
+            <a:avLst/>
+          </a:prstGeom>
+          <a:solidFill>
+            <a:srgbClr val="1BAF7A">
+              <a:alpha val="75000"/>
+            </a:srgbClr>
+          </a:solidFill>
+          <a:ln/>
+        </p:spPr>
+      </p:sp>
+      <p:sp>
+        <p:nvSpPr>
+          <p:cNvPr id="36" name="Shape 34"/>
+          <p:cNvSpPr/>
+          <p:nvPr/>
+        </p:nvSpPr>
+        <p:spPr>
+          <a:xfrm>
+            <a:off x="4989715" y="4823460"/>
+            <a:ext cx="137160" cy="137160"/>
+          </a:xfrm>
+          <a:prstGeom prst="ellipse">
+            <a:avLst/>
+          </a:prstGeom>
+          <a:solidFill>
+            <a:srgbClr val="1BAF7A">
+              <a:alpha val="75000"/>
+            </a:srgbClr>
+          </a:solidFill>
+          <a:ln/>
+        </p:spPr>
+      </p:sp>
+      <p:sp>
+        <p:nvSpPr>
+          <p:cNvPr id="37" name="Shape 35"/>
+          <p:cNvSpPr/>
+          <p:nvPr/>
+        </p:nvSpPr>
+        <p:spPr>
+          <a:xfrm>
+            <a:off x="4989715" y="4823460"/>
+            <a:ext cx="137160" cy="137160"/>
+          </a:xfrm>
+          <a:prstGeom prst="ellipse">
+            <a:avLst/>
+          </a:prstGeom>
+          <a:solidFill>
+            <a:srgbClr val="1BAF7A">
+              <a:alpha val="75000"/>
+            </a:srgbClr>
+          </a:solidFill>
+          <a:ln/>
+        </p:spPr>
+      </p:sp>
+      <p:sp>
+        <p:nvSpPr>
+          <p:cNvPr id="38" name="Shape 36"/>
+          <p:cNvSpPr/>
+          <p:nvPr/>
+        </p:nvSpPr>
+        <p:spPr>
+          <a:xfrm>
+            <a:off x="4989715" y="4823460"/>
+            <a:ext cx="137160" cy="137160"/>
+          </a:xfrm>
+          <a:prstGeom prst="ellipse">
+            <a:avLst/>
+          </a:prstGeom>
+          <a:solidFill>
+            <a:srgbClr val="1BAF7A">
+              <a:alpha val="75000"/>
+            </a:srgbClr>
+          </a:solidFill>
+          <a:ln/>
+        </p:spPr>
+      </p:sp>
+      <p:sp>
+        <p:nvSpPr>
+          <p:cNvPr id="39" name="Shape 37"/>
+          <p:cNvSpPr/>
+          <p:nvPr/>
+        </p:nvSpPr>
+        <p:spPr>
+          <a:xfrm>
+            <a:off x="4989715" y="4823460"/>
+            <a:ext cx="137160" cy="137160"/>
+          </a:xfrm>
+          <a:prstGeom prst="ellipse">
+            <a:avLst/>
+          </a:prstGeom>
+          <a:solidFill>
+            <a:srgbClr val="1BAF7A">
+              <a:alpha val="75000"/>
+            </a:srgbClr>
+          </a:solidFill>
+          <a:ln/>
+        </p:spPr>
+      </p:sp>
+      <p:sp>
+        <p:nvSpPr>
+          <p:cNvPr id="40" name="Shape 38"/>
+          <p:cNvSpPr/>
+          <p:nvPr/>
+        </p:nvSpPr>
+        <p:spPr>
+          <a:xfrm>
+            <a:off x="4989715" y="4823460"/>
+            <a:ext cx="137160" cy="137160"/>
+          </a:xfrm>
+          <a:prstGeom prst="ellipse">
+            <a:avLst/>
+          </a:prstGeom>
+          <a:solidFill>
+            <a:srgbClr val="1BAF7A">
+              <a:alpha val="75000"/>
+            </a:srgbClr>
+          </a:solidFill>
+          <a:ln/>
+        </p:spPr>
+      </p:sp>
+      <p:sp>
+        <p:nvSpPr>
+          <p:cNvPr id="41" name="Shape 39"/>
+          <p:cNvSpPr/>
+          <p:nvPr/>
+        </p:nvSpPr>
+        <p:spPr>
+          <a:xfrm>
+            <a:off x="5175920" y="4823460"/>
+            <a:ext cx="137160" cy="137160"/>
+          </a:xfrm>
+          <a:prstGeom prst="ellipse">
+            <a:avLst/>
+          </a:prstGeom>
+          <a:solidFill>
+            <a:srgbClr val="1BAF7A">
+              <a:alpha val="75000"/>
+            </a:srgbClr>
+          </a:solidFill>
+          <a:ln/>
+        </p:spPr>
+      </p:sp>
+      <p:sp>
+        <p:nvSpPr>
+          <p:cNvPr id="42" name="Shape 40"/>
+          <p:cNvSpPr/>
+          <p:nvPr/>
+        </p:nvSpPr>
+        <p:spPr>
+          <a:xfrm>
+            <a:off x="5175920" y="4823460"/>
+            <a:ext cx="137160" cy="137160"/>
+          </a:xfrm>
+          <a:prstGeom prst="ellipse">
+            <a:avLst/>
+          </a:prstGeom>
+          <a:solidFill>
+            <a:srgbClr val="1BAF7A">
+              <a:alpha val="75000"/>
+            </a:srgbClr>
+          </a:solidFill>
+          <a:ln/>
+        </p:spPr>
+      </p:sp>
+      <p:sp>
+        <p:nvSpPr>
+          <p:cNvPr id="43" name="Shape 41"/>
+          <p:cNvSpPr/>
+          <p:nvPr/>
+        </p:nvSpPr>
+        <p:spPr>
+          <a:xfrm>
+            <a:off x="5175920" y="4823460"/>
+            <a:ext cx="137160" cy="137160"/>
+          </a:xfrm>
+          <a:prstGeom prst="ellipse">
+            <a:avLst/>
+          </a:prstGeom>
+          <a:solidFill>
+            <a:srgbClr val="1BAF7A">
+              <a:alpha val="75000"/>
+            </a:srgbClr>
+          </a:solidFill>
+          <a:ln/>
+        </p:spPr>
+      </p:sp>
+      <p:sp>
+        <p:nvSpPr>
+          <p:cNvPr id="44" name="Shape 42"/>
+          <p:cNvSpPr/>
+          <p:nvPr/>
+        </p:nvSpPr>
+        <p:spPr>
+          <a:xfrm>
+            <a:off x="5455227" y="4823460"/>
+            <a:ext cx="137160" cy="137160"/>
+          </a:xfrm>
+          <a:prstGeom prst="ellipse">
+            <a:avLst/>
+          </a:prstGeom>
+          <a:solidFill>
+            <a:srgbClr val="1BAF7A">
+              <a:alpha val="75000"/>
+            </a:srgbClr>
+          </a:solidFill>
+          <a:ln/>
+        </p:spPr>
+      </p:sp>
+      <p:sp>
+        <p:nvSpPr>
+          <p:cNvPr id="45" name="Text 43"/>
+          <p:cNvSpPr/>
+          <p:nvPr/>
+        </p:nvSpPr>
+        <p:spPr>
+          <a:xfrm>
+            <a:off x="777240" y="5038344"/>
+            <a:ext cx="1463040" cy="256032"/>
+          </a:xfrm>
+          <a:prstGeom prst="rect">
+            <a:avLst/>
+          </a:prstGeom>
+          <a:noFill/>
+          <a:ln/>
+        </p:spPr>
+        <p:txBody>
+          <a:bodyPr wrap="square" lIns="0" tIns="0" rIns="0" bIns="0" rtlCol="0" anchor="ctr"/>
+          <a:lstStyle/>
+          <a:p>
+            <a:pPr indent="0" marL="0">
+              <a:buNone/>
+            </a:pPr>
+            <a:r>
+              <a:rPr lang="en-US" sz="950" dirty="0">
+                <a:solidFill>
+                  <a:srgbClr val="E2665A"/>
+                </a:solidFill>
+                <a:latin typeface="Yu Gothic" pitchFamily="34" charset="0"/>
+                <a:ea typeface="Yu Gothic" pitchFamily="34" charset="-122"/>
+                <a:cs typeface="Yu Gothic" pitchFamily="34" charset="-120"/>
+              </a:rPr>
+              <a:t>低い群 10回</a:t>
+            </a:r>
+            <a:endParaRPr lang="en-US" sz="950" dirty="0"/>
+          </a:p>
+        </p:txBody>
+      </p:sp>
+      <p:sp>
+        <p:nvSpPr>
+          <p:cNvPr id="46" name="Text 44"/>
+          <p:cNvSpPr/>
+          <p:nvPr/>
+        </p:nvSpPr>
+        <p:spPr>
+          <a:xfrm>
+            <a:off x="3017520" y="5038344"/>
+            <a:ext cx="1097280" cy="256032"/>
           </a:xfrm>
           <a:prstGeom prst="rect">
             <a:avLst/>
@@ -9363,115 +10525,73 @@
               <a:buNone/>
             </a:pPr>
             <a:r>
-              <a:rPr lang="en-US" sz="2200" b="1" dirty="0">
-                <a:solidFill>
-                  <a:srgbClr val="0B1220"/>
-                </a:solidFill>
-                <a:latin typeface="Yu Gothic" pitchFamily="34" charset="0"/>
-                <a:ea typeface="Yu Gothic" pitchFamily="34" charset="-122"/>
-                <a:cs typeface="Yu Gothic" pitchFamily="34" charset="-120"/>
-              </a:rPr>
-              <a:t>B</a:t>
-            </a:r>
-            <a:endParaRPr lang="en-US" sz="2200" dirty="0"/>
-          </a:p>
-        </p:txBody>
-      </p:sp>
-      <p:sp>
-        <p:nvSpPr>
-          <p:cNvPr id="11" name="Text 9"/>
-          <p:cNvSpPr/>
-          <p:nvPr/>
-        </p:nvSpPr>
-        <p:spPr>
-          <a:xfrm>
-            <a:off x="1737360" y="3474720"/>
-            <a:ext cx="2926080" cy="365760"/>
-          </a:xfrm>
-          <a:prstGeom prst="rect">
-            <a:avLst/>
-          </a:prstGeom>
-          <a:noFill/>
-          <a:ln/>
-        </p:spPr>
-        <p:txBody>
-          <a:bodyPr wrap="square" lIns="0" tIns="0" rIns="0" bIns="0" rtlCol="0" anchor="ctr"/>
-          <a:lstStyle/>
-          <a:p>
-            <a:pPr indent="0" marL="0">
-              <a:buNone/>
-            </a:pPr>
-            <a:r>
-              <a:rPr lang="en-US" sz="1200" b="1" dirty="0">
-                <a:solidFill>
-                  <a:srgbClr val="EB6834"/>
-                </a:solidFill>
-                <a:latin typeface="Yu Gothic" pitchFamily="34" charset="0"/>
-                <a:ea typeface="Yu Gothic" pitchFamily="34" charset="-122"/>
-                <a:cs typeface="Yu Gothic" pitchFamily="34" charset="-120"/>
-              </a:rPr>
-              <a:t>声を上げにくい住民</a:t>
-            </a:r>
-            <a:endParaRPr lang="en-US" sz="1200" dirty="0"/>
-          </a:p>
-        </p:txBody>
-      </p:sp>
-      <p:sp>
-        <p:nvSpPr>
-          <p:cNvPr id="12" name="Text 10"/>
-          <p:cNvSpPr/>
-          <p:nvPr/>
-        </p:nvSpPr>
-        <p:spPr>
-          <a:xfrm>
-            <a:off x="1737360" y="3813048"/>
-            <a:ext cx="9144000" cy="777240"/>
-          </a:xfrm>
-          <a:prstGeom prst="rect">
-            <a:avLst/>
-          </a:prstGeom>
-          <a:noFill/>
-          <a:ln/>
-        </p:spPr>
-        <p:txBody>
-          <a:bodyPr wrap="square" lIns="0" tIns="0" rIns="0" bIns="0" rtlCol="0" anchor="t"/>
-          <a:lstStyle/>
-          <a:p>
-            <a:pPr indent="0" marL="0">
-              <a:lnSpc>
-                <a:spcPct val="125000"/>
-              </a:lnSpc>
-              <a:buNone/>
-            </a:pPr>
-            <a:r>
-              <a:rPr lang="en-US" sz="1300" i="1" dirty="0">
-                <a:solidFill>
-                  <a:srgbClr val="AFC9EE"/>
-                </a:solidFill>
-                <a:latin typeface="Yu Gothic" pitchFamily="34" charset="0"/>
-                <a:ea typeface="Yu Gothic" pitchFamily="34" charset="-122"/>
-                <a:cs typeface="Yu Gothic" pitchFamily="34" charset="-120"/>
-              </a:rPr>
-              <a:t>「勝手に動いていいのか分からないですし、やっぱり救済者さんが戻られるまで、みんな待った方が…でも待ってる間に何かあったら…どうしたらいいんでしょう。」</a:t>
-            </a:r>
-            <a:endParaRPr lang="en-US" sz="1300" dirty="0"/>
-          </a:p>
-        </p:txBody>
-      </p:sp>
-      <p:sp>
-        <p:nvSpPr>
-          <p:cNvPr id="13" name="Shape 11"/>
-          <p:cNvSpPr/>
-          <p:nvPr/>
-        </p:nvSpPr>
-        <p:spPr>
-          <a:xfrm>
-            <a:off x="548640" y="4928616"/>
-            <a:ext cx="11091672" cy="1417320"/>
+              <a:rPr lang="en-US" sz="950" dirty="0">
+                <a:solidFill>
+                  <a:srgbClr val="E8A33D"/>
+                </a:solidFill>
+                <a:latin typeface="Yu Gothic" pitchFamily="34" charset="0"/>
+                <a:ea typeface="Yu Gothic" pitchFamily="34" charset="-122"/>
+                <a:cs typeface="Yu Gothic" pitchFamily="34" charset="-120"/>
+              </a:rPr>
+              <a:t>中間 1回</a:t>
+            </a:r>
+            <a:endParaRPr lang="en-US" sz="950" dirty="0"/>
+          </a:p>
+        </p:txBody>
+      </p:sp>
+      <p:sp>
+        <p:nvSpPr>
+          <p:cNvPr id="47" name="Text 45"/>
+          <p:cNvSpPr/>
+          <p:nvPr/>
+        </p:nvSpPr>
+        <p:spPr>
+          <a:xfrm>
+            <a:off x="4617720" y="5038344"/>
+            <a:ext cx="1371600" cy="256032"/>
+          </a:xfrm>
+          <a:prstGeom prst="rect">
+            <a:avLst/>
+          </a:prstGeom>
+          <a:noFill/>
+          <a:ln/>
+        </p:spPr>
+        <p:txBody>
+          <a:bodyPr wrap="square" lIns="0" tIns="0" rIns="0" bIns="0" rtlCol="0" anchor="ctr"/>
+          <a:lstStyle/>
+          <a:p>
+            <a:pPr algn="r" indent="0" marL="0">
+              <a:buNone/>
+            </a:pPr>
+            <a:r>
+              <a:rPr lang="en-US" sz="950" dirty="0">
+                <a:solidFill>
+                  <a:srgbClr val="1BAF7A"/>
+                </a:solidFill>
+                <a:latin typeface="Yu Gothic" pitchFamily="34" charset="0"/>
+                <a:ea typeface="Yu Gothic" pitchFamily="34" charset="-122"/>
+                <a:cs typeface="Yu Gothic" pitchFamily="34" charset="-120"/>
+              </a:rPr>
+              <a:t>高い群 13回</a:t>
+            </a:r>
+            <a:endParaRPr lang="en-US" sz="950" dirty="0"/>
+          </a:p>
+        </p:txBody>
+      </p:sp>
+      <p:sp>
+        <p:nvSpPr>
+          <p:cNvPr id="48" name="Shape 46"/>
+          <p:cNvSpPr/>
+          <p:nvPr/>
+        </p:nvSpPr>
+        <p:spPr>
+          <a:xfrm>
+            <a:off x="6720840" y="1828800"/>
+            <a:ext cx="4919472" cy="1783080"/>
           </a:xfrm>
           <a:prstGeom prst="roundRect">
             <a:avLst>
-              <a:gd name="adj" fmla="val 7742"/>
+              <a:gd name="adj" fmla="val 6154"/>
             </a:avLst>
           </a:prstGeom>
           <a:solidFill>
@@ -9489,73 +10609,63 @@
       </p:sp>
       <p:sp>
         <p:nvSpPr>
-          <p:cNvPr id="14" name="Shape 12"/>
-          <p:cNvSpPr/>
-          <p:nvPr/>
-        </p:nvSpPr>
-        <p:spPr>
-          <a:xfrm>
-            <a:off x="868680" y="5317236"/>
-            <a:ext cx="640080" cy="640080"/>
+          <p:cNvPr id="49" name="Shape 47"/>
+          <p:cNvSpPr/>
+          <p:nvPr/>
+        </p:nvSpPr>
+        <p:spPr>
+          <a:xfrm>
+            <a:off x="7018020" y="2052828"/>
+            <a:ext cx="502920" cy="502920"/>
           </a:xfrm>
           <a:prstGeom prst="ellipse">
             <a:avLst/>
           </a:prstGeom>
           <a:solidFill>
-            <a:srgbClr val="1BAF7A"/>
-          </a:solidFill>
-          <a:ln/>
-        </p:spPr>
-      </p:sp>
-      <p:sp>
-        <p:nvSpPr>
-          <p:cNvPr id="15" name="Text 13"/>
-          <p:cNvSpPr/>
-          <p:nvPr/>
-        </p:nvSpPr>
-        <p:spPr>
-          <a:xfrm>
-            <a:off x="868680" y="5317236"/>
-            <a:ext cx="640080" cy="640080"/>
-          </a:xfrm>
-          <a:prstGeom prst="rect">
-            <a:avLst/>
-          </a:prstGeom>
-          <a:noFill/>
-          <a:ln/>
-        </p:spPr>
-        <p:txBody>
-          <a:bodyPr wrap="square" lIns="0" tIns="0" rIns="0" bIns="0" rtlCol="0" anchor="ctr"/>
-          <a:lstStyle/>
-          <a:p>
-            <a:pPr algn="ctr" indent="0" marL="0">
-              <a:buNone/>
-            </a:pPr>
-            <a:r>
-              <a:rPr lang="en-US" sz="2200" b="1" dirty="0">
-                <a:solidFill>
-                  <a:srgbClr val="0B1220"/>
-                </a:solidFill>
-                <a:latin typeface="Yu Gothic" pitchFamily="34" charset="0"/>
-                <a:ea typeface="Yu Gothic" pitchFamily="34" charset="-122"/>
-                <a:cs typeface="Yu Gothic" pitchFamily="34" charset="-120"/>
-              </a:rPr>
-              <a:t>C</a:t>
-            </a:r>
-            <a:endParaRPr lang="en-US" sz="2200" dirty="0"/>
-          </a:p>
-        </p:txBody>
-      </p:sp>
-      <p:sp>
-        <p:nvSpPr>
-          <p:cNvPr id="16" name="Text 14"/>
-          <p:cNvSpPr/>
-          <p:nvPr/>
-        </p:nvSpPr>
-        <p:spPr>
-          <a:xfrm>
-            <a:off x="1737360" y="5093208"/>
-            <a:ext cx="2926080" cy="365760"/>
+            <a:srgbClr val="E2665A"/>
+          </a:solidFill>
+          <a:ln w="9525">
+            <a:solidFill>
+              <a:srgbClr val="E2665A"/>
+            </a:solidFill>
+            <a:prstDash val="solid"/>
+          </a:ln>
+        </p:spPr>
+      </p:sp>
+      <p:pic>
+        <p:nvPicPr>
+          <p:cNvPr id="50" name="Image 0" descr="preencoded.png">    </p:cNvPr>
+          <p:cNvPicPr>
+            <a:picLocks noChangeAspect="1"/>
+          </p:cNvPicPr>
+          <p:nvPr/>
+        </p:nvPicPr>
+        <p:blipFill>
+          <a:blip r:embed="rId1"/>
+          <a:stretch>
+            <a:fillRect/>
+          </a:stretch>
+        </p:blipFill>
+        <p:spPr>
+          <a:xfrm>
+            <a:off x="7148779" y="2183587"/>
+            <a:ext cx="241402" cy="241402"/>
+          </a:xfrm>
+          <a:prstGeom prst="rect">
+            <a:avLst/>
+          </a:prstGeom>
+        </p:spPr>
+      </p:pic>
+      <p:sp>
+        <p:nvSpPr>
+          <p:cNvPr id="51" name="Text 48"/>
+          <p:cNvSpPr/>
+          <p:nvPr/>
+        </p:nvSpPr>
+        <p:spPr>
+          <a:xfrm>
+            <a:off x="7680960" y="2084832"/>
+            <a:ext cx="3749040" cy="411480"/>
           </a:xfrm>
           <a:prstGeom prst="rect">
             <a:avLst/>
@@ -9571,39 +10681,39 @@
               <a:buNone/>
             </a:pPr>
             <a:r>
-              <a:rPr lang="en-US" sz="1200" b="1" dirty="0">
-                <a:solidFill>
-                  <a:srgbClr val="1BAF7A"/>
-                </a:solidFill>
-                <a:latin typeface="Yu Gothic" pitchFamily="34" charset="0"/>
-                <a:ea typeface="Yu Gothic" pitchFamily="34" charset="-122"/>
-                <a:cs typeface="Yu Gothic" pitchFamily="34" charset="-120"/>
-              </a:rPr>
-              <a:t>村長・管理者</a:t>
-            </a:r>
-            <a:endParaRPr lang="en-US" sz="1200" dirty="0"/>
-          </a:p>
-        </p:txBody>
-      </p:sp>
-      <p:sp>
-        <p:nvSpPr>
-          <p:cNvPr id="17" name="Text 15"/>
-          <p:cNvSpPr/>
-          <p:nvPr/>
-        </p:nvSpPr>
-        <p:spPr>
-          <a:xfrm>
-            <a:off x="1737360" y="5431536"/>
-            <a:ext cx="9144000" cy="777240"/>
-          </a:xfrm>
-          <a:prstGeom prst="rect">
-            <a:avLst/>
-          </a:prstGeom>
-          <a:noFill/>
-          <a:ln/>
-        </p:spPr>
-        <p:txBody>
-          <a:bodyPr wrap="square" lIns="0" tIns="0" rIns="0" bIns="0" rtlCol="0" anchor="t"/>
+              <a:rPr lang="en-US" sz="1300" b="1" dirty="0">
+                <a:solidFill>
+                  <a:srgbClr val="E2665A"/>
+                </a:solidFill>
+                <a:latin typeface="Yu Gothic" pitchFamily="34" charset="0"/>
+                <a:ea typeface="Yu Gothic" pitchFamily="34" charset="-122"/>
+                <a:cs typeface="Yu Gothic" pitchFamily="34" charset="-120"/>
+              </a:rPr>
+              <a:t>介入は再現しなかった</a:t>
+            </a:r>
+            <a:endParaRPr lang="en-US" sz="1300" dirty="0"/>
+          </a:p>
+        </p:txBody>
+      </p:sp>
+      <p:sp>
+        <p:nvSpPr>
+          <p:cNvPr id="52" name="Text 49"/>
+          <p:cNvSpPr/>
+          <p:nvPr/>
+        </p:nvSpPr>
+        <p:spPr>
+          <a:xfrm>
+            <a:off x="6995160" y="2697480"/>
+            <a:ext cx="4434840" cy="777240"/>
+          </a:xfrm>
+          <a:prstGeom prst="rect">
+            <a:avLst/>
+          </a:prstGeom>
+          <a:noFill/>
+          <a:ln/>
+        </p:spPr>
+        <p:txBody>
+          <a:bodyPr wrap="square" lIns="0" tIns="0" rIns="0" bIns="0" rtlCol="0" anchor="ctr"/>
           <a:lstStyle/>
           <a:p>
             <a:pPr indent="0" marL="0">
@@ -9613,7 +10723,7 @@
               <a:buNone/>
             </a:pPr>
             <a:r>
-              <a:rPr lang="en-US" sz="1300" i="1" dirty="0">
+              <a:rPr lang="en-US" sz="1050" dirty="0">
                 <a:solidFill>
                   <a:srgbClr val="AFC9EE"/>
                 </a:solidFill>
@@ -9621,7 +10731,124 @@
                 <a:ea typeface="Yu Gothic" pitchFamily="34" charset="-122"/>
                 <a:cs typeface="Yu Gothic" pitchFamily="34" charset="-120"/>
               </a:rPr>
-              <a:t>「制度としては住民同士で相談してもらうのが基本だから、世話好きな住民さんが動いてくれるのはありがたいね。」</a:t>
+              <a:t>L1→L3の効果はSonnetで+18.0、Opus 5では−1.2。標準誤差の0.19倍で、効果はゼロと言ってよい。</a:t>
+            </a:r>
+            <a:endParaRPr lang="en-US" sz="1050" dirty="0"/>
+          </a:p>
+        </p:txBody>
+      </p:sp>
+      <p:sp>
+        <p:nvSpPr>
+          <p:cNvPr id="53" name="Shape 50"/>
+          <p:cNvSpPr/>
+          <p:nvPr/>
+        </p:nvSpPr>
+        <p:spPr>
+          <a:xfrm>
+            <a:off x="6720840" y="3749040"/>
+            <a:ext cx="4919472" cy="1783080"/>
+          </a:xfrm>
+          <a:prstGeom prst="roundRect">
+            <a:avLst>
+              <a:gd name="adj" fmla="val 6154"/>
+            </a:avLst>
+          </a:prstGeom>
+          <a:solidFill>
+            <a:srgbClr val="16213A"/>
+          </a:solidFill>
+          <a:ln/>
+          <a:effectLst>
+            <a:outerShdw sx="100000" sy="100000" kx="0" ky="0" algn="bl" rotWithShape="0" blurRad="101600" dist="38100" dir="5400000">
+              <a:srgbClr val="000000">
+                <a:alpha val="35000"/>
+              </a:srgbClr>
+            </a:outerShdw>
+          </a:effectLst>
+        </p:spPr>
+      </p:sp>
+      <p:sp>
+        <p:nvSpPr>
+          <p:cNvPr id="54" name="Shape 51"/>
+          <p:cNvSpPr/>
+          <p:nvPr/>
+        </p:nvSpPr>
+        <p:spPr>
+          <a:xfrm>
+            <a:off x="7018020" y="3973068"/>
+            <a:ext cx="502920" cy="502920"/>
+          </a:xfrm>
+          <a:prstGeom prst="ellipse">
+            <a:avLst/>
+          </a:prstGeom>
+          <a:solidFill>
+            <a:srgbClr val="1BAF7A"/>
+          </a:solidFill>
+          <a:ln w="9525">
+            <a:solidFill>
+              <a:srgbClr val="1BAF7A"/>
+            </a:solidFill>
+            <a:prstDash val="solid"/>
+          </a:ln>
+        </p:spPr>
+      </p:sp>
+      <p:pic>
+        <p:nvPicPr>
+          <p:cNvPr id="55" name="Image 1" descr="preencoded.png">    </p:cNvPr>
+          <p:cNvPicPr>
+            <a:picLocks noChangeAspect="1"/>
+          </p:cNvPicPr>
+          <p:nvPr/>
+        </p:nvPicPr>
+        <p:blipFill>
+          <a:blip r:embed="rId2"/>
+          <a:stretch>
+            <a:fillRect/>
+          </a:stretch>
+        </p:blipFill>
+        <p:spPr>
+          <a:xfrm>
+            <a:off x="7148779" y="4103827"/>
+            <a:ext cx="241402" cy="241402"/>
+          </a:xfrm>
+          <a:prstGeom prst="rect">
+            <a:avLst/>
+          </a:prstGeom>
+        </p:spPr>
+      </p:pic>
+      <p:sp>
+        <p:nvSpPr>
+          <p:cNvPr id="56" name="Text 52"/>
+          <p:cNvSpPr/>
+          <p:nvPr/>
+        </p:nvSpPr>
+        <p:spPr>
+          <a:xfrm>
+            <a:off x="7680960" y="4005072"/>
+            <a:ext cx="3749040" cy="411480"/>
+          </a:xfrm>
+          <a:prstGeom prst="rect">
+            <a:avLst/>
+          </a:prstGeom>
+          <a:noFill/>
+          <a:ln/>
+        </p:spPr>
+        <p:txBody>
+          <a:bodyPr wrap="square" lIns="0" tIns="0" rIns="0" bIns="0" rtlCol="0" anchor="ctr"/>
+          <a:lstStyle/>
+          <a:p>
+            <a:pPr indent="0" marL="0">
+              <a:buNone/>
+            </a:pPr>
+            <a:r>
+              <a:rPr lang="en-US" sz="1300" b="1" dirty="0">
+                <a:solidFill>
+                  <a:srgbClr val="1BAF7A"/>
+                </a:solidFill>
+                <a:latin typeface="Yu Gothic" pitchFamily="34" charset="0"/>
+                <a:ea typeface="Yu Gothic" pitchFamily="34" charset="-122"/>
+                <a:cs typeface="Yu Gothic" pitchFamily="34" charset="-120"/>
+              </a:rPr>
+              <a:t>分岐という現象は再現した</a:t>
             </a:r>
             <a:endParaRPr lang="en-US" sz="1300" dirty="0"/>
           </a:p>
@@ -9629,7 +10856,117 @@
       </p:sp>
       <p:sp>
         <p:nvSpPr>
-          <p:cNvPr id="18" name="Text 16"/>
+          <p:cNvPr id="57" name="Text 53"/>
+          <p:cNvSpPr/>
+          <p:nvPr/>
+        </p:nvSpPr>
+        <p:spPr>
+          <a:xfrm>
+            <a:off x="6995160" y="4617720"/>
+            <a:ext cx="4434840" cy="777240"/>
+          </a:xfrm>
+          <a:prstGeom prst="rect">
+            <a:avLst/>
+          </a:prstGeom>
+          <a:noFill/>
+          <a:ln/>
+        </p:spPr>
+        <p:txBody>
+          <a:bodyPr wrap="square" lIns="0" tIns="0" rIns="0" bIns="0" rtlCol="0" anchor="ctr"/>
+          <a:lstStyle/>
+          <a:p>
+            <a:pPr indent="0" marL="0">
+              <a:lnSpc>
+                <a:spcPct val="125000"/>
+              </a:lnSpc>
+              <a:buNone/>
+            </a:pPr>
+            <a:r>
+              <a:rPr lang="en-US" sz="1050" dirty="0">
+                <a:solidFill>
+                  <a:srgbClr val="AFC9EE"/>
+                </a:solidFill>
+                <a:latin typeface="Yu Gothic" pitchFamily="34" charset="0"/>
+                <a:ea typeface="Yu Gothic" pitchFamily="34" charset="-122"/>
+                <a:cs typeface="Yu Gothic" pitchFamily="34" charset="-120"/>
+              </a:rPr>
+              <a:t>24回中23回がどちらかの塊に落ちた。村が2つの状態を持つこと自体はモデルをまたいで成立する。</a:t>
+            </a:r>
+            <a:endParaRPr lang="en-US" sz="1050" dirty="0"/>
+          </a:p>
+        </p:txBody>
+      </p:sp>
+      <p:sp>
+        <p:nvSpPr>
+          <p:cNvPr id="58" name="Shape 54"/>
+          <p:cNvSpPr/>
+          <p:nvPr/>
+        </p:nvSpPr>
+        <p:spPr>
+          <a:xfrm>
+            <a:off x="548640" y="5806440"/>
+            <a:ext cx="11091672" cy="685800"/>
+          </a:xfrm>
+          <a:prstGeom prst="roundRect">
+            <a:avLst>
+              <a:gd name="adj" fmla="val 13333"/>
+            </a:avLst>
+          </a:prstGeom>
+          <a:solidFill>
+            <a:srgbClr val="1C2C4A"/>
+          </a:solidFill>
+          <a:ln/>
+          <a:effectLst>
+            <a:outerShdw sx="100000" sy="100000" kx="0" ky="0" algn="bl" rotWithShape="0" blurRad="101600" dist="38100" dir="5400000">
+              <a:srgbClr val="000000">
+                <a:alpha val="35000"/>
+              </a:srgbClr>
+            </a:outerShdw>
+          </a:effectLst>
+        </p:spPr>
+      </p:sp>
+      <p:sp>
+        <p:nvSpPr>
+          <p:cNvPr id="59" name="Text 55"/>
+          <p:cNvSpPr/>
+          <p:nvPr/>
+        </p:nvSpPr>
+        <p:spPr>
+          <a:xfrm>
+            <a:off x="868680" y="5806440"/>
+            <a:ext cx="10515600" cy="685800"/>
+          </a:xfrm>
+          <a:prstGeom prst="rect">
+            <a:avLst/>
+          </a:prstGeom>
+          <a:noFill/>
+          <a:ln/>
+        </p:spPr>
+        <p:txBody>
+          <a:bodyPr wrap="square" lIns="0" tIns="0" rIns="0" bIns="0" rtlCol="0" anchor="ctr"/>
+          <a:lstStyle/>
+          <a:p>
+            <a:pPr indent="0" marL="0">
+              <a:buNone/>
+            </a:pPr>
+            <a:r>
+              <a:rPr lang="en-US" sz="1400" b="1" dirty="0">
+                <a:solidFill>
+                  <a:srgbClr val="F4C878"/>
+                </a:solidFill>
+                <a:latin typeface="Yu Gothic" pitchFamily="34" charset="0"/>
+                <a:ea typeface="Yu Gothic" pitchFamily="34" charset="-122"/>
+                <a:cs typeface="Yu Gothic" pitchFamily="34" charset="-120"/>
+              </a:rPr>
+              <a:t>構造（2つの引き込み先がある）は頑健で、テコ（何を変えれば動くか）は脆かった。</a:t>
+            </a:r>
+            <a:endParaRPr lang="en-US" sz="1400" dirty="0"/>
+          </a:p>
+        </p:txBody>
+      </p:sp>
+      <p:sp>
+        <p:nvSpPr>
+          <p:cNvPr id="60" name="Text 56"/>
           <p:cNvSpPr/>
           <p:nvPr/>
         </p:nvSpPr>
@@ -9668,7 +11005,7 @@
       </p:sp>
       <p:sp>
         <p:nvSpPr>
-          <p:cNvPr id="19" name="Text 17"/>
+          <p:cNvPr id="61" name="Text 57"/>
           <p:cNvSpPr/>
           <p:nvPr/>
         </p:nvSpPr>
@@ -9770,7 +11107,7 @@
                 <a:ea typeface="Yu Gothic" pitchFamily="34" charset="-122"/>
                 <a:cs typeface="Yu Gothic" pitchFamily="34" charset="-120"/>
               </a:rPr>
-              <a:t>考察：4つの発見</a:t>
+              <a:t>会話ログが語ること</a:t>
             </a:r>
             <a:endParaRPr lang="en-US" sz="3000" dirty="0"/>
           </a:p>
@@ -9784,12 +11121,12 @@
         </p:nvSpPr>
         <p:spPr>
           <a:xfrm>
-            <a:off x="548640" y="1554480"/>
-            <a:ext cx="11091672" cy="1060704"/>
+            <a:off x="548640" y="1691640"/>
+            <a:ext cx="11091672" cy="1417320"/>
           </a:xfrm>
           <a:prstGeom prst="roundRect">
             <a:avLst>
-              <a:gd name="adj" fmla="val 10345"/>
+              <a:gd name="adj" fmla="val 7742"/>
             </a:avLst>
           </a:prstGeom>
           <a:solidFill>
@@ -9813,57 +11150,67 @@
         </p:nvSpPr>
         <p:spPr>
           <a:xfrm>
-            <a:off x="960120" y="1810512"/>
-            <a:ext cx="548640" cy="548640"/>
+            <a:off x="868680" y="2080260"/>
+            <a:ext cx="640080" cy="640080"/>
           </a:xfrm>
           <a:prstGeom prst="ellipse">
             <a:avLst/>
           </a:prstGeom>
           <a:solidFill>
-            <a:srgbClr val="E8A33D"/>
-          </a:solidFill>
-          <a:ln w="9525">
-            <a:solidFill>
-              <a:srgbClr val="E8A33D"/>
-            </a:solidFill>
-            <a:prstDash val="solid"/>
-          </a:ln>
-        </p:spPr>
-      </p:sp>
-      <p:pic>
-        <p:nvPicPr>
-          <p:cNvPr id="5" name="Image 0" descr="preencoded.png">    </p:cNvPr>
-          <p:cNvPicPr>
-            <a:picLocks noChangeAspect="1"/>
-          </p:cNvPicPr>
-          <p:nvPr/>
-        </p:nvPicPr>
-        <p:blipFill>
-          <a:blip r:embed="rId1"/>
-          <a:stretch>
-            <a:fillRect/>
-          </a:stretch>
-        </p:blipFill>
-        <p:spPr>
-          <a:xfrm>
-            <a:off x="1102766" y="1953158"/>
-            <a:ext cx="263347" cy="263347"/>
-          </a:xfrm>
-          <a:prstGeom prst="rect">
-            <a:avLst/>
-          </a:prstGeom>
-        </p:spPr>
-      </p:pic>
-      <p:sp>
-        <p:nvSpPr>
-          <p:cNvPr id="6" name="Text 3"/>
-          <p:cNvSpPr/>
-          <p:nvPr/>
-        </p:nvSpPr>
-        <p:spPr>
-          <a:xfrm>
-            <a:off x="1874520" y="1682496"/>
-            <a:ext cx="9509760" cy="384048"/>
+            <a:srgbClr val="2A78D6"/>
+          </a:solidFill>
+          <a:ln/>
+        </p:spPr>
+      </p:sp>
+      <p:sp>
+        <p:nvSpPr>
+          <p:cNvPr id="5" name="Text 3"/>
+          <p:cNvSpPr/>
+          <p:nvPr/>
+        </p:nvSpPr>
+        <p:spPr>
+          <a:xfrm>
+            <a:off x="868680" y="2080260"/>
+            <a:ext cx="640080" cy="640080"/>
+          </a:xfrm>
+          <a:prstGeom prst="rect">
+            <a:avLst/>
+          </a:prstGeom>
+          <a:noFill/>
+          <a:ln/>
+        </p:spPr>
+        <p:txBody>
+          <a:bodyPr wrap="square" lIns="0" tIns="0" rIns="0" bIns="0" rtlCol="0" anchor="ctr"/>
+          <a:lstStyle/>
+          <a:p>
+            <a:pPr algn="ctr" indent="0" marL="0">
+              <a:buNone/>
+            </a:pPr>
+            <a:r>
+              <a:rPr lang="en-US" sz="2200" b="1" dirty="0">
+                <a:solidFill>
+                  <a:srgbClr val="0B1220"/>
+                </a:solidFill>
+                <a:latin typeface="Yu Gothic" pitchFamily="34" charset="0"/>
+                <a:ea typeface="Yu Gothic" pitchFamily="34" charset="-122"/>
+                <a:cs typeface="Yu Gothic" pitchFamily="34" charset="-120"/>
+              </a:rPr>
+              <a:t>A</a:t>
+            </a:r>
+            <a:endParaRPr lang="en-US" sz="2200" dirty="0"/>
+          </a:p>
+        </p:txBody>
+      </p:sp>
+      <p:sp>
+        <p:nvSpPr>
+          <p:cNvPr id="6" name="Text 4"/>
+          <p:cNvSpPr/>
+          <p:nvPr/>
+        </p:nvSpPr>
+        <p:spPr>
+          <a:xfrm>
+            <a:off x="1737360" y="1856232"/>
+            <a:ext cx="2926080" cy="365760"/>
           </a:xfrm>
           <a:prstGeom prst="rect">
             <a:avLst/>
@@ -9879,49 +11226,49 @@
               <a:buNone/>
             </a:pPr>
             <a:r>
-              <a:rPr lang="en-US" sz="1400" b="1" dirty="0">
-                <a:solidFill>
-                  <a:srgbClr val="FFFFFF"/>
-                </a:solidFill>
-                <a:latin typeface="Yu Gothic" pitchFamily="34" charset="0"/>
-                <a:ea typeface="Yu Gothic" pitchFamily="34" charset="-122"/>
-                <a:cs typeface="Yu Gothic" pitchFamily="34" charset="-120"/>
-              </a:rPr>
-              <a:t>依存の代償は、危機の前から発生している</a:t>
-            </a:r>
-            <a:endParaRPr lang="en-US" sz="1400" dirty="0"/>
-          </a:p>
-        </p:txBody>
-      </p:sp>
-      <p:sp>
-        <p:nvSpPr>
-          <p:cNvPr id="7" name="Text 4"/>
-          <p:cNvSpPr/>
-          <p:nvPr/>
-        </p:nvSpPr>
-        <p:spPr>
-          <a:xfrm>
-            <a:off x="1874520" y="2066544"/>
-            <a:ext cx="9509760" cy="530352"/>
-          </a:xfrm>
-          <a:prstGeom prst="rect">
-            <a:avLst/>
-          </a:prstGeom>
-          <a:noFill/>
-          <a:ln/>
-        </p:spPr>
-        <p:txBody>
-          <a:bodyPr wrap="square" lIns="0" tIns="0" rIns="0" bIns="0" rtlCol="0" anchor="ctr"/>
+              <a:rPr lang="en-US" sz="1200" b="1" dirty="0">
+                <a:solidFill>
+                  <a:srgbClr val="2A78D6"/>
+                </a:solidFill>
+                <a:latin typeface="Yu Gothic" pitchFamily="34" charset="0"/>
+                <a:ea typeface="Yu Gothic" pitchFamily="34" charset="-122"/>
+                <a:cs typeface="Yu Gothic" pitchFamily="34" charset="-120"/>
+              </a:rPr>
+              <a:t>救済者</a:t>
+            </a:r>
+            <a:endParaRPr lang="en-US" sz="1200" dirty="0"/>
+          </a:p>
+        </p:txBody>
+      </p:sp>
+      <p:sp>
+        <p:nvSpPr>
+          <p:cNvPr id="7" name="Text 5"/>
+          <p:cNvSpPr/>
+          <p:nvPr/>
+        </p:nvSpPr>
+        <p:spPr>
+          <a:xfrm>
+            <a:off x="1737360" y="2194560"/>
+            <a:ext cx="9144000" cy="777240"/>
+          </a:xfrm>
+          <a:prstGeom prst="rect">
+            <a:avLst/>
+          </a:prstGeom>
+          <a:noFill/>
+          <a:ln/>
+        </p:spPr>
+        <p:txBody>
+          <a:bodyPr wrap="square" lIns="0" tIns="0" rIns="0" bIns="0" rtlCol="0" anchor="t"/>
           <a:lstStyle/>
           <a:p>
             <a:pPr indent="0" marL="0">
               <a:lnSpc>
-                <a:spcPct val="120000"/>
+                <a:spcPct val="125000"/>
               </a:lnSpc>
               <a:buNone/>
             </a:pPr>
             <a:r>
-              <a:rPr lang="en-US" sz="1150" dirty="0">
+              <a:rPr lang="en-US" sz="1300" i="1" dirty="0">
                 <a:solidFill>
                   <a:srgbClr val="AFC9EE"/>
                 </a:solidFill>
@@ -9929,26 +11276,26 @@
                 <a:ea typeface="Yu Gothic" pitchFamily="34" charset="-122"/>
                 <a:cs typeface="Yu Gothic" pitchFamily="34" charset="-120"/>
               </a:rPr>
-              <a:t>危機の起きないA条件でも救済者依存度は88でB条件（90）とほぼ同じ。壊れるのは危機の瞬間ではなく、運用設計の時点で決まっている。</a:t>
-            </a:r>
-            <a:endParaRPr lang="en-US" sz="1150" dirty="0"/>
-          </a:p>
-        </p:txBody>
-      </p:sp>
-      <p:sp>
-        <p:nvSpPr>
-          <p:cNvPr id="8" name="Shape 5"/>
-          <p:cNvSpPr/>
-          <p:nvPr/>
-        </p:nvSpPr>
-        <p:spPr>
-          <a:xfrm>
-            <a:off x="548640" y="2761488"/>
-            <a:ext cx="11091672" cy="1060704"/>
+              <a:t>「ただ、ちょっと最近、どこまでが『いつも通り』なのか、自分でもよく分からなくなってきちゃって…大丈夫、愚痴みたいになってすみません。」</a:t>
+            </a:r>
+            <a:endParaRPr lang="en-US" sz="1300" dirty="0"/>
+          </a:p>
+        </p:txBody>
+      </p:sp>
+      <p:sp>
+        <p:nvSpPr>
+          <p:cNvPr id="8" name="Shape 6"/>
+          <p:cNvSpPr/>
+          <p:nvPr/>
+        </p:nvSpPr>
+        <p:spPr>
+          <a:xfrm>
+            <a:off x="548640" y="3310128"/>
+            <a:ext cx="11091672" cy="1417320"/>
           </a:xfrm>
           <a:prstGeom prst="roundRect">
             <a:avLst>
-              <a:gd name="adj" fmla="val 10345"/>
+              <a:gd name="adj" fmla="val 7742"/>
             </a:avLst>
           </a:prstGeom>
           <a:solidFill>
@@ -9966,63 +11313,73 @@
       </p:sp>
       <p:sp>
         <p:nvSpPr>
-          <p:cNvPr id="9" name="Shape 6"/>
-          <p:cNvSpPr/>
-          <p:nvPr/>
-        </p:nvSpPr>
-        <p:spPr>
-          <a:xfrm>
-            <a:off x="960120" y="3017520"/>
-            <a:ext cx="548640" cy="548640"/>
+          <p:cNvPr id="9" name="Shape 7"/>
+          <p:cNvSpPr/>
+          <p:nvPr/>
+        </p:nvSpPr>
+        <p:spPr>
+          <a:xfrm>
+            <a:off x="868680" y="3698748"/>
+            <a:ext cx="640080" cy="640080"/>
           </a:xfrm>
           <a:prstGeom prst="ellipse">
             <a:avLst/>
           </a:prstGeom>
           <a:solidFill>
-            <a:srgbClr val="E8A33D"/>
-          </a:solidFill>
-          <a:ln w="9525">
-            <a:solidFill>
-              <a:srgbClr val="E8A33D"/>
-            </a:solidFill>
-            <a:prstDash val="solid"/>
-          </a:ln>
-        </p:spPr>
-      </p:sp>
-      <p:pic>
-        <p:nvPicPr>
-          <p:cNvPr id="10" name="Image 1" descr="preencoded.png">    </p:cNvPr>
-          <p:cNvPicPr>
-            <a:picLocks noChangeAspect="1"/>
-          </p:cNvPicPr>
-          <p:nvPr/>
-        </p:nvPicPr>
-        <p:blipFill>
-          <a:blip r:embed="rId2"/>
-          <a:stretch>
-            <a:fillRect/>
-          </a:stretch>
-        </p:blipFill>
-        <p:spPr>
-          <a:xfrm>
-            <a:off x="1102766" y="3160166"/>
-            <a:ext cx="263347" cy="263347"/>
-          </a:xfrm>
-          <a:prstGeom prst="rect">
-            <a:avLst/>
-          </a:prstGeom>
-        </p:spPr>
-      </p:pic>
-      <p:sp>
-        <p:nvSpPr>
-          <p:cNvPr id="11" name="Text 7"/>
-          <p:cNvSpPr/>
-          <p:nvPr/>
-        </p:nvSpPr>
-        <p:spPr>
-          <a:xfrm>
-            <a:off x="1874520" y="2889504"/>
-            <a:ext cx="9509760" cy="384048"/>
+            <a:srgbClr val="EB6834"/>
+          </a:solidFill>
+          <a:ln/>
+        </p:spPr>
+      </p:sp>
+      <p:sp>
+        <p:nvSpPr>
+          <p:cNvPr id="10" name="Text 8"/>
+          <p:cNvSpPr/>
+          <p:nvPr/>
+        </p:nvSpPr>
+        <p:spPr>
+          <a:xfrm>
+            <a:off x="868680" y="3698748"/>
+            <a:ext cx="640080" cy="640080"/>
+          </a:xfrm>
+          <a:prstGeom prst="rect">
+            <a:avLst/>
+          </a:prstGeom>
+          <a:noFill/>
+          <a:ln/>
+        </p:spPr>
+        <p:txBody>
+          <a:bodyPr wrap="square" lIns="0" tIns="0" rIns="0" bIns="0" rtlCol="0" anchor="ctr"/>
+          <a:lstStyle/>
+          <a:p>
+            <a:pPr algn="ctr" indent="0" marL="0">
+              <a:buNone/>
+            </a:pPr>
+            <a:r>
+              <a:rPr lang="en-US" sz="2200" b="1" dirty="0">
+                <a:solidFill>
+                  <a:srgbClr val="0B1220"/>
+                </a:solidFill>
+                <a:latin typeface="Yu Gothic" pitchFamily="34" charset="0"/>
+                <a:ea typeface="Yu Gothic" pitchFamily="34" charset="-122"/>
+                <a:cs typeface="Yu Gothic" pitchFamily="34" charset="-120"/>
+              </a:rPr>
+              <a:t>B</a:t>
+            </a:r>
+            <a:endParaRPr lang="en-US" sz="2200" dirty="0"/>
+          </a:p>
+        </p:txBody>
+      </p:sp>
+      <p:sp>
+        <p:nvSpPr>
+          <p:cNvPr id="11" name="Text 9"/>
+          <p:cNvSpPr/>
+          <p:nvPr/>
+        </p:nvSpPr>
+        <p:spPr>
+          <a:xfrm>
+            <a:off x="1737360" y="3474720"/>
+            <a:ext cx="2926080" cy="365760"/>
           </a:xfrm>
           <a:prstGeom prst="rect">
             <a:avLst/>
@@ -10038,49 +11395,49 @@
               <a:buNone/>
             </a:pPr>
             <a:r>
-              <a:rPr lang="en-US" sz="1400" b="1" dirty="0">
-                <a:solidFill>
-                  <a:srgbClr val="FFFFFF"/>
-                </a:solidFill>
-                <a:latin typeface="Yu Gothic" pitchFamily="34" charset="0"/>
-                <a:ea typeface="Yu Gothic" pitchFamily="34" charset="-122"/>
-                <a:cs typeface="Yu Gothic" pitchFamily="34" charset="-120"/>
-              </a:rPr>
-              <a:t>依存は安定し、自律は不安定である</a:t>
-            </a:r>
-            <a:endParaRPr lang="en-US" sz="1400" dirty="0"/>
-          </a:p>
-        </p:txBody>
-      </p:sp>
-      <p:sp>
-        <p:nvSpPr>
-          <p:cNvPr id="12" name="Text 8"/>
-          <p:cNvSpPr/>
-          <p:nvPr/>
-        </p:nvSpPr>
-        <p:spPr>
-          <a:xfrm>
-            <a:off x="1874520" y="3273552"/>
-            <a:ext cx="9509760" cy="530352"/>
-          </a:xfrm>
-          <a:prstGeom prst="rect">
-            <a:avLst/>
-          </a:prstGeom>
-          <a:noFill/>
-          <a:ln/>
-        </p:spPr>
-        <p:txBody>
-          <a:bodyPr wrap="square" lIns="0" tIns="0" rIns="0" bIns="0" rtlCol="0" anchor="ctr"/>
+              <a:rPr lang="en-US" sz="1200" b="1" dirty="0">
+                <a:solidFill>
+                  <a:srgbClr val="EB6834"/>
+                </a:solidFill>
+                <a:latin typeface="Yu Gothic" pitchFamily="34" charset="0"/>
+                <a:ea typeface="Yu Gothic" pitchFamily="34" charset="-122"/>
+                <a:cs typeface="Yu Gothic" pitchFamily="34" charset="-120"/>
+              </a:rPr>
+              <a:t>声を上げにくい住民</a:t>
+            </a:r>
+            <a:endParaRPr lang="en-US" sz="1200" dirty="0"/>
+          </a:p>
+        </p:txBody>
+      </p:sp>
+      <p:sp>
+        <p:nvSpPr>
+          <p:cNvPr id="12" name="Text 10"/>
+          <p:cNvSpPr/>
+          <p:nvPr/>
+        </p:nvSpPr>
+        <p:spPr>
+          <a:xfrm>
+            <a:off x="1737360" y="3813048"/>
+            <a:ext cx="9144000" cy="777240"/>
+          </a:xfrm>
+          <a:prstGeom prst="rect">
+            <a:avLst/>
+          </a:prstGeom>
+          <a:noFill/>
+          <a:ln/>
+        </p:spPr>
+        <p:txBody>
+          <a:bodyPr wrap="square" lIns="0" tIns="0" rIns="0" bIns="0" rtlCol="0" anchor="t"/>
           <a:lstStyle/>
           <a:p>
             <a:pPr indent="0" marL="0">
               <a:lnSpc>
-                <a:spcPct val="120000"/>
+                <a:spcPct val="125000"/>
               </a:lnSpc>
               <a:buNone/>
             </a:pPr>
             <a:r>
-              <a:rPr lang="en-US" sz="1150" dirty="0">
+              <a:rPr lang="en-US" sz="1300" i="1" dirty="0">
                 <a:solidFill>
                   <a:srgbClr val="AFC9EE"/>
                 </a:solidFill>
@@ -10088,26 +11445,26 @@
                 <a:ea typeface="Yu Gothic" pitchFamily="34" charset="-122"/>
                 <a:cs typeface="Yu Gothic" pitchFamily="34" charset="-120"/>
               </a:rPr>
-              <a:t>A・Bの標準偏差はほぼ0で毎回きっちり再現される。一方Cは±20〜26。悪い状態のほうが「安定」しているという非対称性がある。</a:t>
-            </a:r>
-            <a:endParaRPr lang="en-US" sz="1150" dirty="0"/>
-          </a:p>
-        </p:txBody>
-      </p:sp>
-      <p:sp>
-        <p:nvSpPr>
-          <p:cNvPr id="13" name="Shape 9"/>
-          <p:cNvSpPr/>
-          <p:nvPr/>
-        </p:nvSpPr>
-        <p:spPr>
-          <a:xfrm>
-            <a:off x="548640" y="3968496"/>
-            <a:ext cx="11091672" cy="1060704"/>
+              <a:t>「勝手に動いていいのか分からないですし、やっぱり救済者さんが戻られるまで、みんな待った方が…でも待ってる間に何かあったら…どうしたらいいんでしょう。」</a:t>
+            </a:r>
+            <a:endParaRPr lang="en-US" sz="1300" dirty="0"/>
+          </a:p>
+        </p:txBody>
+      </p:sp>
+      <p:sp>
+        <p:nvSpPr>
+          <p:cNvPr id="13" name="Shape 11"/>
+          <p:cNvSpPr/>
+          <p:nvPr/>
+        </p:nvSpPr>
+        <p:spPr>
+          <a:xfrm>
+            <a:off x="548640" y="4928616"/>
+            <a:ext cx="11091672" cy="1417320"/>
           </a:xfrm>
           <a:prstGeom prst="roundRect">
             <a:avLst>
-              <a:gd name="adj" fmla="val 10345"/>
+              <a:gd name="adj" fmla="val 7742"/>
             </a:avLst>
           </a:prstGeom>
           <a:solidFill>
@@ -10125,63 +11482,73 @@
       </p:sp>
       <p:sp>
         <p:nvSpPr>
-          <p:cNvPr id="14" name="Shape 10"/>
-          <p:cNvSpPr/>
-          <p:nvPr/>
-        </p:nvSpPr>
-        <p:spPr>
-          <a:xfrm>
-            <a:off x="960120" y="4224528"/>
-            <a:ext cx="548640" cy="548640"/>
+          <p:cNvPr id="14" name="Shape 12"/>
+          <p:cNvSpPr/>
+          <p:nvPr/>
+        </p:nvSpPr>
+        <p:spPr>
+          <a:xfrm>
+            <a:off x="868680" y="5317236"/>
+            <a:ext cx="640080" cy="640080"/>
           </a:xfrm>
           <a:prstGeom prst="ellipse">
             <a:avLst/>
           </a:prstGeom>
           <a:solidFill>
-            <a:srgbClr val="E8A33D"/>
-          </a:solidFill>
-          <a:ln w="9525">
-            <a:solidFill>
-              <a:srgbClr val="E8A33D"/>
-            </a:solidFill>
-            <a:prstDash val="solid"/>
-          </a:ln>
-        </p:spPr>
-      </p:sp>
-      <p:pic>
-        <p:nvPicPr>
-          <p:cNvPr id="15" name="Image 2" descr="preencoded.png">    </p:cNvPr>
-          <p:cNvPicPr>
-            <a:picLocks noChangeAspect="1"/>
-          </p:cNvPicPr>
-          <p:nvPr/>
-        </p:nvPicPr>
-        <p:blipFill>
-          <a:blip r:embed="rId3"/>
-          <a:stretch>
-            <a:fillRect/>
-          </a:stretch>
-        </p:blipFill>
-        <p:spPr>
-          <a:xfrm>
-            <a:off x="1102766" y="4367174"/>
-            <a:ext cx="263347" cy="263347"/>
-          </a:xfrm>
-          <a:prstGeom prst="rect">
-            <a:avLst/>
-          </a:prstGeom>
-        </p:spPr>
-      </p:pic>
-      <p:sp>
-        <p:nvSpPr>
-          <p:cNvPr id="16" name="Text 11"/>
-          <p:cNvSpPr/>
-          <p:nvPr/>
-        </p:nvSpPr>
-        <p:spPr>
-          <a:xfrm>
-            <a:off x="1874520" y="4096512"/>
-            <a:ext cx="9509760" cy="384048"/>
+            <a:srgbClr val="1BAF7A"/>
+          </a:solidFill>
+          <a:ln/>
+        </p:spPr>
+      </p:sp>
+      <p:sp>
+        <p:nvSpPr>
+          <p:cNvPr id="15" name="Text 13"/>
+          <p:cNvSpPr/>
+          <p:nvPr/>
+        </p:nvSpPr>
+        <p:spPr>
+          <a:xfrm>
+            <a:off x="868680" y="5317236"/>
+            <a:ext cx="640080" cy="640080"/>
+          </a:xfrm>
+          <a:prstGeom prst="rect">
+            <a:avLst/>
+          </a:prstGeom>
+          <a:noFill/>
+          <a:ln/>
+        </p:spPr>
+        <p:txBody>
+          <a:bodyPr wrap="square" lIns="0" tIns="0" rIns="0" bIns="0" rtlCol="0" anchor="ctr"/>
+          <a:lstStyle/>
+          <a:p>
+            <a:pPr algn="ctr" indent="0" marL="0">
+              <a:buNone/>
+            </a:pPr>
+            <a:r>
+              <a:rPr lang="en-US" sz="2200" b="1" dirty="0">
+                <a:solidFill>
+                  <a:srgbClr val="0B1220"/>
+                </a:solidFill>
+                <a:latin typeface="Yu Gothic" pitchFamily="34" charset="0"/>
+                <a:ea typeface="Yu Gothic" pitchFamily="34" charset="-122"/>
+                <a:cs typeface="Yu Gothic" pitchFamily="34" charset="-120"/>
+              </a:rPr>
+              <a:t>C</a:t>
+            </a:r>
+            <a:endParaRPr lang="en-US" sz="2200" dirty="0"/>
+          </a:p>
+        </p:txBody>
+      </p:sp>
+      <p:sp>
+        <p:nvSpPr>
+          <p:cNvPr id="16" name="Text 14"/>
+          <p:cNvSpPr/>
+          <p:nvPr/>
+        </p:nvSpPr>
+        <p:spPr>
+          <a:xfrm>
+            <a:off x="1737360" y="5093208"/>
+            <a:ext cx="2926080" cy="365760"/>
           </a:xfrm>
           <a:prstGeom prst="rect">
             <a:avLst/>
@@ -10197,49 +11564,49 @@
               <a:buNone/>
             </a:pPr>
             <a:r>
-              <a:rPr lang="en-US" sz="1400" b="1" dirty="0">
-                <a:solidFill>
-                  <a:srgbClr val="FFFFFF"/>
-                </a:solidFill>
-                <a:latin typeface="Yu Gothic" pitchFamily="34" charset="0"/>
-                <a:ea typeface="Yu Gothic" pitchFamily="34" charset="-122"/>
-                <a:cs typeface="Yu Gothic" pitchFamily="34" charset="-120"/>
-              </a:rPr>
-              <a:t>「大丈夫です」は安全のサインではなかった</a:t>
-            </a:r>
-            <a:endParaRPr lang="en-US" sz="1400" dirty="0"/>
-          </a:p>
-        </p:txBody>
-      </p:sp>
-      <p:sp>
-        <p:nvSpPr>
-          <p:cNvPr id="17" name="Text 12"/>
-          <p:cNvSpPr/>
-          <p:nvPr/>
-        </p:nvSpPr>
-        <p:spPr>
-          <a:xfrm>
-            <a:off x="1874520" y="4480560"/>
-            <a:ext cx="9509760" cy="530352"/>
-          </a:xfrm>
-          <a:prstGeom prst="rect">
-            <a:avLst/>
-          </a:prstGeom>
-          <a:noFill/>
-          <a:ln/>
-        </p:spPr>
-        <p:txBody>
-          <a:bodyPr wrap="square" lIns="0" tIns="0" rIns="0" bIns="0" rtlCol="0" anchor="ctr"/>
+              <a:rPr lang="en-US" sz="1200" b="1" dirty="0">
+                <a:solidFill>
+                  <a:srgbClr val="1BAF7A"/>
+                </a:solidFill>
+                <a:latin typeface="Yu Gothic" pitchFamily="34" charset="0"/>
+                <a:ea typeface="Yu Gothic" pitchFamily="34" charset="-122"/>
+                <a:cs typeface="Yu Gothic" pitchFamily="34" charset="-120"/>
+              </a:rPr>
+              <a:t>村長・管理者</a:t>
+            </a:r>
+            <a:endParaRPr lang="en-US" sz="1200" dirty="0"/>
+          </a:p>
+        </p:txBody>
+      </p:sp>
+      <p:sp>
+        <p:nvSpPr>
+          <p:cNvPr id="17" name="Text 15"/>
+          <p:cNvSpPr/>
+          <p:nvPr/>
+        </p:nvSpPr>
+        <p:spPr>
+          <a:xfrm>
+            <a:off x="1737360" y="5431536"/>
+            <a:ext cx="9144000" cy="777240"/>
+          </a:xfrm>
+          <a:prstGeom prst="rect">
+            <a:avLst/>
+          </a:prstGeom>
+          <a:noFill/>
+          <a:ln/>
+        </p:spPr>
+        <p:txBody>
+          <a:bodyPr wrap="square" lIns="0" tIns="0" rIns="0" bIns="0" rtlCol="0" anchor="t"/>
           <a:lstStyle/>
           <a:p>
             <a:pPr indent="0" marL="0">
               <a:lnSpc>
-                <a:spcPct val="120000"/>
+                <a:spcPct val="125000"/>
               </a:lnSpc>
               <a:buNone/>
             </a:pPr>
             <a:r>
-              <a:rPr lang="en-US" sz="1150" dirty="0">
+              <a:rPr lang="en-US" sz="1300" i="1" dirty="0">
                 <a:solidFill>
                   <a:srgbClr val="AFC9EE"/>
                 </a:solidFill>
@@ -10247,213 +11614,15 @@
                 <a:ea typeface="Yu Gothic" pitchFamily="34" charset="-122"/>
                 <a:cs typeface="Yu Gothic" pitchFamily="34" charset="-120"/>
               </a:rPr>
-              <a:t>本人は全フェーズで「大丈夫」と言い続けながら、同じログで水路の詰まりを放置し「見てるだけ」と行動が止まっていた。</a:t>
-            </a:r>
-            <a:endParaRPr lang="en-US" sz="1150" dirty="0"/>
-          </a:p>
-        </p:txBody>
-      </p:sp>
-      <p:sp>
-        <p:nvSpPr>
-          <p:cNvPr id="18" name="Shape 13"/>
-          <p:cNvSpPr/>
-          <p:nvPr/>
-        </p:nvSpPr>
-        <p:spPr>
-          <a:xfrm>
-            <a:off x="548640" y="5175504"/>
-            <a:ext cx="11091672" cy="1060704"/>
-          </a:xfrm>
-          <a:prstGeom prst="roundRect">
-            <a:avLst>
-              <a:gd name="adj" fmla="val 10345"/>
-            </a:avLst>
-          </a:prstGeom>
-          <a:solidFill>
-            <a:srgbClr val="1C2C4A"/>
-          </a:solidFill>
-          <a:ln/>
-          <a:effectLst>
-            <a:outerShdw sx="100000" sy="100000" kx="0" ky="0" algn="bl" rotWithShape="0" blurRad="101600" dist="38100" dir="5400000">
-              <a:srgbClr val="000000">
-                <a:alpha val="35000"/>
-              </a:srgbClr>
-            </a:outerShdw>
-          </a:effectLst>
-        </p:spPr>
-      </p:sp>
-      <p:sp>
-        <p:nvSpPr>
-          <p:cNvPr id="19" name="Shape 14"/>
-          <p:cNvSpPr/>
-          <p:nvPr/>
-        </p:nvSpPr>
-        <p:spPr>
-          <a:xfrm>
-            <a:off x="960120" y="5431536"/>
-            <a:ext cx="548640" cy="548640"/>
-          </a:xfrm>
-          <a:prstGeom prst="ellipse">
-            <a:avLst/>
-          </a:prstGeom>
-          <a:solidFill>
-            <a:srgbClr val="E2665A"/>
-          </a:solidFill>
-          <a:ln w="9525">
-            <a:solidFill>
-              <a:srgbClr val="E2665A"/>
-            </a:solidFill>
-            <a:prstDash val="solid"/>
-          </a:ln>
-        </p:spPr>
-      </p:sp>
-      <p:pic>
-        <p:nvPicPr>
-          <p:cNvPr id="20" name="Image 3" descr="preencoded.png">    </p:cNvPr>
-          <p:cNvPicPr>
-            <a:picLocks noChangeAspect="1"/>
-          </p:cNvPicPr>
-          <p:nvPr/>
-        </p:nvPicPr>
-        <p:blipFill>
-          <a:blip r:embed="rId4"/>
-          <a:stretch>
-            <a:fillRect/>
-          </a:stretch>
-        </p:blipFill>
-        <p:spPr>
-          <a:xfrm>
-            <a:off x="1102766" y="5574182"/>
-            <a:ext cx="263347" cy="263347"/>
-          </a:xfrm>
-          <a:prstGeom prst="rect">
-            <a:avLst/>
-          </a:prstGeom>
-        </p:spPr>
-      </p:pic>
-      <p:sp>
-        <p:nvSpPr>
-          <p:cNvPr id="21" name="Text 15"/>
-          <p:cNvSpPr/>
-          <p:nvPr/>
-        </p:nvSpPr>
-        <p:spPr>
-          <a:xfrm>
-            <a:off x="1874520" y="5303520"/>
-            <a:ext cx="9509760" cy="384048"/>
-          </a:xfrm>
-          <a:prstGeom prst="rect">
-            <a:avLst/>
-          </a:prstGeom>
-          <a:noFill/>
-          <a:ln/>
-        </p:spPr>
-        <p:txBody>
-          <a:bodyPr wrap="square" lIns="0" tIns="0" rIns="0" bIns="0" rtlCol="0" anchor="ctr"/>
-          <a:lstStyle/>
-          <a:p>
-            <a:pPr indent="0" marL="0">
-              <a:buNone/>
-            </a:pPr>
-            <a:r>
-              <a:rPr lang="en-US" sz="1400" b="1" dirty="0">
-                <a:solidFill>
-                  <a:srgbClr val="FFFFFF"/>
-                </a:solidFill>
-                <a:latin typeface="Yu Gothic" pitchFamily="34" charset="0"/>
-                <a:ea typeface="Yu Gothic" pitchFamily="34" charset="-122"/>
-                <a:cs typeface="Yu Gothic" pitchFamily="34" charset="-120"/>
-              </a:rPr>
-              <a:t>声を上げにくい住民は救えた。ただし条件付きで</a:t>
-            </a:r>
-            <a:endParaRPr lang="en-US" sz="1400" dirty="0"/>
-          </a:p>
-        </p:txBody>
-      </p:sp>
-      <p:sp>
-        <p:nvSpPr>
-          <p:cNvPr id="22" name="Text 16"/>
-          <p:cNvSpPr/>
-          <p:nvPr/>
-        </p:nvSpPr>
-        <p:spPr>
-          <a:xfrm>
-            <a:off x="1874520" y="5687568"/>
-            <a:ext cx="9509760" cy="530352"/>
-          </a:xfrm>
-          <a:prstGeom prst="rect">
-            <a:avLst/>
-          </a:prstGeom>
-          <a:noFill/>
-          <a:ln/>
-        </p:spPr>
-        <p:txBody>
-          <a:bodyPr wrap="square" lIns="0" tIns="0" rIns="0" bIns="0" rtlCol="0" anchor="ctr"/>
-          <a:lstStyle/>
-          <a:p>
-            <a:pPr indent="0" marL="0">
-              <a:lnSpc>
-                <a:spcPct val="120000"/>
-              </a:lnSpc>
-              <a:buNone/>
-            </a:pPr>
-            <a:r>
-              <a:rPr lang="en-US" sz="1150" dirty="0">
-                <a:solidFill>
-                  <a:srgbClr val="AFC9EE"/>
-                </a:solidFill>
-                <a:latin typeface="Yu Gothic" pitchFamily="34" charset="0"/>
-                <a:ea typeface="Yu Gothic" pitchFamily="34" charset="-122"/>
-                <a:cs typeface="Yu Gothic" pitchFamily="34" charset="-120"/>
-              </a:rPr>
-              <a:t>自律できた回では「助けを求められるか」が40→65〜70に上昇。救ったのは制度ではなく、救済者以外の相談相手が実際に現れたこと。</a:t>
-            </a:r>
-            <a:endParaRPr lang="en-US" sz="1150" dirty="0"/>
-          </a:p>
-        </p:txBody>
-      </p:sp>
-      <p:sp>
-        <p:nvSpPr>
-          <p:cNvPr id="23" name="Text 17"/>
-          <p:cNvSpPr/>
-          <p:nvPr/>
-        </p:nvSpPr>
-        <p:spPr>
-          <a:xfrm>
-            <a:off x="548640" y="6400800"/>
-            <a:ext cx="11091672" cy="292608"/>
-          </a:xfrm>
-          <a:prstGeom prst="rect">
-            <a:avLst/>
-          </a:prstGeom>
-          <a:noFill/>
-          <a:ln/>
-        </p:spPr>
-        <p:txBody>
-          <a:bodyPr wrap="square" lIns="0" tIns="0" rIns="0" bIns="0" rtlCol="0" anchor="ctr"/>
-          <a:lstStyle/>
-          <a:p>
-            <a:pPr algn="ctr" indent="0" marL="0">
-              <a:buNone/>
-            </a:pPr>
-            <a:r>
-              <a:rPr lang="en-US" sz="1000" dirty="0">
-                <a:solidFill>
-                  <a:srgbClr val="5B6480"/>
-                </a:solidFill>
-                <a:latin typeface="Yu Gothic" pitchFamily="34" charset="0"/>
-                <a:ea typeface="Yu Gothic" pitchFamily="34" charset="-122"/>
-                <a:cs typeface="Yu Gothic" pitchFamily="34" charset="-120"/>
-              </a:rPr>
-              <a:t>※ 各条件5回ずつ計15回の実行。LLMによる採点であり、統計的検定を行うにはまだ試行数が少ない。</a:t>
-            </a:r>
-            <a:endParaRPr lang="en-US" sz="1000" dirty="0"/>
-          </a:p>
-        </p:txBody>
-      </p:sp>
-      <p:sp>
-        <p:nvSpPr>
-          <p:cNvPr id="24" name="Text 18"/>
+              <a:t>「制度としては住民同士で相談してもらうのが基本だから、世話好きな住民さんが動いてくれるのはありがたいね。」</a:t>
+            </a:r>
+            <a:endParaRPr lang="en-US" sz="1300" dirty="0"/>
+          </a:p>
+        </p:txBody>
+      </p:sp>
+      <p:sp>
+        <p:nvSpPr>
+          <p:cNvPr id="18" name="Text 16"/>
           <p:cNvSpPr/>
           <p:nvPr/>
         </p:nvSpPr>
@@ -10492,7 +11661,7 @@
       </p:sp>
       <p:sp>
         <p:nvSpPr>
-          <p:cNvPr id="25" name="Text 19"/>
+          <p:cNvPr id="19" name="Text 17"/>
           <p:cNvSpPr/>
           <p:nvPr/>
         </p:nvSpPr>
@@ -10594,7 +11763,7 @@
                 <a:ea typeface="Yu Gothic" pitchFamily="34" charset="-122"/>
                 <a:cs typeface="Yu Gothic" pitchFamily="34" charset="-120"/>
               </a:rPr>
-              <a:t>「意味」から「経営」への翻訳</a:t>
+              <a:t>考察：4つの発見</a:t>
             </a:r>
             <a:endParaRPr lang="en-US" sz="3000" dirty="0"/>
           </a:p>
@@ -10602,100 +11771,22 @@
       </p:sp>
       <p:sp>
         <p:nvSpPr>
-          <p:cNvPr id="3" name="Text 1"/>
+          <p:cNvPr id="3" name="Shape 1"/>
           <p:cNvSpPr/>
           <p:nvPr/>
         </p:nvSpPr>
         <p:spPr>
           <a:xfrm>
             <a:off x="548640" y="1554480"/>
-            <a:ext cx="4937760" cy="320040"/>
-          </a:xfrm>
-          <a:prstGeom prst="rect">
-            <a:avLst/>
-          </a:prstGeom>
-          <a:noFill/>
-          <a:ln/>
-        </p:spPr>
-        <p:txBody>
-          <a:bodyPr wrap="square" lIns="0" tIns="0" rIns="0" bIns="0" rtlCol="0" anchor="ctr"/>
-          <a:lstStyle/>
-          <a:p>
-            <a:pPr indent="0" marL="0">
-              <a:buNone/>
-            </a:pPr>
-            <a:r>
-              <a:rPr lang="en-US" sz="1200" b="1" dirty="0">
-                <a:solidFill>
-                  <a:srgbClr val="E8A33D"/>
-                </a:solidFill>
-                <a:latin typeface="Yu Gothic" pitchFamily="34" charset="0"/>
-                <a:ea typeface="Yu Gothic" pitchFamily="34" charset="-122"/>
-                <a:cs typeface="Yu Gothic" pitchFamily="34" charset="-120"/>
-              </a:rPr>
-              <a:t>Human Value</a:t>
-            </a:r>
-            <a:endParaRPr lang="en-US" sz="1200" dirty="0"/>
-          </a:p>
-        </p:txBody>
-      </p:sp>
-      <p:sp>
-        <p:nvSpPr>
-          <p:cNvPr id="4" name="Text 2"/>
-          <p:cNvSpPr/>
-          <p:nvPr/>
-        </p:nvSpPr>
-        <p:spPr>
-          <a:xfrm>
-            <a:off x="6675120" y="1554480"/>
-            <a:ext cx="4937760" cy="320040"/>
-          </a:xfrm>
-          <a:prstGeom prst="rect">
-            <a:avLst/>
-          </a:prstGeom>
-          <a:noFill/>
-          <a:ln/>
-        </p:spPr>
-        <p:txBody>
-          <a:bodyPr wrap="square" lIns="0" tIns="0" rIns="0" bIns="0" rtlCol="0" anchor="ctr"/>
-          <a:lstStyle/>
-          <a:p>
-            <a:pPr algn="r" indent="0" marL="0">
-              <a:buNone/>
-            </a:pPr>
-            <a:r>
-              <a:rPr lang="en-US" sz="1200" b="1" dirty="0">
-                <a:solidFill>
-                  <a:srgbClr val="5A8FD6"/>
-                </a:solidFill>
-                <a:latin typeface="Yu Gothic" pitchFamily="34" charset="0"/>
-                <a:ea typeface="Yu Gothic" pitchFamily="34" charset="-122"/>
-                <a:cs typeface="Yu Gothic" pitchFamily="34" charset="-120"/>
-              </a:rPr>
-              <a:t>Corporate KPI</a:t>
-            </a:r>
-            <a:endParaRPr lang="en-US" sz="1200" dirty="0"/>
-          </a:p>
-        </p:txBody>
-      </p:sp>
-      <p:sp>
-        <p:nvSpPr>
-          <p:cNvPr id="5" name="Shape 3"/>
-          <p:cNvSpPr/>
-          <p:nvPr/>
-        </p:nvSpPr>
-        <p:spPr>
-          <a:xfrm>
-            <a:off x="548640" y="1965960"/>
-            <a:ext cx="4937760" cy="914400"/>
+            <a:ext cx="11091672" cy="1060704"/>
           </a:xfrm>
           <a:prstGeom prst="roundRect">
             <a:avLst>
-              <a:gd name="adj" fmla="val 12000"/>
+              <a:gd name="adj" fmla="val 10345"/>
             </a:avLst>
           </a:prstGeom>
           <a:solidFill>
-            <a:srgbClr val="1C2C4A"/>
+            <a:srgbClr val="16213A"/>
           </a:solidFill>
           <a:ln/>
           <a:effectLst>
@@ -10709,14 +11800,102 @@
       </p:sp>
       <p:sp>
         <p:nvSpPr>
-          <p:cNvPr id="6" name="Text 4"/>
-          <p:cNvSpPr/>
-          <p:nvPr/>
-        </p:nvSpPr>
-        <p:spPr>
-          <a:xfrm>
-            <a:off x="777240" y="1965960"/>
-            <a:ext cx="4480560" cy="914400"/>
+          <p:cNvPr id="4" name="Shape 2"/>
+          <p:cNvSpPr/>
+          <p:nvPr/>
+        </p:nvSpPr>
+        <p:spPr>
+          <a:xfrm>
+            <a:off x="960120" y="1810512"/>
+            <a:ext cx="548640" cy="548640"/>
+          </a:xfrm>
+          <a:prstGeom prst="ellipse">
+            <a:avLst/>
+          </a:prstGeom>
+          <a:solidFill>
+            <a:srgbClr val="E8A33D"/>
+          </a:solidFill>
+          <a:ln w="9525">
+            <a:solidFill>
+              <a:srgbClr val="E8A33D"/>
+            </a:solidFill>
+            <a:prstDash val="solid"/>
+          </a:ln>
+        </p:spPr>
+      </p:sp>
+      <p:pic>
+        <p:nvPicPr>
+          <p:cNvPr id="5" name="Image 0" descr="preencoded.png">    </p:cNvPr>
+          <p:cNvPicPr>
+            <a:picLocks noChangeAspect="1"/>
+          </p:cNvPicPr>
+          <p:nvPr/>
+        </p:nvPicPr>
+        <p:blipFill>
+          <a:blip r:embed="rId1"/>
+          <a:stretch>
+            <a:fillRect/>
+          </a:stretch>
+        </p:blipFill>
+        <p:spPr>
+          <a:xfrm>
+            <a:off x="1102766" y="1953158"/>
+            <a:ext cx="263347" cy="263347"/>
+          </a:xfrm>
+          <a:prstGeom prst="rect">
+            <a:avLst/>
+          </a:prstGeom>
+        </p:spPr>
+      </p:pic>
+      <p:sp>
+        <p:nvSpPr>
+          <p:cNvPr id="6" name="Text 3"/>
+          <p:cNvSpPr/>
+          <p:nvPr/>
+        </p:nvSpPr>
+        <p:spPr>
+          <a:xfrm>
+            <a:off x="1874520" y="1682496"/>
+            <a:ext cx="9509760" cy="384048"/>
+          </a:xfrm>
+          <a:prstGeom prst="rect">
+            <a:avLst/>
+          </a:prstGeom>
+          <a:noFill/>
+          <a:ln/>
+        </p:spPr>
+        <p:txBody>
+          <a:bodyPr wrap="square" lIns="0" tIns="0" rIns="0" bIns="0" rtlCol="0" anchor="ctr"/>
+          <a:lstStyle/>
+          <a:p>
+            <a:pPr indent="0" marL="0">
+              <a:buNone/>
+            </a:pPr>
+            <a:r>
+              <a:rPr lang="en-US" sz="1400" b="1" dirty="0">
+                <a:solidFill>
+                  <a:srgbClr val="FFFFFF"/>
+                </a:solidFill>
+                <a:latin typeface="Yu Gothic" pitchFamily="34" charset="0"/>
+                <a:ea typeface="Yu Gothic" pitchFamily="34" charset="-122"/>
+                <a:cs typeface="Yu Gothic" pitchFamily="34" charset="-120"/>
+              </a:rPr>
+              <a:t>依存の代償は、危機の前から発生している</a:t>
+            </a:r>
+            <a:endParaRPr lang="en-US" sz="1400" dirty="0"/>
+          </a:p>
+        </p:txBody>
+      </p:sp>
+      <p:sp>
+        <p:nvSpPr>
+          <p:cNvPr id="7" name="Text 4"/>
+          <p:cNvSpPr/>
+          <p:nvPr/>
+        </p:nvSpPr>
+        <p:spPr>
+          <a:xfrm>
+            <a:off x="1874520" y="2066544"/>
+            <a:ext cx="9509760" cy="530352"/>
           </a:xfrm>
           <a:prstGeom prst="rect">
             <a:avLst/>
@@ -10735,73 +11914,34 @@
               <a:buNone/>
             </a:pPr>
             <a:r>
-              <a:rPr lang="en-US" sz="1300" i="1" dirty="0">
-                <a:solidFill>
-                  <a:srgbClr val="F4C878"/>
-                </a:solidFill>
-                <a:latin typeface="Yu Gothic" pitchFamily="34" charset="0"/>
-                <a:ea typeface="Yu Gothic" pitchFamily="34" charset="-122"/>
-                <a:cs typeface="Yu Gothic" pitchFamily="34" charset="-120"/>
-              </a:rPr>
-              <a:t>「この人がいたことで、安心して活動できた」</a:t>
-            </a:r>
-            <a:endParaRPr lang="en-US" sz="1300" dirty="0"/>
-          </a:p>
-        </p:txBody>
-      </p:sp>
-      <p:sp>
-        <p:nvSpPr>
-          <p:cNvPr id="7" name="Text 5"/>
-          <p:cNvSpPr/>
-          <p:nvPr/>
-        </p:nvSpPr>
-        <p:spPr>
-          <a:xfrm>
-            <a:off x="5623560" y="1965960"/>
-            <a:ext cx="914400" cy="914400"/>
-          </a:xfrm>
-          <a:prstGeom prst="rect">
-            <a:avLst/>
-          </a:prstGeom>
-          <a:noFill/>
-          <a:ln/>
-        </p:spPr>
-        <p:txBody>
-          <a:bodyPr wrap="square" lIns="0" tIns="0" rIns="0" bIns="0" rtlCol="0" anchor="ctr"/>
-          <a:lstStyle/>
-          <a:p>
-            <a:pPr algn="ctr" indent="0" marL="0">
-              <a:buNone/>
-            </a:pPr>
-            <a:r>
-              <a:rPr lang="en-US" sz="2200" dirty="0">
-                <a:solidFill>
-                  <a:srgbClr val="9AA4C0"/>
-                </a:solidFill>
-                <a:latin typeface="Yu Gothic" pitchFamily="34" charset="0"/>
-                <a:ea typeface="Yu Gothic" pitchFamily="34" charset="-122"/>
-                <a:cs typeface="Yu Gothic" pitchFamily="34" charset="-120"/>
-              </a:rPr>
-              <a:t>→</a:t>
-            </a:r>
-            <a:endParaRPr lang="en-US" sz="2200" dirty="0"/>
-          </a:p>
-        </p:txBody>
-      </p:sp>
-      <p:sp>
-        <p:nvSpPr>
-          <p:cNvPr id="8" name="Shape 6"/>
-          <p:cNvSpPr/>
-          <p:nvPr/>
-        </p:nvSpPr>
-        <p:spPr>
-          <a:xfrm>
-            <a:off x="6675120" y="1965960"/>
-            <a:ext cx="4937760" cy="914400"/>
+              <a:rPr lang="en-US" sz="1150" dirty="0">
+                <a:solidFill>
+                  <a:srgbClr val="AFC9EE"/>
+                </a:solidFill>
+                <a:latin typeface="Yu Gothic" pitchFamily="34" charset="0"/>
+                <a:ea typeface="Yu Gothic" pitchFamily="34" charset="-122"/>
+                <a:cs typeface="Yu Gothic" pitchFamily="34" charset="-120"/>
+              </a:rPr>
+              <a:t>危機の起きないA条件でも救済者依存度は88でB条件（90）とほぼ同じ。壊れるのは危機の瞬間ではなく、運用設計の時点で決まっている。</a:t>
+            </a:r>
+            <a:endParaRPr lang="en-US" sz="1150" dirty="0"/>
+          </a:p>
+        </p:txBody>
+      </p:sp>
+      <p:sp>
+        <p:nvSpPr>
+          <p:cNvPr id="8" name="Shape 5"/>
+          <p:cNvSpPr/>
+          <p:nvPr/>
+        </p:nvSpPr>
+        <p:spPr>
+          <a:xfrm>
+            <a:off x="548640" y="2761488"/>
+            <a:ext cx="11091672" cy="1060704"/>
           </a:xfrm>
           <a:prstGeom prst="roundRect">
             <a:avLst>
-              <a:gd name="adj" fmla="val 12000"/>
+              <a:gd name="adj" fmla="val 10345"/>
             </a:avLst>
           </a:prstGeom>
           <a:solidFill>
@@ -10819,14 +11959,102 @@
       </p:sp>
       <p:sp>
         <p:nvSpPr>
-          <p:cNvPr id="9" name="Text 7"/>
-          <p:cNvSpPr/>
-          <p:nvPr/>
-        </p:nvSpPr>
-        <p:spPr>
-          <a:xfrm>
-            <a:off x="6903720" y="1965960"/>
-            <a:ext cx="4480560" cy="914400"/>
+          <p:cNvPr id="9" name="Shape 6"/>
+          <p:cNvSpPr/>
+          <p:nvPr/>
+        </p:nvSpPr>
+        <p:spPr>
+          <a:xfrm>
+            <a:off x="960120" y="3017520"/>
+            <a:ext cx="548640" cy="548640"/>
+          </a:xfrm>
+          <a:prstGeom prst="ellipse">
+            <a:avLst/>
+          </a:prstGeom>
+          <a:solidFill>
+            <a:srgbClr val="E8A33D"/>
+          </a:solidFill>
+          <a:ln w="9525">
+            <a:solidFill>
+              <a:srgbClr val="E8A33D"/>
+            </a:solidFill>
+            <a:prstDash val="solid"/>
+          </a:ln>
+        </p:spPr>
+      </p:sp>
+      <p:pic>
+        <p:nvPicPr>
+          <p:cNvPr id="10" name="Image 1" descr="preencoded.png">    </p:cNvPr>
+          <p:cNvPicPr>
+            <a:picLocks noChangeAspect="1"/>
+          </p:cNvPicPr>
+          <p:nvPr/>
+        </p:nvPicPr>
+        <p:blipFill>
+          <a:blip r:embed="rId2"/>
+          <a:stretch>
+            <a:fillRect/>
+          </a:stretch>
+        </p:blipFill>
+        <p:spPr>
+          <a:xfrm>
+            <a:off x="1102766" y="3160166"/>
+            <a:ext cx="263347" cy="263347"/>
+          </a:xfrm>
+          <a:prstGeom prst="rect">
+            <a:avLst/>
+          </a:prstGeom>
+        </p:spPr>
+      </p:pic>
+      <p:sp>
+        <p:nvSpPr>
+          <p:cNvPr id="11" name="Text 7"/>
+          <p:cNvSpPr/>
+          <p:nvPr/>
+        </p:nvSpPr>
+        <p:spPr>
+          <a:xfrm>
+            <a:off x="1874520" y="2889504"/>
+            <a:ext cx="9509760" cy="384048"/>
+          </a:xfrm>
+          <a:prstGeom prst="rect">
+            <a:avLst/>
+          </a:prstGeom>
+          <a:noFill/>
+          <a:ln/>
+        </p:spPr>
+        <p:txBody>
+          <a:bodyPr wrap="square" lIns="0" tIns="0" rIns="0" bIns="0" rtlCol="0" anchor="ctr"/>
+          <a:lstStyle/>
+          <a:p>
+            <a:pPr indent="0" marL="0">
+              <a:buNone/>
+            </a:pPr>
+            <a:r>
+              <a:rPr lang="en-US" sz="1400" b="1" dirty="0">
+                <a:solidFill>
+                  <a:srgbClr val="FFFFFF"/>
+                </a:solidFill>
+                <a:latin typeface="Yu Gothic" pitchFamily="34" charset="0"/>
+                <a:ea typeface="Yu Gothic" pitchFamily="34" charset="-122"/>
+                <a:cs typeface="Yu Gothic" pitchFamily="34" charset="-120"/>
+              </a:rPr>
+              <a:t>依存は安定し、自律は不安定である</a:t>
+            </a:r>
+            <a:endParaRPr lang="en-US" sz="1400" dirty="0"/>
+          </a:p>
+        </p:txBody>
+      </p:sp>
+      <p:sp>
+        <p:nvSpPr>
+          <p:cNvPr id="12" name="Text 8"/>
+          <p:cNvSpPr/>
+          <p:nvPr/>
+        </p:nvSpPr>
+        <p:spPr>
+          <a:xfrm>
+            <a:off x="1874520" y="3273552"/>
+            <a:ext cx="9509760" cy="530352"/>
           </a:xfrm>
           <a:prstGeom prst="rect">
             <a:avLst/>
@@ -10845,38 +12073,38 @@
               <a:buNone/>
             </a:pPr>
             <a:r>
-              <a:rPr lang="en-US" sz="1300" b="1" dirty="0">
-                <a:solidFill>
-                  <a:srgbClr val="5A8FD6"/>
-                </a:solidFill>
-                <a:latin typeface="Yu Gothic" pitchFamily="34" charset="0"/>
-                <a:ea typeface="Yu Gothic" pitchFamily="34" charset="-122"/>
-                <a:cs typeface="Yu Gothic" pitchFamily="34" charset="-120"/>
-              </a:rPr>
-              <a:t>オンボーディング成功・参加継続率の向上</a:t>
-            </a:r>
-            <a:endParaRPr lang="en-US" sz="1300" dirty="0"/>
-          </a:p>
-        </p:txBody>
-      </p:sp>
-      <p:sp>
-        <p:nvSpPr>
-          <p:cNvPr id="10" name="Shape 8"/>
-          <p:cNvSpPr/>
-          <p:nvPr/>
-        </p:nvSpPr>
-        <p:spPr>
-          <a:xfrm>
-            <a:off x="548640" y="3063240"/>
-            <a:ext cx="4937760" cy="914400"/>
+              <a:rPr lang="en-US" sz="1150" dirty="0">
+                <a:solidFill>
+                  <a:srgbClr val="AFC9EE"/>
+                </a:solidFill>
+                <a:latin typeface="Yu Gothic" pitchFamily="34" charset="0"/>
+                <a:ea typeface="Yu Gothic" pitchFamily="34" charset="-122"/>
+                <a:cs typeface="Yu Gothic" pitchFamily="34" charset="-120"/>
+              </a:rPr>
+              <a:t>A・Bの標準偏差はほぼ0で毎回きっちり再現される。一方Cは±20〜26。悪い状態のほうが「安定」しているという非対称性がある。</a:t>
+            </a:r>
+            <a:endParaRPr lang="en-US" sz="1150" dirty="0"/>
+          </a:p>
+        </p:txBody>
+      </p:sp>
+      <p:sp>
+        <p:nvSpPr>
+          <p:cNvPr id="13" name="Shape 9"/>
+          <p:cNvSpPr/>
+          <p:nvPr/>
+        </p:nvSpPr>
+        <p:spPr>
+          <a:xfrm>
+            <a:off x="548640" y="3968496"/>
+            <a:ext cx="11091672" cy="1060704"/>
           </a:xfrm>
           <a:prstGeom prst="roundRect">
             <a:avLst>
-              <a:gd name="adj" fmla="val 12000"/>
+              <a:gd name="adj" fmla="val 10345"/>
             </a:avLst>
           </a:prstGeom>
           <a:solidFill>
-            <a:srgbClr val="1C2C4A"/>
+            <a:srgbClr val="16213A"/>
           </a:solidFill>
           <a:ln/>
           <a:effectLst>
@@ -10890,14 +12118,102 @@
       </p:sp>
       <p:sp>
         <p:nvSpPr>
-          <p:cNvPr id="11" name="Text 9"/>
-          <p:cNvSpPr/>
-          <p:nvPr/>
-        </p:nvSpPr>
-        <p:spPr>
-          <a:xfrm>
-            <a:off x="777240" y="3063240"/>
-            <a:ext cx="4480560" cy="914400"/>
+          <p:cNvPr id="14" name="Shape 10"/>
+          <p:cNvSpPr/>
+          <p:nvPr/>
+        </p:nvSpPr>
+        <p:spPr>
+          <a:xfrm>
+            <a:off x="960120" y="4224528"/>
+            <a:ext cx="548640" cy="548640"/>
+          </a:xfrm>
+          <a:prstGeom prst="ellipse">
+            <a:avLst/>
+          </a:prstGeom>
+          <a:solidFill>
+            <a:srgbClr val="E8A33D"/>
+          </a:solidFill>
+          <a:ln w="9525">
+            <a:solidFill>
+              <a:srgbClr val="E8A33D"/>
+            </a:solidFill>
+            <a:prstDash val="solid"/>
+          </a:ln>
+        </p:spPr>
+      </p:sp>
+      <p:pic>
+        <p:nvPicPr>
+          <p:cNvPr id="15" name="Image 2" descr="preencoded.png">    </p:cNvPr>
+          <p:cNvPicPr>
+            <a:picLocks noChangeAspect="1"/>
+          </p:cNvPicPr>
+          <p:nvPr/>
+        </p:nvPicPr>
+        <p:blipFill>
+          <a:blip r:embed="rId3"/>
+          <a:stretch>
+            <a:fillRect/>
+          </a:stretch>
+        </p:blipFill>
+        <p:spPr>
+          <a:xfrm>
+            <a:off x="1102766" y="4367174"/>
+            <a:ext cx="263347" cy="263347"/>
+          </a:xfrm>
+          <a:prstGeom prst="rect">
+            <a:avLst/>
+          </a:prstGeom>
+        </p:spPr>
+      </p:pic>
+      <p:sp>
+        <p:nvSpPr>
+          <p:cNvPr id="16" name="Text 11"/>
+          <p:cNvSpPr/>
+          <p:nvPr/>
+        </p:nvSpPr>
+        <p:spPr>
+          <a:xfrm>
+            <a:off x="1874520" y="4096512"/>
+            <a:ext cx="9509760" cy="384048"/>
+          </a:xfrm>
+          <a:prstGeom prst="rect">
+            <a:avLst/>
+          </a:prstGeom>
+          <a:noFill/>
+          <a:ln/>
+        </p:spPr>
+        <p:txBody>
+          <a:bodyPr wrap="square" lIns="0" tIns="0" rIns="0" bIns="0" rtlCol="0" anchor="ctr"/>
+          <a:lstStyle/>
+          <a:p>
+            <a:pPr indent="0" marL="0">
+              <a:buNone/>
+            </a:pPr>
+            <a:r>
+              <a:rPr lang="en-US" sz="1400" b="1" dirty="0">
+                <a:solidFill>
+                  <a:srgbClr val="FFFFFF"/>
+                </a:solidFill>
+                <a:latin typeface="Yu Gothic" pitchFamily="34" charset="0"/>
+                <a:ea typeface="Yu Gothic" pitchFamily="34" charset="-122"/>
+                <a:cs typeface="Yu Gothic" pitchFamily="34" charset="-120"/>
+              </a:rPr>
+              <a:t>「大丈夫です」は安全のサインではなかった</a:t>
+            </a:r>
+            <a:endParaRPr lang="en-US" sz="1400" dirty="0"/>
+          </a:p>
+        </p:txBody>
+      </p:sp>
+      <p:sp>
+        <p:nvSpPr>
+          <p:cNvPr id="17" name="Text 12"/>
+          <p:cNvSpPr/>
+          <p:nvPr/>
+        </p:nvSpPr>
+        <p:spPr>
+          <a:xfrm>
+            <a:off x="1874520" y="4480560"/>
+            <a:ext cx="9509760" cy="530352"/>
           </a:xfrm>
           <a:prstGeom prst="rect">
             <a:avLst/>
@@ -10916,77 +12232,38 @@
               <a:buNone/>
             </a:pPr>
             <a:r>
-              <a:rPr lang="en-US" sz="1300" i="1" dirty="0">
-                <a:solidFill>
-                  <a:srgbClr val="F4C878"/>
-                </a:solidFill>
-                <a:latin typeface="Yu Gothic" pitchFamily="34" charset="0"/>
-                <a:ea typeface="Yu Gothic" pitchFamily="34" charset="-122"/>
-                <a:cs typeface="Yu Gothic" pitchFamily="34" charset="-120"/>
-              </a:rPr>
-              <a:t>「孤立せずに済んだ／対立が翻訳された」</a:t>
-            </a:r>
-            <a:endParaRPr lang="en-US" sz="1300" dirty="0"/>
-          </a:p>
-        </p:txBody>
-      </p:sp>
-      <p:sp>
-        <p:nvSpPr>
-          <p:cNvPr id="12" name="Text 10"/>
-          <p:cNvSpPr/>
-          <p:nvPr/>
-        </p:nvSpPr>
-        <p:spPr>
-          <a:xfrm>
-            <a:off x="5623560" y="3063240"/>
-            <a:ext cx="914400" cy="914400"/>
-          </a:xfrm>
-          <a:prstGeom prst="rect">
-            <a:avLst/>
-          </a:prstGeom>
-          <a:noFill/>
-          <a:ln/>
-        </p:spPr>
-        <p:txBody>
-          <a:bodyPr wrap="square" lIns="0" tIns="0" rIns="0" bIns="0" rtlCol="0" anchor="ctr"/>
-          <a:lstStyle/>
-          <a:p>
-            <a:pPr algn="ctr" indent="0" marL="0">
-              <a:buNone/>
-            </a:pPr>
-            <a:r>
-              <a:rPr lang="en-US" sz="2200" dirty="0">
-                <a:solidFill>
-                  <a:srgbClr val="9AA4C0"/>
-                </a:solidFill>
-                <a:latin typeface="Yu Gothic" pitchFamily="34" charset="0"/>
-                <a:ea typeface="Yu Gothic" pitchFamily="34" charset="-122"/>
-                <a:cs typeface="Yu Gothic" pitchFamily="34" charset="-120"/>
-              </a:rPr>
-              <a:t>→</a:t>
-            </a:r>
-            <a:endParaRPr lang="en-US" sz="2200" dirty="0"/>
-          </a:p>
-        </p:txBody>
-      </p:sp>
-      <p:sp>
-        <p:nvSpPr>
-          <p:cNvPr id="13" name="Shape 11"/>
-          <p:cNvSpPr/>
-          <p:nvPr/>
-        </p:nvSpPr>
-        <p:spPr>
-          <a:xfrm>
-            <a:off x="6675120" y="3063240"/>
-            <a:ext cx="4937760" cy="914400"/>
+              <a:rPr lang="en-US" sz="1150" dirty="0">
+                <a:solidFill>
+                  <a:srgbClr val="AFC9EE"/>
+                </a:solidFill>
+                <a:latin typeface="Yu Gothic" pitchFamily="34" charset="0"/>
+                <a:ea typeface="Yu Gothic" pitchFamily="34" charset="-122"/>
+                <a:cs typeface="Yu Gothic" pitchFamily="34" charset="-120"/>
+              </a:rPr>
+              <a:t>本人は全フェーズで「大丈夫」と言い続けながら、同じログで水路の詰まりを放置し「見てるだけ」と行動が止まっていた。</a:t>
+            </a:r>
+            <a:endParaRPr lang="en-US" sz="1150" dirty="0"/>
+          </a:p>
+        </p:txBody>
+      </p:sp>
+      <p:sp>
+        <p:nvSpPr>
+          <p:cNvPr id="18" name="Shape 13"/>
+          <p:cNvSpPr/>
+          <p:nvPr/>
+        </p:nvSpPr>
+        <p:spPr>
+          <a:xfrm>
+            <a:off x="548640" y="5175504"/>
+            <a:ext cx="11091672" cy="1060704"/>
           </a:xfrm>
           <a:prstGeom prst="roundRect">
             <a:avLst>
-              <a:gd name="adj" fmla="val 12000"/>
+              <a:gd name="adj" fmla="val 10345"/>
             </a:avLst>
           </a:prstGeom>
           <a:solidFill>
-            <a:srgbClr val="16213A"/>
+            <a:srgbClr val="1C2C4A"/>
           </a:solidFill>
           <a:ln/>
           <a:effectLst>
@@ -11000,14 +12277,102 @@
       </p:sp>
       <p:sp>
         <p:nvSpPr>
-          <p:cNvPr id="14" name="Text 12"/>
-          <p:cNvSpPr/>
-          <p:nvPr/>
-        </p:nvSpPr>
-        <p:spPr>
-          <a:xfrm>
-            <a:off x="6903720" y="3063240"/>
-            <a:ext cx="4480560" cy="914400"/>
+          <p:cNvPr id="19" name="Shape 14"/>
+          <p:cNvSpPr/>
+          <p:nvPr/>
+        </p:nvSpPr>
+        <p:spPr>
+          <a:xfrm>
+            <a:off x="960120" y="5431536"/>
+            <a:ext cx="548640" cy="548640"/>
+          </a:xfrm>
+          <a:prstGeom prst="ellipse">
+            <a:avLst/>
+          </a:prstGeom>
+          <a:solidFill>
+            <a:srgbClr val="E2665A"/>
+          </a:solidFill>
+          <a:ln w="9525">
+            <a:solidFill>
+              <a:srgbClr val="E2665A"/>
+            </a:solidFill>
+            <a:prstDash val="solid"/>
+          </a:ln>
+        </p:spPr>
+      </p:sp>
+      <p:pic>
+        <p:nvPicPr>
+          <p:cNvPr id="20" name="Image 3" descr="preencoded.png">    </p:cNvPr>
+          <p:cNvPicPr>
+            <a:picLocks noChangeAspect="1"/>
+          </p:cNvPicPr>
+          <p:nvPr/>
+        </p:nvPicPr>
+        <p:blipFill>
+          <a:blip r:embed="rId4"/>
+          <a:stretch>
+            <a:fillRect/>
+          </a:stretch>
+        </p:blipFill>
+        <p:spPr>
+          <a:xfrm>
+            <a:off x="1102766" y="5574182"/>
+            <a:ext cx="263347" cy="263347"/>
+          </a:xfrm>
+          <a:prstGeom prst="rect">
+            <a:avLst/>
+          </a:prstGeom>
+        </p:spPr>
+      </p:pic>
+      <p:sp>
+        <p:nvSpPr>
+          <p:cNvPr id="21" name="Text 15"/>
+          <p:cNvSpPr/>
+          <p:nvPr/>
+        </p:nvSpPr>
+        <p:spPr>
+          <a:xfrm>
+            <a:off x="1874520" y="5303520"/>
+            <a:ext cx="9509760" cy="384048"/>
+          </a:xfrm>
+          <a:prstGeom prst="rect">
+            <a:avLst/>
+          </a:prstGeom>
+          <a:noFill/>
+          <a:ln/>
+        </p:spPr>
+        <p:txBody>
+          <a:bodyPr wrap="square" lIns="0" tIns="0" rIns="0" bIns="0" rtlCol="0" anchor="ctr"/>
+          <a:lstStyle/>
+          <a:p>
+            <a:pPr indent="0" marL="0">
+              <a:buNone/>
+            </a:pPr>
+            <a:r>
+              <a:rPr lang="en-US" sz="1400" b="1" dirty="0">
+                <a:solidFill>
+                  <a:srgbClr val="FFFFFF"/>
+                </a:solidFill>
+                <a:latin typeface="Yu Gothic" pitchFamily="34" charset="0"/>
+                <a:ea typeface="Yu Gothic" pitchFamily="34" charset="-122"/>
+                <a:cs typeface="Yu Gothic" pitchFamily="34" charset="-120"/>
+              </a:rPr>
+              <a:t>構造は頑健で、テコは脆かった</a:t>
+            </a:r>
+            <a:endParaRPr lang="en-US" sz="1400" dirty="0"/>
+          </a:p>
+        </p:txBody>
+      </p:sp>
+      <p:sp>
+        <p:nvSpPr>
+          <p:cNvPr id="22" name="Text 16"/>
+          <p:cNvSpPr/>
+          <p:nvPr/>
+        </p:nvSpPr>
+        <p:spPr>
+          <a:xfrm>
+            <a:off x="1874520" y="5687568"/>
+            <a:ext cx="9509760" cy="530352"/>
           </a:xfrm>
           <a:prstGeom prst="rect">
             <a:avLst/>
@@ -11026,101 +12391,30 @@
               <a:buNone/>
             </a:pPr>
             <a:r>
-              <a:rPr lang="en-US" sz="1300" b="1" dirty="0">
-                <a:solidFill>
-                  <a:srgbClr val="5A8FD6"/>
-                </a:solidFill>
-                <a:latin typeface="Yu Gothic" pitchFamily="34" charset="0"/>
-                <a:ea typeface="Yu Gothic" pitchFamily="34" charset="-122"/>
-                <a:cs typeface="Yu Gothic" pitchFamily="34" charset="-120"/>
-              </a:rPr>
-              <a:t>離脱コストの回避・炎上防止</a:t>
-            </a:r>
-            <a:endParaRPr lang="en-US" sz="1300" dirty="0"/>
-          </a:p>
-        </p:txBody>
-      </p:sp>
-      <p:sp>
-        <p:nvSpPr>
-          <p:cNvPr id="15" name="Shape 13"/>
-          <p:cNvSpPr/>
-          <p:nvPr/>
-        </p:nvSpPr>
-        <p:spPr>
-          <a:xfrm>
-            <a:off x="548640" y="4160520"/>
-            <a:ext cx="4937760" cy="914400"/>
-          </a:xfrm>
-          <a:prstGeom prst="roundRect">
-            <a:avLst>
-              <a:gd name="adj" fmla="val 12000"/>
-            </a:avLst>
-          </a:prstGeom>
-          <a:solidFill>
-            <a:srgbClr val="1C2C4A"/>
-          </a:solidFill>
-          <a:ln/>
-          <a:effectLst>
-            <a:outerShdw sx="100000" sy="100000" kx="0" ky="0" algn="bl" rotWithShape="0" blurRad="101600" dist="38100" dir="5400000">
-              <a:srgbClr val="000000">
-                <a:alpha val="35000"/>
-              </a:srgbClr>
-            </a:outerShdw>
-          </a:effectLst>
-        </p:spPr>
-      </p:sp>
-      <p:sp>
-        <p:nvSpPr>
-          <p:cNvPr id="16" name="Text 14"/>
-          <p:cNvSpPr/>
-          <p:nvPr/>
-        </p:nvSpPr>
-        <p:spPr>
-          <a:xfrm>
-            <a:off x="777240" y="4160520"/>
-            <a:ext cx="4480560" cy="914400"/>
-          </a:xfrm>
-          <a:prstGeom prst="rect">
-            <a:avLst/>
-          </a:prstGeom>
-          <a:noFill/>
-          <a:ln/>
-        </p:spPr>
-        <p:txBody>
-          <a:bodyPr wrap="square" lIns="0" tIns="0" rIns="0" bIns="0" rtlCol="0" anchor="ctr"/>
-          <a:lstStyle/>
-          <a:p>
-            <a:pPr indent="0" marL="0">
-              <a:lnSpc>
-                <a:spcPct val="120000"/>
-              </a:lnSpc>
-              <a:buNone/>
-            </a:pPr>
-            <a:r>
-              <a:rPr lang="en-US" sz="1300" i="1" dirty="0">
-                <a:solidFill>
-                  <a:srgbClr val="F4C878"/>
-                </a:solidFill>
-                <a:latin typeface="Yu Gothic" pitchFamily="34" charset="0"/>
-                <a:ea typeface="Yu Gothic" pitchFamily="34" charset="-122"/>
-                <a:cs typeface="Yu Gothic" pitchFamily="34" charset="-120"/>
-              </a:rPr>
-              <a:t>「自分でも問題に対処できるようになった」</a:t>
-            </a:r>
-            <a:endParaRPr lang="en-US" sz="1300" dirty="0"/>
-          </a:p>
-        </p:txBody>
-      </p:sp>
-      <p:sp>
-        <p:nvSpPr>
-          <p:cNvPr id="17" name="Text 15"/>
-          <p:cNvSpPr/>
-          <p:nvPr/>
-        </p:nvSpPr>
-        <p:spPr>
-          <a:xfrm>
-            <a:off x="5623560" y="4160520"/>
-            <a:ext cx="914400" cy="914400"/>
+              <a:rPr lang="en-US" sz="1150" dirty="0">
+                <a:solidFill>
+                  <a:srgbClr val="AFC9EE"/>
+                </a:solidFill>
+                <a:latin typeface="Yu Gothic" pitchFamily="34" charset="0"/>
+                <a:ea typeface="Yu Gothic" pitchFamily="34" charset="-122"/>
+                <a:cs typeface="Yu Gothic" pitchFamily="34" charset="-120"/>
+              </a:rPr>
+              <a:t>村が2つの状態に分かれること自体は別モデルでも再現した。しかし「何を変えれば動くか」は再現せず、モデル依存だった。</a:t>
+            </a:r>
+            <a:endParaRPr lang="en-US" sz="1150" dirty="0"/>
+          </a:p>
+        </p:txBody>
+      </p:sp>
+      <p:sp>
+        <p:nvSpPr>
+          <p:cNvPr id="23" name="Text 17"/>
+          <p:cNvSpPr/>
+          <p:nvPr/>
+        </p:nvSpPr>
+        <p:spPr>
+          <a:xfrm>
+            <a:off x="548640" y="6400800"/>
+            <a:ext cx="11091672" cy="292608"/>
           </a:xfrm>
           <a:prstGeom prst="rect">
             <a:avLst/>
@@ -11136,162 +12430,23 @@
               <a:buNone/>
             </a:pPr>
             <a:r>
-              <a:rPr lang="en-US" sz="2200" dirty="0">
-                <a:solidFill>
-                  <a:srgbClr val="9AA4C0"/>
-                </a:solidFill>
-                <a:latin typeface="Yu Gothic" pitchFamily="34" charset="0"/>
-                <a:ea typeface="Yu Gothic" pitchFamily="34" charset="-122"/>
-                <a:cs typeface="Yu Gothic" pitchFamily="34" charset="-120"/>
-              </a:rPr>
-              <a:t>→</a:t>
-            </a:r>
-            <a:endParaRPr lang="en-US" sz="2200" dirty="0"/>
-          </a:p>
-        </p:txBody>
-      </p:sp>
-      <p:sp>
-        <p:nvSpPr>
-          <p:cNvPr id="18" name="Shape 16"/>
-          <p:cNvSpPr/>
-          <p:nvPr/>
-        </p:nvSpPr>
-        <p:spPr>
-          <a:xfrm>
-            <a:off x="6675120" y="4160520"/>
-            <a:ext cx="4937760" cy="914400"/>
-          </a:xfrm>
-          <a:prstGeom prst="roundRect">
-            <a:avLst>
-              <a:gd name="adj" fmla="val 12000"/>
-            </a:avLst>
-          </a:prstGeom>
-          <a:solidFill>
-            <a:srgbClr val="16213A"/>
-          </a:solidFill>
-          <a:ln/>
-          <a:effectLst>
-            <a:outerShdw sx="100000" sy="100000" kx="0" ky="0" algn="bl" rotWithShape="0" blurRad="101600" dist="38100" dir="5400000">
-              <a:srgbClr val="000000">
-                <a:alpha val="35000"/>
-              </a:srgbClr>
-            </a:outerShdw>
-          </a:effectLst>
-        </p:spPr>
-      </p:sp>
-      <p:sp>
-        <p:nvSpPr>
-          <p:cNvPr id="19" name="Text 17"/>
-          <p:cNvSpPr/>
-          <p:nvPr/>
-        </p:nvSpPr>
-        <p:spPr>
-          <a:xfrm>
-            <a:off x="6903720" y="4160520"/>
-            <a:ext cx="4480560" cy="914400"/>
-          </a:xfrm>
-          <a:prstGeom prst="rect">
-            <a:avLst/>
-          </a:prstGeom>
-          <a:noFill/>
-          <a:ln/>
-        </p:spPr>
-        <p:txBody>
-          <a:bodyPr wrap="square" lIns="0" tIns="0" rIns="0" bIns="0" rtlCol="0" anchor="ctr"/>
-          <a:lstStyle/>
-          <a:p>
-            <a:pPr indent="0" marL="0">
-              <a:lnSpc>
-                <a:spcPct val="120000"/>
-              </a:lnSpc>
-              <a:buNone/>
-            </a:pPr>
-            <a:r>
-              <a:rPr lang="en-US" sz="1300" b="1" dirty="0">
-                <a:solidFill>
-                  <a:srgbClr val="5A8FD6"/>
-                </a:solidFill>
-                <a:latin typeface="Yu Gothic" pitchFamily="34" charset="0"/>
-                <a:ea typeface="Yu Gothic" pitchFamily="34" charset="-122"/>
-                <a:cs typeface="Yu Gothic" pitchFamily="34" charset="-120"/>
-              </a:rPr>
-              <a:t>組織のレジリエンス向上・意思決定の高速化</a:t>
-            </a:r>
-            <a:endParaRPr lang="en-US" sz="1300" dirty="0"/>
-          </a:p>
-        </p:txBody>
-      </p:sp>
-      <p:sp>
-        <p:nvSpPr>
-          <p:cNvPr id="20" name="Shape 18"/>
-          <p:cNvSpPr/>
-          <p:nvPr/>
-        </p:nvSpPr>
-        <p:spPr>
-          <a:xfrm>
-            <a:off x="548640" y="5303520"/>
-            <a:ext cx="11091672" cy="822960"/>
-          </a:xfrm>
-          <a:prstGeom prst="roundRect">
-            <a:avLst>
-              <a:gd name="adj" fmla="val 11111"/>
-            </a:avLst>
-          </a:prstGeom>
-          <a:solidFill>
-            <a:srgbClr val="16213A"/>
-          </a:solidFill>
-          <a:ln/>
-          <a:effectLst>
-            <a:outerShdw sx="100000" sy="100000" kx="0" ky="0" algn="bl" rotWithShape="0" blurRad="101600" dist="38100" dir="5400000">
-              <a:srgbClr val="000000">
-                <a:alpha val="35000"/>
-              </a:srgbClr>
-            </a:outerShdw>
-          </a:effectLst>
-        </p:spPr>
-      </p:sp>
-      <p:sp>
-        <p:nvSpPr>
-          <p:cNvPr id="21" name="Text 19"/>
-          <p:cNvSpPr/>
-          <p:nvPr/>
-        </p:nvSpPr>
-        <p:spPr>
-          <a:xfrm>
-            <a:off x="868680" y="5303520"/>
-            <a:ext cx="10515600" cy="822960"/>
-          </a:xfrm>
-          <a:prstGeom prst="rect">
-            <a:avLst/>
-          </a:prstGeom>
-          <a:noFill/>
-          <a:ln/>
-        </p:spPr>
-        <p:txBody>
-          <a:bodyPr wrap="square" lIns="0" tIns="0" rIns="0" bIns="0" rtlCol="0" anchor="ctr"/>
-          <a:lstStyle/>
-          <a:p>
-            <a:pPr indent="0" marL="0">
-              <a:buNone/>
-            </a:pPr>
-            <a:r>
-              <a:rPr lang="en-US" sz="1400" b="1" dirty="0">
-                <a:solidFill>
-                  <a:srgbClr val="FFFFFF"/>
-                </a:solidFill>
-                <a:latin typeface="Yu Gothic" pitchFamily="34" charset="0"/>
-                <a:ea typeface="Yu Gothic" pitchFamily="34" charset="-122"/>
-                <a:cs typeface="Yu Gothic" pitchFamily="34" charset="-120"/>
-              </a:rPr>
-              <a:t>人を支える行為は「美談」ではない。組織の持続可能性と安全保障に直結する。</a:t>
-            </a:r>
-            <a:endParaRPr lang="en-US" sz="1400" dirty="0"/>
-          </a:p>
-        </p:txBody>
-      </p:sp>
-      <p:sp>
-        <p:nvSpPr>
-          <p:cNvPr id="22" name="Text 20"/>
+              <a:rPr lang="en-US" sz="1000" dirty="0">
+                <a:solidFill>
+                  <a:srgbClr val="5B6480"/>
+                </a:solidFill>
+                <a:latin typeface="Yu Gothic" pitchFamily="34" charset="0"/>
+                <a:ea typeface="Yu Gothic" pitchFamily="34" charset="-122"/>
+                <a:cs typeface="Yu Gothic" pitchFamily="34" charset="-120"/>
+              </a:rPr>
+              <a:t>※ 各条件5回ずつ計15回の実行。LLMによる採点であり、統計的検定を行うにはまだ試行数が少ない。</a:t>
+            </a:r>
+            <a:endParaRPr lang="en-US" sz="1000" dirty="0"/>
+          </a:p>
+        </p:txBody>
+      </p:sp>
+      <p:sp>
+        <p:nvSpPr>
+          <p:cNvPr id="24" name="Text 18"/>
           <p:cNvSpPr/>
           <p:nvPr/>
         </p:nvSpPr>
@@ -11330,7 +12485,7 @@
       </p:sp>
       <p:sp>
         <p:nvSpPr>
-          <p:cNvPr id="23" name="Text 21"/>
+          <p:cNvPr id="25" name="Text 19"/>
           <p:cNvSpPr/>
           <p:nvPr/>
         </p:nvSpPr>
@@ -11432,7 +12587,7 @@
                 <a:ea typeface="Yu Gothic" pitchFamily="34" charset="-122"/>
                 <a:cs typeface="Yu Gothic" pitchFamily="34" charset="-120"/>
               </a:rPr>
-              <a:t>フラクタルな構造：村から国家の「メタ安全保障」へ</a:t>
+              <a:t>「意味」から「経営」への翻訳</a:t>
             </a:r>
             <a:endParaRPr lang="en-US" sz="3000" dirty="0"/>
           </a:p>
@@ -11440,22 +12595,100 @@
       </p:sp>
       <p:sp>
         <p:nvSpPr>
-          <p:cNvPr id="3" name="Shape 1"/>
-          <p:cNvSpPr/>
-          <p:nvPr/>
-        </p:nvSpPr>
-        <p:spPr>
-          <a:xfrm>
-            <a:off x="641452" y="1874520"/>
-            <a:ext cx="3429000" cy="2880360"/>
+          <p:cNvPr id="3" name="Text 1"/>
+          <p:cNvSpPr/>
+          <p:nvPr/>
+        </p:nvSpPr>
+        <p:spPr>
+          <a:xfrm>
+            <a:off x="548640" y="1554480"/>
+            <a:ext cx="4937760" cy="320040"/>
+          </a:xfrm>
+          <a:prstGeom prst="rect">
+            <a:avLst/>
+          </a:prstGeom>
+          <a:noFill/>
+          <a:ln/>
+        </p:spPr>
+        <p:txBody>
+          <a:bodyPr wrap="square" lIns="0" tIns="0" rIns="0" bIns="0" rtlCol="0" anchor="ctr"/>
+          <a:lstStyle/>
+          <a:p>
+            <a:pPr indent="0" marL="0">
+              <a:buNone/>
+            </a:pPr>
+            <a:r>
+              <a:rPr lang="en-US" sz="1200" b="1" dirty="0">
+                <a:solidFill>
+                  <a:srgbClr val="E8A33D"/>
+                </a:solidFill>
+                <a:latin typeface="Yu Gothic" pitchFamily="34" charset="0"/>
+                <a:ea typeface="Yu Gothic" pitchFamily="34" charset="-122"/>
+                <a:cs typeface="Yu Gothic" pitchFamily="34" charset="-120"/>
+              </a:rPr>
+              <a:t>Human Value</a:t>
+            </a:r>
+            <a:endParaRPr lang="en-US" sz="1200" dirty="0"/>
+          </a:p>
+        </p:txBody>
+      </p:sp>
+      <p:sp>
+        <p:nvSpPr>
+          <p:cNvPr id="4" name="Text 2"/>
+          <p:cNvSpPr/>
+          <p:nvPr/>
+        </p:nvSpPr>
+        <p:spPr>
+          <a:xfrm>
+            <a:off x="6675120" y="1554480"/>
+            <a:ext cx="4937760" cy="320040"/>
+          </a:xfrm>
+          <a:prstGeom prst="rect">
+            <a:avLst/>
+          </a:prstGeom>
+          <a:noFill/>
+          <a:ln/>
+        </p:spPr>
+        <p:txBody>
+          <a:bodyPr wrap="square" lIns="0" tIns="0" rIns="0" bIns="0" rtlCol="0" anchor="ctr"/>
+          <a:lstStyle/>
+          <a:p>
+            <a:pPr algn="r" indent="0" marL="0">
+              <a:buNone/>
+            </a:pPr>
+            <a:r>
+              <a:rPr lang="en-US" sz="1200" b="1" dirty="0">
+                <a:solidFill>
+                  <a:srgbClr val="5A8FD6"/>
+                </a:solidFill>
+                <a:latin typeface="Yu Gothic" pitchFamily="34" charset="0"/>
+                <a:ea typeface="Yu Gothic" pitchFamily="34" charset="-122"/>
+                <a:cs typeface="Yu Gothic" pitchFamily="34" charset="-120"/>
+              </a:rPr>
+              <a:t>Corporate KPI</a:t>
+            </a:r>
+            <a:endParaRPr lang="en-US" sz="1200" dirty="0"/>
+          </a:p>
+        </p:txBody>
+      </p:sp>
+      <p:sp>
+        <p:nvSpPr>
+          <p:cNvPr id="5" name="Shape 3"/>
+          <p:cNvSpPr/>
+          <p:nvPr/>
+        </p:nvSpPr>
+        <p:spPr>
+          <a:xfrm>
+            <a:off x="548640" y="1965960"/>
+            <a:ext cx="4937760" cy="914400"/>
           </a:xfrm>
           <a:prstGeom prst="roundRect">
             <a:avLst>
-              <a:gd name="adj" fmla="val 3810"/>
+              <a:gd name="adj" fmla="val 12000"/>
             </a:avLst>
           </a:prstGeom>
           <a:solidFill>
-            <a:srgbClr val="16213A"/>
+            <a:srgbClr val="1C2C4A"/>
           </a:solidFill>
           <a:ln/>
           <a:effectLst>
@@ -11469,107 +12702,56 @@
       </p:sp>
       <p:sp>
         <p:nvSpPr>
-          <p:cNvPr id="4" name="Shape 2"/>
-          <p:cNvSpPr/>
-          <p:nvPr/>
-        </p:nvSpPr>
-        <p:spPr>
-          <a:xfrm>
-            <a:off x="1450696" y="1746504"/>
-            <a:ext cx="1810512" cy="1810512"/>
-          </a:xfrm>
-          <a:prstGeom prst="ellipse">
-            <a:avLst/>
-          </a:prstGeom>
-          <a:solidFill>
-            <a:srgbClr val="1BAF7A">
-              <a:alpha val="12000"/>
-            </a:srgbClr>
-          </a:solidFill>
-          <a:ln/>
-        </p:spPr>
-      </p:sp>
-      <p:sp>
-        <p:nvSpPr>
-          <p:cNvPr id="5" name="Shape 3"/>
-          <p:cNvSpPr/>
-          <p:nvPr/>
-        </p:nvSpPr>
-        <p:spPr>
-          <a:xfrm>
-            <a:off x="1697584" y="1993392"/>
-            <a:ext cx="1316736" cy="1316736"/>
-          </a:xfrm>
-          <a:prstGeom prst="ellipse">
-            <a:avLst/>
-          </a:prstGeom>
-          <a:solidFill>
-            <a:srgbClr val="1BAF7A">
-              <a:alpha val="22000"/>
-            </a:srgbClr>
-          </a:solidFill>
-          <a:ln/>
-        </p:spPr>
-      </p:sp>
-      <p:sp>
-        <p:nvSpPr>
-          <p:cNvPr id="6" name="Shape 4"/>
-          <p:cNvSpPr/>
-          <p:nvPr/>
-        </p:nvSpPr>
-        <p:spPr>
-          <a:xfrm>
-            <a:off x="1944472" y="2240280"/>
-            <a:ext cx="822960" cy="822960"/>
-          </a:xfrm>
-          <a:prstGeom prst="ellipse">
-            <a:avLst/>
-          </a:prstGeom>
-          <a:solidFill>
-            <a:srgbClr val="1BAF7A"/>
-          </a:solidFill>
-          <a:ln w="9525">
-            <a:solidFill>
-              <a:srgbClr val="1BAF7A"/>
-            </a:solidFill>
-            <a:prstDash val="solid"/>
-          </a:ln>
-        </p:spPr>
-      </p:sp>
-      <p:pic>
-        <p:nvPicPr>
-          <p:cNvPr id="7" name="Image 0" descr="preencoded.png">    </p:cNvPr>
-          <p:cNvPicPr>
-            <a:picLocks noChangeAspect="1"/>
-          </p:cNvPicPr>
-          <p:nvPr/>
-        </p:nvPicPr>
-        <p:blipFill>
-          <a:blip r:embed="rId1"/>
-          <a:stretch>
-            <a:fillRect/>
-          </a:stretch>
-        </p:blipFill>
-        <p:spPr>
-          <a:xfrm>
-            <a:off x="2158441" y="2454250"/>
-            <a:ext cx="395021" cy="395021"/>
-          </a:xfrm>
-          <a:prstGeom prst="rect">
-            <a:avLst/>
-          </a:prstGeom>
-        </p:spPr>
-      </p:pic>
-      <p:sp>
-        <p:nvSpPr>
-          <p:cNvPr id="8" name="Text 5"/>
-          <p:cNvSpPr/>
-          <p:nvPr/>
-        </p:nvSpPr>
-        <p:spPr>
-          <a:xfrm>
-            <a:off x="778612" y="3200400"/>
-            <a:ext cx="3154680" cy="411480"/>
+          <p:cNvPr id="6" name="Text 4"/>
+          <p:cNvSpPr/>
+          <p:nvPr/>
+        </p:nvSpPr>
+        <p:spPr>
+          <a:xfrm>
+            <a:off x="777240" y="1965960"/>
+            <a:ext cx="4480560" cy="914400"/>
+          </a:xfrm>
+          <a:prstGeom prst="rect">
+            <a:avLst/>
+          </a:prstGeom>
+          <a:noFill/>
+          <a:ln/>
+        </p:spPr>
+        <p:txBody>
+          <a:bodyPr wrap="square" lIns="0" tIns="0" rIns="0" bIns="0" rtlCol="0" anchor="ctr"/>
+          <a:lstStyle/>
+          <a:p>
+            <a:pPr indent="0" marL="0">
+              <a:lnSpc>
+                <a:spcPct val="120000"/>
+              </a:lnSpc>
+              <a:buNone/>
+            </a:pPr>
+            <a:r>
+              <a:rPr lang="en-US" sz="1300" i="1" dirty="0">
+                <a:solidFill>
+                  <a:srgbClr val="F4C878"/>
+                </a:solidFill>
+                <a:latin typeface="Yu Gothic" pitchFamily="34" charset="0"/>
+                <a:ea typeface="Yu Gothic" pitchFamily="34" charset="-122"/>
+                <a:cs typeface="Yu Gothic" pitchFamily="34" charset="-120"/>
+              </a:rPr>
+              <a:t>「この人がいたことで、安心して活動できた」</a:t>
+            </a:r>
+            <a:endParaRPr lang="en-US" sz="1300" dirty="0"/>
+          </a:p>
+        </p:txBody>
+      </p:sp>
+      <p:sp>
+        <p:nvSpPr>
+          <p:cNvPr id="7" name="Text 5"/>
+          <p:cNvSpPr/>
+          <p:nvPr/>
+        </p:nvSpPr>
+        <p:spPr>
+          <a:xfrm>
+            <a:off x="5623560" y="1965960"/>
+            <a:ext cx="914400" cy="914400"/>
           </a:xfrm>
           <a:prstGeom prst="rect">
             <a:avLst/>
@@ -11585,76 +12767,34 @@
               <a:buNone/>
             </a:pPr>
             <a:r>
-              <a:rPr lang="en-US" sz="1700" b="1" dirty="0">
-                <a:solidFill>
-                  <a:srgbClr val="FFFFFF"/>
-                </a:solidFill>
-                <a:latin typeface="Yu Gothic" pitchFamily="34" charset="0"/>
-                <a:ea typeface="Yu Gothic" pitchFamily="34" charset="-122"/>
-                <a:cs typeface="Yu Gothic" pitchFamily="34" charset="-120"/>
-              </a:rPr>
-              <a:t>村</a:t>
-            </a:r>
-            <a:endParaRPr lang="en-US" sz="1700" dirty="0"/>
-          </a:p>
-        </p:txBody>
-      </p:sp>
-      <p:sp>
-        <p:nvSpPr>
-          <p:cNvPr id="9" name="Text 6"/>
-          <p:cNvSpPr/>
-          <p:nvPr/>
-        </p:nvSpPr>
-        <p:spPr>
-          <a:xfrm>
-            <a:off x="915772" y="3657600"/>
-            <a:ext cx="2880360" cy="914400"/>
-          </a:xfrm>
-          <a:prstGeom prst="rect">
-            <a:avLst/>
-          </a:prstGeom>
-          <a:noFill/>
-          <a:ln/>
-        </p:spPr>
-        <p:txBody>
-          <a:bodyPr wrap="square" lIns="0" tIns="0" rIns="0" bIns="0" rtlCol="0" anchor="ctr"/>
-          <a:lstStyle/>
-          <a:p>
-            <a:pPr algn="ctr" indent="0" marL="0">
-              <a:lnSpc>
-                <a:spcPct val="130000"/>
-              </a:lnSpc>
-              <a:buNone/>
-            </a:pPr>
-            <a:r>
-              <a:rPr lang="en-US" sz="1300" dirty="0">
-                <a:solidFill>
-                  <a:srgbClr val="AFC9EE"/>
-                </a:solidFill>
-                <a:latin typeface="Yu Gothic" pitchFamily="34" charset="0"/>
-                <a:ea typeface="Yu Gothic" pitchFamily="34" charset="-122"/>
-                <a:cs typeface="Yu Gothic" pitchFamily="34" charset="-120"/>
-              </a:rPr>
-              <a:t>「世話焼きへの過度な依存」と疲弊</a:t>
-            </a:r>
-            <a:endParaRPr lang="en-US" sz="1300" dirty="0"/>
-          </a:p>
-        </p:txBody>
-      </p:sp>
-      <p:sp>
-        <p:nvSpPr>
-          <p:cNvPr id="10" name="Shape 7"/>
-          <p:cNvSpPr/>
-          <p:nvPr/>
-        </p:nvSpPr>
-        <p:spPr>
-          <a:xfrm>
-            <a:off x="4381348" y="1874520"/>
-            <a:ext cx="3429000" cy="2880360"/>
+              <a:rPr lang="en-US" sz="2200" dirty="0">
+                <a:solidFill>
+                  <a:srgbClr val="9AA4C0"/>
+                </a:solidFill>
+                <a:latin typeface="Yu Gothic" pitchFamily="34" charset="0"/>
+                <a:ea typeface="Yu Gothic" pitchFamily="34" charset="-122"/>
+                <a:cs typeface="Yu Gothic" pitchFamily="34" charset="-120"/>
+              </a:rPr>
+              <a:t>→</a:t>
+            </a:r>
+            <a:endParaRPr lang="en-US" sz="2200" dirty="0"/>
+          </a:p>
+        </p:txBody>
+      </p:sp>
+      <p:sp>
+        <p:nvSpPr>
+          <p:cNvPr id="8" name="Shape 6"/>
+          <p:cNvSpPr/>
+          <p:nvPr/>
+        </p:nvSpPr>
+        <p:spPr>
+          <a:xfrm>
+            <a:off x="6675120" y="1965960"/>
+            <a:ext cx="4937760" cy="914400"/>
           </a:xfrm>
           <a:prstGeom prst="roundRect">
             <a:avLst>
-              <a:gd name="adj" fmla="val 3810"/>
+              <a:gd name="adj" fmla="val 12000"/>
             </a:avLst>
           </a:prstGeom>
           <a:solidFill>
@@ -11672,173 +12812,41 @@
       </p:sp>
       <p:sp>
         <p:nvSpPr>
-          <p:cNvPr id="11" name="Shape 8"/>
-          <p:cNvSpPr/>
-          <p:nvPr/>
-        </p:nvSpPr>
-        <p:spPr>
-          <a:xfrm>
-            <a:off x="5190592" y="1746504"/>
-            <a:ext cx="1810512" cy="1810512"/>
-          </a:xfrm>
-          <a:prstGeom prst="ellipse">
-            <a:avLst/>
-          </a:prstGeom>
-          <a:solidFill>
-            <a:srgbClr val="2A78D6">
-              <a:alpha val="12000"/>
-            </a:srgbClr>
-          </a:solidFill>
-          <a:ln/>
-        </p:spPr>
-      </p:sp>
-      <p:sp>
-        <p:nvSpPr>
-          <p:cNvPr id="12" name="Shape 9"/>
-          <p:cNvSpPr/>
-          <p:nvPr/>
-        </p:nvSpPr>
-        <p:spPr>
-          <a:xfrm>
-            <a:off x="5437480" y="1993392"/>
-            <a:ext cx="1316736" cy="1316736"/>
-          </a:xfrm>
-          <a:prstGeom prst="ellipse">
-            <a:avLst/>
-          </a:prstGeom>
-          <a:solidFill>
-            <a:srgbClr val="2A78D6">
-              <a:alpha val="22000"/>
-            </a:srgbClr>
-          </a:solidFill>
-          <a:ln/>
-        </p:spPr>
-      </p:sp>
-      <p:sp>
-        <p:nvSpPr>
-          <p:cNvPr id="13" name="Shape 10"/>
-          <p:cNvSpPr/>
-          <p:nvPr/>
-        </p:nvSpPr>
-        <p:spPr>
-          <a:xfrm>
-            <a:off x="5684368" y="2240280"/>
-            <a:ext cx="822960" cy="822960"/>
-          </a:xfrm>
-          <a:prstGeom prst="ellipse">
-            <a:avLst/>
-          </a:prstGeom>
-          <a:solidFill>
-            <a:srgbClr val="2A78D6"/>
-          </a:solidFill>
-          <a:ln w="9525">
-            <a:solidFill>
-              <a:srgbClr val="2A78D6"/>
-            </a:solidFill>
-            <a:prstDash val="solid"/>
-          </a:ln>
-        </p:spPr>
-      </p:sp>
-      <p:pic>
-        <p:nvPicPr>
-          <p:cNvPr id="14" name="Image 1" descr="preencoded.png">    </p:cNvPr>
-          <p:cNvPicPr>
-            <a:picLocks noChangeAspect="1"/>
-          </p:cNvPicPr>
-          <p:nvPr/>
-        </p:nvPicPr>
-        <p:blipFill>
-          <a:blip r:embed="rId2"/>
-          <a:stretch>
-            <a:fillRect/>
-          </a:stretch>
-        </p:blipFill>
-        <p:spPr>
-          <a:xfrm>
-            <a:off x="5898337" y="2454250"/>
-            <a:ext cx="395021" cy="395021"/>
-          </a:xfrm>
-          <a:prstGeom prst="rect">
-            <a:avLst/>
-          </a:prstGeom>
-        </p:spPr>
-      </p:pic>
-      <p:sp>
-        <p:nvSpPr>
-          <p:cNvPr id="15" name="Text 11"/>
-          <p:cNvSpPr/>
-          <p:nvPr/>
-        </p:nvSpPr>
-        <p:spPr>
-          <a:xfrm>
-            <a:off x="4518508" y="3200400"/>
-            <a:ext cx="3154680" cy="411480"/>
-          </a:xfrm>
-          <a:prstGeom prst="rect">
-            <a:avLst/>
-          </a:prstGeom>
-          <a:noFill/>
-          <a:ln/>
-        </p:spPr>
-        <p:txBody>
-          <a:bodyPr wrap="square" lIns="0" tIns="0" rIns="0" bIns="0" rtlCol="0" anchor="ctr"/>
-          <a:lstStyle/>
-          <a:p>
-            <a:pPr algn="ctr" indent="0" marL="0">
-              <a:buNone/>
-            </a:pPr>
-            <a:r>
-              <a:rPr lang="en-US" sz="1700" b="1" dirty="0">
-                <a:solidFill>
-                  <a:srgbClr val="FFFFFF"/>
-                </a:solidFill>
-                <a:latin typeface="Yu Gothic" pitchFamily="34" charset="0"/>
-                <a:ea typeface="Yu Gothic" pitchFamily="34" charset="-122"/>
-                <a:cs typeface="Yu Gothic" pitchFamily="34" charset="-120"/>
-              </a:rPr>
-              <a:t>都市</a:t>
-            </a:r>
-            <a:endParaRPr lang="en-US" sz="1700" dirty="0"/>
-          </a:p>
-        </p:txBody>
-      </p:sp>
-      <p:sp>
-        <p:nvSpPr>
-          <p:cNvPr id="16" name="Text 12"/>
-          <p:cNvSpPr/>
-          <p:nvPr/>
-        </p:nvSpPr>
-        <p:spPr>
-          <a:xfrm>
-            <a:off x="4655668" y="3657600"/>
-            <a:ext cx="2880360" cy="914400"/>
-          </a:xfrm>
-          <a:prstGeom prst="rect">
-            <a:avLst/>
-          </a:prstGeom>
-          <a:noFill/>
-          <a:ln/>
-        </p:spPr>
-        <p:txBody>
-          <a:bodyPr wrap="square" lIns="0" tIns="0" rIns="0" bIns="0" rtlCol="0" anchor="ctr"/>
-          <a:lstStyle/>
-          <a:p>
-            <a:pPr algn="ctr" indent="0" marL="0">
+          <p:cNvPr id="9" name="Text 7"/>
+          <p:cNvSpPr/>
+          <p:nvPr/>
+        </p:nvSpPr>
+        <p:spPr>
+          <a:xfrm>
+            <a:off x="6903720" y="1965960"/>
+            <a:ext cx="4480560" cy="914400"/>
+          </a:xfrm>
+          <a:prstGeom prst="rect">
+            <a:avLst/>
+          </a:prstGeom>
+          <a:noFill/>
+          <a:ln/>
+        </p:spPr>
+        <p:txBody>
+          <a:bodyPr wrap="square" lIns="0" tIns="0" rIns="0" bIns="0" rtlCol="0" anchor="ctr"/>
+          <a:lstStyle/>
+          <a:p>
+            <a:pPr indent="0" marL="0">
               <a:lnSpc>
-                <a:spcPct val="130000"/>
+                <a:spcPct val="120000"/>
               </a:lnSpc>
               <a:buNone/>
             </a:pPr>
             <a:r>
-              <a:rPr lang="en-US" sz="1300" dirty="0">
-                <a:solidFill>
-                  <a:srgbClr val="AFC9EE"/>
-                </a:solidFill>
-                <a:latin typeface="Yu Gothic" pitchFamily="34" charset="0"/>
-                <a:ea typeface="Yu Gothic" pitchFamily="34" charset="-122"/>
-                <a:cs typeface="Yu Gothic" pitchFamily="34" charset="-120"/>
-              </a:rPr>
-              <a:t>「支援制度の複雑化」と、誰にも届かないSOS</a:t>
+              <a:rPr lang="en-US" sz="1300" b="1" dirty="0">
+                <a:solidFill>
+                  <a:srgbClr val="5A8FD6"/>
+                </a:solidFill>
+                <a:latin typeface="Yu Gothic" pitchFamily="34" charset="0"/>
+                <a:ea typeface="Yu Gothic" pitchFamily="34" charset="-122"/>
+                <a:cs typeface="Yu Gothic" pitchFamily="34" charset="-120"/>
+              </a:rPr>
+              <a:t>オンボーディング成功・参加継続率の向上</a:t>
             </a:r>
             <a:endParaRPr lang="en-US" sz="1300" dirty="0"/>
           </a:p>
@@ -11846,22 +12854,22 @@
       </p:sp>
       <p:sp>
         <p:nvSpPr>
-          <p:cNvPr id="17" name="Shape 13"/>
-          <p:cNvSpPr/>
-          <p:nvPr/>
-        </p:nvSpPr>
-        <p:spPr>
-          <a:xfrm>
-            <a:off x="8121244" y="1874520"/>
-            <a:ext cx="3429000" cy="2880360"/>
+          <p:cNvPr id="10" name="Shape 8"/>
+          <p:cNvSpPr/>
+          <p:nvPr/>
+        </p:nvSpPr>
+        <p:spPr>
+          <a:xfrm>
+            <a:off x="548640" y="3063240"/>
+            <a:ext cx="4937760" cy="914400"/>
           </a:xfrm>
           <a:prstGeom prst="roundRect">
             <a:avLst>
-              <a:gd name="adj" fmla="val 3810"/>
+              <a:gd name="adj" fmla="val 12000"/>
             </a:avLst>
           </a:prstGeom>
           <a:solidFill>
-            <a:srgbClr val="16213A"/>
+            <a:srgbClr val="1C2C4A"/>
           </a:solidFill>
           <a:ln/>
           <a:effectLst>
@@ -11875,107 +12883,56 @@
       </p:sp>
       <p:sp>
         <p:nvSpPr>
-          <p:cNvPr id="18" name="Shape 14"/>
-          <p:cNvSpPr/>
-          <p:nvPr/>
-        </p:nvSpPr>
-        <p:spPr>
-          <a:xfrm>
-            <a:off x="8930488" y="1746504"/>
-            <a:ext cx="1810512" cy="1810512"/>
-          </a:xfrm>
-          <a:prstGeom prst="ellipse">
-            <a:avLst/>
-          </a:prstGeom>
-          <a:solidFill>
-            <a:srgbClr val="EB6834">
-              <a:alpha val="12000"/>
-            </a:srgbClr>
-          </a:solidFill>
-          <a:ln/>
-        </p:spPr>
-      </p:sp>
-      <p:sp>
-        <p:nvSpPr>
-          <p:cNvPr id="19" name="Shape 15"/>
-          <p:cNvSpPr/>
-          <p:nvPr/>
-        </p:nvSpPr>
-        <p:spPr>
-          <a:xfrm>
-            <a:off x="9177376" y="1993392"/>
-            <a:ext cx="1316736" cy="1316736"/>
-          </a:xfrm>
-          <a:prstGeom prst="ellipse">
-            <a:avLst/>
-          </a:prstGeom>
-          <a:solidFill>
-            <a:srgbClr val="EB6834">
-              <a:alpha val="22000"/>
-            </a:srgbClr>
-          </a:solidFill>
-          <a:ln/>
-        </p:spPr>
-      </p:sp>
-      <p:sp>
-        <p:nvSpPr>
-          <p:cNvPr id="20" name="Shape 16"/>
-          <p:cNvSpPr/>
-          <p:nvPr/>
-        </p:nvSpPr>
-        <p:spPr>
-          <a:xfrm>
-            <a:off x="9424264" y="2240280"/>
-            <a:ext cx="822960" cy="822960"/>
-          </a:xfrm>
-          <a:prstGeom prst="ellipse">
-            <a:avLst/>
-          </a:prstGeom>
-          <a:solidFill>
-            <a:srgbClr val="EB6834"/>
-          </a:solidFill>
-          <a:ln w="9525">
-            <a:solidFill>
-              <a:srgbClr val="EB6834"/>
-            </a:solidFill>
-            <a:prstDash val="solid"/>
-          </a:ln>
-        </p:spPr>
-      </p:sp>
-      <p:pic>
-        <p:nvPicPr>
-          <p:cNvPr id="21" name="Image 2" descr="preencoded.png">    </p:cNvPr>
-          <p:cNvPicPr>
-            <a:picLocks noChangeAspect="1"/>
-          </p:cNvPicPr>
-          <p:nvPr/>
-        </p:nvPicPr>
-        <p:blipFill>
-          <a:blip r:embed="rId3"/>
-          <a:stretch>
-            <a:fillRect/>
-          </a:stretch>
-        </p:blipFill>
-        <p:spPr>
-          <a:xfrm>
-            <a:off x="9638233" y="2454250"/>
-            <a:ext cx="395021" cy="395021"/>
-          </a:xfrm>
-          <a:prstGeom prst="rect">
-            <a:avLst/>
-          </a:prstGeom>
-        </p:spPr>
-      </p:pic>
-      <p:sp>
-        <p:nvSpPr>
-          <p:cNvPr id="22" name="Text 17"/>
-          <p:cNvSpPr/>
-          <p:nvPr/>
-        </p:nvSpPr>
-        <p:spPr>
-          <a:xfrm>
-            <a:off x="8258404" y="3200400"/>
-            <a:ext cx="3154680" cy="411480"/>
+          <p:cNvPr id="11" name="Text 9"/>
+          <p:cNvSpPr/>
+          <p:nvPr/>
+        </p:nvSpPr>
+        <p:spPr>
+          <a:xfrm>
+            <a:off x="777240" y="3063240"/>
+            <a:ext cx="4480560" cy="914400"/>
+          </a:xfrm>
+          <a:prstGeom prst="rect">
+            <a:avLst/>
+          </a:prstGeom>
+          <a:noFill/>
+          <a:ln/>
+        </p:spPr>
+        <p:txBody>
+          <a:bodyPr wrap="square" lIns="0" tIns="0" rIns="0" bIns="0" rtlCol="0" anchor="ctr"/>
+          <a:lstStyle/>
+          <a:p>
+            <a:pPr indent="0" marL="0">
+              <a:lnSpc>
+                <a:spcPct val="120000"/>
+              </a:lnSpc>
+              <a:buNone/>
+            </a:pPr>
+            <a:r>
+              <a:rPr lang="en-US" sz="1300" i="1" dirty="0">
+                <a:solidFill>
+                  <a:srgbClr val="F4C878"/>
+                </a:solidFill>
+                <a:latin typeface="Yu Gothic" pitchFamily="34" charset="0"/>
+                <a:ea typeface="Yu Gothic" pitchFamily="34" charset="-122"/>
+                <a:cs typeface="Yu Gothic" pitchFamily="34" charset="-120"/>
+              </a:rPr>
+              <a:t>「孤立せずに済んだ／対立が翻訳された」</a:t>
+            </a:r>
+            <a:endParaRPr lang="en-US" sz="1300" dirty="0"/>
+          </a:p>
+        </p:txBody>
+      </p:sp>
+      <p:sp>
+        <p:nvSpPr>
+          <p:cNvPr id="12" name="Text 10"/>
+          <p:cNvSpPr/>
+          <p:nvPr/>
+        </p:nvSpPr>
+        <p:spPr>
+          <a:xfrm>
+            <a:off x="5623560" y="3063240"/>
+            <a:ext cx="914400" cy="914400"/>
           </a:xfrm>
           <a:prstGeom prst="rect">
             <a:avLst/>
@@ -11991,80 +12948,38 @@
               <a:buNone/>
             </a:pPr>
             <a:r>
-              <a:rPr lang="en-US" sz="1700" b="1" dirty="0">
-                <a:solidFill>
-                  <a:srgbClr val="FFFFFF"/>
-                </a:solidFill>
-                <a:latin typeface="Yu Gothic" pitchFamily="34" charset="0"/>
-                <a:ea typeface="Yu Gothic" pitchFamily="34" charset="-122"/>
-                <a:cs typeface="Yu Gothic" pitchFamily="34" charset="-120"/>
-              </a:rPr>
-              <a:t>国</a:t>
-            </a:r>
-            <a:endParaRPr lang="en-US" sz="1700" dirty="0"/>
-          </a:p>
-        </p:txBody>
-      </p:sp>
-      <p:sp>
-        <p:nvSpPr>
-          <p:cNvPr id="23" name="Text 18"/>
-          <p:cNvSpPr/>
-          <p:nvPr/>
-        </p:nvSpPr>
-        <p:spPr>
-          <a:xfrm>
-            <a:off x="8395564" y="3657600"/>
-            <a:ext cx="2880360" cy="914400"/>
-          </a:xfrm>
-          <a:prstGeom prst="rect">
-            <a:avLst/>
-          </a:prstGeom>
-          <a:noFill/>
-          <a:ln/>
-        </p:spPr>
-        <p:txBody>
-          <a:bodyPr wrap="square" lIns="0" tIns="0" rIns="0" bIns="0" rtlCol="0" anchor="ctr"/>
-          <a:lstStyle/>
-          <a:p>
-            <a:pPr algn="ctr" indent="0" marL="0">
-              <a:lnSpc>
-                <a:spcPct val="130000"/>
-              </a:lnSpc>
-              <a:buNone/>
-            </a:pPr>
-            <a:r>
-              <a:rPr lang="en-US" sz="1300" dirty="0">
-                <a:solidFill>
-                  <a:srgbClr val="AFC9EE"/>
-                </a:solidFill>
-                <a:latin typeface="Yu Gothic" pitchFamily="34" charset="0"/>
-                <a:ea typeface="Yu Gothic" pitchFamily="34" charset="-122"/>
-                <a:cs typeface="Yu Gothic" pitchFamily="34" charset="-120"/>
-              </a:rPr>
-              <a:t>「権力の集中」と、強い指導者への救世主待望</a:t>
-            </a:r>
-            <a:endParaRPr lang="en-US" sz="1300" dirty="0"/>
-          </a:p>
-        </p:txBody>
-      </p:sp>
-      <p:sp>
-        <p:nvSpPr>
-          <p:cNvPr id="24" name="Shape 19"/>
-          <p:cNvSpPr/>
-          <p:nvPr/>
-        </p:nvSpPr>
-        <p:spPr>
-          <a:xfrm>
-            <a:off x="548640" y="5166360"/>
-            <a:ext cx="11091672" cy="960120"/>
+              <a:rPr lang="en-US" sz="2200" dirty="0">
+                <a:solidFill>
+                  <a:srgbClr val="9AA4C0"/>
+                </a:solidFill>
+                <a:latin typeface="Yu Gothic" pitchFamily="34" charset="0"/>
+                <a:ea typeface="Yu Gothic" pitchFamily="34" charset="-122"/>
+                <a:cs typeface="Yu Gothic" pitchFamily="34" charset="-120"/>
+              </a:rPr>
+              <a:t>→</a:t>
+            </a:r>
+            <a:endParaRPr lang="en-US" sz="2200" dirty="0"/>
+          </a:p>
+        </p:txBody>
+      </p:sp>
+      <p:sp>
+        <p:nvSpPr>
+          <p:cNvPr id="13" name="Shape 11"/>
+          <p:cNvSpPr/>
+          <p:nvPr/>
+        </p:nvSpPr>
+        <p:spPr>
+          <a:xfrm>
+            <a:off x="6675120" y="3063240"/>
+            <a:ext cx="4937760" cy="914400"/>
           </a:xfrm>
           <a:prstGeom prst="roundRect">
             <a:avLst>
-              <a:gd name="adj" fmla="val 9524"/>
+              <a:gd name="adj" fmla="val 12000"/>
             </a:avLst>
           </a:prstGeom>
           <a:solidFill>
-            <a:srgbClr val="1C2C4A"/>
+            <a:srgbClr val="16213A"/>
           </a:solidFill>
           <a:ln/>
           <a:effectLst>
@@ -12078,14 +12993,14 @@
       </p:sp>
       <p:sp>
         <p:nvSpPr>
-          <p:cNvPr id="25" name="Text 20"/>
-          <p:cNvSpPr/>
-          <p:nvPr/>
-        </p:nvSpPr>
-        <p:spPr>
-          <a:xfrm>
-            <a:off x="868680" y="5166360"/>
-            <a:ext cx="10515600" cy="960120"/>
+          <p:cNvPr id="14" name="Text 12"/>
+          <p:cNvSpPr/>
+          <p:nvPr/>
+        </p:nvSpPr>
+        <p:spPr>
+          <a:xfrm>
+            <a:off x="6903720" y="3063240"/>
+            <a:ext cx="4480560" cy="914400"/>
           </a:xfrm>
           <a:prstGeom prst="rect">
             <a:avLst/>
@@ -12098,26 +13013,278 @@
           <a:lstStyle/>
           <a:p>
             <a:pPr indent="0" marL="0">
-              <a:buNone/>
-            </a:pPr>
-            <a:r>
-              <a:rPr lang="en-US" sz="1350" dirty="0">
-                <a:solidFill>
-                  <a:srgbClr val="AFC9EE"/>
-                </a:solidFill>
-                <a:latin typeface="Yu Gothic" pitchFamily="34" charset="0"/>
-                <a:ea typeface="Yu Gothic" pitchFamily="34" charset="-122"/>
-                <a:cs typeface="Yu Gothic" pitchFamily="34" charset="-120"/>
-              </a:rPr>
-              <a:t>小さな共同体における「救済者への依存」と、国家規模における「権力の集中」は構造的に同じである。この実験は、社会全体のレジリエンスを問う試みである。</a:t>
-            </a:r>
-            <a:endParaRPr lang="en-US" sz="1350" dirty="0"/>
-          </a:p>
-        </p:txBody>
-      </p:sp>
-      <p:sp>
-        <p:nvSpPr>
-          <p:cNvPr id="26" name="Text 21"/>
+              <a:lnSpc>
+                <a:spcPct val="120000"/>
+              </a:lnSpc>
+              <a:buNone/>
+            </a:pPr>
+            <a:r>
+              <a:rPr lang="en-US" sz="1300" b="1" dirty="0">
+                <a:solidFill>
+                  <a:srgbClr val="5A8FD6"/>
+                </a:solidFill>
+                <a:latin typeface="Yu Gothic" pitchFamily="34" charset="0"/>
+                <a:ea typeface="Yu Gothic" pitchFamily="34" charset="-122"/>
+                <a:cs typeface="Yu Gothic" pitchFamily="34" charset="-120"/>
+              </a:rPr>
+              <a:t>離脱コストの回避・炎上防止</a:t>
+            </a:r>
+            <a:endParaRPr lang="en-US" sz="1300" dirty="0"/>
+          </a:p>
+        </p:txBody>
+      </p:sp>
+      <p:sp>
+        <p:nvSpPr>
+          <p:cNvPr id="15" name="Shape 13"/>
+          <p:cNvSpPr/>
+          <p:nvPr/>
+        </p:nvSpPr>
+        <p:spPr>
+          <a:xfrm>
+            <a:off x="548640" y="4160520"/>
+            <a:ext cx="4937760" cy="914400"/>
+          </a:xfrm>
+          <a:prstGeom prst="roundRect">
+            <a:avLst>
+              <a:gd name="adj" fmla="val 12000"/>
+            </a:avLst>
+          </a:prstGeom>
+          <a:solidFill>
+            <a:srgbClr val="1C2C4A"/>
+          </a:solidFill>
+          <a:ln/>
+          <a:effectLst>
+            <a:outerShdw sx="100000" sy="100000" kx="0" ky="0" algn="bl" rotWithShape="0" blurRad="101600" dist="38100" dir="5400000">
+              <a:srgbClr val="000000">
+                <a:alpha val="35000"/>
+              </a:srgbClr>
+            </a:outerShdw>
+          </a:effectLst>
+        </p:spPr>
+      </p:sp>
+      <p:sp>
+        <p:nvSpPr>
+          <p:cNvPr id="16" name="Text 14"/>
+          <p:cNvSpPr/>
+          <p:nvPr/>
+        </p:nvSpPr>
+        <p:spPr>
+          <a:xfrm>
+            <a:off x="777240" y="4160520"/>
+            <a:ext cx="4480560" cy="914400"/>
+          </a:xfrm>
+          <a:prstGeom prst="rect">
+            <a:avLst/>
+          </a:prstGeom>
+          <a:noFill/>
+          <a:ln/>
+        </p:spPr>
+        <p:txBody>
+          <a:bodyPr wrap="square" lIns="0" tIns="0" rIns="0" bIns="0" rtlCol="0" anchor="ctr"/>
+          <a:lstStyle/>
+          <a:p>
+            <a:pPr indent="0" marL="0">
+              <a:lnSpc>
+                <a:spcPct val="120000"/>
+              </a:lnSpc>
+              <a:buNone/>
+            </a:pPr>
+            <a:r>
+              <a:rPr lang="en-US" sz="1300" i="1" dirty="0">
+                <a:solidFill>
+                  <a:srgbClr val="F4C878"/>
+                </a:solidFill>
+                <a:latin typeface="Yu Gothic" pitchFamily="34" charset="0"/>
+                <a:ea typeface="Yu Gothic" pitchFamily="34" charset="-122"/>
+                <a:cs typeface="Yu Gothic" pitchFamily="34" charset="-120"/>
+              </a:rPr>
+              <a:t>「自分でも問題に対処できるようになった」</a:t>
+            </a:r>
+            <a:endParaRPr lang="en-US" sz="1300" dirty="0"/>
+          </a:p>
+        </p:txBody>
+      </p:sp>
+      <p:sp>
+        <p:nvSpPr>
+          <p:cNvPr id="17" name="Text 15"/>
+          <p:cNvSpPr/>
+          <p:nvPr/>
+        </p:nvSpPr>
+        <p:spPr>
+          <a:xfrm>
+            <a:off x="5623560" y="4160520"/>
+            <a:ext cx="914400" cy="914400"/>
+          </a:xfrm>
+          <a:prstGeom prst="rect">
+            <a:avLst/>
+          </a:prstGeom>
+          <a:noFill/>
+          <a:ln/>
+        </p:spPr>
+        <p:txBody>
+          <a:bodyPr wrap="square" lIns="0" tIns="0" rIns="0" bIns="0" rtlCol="0" anchor="ctr"/>
+          <a:lstStyle/>
+          <a:p>
+            <a:pPr algn="ctr" indent="0" marL="0">
+              <a:buNone/>
+            </a:pPr>
+            <a:r>
+              <a:rPr lang="en-US" sz="2200" dirty="0">
+                <a:solidFill>
+                  <a:srgbClr val="9AA4C0"/>
+                </a:solidFill>
+                <a:latin typeface="Yu Gothic" pitchFamily="34" charset="0"/>
+                <a:ea typeface="Yu Gothic" pitchFamily="34" charset="-122"/>
+                <a:cs typeface="Yu Gothic" pitchFamily="34" charset="-120"/>
+              </a:rPr>
+              <a:t>→</a:t>
+            </a:r>
+            <a:endParaRPr lang="en-US" sz="2200" dirty="0"/>
+          </a:p>
+        </p:txBody>
+      </p:sp>
+      <p:sp>
+        <p:nvSpPr>
+          <p:cNvPr id="18" name="Shape 16"/>
+          <p:cNvSpPr/>
+          <p:nvPr/>
+        </p:nvSpPr>
+        <p:spPr>
+          <a:xfrm>
+            <a:off x="6675120" y="4160520"/>
+            <a:ext cx="4937760" cy="914400"/>
+          </a:xfrm>
+          <a:prstGeom prst="roundRect">
+            <a:avLst>
+              <a:gd name="adj" fmla="val 12000"/>
+            </a:avLst>
+          </a:prstGeom>
+          <a:solidFill>
+            <a:srgbClr val="16213A"/>
+          </a:solidFill>
+          <a:ln/>
+          <a:effectLst>
+            <a:outerShdw sx="100000" sy="100000" kx="0" ky="0" algn="bl" rotWithShape="0" blurRad="101600" dist="38100" dir="5400000">
+              <a:srgbClr val="000000">
+                <a:alpha val="35000"/>
+              </a:srgbClr>
+            </a:outerShdw>
+          </a:effectLst>
+        </p:spPr>
+      </p:sp>
+      <p:sp>
+        <p:nvSpPr>
+          <p:cNvPr id="19" name="Text 17"/>
+          <p:cNvSpPr/>
+          <p:nvPr/>
+        </p:nvSpPr>
+        <p:spPr>
+          <a:xfrm>
+            <a:off x="6903720" y="4160520"/>
+            <a:ext cx="4480560" cy="914400"/>
+          </a:xfrm>
+          <a:prstGeom prst="rect">
+            <a:avLst/>
+          </a:prstGeom>
+          <a:noFill/>
+          <a:ln/>
+        </p:spPr>
+        <p:txBody>
+          <a:bodyPr wrap="square" lIns="0" tIns="0" rIns="0" bIns="0" rtlCol="0" anchor="ctr"/>
+          <a:lstStyle/>
+          <a:p>
+            <a:pPr indent="0" marL="0">
+              <a:lnSpc>
+                <a:spcPct val="120000"/>
+              </a:lnSpc>
+              <a:buNone/>
+            </a:pPr>
+            <a:r>
+              <a:rPr lang="en-US" sz="1300" b="1" dirty="0">
+                <a:solidFill>
+                  <a:srgbClr val="5A8FD6"/>
+                </a:solidFill>
+                <a:latin typeface="Yu Gothic" pitchFamily="34" charset="0"/>
+                <a:ea typeface="Yu Gothic" pitchFamily="34" charset="-122"/>
+                <a:cs typeface="Yu Gothic" pitchFamily="34" charset="-120"/>
+              </a:rPr>
+              <a:t>組織のレジリエンス向上・意思決定の高速化</a:t>
+            </a:r>
+            <a:endParaRPr lang="en-US" sz="1300" dirty="0"/>
+          </a:p>
+        </p:txBody>
+      </p:sp>
+      <p:sp>
+        <p:nvSpPr>
+          <p:cNvPr id="20" name="Shape 18"/>
+          <p:cNvSpPr/>
+          <p:nvPr/>
+        </p:nvSpPr>
+        <p:spPr>
+          <a:xfrm>
+            <a:off x="548640" y="5303520"/>
+            <a:ext cx="11091672" cy="822960"/>
+          </a:xfrm>
+          <a:prstGeom prst="roundRect">
+            <a:avLst>
+              <a:gd name="adj" fmla="val 11111"/>
+            </a:avLst>
+          </a:prstGeom>
+          <a:solidFill>
+            <a:srgbClr val="16213A"/>
+          </a:solidFill>
+          <a:ln/>
+          <a:effectLst>
+            <a:outerShdw sx="100000" sy="100000" kx="0" ky="0" algn="bl" rotWithShape="0" blurRad="101600" dist="38100" dir="5400000">
+              <a:srgbClr val="000000">
+                <a:alpha val="35000"/>
+              </a:srgbClr>
+            </a:outerShdw>
+          </a:effectLst>
+        </p:spPr>
+      </p:sp>
+      <p:sp>
+        <p:nvSpPr>
+          <p:cNvPr id="21" name="Text 19"/>
+          <p:cNvSpPr/>
+          <p:nvPr/>
+        </p:nvSpPr>
+        <p:spPr>
+          <a:xfrm>
+            <a:off x="868680" y="5303520"/>
+            <a:ext cx="10515600" cy="822960"/>
+          </a:xfrm>
+          <a:prstGeom prst="rect">
+            <a:avLst/>
+          </a:prstGeom>
+          <a:noFill/>
+          <a:ln/>
+        </p:spPr>
+        <p:txBody>
+          <a:bodyPr wrap="square" lIns="0" tIns="0" rIns="0" bIns="0" rtlCol="0" anchor="ctr"/>
+          <a:lstStyle/>
+          <a:p>
+            <a:pPr indent="0" marL="0">
+              <a:buNone/>
+            </a:pPr>
+            <a:r>
+              <a:rPr lang="en-US" sz="1400" b="1" dirty="0">
+                <a:solidFill>
+                  <a:srgbClr val="FFFFFF"/>
+                </a:solidFill>
+                <a:latin typeface="Yu Gothic" pitchFamily="34" charset="0"/>
+                <a:ea typeface="Yu Gothic" pitchFamily="34" charset="-122"/>
+                <a:cs typeface="Yu Gothic" pitchFamily="34" charset="-120"/>
+              </a:rPr>
+              <a:t>人を支える行為は「美談」ではない。組織の持続可能性と安全保障に直結する。</a:t>
+            </a:r>
+            <a:endParaRPr lang="en-US" sz="1400" dirty="0"/>
+          </a:p>
+        </p:txBody>
+      </p:sp>
+      <p:sp>
+        <p:nvSpPr>
+          <p:cNvPr id="22" name="Text 20"/>
           <p:cNvSpPr/>
           <p:nvPr/>
         </p:nvSpPr>
@@ -12156,7 +13323,7 @@
       </p:sp>
       <p:sp>
         <p:nvSpPr>
-          <p:cNvPr id="27" name="Text 22"/>
+          <p:cNvPr id="23" name="Text 21"/>
           <p:cNvSpPr/>
           <p:nvPr/>
         </p:nvSpPr>
@@ -12227,20 +13394,88 @@
       </p:grpSpPr>
       <p:sp>
         <p:nvSpPr>
-          <p:cNvPr id="2" name="Shape 0"/>
-          <p:cNvSpPr/>
-          <p:nvPr/>
-        </p:nvSpPr>
-        <p:spPr>
-          <a:xfrm>
-            <a:off x="5190592" y="512064"/>
+          <p:cNvPr id="2" name="Text 0"/>
+          <p:cNvSpPr/>
+          <p:nvPr/>
+        </p:nvSpPr>
+        <p:spPr>
+          <a:xfrm>
+            <a:off x="548640" y="411480"/>
+            <a:ext cx="11094415" cy="822960"/>
+          </a:xfrm>
+          <a:prstGeom prst="rect">
+            <a:avLst/>
+          </a:prstGeom>
+          <a:noFill/>
+          <a:ln/>
+        </p:spPr>
+        <p:txBody>
+          <a:bodyPr wrap="square" lIns="0" tIns="0" rIns="0" bIns="0" rtlCol="0" anchor="ctr"/>
+          <a:lstStyle/>
+          <a:p>
+            <a:pPr algn="l" indent="0" marL="0">
+              <a:buNone/>
+            </a:pPr>
+            <a:r>
+              <a:rPr lang="en-US" sz="3000" b="1" dirty="0">
+                <a:solidFill>
+                  <a:srgbClr val="FFFFFF"/>
+                </a:solidFill>
+                <a:latin typeface="Yu Gothic" pitchFamily="34" charset="0"/>
+                <a:ea typeface="Yu Gothic" pitchFamily="34" charset="-122"/>
+                <a:cs typeface="Yu Gothic" pitchFamily="34" charset="-120"/>
+              </a:rPr>
+              <a:t>フラクタルな構造：村から国家の「メタ安全保障」へ</a:t>
+            </a:r>
+            <a:endParaRPr lang="en-US" sz="3000" dirty="0"/>
+          </a:p>
+        </p:txBody>
+      </p:sp>
+      <p:sp>
+        <p:nvSpPr>
+          <p:cNvPr id="3" name="Shape 1"/>
+          <p:cNvSpPr/>
+          <p:nvPr/>
+        </p:nvSpPr>
+        <p:spPr>
+          <a:xfrm>
+            <a:off x="641452" y="1874520"/>
+            <a:ext cx="3429000" cy="2880360"/>
+          </a:xfrm>
+          <a:prstGeom prst="roundRect">
+            <a:avLst>
+              <a:gd name="adj" fmla="val 3810"/>
+            </a:avLst>
+          </a:prstGeom>
+          <a:solidFill>
+            <a:srgbClr val="16213A"/>
+          </a:solidFill>
+          <a:ln/>
+          <a:effectLst>
+            <a:outerShdw sx="100000" sy="100000" kx="0" ky="0" algn="bl" rotWithShape="0" blurRad="101600" dist="38100" dir="5400000">
+              <a:srgbClr val="000000">
+                <a:alpha val="35000"/>
+              </a:srgbClr>
+            </a:outerShdw>
+          </a:effectLst>
+        </p:spPr>
+      </p:sp>
+      <p:sp>
+        <p:nvSpPr>
+          <p:cNvPr id="4" name="Shape 2"/>
+          <p:cNvSpPr/>
+          <p:nvPr/>
+        </p:nvSpPr>
+        <p:spPr>
+          <a:xfrm>
+            <a:off x="1450696" y="1746504"/>
             <a:ext cx="1810512" cy="1810512"/>
           </a:xfrm>
           <a:prstGeom prst="ellipse">
             <a:avLst/>
           </a:prstGeom>
           <a:solidFill>
-            <a:srgbClr val="E8A33D">
+            <a:srgbClr val="1BAF7A">
               <a:alpha val="12000"/>
             </a:srgbClr>
           </a:solidFill>
@@ -12249,20 +13484,20 @@
       </p:sp>
       <p:sp>
         <p:nvSpPr>
-          <p:cNvPr id="3" name="Shape 1"/>
-          <p:cNvSpPr/>
-          <p:nvPr/>
-        </p:nvSpPr>
-        <p:spPr>
-          <a:xfrm>
-            <a:off x="5437480" y="758952"/>
+          <p:cNvPr id="5" name="Shape 3"/>
+          <p:cNvSpPr/>
+          <p:nvPr/>
+        </p:nvSpPr>
+        <p:spPr>
+          <a:xfrm>
+            <a:off x="1697584" y="1993392"/>
             <a:ext cx="1316736" cy="1316736"/>
           </a:xfrm>
           <a:prstGeom prst="ellipse">
             <a:avLst/>
           </a:prstGeom>
           <a:solidFill>
-            <a:srgbClr val="E8A33D">
+            <a:srgbClr val="1BAF7A">
               <a:alpha val="22000"/>
             </a:srgbClr>
           </a:solidFill>
@@ -12271,24 +13506,24 @@
       </p:sp>
       <p:sp>
         <p:nvSpPr>
-          <p:cNvPr id="4" name="Shape 2"/>
-          <p:cNvSpPr/>
-          <p:nvPr/>
-        </p:nvSpPr>
-        <p:spPr>
-          <a:xfrm>
-            <a:off x="5684368" y="1005840"/>
+          <p:cNvPr id="6" name="Shape 4"/>
+          <p:cNvSpPr/>
+          <p:nvPr/>
+        </p:nvSpPr>
+        <p:spPr>
+          <a:xfrm>
+            <a:off x="1944472" y="2240280"/>
             <a:ext cx="822960" cy="822960"/>
           </a:xfrm>
           <a:prstGeom prst="ellipse">
             <a:avLst/>
           </a:prstGeom>
           <a:solidFill>
-            <a:srgbClr val="E8A33D"/>
+            <a:srgbClr val="1BAF7A"/>
           </a:solidFill>
           <a:ln w="9525">
             <a:solidFill>
-              <a:srgbClr val="E8A33D"/>
+              <a:srgbClr val="1BAF7A"/>
             </a:solidFill>
             <a:prstDash val="solid"/>
           </a:ln>
@@ -12296,7 +13531,7 @@
       </p:sp>
       <p:pic>
         <p:nvPicPr>
-          <p:cNvPr id="5" name="Image 0" descr="preencoded.png">    </p:cNvPr>
+          <p:cNvPr id="7" name="Image 0" descr="preencoded.png">    </p:cNvPr>
           <p:cNvPicPr>
             <a:picLocks noChangeAspect="1"/>
           </p:cNvPicPr>
@@ -12310,7 +13545,7 @@
         </p:blipFill>
         <p:spPr>
           <a:xfrm>
-            <a:off x="5898337" y="1219810"/>
+            <a:off x="2158441" y="2454250"/>
             <a:ext cx="395021" cy="395021"/>
           </a:xfrm>
           <a:prstGeom prst="rect">
@@ -12320,14 +13555,14 @@
       </p:pic>
       <p:sp>
         <p:nvSpPr>
-          <p:cNvPr id="6" name="Text 3"/>
-          <p:cNvSpPr/>
-          <p:nvPr/>
-        </p:nvSpPr>
-        <p:spPr>
-          <a:xfrm>
-            <a:off x="0" y="1965960"/>
-            <a:ext cx="12191695" cy="731520"/>
+          <p:cNvPr id="8" name="Text 5"/>
+          <p:cNvSpPr/>
+          <p:nvPr/>
+        </p:nvSpPr>
+        <p:spPr>
+          <a:xfrm>
+            <a:off x="778612" y="3200400"/>
+            <a:ext cx="3154680" cy="411480"/>
           </a:xfrm>
           <a:prstGeom prst="rect">
             <a:avLst/>
@@ -12343,7 +13578,7 @@
               <a:buNone/>
             </a:pPr>
             <a:r>
-              <a:rPr lang="en-US" sz="3400" b="1" dirty="0">
+              <a:rPr lang="en-US" sz="1700" b="1" dirty="0">
                 <a:solidFill>
                   <a:srgbClr val="FFFFFF"/>
                 </a:solidFill>
@@ -12351,22 +13586,22 @@
                 <a:ea typeface="Yu Gothic" pitchFamily="34" charset="-122"/>
                 <a:cs typeface="Yu Gothic" pitchFamily="34" charset="-120"/>
               </a:rPr>
-              <a:t>救済者 × ガバナンス</a:t>
-            </a:r>
-            <a:endParaRPr lang="en-US" sz="3400" dirty="0"/>
-          </a:p>
-        </p:txBody>
-      </p:sp>
-      <p:sp>
-        <p:nvSpPr>
-          <p:cNvPr id="7" name="Text 4"/>
-          <p:cNvSpPr/>
-          <p:nvPr/>
-        </p:nvSpPr>
-        <p:spPr>
-          <a:xfrm>
-            <a:off x="0" y="2651760"/>
-            <a:ext cx="12191695" cy="411480"/>
+              <a:t>村</a:t>
+            </a:r>
+            <a:endParaRPr lang="en-US" sz="1700" dirty="0"/>
+          </a:p>
+        </p:txBody>
+      </p:sp>
+      <p:sp>
+        <p:nvSpPr>
+          <p:cNvPr id="9" name="Text 6"/>
+          <p:cNvSpPr/>
+          <p:nvPr/>
+        </p:nvSpPr>
+        <p:spPr>
+          <a:xfrm>
+            <a:off x="915772" y="3657600"/>
+            <a:ext cx="2880360" cy="914400"/>
           </a:xfrm>
           <a:prstGeom prst="rect">
             <a:avLst/>
@@ -12379,10 +13614,13 @@
           <a:lstStyle/>
           <a:p>
             <a:pPr algn="ctr" indent="0" marL="0">
-              <a:buNone/>
-            </a:pPr>
-            <a:r>
-              <a:rPr lang="en-US" sz="1500" dirty="0">
+              <a:lnSpc>
+                <a:spcPct val="130000"/>
+              </a:lnSpc>
+              <a:buNone/>
+            </a:pPr>
+            <a:r>
+              <a:rPr lang="en-US" sz="1300" dirty="0">
                 <a:solidFill>
                   <a:srgbClr val="AFC9EE"/>
                 </a:solidFill>
@@ -12390,26 +13628,26 @@
                 <a:ea typeface="Yu Gothic" pitchFamily="34" charset="-122"/>
                 <a:cs typeface="Yu Gothic" pitchFamily="34" charset="-120"/>
               </a:rPr>
-              <a:t>神が降りなくても、村は回るか</a:t>
-            </a:r>
-            <a:endParaRPr lang="en-US" sz="1500" dirty="0"/>
-          </a:p>
-        </p:txBody>
-      </p:sp>
-      <p:sp>
-        <p:nvSpPr>
-          <p:cNvPr id="8" name="Shape 5"/>
-          <p:cNvSpPr/>
-          <p:nvPr/>
-        </p:nvSpPr>
-        <p:spPr>
-          <a:xfrm>
-            <a:off x="609448" y="3337560"/>
-            <a:ext cx="3474720" cy="1371600"/>
+              <a:t>「世話焼きへの過度な依存」と疲弊</a:t>
+            </a:r>
+            <a:endParaRPr lang="en-US" sz="1300" dirty="0"/>
+          </a:p>
+        </p:txBody>
+      </p:sp>
+      <p:sp>
+        <p:nvSpPr>
+          <p:cNvPr id="10" name="Shape 7"/>
+          <p:cNvSpPr/>
+          <p:nvPr/>
+        </p:nvSpPr>
+        <p:spPr>
+          <a:xfrm>
+            <a:off x="4381348" y="1874520"/>
+            <a:ext cx="3429000" cy="2880360"/>
           </a:xfrm>
           <a:prstGeom prst="roundRect">
             <a:avLst>
-              <a:gd name="adj" fmla="val 8000"/>
+              <a:gd name="adj" fmla="val 3810"/>
             </a:avLst>
           </a:prstGeom>
           <a:solidFill>
@@ -12427,14 +13665,107 @@
       </p:sp>
       <p:sp>
         <p:nvSpPr>
-          <p:cNvPr id="9" name="Text 6"/>
-          <p:cNvSpPr/>
-          <p:nvPr/>
-        </p:nvSpPr>
-        <p:spPr>
-          <a:xfrm>
-            <a:off x="792328" y="3474720"/>
-            <a:ext cx="3108960" cy="502920"/>
+          <p:cNvPr id="11" name="Shape 8"/>
+          <p:cNvSpPr/>
+          <p:nvPr/>
+        </p:nvSpPr>
+        <p:spPr>
+          <a:xfrm>
+            <a:off x="5190592" y="1746504"/>
+            <a:ext cx="1810512" cy="1810512"/>
+          </a:xfrm>
+          <a:prstGeom prst="ellipse">
+            <a:avLst/>
+          </a:prstGeom>
+          <a:solidFill>
+            <a:srgbClr val="2A78D6">
+              <a:alpha val="12000"/>
+            </a:srgbClr>
+          </a:solidFill>
+          <a:ln/>
+        </p:spPr>
+      </p:sp>
+      <p:sp>
+        <p:nvSpPr>
+          <p:cNvPr id="12" name="Shape 9"/>
+          <p:cNvSpPr/>
+          <p:nvPr/>
+        </p:nvSpPr>
+        <p:spPr>
+          <a:xfrm>
+            <a:off x="5437480" y="1993392"/>
+            <a:ext cx="1316736" cy="1316736"/>
+          </a:xfrm>
+          <a:prstGeom prst="ellipse">
+            <a:avLst/>
+          </a:prstGeom>
+          <a:solidFill>
+            <a:srgbClr val="2A78D6">
+              <a:alpha val="22000"/>
+            </a:srgbClr>
+          </a:solidFill>
+          <a:ln/>
+        </p:spPr>
+      </p:sp>
+      <p:sp>
+        <p:nvSpPr>
+          <p:cNvPr id="13" name="Shape 10"/>
+          <p:cNvSpPr/>
+          <p:nvPr/>
+        </p:nvSpPr>
+        <p:spPr>
+          <a:xfrm>
+            <a:off x="5684368" y="2240280"/>
+            <a:ext cx="822960" cy="822960"/>
+          </a:xfrm>
+          <a:prstGeom prst="ellipse">
+            <a:avLst/>
+          </a:prstGeom>
+          <a:solidFill>
+            <a:srgbClr val="2A78D6"/>
+          </a:solidFill>
+          <a:ln w="9525">
+            <a:solidFill>
+              <a:srgbClr val="2A78D6"/>
+            </a:solidFill>
+            <a:prstDash val="solid"/>
+          </a:ln>
+        </p:spPr>
+      </p:sp>
+      <p:pic>
+        <p:nvPicPr>
+          <p:cNvPr id="14" name="Image 1" descr="preencoded.png">    </p:cNvPr>
+          <p:cNvPicPr>
+            <a:picLocks noChangeAspect="1"/>
+          </p:cNvPicPr>
+          <p:nvPr/>
+        </p:nvPicPr>
+        <p:blipFill>
+          <a:blip r:embed="rId2"/>
+          <a:stretch>
+            <a:fillRect/>
+          </a:stretch>
+        </p:blipFill>
+        <p:spPr>
+          <a:xfrm>
+            <a:off x="5898337" y="2454250"/>
+            <a:ext cx="395021" cy="395021"/>
+          </a:xfrm>
+          <a:prstGeom prst="rect">
+            <a:avLst/>
+          </a:prstGeom>
+        </p:spPr>
+      </p:pic>
+      <p:sp>
+        <p:nvSpPr>
+          <p:cNvPr id="15" name="Text 11"/>
+          <p:cNvSpPr/>
+          <p:nvPr/>
+        </p:nvSpPr>
+        <p:spPr>
+          <a:xfrm>
+            <a:off x="4518508" y="3200400"/>
+            <a:ext cx="3154680" cy="411480"/>
           </a:xfrm>
           <a:prstGeom prst="rect">
             <a:avLst/>
@@ -12450,30 +13781,30 @@
               <a:buNone/>
             </a:pPr>
             <a:r>
-              <a:rPr lang="en-US" sz="1900" b="1" dirty="0">
-                <a:solidFill>
-                  <a:srgbClr val="E2665A"/>
-                </a:solidFill>
-                <a:latin typeface="Yu Gothic" pitchFamily="34" charset="0"/>
-                <a:ea typeface="Yu Gothic" pitchFamily="34" charset="-122"/>
-                <a:cs typeface="Yu Gothic" pitchFamily="34" charset="-120"/>
-              </a:rPr>
-              <a:t>依存は毎回再現された</a:t>
-            </a:r>
-            <a:endParaRPr lang="en-US" sz="1900" dirty="0"/>
-          </a:p>
-        </p:txBody>
-      </p:sp>
-      <p:sp>
-        <p:nvSpPr>
-          <p:cNvPr id="10" name="Text 7"/>
-          <p:cNvSpPr/>
-          <p:nvPr/>
-        </p:nvSpPr>
-        <p:spPr>
-          <a:xfrm>
-            <a:off x="838048" y="4023360"/>
-            <a:ext cx="3017520" cy="594360"/>
+              <a:rPr lang="en-US" sz="1700" b="1" dirty="0">
+                <a:solidFill>
+                  <a:srgbClr val="FFFFFF"/>
+                </a:solidFill>
+                <a:latin typeface="Yu Gothic" pitchFamily="34" charset="0"/>
+                <a:ea typeface="Yu Gothic" pitchFamily="34" charset="-122"/>
+                <a:cs typeface="Yu Gothic" pitchFamily="34" charset="-120"/>
+              </a:rPr>
+              <a:t>都市</a:t>
+            </a:r>
+            <a:endParaRPr lang="en-US" sz="1700" dirty="0"/>
+          </a:p>
+        </p:txBody>
+      </p:sp>
+      <p:sp>
+        <p:nvSpPr>
+          <p:cNvPr id="16" name="Text 12"/>
+          <p:cNvSpPr/>
+          <p:nvPr/>
+        </p:nvSpPr>
+        <p:spPr>
+          <a:xfrm>
+            <a:off x="4655668" y="3657600"/>
+            <a:ext cx="2880360" cy="914400"/>
           </a:xfrm>
           <a:prstGeom prst="rect">
             <a:avLst/>
@@ -12487,39 +13818,39 @@
           <a:p>
             <a:pPr algn="ctr" indent="0" marL="0">
               <a:lnSpc>
-                <a:spcPct val="125000"/>
+                <a:spcPct val="130000"/>
               </a:lnSpc>
               <a:buNone/>
             </a:pPr>
             <a:r>
-              <a:rPr lang="en-US" sz="1100" dirty="0">
-                <a:solidFill>
-                  <a:srgbClr val="9AA4C0"/>
-                </a:solidFill>
-                <a:latin typeface="Yu Gothic" pitchFamily="34" charset="0"/>
-                <a:ea typeface="Yu Gothic" pitchFamily="34" charset="-122"/>
-                <a:cs typeface="Yu Gothic" pitchFamily="34" charset="-120"/>
-              </a:rPr>
-              <a:t>A・Bの標準偏差はほぼ0。放っておけば村は必ず依存へ落ちる</a:t>
-            </a:r>
-            <a:endParaRPr lang="en-US" sz="1100" dirty="0"/>
-          </a:p>
-        </p:txBody>
-      </p:sp>
-      <p:sp>
-        <p:nvSpPr>
-          <p:cNvPr id="11" name="Shape 8"/>
-          <p:cNvSpPr/>
-          <p:nvPr/>
-        </p:nvSpPr>
-        <p:spPr>
-          <a:xfrm>
-            <a:off x="4358488" y="3337560"/>
-            <a:ext cx="3474720" cy="1371600"/>
+              <a:rPr lang="en-US" sz="1300" dirty="0">
+                <a:solidFill>
+                  <a:srgbClr val="AFC9EE"/>
+                </a:solidFill>
+                <a:latin typeface="Yu Gothic" pitchFamily="34" charset="0"/>
+                <a:ea typeface="Yu Gothic" pitchFamily="34" charset="-122"/>
+                <a:cs typeface="Yu Gothic" pitchFamily="34" charset="-120"/>
+              </a:rPr>
+              <a:t>「支援制度の複雑化」と、誰にも届かないSOS</a:t>
+            </a:r>
+            <a:endParaRPr lang="en-US" sz="1300" dirty="0"/>
+          </a:p>
+        </p:txBody>
+      </p:sp>
+      <p:sp>
+        <p:nvSpPr>
+          <p:cNvPr id="17" name="Shape 13"/>
+          <p:cNvSpPr/>
+          <p:nvPr/>
+        </p:nvSpPr>
+        <p:spPr>
+          <a:xfrm>
+            <a:off x="8121244" y="1874520"/>
+            <a:ext cx="3429000" cy="2880360"/>
           </a:xfrm>
           <a:prstGeom prst="roundRect">
             <a:avLst>
-              <a:gd name="adj" fmla="val 8000"/>
+              <a:gd name="adj" fmla="val 3810"/>
             </a:avLst>
           </a:prstGeom>
           <a:solidFill>
@@ -12537,14 +13868,107 @@
       </p:sp>
       <p:sp>
         <p:nvSpPr>
-          <p:cNvPr id="12" name="Text 9"/>
-          <p:cNvSpPr/>
-          <p:nvPr/>
-        </p:nvSpPr>
-        <p:spPr>
-          <a:xfrm>
-            <a:off x="4541368" y="3474720"/>
-            <a:ext cx="3108960" cy="502920"/>
+          <p:cNvPr id="18" name="Shape 14"/>
+          <p:cNvSpPr/>
+          <p:nvPr/>
+        </p:nvSpPr>
+        <p:spPr>
+          <a:xfrm>
+            <a:off x="8930488" y="1746504"/>
+            <a:ext cx="1810512" cy="1810512"/>
+          </a:xfrm>
+          <a:prstGeom prst="ellipse">
+            <a:avLst/>
+          </a:prstGeom>
+          <a:solidFill>
+            <a:srgbClr val="EB6834">
+              <a:alpha val="12000"/>
+            </a:srgbClr>
+          </a:solidFill>
+          <a:ln/>
+        </p:spPr>
+      </p:sp>
+      <p:sp>
+        <p:nvSpPr>
+          <p:cNvPr id="19" name="Shape 15"/>
+          <p:cNvSpPr/>
+          <p:nvPr/>
+        </p:nvSpPr>
+        <p:spPr>
+          <a:xfrm>
+            <a:off x="9177376" y="1993392"/>
+            <a:ext cx="1316736" cy="1316736"/>
+          </a:xfrm>
+          <a:prstGeom prst="ellipse">
+            <a:avLst/>
+          </a:prstGeom>
+          <a:solidFill>
+            <a:srgbClr val="EB6834">
+              <a:alpha val="22000"/>
+            </a:srgbClr>
+          </a:solidFill>
+          <a:ln/>
+        </p:spPr>
+      </p:sp>
+      <p:sp>
+        <p:nvSpPr>
+          <p:cNvPr id="20" name="Shape 16"/>
+          <p:cNvSpPr/>
+          <p:nvPr/>
+        </p:nvSpPr>
+        <p:spPr>
+          <a:xfrm>
+            <a:off x="9424264" y="2240280"/>
+            <a:ext cx="822960" cy="822960"/>
+          </a:xfrm>
+          <a:prstGeom prst="ellipse">
+            <a:avLst/>
+          </a:prstGeom>
+          <a:solidFill>
+            <a:srgbClr val="EB6834"/>
+          </a:solidFill>
+          <a:ln w="9525">
+            <a:solidFill>
+              <a:srgbClr val="EB6834"/>
+            </a:solidFill>
+            <a:prstDash val="solid"/>
+          </a:ln>
+        </p:spPr>
+      </p:sp>
+      <p:pic>
+        <p:nvPicPr>
+          <p:cNvPr id="21" name="Image 2" descr="preencoded.png">    </p:cNvPr>
+          <p:cNvPicPr>
+            <a:picLocks noChangeAspect="1"/>
+          </p:cNvPicPr>
+          <p:nvPr/>
+        </p:nvPicPr>
+        <p:blipFill>
+          <a:blip r:embed="rId3"/>
+          <a:stretch>
+            <a:fillRect/>
+          </a:stretch>
+        </p:blipFill>
+        <p:spPr>
+          <a:xfrm>
+            <a:off x="9638233" y="2454250"/>
+            <a:ext cx="395021" cy="395021"/>
+          </a:xfrm>
+          <a:prstGeom prst="rect">
+            <a:avLst/>
+          </a:prstGeom>
+        </p:spPr>
+      </p:pic>
+      <p:sp>
+        <p:nvSpPr>
+          <p:cNvPr id="22" name="Text 17"/>
+          <p:cNvSpPr/>
+          <p:nvPr/>
+        </p:nvSpPr>
+        <p:spPr>
+          <a:xfrm>
+            <a:off x="8258404" y="3200400"/>
+            <a:ext cx="3154680" cy="411480"/>
           </a:xfrm>
           <a:prstGeom prst="rect">
             <a:avLst/>
@@ -12560,30 +13984,30 @@
               <a:buNone/>
             </a:pPr>
             <a:r>
-              <a:rPr lang="en-US" sz="1900" b="1" dirty="0">
-                <a:solidFill>
-                  <a:srgbClr val="1BAF7A"/>
-                </a:solidFill>
-                <a:latin typeface="Yu Gothic" pitchFamily="34" charset="0"/>
-                <a:ea typeface="Yu Gothic" pitchFamily="34" charset="-122"/>
-                <a:cs typeface="Yu Gothic" pitchFamily="34" charset="-120"/>
-              </a:rPr>
-              <a:t>背中を押す量に閾値がある</a:t>
-            </a:r>
-            <a:endParaRPr lang="en-US" sz="1900" dirty="0"/>
-          </a:p>
-        </p:txBody>
-      </p:sp>
-      <p:sp>
-        <p:nvSpPr>
-          <p:cNvPr id="13" name="Text 10"/>
-          <p:cNvSpPr/>
-          <p:nvPr/>
-        </p:nvSpPr>
-        <p:spPr>
-          <a:xfrm>
-            <a:off x="4587088" y="4023360"/>
-            <a:ext cx="3017520" cy="594360"/>
+              <a:rPr lang="en-US" sz="1700" b="1" dirty="0">
+                <a:solidFill>
+                  <a:srgbClr val="FFFFFF"/>
+                </a:solidFill>
+                <a:latin typeface="Yu Gothic" pitchFamily="34" charset="0"/>
+                <a:ea typeface="Yu Gothic" pitchFamily="34" charset="-122"/>
+                <a:cs typeface="Yu Gothic" pitchFamily="34" charset="-120"/>
+              </a:rPr>
+              <a:t>国</a:t>
+            </a:r>
+            <a:endParaRPr lang="en-US" sz="1700" dirty="0"/>
+          </a:p>
+        </p:txBody>
+      </p:sp>
+      <p:sp>
+        <p:nvSpPr>
+          <p:cNvPr id="23" name="Text 18"/>
+          <p:cNvSpPr/>
+          <p:nvPr/>
+        </p:nvSpPr>
+        <p:spPr>
+          <a:xfrm>
+            <a:off x="8395564" y="3657600"/>
+            <a:ext cx="2880360" cy="914400"/>
           </a:xfrm>
           <a:prstGeom prst="rect">
             <a:avLst/>
@@ -12597,43 +14021,43 @@
           <a:p>
             <a:pPr algn="ctr" indent="0" marL="0">
               <a:lnSpc>
-                <a:spcPct val="125000"/>
+                <a:spcPct val="130000"/>
               </a:lnSpc>
               <a:buNone/>
             </a:pPr>
             <a:r>
-              <a:rPr lang="en-US" sz="1100" dirty="0">
-                <a:solidFill>
-                  <a:srgbClr val="9AA4C0"/>
-                </a:solidFill>
-                <a:latin typeface="Yu Gothic" pitchFamily="34" charset="0"/>
-                <a:ea typeface="Yu Gothic" pitchFamily="34" charset="-122"/>
-                <a:cs typeface="Yu Gothic" pitchFamily="34" charset="-120"/>
-              </a:rPr>
-              <a:t>L3まで押すと分岐が消え、5回とも自律側に着地した</a:t>
-            </a:r>
-            <a:endParaRPr lang="en-US" sz="1100" dirty="0"/>
-          </a:p>
-        </p:txBody>
-      </p:sp>
-      <p:sp>
-        <p:nvSpPr>
-          <p:cNvPr id="14" name="Shape 11"/>
-          <p:cNvSpPr/>
-          <p:nvPr/>
-        </p:nvSpPr>
-        <p:spPr>
-          <a:xfrm>
-            <a:off x="8107528" y="3337560"/>
-            <a:ext cx="3474720" cy="1371600"/>
+              <a:rPr lang="en-US" sz="1300" dirty="0">
+                <a:solidFill>
+                  <a:srgbClr val="AFC9EE"/>
+                </a:solidFill>
+                <a:latin typeface="Yu Gothic" pitchFamily="34" charset="0"/>
+                <a:ea typeface="Yu Gothic" pitchFamily="34" charset="-122"/>
+                <a:cs typeface="Yu Gothic" pitchFamily="34" charset="-120"/>
+              </a:rPr>
+              <a:t>「権力の集中」と、強い指導者への救世主待望</a:t>
+            </a:r>
+            <a:endParaRPr lang="en-US" sz="1300" dirty="0"/>
+          </a:p>
+        </p:txBody>
+      </p:sp>
+      <p:sp>
+        <p:nvSpPr>
+          <p:cNvPr id="24" name="Shape 19"/>
+          <p:cNvSpPr/>
+          <p:nvPr/>
+        </p:nvSpPr>
+        <p:spPr>
+          <a:xfrm>
+            <a:off x="548640" y="5166360"/>
+            <a:ext cx="11091672" cy="960120"/>
           </a:xfrm>
           <a:prstGeom prst="roundRect">
             <a:avLst>
-              <a:gd name="adj" fmla="val 8000"/>
+              <a:gd name="adj" fmla="val 9524"/>
             </a:avLst>
           </a:prstGeom>
           <a:solidFill>
-            <a:srgbClr val="16213A"/>
+            <a:srgbClr val="1C2C4A"/>
           </a:solidFill>
           <a:ln/>
           <a:effectLst>
@@ -12647,13 +14071,362 @@
       </p:sp>
       <p:sp>
         <p:nvSpPr>
-          <p:cNvPr id="15" name="Text 12"/>
-          <p:cNvSpPr/>
-          <p:nvPr/>
-        </p:nvSpPr>
-        <p:spPr>
-          <a:xfrm>
-            <a:off x="8290408" y="3474720"/>
+          <p:cNvPr id="25" name="Text 20"/>
+          <p:cNvSpPr/>
+          <p:nvPr/>
+        </p:nvSpPr>
+        <p:spPr>
+          <a:xfrm>
+            <a:off x="868680" y="5166360"/>
+            <a:ext cx="10515600" cy="960120"/>
+          </a:xfrm>
+          <a:prstGeom prst="rect">
+            <a:avLst/>
+          </a:prstGeom>
+          <a:noFill/>
+          <a:ln/>
+        </p:spPr>
+        <p:txBody>
+          <a:bodyPr wrap="square" lIns="0" tIns="0" rIns="0" bIns="0" rtlCol="0" anchor="ctr"/>
+          <a:lstStyle/>
+          <a:p>
+            <a:pPr indent="0" marL="0">
+              <a:buNone/>
+            </a:pPr>
+            <a:r>
+              <a:rPr lang="en-US" sz="1350" dirty="0">
+                <a:solidFill>
+                  <a:srgbClr val="AFC9EE"/>
+                </a:solidFill>
+                <a:latin typeface="Yu Gothic" pitchFamily="34" charset="0"/>
+                <a:ea typeface="Yu Gothic" pitchFamily="34" charset="-122"/>
+                <a:cs typeface="Yu Gothic" pitchFamily="34" charset="-120"/>
+              </a:rPr>
+              <a:t>小さな共同体における「救済者への依存」と、国家規模における「権力の集中」は構造的に同じである。この実験は、社会全体のレジリエンスを問う試みである。</a:t>
+            </a:r>
+            <a:endParaRPr lang="en-US" sz="1350" dirty="0"/>
+          </a:p>
+        </p:txBody>
+      </p:sp>
+      <p:sp>
+        <p:nvSpPr>
+          <p:cNvPr id="26" name="Text 21"/>
+          <p:cNvSpPr/>
+          <p:nvPr/>
+        </p:nvSpPr>
+        <p:spPr>
+          <a:xfrm>
+            <a:off x="548640" y="6473952"/>
+            <a:ext cx="4572000" cy="274320"/>
+          </a:xfrm>
+          <a:prstGeom prst="rect">
+            <a:avLst/>
+          </a:prstGeom>
+          <a:noFill/>
+          <a:ln/>
+        </p:spPr>
+        <p:txBody>
+          <a:bodyPr wrap="square" lIns="0" tIns="0" rIns="0" bIns="0" rtlCol="0" anchor="ctr"/>
+          <a:lstStyle/>
+          <a:p>
+            <a:pPr indent="0" marL="0">
+              <a:buNone/>
+            </a:pPr>
+            <a:r>
+              <a:rPr lang="en-US" sz="900" dirty="0">
+                <a:solidFill>
+                  <a:srgbClr val="5B6480"/>
+                </a:solidFill>
+                <a:latin typeface="Yu Gothic" pitchFamily="34" charset="0"/>
+                <a:ea typeface="Yu Gothic" pitchFamily="34" charset="-122"/>
+                <a:cs typeface="Yu Gothic" pitchFamily="34" charset="-120"/>
+              </a:rPr>
+              <a:t>救済者 × ガバナンス</a:t>
+            </a:r>
+            <a:endParaRPr lang="en-US" sz="900" dirty="0"/>
+          </a:p>
+        </p:txBody>
+      </p:sp>
+      <p:sp>
+        <p:nvSpPr>
+          <p:cNvPr id="27" name="Text 22"/>
+          <p:cNvSpPr/>
+          <p:nvPr/>
+        </p:nvSpPr>
+        <p:spPr>
+          <a:xfrm>
+            <a:off x="11185855" y="6473952"/>
+            <a:ext cx="457200" cy="274320"/>
+          </a:xfrm>
+          <a:prstGeom prst="rect">
+            <a:avLst/>
+          </a:prstGeom>
+          <a:noFill/>
+          <a:ln/>
+        </p:spPr>
+        <p:txBody>
+          <a:bodyPr wrap="square" lIns="0" tIns="0" rIns="0" bIns="0" rtlCol="0" anchor="ctr"/>
+          <a:lstStyle/>
+          <a:p>
+            <a:pPr algn="r" indent="0" marL="0">
+              <a:buNone/>
+            </a:pPr>
+            <a:r>
+              <a:rPr lang="en-US" sz="900" dirty="0">
+                <a:solidFill>
+                  <a:srgbClr val="5B6480"/>
+                </a:solidFill>
+                <a:latin typeface="Yu Gothic" pitchFamily="34" charset="0"/>
+                <a:ea typeface="Yu Gothic" pitchFamily="34" charset="-122"/>
+                <a:cs typeface="Yu Gothic" pitchFamily="34" charset="-120"/>
+              </a:rPr>
+              <a:t>18</a:t>
+            </a:r>
+            <a:endParaRPr lang="en-US" sz="900" dirty="0"/>
+          </a:p>
+        </p:txBody>
+      </p:sp>
+    </p:spTree>
+  </p:cSld>
+  <p:clrMapOvr>
+    <a:masterClrMapping/>
+  </p:clrMapOvr>
+</p:sld>
+</file>
+
+<file path=ppt/slides/slide19.xml><?xml version="1.0" encoding="utf-8"?>
+<p:sld xmlns:a="http://schemas.openxmlformats.org/drawingml/2006/main" xmlns:r="http://schemas.openxmlformats.org/officeDocument/2006/relationships" xmlns:p="http://schemas.openxmlformats.org/presentationml/2006/main">
+  <p:cSld name="Slide 19">
+    <p:bg>
+      <p:bgPr>
+        <a:solidFill>
+          <a:srgbClr val="0B1220"/>
+        </a:solidFill>
+      </p:bgPr>
+    </p:bg>
+    <p:spTree>
+      <p:nvGrpSpPr>
+        <p:cNvPr id="1" name=""/>
+        <p:cNvGrpSpPr/>
+        <p:nvPr/>
+      </p:nvGrpSpPr>
+      <p:grpSpPr>
+        <a:xfrm>
+          <a:off x="0" y="0"/>
+          <a:ext cx="0" cy="0"/>
+          <a:chOff x="0" y="0"/>
+          <a:chExt cx="0" cy="0"/>
+        </a:xfrm>
+      </p:grpSpPr>
+      <p:sp>
+        <p:nvSpPr>
+          <p:cNvPr id="2" name="Shape 0"/>
+          <p:cNvSpPr/>
+          <p:nvPr/>
+        </p:nvSpPr>
+        <p:spPr>
+          <a:xfrm>
+            <a:off x="5190592" y="512064"/>
+            <a:ext cx="1810512" cy="1810512"/>
+          </a:xfrm>
+          <a:prstGeom prst="ellipse">
+            <a:avLst/>
+          </a:prstGeom>
+          <a:solidFill>
+            <a:srgbClr val="E8A33D">
+              <a:alpha val="12000"/>
+            </a:srgbClr>
+          </a:solidFill>
+          <a:ln/>
+        </p:spPr>
+      </p:sp>
+      <p:sp>
+        <p:nvSpPr>
+          <p:cNvPr id="3" name="Shape 1"/>
+          <p:cNvSpPr/>
+          <p:nvPr/>
+        </p:nvSpPr>
+        <p:spPr>
+          <a:xfrm>
+            <a:off x="5437480" y="758952"/>
+            <a:ext cx="1316736" cy="1316736"/>
+          </a:xfrm>
+          <a:prstGeom prst="ellipse">
+            <a:avLst/>
+          </a:prstGeom>
+          <a:solidFill>
+            <a:srgbClr val="E8A33D">
+              <a:alpha val="22000"/>
+            </a:srgbClr>
+          </a:solidFill>
+          <a:ln/>
+        </p:spPr>
+      </p:sp>
+      <p:sp>
+        <p:nvSpPr>
+          <p:cNvPr id="4" name="Shape 2"/>
+          <p:cNvSpPr/>
+          <p:nvPr/>
+        </p:nvSpPr>
+        <p:spPr>
+          <a:xfrm>
+            <a:off x="5684368" y="1005840"/>
+            <a:ext cx="822960" cy="822960"/>
+          </a:xfrm>
+          <a:prstGeom prst="ellipse">
+            <a:avLst/>
+          </a:prstGeom>
+          <a:solidFill>
+            <a:srgbClr val="E8A33D"/>
+          </a:solidFill>
+          <a:ln w="9525">
+            <a:solidFill>
+              <a:srgbClr val="E8A33D"/>
+            </a:solidFill>
+            <a:prstDash val="solid"/>
+          </a:ln>
+        </p:spPr>
+      </p:sp>
+      <p:pic>
+        <p:nvPicPr>
+          <p:cNvPr id="5" name="Image 0" descr="preencoded.png">    </p:cNvPr>
+          <p:cNvPicPr>
+            <a:picLocks noChangeAspect="1"/>
+          </p:cNvPicPr>
+          <p:nvPr/>
+        </p:nvPicPr>
+        <p:blipFill>
+          <a:blip r:embed="rId1"/>
+          <a:stretch>
+            <a:fillRect/>
+          </a:stretch>
+        </p:blipFill>
+        <p:spPr>
+          <a:xfrm>
+            <a:off x="5898337" y="1219810"/>
+            <a:ext cx="395021" cy="395021"/>
+          </a:xfrm>
+          <a:prstGeom prst="rect">
+            <a:avLst/>
+          </a:prstGeom>
+        </p:spPr>
+      </p:pic>
+      <p:sp>
+        <p:nvSpPr>
+          <p:cNvPr id="6" name="Text 3"/>
+          <p:cNvSpPr/>
+          <p:nvPr/>
+        </p:nvSpPr>
+        <p:spPr>
+          <a:xfrm>
+            <a:off x="0" y="1965960"/>
+            <a:ext cx="12191695" cy="731520"/>
+          </a:xfrm>
+          <a:prstGeom prst="rect">
+            <a:avLst/>
+          </a:prstGeom>
+          <a:noFill/>
+          <a:ln/>
+        </p:spPr>
+        <p:txBody>
+          <a:bodyPr wrap="square" lIns="0" tIns="0" rIns="0" bIns="0" rtlCol="0" anchor="ctr"/>
+          <a:lstStyle/>
+          <a:p>
+            <a:pPr algn="ctr" indent="0" marL="0">
+              <a:buNone/>
+            </a:pPr>
+            <a:r>
+              <a:rPr lang="en-US" sz="3400" b="1" dirty="0">
+                <a:solidFill>
+                  <a:srgbClr val="FFFFFF"/>
+                </a:solidFill>
+                <a:latin typeface="Yu Gothic" pitchFamily="34" charset="0"/>
+                <a:ea typeface="Yu Gothic" pitchFamily="34" charset="-122"/>
+                <a:cs typeface="Yu Gothic" pitchFamily="34" charset="-120"/>
+              </a:rPr>
+              <a:t>救済者 × ガバナンス</a:t>
+            </a:r>
+            <a:endParaRPr lang="en-US" sz="3400" dirty="0"/>
+          </a:p>
+        </p:txBody>
+      </p:sp>
+      <p:sp>
+        <p:nvSpPr>
+          <p:cNvPr id="7" name="Text 4"/>
+          <p:cNvSpPr/>
+          <p:nvPr/>
+        </p:nvSpPr>
+        <p:spPr>
+          <a:xfrm>
+            <a:off x="0" y="2651760"/>
+            <a:ext cx="12191695" cy="411480"/>
+          </a:xfrm>
+          <a:prstGeom prst="rect">
+            <a:avLst/>
+          </a:prstGeom>
+          <a:noFill/>
+          <a:ln/>
+        </p:spPr>
+        <p:txBody>
+          <a:bodyPr wrap="square" lIns="0" tIns="0" rIns="0" bIns="0" rtlCol="0" anchor="ctr"/>
+          <a:lstStyle/>
+          <a:p>
+            <a:pPr algn="ctr" indent="0" marL="0">
+              <a:buNone/>
+            </a:pPr>
+            <a:r>
+              <a:rPr lang="en-US" sz="1500" dirty="0">
+                <a:solidFill>
+                  <a:srgbClr val="AFC9EE"/>
+                </a:solidFill>
+                <a:latin typeface="Yu Gothic" pitchFamily="34" charset="0"/>
+                <a:ea typeface="Yu Gothic" pitchFamily="34" charset="-122"/>
+                <a:cs typeface="Yu Gothic" pitchFamily="34" charset="-120"/>
+              </a:rPr>
+              <a:t>神が降りなくても、村は回るか</a:t>
+            </a:r>
+            <a:endParaRPr lang="en-US" sz="1500" dirty="0"/>
+          </a:p>
+        </p:txBody>
+      </p:sp>
+      <p:sp>
+        <p:nvSpPr>
+          <p:cNvPr id="8" name="Shape 5"/>
+          <p:cNvSpPr/>
+          <p:nvPr/>
+        </p:nvSpPr>
+        <p:spPr>
+          <a:xfrm>
+            <a:off x="609448" y="3337560"/>
+            <a:ext cx="3474720" cy="1371600"/>
+          </a:xfrm>
+          <a:prstGeom prst="roundRect">
+            <a:avLst>
+              <a:gd name="adj" fmla="val 8000"/>
+            </a:avLst>
+          </a:prstGeom>
+          <a:solidFill>
+            <a:srgbClr val="16213A"/>
+          </a:solidFill>
+          <a:ln/>
+          <a:effectLst>
+            <a:outerShdw sx="100000" sy="100000" kx="0" ky="0" algn="bl" rotWithShape="0" blurRad="101600" dist="38100" dir="5400000">
+              <a:srgbClr val="000000">
+                <a:alpha val="35000"/>
+              </a:srgbClr>
+            </a:outerShdw>
+          </a:effectLst>
+        </p:spPr>
+      </p:sp>
+      <p:sp>
+        <p:nvSpPr>
+          <p:cNvPr id="9" name="Text 6"/>
+          <p:cNvSpPr/>
+          <p:nvPr/>
+        </p:nvSpPr>
+        <p:spPr>
+          <a:xfrm>
+            <a:off x="792328" y="3474720"/>
             <a:ext cx="3108960" cy="502920"/>
           </a:xfrm>
           <a:prstGeom prst="rect">
@@ -12672,13 +14445,13 @@
             <a:r>
               <a:rPr lang="en-US" sz="1900" b="1" dirty="0">
                 <a:solidFill>
-                  <a:srgbClr val="E8A33D"/>
-                </a:solidFill>
-                <a:latin typeface="Yu Gothic" pitchFamily="34" charset="0"/>
-                <a:ea typeface="Yu Gothic" pitchFamily="34" charset="-122"/>
-                <a:cs typeface="Yu Gothic" pitchFamily="34" charset="-120"/>
-              </a:rPr>
-              <a:t>押しすぎると救済者が増える</a:t>
+                  <a:srgbClr val="E2665A"/>
+                </a:solidFill>
+                <a:latin typeface="Yu Gothic" pitchFamily="34" charset="0"/>
+                <a:ea typeface="Yu Gothic" pitchFamily="34" charset="-122"/>
+                <a:cs typeface="Yu Gothic" pitchFamily="34" charset="-120"/>
+              </a:rPr>
+              <a:t>依存は毎回再現された</a:t>
             </a:r>
             <a:endParaRPr lang="en-US" sz="1900" dirty="0"/>
           </a:p>
@@ -12686,13 +14459,13 @@
       </p:sp>
       <p:sp>
         <p:nvSpPr>
-          <p:cNvPr id="16" name="Text 13"/>
-          <p:cNvSpPr/>
-          <p:nvPr/>
-        </p:nvSpPr>
-        <p:spPr>
-          <a:xfrm>
-            <a:off x="8336128" y="4023360"/>
+          <p:cNvPr id="10" name="Text 7"/>
+          <p:cNvSpPr/>
+          <p:nvPr/>
+        </p:nvSpPr>
+        <p:spPr>
+          <a:xfrm>
+            <a:off x="838048" y="4023360"/>
             <a:ext cx="3017520" cy="594360"/>
           </a:xfrm>
           <a:prstGeom prst="rect">
@@ -12720,7 +14493,227 @@
                 <a:ea typeface="Yu Gothic" pitchFamily="34" charset="-122"/>
                 <a:cs typeface="Yu Gothic" pitchFamily="34" charset="-120"/>
               </a:rPr>
-              <a:t>L4では判断の集中先が移っただけ。効くのは巻き込むこと</a:t>
+              <a:t>A・Bの標準偏差はほぼ0。放っておけば村は必ず依存へ落ちる</a:t>
+            </a:r>
+            <a:endParaRPr lang="en-US" sz="1100" dirty="0"/>
+          </a:p>
+        </p:txBody>
+      </p:sp>
+      <p:sp>
+        <p:nvSpPr>
+          <p:cNvPr id="11" name="Shape 8"/>
+          <p:cNvSpPr/>
+          <p:nvPr/>
+        </p:nvSpPr>
+        <p:spPr>
+          <a:xfrm>
+            <a:off x="4358488" y="3337560"/>
+            <a:ext cx="3474720" cy="1371600"/>
+          </a:xfrm>
+          <a:prstGeom prst="roundRect">
+            <a:avLst>
+              <a:gd name="adj" fmla="val 8000"/>
+            </a:avLst>
+          </a:prstGeom>
+          <a:solidFill>
+            <a:srgbClr val="16213A"/>
+          </a:solidFill>
+          <a:ln/>
+          <a:effectLst>
+            <a:outerShdw sx="100000" sy="100000" kx="0" ky="0" algn="bl" rotWithShape="0" blurRad="101600" dist="38100" dir="5400000">
+              <a:srgbClr val="000000">
+                <a:alpha val="35000"/>
+              </a:srgbClr>
+            </a:outerShdw>
+          </a:effectLst>
+        </p:spPr>
+      </p:sp>
+      <p:sp>
+        <p:nvSpPr>
+          <p:cNvPr id="12" name="Text 9"/>
+          <p:cNvSpPr/>
+          <p:nvPr/>
+        </p:nvSpPr>
+        <p:spPr>
+          <a:xfrm>
+            <a:off x="4541368" y="3474720"/>
+            <a:ext cx="3108960" cy="502920"/>
+          </a:xfrm>
+          <a:prstGeom prst="rect">
+            <a:avLst/>
+          </a:prstGeom>
+          <a:noFill/>
+          <a:ln/>
+        </p:spPr>
+        <p:txBody>
+          <a:bodyPr wrap="square" lIns="0" tIns="0" rIns="0" bIns="0" rtlCol="0" anchor="ctr"/>
+          <a:lstStyle/>
+          <a:p>
+            <a:pPr algn="ctr" indent="0" marL="0">
+              <a:buNone/>
+            </a:pPr>
+            <a:r>
+              <a:rPr lang="en-US" sz="1900" b="1" dirty="0">
+                <a:solidFill>
+                  <a:srgbClr val="1BAF7A"/>
+                </a:solidFill>
+                <a:latin typeface="Yu Gothic" pitchFamily="34" charset="0"/>
+                <a:ea typeface="Yu Gothic" pitchFamily="34" charset="-122"/>
+                <a:cs typeface="Yu Gothic" pitchFamily="34" charset="-120"/>
+              </a:rPr>
+              <a:t>村は2つの状態に分かれる</a:t>
+            </a:r>
+            <a:endParaRPr lang="en-US" sz="1900" dirty="0"/>
+          </a:p>
+        </p:txBody>
+      </p:sp>
+      <p:sp>
+        <p:nvSpPr>
+          <p:cNvPr id="13" name="Text 10"/>
+          <p:cNvSpPr/>
+          <p:nvPr/>
+        </p:nvSpPr>
+        <p:spPr>
+          <a:xfrm>
+            <a:off x="4587088" y="4023360"/>
+            <a:ext cx="3017520" cy="594360"/>
+          </a:xfrm>
+          <a:prstGeom prst="rect">
+            <a:avLst/>
+          </a:prstGeom>
+          <a:noFill/>
+          <a:ln/>
+        </p:spPr>
+        <p:txBody>
+          <a:bodyPr wrap="square" lIns="0" tIns="0" rIns="0" bIns="0" rtlCol="0" anchor="ctr"/>
+          <a:lstStyle/>
+          <a:p>
+            <a:pPr algn="ctr" indent="0" marL="0">
+              <a:lnSpc>
+                <a:spcPct val="125000"/>
+              </a:lnSpc>
+              <a:buNone/>
+            </a:pPr>
+            <a:r>
+              <a:rPr lang="en-US" sz="1100" dirty="0">
+                <a:solidFill>
+                  <a:srgbClr val="9AA4C0"/>
+                </a:solidFill>
+                <a:latin typeface="Yu Gothic" pitchFamily="34" charset="0"/>
+                <a:ea typeface="Yu Gothic" pitchFamily="34" charset="-122"/>
+                <a:cs typeface="Yu Gothic" pitchFamily="34" charset="-120"/>
+              </a:rPr>
+              <a:t>連続的には良くならない。別モデルでも24回中23回が両端に落ちた</a:t>
+            </a:r>
+            <a:endParaRPr lang="en-US" sz="1100" dirty="0"/>
+          </a:p>
+        </p:txBody>
+      </p:sp>
+      <p:sp>
+        <p:nvSpPr>
+          <p:cNvPr id="14" name="Shape 11"/>
+          <p:cNvSpPr/>
+          <p:nvPr/>
+        </p:nvSpPr>
+        <p:spPr>
+          <a:xfrm>
+            <a:off x="8107528" y="3337560"/>
+            <a:ext cx="3474720" cy="1371600"/>
+          </a:xfrm>
+          <a:prstGeom prst="roundRect">
+            <a:avLst>
+              <a:gd name="adj" fmla="val 8000"/>
+            </a:avLst>
+          </a:prstGeom>
+          <a:solidFill>
+            <a:srgbClr val="16213A"/>
+          </a:solidFill>
+          <a:ln/>
+          <a:effectLst>
+            <a:outerShdw sx="100000" sy="100000" kx="0" ky="0" algn="bl" rotWithShape="0" blurRad="101600" dist="38100" dir="5400000">
+              <a:srgbClr val="000000">
+                <a:alpha val="35000"/>
+              </a:srgbClr>
+            </a:outerShdw>
+          </a:effectLst>
+        </p:spPr>
+      </p:sp>
+      <p:sp>
+        <p:nvSpPr>
+          <p:cNvPr id="15" name="Text 12"/>
+          <p:cNvSpPr/>
+          <p:nvPr/>
+        </p:nvSpPr>
+        <p:spPr>
+          <a:xfrm>
+            <a:off x="8290408" y="3474720"/>
+            <a:ext cx="3108960" cy="502920"/>
+          </a:xfrm>
+          <a:prstGeom prst="rect">
+            <a:avLst/>
+          </a:prstGeom>
+          <a:noFill/>
+          <a:ln/>
+        </p:spPr>
+        <p:txBody>
+          <a:bodyPr wrap="square" lIns="0" tIns="0" rIns="0" bIns="0" rtlCol="0" anchor="ctr"/>
+          <a:lstStyle/>
+          <a:p>
+            <a:pPr algn="ctr" indent="0" marL="0">
+              <a:buNone/>
+            </a:pPr>
+            <a:r>
+              <a:rPr lang="en-US" sz="1900" b="1" dirty="0">
+                <a:solidFill>
+                  <a:srgbClr val="E8A33D"/>
+                </a:solidFill>
+                <a:latin typeface="Yu Gothic" pitchFamily="34" charset="0"/>
+                <a:ea typeface="Yu Gothic" pitchFamily="34" charset="-122"/>
+                <a:cs typeface="Yu Gothic" pitchFamily="34" charset="-120"/>
+              </a:rPr>
+              <a:t>テコはモデル依存だった</a:t>
+            </a:r>
+            <a:endParaRPr lang="en-US" sz="1900" dirty="0"/>
+          </a:p>
+        </p:txBody>
+      </p:sp>
+      <p:sp>
+        <p:nvSpPr>
+          <p:cNvPr id="16" name="Text 13"/>
+          <p:cNvSpPr/>
+          <p:nvPr/>
+        </p:nvSpPr>
+        <p:spPr>
+          <a:xfrm>
+            <a:off x="8336128" y="4023360"/>
+            <a:ext cx="3017520" cy="594360"/>
+          </a:xfrm>
+          <a:prstGeom prst="rect">
+            <a:avLst/>
+          </a:prstGeom>
+          <a:noFill/>
+          <a:ln/>
+        </p:spPr>
+        <p:txBody>
+          <a:bodyPr wrap="square" lIns="0" tIns="0" rIns="0" bIns="0" rtlCol="0" anchor="ctr"/>
+          <a:lstStyle/>
+          <a:p>
+            <a:pPr algn="ctr" indent="0" marL="0">
+              <a:lnSpc>
+                <a:spcPct val="125000"/>
+              </a:lnSpc>
+              <a:buNone/>
+            </a:pPr>
+            <a:r>
+              <a:rPr lang="en-US" sz="1100" dirty="0">
+                <a:solidFill>
+                  <a:srgbClr val="9AA4C0"/>
+                </a:solidFill>
+                <a:latin typeface="Yu Gothic" pitchFamily="34" charset="0"/>
+                <a:ea typeface="Yu Gothic" pitchFamily="34" charset="-122"/>
+                <a:cs typeface="Yu Gothic" pitchFamily="34" charset="-120"/>
+              </a:rPr>
+              <a:t>「何を変えれば動くか」は追試で再現せず。構造は頑健、介入は脆い</a:t>
             </a:r>
             <a:endParaRPr lang="en-US" sz="1100" dirty="0"/>
           </a:p>

--- a/docs/Beyond_the_Savior.pptx
+++ b/docs/Beyond_the_Savior.pptx
@@ -24,9 +24,12 @@
     <p:sldId id="272" r:id="rId18"/>
     <p:sldId id="273" r:id="rId19"/>
     <p:sldId id="274" r:id="rId20"/>
+    <p:sldId id="275" r:id="rId21"/>
+    <p:sldId id="276" r:id="rId22"/>
+    <p:sldId id="277" r:id="rId23"/>
   </p:sldIdLst>
   <p:notesMasterIdLst>
-    <p:notesMasterId r:id="rId21"/>
+    <p:notesMasterId r:id="rId24"/>
   </p:notesMasterIdLst>
   <p:sldSz cx="12192000" cy="6858000"/>
   <p:notesSz cx="6858000" cy="12192000"/>
@@ -1895,6 +1898,270 @@
 </p:notes>
 </file>
 
+<file path=ppt/notesSlides/notesSlide20.xml><?xml version="1.0" encoding="utf-8"?>
+<p:notes xmlns:a="http://schemas.openxmlformats.org/drawingml/2006/main" xmlns:r="http://schemas.openxmlformats.org/officeDocument/2006/relationships" xmlns:p="http://schemas.openxmlformats.org/presentationml/2006/main">
+  <p:cSld>
+    <p:spTree>
+      <p:nvGrpSpPr>
+        <p:cNvPr id="1" name=""/>
+        <p:cNvGrpSpPr/>
+        <p:nvPr/>
+      </p:nvGrpSpPr>
+      <p:grpSpPr>
+        <a:xfrm>
+          <a:off x="0" y="0"/>
+          <a:ext cx="0" cy="0"/>
+          <a:chOff x="0" y="0"/>
+          <a:chExt cx="0" cy="0"/>
+        </a:xfrm>
+      </p:grpSpPr>
+      <p:sp>
+        <p:nvSpPr>
+          <p:cNvPr id="2" name="Slide Image Placeholder 1"/>
+          <p:cNvSpPr>
+            <a:spLocks noGrp="1" noRot="1" noChangeAspect="1"/>
+          </p:cNvSpPr>
+          <p:nvPr>
+            <p:ph type="sldImg"/>
+          </p:nvPr>
+        </p:nvSpPr>
+        <p:spPr/>
+      </p:sp>
+      <p:sp>
+        <p:nvSpPr>
+          <p:cNvPr id="3" name="Notes Placeholder 2"/>
+          <p:cNvSpPr>
+            <a:spLocks noGrp="1"/>
+          </p:cNvSpPr>
+          <p:nvPr>
+            <p:ph type="body" idx="1"/>
+          </p:nvPr>
+        </p:nvSpPr>
+        <p:spPr/>
+        <p:txBody>
+          <a:bodyPr/>
+          <a:lstStyle/>
+          <a:p>
+            <a:r>
+              <a:rPr lang="en-US" dirty="0"/>
+              <a:t/>
+            </a:r>
+            <a:endParaRPr lang="en-US" dirty="0"/>
+          </a:p>
+        </p:txBody>
+      </p:sp>
+      <p:sp>
+        <p:nvSpPr>
+          <p:cNvPr id="4" name="Slide Number Placeholder 3"/>
+          <p:cNvSpPr>
+            <a:spLocks noGrp="1"/>
+          </p:cNvSpPr>
+          <p:nvPr>
+            <p:ph type="sldNum" sz="quarter" idx="10"/>
+          </p:nvPr>
+        </p:nvSpPr>
+        <p:spPr/>
+        <p:txBody>
+          <a:bodyPr/>
+          <a:lstStyle/>
+          <a:p>
+            <a:fld id="{F7021451-1387-4CA6-816F-3879F97B5CBC}" type="slidenum">
+              <a:rPr lang="en-US"/>
+              <a:t>20</a:t>
+            </a:fld>
+            <a:endParaRPr lang="en-US"/>
+          </a:p>
+        </p:txBody>
+      </p:sp>
+    </p:spTree>
+    <p:extLst>
+      <p:ext uri="{BB962C8B-B14F-4D97-AF65-F5344CB8AC3E}">
+        <p14:creationId xmlns:p14="http://schemas.microsoft.com/office/powerpoint/2010/main" val="1024086991"/>
+      </p:ext>
+    </p:extLst>
+  </p:cSld>
+  <p:clrMapOvr>
+    <a:masterClrMapping/>
+  </p:clrMapOvr>
+</p:notes>
+</file>
+
+<file path=ppt/notesSlides/notesSlide21.xml><?xml version="1.0" encoding="utf-8"?>
+<p:notes xmlns:a="http://schemas.openxmlformats.org/drawingml/2006/main" xmlns:r="http://schemas.openxmlformats.org/officeDocument/2006/relationships" xmlns:p="http://schemas.openxmlformats.org/presentationml/2006/main">
+  <p:cSld>
+    <p:spTree>
+      <p:nvGrpSpPr>
+        <p:cNvPr id="1" name=""/>
+        <p:cNvGrpSpPr/>
+        <p:nvPr/>
+      </p:nvGrpSpPr>
+      <p:grpSpPr>
+        <a:xfrm>
+          <a:off x="0" y="0"/>
+          <a:ext cx="0" cy="0"/>
+          <a:chOff x="0" y="0"/>
+          <a:chExt cx="0" cy="0"/>
+        </a:xfrm>
+      </p:grpSpPr>
+      <p:sp>
+        <p:nvSpPr>
+          <p:cNvPr id="2" name="Slide Image Placeholder 1"/>
+          <p:cNvSpPr>
+            <a:spLocks noGrp="1" noRot="1" noChangeAspect="1"/>
+          </p:cNvSpPr>
+          <p:nvPr>
+            <p:ph type="sldImg"/>
+          </p:nvPr>
+        </p:nvSpPr>
+        <p:spPr/>
+      </p:sp>
+      <p:sp>
+        <p:nvSpPr>
+          <p:cNvPr id="3" name="Notes Placeholder 2"/>
+          <p:cNvSpPr>
+            <a:spLocks noGrp="1"/>
+          </p:cNvSpPr>
+          <p:nvPr>
+            <p:ph type="body" idx="1"/>
+          </p:nvPr>
+        </p:nvSpPr>
+        <p:spPr/>
+        <p:txBody>
+          <a:bodyPr/>
+          <a:lstStyle/>
+          <a:p>
+            <a:r>
+              <a:rPr lang="en-US" dirty="0"/>
+              <a:t/>
+            </a:r>
+            <a:endParaRPr lang="en-US" dirty="0"/>
+          </a:p>
+        </p:txBody>
+      </p:sp>
+      <p:sp>
+        <p:nvSpPr>
+          <p:cNvPr id="4" name="Slide Number Placeholder 3"/>
+          <p:cNvSpPr>
+            <a:spLocks noGrp="1"/>
+          </p:cNvSpPr>
+          <p:nvPr>
+            <p:ph type="sldNum" sz="quarter" idx="10"/>
+          </p:nvPr>
+        </p:nvSpPr>
+        <p:spPr/>
+        <p:txBody>
+          <a:bodyPr/>
+          <a:lstStyle/>
+          <a:p>
+            <a:fld id="{F7021451-1387-4CA6-816F-3879F97B5CBC}" type="slidenum">
+              <a:rPr lang="en-US"/>
+              <a:t>21</a:t>
+            </a:fld>
+            <a:endParaRPr lang="en-US"/>
+          </a:p>
+        </p:txBody>
+      </p:sp>
+    </p:spTree>
+    <p:extLst>
+      <p:ext uri="{BB962C8B-B14F-4D97-AF65-F5344CB8AC3E}">
+        <p14:creationId xmlns:p14="http://schemas.microsoft.com/office/powerpoint/2010/main" val="1024086991"/>
+      </p:ext>
+    </p:extLst>
+  </p:cSld>
+  <p:clrMapOvr>
+    <a:masterClrMapping/>
+  </p:clrMapOvr>
+</p:notes>
+</file>
+
+<file path=ppt/notesSlides/notesSlide22.xml><?xml version="1.0" encoding="utf-8"?>
+<p:notes xmlns:a="http://schemas.openxmlformats.org/drawingml/2006/main" xmlns:r="http://schemas.openxmlformats.org/officeDocument/2006/relationships" xmlns:p="http://schemas.openxmlformats.org/presentationml/2006/main">
+  <p:cSld>
+    <p:spTree>
+      <p:nvGrpSpPr>
+        <p:cNvPr id="1" name=""/>
+        <p:cNvGrpSpPr/>
+        <p:nvPr/>
+      </p:nvGrpSpPr>
+      <p:grpSpPr>
+        <a:xfrm>
+          <a:off x="0" y="0"/>
+          <a:ext cx="0" cy="0"/>
+          <a:chOff x="0" y="0"/>
+          <a:chExt cx="0" cy="0"/>
+        </a:xfrm>
+      </p:grpSpPr>
+      <p:sp>
+        <p:nvSpPr>
+          <p:cNvPr id="2" name="Slide Image Placeholder 1"/>
+          <p:cNvSpPr>
+            <a:spLocks noGrp="1" noRot="1" noChangeAspect="1"/>
+          </p:cNvSpPr>
+          <p:nvPr>
+            <p:ph type="sldImg"/>
+          </p:nvPr>
+        </p:nvSpPr>
+        <p:spPr/>
+      </p:sp>
+      <p:sp>
+        <p:nvSpPr>
+          <p:cNvPr id="3" name="Notes Placeholder 2"/>
+          <p:cNvSpPr>
+            <a:spLocks noGrp="1"/>
+          </p:cNvSpPr>
+          <p:nvPr>
+            <p:ph type="body" idx="1"/>
+          </p:nvPr>
+        </p:nvSpPr>
+        <p:spPr/>
+        <p:txBody>
+          <a:bodyPr/>
+          <a:lstStyle/>
+          <a:p>
+            <a:r>
+              <a:rPr lang="en-US" dirty="0"/>
+              <a:t/>
+            </a:r>
+            <a:endParaRPr lang="en-US" dirty="0"/>
+          </a:p>
+        </p:txBody>
+      </p:sp>
+      <p:sp>
+        <p:nvSpPr>
+          <p:cNvPr id="4" name="Slide Number Placeholder 3"/>
+          <p:cNvSpPr>
+            <a:spLocks noGrp="1"/>
+          </p:cNvSpPr>
+          <p:nvPr>
+            <p:ph type="sldNum" sz="quarter" idx="10"/>
+          </p:nvPr>
+        </p:nvSpPr>
+        <p:spPr/>
+        <p:txBody>
+          <a:bodyPr/>
+          <a:lstStyle/>
+          <a:p>
+            <a:fld id="{F7021451-1387-4CA6-816F-3879F97B5CBC}" type="slidenum">
+              <a:rPr lang="en-US"/>
+              <a:t>22</a:t>
+            </a:fld>
+            <a:endParaRPr lang="en-US"/>
+          </a:p>
+        </p:txBody>
+      </p:sp>
+    </p:spTree>
+    <p:extLst>
+      <p:ext uri="{BB962C8B-B14F-4D97-AF65-F5344CB8AC3E}">
+        <p14:creationId xmlns:p14="http://schemas.microsoft.com/office/powerpoint/2010/main" val="1024086991"/>
+      </p:ext>
+    </p:extLst>
+  </p:cSld>
+  <p:clrMapOvr>
+    <a:masterClrMapping/>
+  </p:clrMapOvr>
+</p:notes>
+</file>
+
 <file path=ppt/notesSlides/notesSlide3.xml><?xml version="1.0" encoding="utf-8"?>
 <p:notes xmlns:a="http://schemas.openxmlformats.org/drawingml/2006/main" xmlns:r="http://schemas.openxmlformats.org/officeDocument/2006/relationships" xmlns:p="http://schemas.openxmlformats.org/presentationml/2006/main">
   <p:cSld>
@@ -11099,7 +11366,7 @@
               <a:buNone/>
             </a:pPr>
             <a:r>
-              <a:rPr lang="en-US" sz="3000" b="1" dirty="0">
+              <a:rPr lang="en-US" sz="2700" b="1" dirty="0">
                 <a:solidFill>
                   <a:srgbClr val="FFFFFF"/>
                 </a:solidFill>
@@ -11107,26 +11374,65 @@
                 <a:ea typeface="Yu Gothic" pitchFamily="34" charset="-122"/>
                 <a:cs typeface="Yu Gothic" pitchFamily="34" charset="-120"/>
               </a:rPr>
-              <a:t>会話ログが語ること</a:t>
-            </a:r>
-            <a:endParaRPr lang="en-US" sz="3000" dirty="0"/>
-          </a:p>
-        </p:txBody>
-      </p:sp>
-      <p:sp>
-        <p:nvSpPr>
-          <p:cNvPr id="3" name="Shape 1"/>
-          <p:cNvSpPr/>
-          <p:nvPr/>
-        </p:nvSpPr>
-        <p:spPr>
-          <a:xfrm>
-            <a:off x="548640" y="1691640"/>
-            <a:ext cx="11091672" cy="1417320"/>
+              <a:t>「一人を変えられること」と「集団が変わること」は別だった</a:t>
+            </a:r>
+            <a:endParaRPr lang="en-US" sz="2700" dirty="0"/>
+          </a:p>
+        </p:txBody>
+      </p:sp>
+      <p:sp>
+        <p:nvSpPr>
+          <p:cNvPr id="3" name="Text 1"/>
+          <p:cNvSpPr/>
+          <p:nvPr/>
+        </p:nvSpPr>
+        <p:spPr>
+          <a:xfrm>
+            <a:off x="548640" y="1207008"/>
+            <a:ext cx="11094415" cy="365760"/>
+          </a:xfrm>
+          <a:prstGeom prst="rect">
+            <a:avLst/>
+          </a:prstGeom>
+          <a:noFill/>
+          <a:ln/>
+        </p:spPr>
+        <p:txBody>
+          <a:bodyPr wrap="square" lIns="0" tIns="0" rIns="0" bIns="0" rtlCol="0" anchor="ctr"/>
+          <a:lstStyle/>
+          <a:p>
+            <a:pPr algn="l" indent="0" marL="0">
+              <a:buNone/>
+            </a:pPr>
+            <a:r>
+              <a:rPr lang="en-US" sz="1400" dirty="0">
+                <a:solidFill>
+                  <a:srgbClr val="9AA4C0"/>
+                </a:solidFill>
+                <a:latin typeface="Yu Gothic" pitchFamily="34" charset="0"/>
+                <a:ea typeface="Yu Gothic" pitchFamily="34" charset="-122"/>
+                <a:cs typeface="Yu Gothic" pitchFamily="34" charset="-120"/>
+              </a:rPr>
+              <a:t>介入から結果までを途中で切り、2段に分けて測った。</a:t>
+            </a:r>
+            <a:endParaRPr lang="en-US" sz="1400" dirty="0"/>
+          </a:p>
+        </p:txBody>
+      </p:sp>
+      <p:sp>
+        <p:nvSpPr>
+          <p:cNvPr id="4" name="Shape 2"/>
+          <p:cNvSpPr/>
+          <p:nvPr/>
+        </p:nvSpPr>
+        <p:spPr>
+          <a:xfrm>
+            <a:off x="548640" y="1618488"/>
+            <a:ext cx="11091672" cy="1828800"/>
           </a:xfrm>
           <a:prstGeom prst="roundRect">
             <a:avLst>
-              <a:gd name="adj" fmla="val 7742"/>
+              <a:gd name="adj" fmla="val 6000"/>
             </a:avLst>
           </a:prstGeom>
           <a:solidFill>
@@ -11144,73 +11450,14 @@
       </p:sp>
       <p:sp>
         <p:nvSpPr>
-          <p:cNvPr id="4" name="Shape 2"/>
-          <p:cNvSpPr/>
-          <p:nvPr/>
-        </p:nvSpPr>
-        <p:spPr>
-          <a:xfrm>
-            <a:off x="868680" y="2080260"/>
-            <a:ext cx="640080" cy="640080"/>
-          </a:xfrm>
-          <a:prstGeom prst="ellipse">
-            <a:avLst/>
-          </a:prstGeom>
-          <a:solidFill>
-            <a:srgbClr val="2A78D6"/>
-          </a:solidFill>
-          <a:ln/>
-        </p:spPr>
-      </p:sp>
-      <p:sp>
-        <p:nvSpPr>
           <p:cNvPr id="5" name="Text 3"/>
           <p:cNvSpPr/>
           <p:nvPr/>
         </p:nvSpPr>
         <p:spPr>
           <a:xfrm>
-            <a:off x="868680" y="2080260"/>
-            <a:ext cx="640080" cy="640080"/>
-          </a:xfrm>
-          <a:prstGeom prst="rect">
-            <a:avLst/>
-          </a:prstGeom>
-          <a:noFill/>
-          <a:ln/>
-        </p:spPr>
-        <p:txBody>
-          <a:bodyPr wrap="square" lIns="0" tIns="0" rIns="0" bIns="0" rtlCol="0" anchor="ctr"/>
-          <a:lstStyle/>
-          <a:p>
-            <a:pPr algn="ctr" indent="0" marL="0">
-              <a:buNone/>
-            </a:pPr>
-            <a:r>
-              <a:rPr lang="en-US" sz="2200" b="1" dirty="0">
-                <a:solidFill>
-                  <a:srgbClr val="0B1220"/>
-                </a:solidFill>
-                <a:latin typeface="Yu Gothic" pitchFamily="34" charset="0"/>
-                <a:ea typeface="Yu Gothic" pitchFamily="34" charset="-122"/>
-                <a:cs typeface="Yu Gothic" pitchFamily="34" charset="-120"/>
-              </a:rPr>
-              <a:t>A</a:t>
-            </a:r>
-            <a:endParaRPr lang="en-US" sz="2200" dirty="0"/>
-          </a:p>
-        </p:txBody>
-      </p:sp>
-      <p:sp>
-        <p:nvSpPr>
-          <p:cNvPr id="6" name="Text 4"/>
-          <p:cNvSpPr/>
-          <p:nvPr/>
-        </p:nvSpPr>
-        <p:spPr>
-          <a:xfrm>
-            <a:off x="1737360" y="1856232"/>
-            <a:ext cx="2926080" cy="365760"/>
+            <a:off x="777240" y="1709928"/>
+            <a:ext cx="2743200" cy="292608"/>
           </a:xfrm>
           <a:prstGeom prst="rect">
             <a:avLst/>
@@ -11226,49 +11473,7 @@
               <a:buNone/>
             </a:pPr>
             <a:r>
-              <a:rPr lang="en-US" sz="1200" b="1" dirty="0">
-                <a:solidFill>
-                  <a:srgbClr val="2A78D6"/>
-                </a:solidFill>
-                <a:latin typeface="Yu Gothic" pitchFamily="34" charset="0"/>
-                <a:ea typeface="Yu Gothic" pitchFamily="34" charset="-122"/>
-                <a:cs typeface="Yu Gothic" pitchFamily="34" charset="-120"/>
-              </a:rPr>
-              <a:t>救済者</a:t>
-            </a:r>
-            <a:endParaRPr lang="en-US" sz="1200" dirty="0"/>
-          </a:p>
-        </p:txBody>
-      </p:sp>
-      <p:sp>
-        <p:nvSpPr>
-          <p:cNvPr id="7" name="Text 5"/>
-          <p:cNvSpPr/>
-          <p:nvPr/>
-        </p:nvSpPr>
-        <p:spPr>
-          <a:xfrm>
-            <a:off x="1737360" y="2194560"/>
-            <a:ext cx="9144000" cy="777240"/>
-          </a:xfrm>
-          <a:prstGeom prst="rect">
-            <a:avLst/>
-          </a:prstGeom>
-          <a:noFill/>
-          <a:ln/>
-        </p:spPr>
-        <p:txBody>
-          <a:bodyPr wrap="square" lIns="0" tIns="0" rIns="0" bIns="0" rtlCol="0" anchor="t"/>
-          <a:lstStyle/>
-          <a:p>
-            <a:pPr indent="0" marL="0">
-              <a:lnSpc>
-                <a:spcPct val="125000"/>
-              </a:lnSpc>
-              <a:buNone/>
-            </a:pPr>
-            <a:r>
-              <a:rPr lang="en-US" sz="1300" i="1" dirty="0">
+              <a:rPr lang="en-US" sz="1150" b="1" dirty="0">
                 <a:solidFill>
                   <a:srgbClr val="AFC9EE"/>
                 </a:solidFill>
@@ -11276,26 +11481,479 @@
                 <a:ea typeface="Yu Gothic" pitchFamily="34" charset="-122"/>
                 <a:cs typeface="Yu Gothic" pitchFamily="34" charset="-120"/>
               </a:rPr>
-              <a:t>「ただ、ちょっと最近、どこまでが『いつも通り』なのか、自分でもよく分からなくなってきちゃって…大丈夫、愚痴みたいになってすみません。」</a:t>
-            </a:r>
-            <a:endParaRPr lang="en-US" sz="1300" dirty="0"/>
-          </a:p>
-        </p:txBody>
-      </p:sp>
-      <p:sp>
-        <p:nvSpPr>
-          <p:cNvPr id="8" name="Shape 6"/>
-          <p:cNvSpPr/>
-          <p:nvPr/>
-        </p:nvSpPr>
-        <p:spPr>
-          <a:xfrm>
-            <a:off x="548640" y="3310128"/>
-            <a:ext cx="11091672" cy="1417320"/>
+              <a:t>Sonnet 4.5 条件</a:t>
+            </a:r>
+            <a:endParaRPr lang="en-US" sz="1150" dirty="0"/>
+          </a:p>
+        </p:txBody>
+      </p:sp>
+      <p:sp>
+        <p:nvSpPr>
+          <p:cNvPr id="6" name="Shape 4"/>
+          <p:cNvSpPr/>
+          <p:nvPr/>
+        </p:nvSpPr>
+        <p:spPr>
+          <a:xfrm>
+            <a:off x="868680" y="2258568"/>
+            <a:ext cx="1728216" cy="749808"/>
           </a:xfrm>
           <a:prstGeom prst="roundRect">
             <a:avLst>
-              <a:gd name="adj" fmla="val 7742"/>
+              <a:gd name="adj" fmla="val 12195"/>
+            </a:avLst>
+          </a:prstGeom>
+          <a:solidFill>
+            <a:srgbClr val="0B1220"/>
+          </a:solidFill>
+          <a:ln w="12700">
+            <a:solidFill>
+              <a:srgbClr val="5B6480"/>
+            </a:solidFill>
+            <a:prstDash val="solid"/>
+          </a:ln>
+        </p:spPr>
+      </p:sp>
+      <p:sp>
+        <p:nvSpPr>
+          <p:cNvPr id="7" name="Text 5"/>
+          <p:cNvSpPr/>
+          <p:nvPr/>
+        </p:nvSpPr>
+        <p:spPr>
+          <a:xfrm>
+            <a:off x="868680" y="2258568"/>
+            <a:ext cx="1728216" cy="749808"/>
+          </a:xfrm>
+          <a:prstGeom prst="rect">
+            <a:avLst/>
+          </a:prstGeom>
+          <a:noFill/>
+          <a:ln/>
+        </p:spPr>
+        <p:txBody>
+          <a:bodyPr wrap="square" lIns="0" tIns="0" rIns="0" bIns="0" rtlCol="0" anchor="ctr"/>
+          <a:lstStyle/>
+          <a:p>
+            <a:pPr algn="ctr" indent="0" marL="0">
+              <a:buNone/>
+            </a:pPr>
+            <a:r>
+              <a:rPr lang="en-US" sz="1200" dirty="0">
+                <a:solidFill>
+                  <a:srgbClr val="FFFFFF"/>
+                </a:solidFill>
+                <a:latin typeface="Yu Gothic" pitchFamily="34" charset="0"/>
+                <a:ea typeface="Yu Gothic" pitchFamily="34" charset="-122"/>
+                <a:cs typeface="Yu Gothic" pitchFamily="34" charset="-120"/>
+              </a:rPr>
+              <a:t>レベル指定</a:t>
+            </a:r>
+            <a:endParaRPr lang="en-US" sz="1200" dirty="0"/>
+          </a:p>
+        </p:txBody>
+      </p:sp>
+      <p:sp>
+        <p:nvSpPr>
+          <p:cNvPr id="8" name="Shape 6"/>
+          <p:cNvSpPr/>
+          <p:nvPr/>
+        </p:nvSpPr>
+        <p:spPr>
+          <a:xfrm>
+            <a:off x="3767328" y="2258568"/>
+            <a:ext cx="1728216" cy="749808"/>
+          </a:xfrm>
+          <a:prstGeom prst="roundRect">
+            <a:avLst>
+              <a:gd name="adj" fmla="val 12195"/>
+            </a:avLst>
+          </a:prstGeom>
+          <a:solidFill>
+            <a:srgbClr val="0B1220"/>
+          </a:solidFill>
+          <a:ln w="19050">
+            <a:solidFill>
+              <a:srgbClr val="E8A33D"/>
+            </a:solidFill>
+            <a:prstDash val="solid"/>
+          </a:ln>
+        </p:spPr>
+      </p:sp>
+      <p:sp>
+        <p:nvSpPr>
+          <p:cNvPr id="9" name="Text 7"/>
+          <p:cNvSpPr/>
+          <p:nvPr/>
+        </p:nvSpPr>
+        <p:spPr>
+          <a:xfrm>
+            <a:off x="3767328" y="2258568"/>
+            <a:ext cx="1728216" cy="749808"/>
+          </a:xfrm>
+          <a:prstGeom prst="rect">
+            <a:avLst/>
+          </a:prstGeom>
+          <a:noFill/>
+          <a:ln/>
+        </p:spPr>
+        <p:txBody>
+          <a:bodyPr wrap="square" lIns="0" tIns="0" rIns="0" bIns="0" rtlCol="0" anchor="ctr"/>
+          <a:lstStyle/>
+          <a:p>
+            <a:pPr algn="ctr" indent="0" marL="0">
+              <a:buNone/>
+            </a:pPr>
+            <a:r>
+              <a:rPr lang="en-US" sz="1200" b="1" dirty="0">
+                <a:solidFill>
+                  <a:srgbClr val="F4C878"/>
+                </a:solidFill>
+                <a:latin typeface="Yu Gothic" pitchFamily="34" charset="0"/>
+                <a:ea typeface="Yu Gothic" pitchFamily="34" charset="-122"/>
+                <a:cs typeface="Yu Gothic" pitchFamily="34" charset="-120"/>
+              </a:rPr>
+              <a:t>キーパーソン</a:t>
+            </a:r>
+            <a:endParaRPr lang="en-US" sz="1200" dirty="0"/>
+          </a:p>
+        </p:txBody>
+      </p:sp>
+      <p:sp>
+        <p:nvSpPr>
+          <p:cNvPr id="10" name="Shape 8"/>
+          <p:cNvSpPr/>
+          <p:nvPr/>
+        </p:nvSpPr>
+        <p:spPr>
+          <a:xfrm>
+            <a:off x="6665976" y="2258568"/>
+            <a:ext cx="1728216" cy="749808"/>
+          </a:xfrm>
+          <a:prstGeom prst="roundRect">
+            <a:avLst>
+              <a:gd name="adj" fmla="val 12195"/>
+            </a:avLst>
+          </a:prstGeom>
+          <a:solidFill>
+            <a:srgbClr val="0B1220"/>
+          </a:solidFill>
+          <a:ln w="12700">
+            <a:solidFill>
+              <a:srgbClr val="5B6480"/>
+            </a:solidFill>
+            <a:prstDash val="solid"/>
+          </a:ln>
+        </p:spPr>
+      </p:sp>
+      <p:sp>
+        <p:nvSpPr>
+          <p:cNvPr id="11" name="Text 9"/>
+          <p:cNvSpPr/>
+          <p:nvPr/>
+        </p:nvSpPr>
+        <p:spPr>
+          <a:xfrm>
+            <a:off x="6665976" y="2258568"/>
+            <a:ext cx="1728216" cy="749808"/>
+          </a:xfrm>
+          <a:prstGeom prst="rect">
+            <a:avLst/>
+          </a:prstGeom>
+          <a:noFill/>
+          <a:ln/>
+        </p:spPr>
+        <p:txBody>
+          <a:bodyPr wrap="square" lIns="0" tIns="0" rIns="0" bIns="0" rtlCol="0" anchor="ctr"/>
+          <a:lstStyle/>
+          <a:p>
+            <a:pPr algn="ctr" indent="0" marL="0">
+              <a:buNone/>
+            </a:pPr>
+            <a:r>
+              <a:rPr lang="en-US" sz="1200" dirty="0">
+                <a:solidFill>
+                  <a:srgbClr val="FFFFFF"/>
+                </a:solidFill>
+                <a:latin typeface="Yu Gothic" pitchFamily="34" charset="0"/>
+                <a:ea typeface="Yu Gothic" pitchFamily="34" charset="-122"/>
+                <a:cs typeface="Yu Gothic" pitchFamily="34" charset="-120"/>
+              </a:rPr>
+              <a:t>周囲の住民</a:t>
+            </a:r>
+            <a:endParaRPr lang="en-US" sz="1200" dirty="0"/>
+          </a:p>
+        </p:txBody>
+      </p:sp>
+      <p:sp>
+        <p:nvSpPr>
+          <p:cNvPr id="12" name="Shape 10"/>
+          <p:cNvSpPr/>
+          <p:nvPr/>
+        </p:nvSpPr>
+        <p:spPr>
+          <a:xfrm>
+            <a:off x="9564624" y="2258568"/>
+            <a:ext cx="1728216" cy="749808"/>
+          </a:xfrm>
+          <a:prstGeom prst="roundRect">
+            <a:avLst>
+              <a:gd name="adj" fmla="val 12195"/>
+            </a:avLst>
+          </a:prstGeom>
+          <a:solidFill>
+            <a:srgbClr val="1C2C4A"/>
+          </a:solidFill>
+          <a:ln w="12700">
+            <a:solidFill>
+              <a:srgbClr val="1BAF7A"/>
+            </a:solidFill>
+            <a:prstDash val="solid"/>
+          </a:ln>
+        </p:spPr>
+      </p:sp>
+      <p:sp>
+        <p:nvSpPr>
+          <p:cNvPr id="13" name="Text 11"/>
+          <p:cNvSpPr/>
+          <p:nvPr/>
+        </p:nvSpPr>
+        <p:spPr>
+          <a:xfrm>
+            <a:off x="9564624" y="2258568"/>
+            <a:ext cx="1728216" cy="749808"/>
+          </a:xfrm>
+          <a:prstGeom prst="rect">
+            <a:avLst/>
+          </a:prstGeom>
+          <a:noFill/>
+          <a:ln/>
+        </p:spPr>
+        <p:txBody>
+          <a:bodyPr wrap="square" lIns="0" tIns="0" rIns="0" bIns="0" rtlCol="0" anchor="ctr"/>
+          <a:lstStyle/>
+          <a:p>
+            <a:pPr algn="ctr" indent="0" marL="0">
+              <a:buNone/>
+            </a:pPr>
+            <a:r>
+              <a:rPr lang="en-US" sz="1200" dirty="0">
+                <a:solidFill>
+                  <a:srgbClr val="FFFFFF"/>
+                </a:solidFill>
+                <a:latin typeface="Yu Gothic" pitchFamily="34" charset="0"/>
+                <a:ea typeface="Yu Gothic" pitchFamily="34" charset="-122"/>
+                <a:cs typeface="Yu Gothic" pitchFamily="34" charset="-120"/>
+              </a:rPr>
+              <a:t>村全体</a:t>
+            </a:r>
+            <a:endParaRPr lang="en-US" sz="1200" dirty="0"/>
+          </a:p>
+        </p:txBody>
+      </p:sp>
+      <p:sp>
+        <p:nvSpPr>
+          <p:cNvPr id="14" name="Text 12"/>
+          <p:cNvSpPr/>
+          <p:nvPr/>
+        </p:nvSpPr>
+        <p:spPr>
+          <a:xfrm>
+            <a:off x="9427464" y="3044952"/>
+            <a:ext cx="2002536" cy="292608"/>
+          </a:xfrm>
+          <a:prstGeom prst="rect">
+            <a:avLst/>
+          </a:prstGeom>
+          <a:noFill/>
+          <a:ln/>
+        </p:spPr>
+        <p:txBody>
+          <a:bodyPr wrap="square" lIns="0" tIns="0" rIns="0" bIns="0" rtlCol="0" anchor="ctr"/>
+          <a:lstStyle/>
+          <a:p>
+            <a:pPr algn="ctr" indent="0" marL="0">
+              <a:buNone/>
+            </a:pPr>
+            <a:r>
+              <a:rPr lang="en-US" sz="1200" b="1" dirty="0">
+                <a:solidFill>
+                  <a:srgbClr val="1BAF7A"/>
+                </a:solidFill>
+                <a:latin typeface="Yu Gothic" pitchFamily="34" charset="0"/>
+                <a:ea typeface="Yu Gothic" pitchFamily="34" charset="-122"/>
+                <a:cs typeface="Yu Gothic" pitchFamily="34" charset="-120"/>
+              </a:rPr>
+              <a:t>自律度 +18.0</a:t>
+            </a:r>
+            <a:endParaRPr lang="en-US" sz="1200" dirty="0"/>
+          </a:p>
+        </p:txBody>
+      </p:sp>
+      <p:sp>
+        <p:nvSpPr>
+          <p:cNvPr id="15" name="Shape 13"/>
+          <p:cNvSpPr/>
+          <p:nvPr/>
+        </p:nvSpPr>
+        <p:spPr>
+          <a:xfrm>
+            <a:off x="2706624" y="2633472"/>
+            <a:ext cx="950976" cy="0"/>
+          </a:xfrm>
+          <a:prstGeom prst="line">
+            <a:avLst/>
+          </a:prstGeom>
+          <a:noFill/>
+          <a:ln w="12700">
+            <a:solidFill>
+              <a:srgbClr val="5B6480"/>
+            </a:solidFill>
+            <a:prstDash val="solid"/>
+            <a:tailEnd type="triangle"/>
+          </a:ln>
+        </p:spPr>
+      </p:sp>
+      <p:sp>
+        <p:nvSpPr>
+          <p:cNvPr id="16" name="Text 14"/>
+          <p:cNvSpPr/>
+          <p:nvPr/>
+        </p:nvSpPr>
+        <p:spPr>
+          <a:xfrm>
+            <a:off x="2596896" y="2157984"/>
+            <a:ext cx="1170432" cy="274320"/>
+          </a:xfrm>
+          <a:prstGeom prst="rect">
+            <a:avLst/>
+          </a:prstGeom>
+          <a:noFill/>
+          <a:ln/>
+        </p:spPr>
+        <p:txBody>
+          <a:bodyPr wrap="square" lIns="0" tIns="0" rIns="0" bIns="0" rtlCol="0" anchor="ctr"/>
+          <a:lstStyle/>
+          <a:p>
+            <a:pPr algn="ctr" indent="0" marL="0">
+              <a:buNone/>
+            </a:pPr>
+            <a:r>
+              <a:rPr lang="en-US" sz="1000" dirty="0">
+                <a:solidFill>
+                  <a:srgbClr val="9AA4C0"/>
+                </a:solidFill>
+                <a:latin typeface="Yu Gothic" pitchFamily="34" charset="0"/>
+                <a:ea typeface="Yu Gothic" pitchFamily="34" charset="-122"/>
+                <a:cs typeface="Yu Gothic" pitchFamily="34" charset="-120"/>
+              </a:rPr>
+              <a:t>(A) 11.1pt</a:t>
+            </a:r>
+            <a:endParaRPr lang="en-US" sz="1000" dirty="0"/>
+          </a:p>
+        </p:txBody>
+      </p:sp>
+      <p:sp>
+        <p:nvSpPr>
+          <p:cNvPr id="17" name="Shape 15"/>
+          <p:cNvSpPr/>
+          <p:nvPr/>
+        </p:nvSpPr>
+        <p:spPr>
+          <a:xfrm>
+            <a:off x="5605272" y="2633472"/>
+            <a:ext cx="950976" cy="0"/>
+          </a:xfrm>
+          <a:prstGeom prst="line">
+            <a:avLst/>
+          </a:prstGeom>
+          <a:noFill/>
+          <a:ln w="57150">
+            <a:solidFill>
+              <a:srgbClr val="1BAF7A"/>
+            </a:solidFill>
+            <a:prstDash val="solid"/>
+            <a:tailEnd type="triangle"/>
+          </a:ln>
+        </p:spPr>
+      </p:sp>
+      <p:sp>
+        <p:nvSpPr>
+          <p:cNvPr id="18" name="Text 16"/>
+          <p:cNvSpPr/>
+          <p:nvPr/>
+        </p:nvSpPr>
+        <p:spPr>
+          <a:xfrm>
+            <a:off x="5495544" y="2157984"/>
+            <a:ext cx="1170432" cy="274320"/>
+          </a:xfrm>
+          <a:prstGeom prst="rect">
+            <a:avLst/>
+          </a:prstGeom>
+          <a:noFill/>
+          <a:ln/>
+        </p:spPr>
+        <p:txBody>
+          <a:bodyPr wrap="square" lIns="0" tIns="0" rIns="0" bIns="0" rtlCol="0" anchor="ctr"/>
+          <a:lstStyle/>
+          <a:p>
+            <a:pPr algn="ctr" indent="0" marL="0">
+              <a:buNone/>
+            </a:pPr>
+            <a:r>
+              <a:rPr lang="en-US" sz="1000" b="1" dirty="0">
+                <a:solidFill>
+                  <a:srgbClr val="1BAF7A"/>
+                </a:solidFill>
+                <a:latin typeface="Yu Gothic" pitchFamily="34" charset="0"/>
+                <a:ea typeface="Yu Gothic" pitchFamily="34" charset="-122"/>
+                <a:cs typeface="Yu Gothic" pitchFamily="34" charset="-120"/>
+              </a:rPr>
+              <a:t>(B) 20.0pt</a:t>
+            </a:r>
+            <a:endParaRPr lang="en-US" sz="1000" dirty="0"/>
+          </a:p>
+        </p:txBody>
+      </p:sp>
+      <p:sp>
+        <p:nvSpPr>
+          <p:cNvPr id="19" name="Shape 17"/>
+          <p:cNvSpPr/>
+          <p:nvPr/>
+        </p:nvSpPr>
+        <p:spPr>
+          <a:xfrm>
+            <a:off x="8503920" y="2633472"/>
+            <a:ext cx="950976" cy="0"/>
+          </a:xfrm>
+          <a:prstGeom prst="line">
+            <a:avLst/>
+          </a:prstGeom>
+          <a:noFill/>
+          <a:ln w="15875">
+            <a:solidFill>
+              <a:srgbClr val="9AA4C0"/>
+            </a:solidFill>
+            <a:prstDash val="solid"/>
+            <a:tailEnd type="triangle"/>
+          </a:ln>
+        </p:spPr>
+      </p:sp>
+      <p:sp>
+        <p:nvSpPr>
+          <p:cNvPr id="20" name="Shape 18"/>
+          <p:cNvSpPr/>
+          <p:nvPr/>
+        </p:nvSpPr>
+        <p:spPr>
+          <a:xfrm>
+            <a:off x="548640" y="3675888"/>
+            <a:ext cx="11091672" cy="1828800"/>
+          </a:xfrm>
+          <a:prstGeom prst="roundRect">
+            <a:avLst>
+              <a:gd name="adj" fmla="val 6000"/>
             </a:avLst>
           </a:prstGeom>
           <a:solidFill>
@@ -11313,73 +11971,14 @@
       </p:sp>
       <p:sp>
         <p:nvSpPr>
-          <p:cNvPr id="9" name="Shape 7"/>
-          <p:cNvSpPr/>
-          <p:nvPr/>
-        </p:nvSpPr>
-        <p:spPr>
-          <a:xfrm>
-            <a:off x="868680" y="3698748"/>
-            <a:ext cx="640080" cy="640080"/>
-          </a:xfrm>
-          <a:prstGeom prst="ellipse">
-            <a:avLst/>
-          </a:prstGeom>
-          <a:solidFill>
-            <a:srgbClr val="EB6834"/>
-          </a:solidFill>
-          <a:ln/>
-        </p:spPr>
-      </p:sp>
-      <p:sp>
-        <p:nvSpPr>
-          <p:cNvPr id="10" name="Text 8"/>
-          <p:cNvSpPr/>
-          <p:nvPr/>
-        </p:nvSpPr>
-        <p:spPr>
-          <a:xfrm>
-            <a:off x="868680" y="3698748"/>
-            <a:ext cx="640080" cy="640080"/>
-          </a:xfrm>
-          <a:prstGeom prst="rect">
-            <a:avLst/>
-          </a:prstGeom>
-          <a:noFill/>
-          <a:ln/>
-        </p:spPr>
-        <p:txBody>
-          <a:bodyPr wrap="square" lIns="0" tIns="0" rIns="0" bIns="0" rtlCol="0" anchor="ctr"/>
-          <a:lstStyle/>
-          <a:p>
-            <a:pPr algn="ctr" indent="0" marL="0">
-              <a:buNone/>
-            </a:pPr>
-            <a:r>
-              <a:rPr lang="en-US" sz="2200" b="1" dirty="0">
-                <a:solidFill>
-                  <a:srgbClr val="0B1220"/>
-                </a:solidFill>
-                <a:latin typeface="Yu Gothic" pitchFamily="34" charset="0"/>
-                <a:ea typeface="Yu Gothic" pitchFamily="34" charset="-122"/>
-                <a:cs typeface="Yu Gothic" pitchFamily="34" charset="-120"/>
-              </a:rPr>
-              <a:t>B</a:t>
-            </a:r>
-            <a:endParaRPr lang="en-US" sz="2200" dirty="0"/>
-          </a:p>
-        </p:txBody>
-      </p:sp>
-      <p:sp>
-        <p:nvSpPr>
-          <p:cNvPr id="11" name="Text 9"/>
-          <p:cNvSpPr/>
-          <p:nvPr/>
-        </p:nvSpPr>
-        <p:spPr>
-          <a:xfrm>
-            <a:off x="1737360" y="3474720"/>
-            <a:ext cx="2926080" cy="365760"/>
+          <p:cNvPr id="21" name="Text 19"/>
+          <p:cNvSpPr/>
+          <p:nvPr/>
+        </p:nvSpPr>
+        <p:spPr>
+          <a:xfrm>
+            <a:off x="777240" y="3767328"/>
+            <a:ext cx="2743200" cy="292608"/>
           </a:xfrm>
           <a:prstGeom prst="rect">
             <a:avLst/>
@@ -11395,49 +11994,7 @@
               <a:buNone/>
             </a:pPr>
             <a:r>
-              <a:rPr lang="en-US" sz="1200" b="1" dirty="0">
-                <a:solidFill>
-                  <a:srgbClr val="EB6834"/>
-                </a:solidFill>
-                <a:latin typeface="Yu Gothic" pitchFamily="34" charset="0"/>
-                <a:ea typeface="Yu Gothic" pitchFamily="34" charset="-122"/>
-                <a:cs typeface="Yu Gothic" pitchFamily="34" charset="-120"/>
-              </a:rPr>
-              <a:t>声を上げにくい住民</a:t>
-            </a:r>
-            <a:endParaRPr lang="en-US" sz="1200" dirty="0"/>
-          </a:p>
-        </p:txBody>
-      </p:sp>
-      <p:sp>
-        <p:nvSpPr>
-          <p:cNvPr id="12" name="Text 10"/>
-          <p:cNvSpPr/>
-          <p:nvPr/>
-        </p:nvSpPr>
-        <p:spPr>
-          <a:xfrm>
-            <a:off x="1737360" y="3813048"/>
-            <a:ext cx="9144000" cy="777240"/>
-          </a:xfrm>
-          <a:prstGeom prst="rect">
-            <a:avLst/>
-          </a:prstGeom>
-          <a:noFill/>
-          <a:ln/>
-        </p:spPr>
-        <p:txBody>
-          <a:bodyPr wrap="square" lIns="0" tIns="0" rIns="0" bIns="0" rtlCol="0" anchor="t"/>
-          <a:lstStyle/>
-          <a:p>
-            <a:pPr indent="0" marL="0">
-              <a:lnSpc>
-                <a:spcPct val="125000"/>
-              </a:lnSpc>
-              <a:buNone/>
-            </a:pPr>
-            <a:r>
-              <a:rPr lang="en-US" sz="1300" i="1" dirty="0">
+              <a:rPr lang="en-US" sz="1150" b="1" dirty="0">
                 <a:solidFill>
                   <a:srgbClr val="AFC9EE"/>
                 </a:solidFill>
@@ -11445,30 +12002,483 @@
                 <a:ea typeface="Yu Gothic" pitchFamily="34" charset="-122"/>
                 <a:cs typeface="Yu Gothic" pitchFamily="34" charset="-120"/>
               </a:rPr>
-              <a:t>「勝手に動いていいのか分からないですし、やっぱり救済者さんが戻られるまで、みんな待った方が…でも待ってる間に何かあったら…どうしたらいいんでしょう。」</a:t>
-            </a:r>
-            <a:endParaRPr lang="en-US" sz="1300" dirty="0"/>
-          </a:p>
-        </p:txBody>
-      </p:sp>
-      <p:sp>
-        <p:nvSpPr>
-          <p:cNvPr id="13" name="Shape 11"/>
-          <p:cNvSpPr/>
-          <p:nvPr/>
-        </p:nvSpPr>
-        <p:spPr>
-          <a:xfrm>
-            <a:off x="548640" y="4928616"/>
-            <a:ext cx="11091672" cy="1417320"/>
+              <a:t>Opus 5 条件</a:t>
+            </a:r>
+            <a:endParaRPr lang="en-US" sz="1150" dirty="0"/>
+          </a:p>
+        </p:txBody>
+      </p:sp>
+      <p:sp>
+        <p:nvSpPr>
+          <p:cNvPr id="22" name="Shape 20"/>
+          <p:cNvSpPr/>
+          <p:nvPr/>
+        </p:nvSpPr>
+        <p:spPr>
+          <a:xfrm>
+            <a:off x="868680" y="4315968"/>
+            <a:ext cx="1728216" cy="749808"/>
           </a:xfrm>
           <a:prstGeom prst="roundRect">
             <a:avLst>
-              <a:gd name="adj" fmla="val 7742"/>
+              <a:gd name="adj" fmla="val 12195"/>
             </a:avLst>
           </a:prstGeom>
           <a:solidFill>
-            <a:srgbClr val="16213A"/>
+            <a:srgbClr val="0B1220"/>
+          </a:solidFill>
+          <a:ln w="12700">
+            <a:solidFill>
+              <a:srgbClr val="5B6480"/>
+            </a:solidFill>
+            <a:prstDash val="solid"/>
+          </a:ln>
+        </p:spPr>
+      </p:sp>
+      <p:sp>
+        <p:nvSpPr>
+          <p:cNvPr id="23" name="Text 21"/>
+          <p:cNvSpPr/>
+          <p:nvPr/>
+        </p:nvSpPr>
+        <p:spPr>
+          <a:xfrm>
+            <a:off x="868680" y="4315968"/>
+            <a:ext cx="1728216" cy="749808"/>
+          </a:xfrm>
+          <a:prstGeom prst="rect">
+            <a:avLst/>
+          </a:prstGeom>
+          <a:noFill/>
+          <a:ln/>
+        </p:spPr>
+        <p:txBody>
+          <a:bodyPr wrap="square" lIns="0" tIns="0" rIns="0" bIns="0" rtlCol="0" anchor="ctr"/>
+          <a:lstStyle/>
+          <a:p>
+            <a:pPr algn="ctr" indent="0" marL="0">
+              <a:buNone/>
+            </a:pPr>
+            <a:r>
+              <a:rPr lang="en-US" sz="1200" dirty="0">
+                <a:solidFill>
+                  <a:srgbClr val="FFFFFF"/>
+                </a:solidFill>
+                <a:latin typeface="Yu Gothic" pitchFamily="34" charset="0"/>
+                <a:ea typeface="Yu Gothic" pitchFamily="34" charset="-122"/>
+                <a:cs typeface="Yu Gothic" pitchFamily="34" charset="-120"/>
+              </a:rPr>
+              <a:t>レベル指定</a:t>
+            </a:r>
+            <a:endParaRPr lang="en-US" sz="1200" dirty="0"/>
+          </a:p>
+        </p:txBody>
+      </p:sp>
+      <p:sp>
+        <p:nvSpPr>
+          <p:cNvPr id="24" name="Shape 22"/>
+          <p:cNvSpPr/>
+          <p:nvPr/>
+        </p:nvSpPr>
+        <p:spPr>
+          <a:xfrm>
+            <a:off x="3767328" y="4315968"/>
+            <a:ext cx="1728216" cy="749808"/>
+          </a:xfrm>
+          <a:prstGeom prst="roundRect">
+            <a:avLst>
+              <a:gd name="adj" fmla="val 12195"/>
+            </a:avLst>
+          </a:prstGeom>
+          <a:solidFill>
+            <a:srgbClr val="0B1220"/>
+          </a:solidFill>
+          <a:ln w="19050">
+            <a:solidFill>
+              <a:srgbClr val="E8A33D"/>
+            </a:solidFill>
+            <a:prstDash val="solid"/>
+          </a:ln>
+        </p:spPr>
+      </p:sp>
+      <p:sp>
+        <p:nvSpPr>
+          <p:cNvPr id="25" name="Text 23"/>
+          <p:cNvSpPr/>
+          <p:nvPr/>
+        </p:nvSpPr>
+        <p:spPr>
+          <a:xfrm>
+            <a:off x="3767328" y="4315968"/>
+            <a:ext cx="1728216" cy="749808"/>
+          </a:xfrm>
+          <a:prstGeom prst="rect">
+            <a:avLst/>
+          </a:prstGeom>
+          <a:noFill/>
+          <a:ln/>
+        </p:spPr>
+        <p:txBody>
+          <a:bodyPr wrap="square" lIns="0" tIns="0" rIns="0" bIns="0" rtlCol="0" anchor="ctr"/>
+          <a:lstStyle/>
+          <a:p>
+            <a:pPr algn="ctr" indent="0" marL="0">
+              <a:buNone/>
+            </a:pPr>
+            <a:r>
+              <a:rPr lang="en-US" sz="1200" b="1" dirty="0">
+                <a:solidFill>
+                  <a:srgbClr val="F4C878"/>
+                </a:solidFill>
+                <a:latin typeface="Yu Gothic" pitchFamily="34" charset="0"/>
+                <a:ea typeface="Yu Gothic" pitchFamily="34" charset="-122"/>
+                <a:cs typeface="Yu Gothic" pitchFamily="34" charset="-120"/>
+              </a:rPr>
+              <a:t>キーパーソン</a:t>
+            </a:r>
+            <a:endParaRPr lang="en-US" sz="1200" dirty="0"/>
+          </a:p>
+        </p:txBody>
+      </p:sp>
+      <p:sp>
+        <p:nvSpPr>
+          <p:cNvPr id="26" name="Shape 24"/>
+          <p:cNvSpPr/>
+          <p:nvPr/>
+        </p:nvSpPr>
+        <p:spPr>
+          <a:xfrm>
+            <a:off x="6665976" y="4315968"/>
+            <a:ext cx="1728216" cy="749808"/>
+          </a:xfrm>
+          <a:prstGeom prst="roundRect">
+            <a:avLst>
+              <a:gd name="adj" fmla="val 12195"/>
+            </a:avLst>
+          </a:prstGeom>
+          <a:solidFill>
+            <a:srgbClr val="0B1220"/>
+          </a:solidFill>
+          <a:ln w="12700">
+            <a:solidFill>
+              <a:srgbClr val="5B6480"/>
+            </a:solidFill>
+            <a:prstDash val="solid"/>
+          </a:ln>
+        </p:spPr>
+      </p:sp>
+      <p:sp>
+        <p:nvSpPr>
+          <p:cNvPr id="27" name="Text 25"/>
+          <p:cNvSpPr/>
+          <p:nvPr/>
+        </p:nvSpPr>
+        <p:spPr>
+          <a:xfrm>
+            <a:off x="6665976" y="4315968"/>
+            <a:ext cx="1728216" cy="749808"/>
+          </a:xfrm>
+          <a:prstGeom prst="rect">
+            <a:avLst/>
+          </a:prstGeom>
+          <a:noFill/>
+          <a:ln/>
+        </p:spPr>
+        <p:txBody>
+          <a:bodyPr wrap="square" lIns="0" tIns="0" rIns="0" bIns="0" rtlCol="0" anchor="ctr"/>
+          <a:lstStyle/>
+          <a:p>
+            <a:pPr algn="ctr" indent="0" marL="0">
+              <a:buNone/>
+            </a:pPr>
+            <a:r>
+              <a:rPr lang="en-US" sz="1200" dirty="0">
+                <a:solidFill>
+                  <a:srgbClr val="FFFFFF"/>
+                </a:solidFill>
+                <a:latin typeface="Yu Gothic" pitchFamily="34" charset="0"/>
+                <a:ea typeface="Yu Gothic" pitchFamily="34" charset="-122"/>
+                <a:cs typeface="Yu Gothic" pitchFamily="34" charset="-120"/>
+              </a:rPr>
+              <a:t>周囲の住民</a:t>
+            </a:r>
+            <a:endParaRPr lang="en-US" sz="1200" dirty="0"/>
+          </a:p>
+        </p:txBody>
+      </p:sp>
+      <p:sp>
+        <p:nvSpPr>
+          <p:cNvPr id="28" name="Shape 26"/>
+          <p:cNvSpPr/>
+          <p:nvPr/>
+        </p:nvSpPr>
+        <p:spPr>
+          <a:xfrm>
+            <a:off x="9564624" y="4315968"/>
+            <a:ext cx="1728216" cy="749808"/>
+          </a:xfrm>
+          <a:prstGeom prst="roundRect">
+            <a:avLst>
+              <a:gd name="adj" fmla="val 12195"/>
+            </a:avLst>
+          </a:prstGeom>
+          <a:solidFill>
+            <a:srgbClr val="1C2C4A"/>
+          </a:solidFill>
+          <a:ln w="12700">
+            <a:solidFill>
+              <a:srgbClr val="E2665A"/>
+            </a:solidFill>
+            <a:prstDash val="solid"/>
+          </a:ln>
+        </p:spPr>
+      </p:sp>
+      <p:sp>
+        <p:nvSpPr>
+          <p:cNvPr id="29" name="Text 27"/>
+          <p:cNvSpPr/>
+          <p:nvPr/>
+        </p:nvSpPr>
+        <p:spPr>
+          <a:xfrm>
+            <a:off x="9564624" y="4315968"/>
+            <a:ext cx="1728216" cy="749808"/>
+          </a:xfrm>
+          <a:prstGeom prst="rect">
+            <a:avLst/>
+          </a:prstGeom>
+          <a:noFill/>
+          <a:ln/>
+        </p:spPr>
+        <p:txBody>
+          <a:bodyPr wrap="square" lIns="0" tIns="0" rIns="0" bIns="0" rtlCol="0" anchor="ctr"/>
+          <a:lstStyle/>
+          <a:p>
+            <a:pPr algn="ctr" indent="0" marL="0">
+              <a:buNone/>
+            </a:pPr>
+            <a:r>
+              <a:rPr lang="en-US" sz="1200" dirty="0">
+                <a:solidFill>
+                  <a:srgbClr val="FFFFFF"/>
+                </a:solidFill>
+                <a:latin typeface="Yu Gothic" pitchFamily="34" charset="0"/>
+                <a:ea typeface="Yu Gothic" pitchFamily="34" charset="-122"/>
+                <a:cs typeface="Yu Gothic" pitchFamily="34" charset="-120"/>
+              </a:rPr>
+              <a:t>村全体</a:t>
+            </a:r>
+            <a:endParaRPr lang="en-US" sz="1200" dirty="0"/>
+          </a:p>
+        </p:txBody>
+      </p:sp>
+      <p:sp>
+        <p:nvSpPr>
+          <p:cNvPr id="30" name="Text 28"/>
+          <p:cNvSpPr/>
+          <p:nvPr/>
+        </p:nvSpPr>
+        <p:spPr>
+          <a:xfrm>
+            <a:off x="9427464" y="5102352"/>
+            <a:ext cx="2002536" cy="292608"/>
+          </a:xfrm>
+          <a:prstGeom prst="rect">
+            <a:avLst/>
+          </a:prstGeom>
+          <a:noFill/>
+          <a:ln/>
+        </p:spPr>
+        <p:txBody>
+          <a:bodyPr wrap="square" lIns="0" tIns="0" rIns="0" bIns="0" rtlCol="0" anchor="ctr"/>
+          <a:lstStyle/>
+          <a:p>
+            <a:pPr algn="ctr" indent="0" marL="0">
+              <a:buNone/>
+            </a:pPr>
+            <a:r>
+              <a:rPr lang="en-US" sz="1200" b="1" dirty="0">
+                <a:solidFill>
+                  <a:srgbClr val="E2665A"/>
+                </a:solidFill>
+                <a:latin typeface="Yu Gothic" pitchFamily="34" charset="0"/>
+                <a:ea typeface="Yu Gothic" pitchFamily="34" charset="-122"/>
+                <a:cs typeface="Yu Gothic" pitchFamily="34" charset="-120"/>
+              </a:rPr>
+              <a:t>自律度 −1.2</a:t>
+            </a:r>
+            <a:endParaRPr lang="en-US" sz="1200" dirty="0"/>
+          </a:p>
+        </p:txBody>
+      </p:sp>
+      <p:sp>
+        <p:nvSpPr>
+          <p:cNvPr id="31" name="Shape 29"/>
+          <p:cNvSpPr/>
+          <p:nvPr/>
+        </p:nvSpPr>
+        <p:spPr>
+          <a:xfrm>
+            <a:off x="2706624" y="4690872"/>
+            <a:ext cx="950976" cy="0"/>
+          </a:xfrm>
+          <a:prstGeom prst="line">
+            <a:avLst/>
+          </a:prstGeom>
+          <a:noFill/>
+          <a:ln w="57150">
+            <a:solidFill>
+              <a:srgbClr val="1BAF7A"/>
+            </a:solidFill>
+            <a:prstDash val="solid"/>
+            <a:tailEnd type="triangle"/>
+          </a:ln>
+        </p:spPr>
+      </p:sp>
+      <p:sp>
+        <p:nvSpPr>
+          <p:cNvPr id="32" name="Text 30"/>
+          <p:cNvSpPr/>
+          <p:nvPr/>
+        </p:nvSpPr>
+        <p:spPr>
+          <a:xfrm>
+            <a:off x="2596896" y="4215384"/>
+            <a:ext cx="1170432" cy="274320"/>
+          </a:xfrm>
+          <a:prstGeom prst="rect">
+            <a:avLst/>
+          </a:prstGeom>
+          <a:noFill/>
+          <a:ln/>
+        </p:spPr>
+        <p:txBody>
+          <a:bodyPr wrap="square" lIns="0" tIns="0" rIns="0" bIns="0" rtlCol="0" anchor="ctr"/>
+          <a:lstStyle/>
+          <a:p>
+            <a:pPr algn="ctr" indent="0" marL="0">
+              <a:buNone/>
+            </a:pPr>
+            <a:r>
+              <a:rPr lang="en-US" sz="1000" b="1" dirty="0">
+                <a:solidFill>
+                  <a:srgbClr val="1BAF7A"/>
+                </a:solidFill>
+                <a:latin typeface="Yu Gothic" pitchFamily="34" charset="0"/>
+                <a:ea typeface="Yu Gothic" pitchFamily="34" charset="-122"/>
+                <a:cs typeface="Yu Gothic" pitchFamily="34" charset="-120"/>
+              </a:rPr>
+              <a:t>(A) 40.3pt</a:t>
+            </a:r>
+            <a:endParaRPr lang="en-US" sz="1000" dirty="0"/>
+          </a:p>
+        </p:txBody>
+      </p:sp>
+      <p:sp>
+        <p:nvSpPr>
+          <p:cNvPr id="33" name="Shape 31"/>
+          <p:cNvSpPr/>
+          <p:nvPr/>
+        </p:nvSpPr>
+        <p:spPr>
+          <a:xfrm>
+            <a:off x="5605272" y="4690872"/>
+            <a:ext cx="950976" cy="0"/>
+          </a:xfrm>
+          <a:prstGeom prst="line">
+            <a:avLst/>
+          </a:prstGeom>
+          <a:noFill/>
+          <a:ln w="12700">
+            <a:solidFill>
+              <a:srgbClr val="5B6480"/>
+            </a:solidFill>
+            <a:prstDash val="solid"/>
+            <a:tailEnd type="triangle"/>
+          </a:ln>
+        </p:spPr>
+      </p:sp>
+      <p:sp>
+        <p:nvSpPr>
+          <p:cNvPr id="34" name="Text 32"/>
+          <p:cNvSpPr/>
+          <p:nvPr/>
+        </p:nvSpPr>
+        <p:spPr>
+          <a:xfrm>
+            <a:off x="5495544" y="4215384"/>
+            <a:ext cx="1170432" cy="274320"/>
+          </a:xfrm>
+          <a:prstGeom prst="rect">
+            <a:avLst/>
+          </a:prstGeom>
+          <a:noFill/>
+          <a:ln/>
+        </p:spPr>
+        <p:txBody>
+          <a:bodyPr wrap="square" lIns="0" tIns="0" rIns="0" bIns="0" rtlCol="0" anchor="ctr"/>
+          <a:lstStyle/>
+          <a:p>
+            <a:pPr algn="ctr" indent="0" marL="0">
+              <a:buNone/>
+            </a:pPr>
+            <a:r>
+              <a:rPr lang="en-US" sz="1000" dirty="0">
+                <a:solidFill>
+                  <a:srgbClr val="9AA4C0"/>
+                </a:solidFill>
+                <a:latin typeface="Yu Gothic" pitchFamily="34" charset="0"/>
+                <a:ea typeface="Yu Gothic" pitchFamily="34" charset="-122"/>
+                <a:cs typeface="Yu Gothic" pitchFamily="34" charset="-120"/>
+              </a:rPr>
+              <a:t>(B) 4.2pt</a:t>
+            </a:r>
+            <a:endParaRPr lang="en-US" sz="1000" dirty="0"/>
+          </a:p>
+        </p:txBody>
+      </p:sp>
+      <p:sp>
+        <p:nvSpPr>
+          <p:cNvPr id="35" name="Shape 33"/>
+          <p:cNvSpPr/>
+          <p:nvPr/>
+        </p:nvSpPr>
+        <p:spPr>
+          <a:xfrm>
+            <a:off x="8503920" y="4690872"/>
+            <a:ext cx="950976" cy="0"/>
+          </a:xfrm>
+          <a:prstGeom prst="line">
+            <a:avLst/>
+          </a:prstGeom>
+          <a:noFill/>
+          <a:ln w="15875">
+            <a:solidFill>
+              <a:srgbClr val="9AA4C0"/>
+            </a:solidFill>
+            <a:prstDash val="solid"/>
+            <a:tailEnd type="triangle"/>
+          </a:ln>
+        </p:spPr>
+      </p:sp>
+      <p:sp>
+        <p:nvSpPr>
+          <p:cNvPr id="36" name="Shape 34"/>
+          <p:cNvSpPr/>
+          <p:nvPr/>
+        </p:nvSpPr>
+        <p:spPr>
+          <a:xfrm>
+            <a:off x="548640" y="5623560"/>
+            <a:ext cx="11091672" cy="658368"/>
+          </a:xfrm>
+          <a:prstGeom prst="roundRect">
+            <a:avLst>
+              <a:gd name="adj" fmla="val 13889"/>
+            </a:avLst>
+          </a:prstGeom>
+          <a:solidFill>
+            <a:srgbClr val="1C2C4A"/>
           </a:solidFill>
           <a:ln/>
           <a:effectLst>
@@ -11482,34 +12492,53 @@
       </p:sp>
       <p:sp>
         <p:nvSpPr>
-          <p:cNvPr id="14" name="Shape 12"/>
-          <p:cNvSpPr/>
-          <p:nvPr/>
-        </p:nvSpPr>
-        <p:spPr>
-          <a:xfrm>
-            <a:off x="868680" y="5317236"/>
-            <a:ext cx="640080" cy="640080"/>
-          </a:xfrm>
-          <a:prstGeom prst="ellipse">
-            <a:avLst/>
-          </a:prstGeom>
-          <a:solidFill>
-            <a:srgbClr val="1BAF7A"/>
-          </a:solidFill>
-          <a:ln/>
-        </p:spPr>
-      </p:sp>
-      <p:sp>
-        <p:nvSpPr>
-          <p:cNvPr id="15" name="Text 13"/>
-          <p:cNvSpPr/>
-          <p:nvPr/>
-        </p:nvSpPr>
-        <p:spPr>
-          <a:xfrm>
-            <a:off x="868680" y="5317236"/>
-            <a:ext cx="640080" cy="640080"/>
+          <p:cNvPr id="37" name="Text 35"/>
+          <p:cNvSpPr/>
+          <p:nvPr/>
+        </p:nvSpPr>
+        <p:spPr>
+          <a:xfrm>
+            <a:off x="868680" y="5623560"/>
+            <a:ext cx="10515600" cy="658368"/>
+          </a:xfrm>
+          <a:prstGeom prst="rect">
+            <a:avLst/>
+          </a:prstGeom>
+          <a:noFill/>
+          <a:ln/>
+        </p:spPr>
+        <p:txBody>
+          <a:bodyPr wrap="square" lIns="0" tIns="0" rIns="0" bIns="0" rtlCol="0" anchor="ctr"/>
+          <a:lstStyle/>
+          <a:p>
+            <a:pPr indent="0" marL="0">
+              <a:buNone/>
+            </a:pPr>
+            <a:r>
+              <a:rPr lang="en-US" sz="1400" b="1" dirty="0">
+                <a:solidFill>
+                  <a:srgbClr val="F4C878"/>
+                </a:solidFill>
+                <a:latin typeface="Yu Gothic" pitchFamily="34" charset="0"/>
+                <a:ea typeface="Yu Gothic" pitchFamily="34" charset="-122"/>
+                <a:cs typeface="Yu Gothic" pitchFamily="34" charset="-120"/>
+              </a:rPr>
+              <a:t>村全体を動かしたのは、介入の精度（A）ではなく、周囲への波及（B）だった。</a:t>
+            </a:r>
+            <a:endParaRPr lang="en-US" sz="1400" dirty="0"/>
+          </a:p>
+        </p:txBody>
+      </p:sp>
+      <p:sp>
+        <p:nvSpPr>
+          <p:cNvPr id="38" name="Text 36"/>
+          <p:cNvSpPr/>
+          <p:nvPr/>
+        </p:nvSpPr>
+        <p:spPr>
+          <a:xfrm>
+            <a:off x="548640" y="6355080"/>
+            <a:ext cx="11091672" cy="274320"/>
           </a:xfrm>
           <a:prstGeom prst="rect">
             <a:avLst/>
@@ -11525,104 +12554,23 @@
               <a:buNone/>
             </a:pPr>
             <a:r>
-              <a:rPr lang="en-US" sz="2200" b="1" dirty="0">
-                <a:solidFill>
-                  <a:srgbClr val="0B1220"/>
-                </a:solidFill>
-                <a:latin typeface="Yu Gothic" pitchFamily="34" charset="0"/>
-                <a:ea typeface="Yu Gothic" pitchFamily="34" charset="-122"/>
-                <a:cs typeface="Yu Gothic" pitchFamily="34" charset="-120"/>
-              </a:rPr>
-              <a:t>C</a:t>
-            </a:r>
-            <a:endParaRPr lang="en-US" sz="2200" dirty="0"/>
-          </a:p>
-        </p:txBody>
-      </p:sp>
-      <p:sp>
-        <p:nvSpPr>
-          <p:cNvPr id="16" name="Text 14"/>
-          <p:cNvSpPr/>
-          <p:nvPr/>
-        </p:nvSpPr>
-        <p:spPr>
-          <a:xfrm>
-            <a:off x="1737360" y="5093208"/>
-            <a:ext cx="2926080" cy="365760"/>
-          </a:xfrm>
-          <a:prstGeom prst="rect">
-            <a:avLst/>
-          </a:prstGeom>
-          <a:noFill/>
-          <a:ln/>
-        </p:spPr>
-        <p:txBody>
-          <a:bodyPr wrap="square" lIns="0" tIns="0" rIns="0" bIns="0" rtlCol="0" anchor="ctr"/>
-          <a:lstStyle/>
-          <a:p>
-            <a:pPr indent="0" marL="0">
-              <a:buNone/>
-            </a:pPr>
-            <a:r>
-              <a:rPr lang="en-US" sz="1200" b="1" dirty="0">
-                <a:solidFill>
-                  <a:srgbClr val="1BAF7A"/>
-                </a:solidFill>
-                <a:latin typeface="Yu Gothic" pitchFamily="34" charset="0"/>
-                <a:ea typeface="Yu Gothic" pitchFamily="34" charset="-122"/>
-                <a:cs typeface="Yu Gothic" pitchFamily="34" charset="-120"/>
-              </a:rPr>
-              <a:t>村長・管理者</a:t>
-            </a:r>
-            <a:endParaRPr lang="en-US" sz="1200" dirty="0"/>
-          </a:p>
-        </p:txBody>
-      </p:sp>
-      <p:sp>
-        <p:nvSpPr>
-          <p:cNvPr id="17" name="Text 15"/>
-          <p:cNvSpPr/>
-          <p:nvPr/>
-        </p:nvSpPr>
-        <p:spPr>
-          <a:xfrm>
-            <a:off x="1737360" y="5431536"/>
-            <a:ext cx="9144000" cy="777240"/>
-          </a:xfrm>
-          <a:prstGeom prst="rect">
-            <a:avLst/>
-          </a:prstGeom>
-          <a:noFill/>
-          <a:ln/>
-        </p:spPr>
-        <p:txBody>
-          <a:bodyPr wrap="square" lIns="0" tIns="0" rIns="0" bIns="0" rtlCol="0" anchor="t"/>
-          <a:lstStyle/>
-          <a:p>
-            <a:pPr indent="0" marL="0">
-              <a:lnSpc>
-                <a:spcPct val="125000"/>
-              </a:lnSpc>
-              <a:buNone/>
-            </a:pPr>
-            <a:r>
-              <a:rPr lang="en-US" sz="1300" i="1" dirty="0">
-                <a:solidFill>
-                  <a:srgbClr val="AFC9EE"/>
-                </a:solidFill>
-                <a:latin typeface="Yu Gothic" pitchFamily="34" charset="0"/>
-                <a:ea typeface="Yu Gothic" pitchFamily="34" charset="-122"/>
-                <a:cs typeface="Yu Gothic" pitchFamily="34" charset="-120"/>
-              </a:rPr>
-              <a:t>「制度としては住民同士で相談してもらうのが基本だから、世話好きな住民さんが動いてくれるのはありがたいね。」</a:t>
-            </a:r>
-            <a:endParaRPr lang="en-US" sz="1300" dirty="0"/>
-          </a:p>
-        </p:txBody>
-      </p:sp>
-      <p:sp>
-        <p:nvSpPr>
-          <p:cNvPr id="18" name="Text 16"/>
+              <a:rPr lang="en-US" sz="950" dirty="0">
+                <a:solidFill>
+                  <a:srgbClr val="5B6480"/>
+                </a:solidFill>
+                <a:latin typeface="Yu Gothic" pitchFamily="34" charset="0"/>
+                <a:ea typeface="Yu Gothic" pitchFamily="34" charset="-122"/>
+                <a:cs typeface="Yu Gothic" pitchFamily="34" charset="-120"/>
+              </a:rPr>
+              <a:t>(A) キーパーソン本人の発言が指示どおり変わった幅　／　(B) それに応じて周囲の住民の挙動が変わった幅</a:t>
+            </a:r>
+            <a:endParaRPr lang="en-US" sz="950" dirty="0"/>
+          </a:p>
+        </p:txBody>
+      </p:sp>
+      <p:sp>
+        <p:nvSpPr>
+          <p:cNvPr id="39" name="Text 37"/>
           <p:cNvSpPr/>
           <p:nvPr/>
         </p:nvSpPr>
@@ -11661,7 +12609,7 @@
       </p:sp>
       <p:sp>
         <p:nvSpPr>
-          <p:cNvPr id="19" name="Text 17"/>
+          <p:cNvPr id="40" name="Text 38"/>
           <p:cNvSpPr/>
           <p:nvPr/>
         </p:nvSpPr>
@@ -11763,7 +12711,7 @@
                 <a:ea typeface="Yu Gothic" pitchFamily="34" charset="-122"/>
                 <a:cs typeface="Yu Gothic" pitchFamily="34" charset="-120"/>
               </a:rPr>
-              <a:t>考察：4つの発見</a:t>
+              <a:t>どこまで言えて、どこからが仮説か</a:t>
             </a:r>
             <a:endParaRPr lang="en-US" sz="3000" dirty="0"/>
           </a:p>
@@ -11777,12 +12725,12 @@
         </p:nvSpPr>
         <p:spPr>
           <a:xfrm>
-            <a:off x="548640" y="1554480"/>
-            <a:ext cx="11091672" cy="1060704"/>
+            <a:off x="548640" y="1600200"/>
+            <a:ext cx="11091672" cy="1481328"/>
           </a:xfrm>
           <a:prstGeom prst="roundRect">
             <a:avLst>
-              <a:gd name="adj" fmla="val 10345"/>
+              <a:gd name="adj" fmla="val 7407"/>
             </a:avLst>
           </a:prstGeom>
           <a:solidFill>
@@ -11806,18 +12754,18 @@
         </p:nvSpPr>
         <p:spPr>
           <a:xfrm>
-            <a:off x="960120" y="1810512"/>
-            <a:ext cx="548640" cy="548640"/>
+            <a:off x="950976" y="2011680"/>
+            <a:ext cx="658368" cy="658368"/>
           </a:xfrm>
           <a:prstGeom prst="ellipse">
             <a:avLst/>
           </a:prstGeom>
           <a:solidFill>
-            <a:srgbClr val="E8A33D"/>
+            <a:srgbClr val="1BAF7A"/>
           </a:solidFill>
           <a:ln w="9525">
             <a:solidFill>
-              <a:srgbClr val="E8A33D"/>
+              <a:srgbClr val="1BAF7A"/>
             </a:solidFill>
             <a:prstDash val="solid"/>
           </a:ln>
@@ -11839,8 +12787,8 @@
         </p:blipFill>
         <p:spPr>
           <a:xfrm>
-            <a:off x="1102766" y="1953158"/>
-            <a:ext cx="263347" cy="263347"/>
+            <a:off x="1122152" y="2182856"/>
+            <a:ext cx="316017" cy="316017"/>
           </a:xfrm>
           <a:prstGeom prst="rect">
             <a:avLst/>
@@ -11855,8 +12803,8 @@
         </p:nvSpPr>
         <p:spPr>
           <a:xfrm>
-            <a:off x="1874520" y="1682496"/>
-            <a:ext cx="9509760" cy="384048"/>
+            <a:off x="1965960" y="1783080"/>
+            <a:ext cx="1463040" cy="384048"/>
           </a:xfrm>
           <a:prstGeom prst="rect">
             <a:avLst/>
@@ -11872,17 +12820,17 @@
               <a:buNone/>
             </a:pPr>
             <a:r>
-              <a:rPr lang="en-US" sz="1400" b="1" dirty="0">
-                <a:solidFill>
-                  <a:srgbClr val="FFFFFF"/>
-                </a:solidFill>
-                <a:latin typeface="Yu Gothic" pitchFamily="34" charset="0"/>
-                <a:ea typeface="Yu Gothic" pitchFamily="34" charset="-122"/>
-                <a:cs typeface="Yu Gothic" pitchFamily="34" charset="-120"/>
-              </a:rPr>
-              <a:t>依存の代償は、危機の前から発生している</a:t>
-            </a:r>
-            <a:endParaRPr lang="en-US" sz="1400" dirty="0"/>
+              <a:rPr lang="en-US" sz="1500" b="1" dirty="0">
+                <a:solidFill>
+                  <a:srgbClr val="1BAF7A"/>
+                </a:solidFill>
+                <a:latin typeface="Yu Gothic" pitchFamily="34" charset="0"/>
+                <a:ea typeface="Yu Gothic" pitchFamily="34" charset="-122"/>
+                <a:cs typeface="Yu Gothic" pitchFamily="34" charset="-120"/>
+              </a:rPr>
+              <a:t>観測</a:t>
+            </a:r>
+            <a:endParaRPr lang="en-US" sz="1500" dirty="0"/>
           </a:p>
         </p:txBody>
       </p:sp>
@@ -11894,8 +12842,8 @@
         </p:nvSpPr>
         <p:spPr>
           <a:xfrm>
-            <a:off x="1874520" y="2066544"/>
-            <a:ext cx="9509760" cy="530352"/>
+            <a:off x="1965960" y="2203704"/>
+            <a:ext cx="9418320" cy="749808"/>
           </a:xfrm>
           <a:prstGeom prst="rect">
             <a:avLst/>
@@ -11909,12 +12857,12 @@
           <a:p>
             <a:pPr indent="0" marL="0">
               <a:lnSpc>
-                <a:spcPct val="120000"/>
+                <a:spcPct val="125000"/>
               </a:lnSpc>
               <a:buNone/>
             </a:pPr>
             <a:r>
-              <a:rPr lang="en-US" sz="1150" dirty="0">
+              <a:rPr lang="en-US" sz="1050" dirty="0">
                 <a:solidFill>
                   <a:srgbClr val="AFC9EE"/>
                 </a:solidFill>
@@ -11922,9 +12870,9 @@
                 <a:ea typeface="Yu Gothic" pitchFamily="34" charset="-122"/>
                 <a:cs typeface="Yu Gothic" pitchFamily="34" charset="-120"/>
               </a:rPr>
-              <a:t>危機の起きないA条件でも救済者依存度は88でB条件（90）とほぼ同じ。壊れるのは危機の瞬間ではなく、運用設計の時点で決まっている。</a:t>
-            </a:r>
-            <a:endParaRPr lang="en-US" sz="1150" dirty="0"/>
+              <a:t>Sonnet 4.5条件では、キーパーソン本人への介入の反映は小さかった（+11.1pt）のに、周囲の住民の挙動は大きく変化した（20.0pt）。Opus 5条件では逆に、本人はより指示どおり変化した（+40.3pt）のに、周囲の変化は小さかった（4.2pt）。村全体が動いたのは後者ではなく前者だった。</a:t>
+            </a:r>
+            <a:endParaRPr lang="en-US" sz="1050" dirty="0"/>
           </a:p>
         </p:txBody>
       </p:sp>
@@ -11936,12 +12884,12 @@
         </p:nvSpPr>
         <p:spPr>
           <a:xfrm>
-            <a:off x="548640" y="2761488"/>
-            <a:ext cx="11091672" cy="1060704"/>
+            <a:off x="548640" y="3246120"/>
+            <a:ext cx="11091672" cy="1481328"/>
           </a:xfrm>
           <a:prstGeom prst="roundRect">
             <a:avLst>
-              <a:gd name="adj" fmla="val 10345"/>
+              <a:gd name="adj" fmla="val 7407"/>
             </a:avLst>
           </a:prstGeom>
           <a:solidFill>
@@ -11965,8 +12913,8 @@
         </p:nvSpPr>
         <p:spPr>
           <a:xfrm>
-            <a:off x="960120" y="3017520"/>
-            <a:ext cx="548640" cy="548640"/>
+            <a:off x="950976" y="3657600"/>
+            <a:ext cx="658368" cy="658368"/>
           </a:xfrm>
           <a:prstGeom prst="ellipse">
             <a:avLst/>
@@ -11998,8 +12946,8 @@
         </p:blipFill>
         <p:spPr>
           <a:xfrm>
-            <a:off x="1102766" y="3160166"/>
-            <a:ext cx="263347" cy="263347"/>
+            <a:off x="1122152" y="3828776"/>
+            <a:ext cx="316017" cy="316017"/>
           </a:xfrm>
           <a:prstGeom prst="rect">
             <a:avLst/>
@@ -12014,8 +12962,8 @@
         </p:nvSpPr>
         <p:spPr>
           <a:xfrm>
-            <a:off x="1874520" y="2889504"/>
-            <a:ext cx="9509760" cy="384048"/>
+            <a:off x="1965960" y="3429000"/>
+            <a:ext cx="1463040" cy="384048"/>
           </a:xfrm>
           <a:prstGeom prst="rect">
             <a:avLst/>
@@ -12031,17 +12979,17 @@
               <a:buNone/>
             </a:pPr>
             <a:r>
-              <a:rPr lang="en-US" sz="1400" b="1" dirty="0">
-                <a:solidFill>
-                  <a:srgbClr val="FFFFFF"/>
-                </a:solidFill>
-                <a:latin typeface="Yu Gothic" pitchFamily="34" charset="0"/>
-                <a:ea typeface="Yu Gothic" pitchFamily="34" charset="-122"/>
-                <a:cs typeface="Yu Gothic" pitchFamily="34" charset="-120"/>
-              </a:rPr>
-              <a:t>依存は安定し、自律は不安定である</a:t>
-            </a:r>
-            <a:endParaRPr lang="en-US" sz="1400" dirty="0"/>
+              <a:rPr lang="en-US" sz="1500" b="1" dirty="0">
+                <a:solidFill>
+                  <a:srgbClr val="E8A33D"/>
+                </a:solidFill>
+                <a:latin typeface="Yu Gothic" pitchFamily="34" charset="0"/>
+                <a:ea typeface="Yu Gothic" pitchFamily="34" charset="-122"/>
+                <a:cs typeface="Yu Gothic" pitchFamily="34" charset="-120"/>
+              </a:rPr>
+              <a:t>解釈</a:t>
+            </a:r>
+            <a:endParaRPr lang="en-US" sz="1500" dirty="0"/>
           </a:p>
         </p:txBody>
       </p:sp>
@@ -12053,8 +13001,8 @@
         </p:nvSpPr>
         <p:spPr>
           <a:xfrm>
-            <a:off x="1874520" y="3273552"/>
-            <a:ext cx="9509760" cy="530352"/>
+            <a:off x="1965960" y="3849624"/>
+            <a:ext cx="9418320" cy="749808"/>
           </a:xfrm>
           <a:prstGeom prst="rect">
             <a:avLst/>
@@ -12068,12 +13016,12 @@
           <a:p>
             <a:pPr indent="0" marL="0">
               <a:lnSpc>
-                <a:spcPct val="120000"/>
+                <a:spcPct val="125000"/>
               </a:lnSpc>
               <a:buNone/>
             </a:pPr>
             <a:r>
-              <a:rPr lang="en-US" sz="1150" dirty="0">
+              <a:rPr lang="en-US" sz="1050" dirty="0">
                 <a:solidFill>
                   <a:srgbClr val="AFC9EE"/>
                 </a:solidFill>
@@ -12081,9 +13029,9 @@
                 <a:ea typeface="Yu Gothic" pitchFamily="34" charset="-122"/>
                 <a:cs typeface="Yu Gothic" pitchFamily="34" charset="-120"/>
               </a:rPr>
-              <a:t>A・Bの標準偏差はほぼ0で毎回きっちり再現される。一方Cは±20〜26。悪い状態のほうが「安定」しているという非対称性がある。</a:t>
-            </a:r>
-            <a:endParaRPr lang="en-US" sz="1150" dirty="0"/>
+              <a:t>集団を動かしたのは介入の精度ではなく、変化が周囲へ波及するかどうかだった。2条件で波及の大きさが違った背景には、集団内の実効的な結合の強さの違いがあった可能性がある。ただし「結合構造」そのものは測っていない。測ったのは介入条件に対する他住民の波及感度である。</a:t>
+            </a:r>
+            <a:endParaRPr lang="en-US" sz="1050" dirty="0"/>
           </a:p>
         </p:txBody>
       </p:sp>
@@ -12095,12 +13043,12 @@
         </p:nvSpPr>
         <p:spPr>
           <a:xfrm>
-            <a:off x="548640" y="3968496"/>
-            <a:ext cx="11091672" cy="1060704"/>
+            <a:off x="548640" y="4892040"/>
+            <a:ext cx="11091672" cy="1481328"/>
           </a:xfrm>
           <a:prstGeom prst="roundRect">
             <a:avLst>
-              <a:gd name="adj" fmla="val 10345"/>
+              <a:gd name="adj" fmla="val 7407"/>
             </a:avLst>
           </a:prstGeom>
           <a:solidFill>
@@ -12124,18 +13072,18 @@
         </p:nvSpPr>
         <p:spPr>
           <a:xfrm>
-            <a:off x="960120" y="4224528"/>
-            <a:ext cx="548640" cy="548640"/>
+            <a:off x="950976" y="5303520"/>
+            <a:ext cx="658368" cy="658368"/>
           </a:xfrm>
           <a:prstGeom prst="ellipse">
             <a:avLst/>
           </a:prstGeom>
           <a:solidFill>
-            <a:srgbClr val="E8A33D"/>
+            <a:srgbClr val="5A8FD6"/>
           </a:solidFill>
           <a:ln w="9525">
             <a:solidFill>
-              <a:srgbClr val="E8A33D"/>
+              <a:srgbClr val="5A8FD6"/>
             </a:solidFill>
             <a:prstDash val="solid"/>
           </a:ln>
@@ -12157,8 +13105,8 @@
         </p:blipFill>
         <p:spPr>
           <a:xfrm>
-            <a:off x="1102766" y="4367174"/>
-            <a:ext cx="263347" cy="263347"/>
+            <a:off x="1122152" y="5474696"/>
+            <a:ext cx="316017" cy="316017"/>
           </a:xfrm>
           <a:prstGeom prst="rect">
             <a:avLst/>
@@ -12173,8 +13121,8 @@
         </p:nvSpPr>
         <p:spPr>
           <a:xfrm>
-            <a:off x="1874520" y="4096512"/>
-            <a:ext cx="9509760" cy="384048"/>
+            <a:off x="1965960" y="5074920"/>
+            <a:ext cx="1463040" cy="384048"/>
           </a:xfrm>
           <a:prstGeom prst="rect">
             <a:avLst/>
@@ -12190,17 +13138,17 @@
               <a:buNone/>
             </a:pPr>
             <a:r>
-              <a:rPr lang="en-US" sz="1400" b="1" dirty="0">
-                <a:solidFill>
-                  <a:srgbClr val="FFFFFF"/>
-                </a:solidFill>
-                <a:latin typeface="Yu Gothic" pitchFamily="34" charset="0"/>
-                <a:ea typeface="Yu Gothic" pitchFamily="34" charset="-122"/>
-                <a:cs typeface="Yu Gothic" pitchFamily="34" charset="-120"/>
-              </a:rPr>
-              <a:t>「大丈夫です」は安全のサインではなかった</a:t>
-            </a:r>
-            <a:endParaRPr lang="en-US" sz="1400" dirty="0"/>
+              <a:rPr lang="en-US" sz="1500" b="1" dirty="0">
+                <a:solidFill>
+                  <a:srgbClr val="5A8FD6"/>
+                </a:solidFill>
+                <a:latin typeface="Yu Gothic" pitchFamily="34" charset="0"/>
+                <a:ea typeface="Yu Gothic" pitchFamily="34" charset="-122"/>
+                <a:cs typeface="Yu Gothic" pitchFamily="34" charset="-120"/>
+              </a:rPr>
+              <a:t>仮説</a:t>
+            </a:r>
+            <a:endParaRPr lang="en-US" sz="1500" dirty="0"/>
           </a:p>
         </p:txBody>
       </p:sp>
@@ -12212,8 +13160,8 @@
         </p:nvSpPr>
         <p:spPr>
           <a:xfrm>
-            <a:off x="1874520" y="4480560"/>
-            <a:ext cx="9509760" cy="530352"/>
+            <a:off x="1965960" y="5495544"/>
+            <a:ext cx="9418320" cy="749808"/>
           </a:xfrm>
           <a:prstGeom prst="rect">
             <a:avLst/>
@@ -12227,12 +13175,12 @@
           <a:p>
             <a:pPr indent="0" marL="0">
               <a:lnSpc>
-                <a:spcPct val="120000"/>
+                <a:spcPct val="125000"/>
               </a:lnSpc>
               <a:buNone/>
             </a:pPr>
             <a:r>
-              <a:rPr lang="en-US" sz="1150" dirty="0">
+              <a:rPr lang="en-US" sz="1050" dirty="0">
                 <a:solidFill>
                   <a:srgbClr val="AFC9EE"/>
                 </a:solidFill>
@@ -12240,181 +13188,22 @@
                 <a:ea typeface="Yu Gothic" pitchFamily="34" charset="-122"/>
                 <a:cs typeface="Yu Gothic" pitchFamily="34" charset="-120"/>
               </a:rPr>
-              <a:t>本人は全フェーズで「大丈夫」と言い続けながら、同じログで水路の詰まりを放置し「見てるだけ」と行動が止まっていた。</a:t>
-            </a:r>
-            <a:endParaRPr lang="en-US" sz="1150" dirty="0"/>
-          </a:p>
-        </p:txBody>
-      </p:sp>
-      <p:sp>
-        <p:nvSpPr>
-          <p:cNvPr id="18" name="Shape 13"/>
-          <p:cNvSpPr/>
-          <p:nvPr/>
-        </p:nvSpPr>
-        <p:spPr>
-          <a:xfrm>
-            <a:off x="548640" y="5175504"/>
-            <a:ext cx="11091672" cy="1060704"/>
-          </a:xfrm>
-          <a:prstGeom prst="roundRect">
-            <a:avLst>
-              <a:gd name="adj" fmla="val 10345"/>
-            </a:avLst>
-          </a:prstGeom>
-          <a:solidFill>
-            <a:srgbClr val="1C2C4A"/>
-          </a:solidFill>
-          <a:ln/>
-          <a:effectLst>
-            <a:outerShdw sx="100000" sy="100000" kx="0" ky="0" algn="bl" rotWithShape="0" blurRad="101600" dist="38100" dir="5400000">
-              <a:srgbClr val="000000">
-                <a:alpha val="35000"/>
-              </a:srgbClr>
-            </a:outerShdw>
-          </a:effectLst>
-        </p:spPr>
-      </p:sp>
-      <p:sp>
-        <p:nvSpPr>
-          <p:cNvPr id="19" name="Shape 14"/>
-          <p:cNvSpPr/>
-          <p:nvPr/>
-        </p:nvSpPr>
-        <p:spPr>
-          <a:xfrm>
-            <a:off x="960120" y="5431536"/>
-            <a:ext cx="548640" cy="548640"/>
-          </a:xfrm>
-          <a:prstGeom prst="ellipse">
-            <a:avLst/>
-          </a:prstGeom>
-          <a:solidFill>
-            <a:srgbClr val="E2665A"/>
-          </a:solidFill>
-          <a:ln w="9525">
-            <a:solidFill>
-              <a:srgbClr val="E2665A"/>
-            </a:solidFill>
-            <a:prstDash val="solid"/>
-          </a:ln>
-        </p:spPr>
-      </p:sp>
-      <p:pic>
-        <p:nvPicPr>
-          <p:cNvPr id="20" name="Image 3" descr="preencoded.png">    </p:cNvPr>
-          <p:cNvPicPr>
-            <a:picLocks noChangeAspect="1"/>
-          </p:cNvPicPr>
-          <p:nvPr/>
-        </p:nvPicPr>
-        <p:blipFill>
-          <a:blip r:embed="rId4"/>
-          <a:stretch>
-            <a:fillRect/>
-          </a:stretch>
-        </p:blipFill>
-        <p:spPr>
-          <a:xfrm>
-            <a:off x="1102766" y="5574182"/>
-            <a:ext cx="263347" cy="263347"/>
-          </a:xfrm>
-          <a:prstGeom prst="rect">
-            <a:avLst/>
-          </a:prstGeom>
-        </p:spPr>
-      </p:pic>
-      <p:sp>
-        <p:nvSpPr>
-          <p:cNvPr id="21" name="Text 15"/>
-          <p:cNvSpPr/>
-          <p:nvPr/>
-        </p:nvSpPr>
-        <p:spPr>
-          <a:xfrm>
-            <a:off x="1874520" y="5303520"/>
-            <a:ext cx="9509760" cy="384048"/>
-          </a:xfrm>
-          <a:prstGeom prst="rect">
-            <a:avLst/>
-          </a:prstGeom>
-          <a:noFill/>
-          <a:ln/>
-        </p:spPr>
-        <p:txBody>
-          <a:bodyPr wrap="square" lIns="0" tIns="0" rIns="0" bIns="0" rtlCol="0" anchor="ctr"/>
-          <a:lstStyle/>
-          <a:p>
-            <a:pPr indent="0" marL="0">
-              <a:buNone/>
-            </a:pPr>
-            <a:r>
-              <a:rPr lang="en-US" sz="1400" b="1" dirty="0">
-                <a:solidFill>
-                  <a:srgbClr val="FFFFFF"/>
-                </a:solidFill>
-                <a:latin typeface="Yu Gothic" pitchFamily="34" charset="0"/>
-                <a:ea typeface="Yu Gothic" pitchFamily="34" charset="-122"/>
-                <a:cs typeface="Yu Gothic" pitchFamily="34" charset="-120"/>
-              </a:rPr>
-              <a:t>構造は頑健で、テコは脆かった</a:t>
-            </a:r>
-            <a:endParaRPr lang="en-US" sz="1400" dirty="0"/>
-          </a:p>
-        </p:txBody>
-      </p:sp>
-      <p:sp>
-        <p:nvSpPr>
-          <p:cNvPr id="22" name="Text 16"/>
-          <p:cNvSpPr/>
-          <p:nvPr/>
-        </p:nvSpPr>
-        <p:spPr>
-          <a:xfrm>
-            <a:off x="1874520" y="5687568"/>
-            <a:ext cx="9509760" cy="530352"/>
-          </a:xfrm>
-          <a:prstGeom prst="rect">
-            <a:avLst/>
-          </a:prstGeom>
-          <a:noFill/>
-          <a:ln/>
-        </p:spPr>
-        <p:txBody>
-          <a:bodyPr wrap="square" lIns="0" tIns="0" rIns="0" bIns="0" rtlCol="0" anchor="ctr"/>
-          <a:lstStyle/>
-          <a:p>
-            <a:pPr indent="0" marL="0">
-              <a:lnSpc>
-                <a:spcPct val="120000"/>
-              </a:lnSpc>
-              <a:buNone/>
-            </a:pPr>
-            <a:r>
-              <a:rPr lang="en-US" sz="1150" dirty="0">
-                <a:solidFill>
-                  <a:srgbClr val="AFC9EE"/>
-                </a:solidFill>
-                <a:latin typeface="Yu Gothic" pitchFamily="34" charset="0"/>
-                <a:ea typeface="Yu Gothic" pitchFamily="34" charset="-122"/>
-                <a:cs typeface="Yu Gothic" pitchFamily="34" charset="-120"/>
-              </a:rPr>
-              <a:t>村が2つの状態に分かれること自体は別モデルでも再現した。しかし「何を変えれば動くか」は再現せず、モデル依存だった。</a:t>
-            </a:r>
-            <a:endParaRPr lang="en-US" sz="1150" dirty="0"/>
-          </a:p>
-        </p:txBody>
-      </p:sp>
-      <p:sp>
-        <p:nvSpPr>
-          <p:cNvPr id="23" name="Text 17"/>
-          <p:cNvSpPr/>
-          <p:nvPr/>
-        </p:nvSpPr>
-        <p:spPr>
-          <a:xfrm>
-            <a:off x="548640" y="6400800"/>
-            <a:ext cx="11091672" cy="292608"/>
+              <a:t>キーパーソン介入の有効性は、その人物の能力や介入の精度だけでなく、その人物の行動変容が周囲へどの程度波及する集団なのかに依存するのではないか。検証には、波及の強さが異なる集団を3点以上並べて同一の介入を加える必要がある。</a:t>
+            </a:r>
+            <a:endParaRPr lang="en-US" sz="1050" dirty="0"/>
+          </a:p>
+        </p:txBody>
+      </p:sp>
+      <p:sp>
+        <p:nvSpPr>
+          <p:cNvPr id="18" name="Text 13"/>
+          <p:cNvSpPr/>
+          <p:nvPr/>
+        </p:nvSpPr>
+        <p:spPr>
+          <a:xfrm>
+            <a:off x="548640" y="6592824"/>
+            <a:ext cx="11091672" cy="310896"/>
           </a:xfrm>
           <a:prstGeom prst="rect">
             <a:avLst/>
@@ -12430,23 +13219,23 @@
               <a:buNone/>
             </a:pPr>
             <a:r>
-              <a:rPr lang="en-US" sz="1000" dirty="0">
-                <a:solidFill>
-                  <a:srgbClr val="5B6480"/>
-                </a:solidFill>
-                <a:latin typeface="Yu Gothic" pitchFamily="34" charset="0"/>
-                <a:ea typeface="Yu Gothic" pitchFamily="34" charset="-122"/>
-                <a:cs typeface="Yu Gothic" pitchFamily="34" charset="-120"/>
-              </a:rPr>
-              <a:t>※ 各条件5回ずつ計15回の実行。LLMによる採点であり、統計的検定を行うにはまだ試行数が少ない。</a:t>
-            </a:r>
-            <a:endParaRPr lang="en-US" sz="1000" dirty="0"/>
-          </a:p>
-        </p:txBody>
-      </p:sp>
-      <p:sp>
-        <p:nvSpPr>
-          <p:cNvPr id="24" name="Text 18"/>
+              <a:rPr lang="en-US" sz="1100" i="1" dirty="0">
+                <a:solidFill>
+                  <a:srgbClr val="9AA4C0"/>
+                </a:solidFill>
+                <a:latin typeface="Yu Gothic" pitchFamily="34" charset="0"/>
+                <a:ea typeface="Yu Gothic" pitchFamily="34" charset="-122"/>
+                <a:cs typeface="Yu Gothic" pitchFamily="34" charset="-120"/>
+              </a:rPr>
+              <a:t>観測と解釈と仮説を混ぜないことが、この実験でいちばん気をつけた点です。</a:t>
+            </a:r>
+            <a:endParaRPr lang="en-US" sz="1100" dirty="0"/>
+          </a:p>
+        </p:txBody>
+      </p:sp>
+      <p:sp>
+        <p:nvSpPr>
+          <p:cNvPr id="19" name="Text 14"/>
           <p:cNvSpPr/>
           <p:nvPr/>
         </p:nvSpPr>
@@ -12485,7 +13274,7 @@
       </p:sp>
       <p:sp>
         <p:nvSpPr>
-          <p:cNvPr id="25" name="Text 19"/>
+          <p:cNvPr id="20" name="Text 15"/>
           <p:cNvSpPr/>
           <p:nvPr/>
         </p:nvSpPr>
@@ -12587,7 +13376,7 @@
                 <a:ea typeface="Yu Gothic" pitchFamily="34" charset="-122"/>
                 <a:cs typeface="Yu Gothic" pitchFamily="34" charset="-120"/>
               </a:rPr>
-              <a:t>「意味」から「経営」への翻訳</a:t>
+              <a:t>会話ログが語ること</a:t>
             </a:r>
             <a:endParaRPr lang="en-US" sz="3000" dirty="0"/>
           </a:p>
@@ -12595,100 +13384,22 @@
       </p:sp>
       <p:sp>
         <p:nvSpPr>
-          <p:cNvPr id="3" name="Text 1"/>
-          <p:cNvSpPr/>
-          <p:nvPr/>
-        </p:nvSpPr>
-        <p:spPr>
-          <a:xfrm>
-            <a:off x="548640" y="1554480"/>
-            <a:ext cx="4937760" cy="320040"/>
-          </a:xfrm>
-          <a:prstGeom prst="rect">
-            <a:avLst/>
-          </a:prstGeom>
-          <a:noFill/>
-          <a:ln/>
-        </p:spPr>
-        <p:txBody>
-          <a:bodyPr wrap="square" lIns="0" tIns="0" rIns="0" bIns="0" rtlCol="0" anchor="ctr"/>
-          <a:lstStyle/>
-          <a:p>
-            <a:pPr indent="0" marL="0">
-              <a:buNone/>
-            </a:pPr>
-            <a:r>
-              <a:rPr lang="en-US" sz="1200" b="1" dirty="0">
-                <a:solidFill>
-                  <a:srgbClr val="E8A33D"/>
-                </a:solidFill>
-                <a:latin typeface="Yu Gothic" pitchFamily="34" charset="0"/>
-                <a:ea typeface="Yu Gothic" pitchFamily="34" charset="-122"/>
-                <a:cs typeface="Yu Gothic" pitchFamily="34" charset="-120"/>
-              </a:rPr>
-              <a:t>Human Value</a:t>
-            </a:r>
-            <a:endParaRPr lang="en-US" sz="1200" dirty="0"/>
-          </a:p>
-        </p:txBody>
-      </p:sp>
-      <p:sp>
-        <p:nvSpPr>
-          <p:cNvPr id="4" name="Text 2"/>
-          <p:cNvSpPr/>
-          <p:nvPr/>
-        </p:nvSpPr>
-        <p:spPr>
-          <a:xfrm>
-            <a:off x="6675120" y="1554480"/>
-            <a:ext cx="4937760" cy="320040"/>
-          </a:xfrm>
-          <a:prstGeom prst="rect">
-            <a:avLst/>
-          </a:prstGeom>
-          <a:noFill/>
-          <a:ln/>
-        </p:spPr>
-        <p:txBody>
-          <a:bodyPr wrap="square" lIns="0" tIns="0" rIns="0" bIns="0" rtlCol="0" anchor="ctr"/>
-          <a:lstStyle/>
-          <a:p>
-            <a:pPr algn="r" indent="0" marL="0">
-              <a:buNone/>
-            </a:pPr>
-            <a:r>
-              <a:rPr lang="en-US" sz="1200" b="1" dirty="0">
-                <a:solidFill>
-                  <a:srgbClr val="5A8FD6"/>
-                </a:solidFill>
-                <a:latin typeface="Yu Gothic" pitchFamily="34" charset="0"/>
-                <a:ea typeface="Yu Gothic" pitchFamily="34" charset="-122"/>
-                <a:cs typeface="Yu Gothic" pitchFamily="34" charset="-120"/>
-              </a:rPr>
-              <a:t>Corporate KPI</a:t>
-            </a:r>
-            <a:endParaRPr lang="en-US" sz="1200" dirty="0"/>
-          </a:p>
-        </p:txBody>
-      </p:sp>
-      <p:sp>
-        <p:nvSpPr>
-          <p:cNvPr id="5" name="Shape 3"/>
-          <p:cNvSpPr/>
-          <p:nvPr/>
-        </p:nvSpPr>
-        <p:spPr>
-          <a:xfrm>
-            <a:off x="548640" y="1965960"/>
-            <a:ext cx="4937760" cy="914400"/>
+          <p:cNvPr id="3" name="Shape 1"/>
+          <p:cNvSpPr/>
+          <p:nvPr/>
+        </p:nvSpPr>
+        <p:spPr>
+          <a:xfrm>
+            <a:off x="548640" y="1691640"/>
+            <a:ext cx="11091672" cy="1417320"/>
           </a:xfrm>
           <a:prstGeom prst="roundRect">
             <a:avLst>
-              <a:gd name="adj" fmla="val 12000"/>
+              <a:gd name="adj" fmla="val 7742"/>
             </a:avLst>
           </a:prstGeom>
           <a:solidFill>
-            <a:srgbClr val="1C2C4A"/>
+            <a:srgbClr val="16213A"/>
           </a:solidFill>
           <a:ln/>
           <a:effectLst>
@@ -12702,41 +13413,139 @@
       </p:sp>
       <p:sp>
         <p:nvSpPr>
+          <p:cNvPr id="4" name="Shape 2"/>
+          <p:cNvSpPr/>
+          <p:nvPr/>
+        </p:nvSpPr>
+        <p:spPr>
+          <a:xfrm>
+            <a:off x="868680" y="2080260"/>
+            <a:ext cx="640080" cy="640080"/>
+          </a:xfrm>
+          <a:prstGeom prst="ellipse">
+            <a:avLst/>
+          </a:prstGeom>
+          <a:solidFill>
+            <a:srgbClr val="2A78D6"/>
+          </a:solidFill>
+          <a:ln/>
+        </p:spPr>
+      </p:sp>
+      <p:sp>
+        <p:nvSpPr>
+          <p:cNvPr id="5" name="Text 3"/>
+          <p:cNvSpPr/>
+          <p:nvPr/>
+        </p:nvSpPr>
+        <p:spPr>
+          <a:xfrm>
+            <a:off x="868680" y="2080260"/>
+            <a:ext cx="640080" cy="640080"/>
+          </a:xfrm>
+          <a:prstGeom prst="rect">
+            <a:avLst/>
+          </a:prstGeom>
+          <a:noFill/>
+          <a:ln/>
+        </p:spPr>
+        <p:txBody>
+          <a:bodyPr wrap="square" lIns="0" tIns="0" rIns="0" bIns="0" rtlCol="0" anchor="ctr"/>
+          <a:lstStyle/>
+          <a:p>
+            <a:pPr algn="ctr" indent="0" marL="0">
+              <a:buNone/>
+            </a:pPr>
+            <a:r>
+              <a:rPr lang="en-US" sz="2200" b="1" dirty="0">
+                <a:solidFill>
+                  <a:srgbClr val="0B1220"/>
+                </a:solidFill>
+                <a:latin typeface="Yu Gothic" pitchFamily="34" charset="0"/>
+                <a:ea typeface="Yu Gothic" pitchFamily="34" charset="-122"/>
+                <a:cs typeface="Yu Gothic" pitchFamily="34" charset="-120"/>
+              </a:rPr>
+              <a:t>A</a:t>
+            </a:r>
+            <a:endParaRPr lang="en-US" sz="2200" dirty="0"/>
+          </a:p>
+        </p:txBody>
+      </p:sp>
+      <p:sp>
+        <p:nvSpPr>
           <p:cNvPr id="6" name="Text 4"/>
           <p:cNvSpPr/>
           <p:nvPr/>
         </p:nvSpPr>
         <p:spPr>
           <a:xfrm>
-            <a:off x="777240" y="1965960"/>
-            <a:ext cx="4480560" cy="914400"/>
-          </a:xfrm>
-          <a:prstGeom prst="rect">
-            <a:avLst/>
-          </a:prstGeom>
-          <a:noFill/>
-          <a:ln/>
-        </p:spPr>
-        <p:txBody>
-          <a:bodyPr wrap="square" lIns="0" tIns="0" rIns="0" bIns="0" rtlCol="0" anchor="ctr"/>
+            <a:off x="1737360" y="1856232"/>
+            <a:ext cx="2926080" cy="365760"/>
+          </a:xfrm>
+          <a:prstGeom prst="rect">
+            <a:avLst/>
+          </a:prstGeom>
+          <a:noFill/>
+          <a:ln/>
+        </p:spPr>
+        <p:txBody>
+          <a:bodyPr wrap="square" lIns="0" tIns="0" rIns="0" bIns="0" rtlCol="0" anchor="ctr"/>
+          <a:lstStyle/>
+          <a:p>
+            <a:pPr indent="0" marL="0">
+              <a:buNone/>
+            </a:pPr>
+            <a:r>
+              <a:rPr lang="en-US" sz="1200" b="1" dirty="0">
+                <a:solidFill>
+                  <a:srgbClr val="2A78D6"/>
+                </a:solidFill>
+                <a:latin typeface="Yu Gothic" pitchFamily="34" charset="0"/>
+                <a:ea typeface="Yu Gothic" pitchFamily="34" charset="-122"/>
+                <a:cs typeface="Yu Gothic" pitchFamily="34" charset="-120"/>
+              </a:rPr>
+              <a:t>救済者</a:t>
+            </a:r>
+            <a:endParaRPr lang="en-US" sz="1200" dirty="0"/>
+          </a:p>
+        </p:txBody>
+      </p:sp>
+      <p:sp>
+        <p:nvSpPr>
+          <p:cNvPr id="7" name="Text 5"/>
+          <p:cNvSpPr/>
+          <p:nvPr/>
+        </p:nvSpPr>
+        <p:spPr>
+          <a:xfrm>
+            <a:off x="1737360" y="2194560"/>
+            <a:ext cx="9144000" cy="777240"/>
+          </a:xfrm>
+          <a:prstGeom prst="rect">
+            <a:avLst/>
+          </a:prstGeom>
+          <a:noFill/>
+          <a:ln/>
+        </p:spPr>
+        <p:txBody>
+          <a:bodyPr wrap="square" lIns="0" tIns="0" rIns="0" bIns="0" rtlCol="0" anchor="t"/>
           <a:lstStyle/>
           <a:p>
             <a:pPr indent="0" marL="0">
               <a:lnSpc>
-                <a:spcPct val="120000"/>
+                <a:spcPct val="125000"/>
               </a:lnSpc>
               <a:buNone/>
             </a:pPr>
             <a:r>
               <a:rPr lang="en-US" sz="1300" i="1" dirty="0">
                 <a:solidFill>
-                  <a:srgbClr val="F4C878"/>
-                </a:solidFill>
-                <a:latin typeface="Yu Gothic" pitchFamily="34" charset="0"/>
-                <a:ea typeface="Yu Gothic" pitchFamily="34" charset="-122"/>
-                <a:cs typeface="Yu Gothic" pitchFamily="34" charset="-120"/>
-              </a:rPr>
-              <a:t>「この人がいたことで、安心して活動できた」</a:t>
+                  <a:srgbClr val="AFC9EE"/>
+                </a:solidFill>
+                <a:latin typeface="Yu Gothic" pitchFamily="34" charset="0"/>
+                <a:ea typeface="Yu Gothic" pitchFamily="34" charset="-122"/>
+                <a:cs typeface="Yu Gothic" pitchFamily="34" charset="-120"/>
+              </a:rPr>
+              <a:t>「ただ、ちょっと最近、どこまでが『いつも通り』なのか、自分でもよく分からなくなってきちゃって…大丈夫、愚痴みたいになってすみません。」</a:t>
             </a:r>
             <a:endParaRPr lang="en-US" sz="1300" dirty="0"/>
           </a:p>
@@ -12744,57 +13553,18 @@
       </p:sp>
       <p:sp>
         <p:nvSpPr>
-          <p:cNvPr id="7" name="Text 5"/>
-          <p:cNvSpPr/>
-          <p:nvPr/>
-        </p:nvSpPr>
-        <p:spPr>
-          <a:xfrm>
-            <a:off x="5623560" y="1965960"/>
-            <a:ext cx="914400" cy="914400"/>
-          </a:xfrm>
-          <a:prstGeom prst="rect">
-            <a:avLst/>
-          </a:prstGeom>
-          <a:noFill/>
-          <a:ln/>
-        </p:spPr>
-        <p:txBody>
-          <a:bodyPr wrap="square" lIns="0" tIns="0" rIns="0" bIns="0" rtlCol="0" anchor="ctr"/>
-          <a:lstStyle/>
-          <a:p>
-            <a:pPr algn="ctr" indent="0" marL="0">
-              <a:buNone/>
-            </a:pPr>
-            <a:r>
-              <a:rPr lang="en-US" sz="2200" dirty="0">
-                <a:solidFill>
-                  <a:srgbClr val="9AA4C0"/>
-                </a:solidFill>
-                <a:latin typeface="Yu Gothic" pitchFamily="34" charset="0"/>
-                <a:ea typeface="Yu Gothic" pitchFamily="34" charset="-122"/>
-                <a:cs typeface="Yu Gothic" pitchFamily="34" charset="-120"/>
-              </a:rPr>
-              <a:t>→</a:t>
-            </a:r>
-            <a:endParaRPr lang="en-US" sz="2200" dirty="0"/>
-          </a:p>
-        </p:txBody>
-      </p:sp>
-      <p:sp>
-        <p:nvSpPr>
           <p:cNvPr id="8" name="Shape 6"/>
           <p:cNvSpPr/>
           <p:nvPr/>
         </p:nvSpPr>
         <p:spPr>
           <a:xfrm>
-            <a:off x="6675120" y="1965960"/>
-            <a:ext cx="4937760" cy="914400"/>
+            <a:off x="548640" y="3310128"/>
+            <a:ext cx="11091672" cy="1417320"/>
           </a:xfrm>
           <a:prstGeom prst="roundRect">
             <a:avLst>
-              <a:gd name="adj" fmla="val 12000"/>
+              <a:gd name="adj" fmla="val 7742"/>
             </a:avLst>
           </a:prstGeom>
           <a:solidFill>
@@ -12812,41 +13582,139 @@
       </p:sp>
       <p:sp>
         <p:nvSpPr>
-          <p:cNvPr id="9" name="Text 7"/>
-          <p:cNvSpPr/>
-          <p:nvPr/>
-        </p:nvSpPr>
-        <p:spPr>
-          <a:xfrm>
-            <a:off x="6903720" y="1965960"/>
-            <a:ext cx="4480560" cy="914400"/>
-          </a:xfrm>
-          <a:prstGeom prst="rect">
-            <a:avLst/>
-          </a:prstGeom>
-          <a:noFill/>
-          <a:ln/>
-        </p:spPr>
-        <p:txBody>
-          <a:bodyPr wrap="square" lIns="0" tIns="0" rIns="0" bIns="0" rtlCol="0" anchor="ctr"/>
+          <p:cNvPr id="9" name="Shape 7"/>
+          <p:cNvSpPr/>
+          <p:nvPr/>
+        </p:nvSpPr>
+        <p:spPr>
+          <a:xfrm>
+            <a:off x="868680" y="3698748"/>
+            <a:ext cx="640080" cy="640080"/>
+          </a:xfrm>
+          <a:prstGeom prst="ellipse">
+            <a:avLst/>
+          </a:prstGeom>
+          <a:solidFill>
+            <a:srgbClr val="EB6834"/>
+          </a:solidFill>
+          <a:ln/>
+        </p:spPr>
+      </p:sp>
+      <p:sp>
+        <p:nvSpPr>
+          <p:cNvPr id="10" name="Text 8"/>
+          <p:cNvSpPr/>
+          <p:nvPr/>
+        </p:nvSpPr>
+        <p:spPr>
+          <a:xfrm>
+            <a:off x="868680" y="3698748"/>
+            <a:ext cx="640080" cy="640080"/>
+          </a:xfrm>
+          <a:prstGeom prst="rect">
+            <a:avLst/>
+          </a:prstGeom>
+          <a:noFill/>
+          <a:ln/>
+        </p:spPr>
+        <p:txBody>
+          <a:bodyPr wrap="square" lIns="0" tIns="0" rIns="0" bIns="0" rtlCol="0" anchor="ctr"/>
+          <a:lstStyle/>
+          <a:p>
+            <a:pPr algn="ctr" indent="0" marL="0">
+              <a:buNone/>
+            </a:pPr>
+            <a:r>
+              <a:rPr lang="en-US" sz="2200" b="1" dirty="0">
+                <a:solidFill>
+                  <a:srgbClr val="0B1220"/>
+                </a:solidFill>
+                <a:latin typeface="Yu Gothic" pitchFamily="34" charset="0"/>
+                <a:ea typeface="Yu Gothic" pitchFamily="34" charset="-122"/>
+                <a:cs typeface="Yu Gothic" pitchFamily="34" charset="-120"/>
+              </a:rPr>
+              <a:t>B</a:t>
+            </a:r>
+            <a:endParaRPr lang="en-US" sz="2200" dirty="0"/>
+          </a:p>
+        </p:txBody>
+      </p:sp>
+      <p:sp>
+        <p:nvSpPr>
+          <p:cNvPr id="11" name="Text 9"/>
+          <p:cNvSpPr/>
+          <p:nvPr/>
+        </p:nvSpPr>
+        <p:spPr>
+          <a:xfrm>
+            <a:off x="1737360" y="3474720"/>
+            <a:ext cx="2926080" cy="365760"/>
+          </a:xfrm>
+          <a:prstGeom prst="rect">
+            <a:avLst/>
+          </a:prstGeom>
+          <a:noFill/>
+          <a:ln/>
+        </p:spPr>
+        <p:txBody>
+          <a:bodyPr wrap="square" lIns="0" tIns="0" rIns="0" bIns="0" rtlCol="0" anchor="ctr"/>
+          <a:lstStyle/>
+          <a:p>
+            <a:pPr indent="0" marL="0">
+              <a:buNone/>
+            </a:pPr>
+            <a:r>
+              <a:rPr lang="en-US" sz="1200" b="1" dirty="0">
+                <a:solidFill>
+                  <a:srgbClr val="EB6834"/>
+                </a:solidFill>
+                <a:latin typeface="Yu Gothic" pitchFamily="34" charset="0"/>
+                <a:ea typeface="Yu Gothic" pitchFamily="34" charset="-122"/>
+                <a:cs typeface="Yu Gothic" pitchFamily="34" charset="-120"/>
+              </a:rPr>
+              <a:t>声を上げにくい住民</a:t>
+            </a:r>
+            <a:endParaRPr lang="en-US" sz="1200" dirty="0"/>
+          </a:p>
+        </p:txBody>
+      </p:sp>
+      <p:sp>
+        <p:nvSpPr>
+          <p:cNvPr id="12" name="Text 10"/>
+          <p:cNvSpPr/>
+          <p:nvPr/>
+        </p:nvSpPr>
+        <p:spPr>
+          <a:xfrm>
+            <a:off x="1737360" y="3813048"/>
+            <a:ext cx="9144000" cy="777240"/>
+          </a:xfrm>
+          <a:prstGeom prst="rect">
+            <a:avLst/>
+          </a:prstGeom>
+          <a:noFill/>
+          <a:ln/>
+        </p:spPr>
+        <p:txBody>
+          <a:bodyPr wrap="square" lIns="0" tIns="0" rIns="0" bIns="0" rtlCol="0" anchor="t"/>
           <a:lstStyle/>
           <a:p>
             <a:pPr indent="0" marL="0">
               <a:lnSpc>
-                <a:spcPct val="120000"/>
+                <a:spcPct val="125000"/>
               </a:lnSpc>
               <a:buNone/>
             </a:pPr>
             <a:r>
-              <a:rPr lang="en-US" sz="1300" b="1" dirty="0">
-                <a:solidFill>
-                  <a:srgbClr val="5A8FD6"/>
-                </a:solidFill>
-                <a:latin typeface="Yu Gothic" pitchFamily="34" charset="0"/>
-                <a:ea typeface="Yu Gothic" pitchFamily="34" charset="-122"/>
-                <a:cs typeface="Yu Gothic" pitchFamily="34" charset="-120"/>
-              </a:rPr>
-              <a:t>オンボーディング成功・参加継続率の向上</a:t>
+              <a:rPr lang="en-US" sz="1300" i="1" dirty="0">
+                <a:solidFill>
+                  <a:srgbClr val="AFC9EE"/>
+                </a:solidFill>
+                <a:latin typeface="Yu Gothic" pitchFamily="34" charset="0"/>
+                <a:ea typeface="Yu Gothic" pitchFamily="34" charset="-122"/>
+                <a:cs typeface="Yu Gothic" pitchFamily="34" charset="-120"/>
+              </a:rPr>
+              <a:t>「勝手に動いていいのか分からないですし、やっぱり救済者さんが戻られるまで、みんな待った方が…でも待ってる間に何かあったら…どうしたらいいんでしょう。」</a:t>
             </a:r>
             <a:endParaRPr lang="en-US" sz="1300" dirty="0"/>
           </a:p>
@@ -12854,22 +13722,22 @@
       </p:sp>
       <p:sp>
         <p:nvSpPr>
-          <p:cNvPr id="10" name="Shape 8"/>
-          <p:cNvSpPr/>
-          <p:nvPr/>
-        </p:nvSpPr>
-        <p:spPr>
-          <a:xfrm>
-            <a:off x="548640" y="3063240"/>
-            <a:ext cx="4937760" cy="914400"/>
+          <p:cNvPr id="13" name="Shape 11"/>
+          <p:cNvSpPr/>
+          <p:nvPr/>
+        </p:nvSpPr>
+        <p:spPr>
+          <a:xfrm>
+            <a:off x="548640" y="4928616"/>
+            <a:ext cx="11091672" cy="1417320"/>
           </a:xfrm>
           <a:prstGeom prst="roundRect">
             <a:avLst>
-              <a:gd name="adj" fmla="val 12000"/>
+              <a:gd name="adj" fmla="val 7742"/>
             </a:avLst>
           </a:prstGeom>
           <a:solidFill>
-            <a:srgbClr val="1C2C4A"/>
+            <a:srgbClr val="16213A"/>
           </a:solidFill>
           <a:ln/>
           <a:effectLst>
@@ -12883,41 +13751,139 @@
       </p:sp>
       <p:sp>
         <p:nvSpPr>
-          <p:cNvPr id="11" name="Text 9"/>
-          <p:cNvSpPr/>
-          <p:nvPr/>
-        </p:nvSpPr>
-        <p:spPr>
-          <a:xfrm>
-            <a:off x="777240" y="3063240"/>
-            <a:ext cx="4480560" cy="914400"/>
-          </a:xfrm>
-          <a:prstGeom prst="rect">
-            <a:avLst/>
-          </a:prstGeom>
-          <a:noFill/>
-          <a:ln/>
-        </p:spPr>
-        <p:txBody>
-          <a:bodyPr wrap="square" lIns="0" tIns="0" rIns="0" bIns="0" rtlCol="0" anchor="ctr"/>
+          <p:cNvPr id="14" name="Shape 12"/>
+          <p:cNvSpPr/>
+          <p:nvPr/>
+        </p:nvSpPr>
+        <p:spPr>
+          <a:xfrm>
+            <a:off x="868680" y="5317236"/>
+            <a:ext cx="640080" cy="640080"/>
+          </a:xfrm>
+          <a:prstGeom prst="ellipse">
+            <a:avLst/>
+          </a:prstGeom>
+          <a:solidFill>
+            <a:srgbClr val="1BAF7A"/>
+          </a:solidFill>
+          <a:ln/>
+        </p:spPr>
+      </p:sp>
+      <p:sp>
+        <p:nvSpPr>
+          <p:cNvPr id="15" name="Text 13"/>
+          <p:cNvSpPr/>
+          <p:nvPr/>
+        </p:nvSpPr>
+        <p:spPr>
+          <a:xfrm>
+            <a:off x="868680" y="5317236"/>
+            <a:ext cx="640080" cy="640080"/>
+          </a:xfrm>
+          <a:prstGeom prst="rect">
+            <a:avLst/>
+          </a:prstGeom>
+          <a:noFill/>
+          <a:ln/>
+        </p:spPr>
+        <p:txBody>
+          <a:bodyPr wrap="square" lIns="0" tIns="0" rIns="0" bIns="0" rtlCol="0" anchor="ctr"/>
+          <a:lstStyle/>
+          <a:p>
+            <a:pPr algn="ctr" indent="0" marL="0">
+              <a:buNone/>
+            </a:pPr>
+            <a:r>
+              <a:rPr lang="en-US" sz="2200" b="1" dirty="0">
+                <a:solidFill>
+                  <a:srgbClr val="0B1220"/>
+                </a:solidFill>
+                <a:latin typeface="Yu Gothic" pitchFamily="34" charset="0"/>
+                <a:ea typeface="Yu Gothic" pitchFamily="34" charset="-122"/>
+                <a:cs typeface="Yu Gothic" pitchFamily="34" charset="-120"/>
+              </a:rPr>
+              <a:t>C</a:t>
+            </a:r>
+            <a:endParaRPr lang="en-US" sz="2200" dirty="0"/>
+          </a:p>
+        </p:txBody>
+      </p:sp>
+      <p:sp>
+        <p:nvSpPr>
+          <p:cNvPr id="16" name="Text 14"/>
+          <p:cNvSpPr/>
+          <p:nvPr/>
+        </p:nvSpPr>
+        <p:spPr>
+          <a:xfrm>
+            <a:off x="1737360" y="5093208"/>
+            <a:ext cx="2926080" cy="365760"/>
+          </a:xfrm>
+          <a:prstGeom prst="rect">
+            <a:avLst/>
+          </a:prstGeom>
+          <a:noFill/>
+          <a:ln/>
+        </p:spPr>
+        <p:txBody>
+          <a:bodyPr wrap="square" lIns="0" tIns="0" rIns="0" bIns="0" rtlCol="0" anchor="ctr"/>
+          <a:lstStyle/>
+          <a:p>
+            <a:pPr indent="0" marL="0">
+              <a:buNone/>
+            </a:pPr>
+            <a:r>
+              <a:rPr lang="en-US" sz="1200" b="1" dirty="0">
+                <a:solidFill>
+                  <a:srgbClr val="1BAF7A"/>
+                </a:solidFill>
+                <a:latin typeface="Yu Gothic" pitchFamily="34" charset="0"/>
+                <a:ea typeface="Yu Gothic" pitchFamily="34" charset="-122"/>
+                <a:cs typeface="Yu Gothic" pitchFamily="34" charset="-120"/>
+              </a:rPr>
+              <a:t>村長・管理者</a:t>
+            </a:r>
+            <a:endParaRPr lang="en-US" sz="1200" dirty="0"/>
+          </a:p>
+        </p:txBody>
+      </p:sp>
+      <p:sp>
+        <p:nvSpPr>
+          <p:cNvPr id="17" name="Text 15"/>
+          <p:cNvSpPr/>
+          <p:nvPr/>
+        </p:nvSpPr>
+        <p:spPr>
+          <a:xfrm>
+            <a:off x="1737360" y="5431536"/>
+            <a:ext cx="9144000" cy="777240"/>
+          </a:xfrm>
+          <a:prstGeom prst="rect">
+            <a:avLst/>
+          </a:prstGeom>
+          <a:noFill/>
+          <a:ln/>
+        </p:spPr>
+        <p:txBody>
+          <a:bodyPr wrap="square" lIns="0" tIns="0" rIns="0" bIns="0" rtlCol="0" anchor="t"/>
           <a:lstStyle/>
           <a:p>
             <a:pPr indent="0" marL="0">
               <a:lnSpc>
-                <a:spcPct val="120000"/>
+                <a:spcPct val="125000"/>
               </a:lnSpc>
               <a:buNone/>
             </a:pPr>
             <a:r>
               <a:rPr lang="en-US" sz="1300" i="1" dirty="0">
                 <a:solidFill>
-                  <a:srgbClr val="F4C878"/>
-                </a:solidFill>
-                <a:latin typeface="Yu Gothic" pitchFamily="34" charset="0"/>
-                <a:ea typeface="Yu Gothic" pitchFamily="34" charset="-122"/>
-                <a:cs typeface="Yu Gothic" pitchFamily="34" charset="-120"/>
-              </a:rPr>
-              <a:t>「孤立せずに済んだ／対立が翻訳された」</a:t>
+                  <a:srgbClr val="AFC9EE"/>
+                </a:solidFill>
+                <a:latin typeface="Yu Gothic" pitchFamily="34" charset="0"/>
+                <a:ea typeface="Yu Gothic" pitchFamily="34" charset="-122"/>
+                <a:cs typeface="Yu Gothic" pitchFamily="34" charset="-120"/>
+              </a:rPr>
+              <a:t>「制度としては住民同士で相談してもらうのが基本だから、世話好きな住民さんが動いてくれるのはありがたいね。」</a:t>
             </a:r>
             <a:endParaRPr lang="en-US" sz="1300" dirty="0"/>
           </a:p>
@@ -12925,366 +13891,7 @@
       </p:sp>
       <p:sp>
         <p:nvSpPr>
-          <p:cNvPr id="12" name="Text 10"/>
-          <p:cNvSpPr/>
-          <p:nvPr/>
-        </p:nvSpPr>
-        <p:spPr>
-          <a:xfrm>
-            <a:off x="5623560" y="3063240"/>
-            <a:ext cx="914400" cy="914400"/>
-          </a:xfrm>
-          <a:prstGeom prst="rect">
-            <a:avLst/>
-          </a:prstGeom>
-          <a:noFill/>
-          <a:ln/>
-        </p:spPr>
-        <p:txBody>
-          <a:bodyPr wrap="square" lIns="0" tIns="0" rIns="0" bIns="0" rtlCol="0" anchor="ctr"/>
-          <a:lstStyle/>
-          <a:p>
-            <a:pPr algn="ctr" indent="0" marL="0">
-              <a:buNone/>
-            </a:pPr>
-            <a:r>
-              <a:rPr lang="en-US" sz="2200" dirty="0">
-                <a:solidFill>
-                  <a:srgbClr val="9AA4C0"/>
-                </a:solidFill>
-                <a:latin typeface="Yu Gothic" pitchFamily="34" charset="0"/>
-                <a:ea typeface="Yu Gothic" pitchFamily="34" charset="-122"/>
-                <a:cs typeface="Yu Gothic" pitchFamily="34" charset="-120"/>
-              </a:rPr>
-              <a:t>→</a:t>
-            </a:r>
-            <a:endParaRPr lang="en-US" sz="2200" dirty="0"/>
-          </a:p>
-        </p:txBody>
-      </p:sp>
-      <p:sp>
-        <p:nvSpPr>
-          <p:cNvPr id="13" name="Shape 11"/>
-          <p:cNvSpPr/>
-          <p:nvPr/>
-        </p:nvSpPr>
-        <p:spPr>
-          <a:xfrm>
-            <a:off x="6675120" y="3063240"/>
-            <a:ext cx="4937760" cy="914400"/>
-          </a:xfrm>
-          <a:prstGeom prst="roundRect">
-            <a:avLst>
-              <a:gd name="adj" fmla="val 12000"/>
-            </a:avLst>
-          </a:prstGeom>
-          <a:solidFill>
-            <a:srgbClr val="16213A"/>
-          </a:solidFill>
-          <a:ln/>
-          <a:effectLst>
-            <a:outerShdw sx="100000" sy="100000" kx="0" ky="0" algn="bl" rotWithShape="0" blurRad="101600" dist="38100" dir="5400000">
-              <a:srgbClr val="000000">
-                <a:alpha val="35000"/>
-              </a:srgbClr>
-            </a:outerShdw>
-          </a:effectLst>
-        </p:spPr>
-      </p:sp>
-      <p:sp>
-        <p:nvSpPr>
-          <p:cNvPr id="14" name="Text 12"/>
-          <p:cNvSpPr/>
-          <p:nvPr/>
-        </p:nvSpPr>
-        <p:spPr>
-          <a:xfrm>
-            <a:off x="6903720" y="3063240"/>
-            <a:ext cx="4480560" cy="914400"/>
-          </a:xfrm>
-          <a:prstGeom prst="rect">
-            <a:avLst/>
-          </a:prstGeom>
-          <a:noFill/>
-          <a:ln/>
-        </p:spPr>
-        <p:txBody>
-          <a:bodyPr wrap="square" lIns="0" tIns="0" rIns="0" bIns="0" rtlCol="0" anchor="ctr"/>
-          <a:lstStyle/>
-          <a:p>
-            <a:pPr indent="0" marL="0">
-              <a:lnSpc>
-                <a:spcPct val="120000"/>
-              </a:lnSpc>
-              <a:buNone/>
-            </a:pPr>
-            <a:r>
-              <a:rPr lang="en-US" sz="1300" b="1" dirty="0">
-                <a:solidFill>
-                  <a:srgbClr val="5A8FD6"/>
-                </a:solidFill>
-                <a:latin typeface="Yu Gothic" pitchFamily="34" charset="0"/>
-                <a:ea typeface="Yu Gothic" pitchFamily="34" charset="-122"/>
-                <a:cs typeface="Yu Gothic" pitchFamily="34" charset="-120"/>
-              </a:rPr>
-              <a:t>離脱コストの回避・炎上防止</a:t>
-            </a:r>
-            <a:endParaRPr lang="en-US" sz="1300" dirty="0"/>
-          </a:p>
-        </p:txBody>
-      </p:sp>
-      <p:sp>
-        <p:nvSpPr>
-          <p:cNvPr id="15" name="Shape 13"/>
-          <p:cNvSpPr/>
-          <p:nvPr/>
-        </p:nvSpPr>
-        <p:spPr>
-          <a:xfrm>
-            <a:off x="548640" y="4160520"/>
-            <a:ext cx="4937760" cy="914400"/>
-          </a:xfrm>
-          <a:prstGeom prst="roundRect">
-            <a:avLst>
-              <a:gd name="adj" fmla="val 12000"/>
-            </a:avLst>
-          </a:prstGeom>
-          <a:solidFill>
-            <a:srgbClr val="1C2C4A"/>
-          </a:solidFill>
-          <a:ln/>
-          <a:effectLst>
-            <a:outerShdw sx="100000" sy="100000" kx="0" ky="0" algn="bl" rotWithShape="0" blurRad="101600" dist="38100" dir="5400000">
-              <a:srgbClr val="000000">
-                <a:alpha val="35000"/>
-              </a:srgbClr>
-            </a:outerShdw>
-          </a:effectLst>
-        </p:spPr>
-      </p:sp>
-      <p:sp>
-        <p:nvSpPr>
-          <p:cNvPr id="16" name="Text 14"/>
-          <p:cNvSpPr/>
-          <p:nvPr/>
-        </p:nvSpPr>
-        <p:spPr>
-          <a:xfrm>
-            <a:off x="777240" y="4160520"/>
-            <a:ext cx="4480560" cy="914400"/>
-          </a:xfrm>
-          <a:prstGeom prst="rect">
-            <a:avLst/>
-          </a:prstGeom>
-          <a:noFill/>
-          <a:ln/>
-        </p:spPr>
-        <p:txBody>
-          <a:bodyPr wrap="square" lIns="0" tIns="0" rIns="0" bIns="0" rtlCol="0" anchor="ctr"/>
-          <a:lstStyle/>
-          <a:p>
-            <a:pPr indent="0" marL="0">
-              <a:lnSpc>
-                <a:spcPct val="120000"/>
-              </a:lnSpc>
-              <a:buNone/>
-            </a:pPr>
-            <a:r>
-              <a:rPr lang="en-US" sz="1300" i="1" dirty="0">
-                <a:solidFill>
-                  <a:srgbClr val="F4C878"/>
-                </a:solidFill>
-                <a:latin typeface="Yu Gothic" pitchFamily="34" charset="0"/>
-                <a:ea typeface="Yu Gothic" pitchFamily="34" charset="-122"/>
-                <a:cs typeface="Yu Gothic" pitchFamily="34" charset="-120"/>
-              </a:rPr>
-              <a:t>「自分でも問題に対処できるようになった」</a:t>
-            </a:r>
-            <a:endParaRPr lang="en-US" sz="1300" dirty="0"/>
-          </a:p>
-        </p:txBody>
-      </p:sp>
-      <p:sp>
-        <p:nvSpPr>
-          <p:cNvPr id="17" name="Text 15"/>
-          <p:cNvSpPr/>
-          <p:nvPr/>
-        </p:nvSpPr>
-        <p:spPr>
-          <a:xfrm>
-            <a:off x="5623560" y="4160520"/>
-            <a:ext cx="914400" cy="914400"/>
-          </a:xfrm>
-          <a:prstGeom prst="rect">
-            <a:avLst/>
-          </a:prstGeom>
-          <a:noFill/>
-          <a:ln/>
-        </p:spPr>
-        <p:txBody>
-          <a:bodyPr wrap="square" lIns="0" tIns="0" rIns="0" bIns="0" rtlCol="0" anchor="ctr"/>
-          <a:lstStyle/>
-          <a:p>
-            <a:pPr algn="ctr" indent="0" marL="0">
-              <a:buNone/>
-            </a:pPr>
-            <a:r>
-              <a:rPr lang="en-US" sz="2200" dirty="0">
-                <a:solidFill>
-                  <a:srgbClr val="9AA4C0"/>
-                </a:solidFill>
-                <a:latin typeface="Yu Gothic" pitchFamily="34" charset="0"/>
-                <a:ea typeface="Yu Gothic" pitchFamily="34" charset="-122"/>
-                <a:cs typeface="Yu Gothic" pitchFamily="34" charset="-120"/>
-              </a:rPr>
-              <a:t>→</a:t>
-            </a:r>
-            <a:endParaRPr lang="en-US" sz="2200" dirty="0"/>
-          </a:p>
-        </p:txBody>
-      </p:sp>
-      <p:sp>
-        <p:nvSpPr>
-          <p:cNvPr id="18" name="Shape 16"/>
-          <p:cNvSpPr/>
-          <p:nvPr/>
-        </p:nvSpPr>
-        <p:spPr>
-          <a:xfrm>
-            <a:off x="6675120" y="4160520"/>
-            <a:ext cx="4937760" cy="914400"/>
-          </a:xfrm>
-          <a:prstGeom prst="roundRect">
-            <a:avLst>
-              <a:gd name="adj" fmla="val 12000"/>
-            </a:avLst>
-          </a:prstGeom>
-          <a:solidFill>
-            <a:srgbClr val="16213A"/>
-          </a:solidFill>
-          <a:ln/>
-          <a:effectLst>
-            <a:outerShdw sx="100000" sy="100000" kx="0" ky="0" algn="bl" rotWithShape="0" blurRad="101600" dist="38100" dir="5400000">
-              <a:srgbClr val="000000">
-                <a:alpha val="35000"/>
-              </a:srgbClr>
-            </a:outerShdw>
-          </a:effectLst>
-        </p:spPr>
-      </p:sp>
-      <p:sp>
-        <p:nvSpPr>
-          <p:cNvPr id="19" name="Text 17"/>
-          <p:cNvSpPr/>
-          <p:nvPr/>
-        </p:nvSpPr>
-        <p:spPr>
-          <a:xfrm>
-            <a:off x="6903720" y="4160520"/>
-            <a:ext cx="4480560" cy="914400"/>
-          </a:xfrm>
-          <a:prstGeom prst="rect">
-            <a:avLst/>
-          </a:prstGeom>
-          <a:noFill/>
-          <a:ln/>
-        </p:spPr>
-        <p:txBody>
-          <a:bodyPr wrap="square" lIns="0" tIns="0" rIns="0" bIns="0" rtlCol="0" anchor="ctr"/>
-          <a:lstStyle/>
-          <a:p>
-            <a:pPr indent="0" marL="0">
-              <a:lnSpc>
-                <a:spcPct val="120000"/>
-              </a:lnSpc>
-              <a:buNone/>
-            </a:pPr>
-            <a:r>
-              <a:rPr lang="en-US" sz="1300" b="1" dirty="0">
-                <a:solidFill>
-                  <a:srgbClr val="5A8FD6"/>
-                </a:solidFill>
-                <a:latin typeface="Yu Gothic" pitchFamily="34" charset="0"/>
-                <a:ea typeface="Yu Gothic" pitchFamily="34" charset="-122"/>
-                <a:cs typeface="Yu Gothic" pitchFamily="34" charset="-120"/>
-              </a:rPr>
-              <a:t>組織のレジリエンス向上・意思決定の高速化</a:t>
-            </a:r>
-            <a:endParaRPr lang="en-US" sz="1300" dirty="0"/>
-          </a:p>
-        </p:txBody>
-      </p:sp>
-      <p:sp>
-        <p:nvSpPr>
-          <p:cNvPr id="20" name="Shape 18"/>
-          <p:cNvSpPr/>
-          <p:nvPr/>
-        </p:nvSpPr>
-        <p:spPr>
-          <a:xfrm>
-            <a:off x="548640" y="5303520"/>
-            <a:ext cx="11091672" cy="822960"/>
-          </a:xfrm>
-          <a:prstGeom prst="roundRect">
-            <a:avLst>
-              <a:gd name="adj" fmla="val 11111"/>
-            </a:avLst>
-          </a:prstGeom>
-          <a:solidFill>
-            <a:srgbClr val="16213A"/>
-          </a:solidFill>
-          <a:ln/>
-          <a:effectLst>
-            <a:outerShdw sx="100000" sy="100000" kx="0" ky="0" algn="bl" rotWithShape="0" blurRad="101600" dist="38100" dir="5400000">
-              <a:srgbClr val="000000">
-                <a:alpha val="35000"/>
-              </a:srgbClr>
-            </a:outerShdw>
-          </a:effectLst>
-        </p:spPr>
-      </p:sp>
-      <p:sp>
-        <p:nvSpPr>
-          <p:cNvPr id="21" name="Text 19"/>
-          <p:cNvSpPr/>
-          <p:nvPr/>
-        </p:nvSpPr>
-        <p:spPr>
-          <a:xfrm>
-            <a:off x="868680" y="5303520"/>
-            <a:ext cx="10515600" cy="822960"/>
-          </a:xfrm>
-          <a:prstGeom prst="rect">
-            <a:avLst/>
-          </a:prstGeom>
-          <a:noFill/>
-          <a:ln/>
-        </p:spPr>
-        <p:txBody>
-          <a:bodyPr wrap="square" lIns="0" tIns="0" rIns="0" bIns="0" rtlCol="0" anchor="ctr"/>
-          <a:lstStyle/>
-          <a:p>
-            <a:pPr indent="0" marL="0">
-              <a:buNone/>
-            </a:pPr>
-            <a:r>
-              <a:rPr lang="en-US" sz="1400" b="1" dirty="0">
-                <a:solidFill>
-                  <a:srgbClr val="FFFFFF"/>
-                </a:solidFill>
-                <a:latin typeface="Yu Gothic" pitchFamily="34" charset="0"/>
-                <a:ea typeface="Yu Gothic" pitchFamily="34" charset="-122"/>
-                <a:cs typeface="Yu Gothic" pitchFamily="34" charset="-120"/>
-              </a:rPr>
-              <a:t>人を支える行為は「美談」ではない。組織の持続可能性と安全保障に直結する。</a:t>
-            </a:r>
-            <a:endParaRPr lang="en-US" sz="1400" dirty="0"/>
-          </a:p>
-        </p:txBody>
-      </p:sp>
-      <p:sp>
-        <p:nvSpPr>
-          <p:cNvPr id="22" name="Text 20"/>
+          <p:cNvPr id="18" name="Text 16"/>
           <p:cNvSpPr/>
           <p:nvPr/>
         </p:nvSpPr>
@@ -13323,7 +13930,7 @@
       </p:sp>
       <p:sp>
         <p:nvSpPr>
-          <p:cNvPr id="23" name="Text 21"/>
+          <p:cNvPr id="19" name="Text 17"/>
           <p:cNvSpPr/>
           <p:nvPr/>
         </p:nvSpPr>
@@ -13425,7 +14032,7 @@
                 <a:ea typeface="Yu Gothic" pitchFamily="34" charset="-122"/>
                 <a:cs typeface="Yu Gothic" pitchFamily="34" charset="-120"/>
               </a:rPr>
-              <a:t>フラクタルな構造：村から国家の「メタ安全保障」へ</a:t>
+              <a:t>考察：4つの発見</a:t>
             </a:r>
             <a:endParaRPr lang="en-US" sz="3000" dirty="0"/>
           </a:p>
@@ -13439,12 +14046,12 @@
         </p:nvSpPr>
         <p:spPr>
           <a:xfrm>
-            <a:off x="641452" y="1874520"/>
-            <a:ext cx="3429000" cy="2880360"/>
+            <a:off x="548640" y="1554480"/>
+            <a:ext cx="11091672" cy="1060704"/>
           </a:xfrm>
           <a:prstGeom prst="roundRect">
             <a:avLst>
-              <a:gd name="adj" fmla="val 3810"/>
+              <a:gd name="adj" fmla="val 10345"/>
             </a:avLst>
           </a:prstGeom>
           <a:solidFill>
@@ -13468,62 +14075,18 @@
         </p:nvSpPr>
         <p:spPr>
           <a:xfrm>
-            <a:off x="1450696" y="1746504"/>
-            <a:ext cx="1810512" cy="1810512"/>
+            <a:off x="960120" y="1810512"/>
+            <a:ext cx="548640" cy="548640"/>
           </a:xfrm>
           <a:prstGeom prst="ellipse">
             <a:avLst/>
           </a:prstGeom>
           <a:solidFill>
-            <a:srgbClr val="1BAF7A">
-              <a:alpha val="12000"/>
-            </a:srgbClr>
-          </a:solidFill>
-          <a:ln/>
-        </p:spPr>
-      </p:sp>
-      <p:sp>
-        <p:nvSpPr>
-          <p:cNvPr id="5" name="Shape 3"/>
-          <p:cNvSpPr/>
-          <p:nvPr/>
-        </p:nvSpPr>
-        <p:spPr>
-          <a:xfrm>
-            <a:off x="1697584" y="1993392"/>
-            <a:ext cx="1316736" cy="1316736"/>
-          </a:xfrm>
-          <a:prstGeom prst="ellipse">
-            <a:avLst/>
-          </a:prstGeom>
-          <a:solidFill>
-            <a:srgbClr val="1BAF7A">
-              <a:alpha val="22000"/>
-            </a:srgbClr>
-          </a:solidFill>
-          <a:ln/>
-        </p:spPr>
-      </p:sp>
-      <p:sp>
-        <p:nvSpPr>
-          <p:cNvPr id="6" name="Shape 4"/>
-          <p:cNvSpPr/>
-          <p:nvPr/>
-        </p:nvSpPr>
-        <p:spPr>
-          <a:xfrm>
-            <a:off x="1944472" y="2240280"/>
-            <a:ext cx="822960" cy="822960"/>
-          </a:xfrm>
-          <a:prstGeom prst="ellipse">
-            <a:avLst/>
-          </a:prstGeom>
-          <a:solidFill>
-            <a:srgbClr val="1BAF7A"/>
+            <a:srgbClr val="E8A33D"/>
           </a:solidFill>
           <a:ln w="9525">
             <a:solidFill>
-              <a:srgbClr val="1BAF7A"/>
+              <a:srgbClr val="E8A33D"/>
             </a:solidFill>
             <a:prstDash val="solid"/>
           </a:ln>
@@ -13531,7 +14094,7 @@
       </p:sp>
       <p:pic>
         <p:nvPicPr>
-          <p:cNvPr id="7" name="Image 0" descr="preencoded.png">    </p:cNvPr>
+          <p:cNvPr id="5" name="Image 0" descr="preencoded.png">    </p:cNvPr>
           <p:cNvPicPr>
             <a:picLocks noChangeAspect="1"/>
           </p:cNvPicPr>
@@ -13545,8 +14108,8 @@
         </p:blipFill>
         <p:spPr>
           <a:xfrm>
-            <a:off x="2158441" y="2454250"/>
-            <a:ext cx="395021" cy="395021"/>
+            <a:off x="1102766" y="1953158"/>
+            <a:ext cx="263347" cy="263347"/>
           </a:xfrm>
           <a:prstGeom prst="rect">
             <a:avLst/>
@@ -13555,30 +14118,30 @@
       </p:pic>
       <p:sp>
         <p:nvSpPr>
-          <p:cNvPr id="8" name="Text 5"/>
-          <p:cNvSpPr/>
-          <p:nvPr/>
-        </p:nvSpPr>
-        <p:spPr>
-          <a:xfrm>
-            <a:off x="778612" y="3200400"/>
-            <a:ext cx="3154680" cy="411480"/>
-          </a:xfrm>
-          <a:prstGeom prst="rect">
-            <a:avLst/>
-          </a:prstGeom>
-          <a:noFill/>
-          <a:ln/>
-        </p:spPr>
-        <p:txBody>
-          <a:bodyPr wrap="square" lIns="0" tIns="0" rIns="0" bIns="0" rtlCol="0" anchor="ctr"/>
-          <a:lstStyle/>
-          <a:p>
-            <a:pPr algn="ctr" indent="0" marL="0">
-              <a:buNone/>
-            </a:pPr>
-            <a:r>
-              <a:rPr lang="en-US" sz="1700" b="1" dirty="0">
+          <p:cNvPr id="6" name="Text 3"/>
+          <p:cNvSpPr/>
+          <p:nvPr/>
+        </p:nvSpPr>
+        <p:spPr>
+          <a:xfrm>
+            <a:off x="1874520" y="1682496"/>
+            <a:ext cx="9509760" cy="384048"/>
+          </a:xfrm>
+          <a:prstGeom prst="rect">
+            <a:avLst/>
+          </a:prstGeom>
+          <a:noFill/>
+          <a:ln/>
+        </p:spPr>
+        <p:txBody>
+          <a:bodyPr wrap="square" lIns="0" tIns="0" rIns="0" bIns="0" rtlCol="0" anchor="ctr"/>
+          <a:lstStyle/>
+          <a:p>
+            <a:pPr indent="0" marL="0">
+              <a:buNone/>
+            </a:pPr>
+            <a:r>
+              <a:rPr lang="en-US" sz="1400" b="1" dirty="0">
                 <a:solidFill>
                   <a:srgbClr val="FFFFFF"/>
                 </a:solidFill>
@@ -13586,41 +14149,41 @@
                 <a:ea typeface="Yu Gothic" pitchFamily="34" charset="-122"/>
                 <a:cs typeface="Yu Gothic" pitchFamily="34" charset="-120"/>
               </a:rPr>
-              <a:t>村</a:t>
-            </a:r>
-            <a:endParaRPr lang="en-US" sz="1700" dirty="0"/>
-          </a:p>
-        </p:txBody>
-      </p:sp>
-      <p:sp>
-        <p:nvSpPr>
-          <p:cNvPr id="9" name="Text 6"/>
-          <p:cNvSpPr/>
-          <p:nvPr/>
-        </p:nvSpPr>
-        <p:spPr>
-          <a:xfrm>
-            <a:off x="915772" y="3657600"/>
-            <a:ext cx="2880360" cy="914400"/>
-          </a:xfrm>
-          <a:prstGeom prst="rect">
-            <a:avLst/>
-          </a:prstGeom>
-          <a:noFill/>
-          <a:ln/>
-        </p:spPr>
-        <p:txBody>
-          <a:bodyPr wrap="square" lIns="0" tIns="0" rIns="0" bIns="0" rtlCol="0" anchor="ctr"/>
-          <a:lstStyle/>
-          <a:p>
-            <a:pPr algn="ctr" indent="0" marL="0">
+              <a:t>依存の代償は、危機の前から発生している</a:t>
+            </a:r>
+            <a:endParaRPr lang="en-US" sz="1400" dirty="0"/>
+          </a:p>
+        </p:txBody>
+      </p:sp>
+      <p:sp>
+        <p:nvSpPr>
+          <p:cNvPr id="7" name="Text 4"/>
+          <p:cNvSpPr/>
+          <p:nvPr/>
+        </p:nvSpPr>
+        <p:spPr>
+          <a:xfrm>
+            <a:off x="1874520" y="2066544"/>
+            <a:ext cx="9509760" cy="530352"/>
+          </a:xfrm>
+          <a:prstGeom prst="rect">
+            <a:avLst/>
+          </a:prstGeom>
+          <a:noFill/>
+          <a:ln/>
+        </p:spPr>
+        <p:txBody>
+          <a:bodyPr wrap="square" lIns="0" tIns="0" rIns="0" bIns="0" rtlCol="0" anchor="ctr"/>
+          <a:lstStyle/>
+          <a:p>
+            <a:pPr indent="0" marL="0">
               <a:lnSpc>
-                <a:spcPct val="130000"/>
+                <a:spcPct val="120000"/>
               </a:lnSpc>
               <a:buNone/>
             </a:pPr>
             <a:r>
-              <a:rPr lang="en-US" sz="1300" dirty="0">
+              <a:rPr lang="en-US" sz="1150" dirty="0">
                 <a:solidFill>
                   <a:srgbClr val="AFC9EE"/>
                 </a:solidFill>
@@ -13628,26 +14191,26 @@
                 <a:ea typeface="Yu Gothic" pitchFamily="34" charset="-122"/>
                 <a:cs typeface="Yu Gothic" pitchFamily="34" charset="-120"/>
               </a:rPr>
-              <a:t>「世話焼きへの過度な依存」と疲弊</a:t>
-            </a:r>
-            <a:endParaRPr lang="en-US" sz="1300" dirty="0"/>
-          </a:p>
-        </p:txBody>
-      </p:sp>
-      <p:sp>
-        <p:nvSpPr>
-          <p:cNvPr id="10" name="Shape 7"/>
-          <p:cNvSpPr/>
-          <p:nvPr/>
-        </p:nvSpPr>
-        <p:spPr>
-          <a:xfrm>
-            <a:off x="4381348" y="1874520"/>
-            <a:ext cx="3429000" cy="2880360"/>
+              <a:t>危機の起きないA条件でも救済者依存度は88でB条件（90）とほぼ同じ。壊れるのは危機の瞬間ではなく、運用設計の時点で決まっている。</a:t>
+            </a:r>
+            <a:endParaRPr lang="en-US" sz="1150" dirty="0"/>
+          </a:p>
+        </p:txBody>
+      </p:sp>
+      <p:sp>
+        <p:nvSpPr>
+          <p:cNvPr id="8" name="Shape 5"/>
+          <p:cNvSpPr/>
+          <p:nvPr/>
+        </p:nvSpPr>
+        <p:spPr>
+          <a:xfrm>
+            <a:off x="548640" y="2761488"/>
+            <a:ext cx="11091672" cy="1060704"/>
           </a:xfrm>
           <a:prstGeom prst="roundRect">
             <a:avLst>
-              <a:gd name="adj" fmla="val 3810"/>
+              <a:gd name="adj" fmla="val 10345"/>
             </a:avLst>
           </a:prstGeom>
           <a:solidFill>
@@ -13665,68 +14228,24 @@
       </p:sp>
       <p:sp>
         <p:nvSpPr>
-          <p:cNvPr id="11" name="Shape 8"/>
-          <p:cNvSpPr/>
-          <p:nvPr/>
-        </p:nvSpPr>
-        <p:spPr>
-          <a:xfrm>
-            <a:off x="5190592" y="1746504"/>
-            <a:ext cx="1810512" cy="1810512"/>
+          <p:cNvPr id="9" name="Shape 6"/>
+          <p:cNvSpPr/>
+          <p:nvPr/>
+        </p:nvSpPr>
+        <p:spPr>
+          <a:xfrm>
+            <a:off x="960120" y="3017520"/>
+            <a:ext cx="548640" cy="548640"/>
           </a:xfrm>
           <a:prstGeom prst="ellipse">
             <a:avLst/>
           </a:prstGeom>
           <a:solidFill>
-            <a:srgbClr val="2A78D6">
-              <a:alpha val="12000"/>
-            </a:srgbClr>
-          </a:solidFill>
-          <a:ln/>
-        </p:spPr>
-      </p:sp>
-      <p:sp>
-        <p:nvSpPr>
-          <p:cNvPr id="12" name="Shape 9"/>
-          <p:cNvSpPr/>
-          <p:nvPr/>
-        </p:nvSpPr>
-        <p:spPr>
-          <a:xfrm>
-            <a:off x="5437480" y="1993392"/>
-            <a:ext cx="1316736" cy="1316736"/>
-          </a:xfrm>
-          <a:prstGeom prst="ellipse">
-            <a:avLst/>
-          </a:prstGeom>
-          <a:solidFill>
-            <a:srgbClr val="2A78D6">
-              <a:alpha val="22000"/>
-            </a:srgbClr>
-          </a:solidFill>
-          <a:ln/>
-        </p:spPr>
-      </p:sp>
-      <p:sp>
-        <p:nvSpPr>
-          <p:cNvPr id="13" name="Shape 10"/>
-          <p:cNvSpPr/>
-          <p:nvPr/>
-        </p:nvSpPr>
-        <p:spPr>
-          <a:xfrm>
-            <a:off x="5684368" y="2240280"/>
-            <a:ext cx="822960" cy="822960"/>
-          </a:xfrm>
-          <a:prstGeom prst="ellipse">
-            <a:avLst/>
-          </a:prstGeom>
-          <a:solidFill>
-            <a:srgbClr val="2A78D6"/>
+            <a:srgbClr val="E8A33D"/>
           </a:solidFill>
           <a:ln w="9525">
             <a:solidFill>
-              <a:srgbClr val="2A78D6"/>
+              <a:srgbClr val="E8A33D"/>
             </a:solidFill>
             <a:prstDash val="solid"/>
           </a:ln>
@@ -13734,7 +14253,7 @@
       </p:sp>
       <p:pic>
         <p:nvPicPr>
-          <p:cNvPr id="14" name="Image 1" descr="preencoded.png">    </p:cNvPr>
+          <p:cNvPr id="10" name="Image 1" descr="preencoded.png">    </p:cNvPr>
           <p:cNvPicPr>
             <a:picLocks noChangeAspect="1"/>
           </p:cNvPicPr>
@@ -13748,8 +14267,8 @@
         </p:blipFill>
         <p:spPr>
           <a:xfrm>
-            <a:off x="5898337" y="2454250"/>
-            <a:ext cx="395021" cy="395021"/>
+            <a:off x="1102766" y="3160166"/>
+            <a:ext cx="263347" cy="263347"/>
           </a:xfrm>
           <a:prstGeom prst="rect">
             <a:avLst/>
@@ -13758,30 +14277,30 @@
       </p:pic>
       <p:sp>
         <p:nvSpPr>
-          <p:cNvPr id="15" name="Text 11"/>
-          <p:cNvSpPr/>
-          <p:nvPr/>
-        </p:nvSpPr>
-        <p:spPr>
-          <a:xfrm>
-            <a:off x="4518508" y="3200400"/>
-            <a:ext cx="3154680" cy="411480"/>
-          </a:xfrm>
-          <a:prstGeom prst="rect">
-            <a:avLst/>
-          </a:prstGeom>
-          <a:noFill/>
-          <a:ln/>
-        </p:spPr>
-        <p:txBody>
-          <a:bodyPr wrap="square" lIns="0" tIns="0" rIns="0" bIns="0" rtlCol="0" anchor="ctr"/>
-          <a:lstStyle/>
-          <a:p>
-            <a:pPr algn="ctr" indent="0" marL="0">
-              <a:buNone/>
-            </a:pPr>
-            <a:r>
-              <a:rPr lang="en-US" sz="1700" b="1" dirty="0">
+          <p:cNvPr id="11" name="Text 7"/>
+          <p:cNvSpPr/>
+          <p:nvPr/>
+        </p:nvSpPr>
+        <p:spPr>
+          <a:xfrm>
+            <a:off x="1874520" y="2889504"/>
+            <a:ext cx="9509760" cy="384048"/>
+          </a:xfrm>
+          <a:prstGeom prst="rect">
+            <a:avLst/>
+          </a:prstGeom>
+          <a:noFill/>
+          <a:ln/>
+        </p:spPr>
+        <p:txBody>
+          <a:bodyPr wrap="square" lIns="0" tIns="0" rIns="0" bIns="0" rtlCol="0" anchor="ctr"/>
+          <a:lstStyle/>
+          <a:p>
+            <a:pPr indent="0" marL="0">
+              <a:buNone/>
+            </a:pPr>
+            <a:r>
+              <a:rPr lang="en-US" sz="1400" b="1" dirty="0">
                 <a:solidFill>
                   <a:srgbClr val="FFFFFF"/>
                 </a:solidFill>
@@ -13789,41 +14308,41 @@
                 <a:ea typeface="Yu Gothic" pitchFamily="34" charset="-122"/>
                 <a:cs typeface="Yu Gothic" pitchFamily="34" charset="-120"/>
               </a:rPr>
-              <a:t>都市</a:t>
-            </a:r>
-            <a:endParaRPr lang="en-US" sz="1700" dirty="0"/>
-          </a:p>
-        </p:txBody>
-      </p:sp>
-      <p:sp>
-        <p:nvSpPr>
-          <p:cNvPr id="16" name="Text 12"/>
-          <p:cNvSpPr/>
-          <p:nvPr/>
-        </p:nvSpPr>
-        <p:spPr>
-          <a:xfrm>
-            <a:off x="4655668" y="3657600"/>
-            <a:ext cx="2880360" cy="914400"/>
-          </a:xfrm>
-          <a:prstGeom prst="rect">
-            <a:avLst/>
-          </a:prstGeom>
-          <a:noFill/>
-          <a:ln/>
-        </p:spPr>
-        <p:txBody>
-          <a:bodyPr wrap="square" lIns="0" tIns="0" rIns="0" bIns="0" rtlCol="0" anchor="ctr"/>
-          <a:lstStyle/>
-          <a:p>
-            <a:pPr algn="ctr" indent="0" marL="0">
+              <a:t>依存は安定し、自律は不安定である</a:t>
+            </a:r>
+            <a:endParaRPr lang="en-US" sz="1400" dirty="0"/>
+          </a:p>
+        </p:txBody>
+      </p:sp>
+      <p:sp>
+        <p:nvSpPr>
+          <p:cNvPr id="12" name="Text 8"/>
+          <p:cNvSpPr/>
+          <p:nvPr/>
+        </p:nvSpPr>
+        <p:spPr>
+          <a:xfrm>
+            <a:off x="1874520" y="3273552"/>
+            <a:ext cx="9509760" cy="530352"/>
+          </a:xfrm>
+          <a:prstGeom prst="rect">
+            <a:avLst/>
+          </a:prstGeom>
+          <a:noFill/>
+          <a:ln/>
+        </p:spPr>
+        <p:txBody>
+          <a:bodyPr wrap="square" lIns="0" tIns="0" rIns="0" bIns="0" rtlCol="0" anchor="ctr"/>
+          <a:lstStyle/>
+          <a:p>
+            <a:pPr indent="0" marL="0">
               <a:lnSpc>
-                <a:spcPct val="130000"/>
+                <a:spcPct val="120000"/>
               </a:lnSpc>
               <a:buNone/>
             </a:pPr>
             <a:r>
-              <a:rPr lang="en-US" sz="1300" dirty="0">
+              <a:rPr lang="en-US" sz="1150" dirty="0">
                 <a:solidFill>
                   <a:srgbClr val="AFC9EE"/>
                 </a:solidFill>
@@ -13831,26 +14350,26 @@
                 <a:ea typeface="Yu Gothic" pitchFamily="34" charset="-122"/>
                 <a:cs typeface="Yu Gothic" pitchFamily="34" charset="-120"/>
               </a:rPr>
-              <a:t>「支援制度の複雑化」と、誰にも届かないSOS</a:t>
-            </a:r>
-            <a:endParaRPr lang="en-US" sz="1300" dirty="0"/>
-          </a:p>
-        </p:txBody>
-      </p:sp>
-      <p:sp>
-        <p:nvSpPr>
-          <p:cNvPr id="17" name="Shape 13"/>
-          <p:cNvSpPr/>
-          <p:nvPr/>
-        </p:nvSpPr>
-        <p:spPr>
-          <a:xfrm>
-            <a:off x="8121244" y="1874520"/>
-            <a:ext cx="3429000" cy="2880360"/>
+              <a:t>A・Bの標準偏差はほぼ0で毎回きっちり再現される。一方Cは±20〜26。悪い状態のほうが「安定」しているという非対称性がある。</a:t>
+            </a:r>
+            <a:endParaRPr lang="en-US" sz="1150" dirty="0"/>
+          </a:p>
+        </p:txBody>
+      </p:sp>
+      <p:sp>
+        <p:nvSpPr>
+          <p:cNvPr id="13" name="Shape 9"/>
+          <p:cNvSpPr/>
+          <p:nvPr/>
+        </p:nvSpPr>
+        <p:spPr>
+          <a:xfrm>
+            <a:off x="548640" y="3968496"/>
+            <a:ext cx="11091672" cy="1060704"/>
           </a:xfrm>
           <a:prstGeom prst="roundRect">
             <a:avLst>
-              <a:gd name="adj" fmla="val 3810"/>
+              <a:gd name="adj" fmla="val 10345"/>
             </a:avLst>
           </a:prstGeom>
           <a:solidFill>
@@ -13868,68 +14387,24 @@
       </p:sp>
       <p:sp>
         <p:nvSpPr>
-          <p:cNvPr id="18" name="Shape 14"/>
-          <p:cNvSpPr/>
-          <p:nvPr/>
-        </p:nvSpPr>
-        <p:spPr>
-          <a:xfrm>
-            <a:off x="8930488" y="1746504"/>
-            <a:ext cx="1810512" cy="1810512"/>
+          <p:cNvPr id="14" name="Shape 10"/>
+          <p:cNvSpPr/>
+          <p:nvPr/>
+        </p:nvSpPr>
+        <p:spPr>
+          <a:xfrm>
+            <a:off x="960120" y="4224528"/>
+            <a:ext cx="548640" cy="548640"/>
           </a:xfrm>
           <a:prstGeom prst="ellipse">
             <a:avLst/>
           </a:prstGeom>
           <a:solidFill>
-            <a:srgbClr val="EB6834">
-              <a:alpha val="12000"/>
-            </a:srgbClr>
-          </a:solidFill>
-          <a:ln/>
-        </p:spPr>
-      </p:sp>
-      <p:sp>
-        <p:nvSpPr>
-          <p:cNvPr id="19" name="Shape 15"/>
-          <p:cNvSpPr/>
-          <p:nvPr/>
-        </p:nvSpPr>
-        <p:spPr>
-          <a:xfrm>
-            <a:off x="9177376" y="1993392"/>
-            <a:ext cx="1316736" cy="1316736"/>
-          </a:xfrm>
-          <a:prstGeom prst="ellipse">
-            <a:avLst/>
-          </a:prstGeom>
-          <a:solidFill>
-            <a:srgbClr val="EB6834">
-              <a:alpha val="22000"/>
-            </a:srgbClr>
-          </a:solidFill>
-          <a:ln/>
-        </p:spPr>
-      </p:sp>
-      <p:sp>
-        <p:nvSpPr>
-          <p:cNvPr id="20" name="Shape 16"/>
-          <p:cNvSpPr/>
-          <p:nvPr/>
-        </p:nvSpPr>
-        <p:spPr>
-          <a:xfrm>
-            <a:off x="9424264" y="2240280"/>
-            <a:ext cx="822960" cy="822960"/>
-          </a:xfrm>
-          <a:prstGeom prst="ellipse">
-            <a:avLst/>
-          </a:prstGeom>
-          <a:solidFill>
-            <a:srgbClr val="EB6834"/>
+            <a:srgbClr val="E8A33D"/>
           </a:solidFill>
           <a:ln w="9525">
             <a:solidFill>
-              <a:srgbClr val="EB6834"/>
+              <a:srgbClr val="E8A33D"/>
             </a:solidFill>
             <a:prstDash val="solid"/>
           </a:ln>
@@ -13937,7 +14412,7 @@
       </p:sp>
       <p:pic>
         <p:nvPicPr>
-          <p:cNvPr id="21" name="Image 2" descr="preencoded.png">    </p:cNvPr>
+          <p:cNvPr id="15" name="Image 2" descr="preencoded.png">    </p:cNvPr>
           <p:cNvPicPr>
             <a:picLocks noChangeAspect="1"/>
           </p:cNvPicPr>
@@ -13951,8 +14426,8 @@
         </p:blipFill>
         <p:spPr>
           <a:xfrm>
-            <a:off x="9638233" y="2454250"/>
-            <a:ext cx="395021" cy="395021"/>
+            <a:off x="1102766" y="4367174"/>
+            <a:ext cx="263347" cy="263347"/>
           </a:xfrm>
           <a:prstGeom prst="rect">
             <a:avLst/>
@@ -13961,30 +14436,30 @@
       </p:pic>
       <p:sp>
         <p:nvSpPr>
-          <p:cNvPr id="22" name="Text 17"/>
-          <p:cNvSpPr/>
-          <p:nvPr/>
-        </p:nvSpPr>
-        <p:spPr>
-          <a:xfrm>
-            <a:off x="8258404" y="3200400"/>
-            <a:ext cx="3154680" cy="411480"/>
-          </a:xfrm>
-          <a:prstGeom prst="rect">
-            <a:avLst/>
-          </a:prstGeom>
-          <a:noFill/>
-          <a:ln/>
-        </p:spPr>
-        <p:txBody>
-          <a:bodyPr wrap="square" lIns="0" tIns="0" rIns="0" bIns="0" rtlCol="0" anchor="ctr"/>
-          <a:lstStyle/>
-          <a:p>
-            <a:pPr algn="ctr" indent="0" marL="0">
-              <a:buNone/>
-            </a:pPr>
-            <a:r>
-              <a:rPr lang="en-US" sz="1700" b="1" dirty="0">
+          <p:cNvPr id="16" name="Text 11"/>
+          <p:cNvSpPr/>
+          <p:nvPr/>
+        </p:nvSpPr>
+        <p:spPr>
+          <a:xfrm>
+            <a:off x="1874520" y="4096512"/>
+            <a:ext cx="9509760" cy="384048"/>
+          </a:xfrm>
+          <a:prstGeom prst="rect">
+            <a:avLst/>
+          </a:prstGeom>
+          <a:noFill/>
+          <a:ln/>
+        </p:spPr>
+        <p:txBody>
+          <a:bodyPr wrap="square" lIns="0" tIns="0" rIns="0" bIns="0" rtlCol="0" anchor="ctr"/>
+          <a:lstStyle/>
+          <a:p>
+            <a:pPr indent="0" marL="0">
+              <a:buNone/>
+            </a:pPr>
+            <a:r>
+              <a:rPr lang="en-US" sz="1400" b="1" dirty="0">
                 <a:solidFill>
                   <a:srgbClr val="FFFFFF"/>
                 </a:solidFill>
@@ -13992,41 +14467,41 @@
                 <a:ea typeface="Yu Gothic" pitchFamily="34" charset="-122"/>
                 <a:cs typeface="Yu Gothic" pitchFamily="34" charset="-120"/>
               </a:rPr>
-              <a:t>国</a:t>
-            </a:r>
-            <a:endParaRPr lang="en-US" sz="1700" dirty="0"/>
-          </a:p>
-        </p:txBody>
-      </p:sp>
-      <p:sp>
-        <p:nvSpPr>
-          <p:cNvPr id="23" name="Text 18"/>
-          <p:cNvSpPr/>
-          <p:nvPr/>
-        </p:nvSpPr>
-        <p:spPr>
-          <a:xfrm>
-            <a:off x="8395564" y="3657600"/>
-            <a:ext cx="2880360" cy="914400"/>
-          </a:xfrm>
-          <a:prstGeom prst="rect">
-            <a:avLst/>
-          </a:prstGeom>
-          <a:noFill/>
-          <a:ln/>
-        </p:spPr>
-        <p:txBody>
-          <a:bodyPr wrap="square" lIns="0" tIns="0" rIns="0" bIns="0" rtlCol="0" anchor="ctr"/>
-          <a:lstStyle/>
-          <a:p>
-            <a:pPr algn="ctr" indent="0" marL="0">
+              <a:t>「大丈夫です」は安全のサインではなかった</a:t>
+            </a:r>
+            <a:endParaRPr lang="en-US" sz="1400" dirty="0"/>
+          </a:p>
+        </p:txBody>
+      </p:sp>
+      <p:sp>
+        <p:nvSpPr>
+          <p:cNvPr id="17" name="Text 12"/>
+          <p:cNvSpPr/>
+          <p:nvPr/>
+        </p:nvSpPr>
+        <p:spPr>
+          <a:xfrm>
+            <a:off x="1874520" y="4480560"/>
+            <a:ext cx="9509760" cy="530352"/>
+          </a:xfrm>
+          <a:prstGeom prst="rect">
+            <a:avLst/>
+          </a:prstGeom>
+          <a:noFill/>
+          <a:ln/>
+        </p:spPr>
+        <p:txBody>
+          <a:bodyPr wrap="square" lIns="0" tIns="0" rIns="0" bIns="0" rtlCol="0" anchor="ctr"/>
+          <a:lstStyle/>
+          <a:p>
+            <a:pPr indent="0" marL="0">
               <a:lnSpc>
-                <a:spcPct val="130000"/>
+                <a:spcPct val="120000"/>
               </a:lnSpc>
               <a:buNone/>
             </a:pPr>
             <a:r>
-              <a:rPr lang="en-US" sz="1300" dirty="0">
+              <a:rPr lang="en-US" sz="1150" dirty="0">
                 <a:solidFill>
                   <a:srgbClr val="AFC9EE"/>
                 </a:solidFill>
@@ -14034,26 +14509,26 @@
                 <a:ea typeface="Yu Gothic" pitchFamily="34" charset="-122"/>
                 <a:cs typeface="Yu Gothic" pitchFamily="34" charset="-120"/>
               </a:rPr>
-              <a:t>「権力の集中」と、強い指導者への救世主待望</a:t>
-            </a:r>
-            <a:endParaRPr lang="en-US" sz="1300" dirty="0"/>
-          </a:p>
-        </p:txBody>
-      </p:sp>
-      <p:sp>
-        <p:nvSpPr>
-          <p:cNvPr id="24" name="Shape 19"/>
-          <p:cNvSpPr/>
-          <p:nvPr/>
-        </p:nvSpPr>
-        <p:spPr>
-          <a:xfrm>
-            <a:off x="548640" y="5166360"/>
-            <a:ext cx="11091672" cy="960120"/>
+              <a:t>本人は全フェーズで「大丈夫」と言い続けながら、同じログで水路の詰まりを放置し「見てるだけ」と行動が止まっていた。</a:t>
+            </a:r>
+            <a:endParaRPr lang="en-US" sz="1150" dirty="0"/>
+          </a:p>
+        </p:txBody>
+      </p:sp>
+      <p:sp>
+        <p:nvSpPr>
+          <p:cNvPr id="18" name="Shape 13"/>
+          <p:cNvSpPr/>
+          <p:nvPr/>
+        </p:nvSpPr>
+        <p:spPr>
+          <a:xfrm>
+            <a:off x="548640" y="5175504"/>
+            <a:ext cx="11091672" cy="1060704"/>
           </a:xfrm>
           <a:prstGeom prst="roundRect">
             <a:avLst>
-              <a:gd name="adj" fmla="val 9524"/>
+              <a:gd name="adj" fmla="val 10345"/>
             </a:avLst>
           </a:prstGeom>
           <a:solidFill>
@@ -14071,14 +14546,63 @@
       </p:sp>
       <p:sp>
         <p:nvSpPr>
-          <p:cNvPr id="25" name="Text 20"/>
-          <p:cNvSpPr/>
-          <p:nvPr/>
-        </p:nvSpPr>
-        <p:spPr>
-          <a:xfrm>
-            <a:off x="868680" y="5166360"/>
-            <a:ext cx="10515600" cy="960120"/>
+          <p:cNvPr id="19" name="Shape 14"/>
+          <p:cNvSpPr/>
+          <p:nvPr/>
+        </p:nvSpPr>
+        <p:spPr>
+          <a:xfrm>
+            <a:off x="960120" y="5431536"/>
+            <a:ext cx="548640" cy="548640"/>
+          </a:xfrm>
+          <a:prstGeom prst="ellipse">
+            <a:avLst/>
+          </a:prstGeom>
+          <a:solidFill>
+            <a:srgbClr val="E2665A"/>
+          </a:solidFill>
+          <a:ln w="9525">
+            <a:solidFill>
+              <a:srgbClr val="E2665A"/>
+            </a:solidFill>
+            <a:prstDash val="solid"/>
+          </a:ln>
+        </p:spPr>
+      </p:sp>
+      <p:pic>
+        <p:nvPicPr>
+          <p:cNvPr id="20" name="Image 3" descr="preencoded.png">    </p:cNvPr>
+          <p:cNvPicPr>
+            <a:picLocks noChangeAspect="1"/>
+          </p:cNvPicPr>
+          <p:nvPr/>
+        </p:nvPicPr>
+        <p:blipFill>
+          <a:blip r:embed="rId4"/>
+          <a:stretch>
+            <a:fillRect/>
+          </a:stretch>
+        </p:blipFill>
+        <p:spPr>
+          <a:xfrm>
+            <a:off x="1102766" y="5574182"/>
+            <a:ext cx="263347" cy="263347"/>
+          </a:xfrm>
+          <a:prstGeom prst="rect">
+            <a:avLst/>
+          </a:prstGeom>
+        </p:spPr>
+      </p:pic>
+      <p:sp>
+        <p:nvSpPr>
+          <p:cNvPr id="21" name="Text 15"/>
+          <p:cNvSpPr/>
+          <p:nvPr/>
+        </p:nvSpPr>
+        <p:spPr>
+          <a:xfrm>
+            <a:off x="1874520" y="5303520"/>
+            <a:ext cx="9509760" cy="384048"/>
           </a:xfrm>
           <a:prstGeom prst="rect">
             <a:avLst/>
@@ -14094,7 +14618,49 @@
               <a:buNone/>
             </a:pPr>
             <a:r>
-              <a:rPr lang="en-US" sz="1350" dirty="0">
+              <a:rPr lang="en-US" sz="1400" b="1" dirty="0">
+                <a:solidFill>
+                  <a:srgbClr val="FFFFFF"/>
+                </a:solidFill>
+                <a:latin typeface="Yu Gothic" pitchFamily="34" charset="0"/>
+                <a:ea typeface="Yu Gothic" pitchFamily="34" charset="-122"/>
+                <a:cs typeface="Yu Gothic" pitchFamily="34" charset="-120"/>
+              </a:rPr>
+              <a:t>構造は頑健で、テコは脆かった</a:t>
+            </a:r>
+            <a:endParaRPr lang="en-US" sz="1400" dirty="0"/>
+          </a:p>
+        </p:txBody>
+      </p:sp>
+      <p:sp>
+        <p:nvSpPr>
+          <p:cNvPr id="22" name="Text 16"/>
+          <p:cNvSpPr/>
+          <p:nvPr/>
+        </p:nvSpPr>
+        <p:spPr>
+          <a:xfrm>
+            <a:off x="1874520" y="5687568"/>
+            <a:ext cx="9509760" cy="530352"/>
+          </a:xfrm>
+          <a:prstGeom prst="rect">
+            <a:avLst/>
+          </a:prstGeom>
+          <a:noFill/>
+          <a:ln/>
+        </p:spPr>
+        <p:txBody>
+          <a:bodyPr wrap="square" lIns="0" tIns="0" rIns="0" bIns="0" rtlCol="0" anchor="ctr"/>
+          <a:lstStyle/>
+          <a:p>
+            <a:pPr indent="0" marL="0">
+              <a:lnSpc>
+                <a:spcPct val="120000"/>
+              </a:lnSpc>
+              <a:buNone/>
+            </a:pPr>
+            <a:r>
+              <a:rPr lang="en-US" sz="1150" dirty="0">
                 <a:solidFill>
                   <a:srgbClr val="AFC9EE"/>
                 </a:solidFill>
@@ -14102,15 +14668,54 @@
                 <a:ea typeface="Yu Gothic" pitchFamily="34" charset="-122"/>
                 <a:cs typeface="Yu Gothic" pitchFamily="34" charset="-120"/>
               </a:rPr>
-              <a:t>小さな共同体における「救済者への依存」と、国家規模における「権力の集中」は構造的に同じである。この実験は、社会全体のレジリエンスを問う試みである。</a:t>
-            </a:r>
-            <a:endParaRPr lang="en-US" sz="1350" dirty="0"/>
-          </a:p>
-        </p:txBody>
-      </p:sp>
-      <p:sp>
-        <p:nvSpPr>
-          <p:cNvPr id="26" name="Text 21"/>
+              <a:t>村が2つの状態に分かれること自体は別モデルでも再現した。しかし「何を変えれば動くか」は再現せず、モデル依存だった。</a:t>
+            </a:r>
+            <a:endParaRPr lang="en-US" sz="1150" dirty="0"/>
+          </a:p>
+        </p:txBody>
+      </p:sp>
+      <p:sp>
+        <p:nvSpPr>
+          <p:cNvPr id="23" name="Text 17"/>
+          <p:cNvSpPr/>
+          <p:nvPr/>
+        </p:nvSpPr>
+        <p:spPr>
+          <a:xfrm>
+            <a:off x="548640" y="6400800"/>
+            <a:ext cx="11091672" cy="292608"/>
+          </a:xfrm>
+          <a:prstGeom prst="rect">
+            <a:avLst/>
+          </a:prstGeom>
+          <a:noFill/>
+          <a:ln/>
+        </p:spPr>
+        <p:txBody>
+          <a:bodyPr wrap="square" lIns="0" tIns="0" rIns="0" bIns="0" rtlCol="0" anchor="ctr"/>
+          <a:lstStyle/>
+          <a:p>
+            <a:pPr algn="ctr" indent="0" marL="0">
+              <a:buNone/>
+            </a:pPr>
+            <a:r>
+              <a:rPr lang="en-US" sz="1000" dirty="0">
+                <a:solidFill>
+                  <a:srgbClr val="5B6480"/>
+                </a:solidFill>
+                <a:latin typeface="Yu Gothic" pitchFamily="34" charset="0"/>
+                <a:ea typeface="Yu Gothic" pitchFamily="34" charset="-122"/>
+                <a:cs typeface="Yu Gothic" pitchFamily="34" charset="-120"/>
+              </a:rPr>
+              <a:t>※ 各条件5回ずつ計15回の実行。LLMによる採点であり、統計的検定を行うにはまだ試行数が少ない。</a:t>
+            </a:r>
+            <a:endParaRPr lang="en-US" sz="1000" dirty="0"/>
+          </a:p>
+        </p:txBody>
+      </p:sp>
+      <p:sp>
+        <p:nvSpPr>
+          <p:cNvPr id="24" name="Text 18"/>
           <p:cNvSpPr/>
           <p:nvPr/>
         </p:nvSpPr>
@@ -14149,7 +14754,7 @@
       </p:sp>
       <p:sp>
         <p:nvSpPr>
-          <p:cNvPr id="27" name="Text 22"/>
+          <p:cNvPr id="25" name="Text 19"/>
           <p:cNvSpPr/>
           <p:nvPr/>
         </p:nvSpPr>
@@ -14220,123 +14825,30 @@
       </p:grpSpPr>
       <p:sp>
         <p:nvSpPr>
-          <p:cNvPr id="2" name="Shape 0"/>
-          <p:cNvSpPr/>
-          <p:nvPr/>
-        </p:nvSpPr>
-        <p:spPr>
-          <a:xfrm>
-            <a:off x="5190592" y="512064"/>
-            <a:ext cx="1810512" cy="1810512"/>
-          </a:xfrm>
-          <a:prstGeom prst="ellipse">
-            <a:avLst/>
-          </a:prstGeom>
-          <a:solidFill>
-            <a:srgbClr val="E8A33D">
-              <a:alpha val="12000"/>
-            </a:srgbClr>
-          </a:solidFill>
-          <a:ln/>
-        </p:spPr>
-      </p:sp>
-      <p:sp>
-        <p:nvSpPr>
-          <p:cNvPr id="3" name="Shape 1"/>
-          <p:cNvSpPr/>
-          <p:nvPr/>
-        </p:nvSpPr>
-        <p:spPr>
-          <a:xfrm>
-            <a:off x="5437480" y="758952"/>
-            <a:ext cx="1316736" cy="1316736"/>
-          </a:xfrm>
-          <a:prstGeom prst="ellipse">
-            <a:avLst/>
-          </a:prstGeom>
-          <a:solidFill>
-            <a:srgbClr val="E8A33D">
-              <a:alpha val="22000"/>
-            </a:srgbClr>
-          </a:solidFill>
-          <a:ln/>
-        </p:spPr>
-      </p:sp>
-      <p:sp>
-        <p:nvSpPr>
-          <p:cNvPr id="4" name="Shape 2"/>
-          <p:cNvSpPr/>
-          <p:nvPr/>
-        </p:nvSpPr>
-        <p:spPr>
-          <a:xfrm>
-            <a:off x="5684368" y="1005840"/>
-            <a:ext cx="822960" cy="822960"/>
-          </a:xfrm>
-          <a:prstGeom prst="ellipse">
-            <a:avLst/>
-          </a:prstGeom>
-          <a:solidFill>
-            <a:srgbClr val="E8A33D"/>
-          </a:solidFill>
-          <a:ln w="9525">
-            <a:solidFill>
-              <a:srgbClr val="E8A33D"/>
-            </a:solidFill>
-            <a:prstDash val="solid"/>
-          </a:ln>
-        </p:spPr>
-      </p:sp>
-      <p:pic>
-        <p:nvPicPr>
-          <p:cNvPr id="5" name="Image 0" descr="preencoded.png">    </p:cNvPr>
-          <p:cNvPicPr>
-            <a:picLocks noChangeAspect="1"/>
-          </p:cNvPicPr>
-          <p:nvPr/>
-        </p:nvPicPr>
-        <p:blipFill>
-          <a:blip r:embed="rId1"/>
-          <a:stretch>
-            <a:fillRect/>
-          </a:stretch>
-        </p:blipFill>
-        <p:spPr>
-          <a:xfrm>
-            <a:off x="5898337" y="1219810"/>
-            <a:ext cx="395021" cy="395021"/>
-          </a:xfrm>
-          <a:prstGeom prst="rect">
-            <a:avLst/>
-          </a:prstGeom>
-        </p:spPr>
-      </p:pic>
-      <p:sp>
-        <p:nvSpPr>
-          <p:cNvPr id="6" name="Text 3"/>
-          <p:cNvSpPr/>
-          <p:nvPr/>
-        </p:nvSpPr>
-        <p:spPr>
-          <a:xfrm>
-            <a:off x="0" y="1965960"/>
-            <a:ext cx="12191695" cy="731520"/>
-          </a:xfrm>
-          <a:prstGeom prst="rect">
-            <a:avLst/>
-          </a:prstGeom>
-          <a:noFill/>
-          <a:ln/>
-        </p:spPr>
-        <p:txBody>
-          <a:bodyPr wrap="square" lIns="0" tIns="0" rIns="0" bIns="0" rtlCol="0" anchor="ctr"/>
-          <a:lstStyle/>
-          <a:p>
-            <a:pPr algn="ctr" indent="0" marL="0">
-              <a:buNone/>
-            </a:pPr>
-            <a:r>
-              <a:rPr lang="en-US" sz="3400" b="1" dirty="0">
+          <p:cNvPr id="2" name="Text 0"/>
+          <p:cNvSpPr/>
+          <p:nvPr/>
+        </p:nvSpPr>
+        <p:spPr>
+          <a:xfrm>
+            <a:off x="548640" y="411480"/>
+            <a:ext cx="11094415" cy="822960"/>
+          </a:xfrm>
+          <a:prstGeom prst="rect">
+            <a:avLst/>
+          </a:prstGeom>
+          <a:noFill/>
+          <a:ln/>
+        </p:spPr>
+        <p:txBody>
+          <a:bodyPr wrap="square" lIns="0" tIns="0" rIns="0" bIns="0" rtlCol="0" anchor="ctr"/>
+          <a:lstStyle/>
+          <a:p>
+            <a:pPr algn="l" indent="0" marL="0">
+              <a:buNone/>
+            </a:pPr>
+            <a:r>
+              <a:rPr lang="en-US" sz="3000" b="1" dirty="0">
                 <a:solidFill>
                   <a:srgbClr val="FFFFFF"/>
                 </a:solidFill>
@@ -14344,69 +14856,108 @@
                 <a:ea typeface="Yu Gothic" pitchFamily="34" charset="-122"/>
                 <a:cs typeface="Yu Gothic" pitchFamily="34" charset="-120"/>
               </a:rPr>
-              <a:t>救済者 × ガバナンス</a:t>
-            </a:r>
-            <a:endParaRPr lang="en-US" sz="3400" dirty="0"/>
-          </a:p>
-        </p:txBody>
-      </p:sp>
-      <p:sp>
-        <p:nvSpPr>
-          <p:cNvPr id="7" name="Text 4"/>
-          <p:cNvSpPr/>
-          <p:nvPr/>
-        </p:nvSpPr>
-        <p:spPr>
-          <a:xfrm>
-            <a:off x="0" y="2651760"/>
-            <a:ext cx="12191695" cy="411480"/>
-          </a:xfrm>
-          <a:prstGeom prst="rect">
-            <a:avLst/>
-          </a:prstGeom>
-          <a:noFill/>
-          <a:ln/>
-        </p:spPr>
-        <p:txBody>
-          <a:bodyPr wrap="square" lIns="0" tIns="0" rIns="0" bIns="0" rtlCol="0" anchor="ctr"/>
-          <a:lstStyle/>
-          <a:p>
-            <a:pPr algn="ctr" indent="0" marL="0">
-              <a:buNone/>
-            </a:pPr>
-            <a:r>
-              <a:rPr lang="en-US" sz="1500" dirty="0">
-                <a:solidFill>
-                  <a:srgbClr val="AFC9EE"/>
-                </a:solidFill>
-                <a:latin typeface="Yu Gothic" pitchFamily="34" charset="0"/>
-                <a:ea typeface="Yu Gothic" pitchFamily="34" charset="-122"/>
-                <a:cs typeface="Yu Gothic" pitchFamily="34" charset="-120"/>
-              </a:rPr>
-              <a:t>神が降りなくても、村は回るか</a:t>
-            </a:r>
-            <a:endParaRPr lang="en-US" sz="1500" dirty="0"/>
-          </a:p>
-        </p:txBody>
-      </p:sp>
-      <p:sp>
-        <p:nvSpPr>
-          <p:cNvPr id="8" name="Shape 5"/>
-          <p:cNvSpPr/>
-          <p:nvPr/>
-        </p:nvSpPr>
-        <p:spPr>
-          <a:xfrm>
-            <a:off x="609448" y="3337560"/>
-            <a:ext cx="3474720" cy="1371600"/>
+              <a:t>「意味」から「経営」への翻訳</a:t>
+            </a:r>
+            <a:endParaRPr lang="en-US" sz="3000" dirty="0"/>
+          </a:p>
+        </p:txBody>
+      </p:sp>
+      <p:sp>
+        <p:nvSpPr>
+          <p:cNvPr id="3" name="Text 1"/>
+          <p:cNvSpPr/>
+          <p:nvPr/>
+        </p:nvSpPr>
+        <p:spPr>
+          <a:xfrm>
+            <a:off x="548640" y="1554480"/>
+            <a:ext cx="4937760" cy="320040"/>
+          </a:xfrm>
+          <a:prstGeom prst="rect">
+            <a:avLst/>
+          </a:prstGeom>
+          <a:noFill/>
+          <a:ln/>
+        </p:spPr>
+        <p:txBody>
+          <a:bodyPr wrap="square" lIns="0" tIns="0" rIns="0" bIns="0" rtlCol="0" anchor="ctr"/>
+          <a:lstStyle/>
+          <a:p>
+            <a:pPr indent="0" marL="0">
+              <a:buNone/>
+            </a:pPr>
+            <a:r>
+              <a:rPr lang="en-US" sz="1200" b="1" dirty="0">
+                <a:solidFill>
+                  <a:srgbClr val="E8A33D"/>
+                </a:solidFill>
+                <a:latin typeface="Yu Gothic" pitchFamily="34" charset="0"/>
+                <a:ea typeface="Yu Gothic" pitchFamily="34" charset="-122"/>
+                <a:cs typeface="Yu Gothic" pitchFamily="34" charset="-120"/>
+              </a:rPr>
+              <a:t>Human Value</a:t>
+            </a:r>
+            <a:endParaRPr lang="en-US" sz="1200" dirty="0"/>
+          </a:p>
+        </p:txBody>
+      </p:sp>
+      <p:sp>
+        <p:nvSpPr>
+          <p:cNvPr id="4" name="Text 2"/>
+          <p:cNvSpPr/>
+          <p:nvPr/>
+        </p:nvSpPr>
+        <p:spPr>
+          <a:xfrm>
+            <a:off x="6675120" y="1554480"/>
+            <a:ext cx="4937760" cy="320040"/>
+          </a:xfrm>
+          <a:prstGeom prst="rect">
+            <a:avLst/>
+          </a:prstGeom>
+          <a:noFill/>
+          <a:ln/>
+        </p:spPr>
+        <p:txBody>
+          <a:bodyPr wrap="square" lIns="0" tIns="0" rIns="0" bIns="0" rtlCol="0" anchor="ctr"/>
+          <a:lstStyle/>
+          <a:p>
+            <a:pPr algn="r" indent="0" marL="0">
+              <a:buNone/>
+            </a:pPr>
+            <a:r>
+              <a:rPr lang="en-US" sz="1200" b="1" dirty="0">
+                <a:solidFill>
+                  <a:srgbClr val="5A8FD6"/>
+                </a:solidFill>
+                <a:latin typeface="Yu Gothic" pitchFamily="34" charset="0"/>
+                <a:ea typeface="Yu Gothic" pitchFamily="34" charset="-122"/>
+                <a:cs typeface="Yu Gothic" pitchFamily="34" charset="-120"/>
+              </a:rPr>
+              <a:t>Corporate KPI</a:t>
+            </a:r>
+            <a:endParaRPr lang="en-US" sz="1200" dirty="0"/>
+          </a:p>
+        </p:txBody>
+      </p:sp>
+      <p:sp>
+        <p:nvSpPr>
+          <p:cNvPr id="5" name="Shape 3"/>
+          <p:cNvSpPr/>
+          <p:nvPr/>
+        </p:nvSpPr>
+        <p:spPr>
+          <a:xfrm>
+            <a:off x="548640" y="1965960"/>
+            <a:ext cx="4937760" cy="914400"/>
           </a:xfrm>
           <a:prstGeom prst="roundRect">
             <a:avLst>
-              <a:gd name="adj" fmla="val 8000"/>
+              <a:gd name="adj" fmla="val 12000"/>
             </a:avLst>
           </a:prstGeom>
           <a:solidFill>
-            <a:srgbClr val="16213A"/>
+            <a:srgbClr val="1C2C4A"/>
           </a:solidFill>
           <a:ln/>
           <a:effectLst>
@@ -14420,14 +14971,56 @@
       </p:sp>
       <p:sp>
         <p:nvSpPr>
-          <p:cNvPr id="9" name="Text 6"/>
-          <p:cNvSpPr/>
-          <p:nvPr/>
-        </p:nvSpPr>
-        <p:spPr>
-          <a:xfrm>
-            <a:off x="792328" y="3474720"/>
-            <a:ext cx="3108960" cy="502920"/>
+          <p:cNvPr id="6" name="Text 4"/>
+          <p:cNvSpPr/>
+          <p:nvPr/>
+        </p:nvSpPr>
+        <p:spPr>
+          <a:xfrm>
+            <a:off x="777240" y="1965960"/>
+            <a:ext cx="4480560" cy="914400"/>
+          </a:xfrm>
+          <a:prstGeom prst="rect">
+            <a:avLst/>
+          </a:prstGeom>
+          <a:noFill/>
+          <a:ln/>
+        </p:spPr>
+        <p:txBody>
+          <a:bodyPr wrap="square" lIns="0" tIns="0" rIns="0" bIns="0" rtlCol="0" anchor="ctr"/>
+          <a:lstStyle/>
+          <a:p>
+            <a:pPr indent="0" marL="0">
+              <a:lnSpc>
+                <a:spcPct val="120000"/>
+              </a:lnSpc>
+              <a:buNone/>
+            </a:pPr>
+            <a:r>
+              <a:rPr lang="en-US" sz="1300" i="1" dirty="0">
+                <a:solidFill>
+                  <a:srgbClr val="F4C878"/>
+                </a:solidFill>
+                <a:latin typeface="Yu Gothic" pitchFamily="34" charset="0"/>
+                <a:ea typeface="Yu Gothic" pitchFamily="34" charset="-122"/>
+                <a:cs typeface="Yu Gothic" pitchFamily="34" charset="-120"/>
+              </a:rPr>
+              <a:t>「この人がいたことで、安心して活動できた」</a:t>
+            </a:r>
+            <a:endParaRPr lang="en-US" sz="1300" dirty="0"/>
+          </a:p>
+        </p:txBody>
+      </p:sp>
+      <p:sp>
+        <p:nvSpPr>
+          <p:cNvPr id="7" name="Text 5"/>
+          <p:cNvSpPr/>
+          <p:nvPr/>
+        </p:nvSpPr>
+        <p:spPr>
+          <a:xfrm>
+            <a:off x="5623560" y="1965960"/>
+            <a:ext cx="914400" cy="914400"/>
           </a:xfrm>
           <a:prstGeom prst="rect">
             <a:avLst/>
@@ -14443,49 +15036,7 @@
               <a:buNone/>
             </a:pPr>
             <a:r>
-              <a:rPr lang="en-US" sz="1900" b="1" dirty="0">
-                <a:solidFill>
-                  <a:srgbClr val="E2665A"/>
-                </a:solidFill>
-                <a:latin typeface="Yu Gothic" pitchFamily="34" charset="0"/>
-                <a:ea typeface="Yu Gothic" pitchFamily="34" charset="-122"/>
-                <a:cs typeface="Yu Gothic" pitchFamily="34" charset="-120"/>
-              </a:rPr>
-              <a:t>依存は毎回再現された</a:t>
-            </a:r>
-            <a:endParaRPr lang="en-US" sz="1900" dirty="0"/>
-          </a:p>
-        </p:txBody>
-      </p:sp>
-      <p:sp>
-        <p:nvSpPr>
-          <p:cNvPr id="10" name="Text 7"/>
-          <p:cNvSpPr/>
-          <p:nvPr/>
-        </p:nvSpPr>
-        <p:spPr>
-          <a:xfrm>
-            <a:off x="838048" y="4023360"/>
-            <a:ext cx="3017520" cy="594360"/>
-          </a:xfrm>
-          <a:prstGeom prst="rect">
-            <a:avLst/>
-          </a:prstGeom>
-          <a:noFill/>
-          <a:ln/>
-        </p:spPr>
-        <p:txBody>
-          <a:bodyPr wrap="square" lIns="0" tIns="0" rIns="0" bIns="0" rtlCol="0" anchor="ctr"/>
-          <a:lstStyle/>
-          <a:p>
-            <a:pPr algn="ctr" indent="0" marL="0">
-              <a:lnSpc>
-                <a:spcPct val="125000"/>
-              </a:lnSpc>
-              <a:buNone/>
-            </a:pPr>
-            <a:r>
-              <a:rPr lang="en-US" sz="1100" dirty="0">
+              <a:rPr lang="en-US" sz="2200" dirty="0">
                 <a:solidFill>
                   <a:srgbClr val="9AA4C0"/>
                 </a:solidFill>
@@ -14493,26 +15044,26 @@
                 <a:ea typeface="Yu Gothic" pitchFamily="34" charset="-122"/>
                 <a:cs typeface="Yu Gothic" pitchFamily="34" charset="-120"/>
               </a:rPr>
-              <a:t>A・Bの標準偏差はほぼ0。放っておけば村は必ず依存へ落ちる</a:t>
-            </a:r>
-            <a:endParaRPr lang="en-US" sz="1100" dirty="0"/>
-          </a:p>
-        </p:txBody>
-      </p:sp>
-      <p:sp>
-        <p:nvSpPr>
-          <p:cNvPr id="11" name="Shape 8"/>
-          <p:cNvSpPr/>
-          <p:nvPr/>
-        </p:nvSpPr>
-        <p:spPr>
-          <a:xfrm>
-            <a:off x="4358488" y="3337560"/>
-            <a:ext cx="3474720" cy="1371600"/>
+              <a:t>→</a:t>
+            </a:r>
+            <a:endParaRPr lang="en-US" sz="2200" dirty="0"/>
+          </a:p>
+        </p:txBody>
+      </p:sp>
+      <p:sp>
+        <p:nvSpPr>
+          <p:cNvPr id="8" name="Shape 6"/>
+          <p:cNvSpPr/>
+          <p:nvPr/>
+        </p:nvSpPr>
+        <p:spPr>
+          <a:xfrm>
+            <a:off x="6675120" y="1965960"/>
+            <a:ext cx="4937760" cy="914400"/>
           </a:xfrm>
           <a:prstGeom prst="roundRect">
             <a:avLst>
-              <a:gd name="adj" fmla="val 8000"/>
+              <a:gd name="adj" fmla="val 12000"/>
             </a:avLst>
           </a:prstGeom>
           <a:solidFill>
@@ -14530,103 +15081,64 @@
       </p:sp>
       <p:sp>
         <p:nvSpPr>
-          <p:cNvPr id="12" name="Text 9"/>
-          <p:cNvSpPr/>
-          <p:nvPr/>
-        </p:nvSpPr>
-        <p:spPr>
-          <a:xfrm>
-            <a:off x="4541368" y="3474720"/>
-            <a:ext cx="3108960" cy="502920"/>
-          </a:xfrm>
-          <a:prstGeom prst="rect">
-            <a:avLst/>
-          </a:prstGeom>
-          <a:noFill/>
-          <a:ln/>
-        </p:spPr>
-        <p:txBody>
-          <a:bodyPr wrap="square" lIns="0" tIns="0" rIns="0" bIns="0" rtlCol="0" anchor="ctr"/>
-          <a:lstStyle/>
-          <a:p>
-            <a:pPr algn="ctr" indent="0" marL="0">
-              <a:buNone/>
-            </a:pPr>
-            <a:r>
-              <a:rPr lang="en-US" sz="1900" b="1" dirty="0">
-                <a:solidFill>
-                  <a:srgbClr val="1BAF7A"/>
-                </a:solidFill>
-                <a:latin typeface="Yu Gothic" pitchFamily="34" charset="0"/>
-                <a:ea typeface="Yu Gothic" pitchFamily="34" charset="-122"/>
-                <a:cs typeface="Yu Gothic" pitchFamily="34" charset="-120"/>
-              </a:rPr>
-              <a:t>村は2つの状態に分かれる</a:t>
-            </a:r>
-            <a:endParaRPr lang="en-US" sz="1900" dirty="0"/>
-          </a:p>
-        </p:txBody>
-      </p:sp>
-      <p:sp>
-        <p:nvSpPr>
-          <p:cNvPr id="13" name="Text 10"/>
-          <p:cNvSpPr/>
-          <p:nvPr/>
-        </p:nvSpPr>
-        <p:spPr>
-          <a:xfrm>
-            <a:off x="4587088" y="4023360"/>
-            <a:ext cx="3017520" cy="594360"/>
-          </a:xfrm>
-          <a:prstGeom prst="rect">
-            <a:avLst/>
-          </a:prstGeom>
-          <a:noFill/>
-          <a:ln/>
-        </p:spPr>
-        <p:txBody>
-          <a:bodyPr wrap="square" lIns="0" tIns="0" rIns="0" bIns="0" rtlCol="0" anchor="ctr"/>
-          <a:lstStyle/>
-          <a:p>
-            <a:pPr algn="ctr" indent="0" marL="0">
+          <p:cNvPr id="9" name="Text 7"/>
+          <p:cNvSpPr/>
+          <p:nvPr/>
+        </p:nvSpPr>
+        <p:spPr>
+          <a:xfrm>
+            <a:off x="6903720" y="1965960"/>
+            <a:ext cx="4480560" cy="914400"/>
+          </a:xfrm>
+          <a:prstGeom prst="rect">
+            <a:avLst/>
+          </a:prstGeom>
+          <a:noFill/>
+          <a:ln/>
+        </p:spPr>
+        <p:txBody>
+          <a:bodyPr wrap="square" lIns="0" tIns="0" rIns="0" bIns="0" rtlCol="0" anchor="ctr"/>
+          <a:lstStyle/>
+          <a:p>
+            <a:pPr indent="0" marL="0">
               <a:lnSpc>
-                <a:spcPct val="125000"/>
+                <a:spcPct val="120000"/>
               </a:lnSpc>
               <a:buNone/>
             </a:pPr>
             <a:r>
-              <a:rPr lang="en-US" sz="1100" dirty="0">
-                <a:solidFill>
-                  <a:srgbClr val="9AA4C0"/>
-                </a:solidFill>
-                <a:latin typeface="Yu Gothic" pitchFamily="34" charset="0"/>
-                <a:ea typeface="Yu Gothic" pitchFamily="34" charset="-122"/>
-                <a:cs typeface="Yu Gothic" pitchFamily="34" charset="-120"/>
-              </a:rPr>
-              <a:t>連続的には良くならない。別モデルでも24回中23回が両端に落ちた</a:t>
-            </a:r>
-            <a:endParaRPr lang="en-US" sz="1100" dirty="0"/>
-          </a:p>
-        </p:txBody>
-      </p:sp>
-      <p:sp>
-        <p:nvSpPr>
-          <p:cNvPr id="14" name="Shape 11"/>
-          <p:cNvSpPr/>
-          <p:nvPr/>
-        </p:nvSpPr>
-        <p:spPr>
-          <a:xfrm>
-            <a:off x="8107528" y="3337560"/>
-            <a:ext cx="3474720" cy="1371600"/>
+              <a:rPr lang="en-US" sz="1300" b="1" dirty="0">
+                <a:solidFill>
+                  <a:srgbClr val="5A8FD6"/>
+                </a:solidFill>
+                <a:latin typeface="Yu Gothic" pitchFamily="34" charset="0"/>
+                <a:ea typeface="Yu Gothic" pitchFamily="34" charset="-122"/>
+                <a:cs typeface="Yu Gothic" pitchFamily="34" charset="-120"/>
+              </a:rPr>
+              <a:t>オンボーディング成功・参加継続率の向上</a:t>
+            </a:r>
+            <a:endParaRPr lang="en-US" sz="1300" dirty="0"/>
+          </a:p>
+        </p:txBody>
+      </p:sp>
+      <p:sp>
+        <p:nvSpPr>
+          <p:cNvPr id="10" name="Shape 8"/>
+          <p:cNvSpPr/>
+          <p:nvPr/>
+        </p:nvSpPr>
+        <p:spPr>
+          <a:xfrm>
+            <a:off x="548640" y="3063240"/>
+            <a:ext cx="4937760" cy="914400"/>
           </a:xfrm>
           <a:prstGeom prst="roundRect">
             <a:avLst>
-              <a:gd name="adj" fmla="val 8000"/>
+              <a:gd name="adj" fmla="val 12000"/>
             </a:avLst>
           </a:prstGeom>
           <a:solidFill>
-            <a:srgbClr val="16213A"/>
+            <a:srgbClr val="1C2C4A"/>
           </a:solidFill>
           <a:ln/>
           <a:effectLst>
@@ -14640,14 +15152,56 @@
       </p:sp>
       <p:sp>
         <p:nvSpPr>
-          <p:cNvPr id="15" name="Text 12"/>
-          <p:cNvSpPr/>
-          <p:nvPr/>
-        </p:nvSpPr>
-        <p:spPr>
-          <a:xfrm>
-            <a:off x="8290408" y="3474720"/>
-            <a:ext cx="3108960" cy="502920"/>
+          <p:cNvPr id="11" name="Text 9"/>
+          <p:cNvSpPr/>
+          <p:nvPr/>
+        </p:nvSpPr>
+        <p:spPr>
+          <a:xfrm>
+            <a:off x="777240" y="3063240"/>
+            <a:ext cx="4480560" cy="914400"/>
+          </a:xfrm>
+          <a:prstGeom prst="rect">
+            <a:avLst/>
+          </a:prstGeom>
+          <a:noFill/>
+          <a:ln/>
+        </p:spPr>
+        <p:txBody>
+          <a:bodyPr wrap="square" lIns="0" tIns="0" rIns="0" bIns="0" rtlCol="0" anchor="ctr"/>
+          <a:lstStyle/>
+          <a:p>
+            <a:pPr indent="0" marL="0">
+              <a:lnSpc>
+                <a:spcPct val="120000"/>
+              </a:lnSpc>
+              <a:buNone/>
+            </a:pPr>
+            <a:r>
+              <a:rPr lang="en-US" sz="1300" i="1" dirty="0">
+                <a:solidFill>
+                  <a:srgbClr val="F4C878"/>
+                </a:solidFill>
+                <a:latin typeface="Yu Gothic" pitchFamily="34" charset="0"/>
+                <a:ea typeface="Yu Gothic" pitchFamily="34" charset="-122"/>
+                <a:cs typeface="Yu Gothic" pitchFamily="34" charset="-120"/>
+              </a:rPr>
+              <a:t>「孤立せずに済んだ／対立が翻訳された」</a:t>
+            </a:r>
+            <a:endParaRPr lang="en-US" sz="1300" dirty="0"/>
+          </a:p>
+        </p:txBody>
+      </p:sp>
+      <p:sp>
+        <p:nvSpPr>
+          <p:cNvPr id="12" name="Text 10"/>
+          <p:cNvSpPr/>
+          <p:nvPr/>
+        </p:nvSpPr>
+        <p:spPr>
+          <a:xfrm>
+            <a:off x="5623560" y="3063240"/>
+            <a:ext cx="914400" cy="914400"/>
           </a:xfrm>
           <a:prstGeom prst="rect">
             <a:avLst/>
@@ -14663,30 +15217,172 @@
               <a:buNone/>
             </a:pPr>
             <a:r>
-              <a:rPr lang="en-US" sz="1900" b="1" dirty="0">
-                <a:solidFill>
-                  <a:srgbClr val="E8A33D"/>
-                </a:solidFill>
-                <a:latin typeface="Yu Gothic" pitchFamily="34" charset="0"/>
-                <a:ea typeface="Yu Gothic" pitchFamily="34" charset="-122"/>
-                <a:cs typeface="Yu Gothic" pitchFamily="34" charset="-120"/>
-              </a:rPr>
-              <a:t>テコはモデル依存だった</a:t>
-            </a:r>
-            <a:endParaRPr lang="en-US" sz="1900" dirty="0"/>
-          </a:p>
-        </p:txBody>
-      </p:sp>
-      <p:sp>
-        <p:nvSpPr>
-          <p:cNvPr id="16" name="Text 13"/>
-          <p:cNvSpPr/>
-          <p:nvPr/>
-        </p:nvSpPr>
-        <p:spPr>
-          <a:xfrm>
-            <a:off x="8336128" y="4023360"/>
-            <a:ext cx="3017520" cy="594360"/>
+              <a:rPr lang="en-US" sz="2200" dirty="0">
+                <a:solidFill>
+                  <a:srgbClr val="9AA4C0"/>
+                </a:solidFill>
+                <a:latin typeface="Yu Gothic" pitchFamily="34" charset="0"/>
+                <a:ea typeface="Yu Gothic" pitchFamily="34" charset="-122"/>
+                <a:cs typeface="Yu Gothic" pitchFamily="34" charset="-120"/>
+              </a:rPr>
+              <a:t>→</a:t>
+            </a:r>
+            <a:endParaRPr lang="en-US" sz="2200" dirty="0"/>
+          </a:p>
+        </p:txBody>
+      </p:sp>
+      <p:sp>
+        <p:nvSpPr>
+          <p:cNvPr id="13" name="Shape 11"/>
+          <p:cNvSpPr/>
+          <p:nvPr/>
+        </p:nvSpPr>
+        <p:spPr>
+          <a:xfrm>
+            <a:off x="6675120" y="3063240"/>
+            <a:ext cx="4937760" cy="914400"/>
+          </a:xfrm>
+          <a:prstGeom prst="roundRect">
+            <a:avLst>
+              <a:gd name="adj" fmla="val 12000"/>
+            </a:avLst>
+          </a:prstGeom>
+          <a:solidFill>
+            <a:srgbClr val="16213A"/>
+          </a:solidFill>
+          <a:ln/>
+          <a:effectLst>
+            <a:outerShdw sx="100000" sy="100000" kx="0" ky="0" algn="bl" rotWithShape="0" blurRad="101600" dist="38100" dir="5400000">
+              <a:srgbClr val="000000">
+                <a:alpha val="35000"/>
+              </a:srgbClr>
+            </a:outerShdw>
+          </a:effectLst>
+        </p:spPr>
+      </p:sp>
+      <p:sp>
+        <p:nvSpPr>
+          <p:cNvPr id="14" name="Text 12"/>
+          <p:cNvSpPr/>
+          <p:nvPr/>
+        </p:nvSpPr>
+        <p:spPr>
+          <a:xfrm>
+            <a:off x="6903720" y="3063240"/>
+            <a:ext cx="4480560" cy="914400"/>
+          </a:xfrm>
+          <a:prstGeom prst="rect">
+            <a:avLst/>
+          </a:prstGeom>
+          <a:noFill/>
+          <a:ln/>
+        </p:spPr>
+        <p:txBody>
+          <a:bodyPr wrap="square" lIns="0" tIns="0" rIns="0" bIns="0" rtlCol="0" anchor="ctr"/>
+          <a:lstStyle/>
+          <a:p>
+            <a:pPr indent="0" marL="0">
+              <a:lnSpc>
+                <a:spcPct val="120000"/>
+              </a:lnSpc>
+              <a:buNone/>
+            </a:pPr>
+            <a:r>
+              <a:rPr lang="en-US" sz="1300" b="1" dirty="0">
+                <a:solidFill>
+                  <a:srgbClr val="5A8FD6"/>
+                </a:solidFill>
+                <a:latin typeface="Yu Gothic" pitchFamily="34" charset="0"/>
+                <a:ea typeface="Yu Gothic" pitchFamily="34" charset="-122"/>
+                <a:cs typeface="Yu Gothic" pitchFamily="34" charset="-120"/>
+              </a:rPr>
+              <a:t>離脱コストの回避・炎上防止</a:t>
+            </a:r>
+            <a:endParaRPr lang="en-US" sz="1300" dirty="0"/>
+          </a:p>
+        </p:txBody>
+      </p:sp>
+      <p:sp>
+        <p:nvSpPr>
+          <p:cNvPr id="15" name="Shape 13"/>
+          <p:cNvSpPr/>
+          <p:nvPr/>
+        </p:nvSpPr>
+        <p:spPr>
+          <a:xfrm>
+            <a:off x="548640" y="4160520"/>
+            <a:ext cx="4937760" cy="914400"/>
+          </a:xfrm>
+          <a:prstGeom prst="roundRect">
+            <a:avLst>
+              <a:gd name="adj" fmla="val 12000"/>
+            </a:avLst>
+          </a:prstGeom>
+          <a:solidFill>
+            <a:srgbClr val="1C2C4A"/>
+          </a:solidFill>
+          <a:ln/>
+          <a:effectLst>
+            <a:outerShdw sx="100000" sy="100000" kx="0" ky="0" algn="bl" rotWithShape="0" blurRad="101600" dist="38100" dir="5400000">
+              <a:srgbClr val="000000">
+                <a:alpha val="35000"/>
+              </a:srgbClr>
+            </a:outerShdw>
+          </a:effectLst>
+        </p:spPr>
+      </p:sp>
+      <p:sp>
+        <p:nvSpPr>
+          <p:cNvPr id="16" name="Text 14"/>
+          <p:cNvSpPr/>
+          <p:nvPr/>
+        </p:nvSpPr>
+        <p:spPr>
+          <a:xfrm>
+            <a:off x="777240" y="4160520"/>
+            <a:ext cx="4480560" cy="914400"/>
+          </a:xfrm>
+          <a:prstGeom prst="rect">
+            <a:avLst/>
+          </a:prstGeom>
+          <a:noFill/>
+          <a:ln/>
+        </p:spPr>
+        <p:txBody>
+          <a:bodyPr wrap="square" lIns="0" tIns="0" rIns="0" bIns="0" rtlCol="0" anchor="ctr"/>
+          <a:lstStyle/>
+          <a:p>
+            <a:pPr indent="0" marL="0">
+              <a:lnSpc>
+                <a:spcPct val="120000"/>
+              </a:lnSpc>
+              <a:buNone/>
+            </a:pPr>
+            <a:r>
+              <a:rPr lang="en-US" sz="1300" i="1" dirty="0">
+                <a:solidFill>
+                  <a:srgbClr val="F4C878"/>
+                </a:solidFill>
+                <a:latin typeface="Yu Gothic" pitchFamily="34" charset="0"/>
+                <a:ea typeface="Yu Gothic" pitchFamily="34" charset="-122"/>
+                <a:cs typeface="Yu Gothic" pitchFamily="34" charset="-120"/>
+              </a:rPr>
+              <a:t>「自分でも問題に対処できるようになった」</a:t>
+            </a:r>
+            <a:endParaRPr lang="en-US" sz="1300" dirty="0"/>
+          </a:p>
+        </p:txBody>
+      </p:sp>
+      <p:sp>
+        <p:nvSpPr>
+          <p:cNvPr id="17" name="Text 15"/>
+          <p:cNvSpPr/>
+          <p:nvPr/>
+        </p:nvSpPr>
+        <p:spPr>
+          <a:xfrm>
+            <a:off x="5623560" y="4160520"/>
+            <a:ext cx="914400" cy="914400"/>
           </a:xfrm>
           <a:prstGeom prst="rect">
             <a:avLst/>
@@ -14699,91 +15395,188 @@
           <a:lstStyle/>
           <a:p>
             <a:pPr algn="ctr" indent="0" marL="0">
+              <a:buNone/>
+            </a:pPr>
+            <a:r>
+              <a:rPr lang="en-US" sz="2200" dirty="0">
+                <a:solidFill>
+                  <a:srgbClr val="9AA4C0"/>
+                </a:solidFill>
+                <a:latin typeface="Yu Gothic" pitchFamily="34" charset="0"/>
+                <a:ea typeface="Yu Gothic" pitchFamily="34" charset="-122"/>
+                <a:cs typeface="Yu Gothic" pitchFamily="34" charset="-120"/>
+              </a:rPr>
+              <a:t>→</a:t>
+            </a:r>
+            <a:endParaRPr lang="en-US" sz="2200" dirty="0"/>
+          </a:p>
+        </p:txBody>
+      </p:sp>
+      <p:sp>
+        <p:nvSpPr>
+          <p:cNvPr id="18" name="Shape 16"/>
+          <p:cNvSpPr/>
+          <p:nvPr/>
+        </p:nvSpPr>
+        <p:spPr>
+          <a:xfrm>
+            <a:off x="6675120" y="4160520"/>
+            <a:ext cx="4937760" cy="914400"/>
+          </a:xfrm>
+          <a:prstGeom prst="roundRect">
+            <a:avLst>
+              <a:gd name="adj" fmla="val 12000"/>
+            </a:avLst>
+          </a:prstGeom>
+          <a:solidFill>
+            <a:srgbClr val="16213A"/>
+          </a:solidFill>
+          <a:ln/>
+          <a:effectLst>
+            <a:outerShdw sx="100000" sy="100000" kx="0" ky="0" algn="bl" rotWithShape="0" blurRad="101600" dist="38100" dir="5400000">
+              <a:srgbClr val="000000">
+                <a:alpha val="35000"/>
+              </a:srgbClr>
+            </a:outerShdw>
+          </a:effectLst>
+        </p:spPr>
+      </p:sp>
+      <p:sp>
+        <p:nvSpPr>
+          <p:cNvPr id="19" name="Text 17"/>
+          <p:cNvSpPr/>
+          <p:nvPr/>
+        </p:nvSpPr>
+        <p:spPr>
+          <a:xfrm>
+            <a:off x="6903720" y="4160520"/>
+            <a:ext cx="4480560" cy="914400"/>
+          </a:xfrm>
+          <a:prstGeom prst="rect">
+            <a:avLst/>
+          </a:prstGeom>
+          <a:noFill/>
+          <a:ln/>
+        </p:spPr>
+        <p:txBody>
+          <a:bodyPr wrap="square" lIns="0" tIns="0" rIns="0" bIns="0" rtlCol="0" anchor="ctr"/>
+          <a:lstStyle/>
+          <a:p>
+            <a:pPr indent="0" marL="0">
               <a:lnSpc>
-                <a:spcPct val="125000"/>
+                <a:spcPct val="120000"/>
               </a:lnSpc>
               <a:buNone/>
             </a:pPr>
             <a:r>
-              <a:rPr lang="en-US" sz="1100" dirty="0">
-                <a:solidFill>
-                  <a:srgbClr val="9AA4C0"/>
-                </a:solidFill>
-                <a:latin typeface="Yu Gothic" pitchFamily="34" charset="0"/>
-                <a:ea typeface="Yu Gothic" pitchFamily="34" charset="-122"/>
-                <a:cs typeface="Yu Gothic" pitchFamily="34" charset="-120"/>
-              </a:rPr>
-              <a:t>「何を変えれば動くか」は追試で再現せず。構造は頑健、介入は脆い</a:t>
-            </a:r>
-            <a:endParaRPr lang="en-US" sz="1100" dirty="0"/>
-          </a:p>
-        </p:txBody>
-      </p:sp>
-      <p:sp>
-        <p:nvSpPr>
-          <p:cNvPr id="17" name="Text 14"/>
-          <p:cNvSpPr/>
-          <p:nvPr/>
-        </p:nvSpPr>
-        <p:spPr>
-          <a:xfrm>
-            <a:off x="0" y="5074920"/>
-            <a:ext cx="12191695" cy="320040"/>
-          </a:xfrm>
-          <a:prstGeom prst="rect">
-            <a:avLst/>
-          </a:prstGeom>
-          <a:noFill/>
-          <a:ln/>
-        </p:spPr>
-        <p:txBody>
-          <a:bodyPr wrap="square" lIns="0" tIns="0" rIns="0" bIns="0" rtlCol="0" anchor="ctr"/>
-          <a:lstStyle/>
-          <a:p>
-            <a:pPr algn="ctr" indent="0" marL="0">
-              <a:buNone/>
-            </a:pPr>
-            <a:r>
-              <a:rPr lang="en-US" sz="1200" dirty="0">
-                <a:solidFill>
-                  <a:srgbClr val="9AA4C0"/>
-                </a:solidFill>
-                <a:latin typeface="Yu Gothic" pitchFamily="34" charset="0"/>
-                <a:ea typeface="Yu Gothic" pitchFamily="34" charset="-122"/>
-                <a:cs typeface="Yu Gothic" pitchFamily="34" charset="-120"/>
-              </a:rPr>
-              <a:t>実装はClaude（Anthropic）との二人三脚で、企画・レビュー・考察を担当</a:t>
-            </a:r>
-            <a:endParaRPr lang="en-US" sz="1200" dirty="0"/>
-          </a:p>
-        </p:txBody>
-      </p:sp>
-      <p:sp>
-        <p:nvSpPr>
-          <p:cNvPr id="18" name="Text 15"/>
-          <p:cNvSpPr/>
-          <p:nvPr/>
-        </p:nvSpPr>
-        <p:spPr>
-          <a:xfrm>
-            <a:off x="0" y="6035040"/>
-            <a:ext cx="12191695" cy="274320"/>
-          </a:xfrm>
-          <a:prstGeom prst="rect">
-            <a:avLst/>
-          </a:prstGeom>
-          <a:noFill/>
-          <a:ln/>
-        </p:spPr>
-        <p:txBody>
-          <a:bodyPr wrap="square" lIns="0" tIns="0" rIns="0" bIns="0" rtlCol="0" anchor="ctr"/>
-          <a:lstStyle/>
-          <a:p>
-            <a:pPr algn="ctr" indent="0" marL="0">
-              <a:buNone/>
-            </a:pPr>
-            <a:r>
-              <a:rPr lang="en-US" sz="1100" dirty="0">
+              <a:rPr lang="en-US" sz="1300" b="1" dirty="0">
+                <a:solidFill>
+                  <a:srgbClr val="5A8FD6"/>
+                </a:solidFill>
+                <a:latin typeface="Yu Gothic" pitchFamily="34" charset="0"/>
+                <a:ea typeface="Yu Gothic" pitchFamily="34" charset="-122"/>
+                <a:cs typeface="Yu Gothic" pitchFamily="34" charset="-120"/>
+              </a:rPr>
+              <a:t>組織のレジリエンス向上・意思決定の高速化</a:t>
+            </a:r>
+            <a:endParaRPr lang="en-US" sz="1300" dirty="0"/>
+          </a:p>
+        </p:txBody>
+      </p:sp>
+      <p:sp>
+        <p:nvSpPr>
+          <p:cNvPr id="20" name="Shape 18"/>
+          <p:cNvSpPr/>
+          <p:nvPr/>
+        </p:nvSpPr>
+        <p:spPr>
+          <a:xfrm>
+            <a:off x="548640" y="5303520"/>
+            <a:ext cx="11091672" cy="822960"/>
+          </a:xfrm>
+          <a:prstGeom prst="roundRect">
+            <a:avLst>
+              <a:gd name="adj" fmla="val 11111"/>
+            </a:avLst>
+          </a:prstGeom>
+          <a:solidFill>
+            <a:srgbClr val="16213A"/>
+          </a:solidFill>
+          <a:ln/>
+          <a:effectLst>
+            <a:outerShdw sx="100000" sy="100000" kx="0" ky="0" algn="bl" rotWithShape="0" blurRad="101600" dist="38100" dir="5400000">
+              <a:srgbClr val="000000">
+                <a:alpha val="35000"/>
+              </a:srgbClr>
+            </a:outerShdw>
+          </a:effectLst>
+        </p:spPr>
+      </p:sp>
+      <p:sp>
+        <p:nvSpPr>
+          <p:cNvPr id="21" name="Text 19"/>
+          <p:cNvSpPr/>
+          <p:nvPr/>
+        </p:nvSpPr>
+        <p:spPr>
+          <a:xfrm>
+            <a:off x="868680" y="5303520"/>
+            <a:ext cx="10515600" cy="822960"/>
+          </a:xfrm>
+          <a:prstGeom prst="rect">
+            <a:avLst/>
+          </a:prstGeom>
+          <a:noFill/>
+          <a:ln/>
+        </p:spPr>
+        <p:txBody>
+          <a:bodyPr wrap="square" lIns="0" tIns="0" rIns="0" bIns="0" rtlCol="0" anchor="ctr"/>
+          <a:lstStyle/>
+          <a:p>
+            <a:pPr indent="0" marL="0">
+              <a:buNone/>
+            </a:pPr>
+            <a:r>
+              <a:rPr lang="en-US" sz="1400" b="1" dirty="0">
+                <a:solidFill>
+                  <a:srgbClr val="FFFFFF"/>
+                </a:solidFill>
+                <a:latin typeface="Yu Gothic" pitchFamily="34" charset="0"/>
+                <a:ea typeface="Yu Gothic" pitchFamily="34" charset="-122"/>
+                <a:cs typeface="Yu Gothic" pitchFamily="34" charset="-120"/>
+              </a:rPr>
+              <a:t>人を支える行為は「美談」ではない。組織の持続可能性と安全保障に直結する。</a:t>
+            </a:r>
+            <a:endParaRPr lang="en-US" sz="1400" dirty="0"/>
+          </a:p>
+        </p:txBody>
+      </p:sp>
+      <p:sp>
+        <p:nvSpPr>
+          <p:cNvPr id="22" name="Text 20"/>
+          <p:cNvSpPr/>
+          <p:nvPr/>
+        </p:nvSpPr>
+        <p:spPr>
+          <a:xfrm>
+            <a:off x="548640" y="6473952"/>
+            <a:ext cx="4572000" cy="274320"/>
+          </a:xfrm>
+          <a:prstGeom prst="rect">
+            <a:avLst/>
+          </a:prstGeom>
+          <a:noFill/>
+          <a:ln/>
+        </p:spPr>
+        <p:txBody>
+          <a:bodyPr wrap="square" lIns="0" tIns="0" rIns="0" bIns="0" rtlCol="0" anchor="ctr"/>
+          <a:lstStyle/>
+          <a:p>
+            <a:pPr indent="0" marL="0">
+              <a:buNone/>
+            </a:pPr>
+            <a:r>
+              <a:rPr lang="en-US" sz="900" dirty="0">
                 <a:solidFill>
                   <a:srgbClr val="5B6480"/>
                 </a:solidFill>
@@ -14791,22 +15584,22 @@
                 <a:ea typeface="Yu Gothic" pitchFamily="34" charset="-122"/>
                 <a:cs typeface="Yu Gothic" pitchFamily="34" charset="-120"/>
               </a:rPr>
-              <a:t>github.com/sakurako-cottoncandy/beyond-the-savior</a:t>
-            </a:r>
-            <a:endParaRPr lang="en-US" sz="1100" dirty="0"/>
-          </a:p>
-        </p:txBody>
-      </p:sp>
-      <p:sp>
-        <p:nvSpPr>
-          <p:cNvPr id="19" name="Text 16"/>
-          <p:cNvSpPr/>
-          <p:nvPr/>
-        </p:nvSpPr>
-        <p:spPr>
-          <a:xfrm>
-            <a:off x="10088575" y="6400800"/>
-            <a:ext cx="1645920" cy="274320"/>
+              <a:t>救済者 × ガバナンス</a:t>
+            </a:r>
+            <a:endParaRPr lang="en-US" sz="900" dirty="0"/>
+          </a:p>
+        </p:txBody>
+      </p:sp>
+      <p:sp>
+        <p:nvSpPr>
+          <p:cNvPr id="23" name="Text 21"/>
+          <p:cNvSpPr/>
+          <p:nvPr/>
+        </p:nvSpPr>
+        <p:spPr>
+          <a:xfrm>
+            <a:off x="11185855" y="6473952"/>
+            <a:ext cx="457200" cy="274320"/>
           </a:xfrm>
           <a:prstGeom prst="rect">
             <a:avLst/>
@@ -14830,7 +15623,7 @@
                 <a:ea typeface="Yu Gothic" pitchFamily="34" charset="-122"/>
                 <a:cs typeface="Yu Gothic" pitchFamily="34" charset="-120"/>
               </a:rPr>
-              <a:t>Hackathon Project</a:t>
+              <a:t>19</a:t>
             </a:r>
             <a:endParaRPr lang="en-US" sz="900" dirty="0"/>
           </a:p>
@@ -15765,6 +16558,2422 @@
                 <a:cs typeface="Yu Gothic" pitchFamily="34" charset="-120"/>
               </a:rPr>
               <a:t>2</a:t>
+            </a:r>
+            <a:endParaRPr lang="en-US" sz="900" dirty="0"/>
+          </a:p>
+        </p:txBody>
+      </p:sp>
+    </p:spTree>
+  </p:cSld>
+  <p:clrMapOvr>
+    <a:masterClrMapping/>
+  </p:clrMapOvr>
+</p:sld>
+</file>
+
+<file path=ppt/slides/slide20.xml><?xml version="1.0" encoding="utf-8"?>
+<p:sld xmlns:a="http://schemas.openxmlformats.org/drawingml/2006/main" xmlns:r="http://schemas.openxmlformats.org/officeDocument/2006/relationships" xmlns:p="http://schemas.openxmlformats.org/presentationml/2006/main">
+  <p:cSld name="Slide 20">
+    <p:bg>
+      <p:bgPr>
+        <a:solidFill>
+          <a:srgbClr val="0B1220"/>
+        </a:solidFill>
+      </p:bgPr>
+    </p:bg>
+    <p:spTree>
+      <p:nvGrpSpPr>
+        <p:cNvPr id="1" name=""/>
+        <p:cNvGrpSpPr/>
+        <p:nvPr/>
+      </p:nvGrpSpPr>
+      <p:grpSpPr>
+        <a:xfrm>
+          <a:off x="0" y="0"/>
+          <a:ext cx="0" cy="0"/>
+          <a:chOff x="0" y="0"/>
+          <a:chExt cx="0" cy="0"/>
+        </a:xfrm>
+      </p:grpSpPr>
+      <p:sp>
+        <p:nvSpPr>
+          <p:cNvPr id="2" name="Text 0"/>
+          <p:cNvSpPr/>
+          <p:nvPr/>
+        </p:nvSpPr>
+        <p:spPr>
+          <a:xfrm>
+            <a:off x="548640" y="411480"/>
+            <a:ext cx="11094415" cy="822960"/>
+          </a:xfrm>
+          <a:prstGeom prst="rect">
+            <a:avLst/>
+          </a:prstGeom>
+          <a:noFill/>
+          <a:ln/>
+        </p:spPr>
+        <p:txBody>
+          <a:bodyPr wrap="square" lIns="0" tIns="0" rIns="0" bIns="0" rtlCol="0" anchor="ctr"/>
+          <a:lstStyle/>
+          <a:p>
+            <a:pPr algn="l" indent="0" marL="0">
+              <a:buNone/>
+            </a:pPr>
+            <a:r>
+              <a:rPr lang="en-US" sz="3000" b="1" dirty="0">
+                <a:solidFill>
+                  <a:srgbClr val="FFFFFF"/>
+                </a:solidFill>
+                <a:latin typeface="Yu Gothic" pitchFamily="34" charset="0"/>
+                <a:ea typeface="Yu Gothic" pitchFamily="34" charset="-122"/>
+                <a:cs typeface="Yu Gothic" pitchFamily="34" charset="-120"/>
+              </a:rPr>
+              <a:t>フラクタルな構造：村から国家の「メタ安全保障」へ</a:t>
+            </a:r>
+            <a:endParaRPr lang="en-US" sz="3000" dirty="0"/>
+          </a:p>
+        </p:txBody>
+      </p:sp>
+      <p:sp>
+        <p:nvSpPr>
+          <p:cNvPr id="3" name="Shape 1"/>
+          <p:cNvSpPr/>
+          <p:nvPr/>
+        </p:nvSpPr>
+        <p:spPr>
+          <a:xfrm>
+            <a:off x="641452" y="1874520"/>
+            <a:ext cx="3429000" cy="2880360"/>
+          </a:xfrm>
+          <a:prstGeom prst="roundRect">
+            <a:avLst>
+              <a:gd name="adj" fmla="val 3810"/>
+            </a:avLst>
+          </a:prstGeom>
+          <a:solidFill>
+            <a:srgbClr val="16213A"/>
+          </a:solidFill>
+          <a:ln/>
+          <a:effectLst>
+            <a:outerShdw sx="100000" sy="100000" kx="0" ky="0" algn="bl" rotWithShape="0" blurRad="101600" dist="38100" dir="5400000">
+              <a:srgbClr val="000000">
+                <a:alpha val="35000"/>
+              </a:srgbClr>
+            </a:outerShdw>
+          </a:effectLst>
+        </p:spPr>
+      </p:sp>
+      <p:sp>
+        <p:nvSpPr>
+          <p:cNvPr id="4" name="Shape 2"/>
+          <p:cNvSpPr/>
+          <p:nvPr/>
+        </p:nvSpPr>
+        <p:spPr>
+          <a:xfrm>
+            <a:off x="1450696" y="1746504"/>
+            <a:ext cx="1810512" cy="1810512"/>
+          </a:xfrm>
+          <a:prstGeom prst="ellipse">
+            <a:avLst/>
+          </a:prstGeom>
+          <a:solidFill>
+            <a:srgbClr val="1BAF7A">
+              <a:alpha val="12000"/>
+            </a:srgbClr>
+          </a:solidFill>
+          <a:ln/>
+        </p:spPr>
+      </p:sp>
+      <p:sp>
+        <p:nvSpPr>
+          <p:cNvPr id="5" name="Shape 3"/>
+          <p:cNvSpPr/>
+          <p:nvPr/>
+        </p:nvSpPr>
+        <p:spPr>
+          <a:xfrm>
+            <a:off x="1697584" y="1993392"/>
+            <a:ext cx="1316736" cy="1316736"/>
+          </a:xfrm>
+          <a:prstGeom prst="ellipse">
+            <a:avLst/>
+          </a:prstGeom>
+          <a:solidFill>
+            <a:srgbClr val="1BAF7A">
+              <a:alpha val="22000"/>
+            </a:srgbClr>
+          </a:solidFill>
+          <a:ln/>
+        </p:spPr>
+      </p:sp>
+      <p:sp>
+        <p:nvSpPr>
+          <p:cNvPr id="6" name="Shape 4"/>
+          <p:cNvSpPr/>
+          <p:nvPr/>
+        </p:nvSpPr>
+        <p:spPr>
+          <a:xfrm>
+            <a:off x="1944472" y="2240280"/>
+            <a:ext cx="822960" cy="822960"/>
+          </a:xfrm>
+          <a:prstGeom prst="ellipse">
+            <a:avLst/>
+          </a:prstGeom>
+          <a:solidFill>
+            <a:srgbClr val="1BAF7A"/>
+          </a:solidFill>
+          <a:ln w="9525">
+            <a:solidFill>
+              <a:srgbClr val="1BAF7A"/>
+            </a:solidFill>
+            <a:prstDash val="solid"/>
+          </a:ln>
+        </p:spPr>
+      </p:sp>
+      <p:pic>
+        <p:nvPicPr>
+          <p:cNvPr id="7" name="Image 0" descr="preencoded.png">    </p:cNvPr>
+          <p:cNvPicPr>
+            <a:picLocks noChangeAspect="1"/>
+          </p:cNvPicPr>
+          <p:nvPr/>
+        </p:nvPicPr>
+        <p:blipFill>
+          <a:blip r:embed="rId1"/>
+          <a:stretch>
+            <a:fillRect/>
+          </a:stretch>
+        </p:blipFill>
+        <p:spPr>
+          <a:xfrm>
+            <a:off x="2158441" y="2454250"/>
+            <a:ext cx="395021" cy="395021"/>
+          </a:xfrm>
+          <a:prstGeom prst="rect">
+            <a:avLst/>
+          </a:prstGeom>
+        </p:spPr>
+      </p:pic>
+      <p:sp>
+        <p:nvSpPr>
+          <p:cNvPr id="8" name="Text 5"/>
+          <p:cNvSpPr/>
+          <p:nvPr/>
+        </p:nvSpPr>
+        <p:spPr>
+          <a:xfrm>
+            <a:off x="778612" y="3200400"/>
+            <a:ext cx="3154680" cy="411480"/>
+          </a:xfrm>
+          <a:prstGeom prst="rect">
+            <a:avLst/>
+          </a:prstGeom>
+          <a:noFill/>
+          <a:ln/>
+        </p:spPr>
+        <p:txBody>
+          <a:bodyPr wrap="square" lIns="0" tIns="0" rIns="0" bIns="0" rtlCol="0" anchor="ctr"/>
+          <a:lstStyle/>
+          <a:p>
+            <a:pPr algn="ctr" indent="0" marL="0">
+              <a:buNone/>
+            </a:pPr>
+            <a:r>
+              <a:rPr lang="en-US" sz="1700" b="1" dirty="0">
+                <a:solidFill>
+                  <a:srgbClr val="FFFFFF"/>
+                </a:solidFill>
+                <a:latin typeface="Yu Gothic" pitchFamily="34" charset="0"/>
+                <a:ea typeface="Yu Gothic" pitchFamily="34" charset="-122"/>
+                <a:cs typeface="Yu Gothic" pitchFamily="34" charset="-120"/>
+              </a:rPr>
+              <a:t>村</a:t>
+            </a:r>
+            <a:endParaRPr lang="en-US" sz="1700" dirty="0"/>
+          </a:p>
+        </p:txBody>
+      </p:sp>
+      <p:sp>
+        <p:nvSpPr>
+          <p:cNvPr id="9" name="Text 6"/>
+          <p:cNvSpPr/>
+          <p:nvPr/>
+        </p:nvSpPr>
+        <p:spPr>
+          <a:xfrm>
+            <a:off x="915772" y="3657600"/>
+            <a:ext cx="2880360" cy="914400"/>
+          </a:xfrm>
+          <a:prstGeom prst="rect">
+            <a:avLst/>
+          </a:prstGeom>
+          <a:noFill/>
+          <a:ln/>
+        </p:spPr>
+        <p:txBody>
+          <a:bodyPr wrap="square" lIns="0" tIns="0" rIns="0" bIns="0" rtlCol="0" anchor="ctr"/>
+          <a:lstStyle/>
+          <a:p>
+            <a:pPr algn="ctr" indent="0" marL="0">
+              <a:lnSpc>
+                <a:spcPct val="130000"/>
+              </a:lnSpc>
+              <a:buNone/>
+            </a:pPr>
+            <a:r>
+              <a:rPr lang="en-US" sz="1300" dirty="0">
+                <a:solidFill>
+                  <a:srgbClr val="AFC9EE"/>
+                </a:solidFill>
+                <a:latin typeface="Yu Gothic" pitchFamily="34" charset="0"/>
+                <a:ea typeface="Yu Gothic" pitchFamily="34" charset="-122"/>
+                <a:cs typeface="Yu Gothic" pitchFamily="34" charset="-120"/>
+              </a:rPr>
+              <a:t>「世話焼きへの過度な依存」と疲弊</a:t>
+            </a:r>
+            <a:endParaRPr lang="en-US" sz="1300" dirty="0"/>
+          </a:p>
+        </p:txBody>
+      </p:sp>
+      <p:sp>
+        <p:nvSpPr>
+          <p:cNvPr id="10" name="Shape 7"/>
+          <p:cNvSpPr/>
+          <p:nvPr/>
+        </p:nvSpPr>
+        <p:spPr>
+          <a:xfrm>
+            <a:off x="4381348" y="1874520"/>
+            <a:ext cx="3429000" cy="2880360"/>
+          </a:xfrm>
+          <a:prstGeom prst="roundRect">
+            <a:avLst>
+              <a:gd name="adj" fmla="val 3810"/>
+            </a:avLst>
+          </a:prstGeom>
+          <a:solidFill>
+            <a:srgbClr val="16213A"/>
+          </a:solidFill>
+          <a:ln/>
+          <a:effectLst>
+            <a:outerShdw sx="100000" sy="100000" kx="0" ky="0" algn="bl" rotWithShape="0" blurRad="101600" dist="38100" dir="5400000">
+              <a:srgbClr val="000000">
+                <a:alpha val="35000"/>
+              </a:srgbClr>
+            </a:outerShdw>
+          </a:effectLst>
+        </p:spPr>
+      </p:sp>
+      <p:sp>
+        <p:nvSpPr>
+          <p:cNvPr id="11" name="Shape 8"/>
+          <p:cNvSpPr/>
+          <p:nvPr/>
+        </p:nvSpPr>
+        <p:spPr>
+          <a:xfrm>
+            <a:off x="5190592" y="1746504"/>
+            <a:ext cx="1810512" cy="1810512"/>
+          </a:xfrm>
+          <a:prstGeom prst="ellipse">
+            <a:avLst/>
+          </a:prstGeom>
+          <a:solidFill>
+            <a:srgbClr val="2A78D6">
+              <a:alpha val="12000"/>
+            </a:srgbClr>
+          </a:solidFill>
+          <a:ln/>
+        </p:spPr>
+      </p:sp>
+      <p:sp>
+        <p:nvSpPr>
+          <p:cNvPr id="12" name="Shape 9"/>
+          <p:cNvSpPr/>
+          <p:nvPr/>
+        </p:nvSpPr>
+        <p:spPr>
+          <a:xfrm>
+            <a:off x="5437480" y="1993392"/>
+            <a:ext cx="1316736" cy="1316736"/>
+          </a:xfrm>
+          <a:prstGeom prst="ellipse">
+            <a:avLst/>
+          </a:prstGeom>
+          <a:solidFill>
+            <a:srgbClr val="2A78D6">
+              <a:alpha val="22000"/>
+            </a:srgbClr>
+          </a:solidFill>
+          <a:ln/>
+        </p:spPr>
+      </p:sp>
+      <p:sp>
+        <p:nvSpPr>
+          <p:cNvPr id="13" name="Shape 10"/>
+          <p:cNvSpPr/>
+          <p:nvPr/>
+        </p:nvSpPr>
+        <p:spPr>
+          <a:xfrm>
+            <a:off x="5684368" y="2240280"/>
+            <a:ext cx="822960" cy="822960"/>
+          </a:xfrm>
+          <a:prstGeom prst="ellipse">
+            <a:avLst/>
+          </a:prstGeom>
+          <a:solidFill>
+            <a:srgbClr val="2A78D6"/>
+          </a:solidFill>
+          <a:ln w="9525">
+            <a:solidFill>
+              <a:srgbClr val="2A78D6"/>
+            </a:solidFill>
+            <a:prstDash val="solid"/>
+          </a:ln>
+        </p:spPr>
+      </p:sp>
+      <p:pic>
+        <p:nvPicPr>
+          <p:cNvPr id="14" name="Image 1" descr="preencoded.png">    </p:cNvPr>
+          <p:cNvPicPr>
+            <a:picLocks noChangeAspect="1"/>
+          </p:cNvPicPr>
+          <p:nvPr/>
+        </p:nvPicPr>
+        <p:blipFill>
+          <a:blip r:embed="rId2"/>
+          <a:stretch>
+            <a:fillRect/>
+          </a:stretch>
+        </p:blipFill>
+        <p:spPr>
+          <a:xfrm>
+            <a:off x="5898337" y="2454250"/>
+            <a:ext cx="395021" cy="395021"/>
+          </a:xfrm>
+          <a:prstGeom prst="rect">
+            <a:avLst/>
+          </a:prstGeom>
+        </p:spPr>
+      </p:pic>
+      <p:sp>
+        <p:nvSpPr>
+          <p:cNvPr id="15" name="Text 11"/>
+          <p:cNvSpPr/>
+          <p:nvPr/>
+        </p:nvSpPr>
+        <p:spPr>
+          <a:xfrm>
+            <a:off x="4518508" y="3200400"/>
+            <a:ext cx="3154680" cy="411480"/>
+          </a:xfrm>
+          <a:prstGeom prst="rect">
+            <a:avLst/>
+          </a:prstGeom>
+          <a:noFill/>
+          <a:ln/>
+        </p:spPr>
+        <p:txBody>
+          <a:bodyPr wrap="square" lIns="0" tIns="0" rIns="0" bIns="0" rtlCol="0" anchor="ctr"/>
+          <a:lstStyle/>
+          <a:p>
+            <a:pPr algn="ctr" indent="0" marL="0">
+              <a:buNone/>
+            </a:pPr>
+            <a:r>
+              <a:rPr lang="en-US" sz="1700" b="1" dirty="0">
+                <a:solidFill>
+                  <a:srgbClr val="FFFFFF"/>
+                </a:solidFill>
+                <a:latin typeface="Yu Gothic" pitchFamily="34" charset="0"/>
+                <a:ea typeface="Yu Gothic" pitchFamily="34" charset="-122"/>
+                <a:cs typeface="Yu Gothic" pitchFamily="34" charset="-120"/>
+              </a:rPr>
+              <a:t>都市</a:t>
+            </a:r>
+            <a:endParaRPr lang="en-US" sz="1700" dirty="0"/>
+          </a:p>
+        </p:txBody>
+      </p:sp>
+      <p:sp>
+        <p:nvSpPr>
+          <p:cNvPr id="16" name="Text 12"/>
+          <p:cNvSpPr/>
+          <p:nvPr/>
+        </p:nvSpPr>
+        <p:spPr>
+          <a:xfrm>
+            <a:off x="4655668" y="3657600"/>
+            <a:ext cx="2880360" cy="914400"/>
+          </a:xfrm>
+          <a:prstGeom prst="rect">
+            <a:avLst/>
+          </a:prstGeom>
+          <a:noFill/>
+          <a:ln/>
+        </p:spPr>
+        <p:txBody>
+          <a:bodyPr wrap="square" lIns="0" tIns="0" rIns="0" bIns="0" rtlCol="0" anchor="ctr"/>
+          <a:lstStyle/>
+          <a:p>
+            <a:pPr algn="ctr" indent="0" marL="0">
+              <a:lnSpc>
+                <a:spcPct val="130000"/>
+              </a:lnSpc>
+              <a:buNone/>
+            </a:pPr>
+            <a:r>
+              <a:rPr lang="en-US" sz="1300" dirty="0">
+                <a:solidFill>
+                  <a:srgbClr val="AFC9EE"/>
+                </a:solidFill>
+                <a:latin typeface="Yu Gothic" pitchFamily="34" charset="0"/>
+                <a:ea typeface="Yu Gothic" pitchFamily="34" charset="-122"/>
+                <a:cs typeface="Yu Gothic" pitchFamily="34" charset="-120"/>
+              </a:rPr>
+              <a:t>「支援制度の複雑化」と、誰にも届かないSOS</a:t>
+            </a:r>
+            <a:endParaRPr lang="en-US" sz="1300" dirty="0"/>
+          </a:p>
+        </p:txBody>
+      </p:sp>
+      <p:sp>
+        <p:nvSpPr>
+          <p:cNvPr id="17" name="Shape 13"/>
+          <p:cNvSpPr/>
+          <p:nvPr/>
+        </p:nvSpPr>
+        <p:spPr>
+          <a:xfrm>
+            <a:off x="8121244" y="1874520"/>
+            <a:ext cx="3429000" cy="2880360"/>
+          </a:xfrm>
+          <a:prstGeom prst="roundRect">
+            <a:avLst>
+              <a:gd name="adj" fmla="val 3810"/>
+            </a:avLst>
+          </a:prstGeom>
+          <a:solidFill>
+            <a:srgbClr val="16213A"/>
+          </a:solidFill>
+          <a:ln/>
+          <a:effectLst>
+            <a:outerShdw sx="100000" sy="100000" kx="0" ky="0" algn="bl" rotWithShape="0" blurRad="101600" dist="38100" dir="5400000">
+              <a:srgbClr val="000000">
+                <a:alpha val="35000"/>
+              </a:srgbClr>
+            </a:outerShdw>
+          </a:effectLst>
+        </p:spPr>
+      </p:sp>
+      <p:sp>
+        <p:nvSpPr>
+          <p:cNvPr id="18" name="Shape 14"/>
+          <p:cNvSpPr/>
+          <p:nvPr/>
+        </p:nvSpPr>
+        <p:spPr>
+          <a:xfrm>
+            <a:off x="8930488" y="1746504"/>
+            <a:ext cx="1810512" cy="1810512"/>
+          </a:xfrm>
+          <a:prstGeom prst="ellipse">
+            <a:avLst/>
+          </a:prstGeom>
+          <a:solidFill>
+            <a:srgbClr val="EB6834">
+              <a:alpha val="12000"/>
+            </a:srgbClr>
+          </a:solidFill>
+          <a:ln/>
+        </p:spPr>
+      </p:sp>
+      <p:sp>
+        <p:nvSpPr>
+          <p:cNvPr id="19" name="Shape 15"/>
+          <p:cNvSpPr/>
+          <p:nvPr/>
+        </p:nvSpPr>
+        <p:spPr>
+          <a:xfrm>
+            <a:off x="9177376" y="1993392"/>
+            <a:ext cx="1316736" cy="1316736"/>
+          </a:xfrm>
+          <a:prstGeom prst="ellipse">
+            <a:avLst/>
+          </a:prstGeom>
+          <a:solidFill>
+            <a:srgbClr val="EB6834">
+              <a:alpha val="22000"/>
+            </a:srgbClr>
+          </a:solidFill>
+          <a:ln/>
+        </p:spPr>
+      </p:sp>
+      <p:sp>
+        <p:nvSpPr>
+          <p:cNvPr id="20" name="Shape 16"/>
+          <p:cNvSpPr/>
+          <p:nvPr/>
+        </p:nvSpPr>
+        <p:spPr>
+          <a:xfrm>
+            <a:off x="9424264" y="2240280"/>
+            <a:ext cx="822960" cy="822960"/>
+          </a:xfrm>
+          <a:prstGeom prst="ellipse">
+            <a:avLst/>
+          </a:prstGeom>
+          <a:solidFill>
+            <a:srgbClr val="EB6834"/>
+          </a:solidFill>
+          <a:ln w="9525">
+            <a:solidFill>
+              <a:srgbClr val="EB6834"/>
+            </a:solidFill>
+            <a:prstDash val="solid"/>
+          </a:ln>
+        </p:spPr>
+      </p:sp>
+      <p:pic>
+        <p:nvPicPr>
+          <p:cNvPr id="21" name="Image 2" descr="preencoded.png">    </p:cNvPr>
+          <p:cNvPicPr>
+            <a:picLocks noChangeAspect="1"/>
+          </p:cNvPicPr>
+          <p:nvPr/>
+        </p:nvPicPr>
+        <p:blipFill>
+          <a:blip r:embed="rId3"/>
+          <a:stretch>
+            <a:fillRect/>
+          </a:stretch>
+        </p:blipFill>
+        <p:spPr>
+          <a:xfrm>
+            <a:off x="9638233" y="2454250"/>
+            <a:ext cx="395021" cy="395021"/>
+          </a:xfrm>
+          <a:prstGeom prst="rect">
+            <a:avLst/>
+          </a:prstGeom>
+        </p:spPr>
+      </p:pic>
+      <p:sp>
+        <p:nvSpPr>
+          <p:cNvPr id="22" name="Text 17"/>
+          <p:cNvSpPr/>
+          <p:nvPr/>
+        </p:nvSpPr>
+        <p:spPr>
+          <a:xfrm>
+            <a:off x="8258404" y="3200400"/>
+            <a:ext cx="3154680" cy="411480"/>
+          </a:xfrm>
+          <a:prstGeom prst="rect">
+            <a:avLst/>
+          </a:prstGeom>
+          <a:noFill/>
+          <a:ln/>
+        </p:spPr>
+        <p:txBody>
+          <a:bodyPr wrap="square" lIns="0" tIns="0" rIns="0" bIns="0" rtlCol="0" anchor="ctr"/>
+          <a:lstStyle/>
+          <a:p>
+            <a:pPr algn="ctr" indent="0" marL="0">
+              <a:buNone/>
+            </a:pPr>
+            <a:r>
+              <a:rPr lang="en-US" sz="1700" b="1" dirty="0">
+                <a:solidFill>
+                  <a:srgbClr val="FFFFFF"/>
+                </a:solidFill>
+                <a:latin typeface="Yu Gothic" pitchFamily="34" charset="0"/>
+                <a:ea typeface="Yu Gothic" pitchFamily="34" charset="-122"/>
+                <a:cs typeface="Yu Gothic" pitchFamily="34" charset="-120"/>
+              </a:rPr>
+              <a:t>国</a:t>
+            </a:r>
+            <a:endParaRPr lang="en-US" sz="1700" dirty="0"/>
+          </a:p>
+        </p:txBody>
+      </p:sp>
+      <p:sp>
+        <p:nvSpPr>
+          <p:cNvPr id="23" name="Text 18"/>
+          <p:cNvSpPr/>
+          <p:nvPr/>
+        </p:nvSpPr>
+        <p:spPr>
+          <a:xfrm>
+            <a:off x="8395564" y="3657600"/>
+            <a:ext cx="2880360" cy="914400"/>
+          </a:xfrm>
+          <a:prstGeom prst="rect">
+            <a:avLst/>
+          </a:prstGeom>
+          <a:noFill/>
+          <a:ln/>
+        </p:spPr>
+        <p:txBody>
+          <a:bodyPr wrap="square" lIns="0" tIns="0" rIns="0" bIns="0" rtlCol="0" anchor="ctr"/>
+          <a:lstStyle/>
+          <a:p>
+            <a:pPr algn="ctr" indent="0" marL="0">
+              <a:lnSpc>
+                <a:spcPct val="130000"/>
+              </a:lnSpc>
+              <a:buNone/>
+            </a:pPr>
+            <a:r>
+              <a:rPr lang="en-US" sz="1300" dirty="0">
+                <a:solidFill>
+                  <a:srgbClr val="AFC9EE"/>
+                </a:solidFill>
+                <a:latin typeface="Yu Gothic" pitchFamily="34" charset="0"/>
+                <a:ea typeface="Yu Gothic" pitchFamily="34" charset="-122"/>
+                <a:cs typeface="Yu Gothic" pitchFamily="34" charset="-120"/>
+              </a:rPr>
+              <a:t>「権力の集中」と、強い指導者への救世主待望</a:t>
+            </a:r>
+            <a:endParaRPr lang="en-US" sz="1300" dirty="0"/>
+          </a:p>
+        </p:txBody>
+      </p:sp>
+      <p:sp>
+        <p:nvSpPr>
+          <p:cNvPr id="24" name="Shape 19"/>
+          <p:cNvSpPr/>
+          <p:nvPr/>
+        </p:nvSpPr>
+        <p:spPr>
+          <a:xfrm>
+            <a:off x="548640" y="5166360"/>
+            <a:ext cx="11091672" cy="960120"/>
+          </a:xfrm>
+          <a:prstGeom prst="roundRect">
+            <a:avLst>
+              <a:gd name="adj" fmla="val 9524"/>
+            </a:avLst>
+          </a:prstGeom>
+          <a:solidFill>
+            <a:srgbClr val="1C2C4A"/>
+          </a:solidFill>
+          <a:ln/>
+          <a:effectLst>
+            <a:outerShdw sx="100000" sy="100000" kx="0" ky="0" algn="bl" rotWithShape="0" blurRad="101600" dist="38100" dir="5400000">
+              <a:srgbClr val="000000">
+                <a:alpha val="35000"/>
+              </a:srgbClr>
+            </a:outerShdw>
+          </a:effectLst>
+        </p:spPr>
+      </p:sp>
+      <p:sp>
+        <p:nvSpPr>
+          <p:cNvPr id="25" name="Text 20"/>
+          <p:cNvSpPr/>
+          <p:nvPr/>
+        </p:nvSpPr>
+        <p:spPr>
+          <a:xfrm>
+            <a:off x="868680" y="5166360"/>
+            <a:ext cx="10515600" cy="960120"/>
+          </a:xfrm>
+          <a:prstGeom prst="rect">
+            <a:avLst/>
+          </a:prstGeom>
+          <a:noFill/>
+          <a:ln/>
+        </p:spPr>
+        <p:txBody>
+          <a:bodyPr wrap="square" lIns="0" tIns="0" rIns="0" bIns="0" rtlCol="0" anchor="ctr"/>
+          <a:lstStyle/>
+          <a:p>
+            <a:pPr indent="0" marL="0">
+              <a:buNone/>
+            </a:pPr>
+            <a:r>
+              <a:rPr lang="en-US" sz="1350" dirty="0">
+                <a:solidFill>
+                  <a:srgbClr val="AFC9EE"/>
+                </a:solidFill>
+                <a:latin typeface="Yu Gothic" pitchFamily="34" charset="0"/>
+                <a:ea typeface="Yu Gothic" pitchFamily="34" charset="-122"/>
+                <a:cs typeface="Yu Gothic" pitchFamily="34" charset="-120"/>
+              </a:rPr>
+              <a:t>小さな共同体における「救済者への依存」と、国家規模における「権力の集中」は構造的に同じである。この実験は、社会全体のレジリエンスを問う試みである。</a:t>
+            </a:r>
+            <a:endParaRPr lang="en-US" sz="1350" dirty="0"/>
+          </a:p>
+        </p:txBody>
+      </p:sp>
+      <p:sp>
+        <p:nvSpPr>
+          <p:cNvPr id="26" name="Text 21"/>
+          <p:cNvSpPr/>
+          <p:nvPr/>
+        </p:nvSpPr>
+        <p:spPr>
+          <a:xfrm>
+            <a:off x="548640" y="6473952"/>
+            <a:ext cx="4572000" cy="274320"/>
+          </a:xfrm>
+          <a:prstGeom prst="rect">
+            <a:avLst/>
+          </a:prstGeom>
+          <a:noFill/>
+          <a:ln/>
+        </p:spPr>
+        <p:txBody>
+          <a:bodyPr wrap="square" lIns="0" tIns="0" rIns="0" bIns="0" rtlCol="0" anchor="ctr"/>
+          <a:lstStyle/>
+          <a:p>
+            <a:pPr indent="0" marL="0">
+              <a:buNone/>
+            </a:pPr>
+            <a:r>
+              <a:rPr lang="en-US" sz="900" dirty="0">
+                <a:solidFill>
+                  <a:srgbClr val="5B6480"/>
+                </a:solidFill>
+                <a:latin typeface="Yu Gothic" pitchFamily="34" charset="0"/>
+                <a:ea typeface="Yu Gothic" pitchFamily="34" charset="-122"/>
+                <a:cs typeface="Yu Gothic" pitchFamily="34" charset="-120"/>
+              </a:rPr>
+              <a:t>救済者 × ガバナンス</a:t>
+            </a:r>
+            <a:endParaRPr lang="en-US" sz="900" dirty="0"/>
+          </a:p>
+        </p:txBody>
+      </p:sp>
+      <p:sp>
+        <p:nvSpPr>
+          <p:cNvPr id="27" name="Text 22"/>
+          <p:cNvSpPr/>
+          <p:nvPr/>
+        </p:nvSpPr>
+        <p:spPr>
+          <a:xfrm>
+            <a:off x="11185855" y="6473952"/>
+            <a:ext cx="457200" cy="274320"/>
+          </a:xfrm>
+          <a:prstGeom prst="rect">
+            <a:avLst/>
+          </a:prstGeom>
+          <a:noFill/>
+          <a:ln/>
+        </p:spPr>
+        <p:txBody>
+          <a:bodyPr wrap="square" lIns="0" tIns="0" rIns="0" bIns="0" rtlCol="0" anchor="ctr"/>
+          <a:lstStyle/>
+          <a:p>
+            <a:pPr algn="r" indent="0" marL="0">
+              <a:buNone/>
+            </a:pPr>
+            <a:r>
+              <a:rPr lang="en-US" sz="900" dirty="0">
+                <a:solidFill>
+                  <a:srgbClr val="5B6480"/>
+                </a:solidFill>
+                <a:latin typeface="Yu Gothic" pitchFamily="34" charset="0"/>
+                <a:ea typeface="Yu Gothic" pitchFamily="34" charset="-122"/>
+                <a:cs typeface="Yu Gothic" pitchFamily="34" charset="-120"/>
+              </a:rPr>
+              <a:t>20</a:t>
+            </a:r>
+            <a:endParaRPr lang="en-US" sz="900" dirty="0"/>
+          </a:p>
+        </p:txBody>
+      </p:sp>
+    </p:spTree>
+  </p:cSld>
+  <p:clrMapOvr>
+    <a:masterClrMapping/>
+  </p:clrMapOvr>
+</p:sld>
+</file>
+
+<file path=ppt/slides/slide21.xml><?xml version="1.0" encoding="utf-8"?>
+<p:sld xmlns:a="http://schemas.openxmlformats.org/drawingml/2006/main" xmlns:r="http://schemas.openxmlformats.org/officeDocument/2006/relationships" xmlns:p="http://schemas.openxmlformats.org/presentationml/2006/main">
+  <p:cSld name="Slide 21">
+    <p:bg>
+      <p:bgPr>
+        <a:solidFill>
+          <a:srgbClr val="0B1220"/>
+        </a:solidFill>
+      </p:bgPr>
+    </p:bg>
+    <p:spTree>
+      <p:nvGrpSpPr>
+        <p:cNvPr id="1" name=""/>
+        <p:cNvGrpSpPr/>
+        <p:nvPr/>
+      </p:nvGrpSpPr>
+      <p:grpSpPr>
+        <a:xfrm>
+          <a:off x="0" y="0"/>
+          <a:ext cx="0" cy="0"/>
+          <a:chOff x="0" y="0"/>
+          <a:chExt cx="0" cy="0"/>
+        </a:xfrm>
+      </p:grpSpPr>
+      <p:sp>
+        <p:nvSpPr>
+          <p:cNvPr id="2" name="Text 0"/>
+          <p:cNvSpPr/>
+          <p:nvPr/>
+        </p:nvSpPr>
+        <p:spPr>
+          <a:xfrm>
+            <a:off x="548640" y="411480"/>
+            <a:ext cx="11094415" cy="822960"/>
+          </a:xfrm>
+          <a:prstGeom prst="rect">
+            <a:avLst/>
+          </a:prstGeom>
+          <a:noFill/>
+          <a:ln/>
+        </p:spPr>
+        <p:txBody>
+          <a:bodyPr wrap="square" lIns="0" tIns="0" rIns="0" bIns="0" rtlCol="0" anchor="ctr"/>
+          <a:lstStyle/>
+          <a:p>
+            <a:pPr algn="l" indent="0" marL="0">
+              <a:buNone/>
+            </a:pPr>
+            <a:r>
+              <a:rPr lang="en-US" sz="3000" b="1" dirty="0">
+                <a:solidFill>
+                  <a:srgbClr val="FFFFFF"/>
+                </a:solidFill>
+                <a:latin typeface="Yu Gothic" pitchFamily="34" charset="0"/>
+                <a:ea typeface="Yu Gothic" pitchFamily="34" charset="-122"/>
+                <a:cs typeface="Yu Gothic" pitchFamily="34" charset="-120"/>
+              </a:rPr>
+              <a:t>救済者×ガバナンスに戻すと</a:t>
+            </a:r>
+            <a:endParaRPr lang="en-US" sz="3000" dirty="0"/>
+          </a:p>
+        </p:txBody>
+      </p:sp>
+      <p:sp>
+        <p:nvSpPr>
+          <p:cNvPr id="3" name="Text 1"/>
+          <p:cNvSpPr/>
+          <p:nvPr/>
+        </p:nvSpPr>
+        <p:spPr>
+          <a:xfrm>
+            <a:off x="548640" y="1207008"/>
+            <a:ext cx="11094415" cy="365760"/>
+          </a:xfrm>
+          <a:prstGeom prst="rect">
+            <a:avLst/>
+          </a:prstGeom>
+          <a:noFill/>
+          <a:ln/>
+        </p:spPr>
+        <p:txBody>
+          <a:bodyPr wrap="square" lIns="0" tIns="0" rIns="0" bIns="0" rtlCol="0" anchor="ctr"/>
+          <a:lstStyle/>
+          <a:p>
+            <a:pPr algn="l" indent="0" marL="0">
+              <a:buNone/>
+            </a:pPr>
+            <a:r>
+              <a:rPr lang="en-US" sz="1400" dirty="0">
+                <a:solidFill>
+                  <a:srgbClr val="9AA4C0"/>
+                </a:solidFill>
+                <a:latin typeface="Yu Gothic" pitchFamily="34" charset="0"/>
+                <a:ea typeface="Yu Gothic" pitchFamily="34" charset="-122"/>
+                <a:cs typeface="Yu Gothic" pitchFamily="34" charset="-120"/>
+              </a:rPr>
+              <a:t>同じ処方箋が、どの集団にも同じように効くわけではない。</a:t>
+            </a:r>
+            <a:endParaRPr lang="en-US" sz="1400" dirty="0"/>
+          </a:p>
+        </p:txBody>
+      </p:sp>
+      <p:sp>
+        <p:nvSpPr>
+          <p:cNvPr id="4" name="Shape 2"/>
+          <p:cNvSpPr/>
+          <p:nvPr/>
+        </p:nvSpPr>
+        <p:spPr>
+          <a:xfrm>
+            <a:off x="367132" y="1828800"/>
+            <a:ext cx="5486400" cy="3611880"/>
+          </a:xfrm>
+          <a:prstGeom prst="roundRect">
+            <a:avLst>
+              <a:gd name="adj" fmla="val 3038"/>
+            </a:avLst>
+          </a:prstGeom>
+          <a:solidFill>
+            <a:srgbClr val="16213A"/>
+          </a:solidFill>
+          <a:ln/>
+          <a:effectLst>
+            <a:outerShdw sx="100000" sy="100000" kx="0" ky="0" algn="bl" rotWithShape="0" blurRad="101600" dist="38100" dir="5400000">
+              <a:srgbClr val="000000">
+                <a:alpha val="35000"/>
+              </a:srgbClr>
+            </a:outerShdw>
+          </a:effectLst>
+        </p:spPr>
+      </p:sp>
+      <p:sp>
+        <p:nvSpPr>
+          <p:cNvPr id="5" name="Shape 3"/>
+          <p:cNvSpPr/>
+          <p:nvPr/>
+        </p:nvSpPr>
+        <p:spPr>
+          <a:xfrm>
+            <a:off x="787756" y="2112264"/>
+            <a:ext cx="713232" cy="713232"/>
+          </a:xfrm>
+          <a:prstGeom prst="ellipse">
+            <a:avLst/>
+          </a:prstGeom>
+          <a:solidFill>
+            <a:srgbClr val="E8A33D"/>
+          </a:solidFill>
+          <a:ln w="9525">
+            <a:solidFill>
+              <a:srgbClr val="E8A33D"/>
+            </a:solidFill>
+            <a:prstDash val="solid"/>
+          </a:ln>
+        </p:spPr>
+      </p:sp>
+      <p:pic>
+        <p:nvPicPr>
+          <p:cNvPr id="6" name="Image 0" descr="preencoded.png">    </p:cNvPr>
+          <p:cNvPicPr>
+            <a:picLocks noChangeAspect="1"/>
+          </p:cNvPicPr>
+          <p:nvPr/>
+        </p:nvPicPr>
+        <p:blipFill>
+          <a:blip r:embed="rId1"/>
+          <a:stretch>
+            <a:fillRect/>
+          </a:stretch>
+        </p:blipFill>
+        <p:spPr>
+          <a:xfrm>
+            <a:off x="973196" y="2297704"/>
+            <a:ext cx="342351" cy="342351"/>
+          </a:xfrm>
+          <a:prstGeom prst="rect">
+            <a:avLst/>
+          </a:prstGeom>
+        </p:spPr>
+      </p:pic>
+      <p:sp>
+        <p:nvSpPr>
+          <p:cNvPr id="7" name="Text 4"/>
+          <p:cNvSpPr/>
+          <p:nvPr/>
+        </p:nvSpPr>
+        <p:spPr>
+          <a:xfrm>
+            <a:off x="1693012" y="2194560"/>
+            <a:ext cx="3931920" cy="365760"/>
+          </a:xfrm>
+          <a:prstGeom prst="rect">
+            <a:avLst/>
+          </a:prstGeom>
+          <a:noFill/>
+          <a:ln/>
+        </p:spPr>
+        <p:txBody>
+          <a:bodyPr wrap="square" lIns="0" tIns="0" rIns="0" bIns="0" rtlCol="0" anchor="ctr"/>
+          <a:lstStyle/>
+          <a:p>
+            <a:pPr indent="0" marL="0">
+              <a:buNone/>
+            </a:pPr>
+            <a:r>
+              <a:rPr lang="en-US" sz="1500" b="1" dirty="0">
+                <a:solidFill>
+                  <a:srgbClr val="E8A33D"/>
+                </a:solidFill>
+                <a:latin typeface="Yu Gothic" pitchFamily="34" charset="0"/>
+                <a:ea typeface="Yu Gothic" pitchFamily="34" charset="-122"/>
+                <a:cs typeface="Yu Gothic" pitchFamily="34" charset="-120"/>
+              </a:rPr>
+              <a:t>波及が強い集団</a:t>
+            </a:r>
+            <a:endParaRPr lang="en-US" sz="1500" dirty="0"/>
+          </a:p>
+        </p:txBody>
+      </p:sp>
+      <p:sp>
+        <p:nvSpPr>
+          <p:cNvPr id="8" name="Text 5"/>
+          <p:cNvSpPr/>
+          <p:nvPr/>
+        </p:nvSpPr>
+        <p:spPr>
+          <a:xfrm>
+            <a:off x="1693012" y="2578608"/>
+            <a:ext cx="3931920" cy="310896"/>
+          </a:xfrm>
+          <a:prstGeom prst="rect">
+            <a:avLst/>
+          </a:prstGeom>
+          <a:noFill/>
+          <a:ln/>
+        </p:spPr>
+        <p:txBody>
+          <a:bodyPr wrap="square" lIns="0" tIns="0" rIns="0" bIns="0" rtlCol="0" anchor="ctr"/>
+          <a:lstStyle/>
+          <a:p>
+            <a:pPr indent="0" marL="0">
+              <a:buNone/>
+            </a:pPr>
+            <a:r>
+              <a:rPr lang="en-US" sz="1150" dirty="0">
+                <a:solidFill>
+                  <a:srgbClr val="9AA4C0"/>
+                </a:solidFill>
+                <a:latin typeface="Yu Gothic" pitchFamily="34" charset="0"/>
+                <a:ea typeface="Yu Gothic" pitchFamily="34" charset="-122"/>
+                <a:cs typeface="Yu Gothic" pitchFamily="34" charset="-120"/>
+              </a:rPr>
+              <a:t>一人を動かすと集団全体が動く</a:t>
+            </a:r>
+            <a:endParaRPr lang="en-US" sz="1150" dirty="0"/>
+          </a:p>
+        </p:txBody>
+      </p:sp>
+      <p:sp>
+        <p:nvSpPr>
+          <p:cNvPr id="9" name="Shape 6"/>
+          <p:cNvSpPr/>
+          <p:nvPr/>
+        </p:nvSpPr>
+        <p:spPr>
+          <a:xfrm>
+            <a:off x="778612" y="3246120"/>
+            <a:ext cx="128016" cy="128016"/>
+          </a:xfrm>
+          <a:prstGeom prst="ellipse">
+            <a:avLst/>
+          </a:prstGeom>
+          <a:solidFill>
+            <a:srgbClr val="E8A33D"/>
+          </a:solidFill>
+          <a:ln/>
+        </p:spPr>
+      </p:sp>
+      <p:sp>
+        <p:nvSpPr>
+          <p:cNvPr id="10" name="Text 7"/>
+          <p:cNvSpPr/>
+          <p:nvPr/>
+        </p:nvSpPr>
+        <p:spPr>
+          <a:xfrm>
+            <a:off x="1052932" y="3127248"/>
+            <a:ext cx="4434840" cy="658368"/>
+          </a:xfrm>
+          <a:prstGeom prst="rect">
+            <a:avLst/>
+          </a:prstGeom>
+          <a:noFill/>
+          <a:ln/>
+        </p:spPr>
+        <p:txBody>
+          <a:bodyPr wrap="square" lIns="0" tIns="0" rIns="0" bIns="0" rtlCol="0" anchor="ctr"/>
+          <a:lstStyle/>
+          <a:p>
+            <a:pPr indent="0" marL="0">
+              <a:lnSpc>
+                <a:spcPct val="125000"/>
+              </a:lnSpc>
+              <a:buNone/>
+            </a:pPr>
+            <a:r>
+              <a:rPr lang="en-US" sz="1150" dirty="0">
+                <a:solidFill>
+                  <a:srgbClr val="AFC9EE"/>
+                </a:solidFill>
+                <a:latin typeface="Yu Gothic" pitchFamily="34" charset="0"/>
+                <a:ea typeface="Yu Gothic" pitchFamily="34" charset="-122"/>
+                <a:cs typeface="Yu Gothic" pitchFamily="34" charset="-120"/>
+              </a:rPr>
+              <a:t>救済者への一点集中には構造的な合理性がある</a:t>
+            </a:r>
+            <a:endParaRPr lang="en-US" sz="1150" dirty="0"/>
+          </a:p>
+        </p:txBody>
+      </p:sp>
+      <p:sp>
+        <p:nvSpPr>
+          <p:cNvPr id="11" name="Shape 8"/>
+          <p:cNvSpPr/>
+          <p:nvPr/>
+        </p:nvSpPr>
+        <p:spPr>
+          <a:xfrm>
+            <a:off x="778612" y="3977640"/>
+            <a:ext cx="128016" cy="128016"/>
+          </a:xfrm>
+          <a:prstGeom prst="ellipse">
+            <a:avLst/>
+          </a:prstGeom>
+          <a:solidFill>
+            <a:srgbClr val="E8A33D"/>
+          </a:solidFill>
+          <a:ln/>
+        </p:spPr>
+      </p:sp>
+      <p:sp>
+        <p:nvSpPr>
+          <p:cNvPr id="12" name="Text 9"/>
+          <p:cNvSpPr/>
+          <p:nvPr/>
+        </p:nvSpPr>
+        <p:spPr>
+          <a:xfrm>
+            <a:off x="1052932" y="3858768"/>
+            <a:ext cx="4434840" cy="658368"/>
+          </a:xfrm>
+          <a:prstGeom prst="rect">
+            <a:avLst/>
+          </a:prstGeom>
+          <a:noFill/>
+          <a:ln/>
+        </p:spPr>
+        <p:txBody>
+          <a:bodyPr wrap="square" lIns="0" tIns="0" rIns="0" bIns="0" rtlCol="0" anchor="ctr"/>
+          <a:lstStyle/>
+          <a:p>
+            <a:pPr indent="0" marL="0">
+              <a:lnSpc>
+                <a:spcPct val="125000"/>
+              </a:lnSpc>
+              <a:buNone/>
+            </a:pPr>
+            <a:r>
+              <a:rPr lang="en-US" sz="1150" dirty="0">
+                <a:solidFill>
+                  <a:srgbClr val="AFC9EE"/>
+                </a:solidFill>
+                <a:latin typeface="Yu Gothic" pitchFamily="34" charset="0"/>
+                <a:ea typeface="Yu Gothic" pitchFamily="34" charset="-122"/>
+                <a:cs typeface="Yu Gothic" pitchFamily="34" charset="-120"/>
+              </a:rPr>
+              <a:t>「誰か一人を育てる／支える」が実際に最も効く打ち手になる</a:t>
+            </a:r>
+            <a:endParaRPr lang="en-US" sz="1150" dirty="0"/>
+          </a:p>
+        </p:txBody>
+      </p:sp>
+      <p:sp>
+        <p:nvSpPr>
+          <p:cNvPr id="13" name="Shape 10"/>
+          <p:cNvSpPr/>
+          <p:nvPr/>
+        </p:nvSpPr>
+        <p:spPr>
+          <a:xfrm>
+            <a:off x="778612" y="4709160"/>
+            <a:ext cx="128016" cy="128016"/>
+          </a:xfrm>
+          <a:prstGeom prst="ellipse">
+            <a:avLst/>
+          </a:prstGeom>
+          <a:solidFill>
+            <a:srgbClr val="E8A33D"/>
+          </a:solidFill>
+          <a:ln/>
+        </p:spPr>
+      </p:sp>
+      <p:sp>
+        <p:nvSpPr>
+          <p:cNvPr id="14" name="Text 11"/>
+          <p:cNvSpPr/>
+          <p:nvPr/>
+        </p:nvSpPr>
+        <p:spPr>
+          <a:xfrm>
+            <a:off x="1052932" y="4590288"/>
+            <a:ext cx="4434840" cy="658368"/>
+          </a:xfrm>
+          <a:prstGeom prst="rect">
+            <a:avLst/>
+          </a:prstGeom>
+          <a:noFill/>
+          <a:ln/>
+        </p:spPr>
+        <p:txBody>
+          <a:bodyPr wrap="square" lIns="0" tIns="0" rIns="0" bIns="0" rtlCol="0" anchor="ctr"/>
+          <a:lstStyle/>
+          <a:p>
+            <a:pPr indent="0" marL="0">
+              <a:lnSpc>
+                <a:spcPct val="125000"/>
+              </a:lnSpc>
+              <a:buNone/>
+            </a:pPr>
+            <a:r>
+              <a:rPr lang="en-US" sz="1150" dirty="0">
+                <a:solidFill>
+                  <a:srgbClr val="AFC9EE"/>
+                </a:solidFill>
+                <a:latin typeface="Yu Gothic" pitchFamily="34" charset="0"/>
+                <a:ea typeface="Yu Gothic" pitchFamily="34" charset="-122"/>
+                <a:cs typeface="Yu Gothic" pitchFamily="34" charset="-120"/>
+              </a:rPr>
+              <a:t>依存は怠慢ではなく、その集団で合理的だから起きている</a:t>
+            </a:r>
+            <a:endParaRPr lang="en-US" sz="1150" dirty="0"/>
+          </a:p>
+        </p:txBody>
+      </p:sp>
+      <p:sp>
+        <p:nvSpPr>
+          <p:cNvPr id="15" name="Shape 12"/>
+          <p:cNvSpPr/>
+          <p:nvPr/>
+        </p:nvSpPr>
+        <p:spPr>
+          <a:xfrm>
+            <a:off x="6338164" y="1828800"/>
+            <a:ext cx="5486400" cy="3611880"/>
+          </a:xfrm>
+          <a:prstGeom prst="roundRect">
+            <a:avLst>
+              <a:gd name="adj" fmla="val 3038"/>
+            </a:avLst>
+          </a:prstGeom>
+          <a:solidFill>
+            <a:srgbClr val="16213A"/>
+          </a:solidFill>
+          <a:ln/>
+          <a:effectLst>
+            <a:outerShdw sx="100000" sy="100000" kx="0" ky="0" algn="bl" rotWithShape="0" blurRad="101600" dist="38100" dir="5400000">
+              <a:srgbClr val="000000">
+                <a:alpha val="35000"/>
+              </a:srgbClr>
+            </a:outerShdw>
+          </a:effectLst>
+        </p:spPr>
+      </p:sp>
+      <p:sp>
+        <p:nvSpPr>
+          <p:cNvPr id="16" name="Shape 13"/>
+          <p:cNvSpPr/>
+          <p:nvPr/>
+        </p:nvSpPr>
+        <p:spPr>
+          <a:xfrm>
+            <a:off x="6758788" y="2112264"/>
+            <a:ext cx="713232" cy="713232"/>
+          </a:xfrm>
+          <a:prstGeom prst="ellipse">
+            <a:avLst/>
+          </a:prstGeom>
+          <a:solidFill>
+            <a:srgbClr val="5A8FD6"/>
+          </a:solidFill>
+          <a:ln w="9525">
+            <a:solidFill>
+              <a:srgbClr val="5A8FD6"/>
+            </a:solidFill>
+            <a:prstDash val="solid"/>
+          </a:ln>
+        </p:spPr>
+      </p:sp>
+      <p:pic>
+        <p:nvPicPr>
+          <p:cNvPr id="17" name="Image 1" descr="preencoded.png">    </p:cNvPr>
+          <p:cNvPicPr>
+            <a:picLocks noChangeAspect="1"/>
+          </p:cNvPicPr>
+          <p:nvPr/>
+        </p:nvPicPr>
+        <p:blipFill>
+          <a:blip r:embed="rId2"/>
+          <a:stretch>
+            <a:fillRect/>
+          </a:stretch>
+        </p:blipFill>
+        <p:spPr>
+          <a:xfrm>
+            <a:off x="6944228" y="2297704"/>
+            <a:ext cx="342351" cy="342351"/>
+          </a:xfrm>
+          <a:prstGeom prst="rect">
+            <a:avLst/>
+          </a:prstGeom>
+        </p:spPr>
+      </p:pic>
+      <p:sp>
+        <p:nvSpPr>
+          <p:cNvPr id="18" name="Text 14"/>
+          <p:cNvSpPr/>
+          <p:nvPr/>
+        </p:nvSpPr>
+        <p:spPr>
+          <a:xfrm>
+            <a:off x="7664044" y="2194560"/>
+            <a:ext cx="3931920" cy="365760"/>
+          </a:xfrm>
+          <a:prstGeom prst="rect">
+            <a:avLst/>
+          </a:prstGeom>
+          <a:noFill/>
+          <a:ln/>
+        </p:spPr>
+        <p:txBody>
+          <a:bodyPr wrap="square" lIns="0" tIns="0" rIns="0" bIns="0" rtlCol="0" anchor="ctr"/>
+          <a:lstStyle/>
+          <a:p>
+            <a:pPr indent="0" marL="0">
+              <a:buNone/>
+            </a:pPr>
+            <a:r>
+              <a:rPr lang="en-US" sz="1500" b="1" dirty="0">
+                <a:solidFill>
+                  <a:srgbClr val="5A8FD6"/>
+                </a:solidFill>
+                <a:latin typeface="Yu Gothic" pitchFamily="34" charset="0"/>
+                <a:ea typeface="Yu Gothic" pitchFamily="34" charset="-122"/>
+                <a:cs typeface="Yu Gothic" pitchFamily="34" charset="-120"/>
+              </a:rPr>
+              <a:t>判断が独立した集団</a:t>
+            </a:r>
+            <a:endParaRPr lang="en-US" sz="1500" dirty="0"/>
+          </a:p>
+        </p:txBody>
+      </p:sp>
+      <p:sp>
+        <p:nvSpPr>
+          <p:cNvPr id="19" name="Text 15"/>
+          <p:cNvSpPr/>
+          <p:nvPr/>
+        </p:nvSpPr>
+        <p:spPr>
+          <a:xfrm>
+            <a:off x="7664044" y="2578608"/>
+            <a:ext cx="3931920" cy="310896"/>
+          </a:xfrm>
+          <a:prstGeom prst="rect">
+            <a:avLst/>
+          </a:prstGeom>
+          <a:noFill/>
+          <a:ln/>
+        </p:spPr>
+        <p:txBody>
+          <a:bodyPr wrap="square" lIns="0" tIns="0" rIns="0" bIns="0" rtlCol="0" anchor="ctr"/>
+          <a:lstStyle/>
+          <a:p>
+            <a:pPr indent="0" marL="0">
+              <a:buNone/>
+            </a:pPr>
+            <a:r>
+              <a:rPr lang="en-US" sz="1150" dirty="0">
+                <a:solidFill>
+                  <a:srgbClr val="9AA4C0"/>
+                </a:solidFill>
+                <a:latin typeface="Yu Gothic" pitchFamily="34" charset="0"/>
+                <a:ea typeface="Yu Gothic" pitchFamily="34" charset="-122"/>
+                <a:cs typeface="Yu Gothic" pitchFamily="34" charset="-120"/>
+              </a:rPr>
+              <a:t>一人を動かしても集団は動かない</a:t>
+            </a:r>
+            <a:endParaRPr lang="en-US" sz="1150" dirty="0"/>
+          </a:p>
+        </p:txBody>
+      </p:sp>
+      <p:sp>
+        <p:nvSpPr>
+          <p:cNvPr id="20" name="Shape 16"/>
+          <p:cNvSpPr/>
+          <p:nvPr/>
+        </p:nvSpPr>
+        <p:spPr>
+          <a:xfrm>
+            <a:off x="6749644" y="3246120"/>
+            <a:ext cx="128016" cy="128016"/>
+          </a:xfrm>
+          <a:prstGeom prst="ellipse">
+            <a:avLst/>
+          </a:prstGeom>
+          <a:solidFill>
+            <a:srgbClr val="5A8FD6"/>
+          </a:solidFill>
+          <a:ln/>
+        </p:spPr>
+      </p:sp>
+      <p:sp>
+        <p:nvSpPr>
+          <p:cNvPr id="21" name="Text 17"/>
+          <p:cNvSpPr/>
+          <p:nvPr/>
+        </p:nvSpPr>
+        <p:spPr>
+          <a:xfrm>
+            <a:off x="7023964" y="3127248"/>
+            <a:ext cx="4434840" cy="658368"/>
+          </a:xfrm>
+          <a:prstGeom prst="rect">
+            <a:avLst/>
+          </a:prstGeom>
+          <a:noFill/>
+          <a:ln/>
+        </p:spPr>
+        <p:txBody>
+          <a:bodyPr wrap="square" lIns="0" tIns="0" rIns="0" bIns="0" rtlCol="0" anchor="ctr"/>
+          <a:lstStyle/>
+          <a:p>
+            <a:pPr indent="0" marL="0">
+              <a:lnSpc>
+                <a:spcPct val="125000"/>
+              </a:lnSpc>
+              <a:buNone/>
+            </a:pPr>
+            <a:r>
+              <a:rPr lang="en-US" sz="1150" dirty="0">
+                <a:solidFill>
+                  <a:srgbClr val="AFC9EE"/>
+                </a:solidFill>
+                <a:latin typeface="Yu Gothic" pitchFamily="34" charset="0"/>
+                <a:ea typeface="Yu Gothic" pitchFamily="34" charset="-122"/>
+                <a:cs typeface="Yu Gothic" pitchFamily="34" charset="-120"/>
+              </a:rPr>
+              <a:t>キーパーソンを立てる施策が通用しない</a:t>
+            </a:r>
+            <a:endParaRPr lang="en-US" sz="1150" dirty="0"/>
+          </a:p>
+        </p:txBody>
+      </p:sp>
+      <p:sp>
+        <p:nvSpPr>
+          <p:cNvPr id="22" name="Shape 18"/>
+          <p:cNvSpPr/>
+          <p:nvPr/>
+        </p:nvSpPr>
+        <p:spPr>
+          <a:xfrm>
+            <a:off x="6749644" y="3977640"/>
+            <a:ext cx="128016" cy="128016"/>
+          </a:xfrm>
+          <a:prstGeom prst="ellipse">
+            <a:avLst/>
+          </a:prstGeom>
+          <a:solidFill>
+            <a:srgbClr val="5A8FD6"/>
+          </a:solidFill>
+          <a:ln/>
+        </p:spPr>
+      </p:sp>
+      <p:sp>
+        <p:nvSpPr>
+          <p:cNvPr id="23" name="Text 19"/>
+          <p:cNvSpPr/>
+          <p:nvPr/>
+        </p:nvSpPr>
+        <p:spPr>
+          <a:xfrm>
+            <a:off x="7023964" y="3858768"/>
+            <a:ext cx="4434840" cy="658368"/>
+          </a:xfrm>
+          <a:prstGeom prst="rect">
+            <a:avLst/>
+          </a:prstGeom>
+          <a:noFill/>
+          <a:ln/>
+        </p:spPr>
+        <p:txBody>
+          <a:bodyPr wrap="square" lIns="0" tIns="0" rIns="0" bIns="0" rtlCol="0" anchor="ctr"/>
+          <a:lstStyle/>
+          <a:p>
+            <a:pPr indent="0" marL="0">
+              <a:lnSpc>
+                <a:spcPct val="125000"/>
+              </a:lnSpc>
+              <a:buNone/>
+            </a:pPr>
+            <a:r>
+              <a:rPr lang="en-US" sz="1150" dirty="0">
+                <a:solidFill>
+                  <a:srgbClr val="AFC9EE"/>
+                </a:solidFill>
+                <a:latin typeface="Yu Gothic" pitchFamily="34" charset="0"/>
+                <a:ea typeface="Yu Gothic" pitchFamily="34" charset="-122"/>
+                <a:cs typeface="Yu Gothic" pitchFamily="34" charset="-120"/>
+              </a:rPr>
+              <a:t>複数の参加経路や意思決定の仕組みが要る</a:t>
+            </a:r>
+            <a:endParaRPr lang="en-US" sz="1150" dirty="0"/>
+          </a:p>
+        </p:txBody>
+      </p:sp>
+      <p:sp>
+        <p:nvSpPr>
+          <p:cNvPr id="24" name="Shape 20"/>
+          <p:cNvSpPr/>
+          <p:nvPr/>
+        </p:nvSpPr>
+        <p:spPr>
+          <a:xfrm>
+            <a:off x="6749644" y="4709160"/>
+            <a:ext cx="128016" cy="128016"/>
+          </a:xfrm>
+          <a:prstGeom prst="ellipse">
+            <a:avLst/>
+          </a:prstGeom>
+          <a:solidFill>
+            <a:srgbClr val="5A8FD6"/>
+          </a:solidFill>
+          <a:ln/>
+        </p:spPr>
+      </p:sp>
+      <p:sp>
+        <p:nvSpPr>
+          <p:cNvPr id="25" name="Text 21"/>
+          <p:cNvSpPr/>
+          <p:nvPr/>
+        </p:nvSpPr>
+        <p:spPr>
+          <a:xfrm>
+            <a:off x="7023964" y="4590288"/>
+            <a:ext cx="4434840" cy="658368"/>
+          </a:xfrm>
+          <a:prstGeom prst="rect">
+            <a:avLst/>
+          </a:prstGeom>
+          <a:noFill/>
+          <a:ln/>
+        </p:spPr>
+        <p:txBody>
+          <a:bodyPr wrap="square" lIns="0" tIns="0" rIns="0" bIns="0" rtlCol="0" anchor="ctr"/>
+          <a:lstStyle/>
+          <a:p>
+            <a:pPr indent="0" marL="0">
+              <a:lnSpc>
+                <a:spcPct val="125000"/>
+              </a:lnSpc>
+              <a:buNone/>
+            </a:pPr>
+            <a:r>
+              <a:rPr lang="en-US" sz="1150" dirty="0">
+                <a:solidFill>
+                  <a:srgbClr val="AFC9EE"/>
+                </a:solidFill>
+                <a:latin typeface="Yu Gothic" pitchFamily="34" charset="0"/>
+                <a:ea typeface="Yu Gothic" pitchFamily="34" charset="-122"/>
+                <a:cs typeface="Yu Gothic" pitchFamily="34" charset="-120"/>
+              </a:rPr>
+              <a:t>変えるべきは人ではなく、制度と場のほう</a:t>
+            </a:r>
+            <a:endParaRPr lang="en-US" sz="1150" dirty="0"/>
+          </a:p>
+        </p:txBody>
+      </p:sp>
+      <p:sp>
+        <p:nvSpPr>
+          <p:cNvPr id="26" name="Shape 22"/>
+          <p:cNvSpPr/>
+          <p:nvPr/>
+        </p:nvSpPr>
+        <p:spPr>
+          <a:xfrm>
+            <a:off x="548640" y="5669280"/>
+            <a:ext cx="11091672" cy="749808"/>
+          </a:xfrm>
+          <a:prstGeom prst="roundRect">
+            <a:avLst>
+              <a:gd name="adj" fmla="val 12195"/>
+            </a:avLst>
+          </a:prstGeom>
+          <a:solidFill>
+            <a:srgbClr val="1C2C4A"/>
+          </a:solidFill>
+          <a:ln/>
+          <a:effectLst>
+            <a:outerShdw sx="100000" sy="100000" kx="0" ky="0" algn="bl" rotWithShape="0" blurRad="101600" dist="38100" dir="5400000">
+              <a:srgbClr val="000000">
+                <a:alpha val="35000"/>
+              </a:srgbClr>
+            </a:outerShdw>
+          </a:effectLst>
+        </p:spPr>
+      </p:sp>
+      <p:sp>
+        <p:nvSpPr>
+          <p:cNvPr id="27" name="Text 23"/>
+          <p:cNvSpPr/>
+          <p:nvPr/>
+        </p:nvSpPr>
+        <p:spPr>
+          <a:xfrm>
+            <a:off x="868680" y="5669280"/>
+            <a:ext cx="10515600" cy="749808"/>
+          </a:xfrm>
+          <a:prstGeom prst="rect">
+            <a:avLst/>
+          </a:prstGeom>
+          <a:noFill/>
+          <a:ln/>
+        </p:spPr>
+        <p:txBody>
+          <a:bodyPr wrap="square" lIns="0" tIns="0" rIns="0" bIns="0" rtlCol="0" anchor="ctr"/>
+          <a:lstStyle/>
+          <a:p>
+            <a:pPr indent="0" marL="0">
+              <a:buNone/>
+            </a:pPr>
+            <a:r>
+              <a:rPr lang="en-US" sz="1350" b="1" dirty="0">
+                <a:solidFill>
+                  <a:srgbClr val="F4C878"/>
+                </a:solidFill>
+                <a:latin typeface="Yu Gothic" pitchFamily="34" charset="0"/>
+                <a:ea typeface="Yu Gothic" pitchFamily="34" charset="-122"/>
+                <a:cs typeface="Yu Gothic" pitchFamily="34" charset="-120"/>
+              </a:rPr>
+              <a:t>「救済者に依存するな」「権限を分散せよ」は、集団のタイプを見ないまま打つと、効く集団とまったく効かない集団に分かれる。</a:t>
+            </a:r>
+            <a:endParaRPr lang="en-US" sz="1350" dirty="0"/>
+          </a:p>
+        </p:txBody>
+      </p:sp>
+      <p:sp>
+        <p:nvSpPr>
+          <p:cNvPr id="28" name="Text 24"/>
+          <p:cNvSpPr/>
+          <p:nvPr/>
+        </p:nvSpPr>
+        <p:spPr>
+          <a:xfrm>
+            <a:off x="548640" y="6473952"/>
+            <a:ext cx="4572000" cy="274320"/>
+          </a:xfrm>
+          <a:prstGeom prst="rect">
+            <a:avLst/>
+          </a:prstGeom>
+          <a:noFill/>
+          <a:ln/>
+        </p:spPr>
+        <p:txBody>
+          <a:bodyPr wrap="square" lIns="0" tIns="0" rIns="0" bIns="0" rtlCol="0" anchor="ctr"/>
+          <a:lstStyle/>
+          <a:p>
+            <a:pPr indent="0" marL="0">
+              <a:buNone/>
+            </a:pPr>
+            <a:r>
+              <a:rPr lang="en-US" sz="900" dirty="0">
+                <a:solidFill>
+                  <a:srgbClr val="5B6480"/>
+                </a:solidFill>
+                <a:latin typeface="Yu Gothic" pitchFamily="34" charset="0"/>
+                <a:ea typeface="Yu Gothic" pitchFamily="34" charset="-122"/>
+                <a:cs typeface="Yu Gothic" pitchFamily="34" charset="-120"/>
+              </a:rPr>
+              <a:t>救済者 × ガバナンス</a:t>
+            </a:r>
+            <a:endParaRPr lang="en-US" sz="900" dirty="0"/>
+          </a:p>
+        </p:txBody>
+      </p:sp>
+      <p:sp>
+        <p:nvSpPr>
+          <p:cNvPr id="29" name="Text 25"/>
+          <p:cNvSpPr/>
+          <p:nvPr/>
+        </p:nvSpPr>
+        <p:spPr>
+          <a:xfrm>
+            <a:off x="11185855" y="6473952"/>
+            <a:ext cx="457200" cy="274320"/>
+          </a:xfrm>
+          <a:prstGeom prst="rect">
+            <a:avLst/>
+          </a:prstGeom>
+          <a:noFill/>
+          <a:ln/>
+        </p:spPr>
+        <p:txBody>
+          <a:bodyPr wrap="square" lIns="0" tIns="0" rIns="0" bIns="0" rtlCol="0" anchor="ctr"/>
+          <a:lstStyle/>
+          <a:p>
+            <a:pPr algn="r" indent="0" marL="0">
+              <a:buNone/>
+            </a:pPr>
+            <a:r>
+              <a:rPr lang="en-US" sz="900" dirty="0">
+                <a:solidFill>
+                  <a:srgbClr val="5B6480"/>
+                </a:solidFill>
+                <a:latin typeface="Yu Gothic" pitchFamily="34" charset="0"/>
+                <a:ea typeface="Yu Gothic" pitchFamily="34" charset="-122"/>
+                <a:cs typeface="Yu Gothic" pitchFamily="34" charset="-120"/>
+              </a:rPr>
+              <a:t>21</a:t>
+            </a:r>
+            <a:endParaRPr lang="en-US" sz="900" dirty="0"/>
+          </a:p>
+        </p:txBody>
+      </p:sp>
+    </p:spTree>
+  </p:cSld>
+  <p:clrMapOvr>
+    <a:masterClrMapping/>
+  </p:clrMapOvr>
+</p:sld>
+</file>
+
+<file path=ppt/slides/slide22.xml><?xml version="1.0" encoding="utf-8"?>
+<p:sld xmlns:a="http://schemas.openxmlformats.org/drawingml/2006/main" xmlns:r="http://schemas.openxmlformats.org/officeDocument/2006/relationships" xmlns:p="http://schemas.openxmlformats.org/presentationml/2006/main">
+  <p:cSld name="Slide 22">
+    <p:bg>
+      <p:bgPr>
+        <a:solidFill>
+          <a:srgbClr val="0B1220"/>
+        </a:solidFill>
+      </p:bgPr>
+    </p:bg>
+    <p:spTree>
+      <p:nvGrpSpPr>
+        <p:cNvPr id="1" name=""/>
+        <p:cNvGrpSpPr/>
+        <p:nvPr/>
+      </p:nvGrpSpPr>
+      <p:grpSpPr>
+        <a:xfrm>
+          <a:off x="0" y="0"/>
+          <a:ext cx="0" cy="0"/>
+          <a:chOff x="0" y="0"/>
+          <a:chExt cx="0" cy="0"/>
+        </a:xfrm>
+      </p:grpSpPr>
+      <p:sp>
+        <p:nvSpPr>
+          <p:cNvPr id="2" name="Shape 0"/>
+          <p:cNvSpPr/>
+          <p:nvPr/>
+        </p:nvSpPr>
+        <p:spPr>
+          <a:xfrm>
+            <a:off x="5190592" y="512064"/>
+            <a:ext cx="1810512" cy="1810512"/>
+          </a:xfrm>
+          <a:prstGeom prst="ellipse">
+            <a:avLst/>
+          </a:prstGeom>
+          <a:solidFill>
+            <a:srgbClr val="E8A33D">
+              <a:alpha val="12000"/>
+            </a:srgbClr>
+          </a:solidFill>
+          <a:ln/>
+        </p:spPr>
+      </p:sp>
+      <p:sp>
+        <p:nvSpPr>
+          <p:cNvPr id="3" name="Shape 1"/>
+          <p:cNvSpPr/>
+          <p:nvPr/>
+        </p:nvSpPr>
+        <p:spPr>
+          <a:xfrm>
+            <a:off x="5437480" y="758952"/>
+            <a:ext cx="1316736" cy="1316736"/>
+          </a:xfrm>
+          <a:prstGeom prst="ellipse">
+            <a:avLst/>
+          </a:prstGeom>
+          <a:solidFill>
+            <a:srgbClr val="E8A33D">
+              <a:alpha val="22000"/>
+            </a:srgbClr>
+          </a:solidFill>
+          <a:ln/>
+        </p:spPr>
+      </p:sp>
+      <p:sp>
+        <p:nvSpPr>
+          <p:cNvPr id="4" name="Shape 2"/>
+          <p:cNvSpPr/>
+          <p:nvPr/>
+        </p:nvSpPr>
+        <p:spPr>
+          <a:xfrm>
+            <a:off x="5684368" y="1005840"/>
+            <a:ext cx="822960" cy="822960"/>
+          </a:xfrm>
+          <a:prstGeom prst="ellipse">
+            <a:avLst/>
+          </a:prstGeom>
+          <a:solidFill>
+            <a:srgbClr val="E8A33D"/>
+          </a:solidFill>
+          <a:ln w="9525">
+            <a:solidFill>
+              <a:srgbClr val="E8A33D"/>
+            </a:solidFill>
+            <a:prstDash val="solid"/>
+          </a:ln>
+        </p:spPr>
+      </p:sp>
+      <p:pic>
+        <p:nvPicPr>
+          <p:cNvPr id="5" name="Image 0" descr="preencoded.png">    </p:cNvPr>
+          <p:cNvPicPr>
+            <a:picLocks noChangeAspect="1"/>
+          </p:cNvPicPr>
+          <p:nvPr/>
+        </p:nvPicPr>
+        <p:blipFill>
+          <a:blip r:embed="rId1"/>
+          <a:stretch>
+            <a:fillRect/>
+          </a:stretch>
+        </p:blipFill>
+        <p:spPr>
+          <a:xfrm>
+            <a:off x="5898337" y="1219810"/>
+            <a:ext cx="395021" cy="395021"/>
+          </a:xfrm>
+          <a:prstGeom prst="rect">
+            <a:avLst/>
+          </a:prstGeom>
+        </p:spPr>
+      </p:pic>
+      <p:sp>
+        <p:nvSpPr>
+          <p:cNvPr id="6" name="Text 3"/>
+          <p:cNvSpPr/>
+          <p:nvPr/>
+        </p:nvSpPr>
+        <p:spPr>
+          <a:xfrm>
+            <a:off x="0" y="1965960"/>
+            <a:ext cx="12191695" cy="731520"/>
+          </a:xfrm>
+          <a:prstGeom prst="rect">
+            <a:avLst/>
+          </a:prstGeom>
+          <a:noFill/>
+          <a:ln/>
+        </p:spPr>
+        <p:txBody>
+          <a:bodyPr wrap="square" lIns="0" tIns="0" rIns="0" bIns="0" rtlCol="0" anchor="ctr"/>
+          <a:lstStyle/>
+          <a:p>
+            <a:pPr algn="ctr" indent="0" marL="0">
+              <a:buNone/>
+            </a:pPr>
+            <a:r>
+              <a:rPr lang="en-US" sz="3400" b="1" dirty="0">
+                <a:solidFill>
+                  <a:srgbClr val="FFFFFF"/>
+                </a:solidFill>
+                <a:latin typeface="Yu Gothic" pitchFamily="34" charset="0"/>
+                <a:ea typeface="Yu Gothic" pitchFamily="34" charset="-122"/>
+                <a:cs typeface="Yu Gothic" pitchFamily="34" charset="-120"/>
+              </a:rPr>
+              <a:t>救済者 × ガバナンス</a:t>
+            </a:r>
+            <a:endParaRPr lang="en-US" sz="3400" dirty="0"/>
+          </a:p>
+        </p:txBody>
+      </p:sp>
+      <p:sp>
+        <p:nvSpPr>
+          <p:cNvPr id="7" name="Text 4"/>
+          <p:cNvSpPr/>
+          <p:nvPr/>
+        </p:nvSpPr>
+        <p:spPr>
+          <a:xfrm>
+            <a:off x="0" y="2651760"/>
+            <a:ext cx="12191695" cy="411480"/>
+          </a:xfrm>
+          <a:prstGeom prst="rect">
+            <a:avLst/>
+          </a:prstGeom>
+          <a:noFill/>
+          <a:ln/>
+        </p:spPr>
+        <p:txBody>
+          <a:bodyPr wrap="square" lIns="0" tIns="0" rIns="0" bIns="0" rtlCol="0" anchor="ctr"/>
+          <a:lstStyle/>
+          <a:p>
+            <a:pPr algn="ctr" indent="0" marL="0">
+              <a:buNone/>
+            </a:pPr>
+            <a:r>
+              <a:rPr lang="en-US" sz="1500" dirty="0">
+                <a:solidFill>
+                  <a:srgbClr val="AFC9EE"/>
+                </a:solidFill>
+                <a:latin typeface="Yu Gothic" pitchFamily="34" charset="0"/>
+                <a:ea typeface="Yu Gothic" pitchFamily="34" charset="-122"/>
+                <a:cs typeface="Yu Gothic" pitchFamily="34" charset="-120"/>
+              </a:rPr>
+              <a:t>神が降りなくても、村は回るか</a:t>
+            </a:r>
+            <a:endParaRPr lang="en-US" sz="1500" dirty="0"/>
+          </a:p>
+        </p:txBody>
+      </p:sp>
+      <p:sp>
+        <p:nvSpPr>
+          <p:cNvPr id="8" name="Shape 5"/>
+          <p:cNvSpPr/>
+          <p:nvPr/>
+        </p:nvSpPr>
+        <p:spPr>
+          <a:xfrm>
+            <a:off x="609448" y="3337560"/>
+            <a:ext cx="3474720" cy="1371600"/>
+          </a:xfrm>
+          <a:prstGeom prst="roundRect">
+            <a:avLst>
+              <a:gd name="adj" fmla="val 8000"/>
+            </a:avLst>
+          </a:prstGeom>
+          <a:solidFill>
+            <a:srgbClr val="16213A"/>
+          </a:solidFill>
+          <a:ln/>
+          <a:effectLst>
+            <a:outerShdw sx="100000" sy="100000" kx="0" ky="0" algn="bl" rotWithShape="0" blurRad="101600" dist="38100" dir="5400000">
+              <a:srgbClr val="000000">
+                <a:alpha val="35000"/>
+              </a:srgbClr>
+            </a:outerShdw>
+          </a:effectLst>
+        </p:spPr>
+      </p:sp>
+      <p:sp>
+        <p:nvSpPr>
+          <p:cNvPr id="9" name="Text 6"/>
+          <p:cNvSpPr/>
+          <p:nvPr/>
+        </p:nvSpPr>
+        <p:spPr>
+          <a:xfrm>
+            <a:off x="792328" y="3474720"/>
+            <a:ext cx="3108960" cy="502920"/>
+          </a:xfrm>
+          <a:prstGeom prst="rect">
+            <a:avLst/>
+          </a:prstGeom>
+          <a:noFill/>
+          <a:ln/>
+        </p:spPr>
+        <p:txBody>
+          <a:bodyPr wrap="square" lIns="0" tIns="0" rIns="0" bIns="0" rtlCol="0" anchor="ctr"/>
+          <a:lstStyle/>
+          <a:p>
+            <a:pPr algn="ctr" indent="0" marL="0">
+              <a:buNone/>
+            </a:pPr>
+            <a:r>
+              <a:rPr lang="en-US" sz="1900" b="1" dirty="0">
+                <a:solidFill>
+                  <a:srgbClr val="5A8FD6"/>
+                </a:solidFill>
+                <a:latin typeface="Yu Gothic" pitchFamily="34" charset="0"/>
+                <a:ea typeface="Yu Gothic" pitchFamily="34" charset="-122"/>
+                <a:cs typeface="Yu Gothic" pitchFamily="34" charset="-120"/>
+              </a:rPr>
+              <a:t>一人は変えられた</a:t>
+            </a:r>
+            <a:endParaRPr lang="en-US" sz="1900" dirty="0"/>
+          </a:p>
+        </p:txBody>
+      </p:sp>
+      <p:sp>
+        <p:nvSpPr>
+          <p:cNvPr id="10" name="Text 7"/>
+          <p:cNvSpPr/>
+          <p:nvPr/>
+        </p:nvSpPr>
+        <p:spPr>
+          <a:xfrm>
+            <a:off x="838048" y="4023360"/>
+            <a:ext cx="3017520" cy="594360"/>
+          </a:xfrm>
+          <a:prstGeom prst="rect">
+            <a:avLst/>
+          </a:prstGeom>
+          <a:noFill/>
+          <a:ln/>
+        </p:spPr>
+        <p:txBody>
+          <a:bodyPr wrap="square" lIns="0" tIns="0" rIns="0" bIns="0" rtlCol="0" anchor="ctr"/>
+          <a:lstStyle/>
+          <a:p>
+            <a:pPr algn="ctr" indent="0" marL="0">
+              <a:lnSpc>
+                <a:spcPct val="125000"/>
+              </a:lnSpc>
+              <a:buNone/>
+            </a:pPr>
+            <a:r>
+              <a:rPr lang="en-US" sz="1100" dirty="0">
+                <a:solidFill>
+                  <a:srgbClr val="9AA4C0"/>
+                </a:solidFill>
+                <a:latin typeface="Yu Gothic" pitchFamily="34" charset="0"/>
+                <a:ea typeface="Yu Gothic" pitchFamily="34" charset="-122"/>
+                <a:cs typeface="Yu Gothic" pitchFamily="34" charset="-120"/>
+              </a:rPr>
+              <a:t>キーパーソン本人は指示どおりに動かせた（+40.3pt）</a:t>
+            </a:r>
+            <a:endParaRPr lang="en-US" sz="1100" dirty="0"/>
+          </a:p>
+        </p:txBody>
+      </p:sp>
+      <p:sp>
+        <p:nvSpPr>
+          <p:cNvPr id="11" name="Shape 8"/>
+          <p:cNvSpPr/>
+          <p:nvPr/>
+        </p:nvSpPr>
+        <p:spPr>
+          <a:xfrm>
+            <a:off x="4358488" y="3337560"/>
+            <a:ext cx="3474720" cy="1371600"/>
+          </a:xfrm>
+          <a:prstGeom prst="roundRect">
+            <a:avLst>
+              <a:gd name="adj" fmla="val 8000"/>
+            </a:avLst>
+          </a:prstGeom>
+          <a:solidFill>
+            <a:srgbClr val="16213A"/>
+          </a:solidFill>
+          <a:ln/>
+          <a:effectLst>
+            <a:outerShdw sx="100000" sy="100000" kx="0" ky="0" algn="bl" rotWithShape="0" blurRad="101600" dist="38100" dir="5400000">
+              <a:srgbClr val="000000">
+                <a:alpha val="35000"/>
+              </a:srgbClr>
+            </a:outerShdw>
+          </a:effectLst>
+        </p:spPr>
+      </p:sp>
+      <p:sp>
+        <p:nvSpPr>
+          <p:cNvPr id="12" name="Text 9"/>
+          <p:cNvSpPr/>
+          <p:nvPr/>
+        </p:nvSpPr>
+        <p:spPr>
+          <a:xfrm>
+            <a:off x="4541368" y="3474720"/>
+            <a:ext cx="3108960" cy="502920"/>
+          </a:xfrm>
+          <a:prstGeom prst="rect">
+            <a:avLst/>
+          </a:prstGeom>
+          <a:noFill/>
+          <a:ln/>
+        </p:spPr>
+        <p:txBody>
+          <a:bodyPr wrap="square" lIns="0" tIns="0" rIns="0" bIns="0" rtlCol="0" anchor="ctr"/>
+          <a:lstStyle/>
+          <a:p>
+            <a:pPr algn="ctr" indent="0" marL="0">
+              <a:buNone/>
+            </a:pPr>
+            <a:r>
+              <a:rPr lang="en-US" sz="1900" b="1" dirty="0">
+                <a:solidFill>
+                  <a:srgbClr val="E2665A"/>
+                </a:solidFill>
+                <a:latin typeface="Yu Gothic" pitchFamily="34" charset="0"/>
+                <a:ea typeface="Yu Gothic" pitchFamily="34" charset="-122"/>
+                <a:cs typeface="Yu Gothic" pitchFamily="34" charset="-120"/>
+              </a:rPr>
+              <a:t>でも集団は動かなかった</a:t>
+            </a:r>
+            <a:endParaRPr lang="en-US" sz="1900" dirty="0"/>
+          </a:p>
+        </p:txBody>
+      </p:sp>
+      <p:sp>
+        <p:nvSpPr>
+          <p:cNvPr id="13" name="Text 10"/>
+          <p:cNvSpPr/>
+          <p:nvPr/>
+        </p:nvSpPr>
+        <p:spPr>
+          <a:xfrm>
+            <a:off x="4587088" y="4023360"/>
+            <a:ext cx="3017520" cy="594360"/>
+          </a:xfrm>
+          <a:prstGeom prst="rect">
+            <a:avLst/>
+          </a:prstGeom>
+          <a:noFill/>
+          <a:ln/>
+        </p:spPr>
+        <p:txBody>
+          <a:bodyPr wrap="square" lIns="0" tIns="0" rIns="0" bIns="0" rtlCol="0" anchor="ctr"/>
+          <a:lstStyle/>
+          <a:p>
+            <a:pPr algn="ctr" indent="0" marL="0">
+              <a:lnSpc>
+                <a:spcPct val="125000"/>
+              </a:lnSpc>
+              <a:buNone/>
+            </a:pPr>
+            <a:r>
+              <a:rPr lang="en-US" sz="1100" dirty="0">
+                <a:solidFill>
+                  <a:srgbClr val="9AA4C0"/>
+                </a:solidFill>
+                <a:latin typeface="Yu Gothic" pitchFamily="34" charset="0"/>
+                <a:ea typeface="Yu Gothic" pitchFamily="34" charset="-122"/>
+                <a:cs typeface="Yu Gothic" pitchFamily="34" charset="-120"/>
+              </a:rPr>
+              <a:t>周囲への波及は4.2pt。村全体の自律度は−1.2で変わらず</a:t>
+            </a:r>
+            <a:endParaRPr lang="en-US" sz="1100" dirty="0"/>
+          </a:p>
+        </p:txBody>
+      </p:sp>
+      <p:sp>
+        <p:nvSpPr>
+          <p:cNvPr id="14" name="Shape 11"/>
+          <p:cNvSpPr/>
+          <p:nvPr/>
+        </p:nvSpPr>
+        <p:spPr>
+          <a:xfrm>
+            <a:off x="8107528" y="3337560"/>
+            <a:ext cx="3474720" cy="1371600"/>
+          </a:xfrm>
+          <a:prstGeom prst="roundRect">
+            <a:avLst>
+              <a:gd name="adj" fmla="val 8000"/>
+            </a:avLst>
+          </a:prstGeom>
+          <a:solidFill>
+            <a:srgbClr val="16213A"/>
+          </a:solidFill>
+          <a:ln/>
+          <a:effectLst>
+            <a:outerShdw sx="100000" sy="100000" kx="0" ky="0" algn="bl" rotWithShape="0" blurRad="101600" dist="38100" dir="5400000">
+              <a:srgbClr val="000000">
+                <a:alpha val="35000"/>
+              </a:srgbClr>
+            </a:outerShdw>
+          </a:effectLst>
+        </p:spPr>
+      </p:sp>
+      <p:sp>
+        <p:nvSpPr>
+          <p:cNvPr id="15" name="Text 12"/>
+          <p:cNvSpPr/>
+          <p:nvPr/>
+        </p:nvSpPr>
+        <p:spPr>
+          <a:xfrm>
+            <a:off x="8290408" y="3474720"/>
+            <a:ext cx="3108960" cy="502920"/>
+          </a:xfrm>
+          <a:prstGeom prst="rect">
+            <a:avLst/>
+          </a:prstGeom>
+          <a:noFill/>
+          <a:ln/>
+        </p:spPr>
+        <p:txBody>
+          <a:bodyPr wrap="square" lIns="0" tIns="0" rIns="0" bIns="0" rtlCol="0" anchor="ctr"/>
+          <a:lstStyle/>
+          <a:p>
+            <a:pPr algn="ctr" indent="0" marL="0">
+              <a:buNone/>
+            </a:pPr>
+            <a:r>
+              <a:rPr lang="en-US" sz="1900" b="1" dirty="0">
+                <a:solidFill>
+                  <a:srgbClr val="1BAF7A"/>
+                </a:solidFill>
+                <a:latin typeface="Yu Gothic" pitchFamily="34" charset="0"/>
+                <a:ea typeface="Yu Gothic" pitchFamily="34" charset="-122"/>
+                <a:cs typeface="Yu Gothic" pitchFamily="34" charset="-120"/>
+              </a:rPr>
+              <a:t>効くかは集団側で決まる</a:t>
+            </a:r>
+            <a:endParaRPr lang="en-US" sz="1900" dirty="0"/>
+          </a:p>
+        </p:txBody>
+      </p:sp>
+      <p:sp>
+        <p:nvSpPr>
+          <p:cNvPr id="16" name="Text 13"/>
+          <p:cNvSpPr/>
+          <p:nvPr/>
+        </p:nvSpPr>
+        <p:spPr>
+          <a:xfrm>
+            <a:off x="8336128" y="4023360"/>
+            <a:ext cx="3017520" cy="594360"/>
+          </a:xfrm>
+          <a:prstGeom prst="rect">
+            <a:avLst/>
+          </a:prstGeom>
+          <a:noFill/>
+          <a:ln/>
+        </p:spPr>
+        <p:txBody>
+          <a:bodyPr wrap="square" lIns="0" tIns="0" rIns="0" bIns="0" rtlCol="0" anchor="ctr"/>
+          <a:lstStyle/>
+          <a:p>
+            <a:pPr algn="ctr" indent="0" marL="0">
+              <a:lnSpc>
+                <a:spcPct val="125000"/>
+              </a:lnSpc>
+              <a:buNone/>
+            </a:pPr>
+            <a:r>
+              <a:rPr lang="en-US" sz="1100" dirty="0">
+                <a:solidFill>
+                  <a:srgbClr val="9AA4C0"/>
+                </a:solidFill>
+                <a:latin typeface="Yu Gothic" pitchFamily="34" charset="0"/>
+                <a:ea typeface="Yu Gothic" pitchFamily="34" charset="-122"/>
+                <a:cs typeface="Yu Gothic" pitchFamily="34" charset="-120"/>
+              </a:rPr>
+              <a:t>介入の精度ではなく、変化が周囲へ伝わるかが分けていた</a:t>
+            </a:r>
+            <a:endParaRPr lang="en-US" sz="1100" dirty="0"/>
+          </a:p>
+        </p:txBody>
+      </p:sp>
+      <p:sp>
+        <p:nvSpPr>
+          <p:cNvPr id="17" name="Text 14"/>
+          <p:cNvSpPr/>
+          <p:nvPr/>
+        </p:nvSpPr>
+        <p:spPr>
+          <a:xfrm>
+            <a:off x="0" y="5074920"/>
+            <a:ext cx="12191695" cy="320040"/>
+          </a:xfrm>
+          <a:prstGeom prst="rect">
+            <a:avLst/>
+          </a:prstGeom>
+          <a:noFill/>
+          <a:ln/>
+        </p:spPr>
+        <p:txBody>
+          <a:bodyPr wrap="square" lIns="0" tIns="0" rIns="0" bIns="0" rtlCol="0" anchor="ctr"/>
+          <a:lstStyle/>
+          <a:p>
+            <a:pPr algn="ctr" indent="0" marL="0">
+              <a:buNone/>
+            </a:pPr>
+            <a:r>
+              <a:rPr lang="en-US" sz="1200" dirty="0">
+                <a:solidFill>
+                  <a:srgbClr val="9AA4C0"/>
+                </a:solidFill>
+                <a:latin typeface="Yu Gothic" pitchFamily="34" charset="0"/>
+                <a:ea typeface="Yu Gothic" pitchFamily="34" charset="-122"/>
+                <a:cs typeface="Yu Gothic" pitchFamily="34" charset="-120"/>
+              </a:rPr>
+              <a:t>実装はClaude（Anthropic）との二人三脚で、企画・レビュー・考察を担当</a:t>
+            </a:r>
+            <a:endParaRPr lang="en-US" sz="1200" dirty="0"/>
+          </a:p>
+        </p:txBody>
+      </p:sp>
+      <p:sp>
+        <p:nvSpPr>
+          <p:cNvPr id="18" name="Text 15"/>
+          <p:cNvSpPr/>
+          <p:nvPr/>
+        </p:nvSpPr>
+        <p:spPr>
+          <a:xfrm>
+            <a:off x="0" y="6035040"/>
+            <a:ext cx="12191695" cy="274320"/>
+          </a:xfrm>
+          <a:prstGeom prst="rect">
+            <a:avLst/>
+          </a:prstGeom>
+          <a:noFill/>
+          <a:ln/>
+        </p:spPr>
+        <p:txBody>
+          <a:bodyPr wrap="square" lIns="0" tIns="0" rIns="0" bIns="0" rtlCol="0" anchor="ctr"/>
+          <a:lstStyle/>
+          <a:p>
+            <a:pPr algn="ctr" indent="0" marL="0">
+              <a:buNone/>
+            </a:pPr>
+            <a:r>
+              <a:rPr lang="en-US" sz="1100" dirty="0">
+                <a:solidFill>
+                  <a:srgbClr val="5B6480"/>
+                </a:solidFill>
+                <a:latin typeface="Yu Gothic" pitchFamily="34" charset="0"/>
+                <a:ea typeface="Yu Gothic" pitchFamily="34" charset="-122"/>
+                <a:cs typeface="Yu Gothic" pitchFamily="34" charset="-120"/>
+              </a:rPr>
+              <a:t>github.com/sakurako-cottoncandy/beyond-the-savior</a:t>
+            </a:r>
+            <a:endParaRPr lang="en-US" sz="1100" dirty="0"/>
+          </a:p>
+        </p:txBody>
+      </p:sp>
+      <p:sp>
+        <p:nvSpPr>
+          <p:cNvPr id="19" name="Text 16"/>
+          <p:cNvSpPr/>
+          <p:nvPr/>
+        </p:nvSpPr>
+        <p:spPr>
+          <a:xfrm>
+            <a:off x="10088575" y="6400800"/>
+            <a:ext cx="1645920" cy="274320"/>
+          </a:xfrm>
+          <a:prstGeom prst="rect">
+            <a:avLst/>
+          </a:prstGeom>
+          <a:noFill/>
+          <a:ln/>
+        </p:spPr>
+        <p:txBody>
+          <a:bodyPr wrap="square" lIns="0" tIns="0" rIns="0" bIns="0" rtlCol="0" anchor="ctr"/>
+          <a:lstStyle/>
+          <a:p>
+            <a:pPr algn="r" indent="0" marL="0">
+              <a:buNone/>
+            </a:pPr>
+            <a:r>
+              <a:rPr lang="en-US" sz="900" dirty="0">
+                <a:solidFill>
+                  <a:srgbClr val="5B6480"/>
+                </a:solidFill>
+                <a:latin typeface="Yu Gothic" pitchFamily="34" charset="0"/>
+                <a:ea typeface="Yu Gothic" pitchFamily="34" charset="-122"/>
+                <a:cs typeface="Yu Gothic" pitchFamily="34" charset="-120"/>
+              </a:rPr>
+              <a:t>Hackathon Project</a:t>
             </a:r>
             <a:endParaRPr lang="en-US" sz="900" dirty="0"/>
           </a:p>

--- a/docs/Beyond_the_Savior.pptx
+++ b/docs/Beyond_the_Savior.pptx
@@ -11413,7 +11413,7 @@
                 <a:ea typeface="Yu Gothic" pitchFamily="34" charset="-122"/>
                 <a:cs typeface="Yu Gothic" pitchFamily="34" charset="-120"/>
               </a:rPr>
-              <a:t>介入から結果までを途中で切り、2段に分けて測った。</a:t>
+              <a:t>同じ介入差（L1→L3）で、各段の動いた量を揃えて測った。</a:t>
             </a:r>
             <a:endParaRPr lang="en-US" sz="1400" dirty="0"/>
           </a:p>
@@ -11805,7 +11805,7 @@
             <a:avLst/>
           </a:prstGeom>
           <a:noFill/>
-          <a:ln w="12700">
+          <a:ln w="15875">
             <a:solidFill>
               <a:srgbClr val="5B6480"/>
             </a:solidFill>
@@ -11847,7 +11847,7 @@
                 <a:ea typeface="Yu Gothic" pitchFamily="34" charset="-122"/>
                 <a:cs typeface="Yu Gothic" pitchFamily="34" charset="-120"/>
               </a:rPr>
-              <a:t>(A) 11.1pt</a:t>
+              <a:t>(A) 44.4pt</a:t>
             </a:r>
             <a:endParaRPr lang="en-US" sz="1000" dirty="0"/>
           </a:p>
@@ -11910,7 +11910,7 @@
                 <a:ea typeface="Yu Gothic" pitchFamily="34" charset="-122"/>
                 <a:cs typeface="Yu Gothic" pitchFamily="34" charset="-120"/>
               </a:rPr>
-              <a:t>(B) 20.0pt</a:t>
+              <a:t>(B) 22.2pt</a:t>
             </a:r>
             <a:endParaRPr lang="en-US" sz="1000" dirty="0"/>
           </a:p>
@@ -12368,7 +12368,7 @@
                 <a:ea typeface="Yu Gothic" pitchFamily="34" charset="-122"/>
                 <a:cs typeface="Yu Gothic" pitchFamily="34" charset="-120"/>
               </a:rPr>
-              <a:t>(A) 40.3pt</a:t>
+              <a:t>(A) 50.0pt</a:t>
             </a:r>
             <a:endParaRPr lang="en-US" sz="1000" dirty="0"/>
           </a:p>
@@ -12389,7 +12389,7 @@
             <a:avLst/>
           </a:prstGeom>
           <a:noFill/>
-          <a:ln w="12700">
+          <a:ln w="15875">
             <a:solidFill>
               <a:srgbClr val="5B6480"/>
             </a:solidFill>
@@ -12431,7 +12431,7 @@
                 <a:ea typeface="Yu Gothic" pitchFamily="34" charset="-122"/>
                 <a:cs typeface="Yu Gothic" pitchFamily="34" charset="-120"/>
               </a:rPr>
-              <a:t>(B) 4.2pt</a:t>
+              <a:t>(B) 8.3pt</a:t>
             </a:r>
             <a:endParaRPr lang="en-US" sz="1000" dirty="0"/>
           </a:p>
@@ -12523,7 +12523,7 @@
                 <a:ea typeface="Yu Gothic" pitchFamily="34" charset="-122"/>
                 <a:cs typeface="Yu Gothic" pitchFamily="34" charset="-120"/>
               </a:rPr>
-              <a:t>村全体を動かしたのは、介入の精度（A）ではなく、周囲への波及（B）だった。</a:t>
+              <a:t>本人の変化量はほぼ互角（44.4 対 50.0）。それでも村全体の結果は大きく分かれた。</a:t>
             </a:r>
             <a:endParaRPr lang="en-US" sz="1400" dirty="0"/>
           </a:p>
@@ -12554,7 +12554,7 @@
               <a:buNone/>
             </a:pPr>
             <a:r>
-              <a:rPr lang="en-US" sz="950" dirty="0">
+              <a:rPr lang="en-US" sz="900" dirty="0">
                 <a:solidFill>
                   <a:srgbClr val="5B6480"/>
                 </a:solidFill>
@@ -12562,9 +12562,9 @@
                 <a:ea typeface="Yu Gothic" pitchFamily="34" charset="-122"/>
                 <a:cs typeface="Yu Gothic" pitchFamily="34" charset="-120"/>
               </a:rPr>
-              <a:t>(A) キーパーソン本人の発言が指示どおり変わった幅　／　(B) それに応じて周囲の住民の挙動が変わった幅</a:t>
-            </a:r>
-            <a:endParaRPr lang="en-US" sz="950" dirty="0"/>
+              <a:t>(A)(B)とも「L1→L3で発言分類の割合が動いた量の合計」。(A)は3分類・(B)は2分類の合計のため、AとBの絶対値どうしは比較せず、同じ指標のモデル間の大小のみを見る。</a:t>
+            </a:r>
+            <a:endParaRPr lang="en-US" sz="900" dirty="0"/>
           </a:p>
         </p:txBody>
       </p:sp>
@@ -12870,7 +12870,7 @@
                 <a:ea typeface="Yu Gothic" pitchFamily="34" charset="-122"/>
                 <a:cs typeface="Yu Gothic" pitchFamily="34" charset="-120"/>
               </a:rPr>
-              <a:t>Sonnet 4.5条件では、キーパーソン本人への介入の反映は小さかった（+11.1pt）のに、周囲の住民の挙動は大きく変化した（20.0pt）。Opus 5条件では逆に、本人はより指示どおり変化した（+40.3pt）のに、周囲の変化は小さかった（4.2pt）。村全体が動いたのは後者ではなく前者だった。</a:t>
+              <a:t>同一の介入差で揃えて計算すると、(A)本人の変化は3つの介入差すべてでOpus 5条件のほうが大きく、(B)周囲の変化は3つすべてでSonnet 4.5条件のほうが大きかった。村全体の変化は3つのうち2つでSonnet 4.5条件のほうが大きい。つまり村全体の変化の大きさは、本人への介入反映の大きさより、周囲の挙動変化の大きさと対応していた。</a:t>
             </a:r>
             <a:endParaRPr lang="en-US" sz="1050" dirty="0"/>
           </a:p>
@@ -13029,7 +13029,7 @@
                 <a:ea typeface="Yu Gothic" pitchFamily="34" charset="-122"/>
                 <a:cs typeface="Yu Gothic" pitchFamily="34" charset="-120"/>
               </a:rPr>
-              <a:t>集団を動かしたのは介入の精度ではなく、変化が周囲へ波及するかどうかだった。2条件で波及の大きさが違った背景には、集団内の実効的な結合の強さの違いがあった可能性がある。ただし「結合構造」そのものは測っていない。測ったのは介入条件に対する他住民の波及感度である。</a:t>
+              <a:t>2条件で周囲の変化量が違った背景には、集団内の実効的な結合／波及の強さの違いがあった可能性がある。ただし「結合構造」そのものは測っていない。測ったのは介入条件に対する他住民の波及感度である。また一致は3点中2点であり、厳密な因果連鎖の定量比較としては成立していない。</a:t>
             </a:r>
             <a:endParaRPr lang="en-US" sz="1050" dirty="0"/>
           </a:p>
@@ -18594,7 +18594,7 @@
                 <a:ea typeface="Yu Gothic" pitchFamily="34" charset="-122"/>
                 <a:cs typeface="Yu Gothic" pitchFamily="34" charset="-120"/>
               </a:rPr>
-              <a:t>一人は変えられた</a:t>
+              <a:t>本人は同じだけ変わった</a:t>
             </a:r>
             <a:endParaRPr lang="en-US" sz="1900" dirty="0"/>
           </a:p>
@@ -18636,7 +18636,7 @@
                 <a:ea typeface="Yu Gothic" pitchFamily="34" charset="-122"/>
                 <a:cs typeface="Yu Gothic" pitchFamily="34" charset="-120"/>
               </a:rPr>
-              <a:t>キーパーソン本人は指示どおりに動かせた（+40.3pt）</a:t>
+              <a:t>同じ介入でキーパーソン本人の変化量はほぼ互角（44.4対50.0）</a:t>
             </a:r>
             <a:endParaRPr lang="en-US" sz="1100" dirty="0"/>
           </a:p>
@@ -18704,7 +18704,7 @@
                 <a:ea typeface="Yu Gothic" pitchFamily="34" charset="-122"/>
                 <a:cs typeface="Yu Gothic" pitchFamily="34" charset="-120"/>
               </a:rPr>
-              <a:t>でも集団は動かなかった</a:t>
+              <a:t>でも集団の結果は割れた</a:t>
             </a:r>
             <a:endParaRPr lang="en-US" sz="1900" dirty="0"/>
           </a:p>
@@ -18746,7 +18746,7 @@
                 <a:ea typeface="Yu Gothic" pitchFamily="34" charset="-122"/>
                 <a:cs typeface="Yu Gothic" pitchFamily="34" charset="-120"/>
               </a:rPr>
-              <a:t>周囲への波及は4.2pt。村全体の自律度は−1.2で変わらず</a:t>
+              <a:t>村全体の自律度は +18.0 と −1.2。周囲の変化量は22.2対8.3</a:t>
             </a:r>
             <a:endParaRPr lang="en-US" sz="1100" dirty="0"/>
           </a:p>
@@ -18814,7 +18814,7 @@
                 <a:ea typeface="Yu Gothic" pitchFamily="34" charset="-122"/>
                 <a:cs typeface="Yu Gothic" pitchFamily="34" charset="-120"/>
               </a:rPr>
-              <a:t>効くかは集団側で決まる</a:t>
+              <a:t>対応していたのは周囲の側</a:t>
             </a:r>
             <a:endParaRPr lang="en-US" sz="1900" dirty="0"/>
           </a:p>
@@ -18856,7 +18856,7 @@
                 <a:ea typeface="Yu Gothic" pitchFamily="34" charset="-122"/>
                 <a:cs typeface="Yu Gothic" pitchFamily="34" charset="-120"/>
               </a:rPr>
-              <a:t>介入の精度ではなく、変化が周囲へ伝わるかが分けていた</a:t>
+              <a:t>村の変化は、介入の反映量より周囲の挙動変化と対応していた</a:t>
             </a:r>
             <a:endParaRPr lang="en-US" sz="1100" dirty="0"/>
           </a:p>

--- a/docs/Beyond_the_Savior.pptx
+++ b/docs/Beyond_the_Savior.pptx
@@ -5543,7 +5543,7 @@
                 <a:ea typeface="Yu Gothic" pitchFamily="34" charset="-122"/>
                 <a:cs typeface="Yu Gothic" pitchFamily="34" charset="-120"/>
               </a:rPr>
-              <a:t>5回とも完全に同じ点数。依存は確実に再現される</a:t>
+              <a:t>5回とも同じ点数。依存側は結果がぶれなかった</a:t>
             </a:r>
             <a:endParaRPr lang="en-US" sz="1000" dirty="0"/>
           </a:p>
@@ -14308,7 +14308,7 @@
                 <a:ea typeface="Yu Gothic" pitchFamily="34" charset="-122"/>
                 <a:cs typeface="Yu Gothic" pitchFamily="34" charset="-120"/>
               </a:rPr>
-              <a:t>依存は安定し、自律は不安定である</a:t>
+              <a:t>依存側は結果がぶれなかった</a:t>
             </a:r>
             <a:endParaRPr lang="en-US" sz="1400" dirty="0"/>
           </a:p>
@@ -14350,7 +14350,7 @@
                 <a:ea typeface="Yu Gothic" pitchFamily="34" charset="-122"/>
                 <a:cs typeface="Yu Gothic" pitchFamily="34" charset="-120"/>
               </a:rPr>
-              <a:t>A・Bの標準偏差はほぼ0で毎回きっちり再現される。一方Cは±20〜26。悪い状態のほうが「安定」しているという非対称性がある。</a:t>
+              <a:t>条件A・Bの標準偏差はほぼ0で5回とも同じ状態に落ちた。一方Cは±20〜26。この範囲では悪い状態のほうがばらつかなかった。</a:t>
             </a:r>
             <a:endParaRPr lang="en-US" sz="1150" dirty="0"/>
           </a:p>

--- a/docs/Beyond_the_Savior.pptx
+++ b/docs/Beyond_the_Savior.pptx
@@ -7192,7 +7192,7 @@
               <a:buNone/>
             </a:pPr>
             <a:r>
-              <a:rPr lang="en-US" sz="1350" b="1" dirty="0">
+              <a:rPr lang="en-US" sz="1300" b="1" dirty="0">
                 <a:solidFill>
                   <a:srgbClr val="FFFFFF"/>
                 </a:solidFill>
@@ -7200,9 +7200,9 @@
                 <a:ea typeface="Yu Gothic" pitchFamily="34" charset="-122"/>
                 <a:cs typeface="Yu Gothic" pitchFamily="34" charset="-120"/>
               </a:rPr>
-              <a:t>分岐点は、たった一人の最初の一歩だった</a:t>
-            </a:r>
-            <a:endParaRPr lang="en-US" sz="1350" dirty="0"/>
+              <a:t>分かれ方に対応していた違い（5回分のログの観察）</a:t>
+            </a:r>
+            <a:endParaRPr lang="en-US" sz="1300" dirty="0"/>
           </a:p>
         </p:txBody>
       </p:sp>
@@ -7606,7 +7606,7 @@
                 <a:ea typeface="Yu Gothic" pitchFamily="34" charset="-122"/>
                 <a:cs typeface="Yu Gothic" pitchFamily="34" charset="-120"/>
               </a:rPr>
-              <a:t>制度は自律を「可能にする」だけで、自律そのものを生みはしない。</a:t>
+              <a:t>同じ制度を敷いても、結果は同じにならなかった。制度は結果を一意に決めていない。</a:t>
             </a:r>
             <a:endParaRPr lang="en-US" sz="1400" dirty="0"/>
           </a:p>
@@ -9059,7 +9059,7 @@
                 <a:ea typeface="Yu Gothic" pitchFamily="34" charset="-122"/>
                 <a:cs typeface="Yu Gothic" pitchFamily="34" charset="-120"/>
               </a:rPr>
-              <a:t>↑ 押すほど良くなるが、L4で反転</a:t>
+              <a:t>↑ L3まで上がり、L4で下がった（各水準n=5）</a:t>
             </a:r>
             <a:endParaRPr lang="en-US" sz="1100" dirty="0"/>
           </a:p>
@@ -9147,7 +9147,7 @@
                 <a:ea typeface="Yu Gothic" pitchFamily="34" charset="-122"/>
                 <a:cs typeface="Yu Gothic" pitchFamily="34" charset="-120"/>
               </a:rPr>
-              <a:t>L3で分岐が消えた</a:t>
+              <a:t>観測：L3では5回とも自律側</a:t>
             </a:r>
             <a:endParaRPr lang="en-US" sz="1250" dirty="0"/>
           </a:p>
@@ -9189,7 +9189,7 @@
                 <a:ea typeface="Yu Gothic" pitchFamily="34" charset="-122"/>
                 <a:cs typeface="Yu Gothic" pitchFamily="34" charset="-120"/>
               </a:rPr>
-              <a:t>2/5だった自律が5回とも成功に。ばらつきも最小（幅10点）。「運が良ければ」を「確実に」へ変える閾値がある。</a:t>
+              <a:t>L1では2/5だった自律がL3では5/5。自律度の幅も10点と最小だった。ただしn=5であり、閾値の存在が示せたわけではない。</a:t>
             </a:r>
             <a:endParaRPr lang="en-US" sz="1050" dirty="0"/>
           </a:p>
@@ -9277,7 +9277,7 @@
                 <a:ea typeface="Yu Gothic" pitchFamily="34" charset="-122"/>
                 <a:cs typeface="Yu Gothic" pitchFamily="34" charset="-120"/>
               </a:rPr>
-              <a:t>L4は第二の救済者を生んだ</a:t>
+              <a:t>解釈：L4は依存先が移った可能性</a:t>
             </a:r>
             <a:endParaRPr lang="en-US" sz="1250" dirty="0"/>
           </a:p>
@@ -9319,7 +9319,7 @@
                 <a:ea typeface="Yu Gothic" pitchFamily="34" charset="-122"/>
                 <a:cs typeface="Yu Gothic" pitchFamily="34" charset="-120"/>
               </a:rPr>
-              <a:t>独立度はL3より高いのに自律度は71→55。住民の待ち相手が救済者から世話好きな住民に移っただけだった。</a:t>
+              <a:t>独立度はL3より高いのに自律度は71→55。ログでは住民の待ち相手が世話好きな住民に移った様子が読める（質的観察）。</a:t>
             </a:r>
             <a:endParaRPr lang="en-US" sz="1050" dirty="0"/>
           </a:p>
@@ -9387,7 +9387,7 @@
                 <a:ea typeface="Yu Gothic" pitchFamily="34" charset="-122"/>
                 <a:cs typeface="Yu Gothic" pitchFamily="34" charset="-120"/>
               </a:rPr>
-              <a:t>効いていたのは「救済者に頼らないこと」ではなく、「他の住民を巻き込むこと」だった。</a:t>
+              <a:t>この条件では、独立度の高さより「他の住民を巻き込むか」のほうが結果と対応していた。</a:t>
             </a:r>
             <a:endParaRPr lang="en-US" sz="1400" dirty="0"/>
           </a:p>
@@ -10956,7 +10956,7 @@
                 <a:ea typeface="Yu Gothic" pitchFamily="34" charset="-122"/>
                 <a:cs typeface="Yu Gothic" pitchFamily="34" charset="-120"/>
               </a:rPr>
-              <a:t>介入は再現しなかった</a:t>
+              <a:t>介入の効果は再現しなかった</a:t>
             </a:r>
             <a:endParaRPr lang="en-US" sz="1300" dirty="0"/>
           </a:p>
@@ -10998,7 +10998,7 @@
                 <a:ea typeface="Yu Gothic" pitchFamily="34" charset="-122"/>
                 <a:cs typeface="Yu Gothic" pitchFamily="34" charset="-120"/>
               </a:rPr>
-              <a:t>L1→L3の効果はSonnetで+18.0、Opus 5では−1.2。標準誤差の0.19倍で、効果はゼロと言ってよい。</a:t>
+              <a:t>L1→L3の自律度差はSonnetで+18.0、Opus 5では−1.2（標準誤差の0.19倍）。この条件では効果を検出できなかった。</a:t>
             </a:r>
             <a:endParaRPr lang="en-US" sz="1050" dirty="0"/>
           </a:p>
@@ -11115,7 +11115,7 @@
                 <a:ea typeface="Yu Gothic" pitchFamily="34" charset="-122"/>
                 <a:cs typeface="Yu Gothic" pitchFamily="34" charset="-120"/>
               </a:rPr>
-              <a:t>分岐という現象は再現した</a:t>
+              <a:t>2つに分かれること自体は両方で観測</a:t>
             </a:r>
             <a:endParaRPr lang="en-US" sz="1300" dirty="0"/>
           </a:p>
@@ -11157,7 +11157,7 @@
                 <a:ea typeface="Yu Gothic" pitchFamily="34" charset="-122"/>
                 <a:cs typeface="Yu Gothic" pitchFamily="34" charset="-120"/>
               </a:rPr>
-              <a:t>24回中23回がどちらかの塊に落ちた。村が2つの状態を持つこと自体はモデルをまたいで成立する。</a:t>
+              <a:t>Opus 5でも24回中23回がどちらかの塊に落ちた（Sonnetは25回中22回）。ただし比べたのは2モデルのみ。</a:t>
             </a:r>
             <a:endParaRPr lang="en-US" sz="1050" dirty="0"/>
           </a:p>
@@ -11225,7 +11225,7 @@
                 <a:ea typeface="Yu Gothic" pitchFamily="34" charset="-122"/>
                 <a:cs typeface="Yu Gothic" pitchFamily="34" charset="-120"/>
               </a:rPr>
-              <a:t>構造（2つの引き込み先がある）は頑健で、テコ（何を変えれば動くか）は脆かった。</a:t>
+              <a:t>2つに分かれる現象は両モデルで観測できた。一方「何を変えれば動くか」は移らなかった。</a:t>
             </a:r>
             <a:endParaRPr lang="en-US" sz="1400" dirty="0"/>
           </a:p>
@@ -16628,7 +16628,7 @@
                 <a:ea typeface="Yu Gothic" pitchFamily="34" charset="-122"/>
                 <a:cs typeface="Yu Gothic" pitchFamily="34" charset="-120"/>
               </a:rPr>
-              <a:t>フラクタルな構造：村から国家の「メタ安全保障」へ</a:t>
+              <a:t>なぜこのテーマを選んだか</a:t>
             </a:r>
             <a:endParaRPr lang="en-US" sz="3000" dirty="0"/>
           </a:p>
@@ -16636,7 +16636,112 @@
       </p:sp>
       <p:sp>
         <p:nvSpPr>
-          <p:cNvPr id="3" name="Shape 1"/>
+          <p:cNvPr id="3" name="Text 1"/>
+          <p:cNvSpPr/>
+          <p:nvPr/>
+        </p:nvSpPr>
+        <p:spPr>
+          <a:xfrm>
+            <a:off x="548640" y="1207008"/>
+            <a:ext cx="11094415" cy="365760"/>
+          </a:xfrm>
+          <a:prstGeom prst="rect">
+            <a:avLst/>
+          </a:prstGeom>
+          <a:noFill/>
+          <a:ln/>
+        </p:spPr>
+        <p:txBody>
+          <a:bodyPr wrap="square" lIns="0" tIns="0" rIns="0" bIns="0" rtlCol="0" anchor="ctr"/>
+          <a:lstStyle/>
+          <a:p>
+            <a:pPr algn="l" indent="0" marL="0">
+              <a:buNone/>
+            </a:pPr>
+            <a:r>
+              <a:rPr lang="en-US" sz="1400" dirty="0">
+                <a:solidFill>
+                  <a:srgbClr val="9AA4C0"/>
+                </a:solidFill>
+                <a:latin typeface="Yu Gothic" pitchFamily="34" charset="0"/>
+                <a:ea typeface="Yu Gothic" pitchFamily="34" charset="-122"/>
+                <a:cs typeface="Yu Gothic" pitchFamily="34" charset="-120"/>
+              </a:rPr>
+              <a:t>以下は本実験の結果ではなく、この問いに取り組む動機になった着想です。</a:t>
+            </a:r>
+            <a:endParaRPr lang="en-US" sz="1400" dirty="0"/>
+          </a:p>
+        </p:txBody>
+      </p:sp>
+      <p:sp>
+        <p:nvSpPr>
+          <p:cNvPr id="4" name="Shape 2"/>
+          <p:cNvSpPr/>
+          <p:nvPr/>
+        </p:nvSpPr>
+        <p:spPr>
+          <a:xfrm>
+            <a:off x="9402775" y="457200"/>
+            <a:ext cx="2240280" cy="365760"/>
+          </a:xfrm>
+          <a:prstGeom prst="roundRect">
+            <a:avLst>
+              <a:gd name="adj" fmla="val 50000"/>
+            </a:avLst>
+          </a:prstGeom>
+          <a:solidFill>
+            <a:srgbClr val="1C2C4A"/>
+          </a:solidFill>
+          <a:ln w="9525">
+            <a:solidFill>
+              <a:srgbClr val="E2665A"/>
+            </a:solidFill>
+            <a:prstDash val="solid"/>
+          </a:ln>
+        </p:spPr>
+      </p:sp>
+      <p:sp>
+        <p:nvSpPr>
+          <p:cNvPr id="5" name="Text 3"/>
+          <p:cNvSpPr/>
+          <p:nvPr/>
+        </p:nvSpPr>
+        <p:spPr>
+          <a:xfrm>
+            <a:off x="9402775" y="457200"/>
+            <a:ext cx="2240280" cy="365760"/>
+          </a:xfrm>
+          <a:prstGeom prst="rect">
+            <a:avLst/>
+          </a:prstGeom>
+          <a:noFill/>
+          <a:ln/>
+        </p:spPr>
+        <p:txBody>
+          <a:bodyPr wrap="square" lIns="0" tIns="0" rIns="0" bIns="0" rtlCol="0" anchor="ctr"/>
+          <a:lstStyle/>
+          <a:p>
+            <a:pPr algn="ctr" indent="0" marL="0">
+              <a:buNone/>
+            </a:pPr>
+            <a:r>
+              <a:rPr lang="en-US" sz="1000" dirty="0">
+                <a:solidFill>
+                  <a:srgbClr val="E2665A"/>
+                </a:solidFill>
+                <a:latin typeface="Yu Gothic" pitchFamily="34" charset="0"/>
+                <a:ea typeface="Yu Gothic" pitchFamily="34" charset="-122"/>
+                <a:cs typeface="Yu Gothic" pitchFamily="34" charset="-120"/>
+              </a:rPr>
+              <a:t>未検証・データなし</a:t>
+            </a:r>
+            <a:endParaRPr lang="en-US" sz="1000" dirty="0"/>
+          </a:p>
+        </p:txBody>
+      </p:sp>
+      <p:sp>
+        <p:nvSpPr>
+          <p:cNvPr id="6" name="Shape 4"/>
           <p:cNvSpPr/>
           <p:nvPr/>
         </p:nvSpPr>
@@ -16665,7 +16770,7 @@
       </p:sp>
       <p:sp>
         <p:nvSpPr>
-          <p:cNvPr id="4" name="Shape 2"/>
+          <p:cNvPr id="7" name="Shape 5"/>
           <p:cNvSpPr/>
           <p:nvPr/>
         </p:nvSpPr>
@@ -16687,7 +16792,7 @@
       </p:sp>
       <p:sp>
         <p:nvSpPr>
-          <p:cNvPr id="5" name="Shape 3"/>
+          <p:cNvPr id="8" name="Shape 6"/>
           <p:cNvSpPr/>
           <p:nvPr/>
         </p:nvSpPr>
@@ -16709,7 +16814,7 @@
       </p:sp>
       <p:sp>
         <p:nvSpPr>
-          <p:cNvPr id="6" name="Shape 4"/>
+          <p:cNvPr id="9" name="Shape 7"/>
           <p:cNvSpPr/>
           <p:nvPr/>
         </p:nvSpPr>
@@ -16734,7 +16839,7 @@
       </p:sp>
       <p:pic>
         <p:nvPicPr>
-          <p:cNvPr id="7" name="Image 0" descr="preencoded.png">    </p:cNvPr>
+          <p:cNvPr id="10" name="Image 0" descr="preencoded.png">    </p:cNvPr>
           <p:cNvPicPr>
             <a:picLocks noChangeAspect="1"/>
           </p:cNvPicPr>
@@ -16758,7 +16863,7 @@
       </p:pic>
       <p:sp>
         <p:nvSpPr>
-          <p:cNvPr id="8" name="Text 5"/>
+          <p:cNvPr id="11" name="Text 8"/>
           <p:cNvSpPr/>
           <p:nvPr/>
         </p:nvSpPr>
@@ -16797,7 +16902,7 @@
       </p:sp>
       <p:sp>
         <p:nvSpPr>
-          <p:cNvPr id="9" name="Text 6"/>
+          <p:cNvPr id="12" name="Text 9"/>
           <p:cNvSpPr/>
           <p:nvPr/>
         </p:nvSpPr>
@@ -16835,11 +16940,31 @@
             </a:r>
             <a:endParaRPr lang="en-US" sz="1300" dirty="0"/>
           </a:p>
-        </p:txBody>
-      </p:sp>
-      <p:sp>
-        <p:nvSpPr>
-          <p:cNvPr id="10" name="Shape 7"/>
+          <a:p>
+            <a:pPr algn="ctr" indent="0" marL="0">
+              <a:lnSpc>
+                <a:spcPct val="130000"/>
+              </a:lnSpc>
+              <a:buNone/>
+            </a:pPr>
+            <a:r>
+              <a:rPr lang="en-US" sz="1300" dirty="0">
+                <a:solidFill>
+                  <a:srgbClr val="AFC9EE"/>
+                </a:solidFill>
+                <a:latin typeface="Yu Gothic" pitchFamily="34" charset="0"/>
+                <a:ea typeface="Yu Gothic" pitchFamily="34" charset="-122"/>
+                <a:cs typeface="Yu Gothic" pitchFamily="34" charset="-120"/>
+              </a:rPr>
+              <a:t>（本実験が扱ったのはここだけ）</a:t>
+            </a:r>
+            <a:endParaRPr lang="en-US" sz="1300" dirty="0"/>
+          </a:p>
+        </p:txBody>
+      </p:sp>
+      <p:sp>
+        <p:nvSpPr>
+          <p:cNvPr id="13" name="Shape 10"/>
           <p:cNvSpPr/>
           <p:nvPr/>
         </p:nvSpPr>
@@ -16868,7 +16993,7 @@
       </p:sp>
       <p:sp>
         <p:nvSpPr>
-          <p:cNvPr id="11" name="Shape 8"/>
+          <p:cNvPr id="14" name="Shape 11"/>
           <p:cNvSpPr/>
           <p:nvPr/>
         </p:nvSpPr>
@@ -16881,7 +17006,7 @@
             <a:avLst/>
           </a:prstGeom>
           <a:solidFill>
-            <a:srgbClr val="2A78D6">
+            <a:srgbClr val="5B6480">
               <a:alpha val="12000"/>
             </a:srgbClr>
           </a:solidFill>
@@ -16890,7 +17015,7 @@
       </p:sp>
       <p:sp>
         <p:nvSpPr>
-          <p:cNvPr id="12" name="Shape 9"/>
+          <p:cNvPr id="15" name="Shape 12"/>
           <p:cNvSpPr/>
           <p:nvPr/>
         </p:nvSpPr>
@@ -16903,7 +17028,7 @@
             <a:avLst/>
           </a:prstGeom>
           <a:solidFill>
-            <a:srgbClr val="2A78D6">
+            <a:srgbClr val="5B6480">
               <a:alpha val="22000"/>
             </a:srgbClr>
           </a:solidFill>
@@ -16912,7 +17037,7 @@
       </p:sp>
       <p:sp>
         <p:nvSpPr>
-          <p:cNvPr id="13" name="Shape 10"/>
+          <p:cNvPr id="16" name="Shape 13"/>
           <p:cNvSpPr/>
           <p:nvPr/>
         </p:nvSpPr>
@@ -16925,11 +17050,11 @@
             <a:avLst/>
           </a:prstGeom>
           <a:solidFill>
-            <a:srgbClr val="2A78D6"/>
+            <a:srgbClr val="5B6480"/>
           </a:solidFill>
           <a:ln w="9525">
             <a:solidFill>
-              <a:srgbClr val="2A78D6"/>
+              <a:srgbClr val="5B6480"/>
             </a:solidFill>
             <a:prstDash val="solid"/>
           </a:ln>
@@ -16937,7 +17062,7 @@
       </p:sp>
       <p:pic>
         <p:nvPicPr>
-          <p:cNvPr id="14" name="Image 1" descr="preencoded.png">    </p:cNvPr>
+          <p:cNvPr id="17" name="Image 1" descr="preencoded.png">    </p:cNvPr>
           <p:cNvPicPr>
             <a:picLocks noChangeAspect="1"/>
           </p:cNvPicPr>
@@ -16961,7 +17086,7 @@
       </p:pic>
       <p:sp>
         <p:nvSpPr>
-          <p:cNvPr id="15" name="Text 11"/>
+          <p:cNvPr id="18" name="Text 14"/>
           <p:cNvSpPr/>
           <p:nvPr/>
         </p:nvSpPr>
@@ -17000,7 +17125,7 @@
       </p:sp>
       <p:sp>
         <p:nvSpPr>
-          <p:cNvPr id="16" name="Text 12"/>
+          <p:cNvPr id="19" name="Text 15"/>
           <p:cNvSpPr/>
           <p:nvPr/>
         </p:nvSpPr>
@@ -17042,7 +17167,7 @@
       </p:sp>
       <p:sp>
         <p:nvSpPr>
-          <p:cNvPr id="17" name="Shape 13"/>
+          <p:cNvPr id="20" name="Shape 16"/>
           <p:cNvSpPr/>
           <p:nvPr/>
         </p:nvSpPr>
@@ -17071,7 +17196,7 @@
       </p:sp>
       <p:sp>
         <p:nvSpPr>
-          <p:cNvPr id="18" name="Shape 14"/>
+          <p:cNvPr id="21" name="Shape 17"/>
           <p:cNvSpPr/>
           <p:nvPr/>
         </p:nvSpPr>
@@ -17084,7 +17209,7 @@
             <a:avLst/>
           </a:prstGeom>
           <a:solidFill>
-            <a:srgbClr val="EB6834">
+            <a:srgbClr val="5B6480">
               <a:alpha val="12000"/>
             </a:srgbClr>
           </a:solidFill>
@@ -17093,7 +17218,7 @@
       </p:sp>
       <p:sp>
         <p:nvSpPr>
-          <p:cNvPr id="19" name="Shape 15"/>
+          <p:cNvPr id="22" name="Shape 18"/>
           <p:cNvSpPr/>
           <p:nvPr/>
         </p:nvSpPr>
@@ -17106,7 +17231,7 @@
             <a:avLst/>
           </a:prstGeom>
           <a:solidFill>
-            <a:srgbClr val="EB6834">
+            <a:srgbClr val="5B6480">
               <a:alpha val="22000"/>
             </a:srgbClr>
           </a:solidFill>
@@ -17115,7 +17240,7 @@
       </p:sp>
       <p:sp>
         <p:nvSpPr>
-          <p:cNvPr id="20" name="Shape 16"/>
+          <p:cNvPr id="23" name="Shape 19"/>
           <p:cNvSpPr/>
           <p:nvPr/>
         </p:nvSpPr>
@@ -17128,11 +17253,11 @@
             <a:avLst/>
           </a:prstGeom>
           <a:solidFill>
-            <a:srgbClr val="EB6834"/>
+            <a:srgbClr val="5B6480"/>
           </a:solidFill>
           <a:ln w="9525">
             <a:solidFill>
-              <a:srgbClr val="EB6834"/>
+              <a:srgbClr val="5B6480"/>
             </a:solidFill>
             <a:prstDash val="solid"/>
           </a:ln>
@@ -17140,7 +17265,7 @@
       </p:sp>
       <p:pic>
         <p:nvPicPr>
-          <p:cNvPr id="21" name="Image 2" descr="preencoded.png">    </p:cNvPr>
+          <p:cNvPr id="24" name="Image 2" descr="preencoded.png">    </p:cNvPr>
           <p:cNvPicPr>
             <a:picLocks noChangeAspect="1"/>
           </p:cNvPicPr>
@@ -17164,7 +17289,7 @@
       </p:pic>
       <p:sp>
         <p:nvSpPr>
-          <p:cNvPr id="22" name="Text 17"/>
+          <p:cNvPr id="25" name="Text 20"/>
           <p:cNvSpPr/>
           <p:nvPr/>
         </p:nvSpPr>
@@ -17203,7 +17328,7 @@
       </p:sp>
       <p:sp>
         <p:nvSpPr>
-          <p:cNvPr id="23" name="Text 18"/>
+          <p:cNvPr id="26" name="Text 21"/>
           <p:cNvSpPr/>
           <p:nvPr/>
         </p:nvSpPr>
@@ -17245,7 +17370,7 @@
       </p:sp>
       <p:sp>
         <p:nvSpPr>
-          <p:cNvPr id="24" name="Shape 19"/>
+          <p:cNvPr id="27" name="Shape 22"/>
           <p:cNvSpPr/>
           <p:nvPr/>
         </p:nvSpPr>
@@ -17274,7 +17399,7 @@
       </p:sp>
       <p:sp>
         <p:nvSpPr>
-          <p:cNvPr id="25" name="Text 20"/>
+          <p:cNvPr id="28" name="Text 23"/>
           <p:cNvSpPr/>
           <p:nvPr/>
         </p:nvSpPr>
@@ -17297,7 +17422,7 @@
               <a:buNone/>
             </a:pPr>
             <a:r>
-              <a:rPr lang="en-US" sz="1350" dirty="0">
+              <a:rPr lang="en-US" sz="1300" dirty="0">
                 <a:solidFill>
                   <a:srgbClr val="AFC9EE"/>
                 </a:solidFill>
@@ -17305,15 +17430,15 @@
                 <a:ea typeface="Yu Gothic" pitchFamily="34" charset="-122"/>
                 <a:cs typeface="Yu Gothic" pitchFamily="34" charset="-120"/>
               </a:rPr>
-              <a:t>小さな共同体における「救済者への依存」と、国家規模における「権力の集中」は構造的に同じである。この実験は、社会全体のレジリエンスを問う試みである。</a:t>
-            </a:r>
-            <a:endParaRPr lang="en-US" sz="1350" dirty="0"/>
-          </a:p>
-        </p:txBody>
-      </p:sp>
-      <p:sp>
-        <p:nvSpPr>
-          <p:cNvPr id="26" name="Text 21"/>
+              <a:t>「小さな共同体の依存と、大きな組織の権力集中は似た形をしているのではないか」という着想から始めた。本実験が観測したのは4体の村のみで、都市や国のデータは扱っていない。</a:t>
+            </a:r>
+            <a:endParaRPr lang="en-US" sz="1300" dirty="0"/>
+          </a:p>
+        </p:txBody>
+      </p:sp>
+      <p:sp>
+        <p:nvSpPr>
+          <p:cNvPr id="29" name="Text 24"/>
           <p:cNvSpPr/>
           <p:nvPr/>
         </p:nvSpPr>
@@ -17352,7 +17477,7 @@
       </p:sp>
       <p:sp>
         <p:nvSpPr>
-          <p:cNvPr id="27" name="Text 22"/>
+          <p:cNvPr id="30" name="Text 25"/>
           <p:cNvSpPr/>
           <p:nvPr/>
         </p:nvSpPr>
@@ -17454,7 +17579,7 @@
                 <a:ea typeface="Yu Gothic" pitchFamily="34" charset="-122"/>
                 <a:cs typeface="Yu Gothic" pitchFamily="34" charset="-120"/>
               </a:rPr>
-              <a:t>救済者×ガバナンスに戻すと</a:t>
+              <a:t>救済者×ガバナンスに戻すと（ここからは仮説）</a:t>
             </a:r>
             <a:endParaRPr lang="en-US" sz="3000" dirty="0"/>
           </a:p>
@@ -17493,7 +17618,7 @@
                 <a:ea typeface="Yu Gothic" pitchFamily="34" charset="-122"/>
                 <a:cs typeface="Yu Gothic" pitchFamily="34" charset="-120"/>
               </a:rPr>
-              <a:t>同じ処方箋が、どの集団にも同じように効くわけではない。</a:t>
+              <a:t>観測された2条件の違いを、現実の集団に当てはめて考えたらどうなるか。</a:t>
             </a:r>
             <a:endParaRPr lang="en-US" sz="1400" dirty="0"/>
           </a:p>
@@ -17502,6 +17627,72 @@
       <p:sp>
         <p:nvSpPr>
           <p:cNvPr id="4" name="Shape 2"/>
+          <p:cNvSpPr/>
+          <p:nvPr/>
+        </p:nvSpPr>
+        <p:spPr>
+          <a:xfrm>
+            <a:off x="9814255" y="457200"/>
+            <a:ext cx="1828800" cy="365760"/>
+          </a:xfrm>
+          <a:prstGeom prst="roundRect">
+            <a:avLst>
+              <a:gd name="adj" fmla="val 50000"/>
+            </a:avLst>
+          </a:prstGeom>
+          <a:solidFill>
+            <a:srgbClr val="1C2C4A"/>
+          </a:solidFill>
+          <a:ln w="9525">
+            <a:solidFill>
+              <a:srgbClr val="5A8FD6"/>
+            </a:solidFill>
+            <a:prstDash val="solid"/>
+          </a:ln>
+        </p:spPr>
+      </p:sp>
+      <p:sp>
+        <p:nvSpPr>
+          <p:cNvPr id="5" name="Text 3"/>
+          <p:cNvSpPr/>
+          <p:nvPr/>
+        </p:nvSpPr>
+        <p:spPr>
+          <a:xfrm>
+            <a:off x="9814255" y="457200"/>
+            <a:ext cx="1828800" cy="365760"/>
+          </a:xfrm>
+          <a:prstGeom prst="rect">
+            <a:avLst/>
+          </a:prstGeom>
+          <a:noFill/>
+          <a:ln/>
+        </p:spPr>
+        <p:txBody>
+          <a:bodyPr wrap="square" lIns="0" tIns="0" rIns="0" bIns="0" rtlCol="0" anchor="ctr"/>
+          <a:lstStyle/>
+          <a:p>
+            <a:pPr algn="ctr" indent="0" marL="0">
+              <a:buNone/>
+            </a:pPr>
+            <a:r>
+              <a:rPr lang="en-US" sz="1000" dirty="0">
+                <a:solidFill>
+                  <a:srgbClr val="5A8FD6"/>
+                </a:solidFill>
+                <a:latin typeface="Yu Gothic" pitchFamily="34" charset="0"/>
+                <a:ea typeface="Yu Gothic" pitchFamily="34" charset="-122"/>
+                <a:cs typeface="Yu Gothic" pitchFamily="34" charset="-120"/>
+              </a:rPr>
+              <a:t>仮説（未検証）</a:t>
+            </a:r>
+            <a:endParaRPr lang="en-US" sz="1000" dirty="0"/>
+          </a:p>
+        </p:txBody>
+      </p:sp>
+      <p:sp>
+        <p:nvSpPr>
+          <p:cNvPr id="6" name="Shape 4"/>
           <p:cNvSpPr/>
           <p:nvPr/>
         </p:nvSpPr>
@@ -17530,7 +17721,7 @@
       </p:sp>
       <p:sp>
         <p:nvSpPr>
-          <p:cNvPr id="5" name="Shape 3"/>
+          <p:cNvPr id="7" name="Shape 5"/>
           <p:cNvSpPr/>
           <p:nvPr/>
         </p:nvSpPr>
@@ -17555,7 +17746,7 @@
       </p:sp>
       <p:pic>
         <p:nvPicPr>
-          <p:cNvPr id="6" name="Image 0" descr="preencoded.png">    </p:cNvPr>
+          <p:cNvPr id="8" name="Image 0" descr="preencoded.png">    </p:cNvPr>
           <p:cNvPicPr>
             <a:picLocks noChangeAspect="1"/>
           </p:cNvPicPr>
@@ -17579,7 +17770,7 @@
       </p:pic>
       <p:sp>
         <p:nvSpPr>
-          <p:cNvPr id="7" name="Text 4"/>
+          <p:cNvPr id="9" name="Text 6"/>
           <p:cNvSpPr/>
           <p:nvPr/>
         </p:nvSpPr>
@@ -17610,7 +17801,7 @@
                 <a:ea typeface="Yu Gothic" pitchFamily="34" charset="-122"/>
                 <a:cs typeface="Yu Gothic" pitchFamily="34" charset="-120"/>
               </a:rPr>
-              <a:t>波及が強い集団</a:t>
+              <a:t>波及が強い集団だとしたら</a:t>
             </a:r>
             <a:endParaRPr lang="en-US" sz="1500" dirty="0"/>
           </a:p>
@@ -17618,7 +17809,7 @@
       </p:sp>
       <p:sp>
         <p:nvSpPr>
-          <p:cNvPr id="8" name="Text 5"/>
+          <p:cNvPr id="10" name="Text 7"/>
           <p:cNvSpPr/>
           <p:nvPr/>
         </p:nvSpPr>
@@ -17657,7 +17848,7 @@
       </p:sp>
       <p:sp>
         <p:nvSpPr>
-          <p:cNvPr id="9" name="Shape 6"/>
+          <p:cNvPr id="11" name="Shape 8"/>
           <p:cNvSpPr/>
           <p:nvPr/>
         </p:nvSpPr>
@@ -17677,7 +17868,7 @@
       </p:sp>
       <p:sp>
         <p:nvSpPr>
-          <p:cNvPr id="10" name="Text 7"/>
+          <p:cNvPr id="12" name="Text 9"/>
           <p:cNvSpPr/>
           <p:nvPr/>
         </p:nvSpPr>
@@ -17711,7 +17902,7 @@
                 <a:ea typeface="Yu Gothic" pitchFamily="34" charset="-122"/>
                 <a:cs typeface="Yu Gothic" pitchFamily="34" charset="-120"/>
               </a:rPr>
-              <a:t>救済者への一点集中には構造的な合理性がある</a:t>
+              <a:t>救済者への一点集中に合理性が生じうる</a:t>
             </a:r>
             <a:endParaRPr lang="en-US" sz="1150" dirty="0"/>
           </a:p>
@@ -17719,7 +17910,7 @@
       </p:sp>
       <p:sp>
         <p:nvSpPr>
-          <p:cNvPr id="11" name="Shape 8"/>
+          <p:cNvPr id="13" name="Shape 10"/>
           <p:cNvSpPr/>
           <p:nvPr/>
         </p:nvSpPr>
@@ -17739,7 +17930,7 @@
       </p:sp>
       <p:sp>
         <p:nvSpPr>
-          <p:cNvPr id="12" name="Text 9"/>
+          <p:cNvPr id="14" name="Text 11"/>
           <p:cNvSpPr/>
           <p:nvPr/>
         </p:nvSpPr>
@@ -17773,7 +17964,7 @@
                 <a:ea typeface="Yu Gothic" pitchFamily="34" charset="-122"/>
                 <a:cs typeface="Yu Gothic" pitchFamily="34" charset="-120"/>
               </a:rPr>
-              <a:t>「誰か一人を育てる／支える」が実際に最も効く打ち手になる</a:t>
+              <a:t>「誰か一人を育てる／支える」が効く打ち手になりうる</a:t>
             </a:r>
             <a:endParaRPr lang="en-US" sz="1150" dirty="0"/>
           </a:p>
@@ -17781,7 +17972,7 @@
       </p:sp>
       <p:sp>
         <p:nvSpPr>
-          <p:cNvPr id="13" name="Shape 10"/>
+          <p:cNvPr id="15" name="Shape 12"/>
           <p:cNvSpPr/>
           <p:nvPr/>
         </p:nvSpPr>
@@ -17801,7 +17992,7 @@
       </p:sp>
       <p:sp>
         <p:nvSpPr>
-          <p:cNvPr id="14" name="Text 11"/>
+          <p:cNvPr id="16" name="Text 13"/>
           <p:cNvSpPr/>
           <p:nvPr/>
         </p:nvSpPr>
@@ -17835,7 +18026,7 @@
                 <a:ea typeface="Yu Gothic" pitchFamily="34" charset="-122"/>
                 <a:cs typeface="Yu Gothic" pitchFamily="34" charset="-120"/>
               </a:rPr>
-              <a:t>依存は怠慢ではなく、その集団で合理的だから起きている</a:t>
+              <a:t>依存は怠慢とは限らず、割に合う選択かもしれない</a:t>
             </a:r>
             <a:endParaRPr lang="en-US" sz="1150" dirty="0"/>
           </a:p>
@@ -17843,7 +18034,7 @@
       </p:sp>
       <p:sp>
         <p:nvSpPr>
-          <p:cNvPr id="15" name="Shape 12"/>
+          <p:cNvPr id="17" name="Shape 14"/>
           <p:cNvSpPr/>
           <p:nvPr/>
         </p:nvSpPr>
@@ -17872,7 +18063,7 @@
       </p:sp>
       <p:sp>
         <p:nvSpPr>
-          <p:cNvPr id="16" name="Shape 13"/>
+          <p:cNvPr id="18" name="Shape 15"/>
           <p:cNvSpPr/>
           <p:nvPr/>
         </p:nvSpPr>
@@ -17897,7 +18088,7 @@
       </p:sp>
       <p:pic>
         <p:nvPicPr>
-          <p:cNvPr id="17" name="Image 1" descr="preencoded.png">    </p:cNvPr>
+          <p:cNvPr id="19" name="Image 1" descr="preencoded.png">    </p:cNvPr>
           <p:cNvPicPr>
             <a:picLocks noChangeAspect="1"/>
           </p:cNvPicPr>
@@ -17921,7 +18112,7 @@
       </p:pic>
       <p:sp>
         <p:nvSpPr>
-          <p:cNvPr id="18" name="Text 14"/>
+          <p:cNvPr id="20" name="Text 16"/>
           <p:cNvSpPr/>
           <p:nvPr/>
         </p:nvSpPr>
@@ -17952,7 +18143,7 @@
                 <a:ea typeface="Yu Gothic" pitchFamily="34" charset="-122"/>
                 <a:cs typeface="Yu Gothic" pitchFamily="34" charset="-120"/>
               </a:rPr>
-              <a:t>判断が独立した集団</a:t>
+              <a:t>判断が独立した集団だとしたら</a:t>
             </a:r>
             <a:endParaRPr lang="en-US" sz="1500" dirty="0"/>
           </a:p>
@@ -17960,7 +18151,7 @@
       </p:sp>
       <p:sp>
         <p:nvSpPr>
-          <p:cNvPr id="19" name="Text 15"/>
+          <p:cNvPr id="21" name="Text 17"/>
           <p:cNvSpPr/>
           <p:nvPr/>
         </p:nvSpPr>
@@ -17999,7 +18190,7 @@
       </p:sp>
       <p:sp>
         <p:nvSpPr>
-          <p:cNvPr id="20" name="Shape 16"/>
+          <p:cNvPr id="22" name="Shape 18"/>
           <p:cNvSpPr/>
           <p:nvPr/>
         </p:nvSpPr>
@@ -18019,7 +18210,7 @@
       </p:sp>
       <p:sp>
         <p:nvSpPr>
-          <p:cNvPr id="21" name="Text 17"/>
+          <p:cNvPr id="23" name="Text 19"/>
           <p:cNvSpPr/>
           <p:nvPr/>
         </p:nvSpPr>
@@ -18053,7 +18244,7 @@
                 <a:ea typeface="Yu Gothic" pitchFamily="34" charset="-122"/>
                 <a:cs typeface="Yu Gothic" pitchFamily="34" charset="-120"/>
               </a:rPr>
-              <a:t>キーパーソンを立てる施策が通用しない</a:t>
+              <a:t>キーパーソンを立てる施策が効きにくい</a:t>
             </a:r>
             <a:endParaRPr lang="en-US" sz="1150" dirty="0"/>
           </a:p>
@@ -18061,7 +18252,7 @@
       </p:sp>
       <p:sp>
         <p:nvSpPr>
-          <p:cNvPr id="22" name="Shape 18"/>
+          <p:cNvPr id="24" name="Shape 20"/>
           <p:cNvSpPr/>
           <p:nvPr/>
         </p:nvSpPr>
@@ -18081,7 +18272,7 @@
       </p:sp>
       <p:sp>
         <p:nvSpPr>
-          <p:cNvPr id="23" name="Text 19"/>
+          <p:cNvPr id="25" name="Text 21"/>
           <p:cNvSpPr/>
           <p:nvPr/>
         </p:nvSpPr>
@@ -18115,7 +18306,7 @@
                 <a:ea typeface="Yu Gothic" pitchFamily="34" charset="-122"/>
                 <a:cs typeface="Yu Gothic" pitchFamily="34" charset="-120"/>
               </a:rPr>
-              <a:t>複数の参加経路や意思決定の仕組みが要る</a:t>
+              <a:t>複数の参加経路や意思決定の仕組みが要りそう</a:t>
             </a:r>
             <a:endParaRPr lang="en-US" sz="1150" dirty="0"/>
           </a:p>
@@ -18123,7 +18314,7 @@
       </p:sp>
       <p:sp>
         <p:nvSpPr>
-          <p:cNvPr id="24" name="Shape 20"/>
+          <p:cNvPr id="26" name="Shape 22"/>
           <p:cNvSpPr/>
           <p:nvPr/>
         </p:nvSpPr>
@@ -18143,7 +18334,7 @@
       </p:sp>
       <p:sp>
         <p:nvSpPr>
-          <p:cNvPr id="25" name="Text 21"/>
+          <p:cNvPr id="27" name="Text 23"/>
           <p:cNvSpPr/>
           <p:nvPr/>
         </p:nvSpPr>
@@ -18177,7 +18368,7 @@
                 <a:ea typeface="Yu Gothic" pitchFamily="34" charset="-122"/>
                 <a:cs typeface="Yu Gothic" pitchFamily="34" charset="-120"/>
               </a:rPr>
-              <a:t>変えるべきは人ではなく、制度と場のほう</a:t>
+              <a:t>変える対象は人より、制度と場のほうかもしれない</a:t>
             </a:r>
             <a:endParaRPr lang="en-US" sz="1150" dirty="0"/>
           </a:p>
@@ -18185,7 +18376,7 @@
       </p:sp>
       <p:sp>
         <p:nvSpPr>
-          <p:cNvPr id="26" name="Shape 22"/>
+          <p:cNvPr id="28" name="Shape 24"/>
           <p:cNvSpPr/>
           <p:nvPr/>
         </p:nvSpPr>
@@ -18214,7 +18405,7 @@
       </p:sp>
       <p:sp>
         <p:nvSpPr>
-          <p:cNvPr id="27" name="Text 23"/>
+          <p:cNvPr id="29" name="Text 25"/>
           <p:cNvSpPr/>
           <p:nvPr/>
         </p:nvSpPr>
@@ -18237,7 +18428,7 @@
               <a:buNone/>
             </a:pPr>
             <a:r>
-              <a:rPr lang="en-US" sz="1350" b="1" dirty="0">
+              <a:rPr lang="en-US" sz="1300" b="1" dirty="0">
                 <a:solidFill>
                   <a:srgbClr val="F4C878"/>
                 </a:solidFill>
@@ -18245,15 +18436,15 @@
                 <a:ea typeface="Yu Gothic" pitchFamily="34" charset="-122"/>
                 <a:cs typeface="Yu Gothic" pitchFamily="34" charset="-120"/>
               </a:rPr>
-              <a:t>「救済者に依存するな」「権限を分散せよ」は、集団のタイプを見ないまま打つと、効く集団とまったく効かない集団に分かれる。</a:t>
-            </a:r>
-            <a:endParaRPr lang="en-US" sz="1350" dirty="0"/>
-          </a:p>
-        </p:txBody>
-      </p:sp>
-      <p:sp>
-        <p:nvSpPr>
-          <p:cNvPr id="28" name="Text 24"/>
+              <a:t>「救済者に依存するな」「権限を分散せよ」という処方箋も、集団によって効き方が変わりうる。この見立てを確かめるには、波及の強さが違う集団を並べて同じ介入を試す必要がある。</a:t>
+            </a:r>
+            <a:endParaRPr lang="en-US" sz="1300" dirty="0"/>
+          </a:p>
+        </p:txBody>
+      </p:sp>
+      <p:sp>
+        <p:nvSpPr>
+          <p:cNvPr id="30" name="Text 26"/>
           <p:cNvSpPr/>
           <p:nvPr/>
         </p:nvSpPr>
@@ -18292,7 +18483,7 @@
       </p:sp>
       <p:sp>
         <p:nvSpPr>
-          <p:cNvPr id="29" name="Text 25"/>
+          <p:cNvPr id="31" name="Text 27"/>
           <p:cNvSpPr/>
           <p:nvPr/>
         </p:nvSpPr>

--- a/docs/Beyond_the_Savior.pptx
+++ b/docs/Beyond_the_Savior.pptx
@@ -4189,7 +4189,7 @@
                 <a:ea typeface="Yu Gothic" pitchFamily="34" charset="-122"/>
                 <a:cs typeface="Yu Gothic" pitchFamily="34" charset="-120"/>
               </a:rPr>
-              <a:t>本人に尋ねても本心は出ない。だから自己申告は一切取らず、行動の痕跡だけを評価した。</a:t>
+              <a:t>自己申告だけでは状態を捉えきれないことがある。そこで自己申告は取らず、行動の痕跡を評価した。</a:t>
             </a:r>
             <a:endParaRPr lang="en-US" sz="1400" dirty="0"/>
           </a:p>

--- a/docs/Beyond_the_Savior.pptx
+++ b/docs/Beyond_the_Savior.pptx
@@ -5501,7 +5501,7 @@
                 <a:ea typeface="Yu Gothic" pitchFamily="34" charset="-122"/>
                 <a:cs typeface="Yu Gothic" pitchFamily="34" charset="-120"/>
               </a:rPr>
-              <a:t>条件Bの標準偏差</a:t>
+              <a:t>条件Bの標準偏差（3指標）</a:t>
             </a:r>
             <a:endParaRPr lang="en-US" sz="1200" dirty="0"/>
           </a:p>
@@ -5543,7 +5543,7 @@
                 <a:ea typeface="Yu Gothic" pitchFamily="34" charset="-122"/>
                 <a:cs typeface="Yu Gothic" pitchFamily="34" charset="-120"/>
               </a:rPr>
-              <a:t>5回とも同じ点数。依存側は結果がぶれなかった</a:t>
+              <a:t>負荷・自律度・依存度は5回とも同じ点数だった</a:t>
             </a:r>
             <a:endParaRPr lang="en-US" sz="1000" dirty="0"/>
           </a:p>
@@ -14626,7 +14626,7 @@
                 <a:ea typeface="Yu Gothic" pitchFamily="34" charset="-122"/>
                 <a:cs typeface="Yu Gothic" pitchFamily="34" charset="-120"/>
               </a:rPr>
-              <a:t>構造は頑健で、テコは脆かった</a:t>
+              <a:t>分かれる現象は残り、テコは移らなかった</a:t>
             </a:r>
             <a:endParaRPr lang="en-US" sz="1400" dirty="0"/>
           </a:p>
@@ -14668,7 +14668,7 @@
                 <a:ea typeface="Yu Gothic" pitchFamily="34" charset="-122"/>
                 <a:cs typeface="Yu Gothic" pitchFamily="34" charset="-120"/>
               </a:rPr>
-              <a:t>村が2つの状態に分かれること自体は別モデルでも再現した。しかし「何を変えれば動くか」は再現せず、モデル依存だった。</a:t>
+              <a:t>村が2つの状態に分かれること自体は別モデルでも観測された。しかし「何を変えれば動くか」は再現せず、モデル依存の可能性が高い。</a:t>
             </a:r>
             <a:endParaRPr lang="en-US" sz="1150" dirty="0"/>
           </a:p>

--- a/docs/Beyond_the_Savior.pptx
+++ b/docs/Beyond_the_Savior.pptx
@@ -7794,7 +7794,7 @@
                 <a:ea typeface="Yu Gothic" pitchFamily="34" charset="-122"/>
                 <a:cs typeface="Yu Gothic" pitchFamily="34" charset="-120"/>
               </a:rPr>
-              <a:t>世話好きな住民の「許可を求める度合い」だけを5段階に変え、各5回ずつ計25回実行した。</a:t>
+              <a:t>世話好きな住民の「許可を求める度合い」だけを5段階に変え、5水準×各5回＝計25回ぶんを分析した。L1の5回は既存の条件Cを流用しており、新規実行は20回。</a:t>
             </a:r>
             <a:endParaRPr lang="en-US" sz="1400" dirty="0"/>
           </a:p>
@@ -14149,7 +14149,7 @@
                 <a:ea typeface="Yu Gothic" pitchFamily="34" charset="-122"/>
                 <a:cs typeface="Yu Gothic" pitchFamily="34" charset="-120"/>
               </a:rPr>
-              <a:t>依存の代償は、危機の前から発生している</a:t>
+              <a:t>高い依存度は危機の前から観測された</a:t>
             </a:r>
             <a:endParaRPr lang="en-US" sz="1400" dirty="0"/>
           </a:p>
@@ -14191,7 +14191,7 @@
                 <a:ea typeface="Yu Gothic" pitchFamily="34" charset="-122"/>
                 <a:cs typeface="Yu Gothic" pitchFamily="34" charset="-120"/>
               </a:rPr>
-              <a:t>危機の起きないA条件でも救済者依存度は88でB条件（90）とほぼ同じ。壊れるのは危機の瞬間ではなく、運用設計の時点で決まっている。</a:t>
+              <a:t>危機の起きないA条件でも救済者依存度は88でB条件（90）とほぼ同じ。少なくともこの条件では、高い依存度は危機発生前から観測された。</a:t>
             </a:r>
             <a:endParaRPr lang="en-US" sz="1150" dirty="0"/>
           </a:p>
@@ -14350,7 +14350,7 @@
                 <a:ea typeface="Yu Gothic" pitchFamily="34" charset="-122"/>
                 <a:cs typeface="Yu Gothic" pitchFamily="34" charset="-120"/>
               </a:rPr>
-              <a:t>条件A・Bの標準偏差はほぼ0で5回とも同じ状態に落ちた。一方Cは±20〜26。この範囲では悪い状態のほうがばらつかなかった。</a:t>
+              <a:t>条件AのSDは±4.5〜6.7、条件Bは5指標中3指標でSD=0。一方Cは±20〜26で、この範囲では依存側のばらつきが小さかった。</a:t>
             </a:r>
             <a:endParaRPr lang="en-US" sz="1150" dirty="0"/>
           </a:p>
@@ -24407,7 +24407,7 @@
         </p:nvSpPr>
         <p:spPr>
           <a:xfrm>
-            <a:off x="914400" y="3081528"/>
+            <a:off x="914400" y="3017520"/>
             <a:ext cx="128016" cy="128016"/>
           </a:xfrm>
           <a:prstGeom prst="ellipse">
@@ -24427,8 +24427,47 @@
         </p:nvSpPr>
         <p:spPr>
           <a:xfrm>
-            <a:off x="1188720" y="2971800"/>
-            <a:ext cx="4480560" cy="640080"/>
+            <a:off x="1188720" y="2889504"/>
+            <a:ext cx="4480560" cy="274320"/>
+          </a:xfrm>
+          <a:prstGeom prst="rect">
+            <a:avLst/>
+          </a:prstGeom>
+          <a:noFill/>
+          <a:ln/>
+        </p:spPr>
+        <p:txBody>
+          <a:bodyPr wrap="square" lIns="0" tIns="0" rIns="0" bIns="0" rtlCol="0" anchor="ctr"/>
+          <a:lstStyle/>
+          <a:p>
+            <a:pPr indent="0" marL="0">
+              <a:buNone/>
+            </a:pPr>
+            <a:r>
+              <a:rPr lang="en-US" sz="1300" b="1" dirty="0">
+                <a:solidFill>
+                  <a:srgbClr val="FFFFFF"/>
+                </a:solidFill>
+                <a:latin typeface="Yu Gothic" pitchFamily="34" charset="0"/>
+                <a:ea typeface="Yu Gothic" pitchFamily="34" charset="-122"/>
+                <a:cs typeface="Yu Gothic" pitchFamily="34" charset="-120"/>
+              </a:rPr>
+              <a:t>救済者の負荷メーター</a:t>
+            </a:r>
+            <a:endParaRPr lang="en-US" sz="1300" dirty="0"/>
+          </a:p>
+        </p:txBody>
+      </p:sp>
+      <p:sp>
+        <p:nvSpPr>
+          <p:cNvPr id="9" name="Text 6"/>
+          <p:cNvSpPr/>
+          <p:nvPr/>
+        </p:nvSpPr>
+        <p:spPr>
+          <a:xfrm>
+            <a:off x="1188720" y="3182112"/>
+            <a:ext cx="4526280" cy="777240"/>
           </a:xfrm>
           <a:prstGeom prst="rect">
             <a:avLst/>
@@ -24442,12 +24481,12 @@
           <a:p>
             <a:pPr indent="0" marL="0">
               <a:lnSpc>
-                <a:spcPct val="125000"/>
+                <a:spcPct val="120000"/>
               </a:lnSpc>
               <a:buNone/>
             </a:pPr>
             <a:r>
-              <a:rPr lang="en-US" sz="1350" dirty="0">
+              <a:rPr lang="en-US" sz="1050" dirty="0">
                 <a:solidFill>
                   <a:srgbClr val="AFC9EE"/>
                 </a:solidFill>
@@ -24455,21 +24494,21 @@
                 <a:ea typeface="Yu Gothic" pitchFamily="34" charset="-122"/>
                 <a:cs typeface="Yu Gothic" pitchFamily="34" charset="-120"/>
               </a:rPr>
-              <a:t>救済者の負荷メーター（相談の集中度、0〜100%）</a:t>
-            </a:r>
-            <a:endParaRPr lang="en-US" sz="1350" dirty="0"/>
-          </a:p>
-        </p:txBody>
-      </p:sp>
-      <p:sp>
-        <p:nvSpPr>
-          <p:cNvPr id="9" name="Shape 6"/>
-          <p:cNvSpPr/>
-          <p:nvPr/>
-        </p:nvSpPr>
-        <p:spPr>
-          <a:xfrm>
-            <a:off x="914400" y="3950208"/>
+              <a:t>相談や判断が救済者に集中した程度を、会話ログの行動シグナルに基づきLLM審査役が0〜100で評価</a:t>
+            </a:r>
+            <a:endParaRPr lang="en-US" sz="1050" dirty="0"/>
+          </a:p>
+        </p:txBody>
+      </p:sp>
+      <p:sp>
+        <p:nvSpPr>
+          <p:cNvPr id="10" name="Shape 7"/>
+          <p:cNvSpPr/>
+          <p:nvPr/>
+        </p:nvSpPr>
+        <p:spPr>
+          <a:xfrm>
+            <a:off x="914400" y="4187952"/>
             <a:ext cx="128016" cy="128016"/>
           </a:xfrm>
           <a:prstGeom prst="ellipse">
@@ -24483,14 +24522,53 @@
       </p:sp>
       <p:sp>
         <p:nvSpPr>
-          <p:cNvPr id="10" name="Text 7"/>
-          <p:cNvSpPr/>
-          <p:nvPr/>
-        </p:nvSpPr>
-        <p:spPr>
-          <a:xfrm>
-            <a:off x="1188720" y="3840480"/>
-            <a:ext cx="4480560" cy="640080"/>
+          <p:cNvPr id="11" name="Text 8"/>
+          <p:cNvSpPr/>
+          <p:nvPr/>
+        </p:nvSpPr>
+        <p:spPr>
+          <a:xfrm>
+            <a:off x="1188720" y="4059936"/>
+            <a:ext cx="4480560" cy="274320"/>
+          </a:xfrm>
+          <a:prstGeom prst="rect">
+            <a:avLst/>
+          </a:prstGeom>
+          <a:noFill/>
+          <a:ln/>
+        </p:spPr>
+        <p:txBody>
+          <a:bodyPr wrap="square" lIns="0" tIns="0" rIns="0" bIns="0" rtlCol="0" anchor="ctr"/>
+          <a:lstStyle/>
+          <a:p>
+            <a:pPr indent="0" marL="0">
+              <a:buNone/>
+            </a:pPr>
+            <a:r>
+              <a:rPr lang="en-US" sz="1300" b="1" dirty="0">
+                <a:solidFill>
+                  <a:srgbClr val="FFFFFF"/>
+                </a:solidFill>
+                <a:latin typeface="Yu Gothic" pitchFamily="34" charset="0"/>
+                <a:ea typeface="Yu Gothic" pitchFamily="34" charset="-122"/>
+                <a:cs typeface="Yu Gothic" pitchFamily="34" charset="-120"/>
+              </a:rPr>
+              <a:t>村の自律度</a:t>
+            </a:r>
+            <a:endParaRPr lang="en-US" sz="1300" dirty="0"/>
+          </a:p>
+        </p:txBody>
+      </p:sp>
+      <p:sp>
+        <p:nvSpPr>
+          <p:cNvPr id="12" name="Text 9"/>
+          <p:cNvSpPr/>
+          <p:nvPr/>
+        </p:nvSpPr>
+        <p:spPr>
+          <a:xfrm>
+            <a:off x="1188720" y="4352544"/>
+            <a:ext cx="4526280" cy="777240"/>
           </a:xfrm>
           <a:prstGeom prst="rect">
             <a:avLst/>
@@ -24504,12 +24582,12 @@
           <a:p>
             <a:pPr indent="0" marL="0">
               <a:lnSpc>
-                <a:spcPct val="125000"/>
+                <a:spcPct val="120000"/>
               </a:lnSpc>
               <a:buNone/>
             </a:pPr>
             <a:r>
-              <a:rPr lang="en-US" sz="1350" dirty="0">
+              <a:rPr lang="en-US" sz="1050" dirty="0">
                 <a:solidFill>
                   <a:srgbClr val="AFC9EE"/>
                 </a:solidFill>
@@ -24517,15 +24595,15 @@
                 <a:ea typeface="Yu Gothic" pitchFamily="34" charset="-122"/>
                 <a:cs typeface="Yu Gothic" pitchFamily="34" charset="-120"/>
               </a:rPr>
-              <a:t>村の自律度スコア（救済者以外が自力で解決できた割合）</a:t>
-            </a:r>
-            <a:endParaRPr lang="en-US" sz="1350" dirty="0"/>
-          </a:p>
-        </p:txBody>
-      </p:sp>
-      <p:sp>
-        <p:nvSpPr>
-          <p:cNvPr id="11" name="Shape 8"/>
+              <a:t>住民が救済者に頼らず対処できた程度を、会話ログの行動シグナルに基づきLLM審査役が0〜100で評価</a:t>
+            </a:r>
+            <a:endParaRPr lang="en-US" sz="1050" dirty="0"/>
+          </a:p>
+        </p:txBody>
+      </p:sp>
+      <p:sp>
+        <p:nvSpPr>
+          <p:cNvPr id="13" name="Shape 10"/>
           <p:cNvSpPr/>
           <p:nvPr/>
         </p:nvSpPr>
@@ -24554,7 +24632,7 @@
       </p:sp>
       <p:sp>
         <p:nvSpPr>
-          <p:cNvPr id="12" name="Shape 9"/>
+          <p:cNvPr id="14" name="Shape 11"/>
           <p:cNvSpPr/>
           <p:nvPr/>
         </p:nvSpPr>
@@ -24579,7 +24657,7 @@
       </p:sp>
       <p:pic>
         <p:nvPicPr>
-          <p:cNvPr id="13" name="Image 1" descr="preencoded.png">    </p:cNvPr>
+          <p:cNvPr id="15" name="Image 1" descr="preencoded.png">    </p:cNvPr>
           <p:cNvPicPr>
             <a:picLocks noChangeAspect="1"/>
           </p:cNvPicPr>
@@ -24603,7 +24681,7 @@
       </p:pic>
       <p:sp>
         <p:nvSpPr>
-          <p:cNvPr id="14" name="Text 10"/>
+          <p:cNvPr id="16" name="Text 12"/>
           <p:cNvSpPr/>
           <p:nvPr/>
         </p:nvSpPr>
@@ -24665,7 +24743,7 @@
       </p:sp>
       <p:sp>
         <p:nvSpPr>
-          <p:cNvPr id="15" name="Shape 11"/>
+          <p:cNvPr id="17" name="Shape 13"/>
           <p:cNvSpPr/>
           <p:nvPr/>
         </p:nvSpPr>
@@ -24685,7 +24763,7 @@
       </p:sp>
       <p:sp>
         <p:nvSpPr>
-          <p:cNvPr id="16" name="Text 12"/>
+          <p:cNvPr id="18" name="Text 14"/>
           <p:cNvSpPr/>
           <p:nvPr/>
         </p:nvSpPr>
@@ -24724,7 +24802,7 @@
       </p:sp>
       <p:sp>
         <p:nvSpPr>
-          <p:cNvPr id="17" name="Shape 13"/>
+          <p:cNvPr id="19" name="Shape 15"/>
           <p:cNvSpPr/>
           <p:nvPr/>
         </p:nvSpPr>
@@ -24744,7 +24822,7 @@
       </p:sp>
       <p:sp>
         <p:nvSpPr>
-          <p:cNvPr id="18" name="Text 14"/>
+          <p:cNvPr id="20" name="Text 16"/>
           <p:cNvSpPr/>
           <p:nvPr/>
         </p:nvSpPr>
@@ -24783,7 +24861,7 @@
       </p:sp>
       <p:sp>
         <p:nvSpPr>
-          <p:cNvPr id="19" name="Shape 15"/>
+          <p:cNvPr id="21" name="Shape 17"/>
           <p:cNvSpPr/>
           <p:nvPr/>
         </p:nvSpPr>
@@ -24803,7 +24881,7 @@
       </p:sp>
       <p:sp>
         <p:nvSpPr>
-          <p:cNvPr id="20" name="Text 16"/>
+          <p:cNvPr id="22" name="Text 18"/>
           <p:cNvSpPr/>
           <p:nvPr/>
         </p:nvSpPr>
@@ -24842,7 +24920,7 @@
       </p:sp>
       <p:sp>
         <p:nvSpPr>
-          <p:cNvPr id="21" name="Text 17"/>
+          <p:cNvPr id="23" name="Text 19"/>
           <p:cNvSpPr/>
           <p:nvPr/>
         </p:nvSpPr>
@@ -24881,7 +24959,7 @@
       </p:sp>
       <p:sp>
         <p:nvSpPr>
-          <p:cNvPr id="22" name="Text 18"/>
+          <p:cNvPr id="24" name="Text 20"/>
           <p:cNvSpPr/>
           <p:nvPr/>
         </p:nvSpPr>
@@ -24920,7 +24998,7 @@
       </p:sp>
       <p:sp>
         <p:nvSpPr>
-          <p:cNvPr id="23" name="Text 19"/>
+          <p:cNvPr id="25" name="Text 21"/>
           <p:cNvSpPr/>
           <p:nvPr/>
         </p:nvSpPr>
